--- a/documentation/for_collaborators/AnalysisOverview.pptx
+++ b/documentation/for_collaborators/AnalysisOverview.pptx
@@ -5,23 +5,28 @@
     <p:sldMasterId id="2147483648" r:id="rId1"/>
   </p:sldMasterIdLst>
   <p:notesMasterIdLst>
-    <p:notesMasterId r:id="rId13"/>
+    <p:notesMasterId r:id="rId18"/>
   </p:notesMasterIdLst>
   <p:handoutMasterIdLst>
-    <p:handoutMasterId r:id="rId14"/>
+    <p:handoutMasterId r:id="rId19"/>
   </p:handoutMasterIdLst>
   <p:sldIdLst>
     <p:sldId id="256" r:id="rId2"/>
-    <p:sldId id="257" r:id="rId3"/>
-    <p:sldId id="258" r:id="rId4"/>
-    <p:sldId id="259" r:id="rId5"/>
-    <p:sldId id="262" r:id="rId6"/>
-    <p:sldId id="265" r:id="rId7"/>
-    <p:sldId id="266" r:id="rId8"/>
-    <p:sldId id="268" r:id="rId9"/>
-    <p:sldId id="269" r:id="rId10"/>
-    <p:sldId id="271" r:id="rId11"/>
-    <p:sldId id="274" r:id="rId12"/>
+    <p:sldId id="275" r:id="rId3"/>
+    <p:sldId id="257" r:id="rId4"/>
+    <p:sldId id="258" r:id="rId5"/>
+    <p:sldId id="259" r:id="rId6"/>
+    <p:sldId id="262" r:id="rId7"/>
+    <p:sldId id="276" r:id="rId8"/>
+    <p:sldId id="277" r:id="rId9"/>
+    <p:sldId id="278" r:id="rId10"/>
+    <p:sldId id="265" r:id="rId11"/>
+    <p:sldId id="266" r:id="rId12"/>
+    <p:sldId id="268" r:id="rId13"/>
+    <p:sldId id="279" r:id="rId14"/>
+    <p:sldId id="269" r:id="rId15"/>
+    <p:sldId id="271" r:id="rId16"/>
+    <p:sldId id="274" r:id="rId17"/>
   </p:sldIdLst>
   <p:sldSz cx="10080625" cy="5670550"/>
   <p:notesSz cx="7559675" cy="10691813"/>
@@ -126,6 +131,159 @@
     </p:ext>
   </p:extLst>
 </p:presentation>
+</file>
+
+<file path=ppt/authors.xml><?xml version="1.0" encoding="utf-8"?>
+<p188:authorLst xmlns:a="http://schemas.openxmlformats.org/drawingml/2006/main" xmlns:r="http://schemas.openxmlformats.org/officeDocument/2006/relationships" xmlns:p188="http://schemas.microsoft.com/office/powerpoint/2018/8/main">
+  <p188:author id="{5E7478A2-2A14-AA1F-803D-D7D14AC37D3F}" name="Allen, Sam" initials="AS" userId="S::sallen7@bsu.edu::84b735e0-1c32-435c-8b1f-117ab033af2e" providerId="AD"/>
+</p188:authorLst>
+</file>
+
+<file path=ppt/comments/modernComment_106_0.xml><?xml version="1.0" encoding="utf-8"?>
+<p188:cmLst xmlns:a="http://schemas.openxmlformats.org/drawingml/2006/main" xmlns:r="http://schemas.openxmlformats.org/officeDocument/2006/relationships" xmlns:p188="http://schemas.microsoft.com/office/powerpoint/2018/8/main">
+  <p188:cm id="{D2D67EAE-51DB-A94A-83EF-B2390ED1C1DB}" authorId="{5E7478A2-2A14-AA1F-803D-D7D14AC37D3F}" created="2026-06-02T16:46:12.482">
+    <ac:txMkLst xmlns:ac="http://schemas.microsoft.com/office/drawing/2013/main/command">
+      <pc:docMk xmlns:pc="http://schemas.microsoft.com/office/powerpoint/2013/main/command"/>
+      <pc:sldMk xmlns:pc="http://schemas.microsoft.com/office/powerpoint/2013/main/command" cId="0" sldId="262"/>
+      <ac:spMk id="3" creationId="{3F589F92-B484-4E15-0CDC-FFD075A2A74E}"/>
+      <ac:txMk cp="17" len="3">
+        <ac:context len="34" hash="4212311320"/>
+      </ac:txMk>
+    </ac:txMkLst>
+    <p188:pos x="2899601" y="1264200"/>
+    <p188:txBody>
+      <a:bodyPr/>
+      <a:lstStyle/>
+      <a:p>
+        <a:r>
+          <a:rPr lang="en-US"/>
+          <a:t>Might change</a:t>
+        </a:r>
+      </a:p>
+    </p188:txBody>
+  </p188:cm>
+  <p188:cm id="{D478D047-2C09-8F40-8807-B23A4E51D1FA}" authorId="{5E7478A2-2A14-AA1F-803D-D7D14AC37D3F}" created="2026-06-02T17:00:13.459">
+    <ac:deMkLst xmlns:ac="http://schemas.microsoft.com/office/drawing/2013/main/command">
+      <pc:docMk xmlns:pc="http://schemas.microsoft.com/office/powerpoint/2013/main/command"/>
+      <pc:sldMk xmlns:pc="http://schemas.microsoft.com/office/powerpoint/2013/main/command" cId="0" sldId="262"/>
+      <ac:picMk id="5" creationId="{15C94A79-243F-8D40-B5DA-BED8A49E8184}"/>
+    </ac:deMkLst>
+    <p188:txBody>
+      <a:bodyPr/>
+      <a:lstStyle/>
+      <a:p>
+        <a:r>
+          <a:rPr lang="en-US"/>
+          <a:t>Might change</a:t>
+        </a:r>
+      </a:p>
+    </p188:txBody>
+  </p188:cm>
+</p188:cmLst>
+</file>
+
+<file path=ppt/comments/modernComment_109_0.xml><?xml version="1.0" encoding="utf-8"?>
+<p188:cmLst xmlns:a="http://schemas.openxmlformats.org/drawingml/2006/main" xmlns:r="http://schemas.openxmlformats.org/officeDocument/2006/relationships" xmlns:p188="http://schemas.microsoft.com/office/powerpoint/2018/8/main">
+  <p188:cm id="{DC2FF72A-3225-6A43-AC50-04D09A73EC9F}" authorId="{5E7478A2-2A14-AA1F-803D-D7D14AC37D3F}" created="2026-06-02T17:07:18.220">
+    <ac:txMkLst xmlns:ac="http://schemas.microsoft.com/office/drawing/2013/main/command">
+      <pc:docMk xmlns:pc="http://schemas.microsoft.com/office/powerpoint/2013/main/command"/>
+      <pc:sldMk xmlns:pc="http://schemas.microsoft.com/office/powerpoint/2013/main/command" cId="0" sldId="265"/>
+      <ac:spMk id="3" creationId="{C9367797-CD5B-309B-985B-DF6091246510}"/>
+      <ac:txMk cp="301" len="21">
+        <ac:context len="519" hash="4040391054"/>
+      </ac:txMk>
+    </ac:txMkLst>
+    <p188:pos x="2747202" y="2605320"/>
+    <p188:txBody>
+      <a:bodyPr/>
+      <a:lstStyle/>
+      <a:p>
+        <a:r>
+          <a:rPr lang="en-US"/>
+          <a:t>This might change</a:t>
+        </a:r>
+      </a:p>
+    </p188:txBody>
+  </p188:cm>
+</p188:cmLst>
+</file>
+
+<file path=ppt/comments/modernComment_114_8C460B8A.xml><?xml version="1.0" encoding="utf-8"?>
+<p188:cmLst xmlns:a="http://schemas.openxmlformats.org/drawingml/2006/main" xmlns:r="http://schemas.openxmlformats.org/officeDocument/2006/relationships" xmlns:p188="http://schemas.microsoft.com/office/powerpoint/2018/8/main">
+  <p188:cm id="{CA09F901-0B5B-6C44-8513-22617474DFFB}" authorId="{5E7478A2-2A14-AA1F-803D-D7D14AC37D3F}" created="2026-06-02T16:56:28.323">
+    <ac:txMkLst xmlns:ac="http://schemas.microsoft.com/office/drawing/2013/main/command">
+      <pc:docMk xmlns:pc="http://schemas.microsoft.com/office/powerpoint/2013/main/command"/>
+      <pc:sldMk xmlns:pc="http://schemas.microsoft.com/office/powerpoint/2013/main/command" cId="2353400714" sldId="276"/>
+      <ac:spMk id="3" creationId="{5CF707B8-09A9-A28B-36FE-7651ACC03308}"/>
+      <ac:txMk cp="17" len="5">
+        <ac:context len="122" hash="2162704515"/>
+      </ac:txMk>
+    </ac:txMkLst>
+    <p188:pos x="3041841" y="370120"/>
+    <p188:txBody>
+      <a:bodyPr/>
+      <a:lstStyle/>
+      <a:p>
+        <a:r>
+          <a:rPr lang="en-US"/>
+          <a:t>Might change</a:t>
+        </a:r>
+      </a:p>
+    </p188:txBody>
+  </p188:cm>
+</p188:cmLst>
+</file>
+
+<file path=ppt/comments/modernComment_115_BCAF1D66.xml><?xml version="1.0" encoding="utf-8"?>
+<p188:cmLst xmlns:a="http://schemas.openxmlformats.org/drawingml/2006/main" xmlns:r="http://schemas.openxmlformats.org/officeDocument/2006/relationships" xmlns:p188="http://schemas.microsoft.com/office/powerpoint/2018/8/main">
+  <p188:cm id="{B8C38A4E-EF70-AC41-B516-C6C65B00F265}" authorId="{5E7478A2-2A14-AA1F-803D-D7D14AC37D3F}" created="2026-06-02T16:56:33.267">
+    <ac:txMkLst xmlns:ac="http://schemas.microsoft.com/office/drawing/2013/main/command">
+      <pc:docMk xmlns:pc="http://schemas.microsoft.com/office/powerpoint/2013/main/command"/>
+      <pc:sldMk xmlns:pc="http://schemas.microsoft.com/office/powerpoint/2013/main/command" cId="3165592934" sldId="277"/>
+      <ac:spMk id="3" creationId="{56064C14-1601-F022-7F3D-615176F6A82B}"/>
+      <ac:txMk cp="17" len="6">
+        <ac:context len="123" hash="649244174"/>
+      </ac:txMk>
+    </ac:txMkLst>
+    <p188:pos x="3194241" y="370120"/>
+    <p188:txBody>
+      <a:bodyPr/>
+      <a:lstStyle/>
+      <a:p>
+        <a:r>
+          <a:rPr lang="en-US"/>
+          <a:t>Might change</a:t>
+        </a:r>
+      </a:p>
+    </p188:txBody>
+  </p188:cm>
+</p188:cmLst>
+</file>
+
+<file path=ppt/comments/modernComment_116_EBB7AEDD.xml><?xml version="1.0" encoding="utf-8"?>
+<p188:cmLst xmlns:a="http://schemas.openxmlformats.org/drawingml/2006/main" xmlns:r="http://schemas.openxmlformats.org/officeDocument/2006/relationships" xmlns:p188="http://schemas.microsoft.com/office/powerpoint/2018/8/main">
+  <p188:cm id="{304D26FF-432C-F14E-AE79-D77CE7DD64CA}" authorId="{5E7478A2-2A14-AA1F-803D-D7D14AC37D3F}" created="2026-06-02T16:56:36.670">
+    <ac:txMkLst xmlns:ac="http://schemas.microsoft.com/office/drawing/2013/main/command">
+      <pc:docMk xmlns:pc="http://schemas.microsoft.com/office/powerpoint/2013/main/command"/>
+      <pc:sldMk xmlns:pc="http://schemas.microsoft.com/office/powerpoint/2013/main/command" cId="3954683613" sldId="278"/>
+      <ac:spMk id="3" creationId="{31720598-1CB0-E7F3-3417-23A2488D52ED}"/>
+      <ac:txMk cp="17" len="7">
+        <ac:context len="124" hash="4187825020"/>
+      </ac:txMk>
+    </ac:txMkLst>
+    <p188:pos x="3346641" y="370120"/>
+    <p188:txBody>
+      <a:bodyPr/>
+      <a:lstStyle/>
+      <a:p>
+        <a:r>
+          <a:rPr lang="en-US"/>
+          <a:t>Might change</a:t>
+        </a:r>
+      </a:p>
+    </p188:txBody>
+  </p188:cm>
+</p188:cmLst>
 </file>
 
 <file path=ppt/handoutMasters/handoutMaster1.xml><?xml version="1.0" encoding="utf-8"?>
@@ -967,7 +1125,7 @@
           <a:p>
             <a:pPr lvl="0"/>
             <a:fld id="{2F2A8F5F-D570-7943-BC26-CE189838C058}" type="slidenum">
-              <a:t>10</a:t>
+              <a:t>15</a:t>
             </a:fld>
             <a:endParaRPr lang="en-US"/>
           </a:p>
@@ -1085,7 +1243,7 @@
           <a:p>
             <a:pPr lvl="0"/>
             <a:fld id="{2B0E6C16-0556-494D-BECC-21D8D6E18886}" type="slidenum">
-              <a:t>11</a:t>
+              <a:t>16</a:t>
             </a:fld>
             <a:endParaRPr lang="en-US"/>
           </a:p>
@@ -1203,7 +1361,7 @@
           <a:p>
             <a:pPr lvl="0"/>
             <a:fld id="{74B2BE70-CC58-924D-BB02-AD4AA9B63134}" type="slidenum">
-              <a:t>2</a:t>
+              <a:t>3</a:t>
             </a:fld>
             <a:endParaRPr lang="en-US"/>
           </a:p>
@@ -1321,7 +1479,7 @@
           <a:p>
             <a:pPr lvl="0"/>
             <a:fld id="{46DC6A57-27CA-2945-BA58-25741BFA1969}" type="slidenum">
-              <a:t>3</a:t>
+              <a:t>4</a:t>
             </a:fld>
             <a:endParaRPr lang="en-US"/>
           </a:p>
@@ -1439,7 +1597,7 @@
           <a:p>
             <a:pPr lvl="0"/>
             <a:fld id="{FE90A4ED-5FD0-B044-8E31-F6C0BAFF2FAB}" type="slidenum">
-              <a:t>4</a:t>
+              <a:t>5</a:t>
             </a:fld>
             <a:endParaRPr lang="en-US"/>
           </a:p>
@@ -1557,7 +1715,7 @@
           <a:p>
             <a:pPr lvl="0"/>
             <a:fld id="{30A5194F-B1BB-9D4C-AE76-7B3B08E77197}" type="slidenum">
-              <a:t>5</a:t>
+              <a:t>6</a:t>
             </a:fld>
             <a:endParaRPr lang="en-US"/>
           </a:p>
@@ -1675,7 +1833,7 @@
           <a:p>
             <a:pPr lvl="0"/>
             <a:fld id="{18702C2E-8935-084B-8A6A-C1C4FB937928}" type="slidenum">
-              <a:t>6</a:t>
+              <a:t>10</a:t>
             </a:fld>
             <a:endParaRPr lang="en-US"/>
           </a:p>
@@ -1793,7 +1951,7 @@
           <a:p>
             <a:pPr lvl="0"/>
             <a:fld id="{59065317-6997-AF48-9E2D-F3DC91694882}" type="slidenum">
-              <a:t>7</a:t>
+              <a:t>11</a:t>
             </a:fld>
             <a:endParaRPr lang="en-US"/>
           </a:p>
@@ -1911,7 +2069,7 @@
           <a:p>
             <a:pPr lvl="0"/>
             <a:fld id="{805BC73B-1373-A04C-9AEE-DE1873EAA8E9}" type="slidenum">
-              <a:t>8</a:t>
+              <a:t>12</a:t>
             </a:fld>
             <a:endParaRPr lang="en-US"/>
           </a:p>
@@ -2029,7 +2187,7 @@
           <a:p>
             <a:pPr lvl="0"/>
             <a:fld id="{D37FEB87-33B9-194E-AD80-2EA93F043D18}" type="slidenum">
-              <a:t>9</a:t>
+              <a:t>14</a:t>
             </a:fld>
             <a:endParaRPr lang="en-US"/>
           </a:p>
@@ -5477,6 +5635,1155 @@
 
 <file path=ppt/slides/slide10.xml><?xml version="1.0" encoding="utf-8"?>
 <p:sld xmlns:a="http://schemas.openxmlformats.org/drawingml/2006/main" xmlns:r="http://schemas.openxmlformats.org/officeDocument/2006/relationships" xmlns:p="http://schemas.openxmlformats.org/presentationml/2006/main">
+  <p:cSld name="page10">
+    <p:spTree>
+      <p:nvGrpSpPr>
+        <p:cNvPr id="1" name=""/>
+        <p:cNvGrpSpPr/>
+        <p:nvPr/>
+      </p:nvGrpSpPr>
+      <p:grpSpPr>
+        <a:xfrm>
+          <a:off x="0" y="0"/>
+          <a:ext cx="0" cy="0"/>
+          <a:chOff x="0" y="0"/>
+          <a:chExt cx="0" cy="0"/>
+        </a:xfrm>
+      </p:grpSpPr>
+      <p:sp>
+        <p:nvSpPr>
+          <p:cNvPr id="2" name="Title 1">
+            <a:extLst>
+              <a:ext uri="{FF2B5EF4-FFF2-40B4-BE49-F238E27FC236}">
+                <a16:creationId xmlns:a16="http://schemas.microsoft.com/office/drawing/2014/main" id="{96CB14EF-3B5C-5292-14CB-3720F1B94FC4}"/>
+              </a:ext>
+            </a:extLst>
+          </p:cNvPr>
+          <p:cNvSpPr txBox="1">
+            <a:spLocks noGrp="1"/>
+          </p:cNvSpPr>
+          <p:nvPr>
+            <p:ph type="title" idx="4294967295"/>
+          </p:nvPr>
+        </p:nvSpPr>
+        <p:spPr>
+          <a:xfrm>
+            <a:off x="503999" y="422301"/>
+            <a:ext cx="9071640" cy="553998"/>
+          </a:xfrm>
+        </p:spPr>
+        <p:txBody>
+          <a:bodyPr>
+            <a:spAutoFit/>
+          </a:bodyPr>
+          <a:lstStyle/>
+          <a:p>
+            <a:pPr lvl="0"/>
+            <a:r>
+              <a:rPr lang="en-US" dirty="0">
+                <a:solidFill>
+                  <a:schemeClr val="bg1"/>
+                </a:solidFill>
+              </a:rPr>
+              <a:t>Results</a:t>
+            </a:r>
+          </a:p>
+        </p:txBody>
+      </p:sp>
+      <p:sp>
+        <p:nvSpPr>
+          <p:cNvPr id="3" name="Text Placeholder 2">
+            <a:extLst>
+              <a:ext uri="{FF2B5EF4-FFF2-40B4-BE49-F238E27FC236}">
+                <a16:creationId xmlns:a16="http://schemas.microsoft.com/office/drawing/2014/main" id="{C9367797-CD5B-309B-985B-DF6091246510}"/>
+              </a:ext>
+            </a:extLst>
+          </p:cNvPr>
+          <p:cNvSpPr txBox="1">
+            <a:spLocks noGrp="1"/>
+          </p:cNvSpPr>
+          <p:nvPr>
+            <p:ph type="body" idx="4294967295"/>
+          </p:nvPr>
+        </p:nvSpPr>
+        <p:spPr>
+          <a:xfrm>
+            <a:off x="503998" y="1326600"/>
+            <a:ext cx="9071639" cy="3288239"/>
+          </a:xfrm>
+        </p:spPr>
+        <p:txBody>
+          <a:bodyPr>
+            <a:normAutofit fontScale="92500" lnSpcReduction="10000"/>
+          </a:bodyPr>
+          <a:lstStyle/>
+          <a:p>
+            <a:pPr marL="342900" indent="-342900"/>
+            <a:r>
+              <a:rPr lang="en-US" dirty="0">
+                <a:solidFill>
+                  <a:schemeClr val="bg1"/>
+                </a:solidFill>
+              </a:rPr>
+              <a:t>Our test cases originally had invalid values for constants, causing crashes. </a:t>
+            </a:r>
+          </a:p>
+          <a:p>
+            <a:pPr marL="342900" indent="-342900"/>
+            <a:r>
+              <a:rPr lang="en-US" dirty="0">
+                <a:solidFill>
+                  <a:schemeClr val="bg1"/>
+                </a:solidFill>
+              </a:rPr>
+              <a:t>Some checks were interpreted incorrectly by us and had to be corrected. </a:t>
+            </a:r>
+          </a:p>
+          <a:p>
+            <a:pPr marL="342900" indent="-342900"/>
+            <a:r>
+              <a:rPr lang="en-US" dirty="0">
+                <a:solidFill>
+                  <a:schemeClr val="bg1"/>
+                </a:solidFill>
+              </a:rPr>
+              <a:t>Tests checking for things other than non-finite values had to ignore non-finite values, otherwise they’d fail and output an inaccurate error message.</a:t>
+            </a:r>
+          </a:p>
+          <a:p>
+            <a:pPr marL="342900" indent="-342900"/>
+            <a:r>
+              <a:rPr lang="en-US" dirty="0">
+                <a:solidFill>
+                  <a:schemeClr val="bg1"/>
+                </a:solidFill>
+              </a:rPr>
+              <a:t>No bugs found in </a:t>
+            </a:r>
+            <a:r>
+              <a:rPr lang="en-US" i="1" dirty="0">
+                <a:solidFill>
+                  <a:schemeClr val="bg1"/>
+                </a:solidFill>
+              </a:rPr>
+              <a:t>SPEL</a:t>
+            </a:r>
+          </a:p>
+          <a:p>
+            <a:pPr marL="342900" indent="-342900"/>
+            <a:r>
+              <a:rPr lang="en-US" dirty="0">
+                <a:solidFill>
+                  <a:schemeClr val="bg1"/>
+                </a:solidFill>
+              </a:rPr>
+              <a:t>Largely, </a:t>
+            </a:r>
+            <a:r>
+              <a:rPr lang="en-US" dirty="0" err="1">
+                <a:solidFill>
+                  <a:schemeClr val="bg1"/>
+                </a:solidFill>
+                <a:latin typeface="Courier New" panose="02070309020205020404" pitchFamily="49" charset="0"/>
+                <a:cs typeface="Courier New" panose="02070309020205020404" pitchFamily="49" charset="0"/>
+              </a:rPr>
+              <a:t>LakeTemperature</a:t>
+            </a:r>
+            <a:r>
+              <a:rPr lang="en-US" dirty="0">
+                <a:solidFill>
+                  <a:schemeClr val="bg1"/>
+                </a:solidFill>
+              </a:rPr>
+              <a:t> output data was valid and within physical bounds. However, edge cases resulted in physically impossible output, likely due to combinations between a few model constants. </a:t>
+            </a:r>
+          </a:p>
+        </p:txBody>
+      </p:sp>
+    </p:spTree>
+  </p:cSld>
+  <p:clrMapOvr>
+    <a:masterClrMapping/>
+  </p:clrMapOvr>
+  <p:extLst>
+    <p:ext uri="{6950BFC3-D8DA-4A85-94F7-54DA5524770B}">
+      <p188:commentRel xmlns:p188="http://schemas.microsoft.com/office/powerpoint/2018/8/main" r:id="rId3"/>
+    </p:ext>
+  </p:extLst>
+</p:sld>
+</file>
+
+<file path=ppt/slides/slide11.xml><?xml version="1.0" encoding="utf-8"?>
+<p:sld xmlns:a="http://schemas.openxmlformats.org/drawingml/2006/main" xmlns:r="http://schemas.openxmlformats.org/officeDocument/2006/relationships" xmlns:p="http://schemas.openxmlformats.org/presentationml/2006/main">
+  <p:cSld name="page11">
+    <p:spTree>
+      <p:nvGrpSpPr>
+        <p:cNvPr id="1" name=""/>
+        <p:cNvGrpSpPr/>
+        <p:nvPr/>
+      </p:nvGrpSpPr>
+      <p:grpSpPr>
+        <a:xfrm>
+          <a:off x="0" y="0"/>
+          <a:ext cx="0" cy="0"/>
+          <a:chOff x="0" y="0"/>
+          <a:chExt cx="0" cy="0"/>
+        </a:xfrm>
+      </p:grpSpPr>
+      <p:sp>
+        <p:nvSpPr>
+          <p:cNvPr id="2" name="Title 1">
+            <a:extLst>
+              <a:ext uri="{FF2B5EF4-FFF2-40B4-BE49-F238E27FC236}">
+                <a16:creationId xmlns:a16="http://schemas.microsoft.com/office/drawing/2014/main" id="{32B0991F-E501-52E1-8A9D-C12A1C6D7A3F}"/>
+              </a:ext>
+            </a:extLst>
+          </p:cNvPr>
+          <p:cNvSpPr txBox="1">
+            <a:spLocks noGrp="1"/>
+          </p:cNvSpPr>
+          <p:nvPr>
+            <p:ph type="title" idx="4294967295"/>
+          </p:nvPr>
+        </p:nvSpPr>
+        <p:spPr>
+          <a:xfrm>
+            <a:off x="503999" y="422301"/>
+            <a:ext cx="9071640" cy="553998"/>
+          </a:xfrm>
+        </p:spPr>
+        <p:txBody>
+          <a:bodyPr>
+            <a:spAutoFit/>
+          </a:bodyPr>
+          <a:lstStyle/>
+          <a:p>
+            <a:pPr lvl="0"/>
+            <a:r>
+              <a:rPr lang="en-US" dirty="0">
+                <a:solidFill>
+                  <a:schemeClr val="bg1"/>
+                </a:solidFill>
+              </a:rPr>
+              <a:t>Change-Impact Analysis Background</a:t>
+            </a:r>
+          </a:p>
+        </p:txBody>
+      </p:sp>
+      <p:sp>
+        <p:nvSpPr>
+          <p:cNvPr id="3" name="Text Placeholder 2">
+            <a:extLst>
+              <a:ext uri="{FF2B5EF4-FFF2-40B4-BE49-F238E27FC236}">
+                <a16:creationId xmlns:a16="http://schemas.microsoft.com/office/drawing/2014/main" id="{0111FD90-B5FD-9164-8583-51A1777539F7}"/>
+              </a:ext>
+            </a:extLst>
+          </p:cNvPr>
+          <p:cNvSpPr txBox="1">
+            <a:spLocks noGrp="1"/>
+          </p:cNvSpPr>
+          <p:nvPr>
+            <p:ph type="body" idx="4294967295"/>
+          </p:nvPr>
+        </p:nvSpPr>
+        <p:spPr/>
+        <p:txBody>
+          <a:bodyPr/>
+          <a:lstStyle/>
+          <a:p>
+            <a:pPr marL="342900" indent="-342900"/>
+            <a:r>
+              <a:rPr lang="en-US" dirty="0">
+                <a:solidFill>
+                  <a:schemeClr val="bg1"/>
+                </a:solidFill>
+              </a:rPr>
+              <a:t>Change-Impact Analysis seeks to find how specific changes to individual model constants affect model output. </a:t>
+            </a:r>
+          </a:p>
+          <a:p>
+            <a:pPr marL="342900" indent="-342900"/>
+            <a:r>
+              <a:rPr lang="en-US" dirty="0">
+                <a:solidFill>
+                  <a:schemeClr val="bg1"/>
+                </a:solidFill>
+              </a:rPr>
+              <a:t>It does this by changing a single model constant across its range of values while keeping all other model constants the same. </a:t>
+            </a:r>
+          </a:p>
+        </p:txBody>
+      </p:sp>
+    </p:spTree>
+  </p:cSld>
+  <p:clrMapOvr>
+    <a:masterClrMapping/>
+  </p:clrMapOvr>
+</p:sld>
+</file>
+
+<file path=ppt/slides/slide12.xml><?xml version="1.0" encoding="utf-8"?>
+<p:sld xmlns:a="http://schemas.openxmlformats.org/drawingml/2006/main" xmlns:r="http://schemas.openxmlformats.org/officeDocument/2006/relationships" xmlns:p="http://schemas.openxmlformats.org/presentationml/2006/main">
+  <p:cSld name="page13">
+    <p:spTree>
+      <p:nvGrpSpPr>
+        <p:cNvPr id="1" name=""/>
+        <p:cNvGrpSpPr/>
+        <p:nvPr/>
+      </p:nvGrpSpPr>
+      <p:grpSpPr>
+        <a:xfrm>
+          <a:off x="0" y="0"/>
+          <a:ext cx="0" cy="0"/>
+          <a:chOff x="0" y="0"/>
+          <a:chExt cx="0" cy="0"/>
+        </a:xfrm>
+      </p:grpSpPr>
+      <p:sp>
+        <p:nvSpPr>
+          <p:cNvPr id="2" name="Title 1">
+            <a:extLst>
+              <a:ext uri="{FF2B5EF4-FFF2-40B4-BE49-F238E27FC236}">
+                <a16:creationId xmlns:a16="http://schemas.microsoft.com/office/drawing/2014/main" id="{E1CD01BF-1533-F276-6A2B-362353BBED49}"/>
+              </a:ext>
+            </a:extLst>
+          </p:cNvPr>
+          <p:cNvSpPr txBox="1">
+            <a:spLocks noGrp="1"/>
+          </p:cNvSpPr>
+          <p:nvPr>
+            <p:ph type="title" idx="4294967295"/>
+          </p:nvPr>
+        </p:nvSpPr>
+        <p:spPr>
+          <a:xfrm>
+            <a:off x="0" y="180883"/>
+            <a:ext cx="10080000" cy="553998"/>
+          </a:xfrm>
+        </p:spPr>
+        <p:txBody>
+          <a:bodyPr>
+            <a:spAutoFit/>
+          </a:bodyPr>
+          <a:lstStyle/>
+          <a:p>
+            <a:pPr lvl="0"/>
+            <a:r>
+              <a:rPr lang="en-US" dirty="0">
+                <a:solidFill>
+                  <a:schemeClr val="bg1"/>
+                </a:solidFill>
+              </a:rPr>
+              <a:t>Preliminary Results</a:t>
+            </a:r>
+          </a:p>
+        </p:txBody>
+      </p:sp>
+      <p:grpSp>
+        <p:nvGrpSpPr>
+          <p:cNvPr id="10" name="Group 9">
+            <a:extLst>
+              <a:ext uri="{FF2B5EF4-FFF2-40B4-BE49-F238E27FC236}">
+                <a16:creationId xmlns:a16="http://schemas.microsoft.com/office/drawing/2014/main" id="{72E9366F-7D4D-7AEC-B4EF-4B95779DB708}"/>
+              </a:ext>
+            </a:extLst>
+          </p:cNvPr>
+          <p:cNvGrpSpPr>
+            <a:grpSpLocks noChangeAspect="1"/>
+          </p:cNvGrpSpPr>
+          <p:nvPr/>
+        </p:nvGrpSpPr>
+        <p:grpSpPr>
+          <a:xfrm>
+            <a:off x="2265052" y="976299"/>
+            <a:ext cx="5635901" cy="4661469"/>
+            <a:chOff x="2865704" y="1174750"/>
+            <a:chExt cx="5435600" cy="4495799"/>
+          </a:xfrm>
+        </p:grpSpPr>
+        <p:sp>
+          <p:nvSpPr>
+            <p:cNvPr id="9" name="Rectangle 8">
+              <a:extLst>
+                <a:ext uri="{FF2B5EF4-FFF2-40B4-BE49-F238E27FC236}">
+                  <a16:creationId xmlns:a16="http://schemas.microsoft.com/office/drawing/2014/main" id="{740EDBCF-6E5E-C542-932C-D07D659DB2A1}"/>
+                </a:ext>
+              </a:extLst>
+            </p:cNvPr>
+            <p:cNvSpPr>
+              <a:spLocks/>
+            </p:cNvSpPr>
+            <p:nvPr/>
+          </p:nvSpPr>
+          <p:spPr>
+            <a:xfrm>
+              <a:off x="2865704" y="1174750"/>
+              <a:ext cx="5435600" cy="4495799"/>
+            </a:xfrm>
+            <a:prstGeom prst="rect">
+              <a:avLst/>
+            </a:prstGeom>
+            <a:solidFill>
+              <a:schemeClr val="bg1"/>
+            </a:solidFill>
+          </p:spPr>
+          <p:style>
+            <a:lnRef idx="2">
+              <a:schemeClr val="accent1">
+                <a:shade val="15000"/>
+              </a:schemeClr>
+            </a:lnRef>
+            <a:fillRef idx="1">
+              <a:schemeClr val="accent1"/>
+            </a:fillRef>
+            <a:effectRef idx="0">
+              <a:schemeClr val="accent1"/>
+            </a:effectRef>
+            <a:fontRef idx="minor">
+              <a:schemeClr val="lt1"/>
+            </a:fontRef>
+          </p:style>
+          <p:txBody>
+            <a:bodyPr rtlCol="0" anchor="ctr"/>
+            <a:lstStyle/>
+            <a:p>
+              <a:pPr algn="ctr"/>
+              <a:endParaRPr lang="en-US"/>
+            </a:p>
+          </p:txBody>
+        </p:sp>
+        <p:pic>
+          <p:nvPicPr>
+            <p:cNvPr id="7" name="Picture 6">
+              <a:extLst>
+                <a:ext uri="{FF2B5EF4-FFF2-40B4-BE49-F238E27FC236}">
+                  <a16:creationId xmlns:a16="http://schemas.microsoft.com/office/drawing/2014/main" id="{D9155960-EBF6-47BF-2D13-66FAC7CCE797}"/>
+                </a:ext>
+              </a:extLst>
+            </p:cNvPr>
+            <p:cNvPicPr>
+              <a:picLocks noChangeAspect="1"/>
+            </p:cNvPicPr>
+            <p:nvPr/>
+          </p:nvPicPr>
+          <p:blipFill>
+            <a:blip r:embed="rId3"/>
+            <a:stretch>
+              <a:fillRect/>
+            </a:stretch>
+          </p:blipFill>
+          <p:spPr>
+            <a:xfrm>
+              <a:off x="2948683" y="1243382"/>
+              <a:ext cx="5352620" cy="4427167"/>
+            </a:xfrm>
+            <a:prstGeom prst="rect">
+              <a:avLst/>
+            </a:prstGeom>
+          </p:spPr>
+        </p:pic>
+      </p:grpSp>
+      <p:grpSp>
+        <p:nvGrpSpPr>
+          <p:cNvPr id="15" name="Group 14">
+            <a:extLst>
+              <a:ext uri="{FF2B5EF4-FFF2-40B4-BE49-F238E27FC236}">
+                <a16:creationId xmlns:a16="http://schemas.microsoft.com/office/drawing/2014/main" id="{9D0941FA-E95F-6AFD-3833-285F2955FAC8}"/>
+              </a:ext>
+            </a:extLst>
+          </p:cNvPr>
+          <p:cNvGrpSpPr/>
+          <p:nvPr/>
+        </p:nvGrpSpPr>
+        <p:grpSpPr>
+          <a:xfrm>
+            <a:off x="7508240" y="-25579"/>
+            <a:ext cx="2571761" cy="5696128"/>
+            <a:chOff x="7508240" y="-25579"/>
+            <a:chExt cx="2571761" cy="5696128"/>
+          </a:xfrm>
+        </p:grpSpPr>
+        <p:pic>
+          <p:nvPicPr>
+            <p:cNvPr id="5" name="Picture 4">
+              <a:extLst>
+                <a:ext uri="{FF2B5EF4-FFF2-40B4-BE49-F238E27FC236}">
+                  <a16:creationId xmlns:a16="http://schemas.microsoft.com/office/drawing/2014/main" id="{33061DBC-44AC-B3E9-9B86-1E2656399D55}"/>
+                </a:ext>
+              </a:extLst>
+            </p:cNvPr>
+            <p:cNvPicPr>
+              <a:picLocks noChangeAspect="1"/>
+            </p:cNvPicPr>
+            <p:nvPr/>
+          </p:nvPicPr>
+          <p:blipFill>
+            <a:blip r:embed="rId4"/>
+            <a:stretch>
+              <a:fillRect/>
+            </a:stretch>
+          </p:blipFill>
+          <p:spPr>
+            <a:xfrm>
+              <a:off x="8059448" y="897750"/>
+              <a:ext cx="1497623" cy="4772799"/>
+            </a:xfrm>
+            <a:prstGeom prst="rect">
+              <a:avLst/>
+            </a:prstGeom>
+          </p:spPr>
+        </p:pic>
+        <p:sp>
+          <p:nvSpPr>
+            <p:cNvPr id="8" name="TextBox 7">
+              <a:extLst>
+                <a:ext uri="{FF2B5EF4-FFF2-40B4-BE49-F238E27FC236}">
+                  <a16:creationId xmlns:a16="http://schemas.microsoft.com/office/drawing/2014/main" id="{B61CE515-032B-D888-C961-80FAD2677FF9}"/>
+                </a:ext>
+              </a:extLst>
+            </p:cNvPr>
+            <p:cNvSpPr txBox="1"/>
+            <p:nvPr/>
+          </p:nvSpPr>
+          <p:spPr>
+            <a:xfrm>
+              <a:off x="7508240" y="-25579"/>
+              <a:ext cx="2571761" cy="923330"/>
+            </a:xfrm>
+            <a:prstGeom prst="rect">
+              <a:avLst/>
+            </a:prstGeom>
+            <a:noFill/>
+          </p:spPr>
+          <p:txBody>
+            <a:bodyPr wrap="square" rtlCol="0">
+              <a:spAutoFit/>
+            </a:bodyPr>
+            <a:lstStyle/>
+            <a:p>
+              <a:pPr algn="ctr"/>
+              <a:r>
+                <a:rPr lang="en-US" dirty="0">
+                  <a:solidFill>
+                    <a:schemeClr val="bg1"/>
+                  </a:solidFill>
+                </a:rPr>
+                <a:t>Model output that didn’t change in response to any model constants</a:t>
+              </a:r>
+            </a:p>
+          </p:txBody>
+        </p:sp>
+      </p:grpSp>
+      <p:grpSp>
+        <p:nvGrpSpPr>
+          <p:cNvPr id="14" name="Group 13">
+            <a:extLst>
+              <a:ext uri="{FF2B5EF4-FFF2-40B4-BE49-F238E27FC236}">
+                <a16:creationId xmlns:a16="http://schemas.microsoft.com/office/drawing/2014/main" id="{8EA8B47B-ED39-38F5-F797-A57072FA74C1}"/>
+              </a:ext>
+            </a:extLst>
+          </p:cNvPr>
+          <p:cNvGrpSpPr/>
+          <p:nvPr/>
+        </p:nvGrpSpPr>
+        <p:grpSpPr>
+          <a:xfrm>
+            <a:off x="-3454" y="32782"/>
+            <a:ext cx="2268506" cy="2786181"/>
+            <a:chOff x="-36613" y="150059"/>
+            <a:chExt cx="2268506" cy="2786181"/>
+          </a:xfrm>
+        </p:grpSpPr>
+        <p:pic>
+          <p:nvPicPr>
+            <p:cNvPr id="12" name="Picture 11">
+              <a:extLst>
+                <a:ext uri="{FF2B5EF4-FFF2-40B4-BE49-F238E27FC236}">
+                  <a16:creationId xmlns:a16="http://schemas.microsoft.com/office/drawing/2014/main" id="{9660E9FA-F102-2295-3BFB-5B865515C7AE}"/>
+                </a:ext>
+              </a:extLst>
+            </p:cNvPr>
+            <p:cNvPicPr>
+              <a:picLocks noChangeAspect="1"/>
+            </p:cNvPicPr>
+            <p:nvPr/>
+          </p:nvPicPr>
+          <p:blipFill>
+            <a:blip r:embed="rId5"/>
+            <a:stretch>
+              <a:fillRect/>
+            </a:stretch>
+          </p:blipFill>
+          <p:spPr>
+            <a:xfrm>
+              <a:off x="606525" y="1073389"/>
+              <a:ext cx="982231" cy="1862851"/>
+            </a:xfrm>
+            <a:prstGeom prst="rect">
+              <a:avLst/>
+            </a:prstGeom>
+          </p:spPr>
+        </p:pic>
+        <p:sp>
+          <p:nvSpPr>
+            <p:cNvPr id="13" name="TextBox 12">
+              <a:extLst>
+                <a:ext uri="{FF2B5EF4-FFF2-40B4-BE49-F238E27FC236}">
+                  <a16:creationId xmlns:a16="http://schemas.microsoft.com/office/drawing/2014/main" id="{5F1FA329-1241-A2E4-B9B8-5A666AB4CBB7}"/>
+                </a:ext>
+              </a:extLst>
+            </p:cNvPr>
+            <p:cNvSpPr txBox="1"/>
+            <p:nvPr/>
+          </p:nvSpPr>
+          <p:spPr>
+            <a:xfrm>
+              <a:off x="-36613" y="150059"/>
+              <a:ext cx="2268506" cy="923330"/>
+            </a:xfrm>
+            <a:prstGeom prst="rect">
+              <a:avLst/>
+            </a:prstGeom>
+            <a:noFill/>
+          </p:spPr>
+          <p:txBody>
+            <a:bodyPr wrap="square" rtlCol="0">
+              <a:spAutoFit/>
+            </a:bodyPr>
+            <a:lstStyle/>
+            <a:p>
+              <a:pPr algn="ctr"/>
+              <a:r>
+                <a:rPr lang="en-US" dirty="0">
+                  <a:solidFill>
+                    <a:schemeClr val="bg1"/>
+                  </a:solidFill>
+                </a:rPr>
+                <a:t>Model constants that had no effect on any model output</a:t>
+              </a:r>
+            </a:p>
+          </p:txBody>
+        </p:sp>
+      </p:grpSp>
+      <p:sp>
+        <p:nvSpPr>
+          <p:cNvPr id="16" name="TextBox 15">
+            <a:extLst>
+              <a:ext uri="{FF2B5EF4-FFF2-40B4-BE49-F238E27FC236}">
+                <a16:creationId xmlns:a16="http://schemas.microsoft.com/office/drawing/2014/main" id="{EFC0668C-EBC7-3F6A-E632-B11933CC749D}"/>
+              </a:ext>
+            </a:extLst>
+          </p:cNvPr>
+          <p:cNvSpPr txBox="1"/>
+          <p:nvPr/>
+        </p:nvSpPr>
+        <p:spPr>
+          <a:xfrm>
+            <a:off x="2293065" y="976299"/>
+            <a:ext cx="2431335" cy="830997"/>
+          </a:xfrm>
+          <a:prstGeom prst="rect">
+            <a:avLst/>
+          </a:prstGeom>
+          <a:noFill/>
+        </p:spPr>
+        <p:txBody>
+          <a:bodyPr wrap="square" rtlCol="0">
+            <a:spAutoFit/>
+          </a:bodyPr>
+          <a:lstStyle/>
+          <a:p>
+            <a:r>
+              <a:rPr lang="en-US" sz="1600" dirty="0"/>
+              <a:t>Model constants (columns) and the model outputs (rows) they affect</a:t>
+            </a:r>
+          </a:p>
+        </p:txBody>
+      </p:sp>
+    </p:spTree>
+  </p:cSld>
+  <p:clrMapOvr>
+    <a:masterClrMapping/>
+  </p:clrMapOvr>
+</p:sld>
+</file>
+
+<file path=ppt/slides/slide13.xml><?xml version="1.0" encoding="utf-8"?>
+<p:sld xmlns:a="http://schemas.openxmlformats.org/drawingml/2006/main" xmlns:r="http://schemas.openxmlformats.org/officeDocument/2006/relationships" xmlns:p="http://schemas.openxmlformats.org/presentationml/2006/main">
+  <p:cSld>
+    <p:spTree>
+      <p:nvGrpSpPr>
+        <p:cNvPr id="1" name=""/>
+        <p:cNvGrpSpPr/>
+        <p:nvPr/>
+      </p:nvGrpSpPr>
+      <p:grpSpPr>
+        <a:xfrm>
+          <a:off x="0" y="0"/>
+          <a:ext cx="0" cy="0"/>
+          <a:chOff x="0" y="0"/>
+          <a:chExt cx="0" cy="0"/>
+        </a:xfrm>
+      </p:grpSpPr>
+      <p:sp>
+        <p:nvSpPr>
+          <p:cNvPr id="2" name="Title 1">
+            <a:extLst>
+              <a:ext uri="{FF2B5EF4-FFF2-40B4-BE49-F238E27FC236}">
+                <a16:creationId xmlns:a16="http://schemas.microsoft.com/office/drawing/2014/main" id="{F305543B-14A8-20DC-2B1F-73CBE4DA70A4}"/>
+              </a:ext>
+            </a:extLst>
+          </p:cNvPr>
+          <p:cNvSpPr txBox="1">
+            <a:spLocks/>
+          </p:cNvSpPr>
+          <p:nvPr/>
+        </p:nvSpPr>
+        <p:spPr>
+          <a:xfrm>
+            <a:off x="503999" y="422301"/>
+            <a:ext cx="9071640" cy="553998"/>
+          </a:xfrm>
+          <a:prstGeom prst="rect">
+            <a:avLst/>
+          </a:prstGeom>
+          <a:noFill/>
+          <a:ln>
+            <a:noFill/>
+          </a:ln>
+        </p:spPr>
+        <p:txBody>
+          <a:bodyPr vert="horz" lIns="0" tIns="0" rIns="0" bIns="0" anchor="ctr">
+            <a:spAutoFit/>
+          </a:bodyPr>
+          <a:lstStyle>
+            <a:lvl1pPr lvl="0" algn="ctr" rtl="0" hangingPunct="0">
+              <a:buNone/>
+              <a:tabLst/>
+              <a:defRPr lang="en-US" sz="3600" b="0" i="0" u="none" strike="noStrike" kern="1200" cap="none">
+                <a:ln>
+                  <a:noFill/>
+                </a:ln>
+                <a:highlight>
+                  <a:scrgbClr r="0" g="0" b="0">
+                    <a:alpha val="0"/>
+                  </a:scrgbClr>
+                </a:highlight>
+                <a:latin typeface="URW Bookman" pitchFamily="2"/>
+                <a:ea typeface="Nimbus Sans" pitchFamily="2"/>
+                <a:cs typeface="FreeSans" pitchFamily="2"/>
+              </a:defRPr>
+            </a:lvl1pPr>
+          </a:lstStyle>
+          <a:p>
+            <a:r>
+              <a:rPr lang="en-US" dirty="0">
+                <a:solidFill>
+                  <a:schemeClr val="bg1"/>
+                </a:solidFill>
+              </a:rPr>
+              <a:t>How we did Change-Impact Analysis</a:t>
+            </a:r>
+          </a:p>
+        </p:txBody>
+      </p:sp>
+      <p:sp>
+        <p:nvSpPr>
+          <p:cNvPr id="3" name="Text Placeholder 2">
+            <a:extLst>
+              <a:ext uri="{FF2B5EF4-FFF2-40B4-BE49-F238E27FC236}">
+                <a16:creationId xmlns:a16="http://schemas.microsoft.com/office/drawing/2014/main" id="{BA300590-519D-7808-E5BF-704E28F68FEC}"/>
+              </a:ext>
+            </a:extLst>
+          </p:cNvPr>
+          <p:cNvSpPr txBox="1">
+            <a:spLocks/>
+          </p:cNvSpPr>
+          <p:nvPr/>
+        </p:nvSpPr>
+        <p:spPr>
+          <a:xfrm>
+            <a:off x="507959" y="1172520"/>
+            <a:ext cx="9071640" cy="3828239"/>
+          </a:xfrm>
+          <a:prstGeom prst="rect">
+            <a:avLst/>
+          </a:prstGeom>
+          <a:noFill/>
+          <a:ln>
+            <a:noFill/>
+          </a:ln>
+        </p:spPr>
+        <p:txBody>
+          <a:bodyPr vert="horz" lIns="0" tIns="0" rIns="0" bIns="0">
+            <a:normAutofit/>
+          </a:bodyPr>
+          <a:lstStyle>
+            <a:lvl1pPr lvl="0" rtl="0" hangingPunct="0">
+              <a:spcBef>
+                <a:spcPts val="1417"/>
+              </a:spcBef>
+              <a:spcAft>
+                <a:spcPts val="0"/>
+              </a:spcAft>
+              <a:buSzPct val="45000"/>
+              <a:buFont typeface="OpenSymbol"/>
+              <a:buChar char="●"/>
+              <a:tabLst/>
+              <a:defRPr lang="en-US" sz="2400" b="0" i="0" u="none" strike="noStrike" kern="1200" cap="none">
+                <a:ln>
+                  <a:noFill/>
+                </a:ln>
+                <a:highlight>
+                  <a:scrgbClr r="0" g="0" b="0">
+                    <a:alpha val="0"/>
+                  </a:scrgbClr>
+                </a:highlight>
+                <a:latin typeface="URW Bookman" pitchFamily="2"/>
+                <a:ea typeface="Nimbus Sans" pitchFamily="2"/>
+                <a:cs typeface="FreeSans" pitchFamily="2"/>
+              </a:defRPr>
+            </a:lvl1pPr>
+            <a:lvl2pPr lvl="1" rtl="0" hangingPunct="0">
+              <a:spcBef>
+                <a:spcPts val="1417"/>
+              </a:spcBef>
+              <a:spcAft>
+                <a:spcPts val="0"/>
+              </a:spcAft>
+              <a:buSzPct val="75000"/>
+              <a:buFont typeface="OpenSymbol"/>
+              <a:buChar char="–"/>
+              <a:tabLst/>
+              <a:defRPr lang="en-US" sz="2400" b="0" i="0" u="none" strike="noStrike" kern="1200" cap="none">
+                <a:ln>
+                  <a:noFill/>
+                </a:ln>
+                <a:highlight>
+                  <a:scrgbClr r="0" g="0" b="0">
+                    <a:alpha val="0"/>
+                  </a:scrgbClr>
+                </a:highlight>
+                <a:latin typeface="URW Bookman" pitchFamily="2"/>
+                <a:ea typeface="Nimbus Sans" pitchFamily="2"/>
+                <a:cs typeface="FreeSans" pitchFamily="2"/>
+              </a:defRPr>
+            </a:lvl2pPr>
+            <a:lvl3pPr lvl="2" rtl="0" hangingPunct="0">
+              <a:spcBef>
+                <a:spcPts val="1417"/>
+              </a:spcBef>
+              <a:spcAft>
+                <a:spcPts val="0"/>
+              </a:spcAft>
+              <a:buSzPct val="45000"/>
+              <a:buFont typeface="OpenSymbol"/>
+              <a:buChar char="●"/>
+              <a:tabLst/>
+              <a:defRPr lang="en-US" sz="2400" b="0" i="0" u="none" strike="noStrike" kern="1200" cap="none">
+                <a:ln>
+                  <a:noFill/>
+                </a:ln>
+                <a:highlight>
+                  <a:scrgbClr r="0" g="0" b="0">
+                    <a:alpha val="0"/>
+                  </a:scrgbClr>
+                </a:highlight>
+                <a:latin typeface="URW Bookman" pitchFamily="2"/>
+                <a:ea typeface="Nimbus Sans" pitchFamily="2"/>
+                <a:cs typeface="FreeSans" pitchFamily="2"/>
+              </a:defRPr>
+            </a:lvl3pPr>
+            <a:lvl4pPr lvl="3" rtl="0" hangingPunct="0">
+              <a:spcBef>
+                <a:spcPts val="1417"/>
+              </a:spcBef>
+              <a:spcAft>
+                <a:spcPts val="0"/>
+              </a:spcAft>
+              <a:buSzPct val="75000"/>
+              <a:buFont typeface="OpenSymbol"/>
+              <a:buChar char="–"/>
+              <a:tabLst/>
+              <a:defRPr lang="en-US" sz="2400" b="0" i="0" u="none" strike="noStrike" kern="1200" cap="none">
+                <a:ln>
+                  <a:noFill/>
+                </a:ln>
+                <a:highlight>
+                  <a:scrgbClr r="0" g="0" b="0">
+                    <a:alpha val="0"/>
+                  </a:scrgbClr>
+                </a:highlight>
+                <a:latin typeface="URW Bookman" pitchFamily="2"/>
+                <a:ea typeface="Nimbus Sans" pitchFamily="2"/>
+                <a:cs typeface="FreeSans" pitchFamily="2"/>
+              </a:defRPr>
+            </a:lvl4pPr>
+            <a:lvl5pPr lvl="4" rtl="0" hangingPunct="0">
+              <a:spcBef>
+                <a:spcPts val="1417"/>
+              </a:spcBef>
+              <a:spcAft>
+                <a:spcPts val="0"/>
+              </a:spcAft>
+              <a:buSzPct val="45000"/>
+              <a:buFont typeface="OpenSymbol"/>
+              <a:buChar char="●"/>
+              <a:tabLst/>
+              <a:defRPr lang="en-US" sz="2400" b="0" i="0" u="none" strike="noStrike" kern="1200" cap="none">
+                <a:ln>
+                  <a:noFill/>
+                </a:ln>
+                <a:highlight>
+                  <a:scrgbClr r="0" g="0" b="0">
+                    <a:alpha val="0"/>
+                  </a:scrgbClr>
+                </a:highlight>
+                <a:latin typeface="URW Bookman" pitchFamily="2"/>
+                <a:ea typeface="Nimbus Sans" pitchFamily="2"/>
+                <a:cs typeface="FreeSans" pitchFamily="2"/>
+              </a:defRPr>
+            </a:lvl5pPr>
+            <a:lvl6pPr lvl="5" rtl="0" hangingPunct="0">
+              <a:spcBef>
+                <a:spcPts val="1417"/>
+              </a:spcBef>
+              <a:spcAft>
+                <a:spcPts val="0"/>
+              </a:spcAft>
+              <a:buSzPct val="45000"/>
+              <a:buFont typeface="OpenSymbol"/>
+              <a:buChar char="●"/>
+              <a:tabLst/>
+              <a:defRPr lang="en-US" sz="2400" b="0" i="0" u="none" strike="noStrike" kern="1200" cap="none">
+                <a:ln>
+                  <a:noFill/>
+                </a:ln>
+                <a:highlight>
+                  <a:scrgbClr r="0" g="0" b="0">
+                    <a:alpha val="0"/>
+                  </a:scrgbClr>
+                </a:highlight>
+                <a:latin typeface="URW Bookman" pitchFamily="2"/>
+                <a:ea typeface="Nimbus Sans" pitchFamily="2"/>
+                <a:cs typeface="FreeSans" pitchFamily="2"/>
+              </a:defRPr>
+            </a:lvl6pPr>
+            <a:lvl7pPr lvl="6" rtl="0" hangingPunct="0">
+              <a:spcBef>
+                <a:spcPts val="1417"/>
+              </a:spcBef>
+              <a:spcAft>
+                <a:spcPts val="0"/>
+              </a:spcAft>
+              <a:buSzPct val="45000"/>
+              <a:buFont typeface="OpenSymbol"/>
+              <a:buChar char="●"/>
+              <a:tabLst/>
+              <a:defRPr lang="en-US" sz="2400" b="0" i="0" u="none" strike="noStrike" kern="1200" cap="none">
+                <a:ln>
+                  <a:noFill/>
+                </a:ln>
+                <a:highlight>
+                  <a:scrgbClr r="0" g="0" b="0">
+                    <a:alpha val="0"/>
+                  </a:scrgbClr>
+                </a:highlight>
+                <a:latin typeface="URW Bookman" pitchFamily="2"/>
+                <a:ea typeface="Nimbus Sans" pitchFamily="2"/>
+                <a:cs typeface="FreeSans" pitchFamily="2"/>
+              </a:defRPr>
+            </a:lvl7pPr>
+            <a:lvl8pPr marL="3429000" indent="-228600" algn="l" defTabSz="914400" rtl="0" eaLnBrk="1" latinLnBrk="0" hangingPunct="1">
+              <a:lnSpc>
+                <a:spcPct val="90000"/>
+              </a:lnSpc>
+              <a:spcBef>
+                <a:spcPts val="500"/>
+              </a:spcBef>
+              <a:buFont typeface="Arial" panose="020B0604020202020204" pitchFamily="34" charset="0"/>
+              <a:buChar char="•"/>
+              <a:defRPr sz="1800" kern="1200">
+                <a:solidFill>
+                  <a:schemeClr val="tx1"/>
+                </a:solidFill>
+                <a:latin typeface="+mn-lt"/>
+                <a:ea typeface="+mn-ea"/>
+                <a:cs typeface="+mn-cs"/>
+              </a:defRPr>
+            </a:lvl8pPr>
+            <a:lvl9pPr marL="3886200" indent="-228600" algn="l" defTabSz="914400" rtl="0" eaLnBrk="1" latinLnBrk="0" hangingPunct="1">
+              <a:lnSpc>
+                <a:spcPct val="90000"/>
+              </a:lnSpc>
+              <a:spcBef>
+                <a:spcPts val="500"/>
+              </a:spcBef>
+              <a:buFont typeface="Arial" panose="020B0604020202020204" pitchFamily="34" charset="0"/>
+              <a:buChar char="•"/>
+              <a:defRPr sz="1800" kern="1200">
+                <a:solidFill>
+                  <a:schemeClr val="tx1"/>
+                </a:solidFill>
+                <a:latin typeface="+mn-lt"/>
+                <a:ea typeface="+mn-ea"/>
+                <a:cs typeface="+mn-cs"/>
+              </a:defRPr>
+            </a:lvl9pPr>
+          </a:lstStyle>
+          <a:p>
+            <a:pPr marL="342900" indent="-342900"/>
+            <a:r>
+              <a:rPr lang="en-US" dirty="0">
+                <a:solidFill>
+                  <a:schemeClr val="bg1"/>
+                </a:solidFill>
+              </a:rPr>
+              <a:t>I will have to look into this</a:t>
+            </a:r>
+          </a:p>
+        </p:txBody>
+      </p:sp>
+    </p:spTree>
+    <p:extLst>
+      <p:ext uri="{BB962C8B-B14F-4D97-AF65-F5344CB8AC3E}">
+        <p14:creationId xmlns:p14="http://schemas.microsoft.com/office/powerpoint/2010/main" val="1057921343"/>
+      </p:ext>
+    </p:extLst>
+  </p:cSld>
+  <p:clrMapOvr>
+    <a:masterClrMapping/>
+  </p:clrMapOvr>
+</p:sld>
+</file>
+
+<file path=ppt/slides/slide14.xml><?xml version="1.0" encoding="utf-8"?>
+<p:sld xmlns:a="http://schemas.openxmlformats.org/drawingml/2006/main" xmlns:r="http://schemas.openxmlformats.org/officeDocument/2006/relationships" xmlns:p="http://schemas.openxmlformats.org/presentationml/2006/main">
+  <p:cSld name="page14">
+    <p:spTree>
+      <p:nvGrpSpPr>
+        <p:cNvPr id="1" name=""/>
+        <p:cNvGrpSpPr/>
+        <p:nvPr/>
+      </p:nvGrpSpPr>
+      <p:grpSpPr>
+        <a:xfrm>
+          <a:off x="0" y="0"/>
+          <a:ext cx="0" cy="0"/>
+          <a:chOff x="0" y="0"/>
+          <a:chExt cx="0" cy="0"/>
+        </a:xfrm>
+      </p:grpSpPr>
+      <p:sp>
+        <p:nvSpPr>
+          <p:cNvPr id="2" name="Title 1">
+            <a:extLst>
+              <a:ext uri="{FF2B5EF4-FFF2-40B4-BE49-F238E27FC236}">
+                <a16:creationId xmlns:a16="http://schemas.microsoft.com/office/drawing/2014/main" id="{7213FEA8-EFA0-0ABF-B290-871B771B9A08}"/>
+              </a:ext>
+            </a:extLst>
+          </p:cNvPr>
+          <p:cNvSpPr txBox="1">
+            <a:spLocks noGrp="1"/>
+          </p:cNvSpPr>
+          <p:nvPr>
+            <p:ph type="title" idx="4294967295"/>
+          </p:nvPr>
+        </p:nvSpPr>
+        <p:spPr>
+          <a:xfrm>
+            <a:off x="503999" y="422301"/>
+            <a:ext cx="9071640" cy="553998"/>
+          </a:xfrm>
+        </p:spPr>
+        <p:txBody>
+          <a:bodyPr>
+            <a:spAutoFit/>
+          </a:bodyPr>
+          <a:lstStyle/>
+          <a:p>
+            <a:pPr lvl="0"/>
+            <a:r>
+              <a:rPr lang="en-US" dirty="0">
+                <a:solidFill>
+                  <a:schemeClr val="bg1"/>
+                </a:solidFill>
+              </a:rPr>
+              <a:t>Challenges of Graphing Output</a:t>
+            </a:r>
+          </a:p>
+        </p:txBody>
+      </p:sp>
+      <p:sp>
+        <p:nvSpPr>
+          <p:cNvPr id="3" name="Text Placeholder 2">
+            <a:extLst>
+              <a:ext uri="{FF2B5EF4-FFF2-40B4-BE49-F238E27FC236}">
+                <a16:creationId xmlns:a16="http://schemas.microsoft.com/office/drawing/2014/main" id="{C220D056-3C9A-0F26-01B7-EC49552EA02A}"/>
+              </a:ext>
+            </a:extLst>
+          </p:cNvPr>
+          <p:cNvSpPr txBox="1">
+            <a:spLocks noGrp="1"/>
+          </p:cNvSpPr>
+          <p:nvPr>
+            <p:ph type="body" idx="4294967295"/>
+          </p:nvPr>
+        </p:nvSpPr>
+        <p:spPr>
+          <a:xfrm>
+            <a:off x="507959" y="1172520"/>
+            <a:ext cx="9071640" cy="3828239"/>
+          </a:xfrm>
+        </p:spPr>
+        <p:txBody>
+          <a:bodyPr/>
+          <a:lstStyle/>
+          <a:p>
+            <a:pPr marL="342900" indent="-342900"/>
+            <a:r>
+              <a:rPr lang="en-US" dirty="0">
+                <a:solidFill>
+                  <a:schemeClr val="bg1"/>
+                </a:solidFill>
+              </a:rPr>
+              <a:t>Most model constants effect multiple model outputs</a:t>
+            </a:r>
+          </a:p>
+          <a:p>
+            <a:pPr marL="342900" indent="-342900"/>
+            <a:r>
+              <a:rPr lang="en-US" dirty="0">
+                <a:solidFill>
+                  <a:schemeClr val="bg1"/>
+                </a:solidFill>
+              </a:rPr>
+              <a:t>Model output is multidimensional</a:t>
+            </a:r>
+          </a:p>
+          <a:p>
+            <a:pPr marL="342900" indent="-342900"/>
+            <a:r>
+              <a:rPr lang="en-US" dirty="0">
+                <a:solidFill>
+                  <a:schemeClr val="bg1"/>
+                </a:solidFill>
+              </a:rPr>
+              <a:t>To solve these problems, we can choose a single column from the output data, use time as the x-axis, use the one model constant we changed as the y-axis, and use a single model output as the z-axis.  </a:t>
+            </a:r>
+          </a:p>
+        </p:txBody>
+      </p:sp>
+    </p:spTree>
+  </p:cSld>
+  <p:clrMapOvr>
+    <a:masterClrMapping/>
+  </p:clrMapOvr>
+</p:sld>
+</file>
+
+<file path=ppt/slides/slide15.xml><?xml version="1.0" encoding="utf-8"?>
+<p:sld xmlns:a="http://schemas.openxmlformats.org/drawingml/2006/main" xmlns:r="http://schemas.openxmlformats.org/officeDocument/2006/relationships" xmlns:p="http://schemas.openxmlformats.org/presentationml/2006/main">
   <p:cSld name="page16">
     <p:spTree>
       <p:nvGrpSpPr>
@@ -5511,11 +6818,11 @@
         <p:spPr>
           <a:xfrm>
             <a:off x="503999" y="422301"/>
-            <a:ext cx="9071640" cy="553998"/>
+            <a:ext cx="3052001" cy="553998"/>
           </a:xfrm>
         </p:spPr>
         <p:txBody>
-          <a:bodyPr>
+          <a:bodyPr wrap="square">
             <a:spAutoFit/>
           </a:bodyPr>
           <a:lstStyle/>
@@ -5550,12 +6857,14 @@
         </p:nvSpPr>
         <p:spPr>
           <a:xfrm>
-            <a:off x="503999" y="1071720"/>
-            <a:ext cx="9001800" cy="3719520"/>
+            <a:off x="340123" y="1081994"/>
+            <a:ext cx="3461504" cy="3719520"/>
           </a:xfrm>
         </p:spPr>
         <p:txBody>
-          <a:bodyPr/>
+          <a:bodyPr>
+            <a:normAutofit/>
+          </a:bodyPr>
           <a:lstStyle/>
           <a:p>
             <a:pPr marL="342900" indent="-342900"/>
@@ -5565,33 +6874,145 @@
                   <a:schemeClr val="bg1"/>
                 </a:solidFill>
               </a:rPr>
-              <a:t>Pick 1 constant, one output, one column, graph to time, justify decisions</a:t>
-            </a:r>
-          </a:p>
-          <a:p>
-            <a:pPr marL="342900" indent="-342900"/>
+              <a:t>This graph shows how the model constant </a:t>
+            </a:r>
+            <a:r>
+              <a:rPr lang="en-US" i="1" dirty="0" err="1">
+                <a:solidFill>
+                  <a:schemeClr val="bg1"/>
+                </a:solidFill>
+              </a:rPr>
+              <a:t>vkc</a:t>
+            </a:r>
             <a:r>
               <a:rPr lang="en-US" dirty="0">
                 <a:solidFill>
                   <a:schemeClr val="bg1"/>
                 </a:solidFill>
               </a:rPr>
-              <a:t>Show graph</a:t>
-            </a:r>
-          </a:p>
-          <a:p>
-            <a:pPr marL="342900" indent="-342900"/>
+              <a:t> affects the model output </a:t>
+            </a:r>
+            <a:r>
+              <a:rPr lang="en-US" i="1" dirty="0">
+                <a:solidFill>
+                  <a:schemeClr val="bg1"/>
+                </a:solidFill>
+              </a:rPr>
+              <a:t>lakestate_vars__savedtke1_col </a:t>
+            </a:r>
             <a:r>
               <a:rPr lang="en-US" dirty="0">
                 <a:solidFill>
                   <a:schemeClr val="bg1"/>
                 </a:solidFill>
               </a:rPr>
-              <a:t>Explain what information it conveys</a:t>
-            </a:r>
-          </a:p>
-        </p:txBody>
-      </p:sp>
+              <a:t>over a period of 35 time steps for a single lake column.</a:t>
+            </a:r>
+          </a:p>
+        </p:txBody>
+      </p:sp>
+      <p:grpSp>
+        <p:nvGrpSpPr>
+          <p:cNvPr id="7" name="Group 6">
+            <a:extLst>
+              <a:ext uri="{FF2B5EF4-FFF2-40B4-BE49-F238E27FC236}">
+                <a16:creationId xmlns:a16="http://schemas.microsoft.com/office/drawing/2014/main" id="{AF25E7DB-69CA-4FAC-8C45-99C8D86EF4E1}"/>
+              </a:ext>
+            </a:extLst>
+          </p:cNvPr>
+          <p:cNvGrpSpPr>
+            <a:grpSpLocks noChangeAspect="1"/>
+          </p:cNvGrpSpPr>
+          <p:nvPr/>
+        </p:nvGrpSpPr>
+        <p:grpSpPr>
+          <a:xfrm>
+            <a:off x="4047254" y="-392"/>
+            <a:ext cx="6033371" cy="5670942"/>
+            <a:chOff x="3779383" y="0"/>
+            <a:chExt cx="5955938" cy="5598160"/>
+          </a:xfrm>
+        </p:grpSpPr>
+        <p:sp>
+          <p:nvSpPr>
+            <p:cNvPr id="6" name="Rectangle 5">
+              <a:extLst>
+                <a:ext uri="{FF2B5EF4-FFF2-40B4-BE49-F238E27FC236}">
+                  <a16:creationId xmlns:a16="http://schemas.microsoft.com/office/drawing/2014/main" id="{9253F05C-EA1D-8060-2D15-4444A5C4C9ED}"/>
+                </a:ext>
+              </a:extLst>
+            </p:cNvPr>
+            <p:cNvSpPr/>
+            <p:nvPr/>
+          </p:nvSpPr>
+          <p:spPr>
+            <a:xfrm>
+              <a:off x="3779383" y="0"/>
+              <a:ext cx="5955938" cy="5598160"/>
+            </a:xfrm>
+            <a:prstGeom prst="rect">
+              <a:avLst/>
+            </a:prstGeom>
+            <a:solidFill>
+              <a:schemeClr val="bg1"/>
+            </a:solidFill>
+          </p:spPr>
+          <p:style>
+            <a:lnRef idx="2">
+              <a:schemeClr val="accent1">
+                <a:shade val="15000"/>
+              </a:schemeClr>
+            </a:lnRef>
+            <a:fillRef idx="1">
+              <a:schemeClr val="accent1"/>
+            </a:fillRef>
+            <a:effectRef idx="0">
+              <a:schemeClr val="accent1"/>
+            </a:effectRef>
+            <a:fontRef idx="minor">
+              <a:schemeClr val="lt1"/>
+            </a:fontRef>
+          </p:style>
+          <p:txBody>
+            <a:bodyPr rtlCol="0" anchor="ctr"/>
+            <a:lstStyle/>
+            <a:p>
+              <a:pPr algn="ctr"/>
+              <a:endParaRPr lang="en-US"/>
+            </a:p>
+          </p:txBody>
+        </p:sp>
+        <p:pic>
+          <p:nvPicPr>
+            <p:cNvPr id="5" name="Picture 4">
+              <a:extLst>
+                <a:ext uri="{FF2B5EF4-FFF2-40B4-BE49-F238E27FC236}">
+                  <a16:creationId xmlns:a16="http://schemas.microsoft.com/office/drawing/2014/main" id="{8172BEEA-49A1-F1D6-759E-47E640BAE2B9}"/>
+                </a:ext>
+              </a:extLst>
+            </p:cNvPr>
+            <p:cNvPicPr>
+              <a:picLocks noChangeAspect="1"/>
+            </p:cNvPicPr>
+            <p:nvPr/>
+          </p:nvPicPr>
+          <p:blipFill>
+            <a:blip r:embed="rId3"/>
+            <a:stretch>
+              <a:fillRect/>
+            </a:stretch>
+          </p:blipFill>
+          <p:spPr>
+            <a:xfrm>
+              <a:off x="3860084" y="40640"/>
+              <a:ext cx="5794535" cy="5516880"/>
+            </a:xfrm>
+            <a:prstGeom prst="rect">
+              <a:avLst/>
+            </a:prstGeom>
+          </p:spPr>
+        </p:pic>
+      </p:grpSp>
     </p:spTree>
   </p:cSld>
   <p:clrMapOvr>
@@ -5600,7 +7021,7 @@
 </p:sld>
 </file>
 
-<file path=ppt/slides/slide11.xml><?xml version="1.0" encoding="utf-8"?>
+<file path=ppt/slides/slide16.xml><?xml version="1.0" encoding="utf-8"?>
 <p:sld xmlns:a="http://schemas.openxmlformats.org/drawingml/2006/main" xmlns:r="http://schemas.openxmlformats.org/officeDocument/2006/relationships" xmlns:p="http://schemas.openxmlformats.org/presentationml/2006/main">
   <p:cSld name="page19">
     <p:spTree>
@@ -5690,7 +7111,80 @@
                   <a:schemeClr val="bg1"/>
                 </a:solidFill>
               </a:rPr>
-              <a:t>Explain how the graph was created</a:t>
+              <a:t>The output data in the form of a </a:t>
+            </a:r>
+            <a:r>
+              <a:rPr lang="en-US" dirty="0" err="1">
+                <a:solidFill>
+                  <a:schemeClr val="bg1"/>
+                </a:solidFill>
+              </a:rPr>
+              <a:t>NetCDF</a:t>
+            </a:r>
+            <a:r>
+              <a:rPr lang="en-US" dirty="0">
+                <a:solidFill>
+                  <a:schemeClr val="bg1"/>
+                </a:solidFill>
+              </a:rPr>
+              <a:t> file is used. </a:t>
+            </a:r>
+          </a:p>
+          <a:p>
+            <a:pPr marL="342900" indent="-342900"/>
+            <a:r>
+              <a:rPr lang="en-US" dirty="0">
+                <a:solidFill>
+                  <a:schemeClr val="bg1"/>
+                </a:solidFill>
+              </a:rPr>
+              <a:t>From the output data is pulled the values for the model constant </a:t>
+            </a:r>
+            <a:r>
+              <a:rPr lang="en-US" i="1" dirty="0" err="1">
+                <a:solidFill>
+                  <a:schemeClr val="bg1"/>
+                </a:solidFill>
+              </a:rPr>
+              <a:t>vkc</a:t>
+            </a:r>
+            <a:endParaRPr lang="en-US" dirty="0">
+              <a:solidFill>
+                <a:schemeClr val="bg1"/>
+              </a:solidFill>
+            </a:endParaRPr>
+          </a:p>
+          <a:p>
+            <a:pPr marL="342900" indent="-342900"/>
+            <a:r>
+              <a:rPr lang="en-US" dirty="0">
+                <a:solidFill>
+                  <a:schemeClr val="bg1"/>
+                </a:solidFill>
+              </a:rPr>
+              <a:t>Time is just interpolated from 0 to 35. </a:t>
+            </a:r>
+          </a:p>
+          <a:p>
+            <a:pPr marL="342900" indent="-342900"/>
+            <a:r>
+              <a:rPr lang="en-US" dirty="0">
+                <a:solidFill>
+                  <a:schemeClr val="bg1"/>
+                </a:solidFill>
+              </a:rPr>
+              <a:t>From the output data is pulled the values for a single model output at a single column. </a:t>
+            </a:r>
+          </a:p>
+          <a:p>
+            <a:pPr marL="342900" indent="-342900"/>
+            <a:r>
+              <a:rPr lang="en-US" dirty="0">
+                <a:solidFill>
+                  <a:schemeClr val="bg1"/>
+                </a:solidFill>
+              </a:rPr>
+              <a:t>Using matplotlib, all three dimensions are graphed. </a:t>
             </a:r>
           </a:p>
         </p:txBody>
@@ -5704,6 +7198,377 @@
 </file>
 
 <file path=ppt/slides/slide2.xml><?xml version="1.0" encoding="utf-8"?>
+<p:sld xmlns:a="http://schemas.openxmlformats.org/drawingml/2006/main" xmlns:r="http://schemas.openxmlformats.org/officeDocument/2006/relationships" xmlns:p="http://schemas.openxmlformats.org/presentationml/2006/main">
+  <p:cSld>
+    <p:spTree>
+      <p:nvGrpSpPr>
+        <p:cNvPr id="1" name=""/>
+        <p:cNvGrpSpPr/>
+        <p:nvPr/>
+      </p:nvGrpSpPr>
+      <p:grpSpPr>
+        <a:xfrm>
+          <a:off x="0" y="0"/>
+          <a:ext cx="0" cy="0"/>
+          <a:chOff x="0" y="0"/>
+          <a:chExt cx="0" cy="0"/>
+        </a:xfrm>
+      </p:grpSpPr>
+      <p:sp>
+        <p:nvSpPr>
+          <p:cNvPr id="2" name="Title 1">
+            <a:extLst>
+              <a:ext uri="{FF2B5EF4-FFF2-40B4-BE49-F238E27FC236}">
+                <a16:creationId xmlns:a16="http://schemas.microsoft.com/office/drawing/2014/main" id="{B8086899-15DA-5703-76E2-51D23E842D09}"/>
+              </a:ext>
+            </a:extLst>
+          </p:cNvPr>
+          <p:cNvSpPr txBox="1">
+            <a:spLocks/>
+          </p:cNvSpPr>
+          <p:nvPr/>
+        </p:nvSpPr>
+        <p:spPr>
+          <a:xfrm>
+            <a:off x="503999" y="422301"/>
+            <a:ext cx="9071640" cy="553998"/>
+          </a:xfrm>
+          <a:prstGeom prst="rect">
+            <a:avLst/>
+          </a:prstGeom>
+          <a:noFill/>
+          <a:ln>
+            <a:noFill/>
+          </a:ln>
+        </p:spPr>
+        <p:txBody>
+          <a:bodyPr vert="horz" lIns="0" tIns="0" rIns="0" bIns="0" anchor="ctr">
+            <a:spAutoFit/>
+          </a:bodyPr>
+          <a:lstStyle>
+            <a:lvl1pPr lvl="0" algn="ctr" rtl="0" hangingPunct="0">
+              <a:buNone/>
+              <a:tabLst/>
+              <a:defRPr lang="en-US" sz="3600" b="0" i="0" u="none" strike="noStrike" kern="1200" cap="none">
+                <a:ln>
+                  <a:noFill/>
+                </a:ln>
+                <a:highlight>
+                  <a:scrgbClr r="0" g="0" b="0">
+                    <a:alpha val="0"/>
+                  </a:scrgbClr>
+                </a:highlight>
+                <a:latin typeface="URW Bookman" pitchFamily="2"/>
+                <a:ea typeface="Nimbus Sans" pitchFamily="2"/>
+                <a:cs typeface="FreeSans" pitchFamily="2"/>
+              </a:defRPr>
+            </a:lvl1pPr>
+          </a:lstStyle>
+          <a:p>
+            <a:r>
+              <a:rPr lang="en-US" dirty="0">
+                <a:solidFill>
+                  <a:schemeClr val="bg1"/>
+                </a:solidFill>
+              </a:rPr>
+              <a:t>Problem of Analysis</a:t>
+            </a:r>
+          </a:p>
+        </p:txBody>
+      </p:sp>
+      <p:sp>
+        <p:nvSpPr>
+          <p:cNvPr id="3" name="Text Placeholder 2">
+            <a:extLst>
+              <a:ext uri="{FF2B5EF4-FFF2-40B4-BE49-F238E27FC236}">
+                <a16:creationId xmlns:a16="http://schemas.microsoft.com/office/drawing/2014/main" id="{0CD48D6A-4BDE-1B52-9184-3845B1664AB8}"/>
+              </a:ext>
+            </a:extLst>
+          </p:cNvPr>
+          <p:cNvSpPr txBox="1">
+            <a:spLocks/>
+          </p:cNvSpPr>
+          <p:nvPr/>
+        </p:nvSpPr>
+        <p:spPr>
+          <a:xfrm>
+            <a:off x="503999" y="1326600"/>
+            <a:ext cx="9071640" cy="3288239"/>
+          </a:xfrm>
+          <a:prstGeom prst="rect">
+            <a:avLst/>
+          </a:prstGeom>
+          <a:noFill/>
+          <a:ln>
+            <a:noFill/>
+          </a:ln>
+        </p:spPr>
+        <p:txBody>
+          <a:bodyPr vert="horz" lIns="0" tIns="0" rIns="0" bIns="0">
+            <a:normAutofit/>
+          </a:bodyPr>
+          <a:lstStyle>
+            <a:lvl1pPr lvl="0" rtl="0" hangingPunct="0">
+              <a:spcBef>
+                <a:spcPts val="1417"/>
+              </a:spcBef>
+              <a:spcAft>
+                <a:spcPts val="0"/>
+              </a:spcAft>
+              <a:buSzPct val="45000"/>
+              <a:buFont typeface="OpenSymbol"/>
+              <a:buChar char="●"/>
+              <a:tabLst/>
+              <a:defRPr lang="en-US" sz="2400" b="0" i="0" u="none" strike="noStrike" kern="1200" cap="none">
+                <a:ln>
+                  <a:noFill/>
+                </a:ln>
+                <a:highlight>
+                  <a:scrgbClr r="0" g="0" b="0">
+                    <a:alpha val="0"/>
+                  </a:scrgbClr>
+                </a:highlight>
+                <a:latin typeface="URW Bookman" pitchFamily="2"/>
+                <a:ea typeface="Nimbus Sans" pitchFamily="2"/>
+                <a:cs typeface="FreeSans" pitchFamily="2"/>
+              </a:defRPr>
+            </a:lvl1pPr>
+            <a:lvl2pPr lvl="1" rtl="0" hangingPunct="0">
+              <a:spcBef>
+                <a:spcPts val="1417"/>
+              </a:spcBef>
+              <a:spcAft>
+                <a:spcPts val="0"/>
+              </a:spcAft>
+              <a:buSzPct val="75000"/>
+              <a:buFont typeface="OpenSymbol"/>
+              <a:buChar char="–"/>
+              <a:tabLst/>
+              <a:defRPr lang="en-US" sz="2400" b="0" i="0" u="none" strike="noStrike" kern="1200" cap="none">
+                <a:ln>
+                  <a:noFill/>
+                </a:ln>
+                <a:highlight>
+                  <a:scrgbClr r="0" g="0" b="0">
+                    <a:alpha val="0"/>
+                  </a:scrgbClr>
+                </a:highlight>
+                <a:latin typeface="URW Bookman" pitchFamily="2"/>
+                <a:ea typeface="Nimbus Sans" pitchFamily="2"/>
+                <a:cs typeface="FreeSans" pitchFamily="2"/>
+              </a:defRPr>
+            </a:lvl2pPr>
+            <a:lvl3pPr lvl="2" rtl="0" hangingPunct="0">
+              <a:spcBef>
+                <a:spcPts val="1417"/>
+              </a:spcBef>
+              <a:spcAft>
+                <a:spcPts val="0"/>
+              </a:spcAft>
+              <a:buSzPct val="45000"/>
+              <a:buFont typeface="OpenSymbol"/>
+              <a:buChar char="●"/>
+              <a:tabLst/>
+              <a:defRPr lang="en-US" sz="2400" b="0" i="0" u="none" strike="noStrike" kern="1200" cap="none">
+                <a:ln>
+                  <a:noFill/>
+                </a:ln>
+                <a:highlight>
+                  <a:scrgbClr r="0" g="0" b="0">
+                    <a:alpha val="0"/>
+                  </a:scrgbClr>
+                </a:highlight>
+                <a:latin typeface="URW Bookman" pitchFamily="2"/>
+                <a:ea typeface="Nimbus Sans" pitchFamily="2"/>
+                <a:cs typeface="FreeSans" pitchFamily="2"/>
+              </a:defRPr>
+            </a:lvl3pPr>
+            <a:lvl4pPr lvl="3" rtl="0" hangingPunct="0">
+              <a:spcBef>
+                <a:spcPts val="1417"/>
+              </a:spcBef>
+              <a:spcAft>
+                <a:spcPts val="0"/>
+              </a:spcAft>
+              <a:buSzPct val="75000"/>
+              <a:buFont typeface="OpenSymbol"/>
+              <a:buChar char="–"/>
+              <a:tabLst/>
+              <a:defRPr lang="en-US" sz="2400" b="0" i="0" u="none" strike="noStrike" kern="1200" cap="none">
+                <a:ln>
+                  <a:noFill/>
+                </a:ln>
+                <a:highlight>
+                  <a:scrgbClr r="0" g="0" b="0">
+                    <a:alpha val="0"/>
+                  </a:scrgbClr>
+                </a:highlight>
+                <a:latin typeface="URW Bookman" pitchFamily="2"/>
+                <a:ea typeface="Nimbus Sans" pitchFamily="2"/>
+                <a:cs typeface="FreeSans" pitchFamily="2"/>
+              </a:defRPr>
+            </a:lvl4pPr>
+            <a:lvl5pPr lvl="4" rtl="0" hangingPunct="0">
+              <a:spcBef>
+                <a:spcPts val="1417"/>
+              </a:spcBef>
+              <a:spcAft>
+                <a:spcPts val="0"/>
+              </a:spcAft>
+              <a:buSzPct val="45000"/>
+              <a:buFont typeface="OpenSymbol"/>
+              <a:buChar char="●"/>
+              <a:tabLst/>
+              <a:defRPr lang="en-US" sz="2400" b="0" i="0" u="none" strike="noStrike" kern="1200" cap="none">
+                <a:ln>
+                  <a:noFill/>
+                </a:ln>
+                <a:highlight>
+                  <a:scrgbClr r="0" g="0" b="0">
+                    <a:alpha val="0"/>
+                  </a:scrgbClr>
+                </a:highlight>
+                <a:latin typeface="URW Bookman" pitchFamily="2"/>
+                <a:ea typeface="Nimbus Sans" pitchFamily="2"/>
+                <a:cs typeface="FreeSans" pitchFamily="2"/>
+              </a:defRPr>
+            </a:lvl5pPr>
+            <a:lvl6pPr lvl="5" rtl="0" hangingPunct="0">
+              <a:spcBef>
+                <a:spcPts val="1417"/>
+              </a:spcBef>
+              <a:spcAft>
+                <a:spcPts val="0"/>
+              </a:spcAft>
+              <a:buSzPct val="45000"/>
+              <a:buFont typeface="OpenSymbol"/>
+              <a:buChar char="●"/>
+              <a:tabLst/>
+              <a:defRPr lang="en-US" sz="2400" b="0" i="0" u="none" strike="noStrike" kern="1200" cap="none">
+                <a:ln>
+                  <a:noFill/>
+                </a:ln>
+                <a:highlight>
+                  <a:scrgbClr r="0" g="0" b="0">
+                    <a:alpha val="0"/>
+                  </a:scrgbClr>
+                </a:highlight>
+                <a:latin typeface="URW Bookman" pitchFamily="2"/>
+                <a:ea typeface="Nimbus Sans" pitchFamily="2"/>
+                <a:cs typeface="FreeSans" pitchFamily="2"/>
+              </a:defRPr>
+            </a:lvl6pPr>
+            <a:lvl7pPr lvl="6" rtl="0" hangingPunct="0">
+              <a:spcBef>
+                <a:spcPts val="1417"/>
+              </a:spcBef>
+              <a:spcAft>
+                <a:spcPts val="0"/>
+              </a:spcAft>
+              <a:buSzPct val="45000"/>
+              <a:buFont typeface="OpenSymbol"/>
+              <a:buChar char="●"/>
+              <a:tabLst/>
+              <a:defRPr lang="en-US" sz="2400" b="0" i="0" u="none" strike="noStrike" kern="1200" cap="none">
+                <a:ln>
+                  <a:noFill/>
+                </a:ln>
+                <a:highlight>
+                  <a:scrgbClr r="0" g="0" b="0">
+                    <a:alpha val="0"/>
+                  </a:scrgbClr>
+                </a:highlight>
+                <a:latin typeface="URW Bookman" pitchFamily="2"/>
+                <a:ea typeface="Nimbus Sans" pitchFamily="2"/>
+                <a:cs typeface="FreeSans" pitchFamily="2"/>
+              </a:defRPr>
+            </a:lvl7pPr>
+            <a:lvl8pPr marL="3429000" indent="-228600" algn="l" defTabSz="914400" rtl="0" eaLnBrk="1" latinLnBrk="0" hangingPunct="1">
+              <a:lnSpc>
+                <a:spcPct val="90000"/>
+              </a:lnSpc>
+              <a:spcBef>
+                <a:spcPts val="500"/>
+              </a:spcBef>
+              <a:buFont typeface="Arial" panose="020B0604020202020204" pitchFamily="34" charset="0"/>
+              <a:buChar char="•"/>
+              <a:defRPr sz="1800" kern="1200">
+                <a:solidFill>
+                  <a:schemeClr val="tx1"/>
+                </a:solidFill>
+                <a:latin typeface="+mn-lt"/>
+                <a:ea typeface="+mn-ea"/>
+                <a:cs typeface="+mn-cs"/>
+              </a:defRPr>
+            </a:lvl8pPr>
+            <a:lvl9pPr marL="3886200" indent="-228600" algn="l" defTabSz="914400" rtl="0" eaLnBrk="1" latinLnBrk="0" hangingPunct="1">
+              <a:lnSpc>
+                <a:spcPct val="90000"/>
+              </a:lnSpc>
+              <a:spcBef>
+                <a:spcPts val="500"/>
+              </a:spcBef>
+              <a:buFont typeface="Arial" panose="020B0604020202020204" pitchFamily="34" charset="0"/>
+              <a:buChar char="•"/>
+              <a:defRPr sz="1800" kern="1200">
+                <a:solidFill>
+                  <a:schemeClr val="tx1"/>
+                </a:solidFill>
+                <a:latin typeface="+mn-lt"/>
+                <a:ea typeface="+mn-ea"/>
+                <a:cs typeface="+mn-cs"/>
+              </a:defRPr>
+            </a:lvl9pPr>
+          </a:lstStyle>
+          <a:p>
+            <a:pPr marL="342900" indent="-342900"/>
+            <a:r>
+              <a:rPr lang="en-US" dirty="0">
+                <a:solidFill>
+                  <a:schemeClr val="bg1"/>
+                </a:solidFill>
+              </a:rPr>
+              <a:t>The ideal way to test which combinations of input values result in erroneous output would be to test every single combination of input values.</a:t>
+            </a:r>
+          </a:p>
+          <a:p>
+            <a:pPr marL="342900" indent="-342900"/>
+            <a:r>
+              <a:rPr lang="en-US" dirty="0">
+                <a:solidFill>
+                  <a:schemeClr val="bg1"/>
+                </a:solidFill>
+              </a:rPr>
+              <a:t>However, having many input variables that can each take many values will result in too many cases to test. </a:t>
+            </a:r>
+          </a:p>
+          <a:p>
+            <a:pPr marL="342900" indent="-342900"/>
+            <a:r>
+              <a:rPr lang="en-US" dirty="0">
+                <a:solidFill>
+                  <a:schemeClr val="bg1"/>
+                </a:solidFill>
+              </a:rPr>
+              <a:t>Combinatorial test reduces the number of tests while ensuring pseudo-comprehensive testing. </a:t>
+            </a:r>
+          </a:p>
+        </p:txBody>
+      </p:sp>
+    </p:spTree>
+    <p:extLst>
+      <p:ext uri="{BB962C8B-B14F-4D97-AF65-F5344CB8AC3E}">
+        <p14:creationId xmlns:p14="http://schemas.microsoft.com/office/powerpoint/2010/main" val="3043626"/>
+      </p:ext>
+    </p:extLst>
+  </p:cSld>
+  <p:clrMapOvr>
+    <a:masterClrMapping/>
+  </p:clrMapOvr>
+</p:sld>
+</file>
+
+<file path=ppt/slides/slide3.xml><?xml version="1.0" encoding="utf-8"?>
 <p:sld xmlns:a="http://schemas.openxmlformats.org/drawingml/2006/main" xmlns:r="http://schemas.openxmlformats.org/officeDocument/2006/relationships" xmlns:p="http://schemas.openxmlformats.org/presentationml/2006/main">
   <p:cSld name="page2">
     <p:spTree>
@@ -5778,39 +7643,218 @@
         </p:nvSpPr>
         <p:spPr/>
         <p:txBody>
-          <a:bodyPr/>
+          <a:bodyPr>
+            <a:normAutofit/>
+          </a:bodyPr>
           <a:lstStyle/>
           <a:p>
             <a:pPr marL="342900" indent="-342900"/>
             <a:r>
+              <a:rPr lang="en-US" i="1" dirty="0">
+                <a:solidFill>
+                  <a:schemeClr val="bg1"/>
+                </a:solidFill>
+              </a:rPr>
+              <a:t>NIST</a:t>
+            </a:r>
+            <a:r>
               <a:rPr lang="en-US" dirty="0">
                 <a:solidFill>
                   <a:schemeClr val="bg1"/>
                 </a:solidFill>
               </a:rPr>
-              <a:t>Premises of Combinatorial Testing</a:t>
+              <a:t> research found most software bugs are caused by combinations of a few parameters</a:t>
+            </a:r>
+            <a:r>
+              <a:rPr lang="en-US" i="1" baseline="30000" dirty="0">
+                <a:solidFill>
+                  <a:schemeClr val="bg1"/>
+                </a:solidFill>
+              </a:rPr>
+              <a:t>1</a:t>
+            </a:r>
+            <a:r>
+              <a:rPr lang="en-US" dirty="0">
+                <a:solidFill>
+                  <a:schemeClr val="bg1"/>
+                </a:solidFill>
+              </a:rPr>
+              <a:t>. </a:t>
             </a:r>
           </a:p>
           <a:p>
             <a:pPr marL="342900" indent="-342900"/>
             <a:r>
               <a:rPr lang="en-US" dirty="0">
+                <a:solidFill>
+                  <a:schemeClr val="bg1"/>
+                </a:solidFill>
+              </a:rPr>
+              <a:t>By testing all combinations of a certain number of parameters, most software bugs can be found with much fewer test cases. </a:t>
+            </a:r>
+          </a:p>
+          <a:p>
+            <a:pPr marL="342900" indent="-342900"/>
+            <a:r>
+              <a:rPr lang="en-US" i="1" dirty="0">
                 <a:solidFill>
                   <a:schemeClr val="bg1"/>
                 </a:solidFill>
               </a:rPr>
               <a:t>ACTS</a:t>
             </a:r>
-          </a:p>
-          <a:p>
-            <a:pPr marL="342900" indent="-342900"/>
             <a:r>
               <a:rPr lang="en-US" dirty="0">
                 <a:solidFill>
                   <a:schemeClr val="bg1"/>
                 </a:solidFill>
               </a:rPr>
-              <a:t>Conclusion of NIST Research</a:t>
+              <a:t> can generate covering arrays from 1-way to 6-way</a:t>
+            </a:r>
+            <a:r>
+              <a:rPr lang="en-US" baseline="30000" dirty="0">
+                <a:solidFill>
+                  <a:schemeClr val="bg1"/>
+                </a:solidFill>
+              </a:rPr>
+              <a:t>2</a:t>
+            </a:r>
+            <a:r>
+              <a:rPr lang="en-US" dirty="0">
+                <a:solidFill>
+                  <a:schemeClr val="bg1"/>
+                </a:solidFill>
+              </a:rPr>
+              <a:t>. </a:t>
+            </a:r>
+          </a:p>
+        </p:txBody>
+      </p:sp>
+      <p:sp>
+        <p:nvSpPr>
+          <p:cNvPr id="5" name="TextBox 4">
+            <a:extLst>
+              <a:ext uri="{FF2B5EF4-FFF2-40B4-BE49-F238E27FC236}">
+                <a16:creationId xmlns:a16="http://schemas.microsoft.com/office/drawing/2014/main" id="{9747BCA8-A847-7114-04B9-16833F38B983}"/>
+              </a:ext>
+            </a:extLst>
+          </p:cNvPr>
+          <p:cNvSpPr txBox="1"/>
+          <p:nvPr/>
+        </p:nvSpPr>
+        <p:spPr>
+          <a:xfrm>
+            <a:off x="251506" y="4820323"/>
+            <a:ext cx="9576626" cy="646331"/>
+          </a:xfrm>
+          <a:prstGeom prst="rect">
+            <a:avLst/>
+          </a:prstGeom>
+          <a:noFill/>
+        </p:spPr>
+        <p:txBody>
+          <a:bodyPr wrap="square" rtlCol="0">
+            <a:spAutoFit/>
+          </a:bodyPr>
+          <a:lstStyle/>
+          <a:p>
+            <a:r>
+              <a:rPr lang="en-US" sz="1200" dirty="0">
+                <a:solidFill>
+                  <a:schemeClr val="bg1"/>
+                </a:solidFill>
+              </a:rPr>
+              <a:t>1. </a:t>
+            </a:r>
+            <a:r>
+              <a:rPr lang="en-US" sz="1200" i="1" dirty="0">
+                <a:solidFill>
+                  <a:schemeClr val="bg1"/>
+                </a:solidFill>
+              </a:rPr>
+              <a:t>Automated Combinatorial Testing for Software (ACTS)</a:t>
+            </a:r>
+            <a:r>
+              <a:rPr lang="en-US" sz="1200" dirty="0">
+                <a:solidFill>
+                  <a:schemeClr val="bg1"/>
+                </a:solidFill>
+              </a:rPr>
+              <a:t>. NIST Computer Security Division. (2016, July 20). https://</a:t>
+            </a:r>
+            <a:r>
+              <a:rPr lang="en-US" sz="1200" dirty="0" err="1">
+                <a:solidFill>
+                  <a:schemeClr val="bg1"/>
+                </a:solidFill>
+              </a:rPr>
+              <a:t>csrc.nist.rip</a:t>
+            </a:r>
+            <a:r>
+              <a:rPr lang="en-US" sz="1200" dirty="0">
+                <a:solidFill>
+                  <a:schemeClr val="bg1"/>
+                </a:solidFill>
+              </a:rPr>
+              <a:t>/groups/SNS/acts/ </a:t>
+            </a:r>
+          </a:p>
+          <a:p>
+            <a:r>
+              <a:rPr lang="en-US" sz="1200" dirty="0">
+                <a:solidFill>
+                  <a:schemeClr val="bg1"/>
+                </a:solidFill>
+              </a:rPr>
+              <a:t>2. </a:t>
+            </a:r>
+            <a:r>
+              <a:rPr lang="en-US" sz="1200" i="1" dirty="0">
+                <a:solidFill>
+                  <a:schemeClr val="bg1"/>
+                </a:solidFill>
+              </a:rPr>
+              <a:t>User Guide for ACTS</a:t>
+            </a:r>
+            <a:r>
+              <a:rPr lang="en-US" sz="1200" dirty="0">
+                <a:solidFill>
+                  <a:schemeClr val="bg1"/>
+                </a:solidFill>
+              </a:rPr>
+              <a:t>. NIST. (n.d.). https://</a:t>
+            </a:r>
+            <a:r>
+              <a:rPr lang="en-US" sz="1200" dirty="0" err="1">
+                <a:solidFill>
+                  <a:schemeClr val="bg1"/>
+                </a:solidFill>
+              </a:rPr>
+              <a:t>csrc.nist.gov</a:t>
+            </a:r>
+            <a:r>
+              <a:rPr lang="en-US" sz="1200" dirty="0">
+                <a:solidFill>
+                  <a:schemeClr val="bg1"/>
+                </a:solidFill>
+              </a:rPr>
+              <a:t>/</a:t>
+            </a:r>
+            <a:r>
+              <a:rPr lang="en-US" sz="1200" dirty="0" err="1">
+                <a:solidFill>
+                  <a:schemeClr val="bg1"/>
+                </a:solidFill>
+              </a:rPr>
+              <a:t>csrc</a:t>
+            </a:r>
+            <a:r>
+              <a:rPr lang="en-US" sz="1200" dirty="0">
+                <a:solidFill>
+                  <a:schemeClr val="bg1"/>
+                </a:solidFill>
+              </a:rPr>
+              <a:t>/media/Projects/automated-combinatorial-testing-for-software/documents/acts_user_guide_for_basic1.0_and_advanced3.3_versions_nov23.pdf </a:t>
             </a:r>
           </a:p>
         </p:txBody>
@@ -5823,7 +7867,7 @@
 </p:sld>
 </file>
 
-<file path=ppt/slides/slide3.xml><?xml version="1.0" encoding="utf-8"?>
+<file path=ppt/slides/slide4.xml><?xml version="1.0" encoding="utf-8"?>
 <p:sld xmlns:a="http://schemas.openxmlformats.org/drawingml/2006/main" xmlns:r="http://schemas.openxmlformats.org/officeDocument/2006/relationships" xmlns:p="http://schemas.openxmlformats.org/presentationml/2006/main">
   <p:cSld name="page3">
     <p:spTree>
@@ -5903,7 +7947,9 @@
           </a:xfrm>
         </p:spPr>
         <p:txBody>
-          <a:bodyPr/>
+          <a:bodyPr>
+            <a:normAutofit fontScale="92500" lnSpcReduction="20000"/>
+          </a:bodyPr>
           <a:lstStyle/>
           <a:p>
             <a:pPr marL="342900" indent="-342900"/>
@@ -5913,7 +7959,43 @@
                   <a:schemeClr val="bg1"/>
                 </a:solidFill>
               </a:rPr>
-              <a:t>How we implemented ACTS on our model constants</a:t>
+              <a:t>The model constants, which determine how </a:t>
+            </a:r>
+            <a:r>
+              <a:rPr lang="en-US" dirty="0" err="1">
+                <a:solidFill>
+                  <a:schemeClr val="bg1"/>
+                </a:solidFill>
+                <a:latin typeface="Courier New" panose="02070309020205020404" pitchFamily="49" charset="0"/>
+                <a:cs typeface="Courier New" panose="02070309020205020404" pitchFamily="49" charset="0"/>
+              </a:rPr>
+              <a:t>LakeTemperature</a:t>
+            </a:r>
+            <a:r>
+              <a:rPr lang="en-US" dirty="0">
+                <a:solidFill>
+                  <a:schemeClr val="bg1"/>
+                </a:solidFill>
+              </a:rPr>
+              <a:t> runs, are used as the ‘input’ data for the combinatorial test cases. The model inputs, which determine the starting point of </a:t>
+            </a:r>
+            <a:r>
+              <a:rPr lang="en-US" dirty="0" err="1">
+                <a:solidFill>
+                  <a:schemeClr val="bg1"/>
+                </a:solidFill>
+                <a:latin typeface="Courier New" panose="02070309020205020404" pitchFamily="49" charset="0"/>
+                <a:cs typeface="Courier New" panose="02070309020205020404" pitchFamily="49" charset="0"/>
+              </a:rPr>
+              <a:t>LakeTemperature</a:t>
+            </a:r>
+            <a:r>
+              <a:rPr lang="en-US" dirty="0">
+                <a:solidFill>
+                  <a:schemeClr val="bg1"/>
+                </a:solidFill>
+              </a:rPr>
+              <a:t>, are not being tested. </a:t>
             </a:r>
           </a:p>
           <a:p>
@@ -5924,8 +8006,104 @@
                   <a:schemeClr val="bg1"/>
                 </a:solidFill>
               </a:rPr>
-              <a:t>How we check the results</a:t>
-            </a:r>
+              <a:t>Booleans can be either 0 or 1.</a:t>
+            </a:r>
+          </a:p>
+          <a:p>
+            <a:pPr marL="342900" indent="-342900"/>
+            <a:r>
+              <a:rPr lang="en-US" dirty="0">
+                <a:solidFill>
+                  <a:schemeClr val="bg1"/>
+                </a:solidFill>
+              </a:rPr>
+              <a:t>For integers, we linearly interpolate over their range to get up to 11 values. </a:t>
+            </a:r>
+          </a:p>
+          <a:p>
+            <a:pPr marL="342900" indent="-342900"/>
+            <a:r>
+              <a:rPr lang="en-US" dirty="0">
+                <a:solidFill>
+                  <a:schemeClr val="bg1"/>
+                </a:solidFill>
+              </a:rPr>
+              <a:t>For floats, we linearly interpolate over their range to get exactly 11 values. </a:t>
+            </a:r>
+          </a:p>
+          <a:p>
+            <a:pPr marL="342900" indent="-342900"/>
+            <a:r>
+              <a:rPr lang="en-US" i="1" dirty="0">
+                <a:solidFill>
+                  <a:schemeClr val="bg1"/>
+                </a:solidFill>
+              </a:rPr>
+              <a:t>ACTS</a:t>
+            </a:r>
+            <a:r>
+              <a:rPr lang="en-US" dirty="0">
+                <a:solidFill>
+                  <a:schemeClr val="bg1"/>
+                </a:solidFill>
+              </a:rPr>
+              <a:t> generates covering arrays from 2-way to 5-way and outputs a CSV file, from which </a:t>
+            </a:r>
+            <a:r>
+              <a:rPr lang="en-US" i="1" dirty="0" err="1">
+                <a:solidFill>
+                  <a:schemeClr val="bg1"/>
+                </a:solidFill>
+              </a:rPr>
+              <a:t>NetCDF</a:t>
+            </a:r>
+            <a:r>
+              <a:rPr lang="en-US" dirty="0">
+                <a:solidFill>
+                  <a:schemeClr val="bg1"/>
+                </a:solidFill>
+              </a:rPr>
+              <a:t> files are created using a Python script (</a:t>
+            </a:r>
+            <a:r>
+              <a:rPr lang="en-US" dirty="0">
+                <a:solidFill>
+                  <a:schemeClr val="bg1"/>
+                </a:solidFill>
+                <a:latin typeface="Courier New" panose="02070309020205020404" pitchFamily="49" charset="0"/>
+                <a:cs typeface="Courier New" panose="02070309020205020404" pitchFamily="49" charset="0"/>
+              </a:rPr>
+              <a:t>csv2nc</a:t>
+            </a:r>
+            <a:r>
+              <a:rPr lang="en-US" dirty="0">
+                <a:solidFill>
+                  <a:schemeClr val="bg1"/>
+                </a:solidFill>
+              </a:rPr>
+              <a:t>). These are run on the model using the </a:t>
+            </a:r>
+            <a:r>
+              <a:rPr lang="en-US" i="1" dirty="0" err="1">
+                <a:solidFill>
+                  <a:schemeClr val="bg1"/>
+                </a:solidFill>
+              </a:rPr>
+              <a:t>NetCDF</a:t>
+            </a:r>
+            <a:r>
+              <a:rPr lang="en-US" dirty="0">
+                <a:solidFill>
+                  <a:schemeClr val="bg1"/>
+                </a:solidFill>
+              </a:rPr>
+              <a:t> Cases Sampling Plugin. </a:t>
+            </a:r>
+            <a:endParaRPr lang="en-US" i="1" dirty="0">
+              <a:solidFill>
+                <a:schemeClr val="bg1"/>
+              </a:solidFill>
+            </a:endParaRPr>
           </a:p>
         </p:txBody>
       </p:sp>
@@ -5937,7 +8115,7 @@
 </p:sld>
 </file>
 
-<file path=ppt/slides/slide4.xml><?xml version="1.0" encoding="utf-8"?>
+<file path=ppt/slides/slide5.xml><?xml version="1.0" encoding="utf-8"?>
 <p:sld xmlns:a="http://schemas.openxmlformats.org/drawingml/2006/main" xmlns:r="http://schemas.openxmlformats.org/officeDocument/2006/relationships" xmlns:p="http://schemas.openxmlformats.org/presentationml/2006/main">
   <p:cSld name="page4">
     <p:spTree>
@@ -6012,7 +8190,9 @@
         </p:nvSpPr>
         <p:spPr/>
         <p:txBody>
-          <a:bodyPr/>
+          <a:bodyPr>
+            <a:normAutofit/>
+          </a:bodyPr>
           <a:lstStyle/>
           <a:p>
             <a:pPr marL="342900" indent="-342900"/>
@@ -6022,7 +8202,29 @@
                   <a:schemeClr val="bg1"/>
                 </a:solidFill>
               </a:rPr>
-              <a:t>How we check the results</a:t>
+              <a:t>Scientific software verification is difficult due to lacking a test oracle. </a:t>
+            </a:r>
+          </a:p>
+          <a:p>
+            <a:pPr marL="342900" indent="-342900"/>
+            <a:r>
+              <a:rPr lang="en-US" dirty="0">
+                <a:solidFill>
+                  <a:schemeClr val="bg1"/>
+                </a:solidFill>
+              </a:rPr>
+              <a:t>We implement checks that validate output, supported by the Fault Finding Analysis Plugin. </a:t>
+            </a:r>
+          </a:p>
+          <a:p>
+            <a:pPr marL="342900" indent="-342900"/>
+            <a:r>
+              <a:rPr lang="en-US" dirty="0">
+                <a:solidFill>
+                  <a:schemeClr val="bg1"/>
+                </a:solidFill>
+              </a:rPr>
+              <a:t>Checks include ranges of outputs, signs, enumerated values, finiteness, relationships to other inputs/outputs, and certain physical laws and restraints.</a:t>
             </a:r>
           </a:p>
         </p:txBody>
@@ -6035,7 +8237,7 @@
 </p:sld>
 </file>
 
-<file path=ppt/slides/slide5.xml><?xml version="1.0" encoding="utf-8"?>
+<file path=ppt/slides/slide6.xml><?xml version="1.0" encoding="utf-8"?>
 <p:sld xmlns:a="http://schemas.openxmlformats.org/drawingml/2006/main" xmlns:r="http://schemas.openxmlformats.org/officeDocument/2006/relationships" xmlns:p="http://schemas.openxmlformats.org/presentationml/2006/main">
   <p:cSld name="page7">
     <p:spTree>
@@ -6071,11 +8273,11 @@
         <p:spPr>
           <a:xfrm>
             <a:off x="503999" y="422301"/>
-            <a:ext cx="9071640" cy="553998"/>
+            <a:ext cx="3346641" cy="553998"/>
           </a:xfrm>
         </p:spPr>
         <p:txBody>
-          <a:bodyPr>
+          <a:bodyPr wrap="square">
             <a:spAutoFit/>
           </a:bodyPr>
           <a:lstStyle/>
@@ -6087,7 +8289,7 @@
                   <a:schemeClr val="bg1"/>
                 </a:solidFill>
               </a:rPr>
-              <a:t>Data</a:t>
+              <a:t>DOI 2 Data</a:t>
             </a:r>
           </a:p>
         </p:txBody>
@@ -6108,9 +8310,16 @@
             <p:ph type="body" idx="4294967295"/>
           </p:nvPr>
         </p:nvSpPr>
-        <p:spPr/>
-        <p:txBody>
-          <a:bodyPr/>
+        <p:spPr>
+          <a:xfrm>
+            <a:off x="503999" y="1326600"/>
+            <a:ext cx="3346641" cy="3288239"/>
+          </a:xfrm>
+        </p:spPr>
+        <p:txBody>
+          <a:bodyPr>
+            <a:normAutofit/>
+          </a:bodyPr>
           <a:lstStyle/>
           <a:p>
             <a:pPr marL="342900" indent="-342900"/>
@@ -6121,34 +8330,57 @@
                 </a:solidFill>
                 <a:latin typeface="AppleSystemUIFont" pitchFamily="2"/>
               </a:rPr>
-              <a:t>Statistics about degree of interaction</a:t>
-            </a:r>
-          </a:p>
-          <a:p>
-            <a:pPr marL="342900" indent="-342900"/>
-            <a:r>
-              <a:rPr lang="en-US" dirty="0">
-                <a:solidFill>
-                  <a:schemeClr val="bg1"/>
-                </a:solidFill>
-                <a:latin typeface="AppleSystemUIFont" pitchFamily="2"/>
-              </a:rPr>
-              <a:t>How many combinatorial test cases generated, executed, passed, skipped, failed, crashed</a:t>
-            </a:r>
-          </a:p>
-        </p:txBody>
-      </p:sp>
+              <a:t>DOI 2 results in 133 test cases. </a:t>
+            </a:r>
+          </a:p>
+        </p:txBody>
+      </p:sp>
+      <p:pic>
+        <p:nvPicPr>
+          <p:cNvPr id="5" name="Picture 4">
+            <a:extLst>
+              <a:ext uri="{FF2B5EF4-FFF2-40B4-BE49-F238E27FC236}">
+                <a16:creationId xmlns:a16="http://schemas.microsoft.com/office/drawing/2014/main" id="{15C94A79-243F-8D40-B5DA-BED8A49E8184}"/>
+              </a:ext>
+            </a:extLst>
+          </p:cNvPr>
+          <p:cNvPicPr>
+            <a:picLocks noChangeAspect="1"/>
+          </p:cNvPicPr>
+          <p:nvPr/>
+        </p:nvPicPr>
+        <p:blipFill>
+          <a:blip r:embed="rId4"/>
+          <a:stretch>
+            <a:fillRect/>
+          </a:stretch>
+        </p:blipFill>
+        <p:spPr>
+          <a:xfrm>
+            <a:off x="4114644" y="0"/>
+            <a:ext cx="6037257" cy="5670550"/>
+          </a:xfrm>
+          <a:prstGeom prst="rect">
+            <a:avLst/>
+          </a:prstGeom>
+        </p:spPr>
+      </p:pic>
     </p:spTree>
   </p:cSld>
   <p:clrMapOvr>
     <a:masterClrMapping/>
   </p:clrMapOvr>
+  <p:extLst>
+    <p:ext uri="{6950BFC3-D8DA-4A85-94F7-54DA5524770B}">
+      <p188:commentRel xmlns:p188="http://schemas.microsoft.com/office/powerpoint/2018/8/main" r:id="rId3"/>
+    </p:ext>
+  </p:extLst>
 </p:sld>
 </file>
 
-<file path=ppt/slides/slide6.xml><?xml version="1.0" encoding="utf-8"?>
+<file path=ppt/slides/slide7.xml><?xml version="1.0" encoding="utf-8"?>
 <p:sld xmlns:a="http://schemas.openxmlformats.org/drawingml/2006/main" xmlns:r="http://schemas.openxmlformats.org/officeDocument/2006/relationships" xmlns:p="http://schemas.openxmlformats.org/presentationml/2006/main">
-  <p:cSld name="page10">
+  <p:cSld>
     <p:spTree>
       <p:nvGrpSpPr>
         <p:cNvPr id="1" name=""/>
@@ -6168,37 +8400,59 @@
           <p:cNvPr id="2" name="Title 1">
             <a:extLst>
               <a:ext uri="{FF2B5EF4-FFF2-40B4-BE49-F238E27FC236}">
-                <a16:creationId xmlns:a16="http://schemas.microsoft.com/office/drawing/2014/main" id="{96CB14EF-3B5C-5292-14CB-3720F1B94FC4}"/>
+                <a16:creationId xmlns:a16="http://schemas.microsoft.com/office/drawing/2014/main" id="{9DF1FC1F-B83D-D043-0A53-60E474E50EFB}"/>
               </a:ext>
             </a:extLst>
           </p:cNvPr>
           <p:cNvSpPr txBox="1">
-            <a:spLocks noGrp="1"/>
-          </p:cNvSpPr>
-          <p:nvPr>
-            <p:ph type="title" idx="4294967295"/>
-          </p:nvPr>
+            <a:spLocks/>
+          </p:cNvSpPr>
+          <p:nvPr/>
         </p:nvSpPr>
         <p:spPr>
           <a:xfrm>
             <a:off x="503999" y="422301"/>
             <a:ext cx="9071640" cy="553998"/>
           </a:xfrm>
+          <a:prstGeom prst="rect">
+            <a:avLst/>
+          </a:prstGeom>
+          <a:noFill/>
+          <a:ln>
+            <a:noFill/>
+          </a:ln>
         </p:spPr>
         <p:txBody>
-          <a:bodyPr>
+          <a:bodyPr vert="horz" lIns="0" tIns="0" rIns="0" bIns="0" anchor="ctr">
             <a:spAutoFit/>
           </a:bodyPr>
-          <a:lstStyle/>
-          <a:p>
-            <a:pPr lvl="0"/>
+          <a:lstStyle>
+            <a:lvl1pPr lvl="0" algn="ctr" rtl="0" hangingPunct="0">
+              <a:buNone/>
+              <a:tabLst/>
+              <a:defRPr lang="en-US" sz="3600" b="0" i="0" u="none" strike="noStrike" kern="1200" cap="none">
+                <a:ln>
+                  <a:noFill/>
+                </a:ln>
+                <a:highlight>
+                  <a:scrgbClr r="0" g="0" b="0">
+                    <a:alpha val="0"/>
+                  </a:scrgbClr>
+                </a:highlight>
+                <a:latin typeface="URW Bookman" pitchFamily="2"/>
+                <a:ea typeface="Nimbus Sans" pitchFamily="2"/>
+                <a:cs typeface="FreeSans" pitchFamily="2"/>
+              </a:defRPr>
+            </a:lvl1pPr>
+          </a:lstStyle>
+          <a:p>
             <a:r>
               <a:rPr lang="en-US" dirty="0">
                 <a:solidFill>
                   <a:schemeClr val="bg1"/>
                 </a:solidFill>
               </a:rPr>
-              <a:t>Results</a:t>
+              <a:t>DOI 3 Data</a:t>
             </a:r>
           </a:p>
         </p:txBody>
@@ -6208,26 +8462,245 @@
           <p:cNvPr id="3" name="Text Placeholder 2">
             <a:extLst>
               <a:ext uri="{FF2B5EF4-FFF2-40B4-BE49-F238E27FC236}">
-                <a16:creationId xmlns:a16="http://schemas.microsoft.com/office/drawing/2014/main" id="{C9367797-CD5B-309B-985B-DF6091246510}"/>
+                <a16:creationId xmlns:a16="http://schemas.microsoft.com/office/drawing/2014/main" id="{5CF707B8-09A9-A28B-36FE-7651ACC03308}"/>
               </a:ext>
             </a:extLst>
           </p:cNvPr>
           <p:cNvSpPr txBox="1">
-            <a:spLocks noGrp="1"/>
-          </p:cNvSpPr>
-          <p:nvPr>
-            <p:ph type="body" idx="4294967295"/>
-          </p:nvPr>
+            <a:spLocks/>
+          </p:cNvSpPr>
+          <p:nvPr/>
         </p:nvSpPr>
         <p:spPr>
           <a:xfrm>
-            <a:off x="503998" y="1326600"/>
-            <a:ext cx="9071639" cy="3288239"/>
+            <a:off x="503999" y="1326600"/>
+            <a:ext cx="9071640" cy="3288239"/>
           </a:xfrm>
+          <a:prstGeom prst="rect">
+            <a:avLst/>
+          </a:prstGeom>
+          <a:noFill/>
+          <a:ln>
+            <a:noFill/>
+          </a:ln>
         </p:spPr>
         <p:txBody>
-          <a:bodyPr/>
-          <a:lstStyle/>
+          <a:bodyPr vert="horz" lIns="0" tIns="0" rIns="0" bIns="0">
+            <a:normAutofit/>
+          </a:bodyPr>
+          <a:lstStyle>
+            <a:lvl1pPr lvl="0" rtl="0" hangingPunct="0">
+              <a:spcBef>
+                <a:spcPts val="1417"/>
+              </a:spcBef>
+              <a:spcAft>
+                <a:spcPts val="0"/>
+              </a:spcAft>
+              <a:buSzPct val="45000"/>
+              <a:buFont typeface="OpenSymbol"/>
+              <a:buChar char="●"/>
+              <a:tabLst/>
+              <a:defRPr lang="en-US" sz="2400" b="0" i="0" u="none" strike="noStrike" kern="1200" cap="none">
+                <a:ln>
+                  <a:noFill/>
+                </a:ln>
+                <a:highlight>
+                  <a:scrgbClr r="0" g="0" b="0">
+                    <a:alpha val="0"/>
+                  </a:scrgbClr>
+                </a:highlight>
+                <a:latin typeface="URW Bookman" pitchFamily="2"/>
+                <a:ea typeface="Nimbus Sans" pitchFamily="2"/>
+                <a:cs typeface="FreeSans" pitchFamily="2"/>
+              </a:defRPr>
+            </a:lvl1pPr>
+            <a:lvl2pPr lvl="1" rtl="0" hangingPunct="0">
+              <a:spcBef>
+                <a:spcPts val="1417"/>
+              </a:spcBef>
+              <a:spcAft>
+                <a:spcPts val="0"/>
+              </a:spcAft>
+              <a:buSzPct val="75000"/>
+              <a:buFont typeface="OpenSymbol"/>
+              <a:buChar char="–"/>
+              <a:tabLst/>
+              <a:defRPr lang="en-US" sz="2400" b="0" i="0" u="none" strike="noStrike" kern="1200" cap="none">
+                <a:ln>
+                  <a:noFill/>
+                </a:ln>
+                <a:highlight>
+                  <a:scrgbClr r="0" g="0" b="0">
+                    <a:alpha val="0"/>
+                  </a:scrgbClr>
+                </a:highlight>
+                <a:latin typeface="URW Bookman" pitchFamily="2"/>
+                <a:ea typeface="Nimbus Sans" pitchFamily="2"/>
+                <a:cs typeface="FreeSans" pitchFamily="2"/>
+              </a:defRPr>
+            </a:lvl2pPr>
+            <a:lvl3pPr lvl="2" rtl="0" hangingPunct="0">
+              <a:spcBef>
+                <a:spcPts val="1417"/>
+              </a:spcBef>
+              <a:spcAft>
+                <a:spcPts val="0"/>
+              </a:spcAft>
+              <a:buSzPct val="45000"/>
+              <a:buFont typeface="OpenSymbol"/>
+              <a:buChar char="●"/>
+              <a:tabLst/>
+              <a:defRPr lang="en-US" sz="2400" b="0" i="0" u="none" strike="noStrike" kern="1200" cap="none">
+                <a:ln>
+                  <a:noFill/>
+                </a:ln>
+                <a:highlight>
+                  <a:scrgbClr r="0" g="0" b="0">
+                    <a:alpha val="0"/>
+                  </a:scrgbClr>
+                </a:highlight>
+                <a:latin typeface="URW Bookman" pitchFamily="2"/>
+                <a:ea typeface="Nimbus Sans" pitchFamily="2"/>
+                <a:cs typeface="FreeSans" pitchFamily="2"/>
+              </a:defRPr>
+            </a:lvl3pPr>
+            <a:lvl4pPr lvl="3" rtl="0" hangingPunct="0">
+              <a:spcBef>
+                <a:spcPts val="1417"/>
+              </a:spcBef>
+              <a:spcAft>
+                <a:spcPts val="0"/>
+              </a:spcAft>
+              <a:buSzPct val="75000"/>
+              <a:buFont typeface="OpenSymbol"/>
+              <a:buChar char="–"/>
+              <a:tabLst/>
+              <a:defRPr lang="en-US" sz="2400" b="0" i="0" u="none" strike="noStrike" kern="1200" cap="none">
+                <a:ln>
+                  <a:noFill/>
+                </a:ln>
+                <a:highlight>
+                  <a:scrgbClr r="0" g="0" b="0">
+                    <a:alpha val="0"/>
+                  </a:scrgbClr>
+                </a:highlight>
+                <a:latin typeface="URW Bookman" pitchFamily="2"/>
+                <a:ea typeface="Nimbus Sans" pitchFamily="2"/>
+                <a:cs typeface="FreeSans" pitchFamily="2"/>
+              </a:defRPr>
+            </a:lvl4pPr>
+            <a:lvl5pPr lvl="4" rtl="0" hangingPunct="0">
+              <a:spcBef>
+                <a:spcPts val="1417"/>
+              </a:spcBef>
+              <a:spcAft>
+                <a:spcPts val="0"/>
+              </a:spcAft>
+              <a:buSzPct val="45000"/>
+              <a:buFont typeface="OpenSymbol"/>
+              <a:buChar char="●"/>
+              <a:tabLst/>
+              <a:defRPr lang="en-US" sz="2400" b="0" i="0" u="none" strike="noStrike" kern="1200" cap="none">
+                <a:ln>
+                  <a:noFill/>
+                </a:ln>
+                <a:highlight>
+                  <a:scrgbClr r="0" g="0" b="0">
+                    <a:alpha val="0"/>
+                  </a:scrgbClr>
+                </a:highlight>
+                <a:latin typeface="URW Bookman" pitchFamily="2"/>
+                <a:ea typeface="Nimbus Sans" pitchFamily="2"/>
+                <a:cs typeface="FreeSans" pitchFamily="2"/>
+              </a:defRPr>
+            </a:lvl5pPr>
+            <a:lvl6pPr lvl="5" rtl="0" hangingPunct="0">
+              <a:spcBef>
+                <a:spcPts val="1417"/>
+              </a:spcBef>
+              <a:spcAft>
+                <a:spcPts val="0"/>
+              </a:spcAft>
+              <a:buSzPct val="45000"/>
+              <a:buFont typeface="OpenSymbol"/>
+              <a:buChar char="●"/>
+              <a:tabLst/>
+              <a:defRPr lang="en-US" sz="2400" b="0" i="0" u="none" strike="noStrike" kern="1200" cap="none">
+                <a:ln>
+                  <a:noFill/>
+                </a:ln>
+                <a:highlight>
+                  <a:scrgbClr r="0" g="0" b="0">
+                    <a:alpha val="0"/>
+                  </a:scrgbClr>
+                </a:highlight>
+                <a:latin typeface="URW Bookman" pitchFamily="2"/>
+                <a:ea typeface="Nimbus Sans" pitchFamily="2"/>
+                <a:cs typeface="FreeSans" pitchFamily="2"/>
+              </a:defRPr>
+            </a:lvl6pPr>
+            <a:lvl7pPr lvl="6" rtl="0" hangingPunct="0">
+              <a:spcBef>
+                <a:spcPts val="1417"/>
+              </a:spcBef>
+              <a:spcAft>
+                <a:spcPts val="0"/>
+              </a:spcAft>
+              <a:buSzPct val="45000"/>
+              <a:buFont typeface="OpenSymbol"/>
+              <a:buChar char="●"/>
+              <a:tabLst/>
+              <a:defRPr lang="en-US" sz="2400" b="0" i="0" u="none" strike="noStrike" kern="1200" cap="none">
+                <a:ln>
+                  <a:noFill/>
+                </a:ln>
+                <a:highlight>
+                  <a:scrgbClr r="0" g="0" b="0">
+                    <a:alpha val="0"/>
+                  </a:scrgbClr>
+                </a:highlight>
+                <a:latin typeface="URW Bookman" pitchFamily="2"/>
+                <a:ea typeface="Nimbus Sans" pitchFamily="2"/>
+                <a:cs typeface="FreeSans" pitchFamily="2"/>
+              </a:defRPr>
+            </a:lvl7pPr>
+            <a:lvl8pPr marL="3429000" indent="-228600" algn="l" defTabSz="914400" rtl="0" eaLnBrk="1" latinLnBrk="0" hangingPunct="1">
+              <a:lnSpc>
+                <a:spcPct val="90000"/>
+              </a:lnSpc>
+              <a:spcBef>
+                <a:spcPts val="500"/>
+              </a:spcBef>
+              <a:buFont typeface="Arial" panose="020B0604020202020204" pitchFamily="34" charset="0"/>
+              <a:buChar char="•"/>
+              <a:defRPr sz="1800" kern="1200">
+                <a:solidFill>
+                  <a:schemeClr val="tx1"/>
+                </a:solidFill>
+                <a:latin typeface="+mn-lt"/>
+                <a:ea typeface="+mn-ea"/>
+                <a:cs typeface="+mn-cs"/>
+              </a:defRPr>
+            </a:lvl8pPr>
+            <a:lvl9pPr marL="3886200" indent="-228600" algn="l" defTabSz="914400" rtl="0" eaLnBrk="1" latinLnBrk="0" hangingPunct="1">
+              <a:lnSpc>
+                <a:spcPct val="90000"/>
+              </a:lnSpc>
+              <a:spcBef>
+                <a:spcPts val="500"/>
+              </a:spcBef>
+              <a:buFont typeface="Arial" panose="020B0604020202020204" pitchFamily="34" charset="0"/>
+              <a:buChar char="•"/>
+              <a:defRPr sz="1800" kern="1200">
+                <a:solidFill>
+                  <a:schemeClr val="tx1"/>
+                </a:solidFill>
+                <a:latin typeface="+mn-lt"/>
+                <a:ea typeface="+mn-ea"/>
+                <a:cs typeface="+mn-cs"/>
+              </a:defRPr>
+            </a:lvl9pPr>
+          </a:lstStyle>
           <a:p>
             <a:pPr marL="342900" indent="-342900"/>
             <a:r>
@@ -6235,8 +8708,9 @@
                 <a:solidFill>
                   <a:schemeClr val="bg1"/>
                 </a:solidFill>
+                <a:latin typeface="AppleSystemUIFont" pitchFamily="2"/>
               </a:rPr>
-              <a:t>What results we found</a:t>
+              <a:t>DOI 3 results in 3,516 test cases</a:t>
             </a:r>
           </a:p>
           <a:p>
@@ -6246,58 +8720,34 @@
                 <a:solidFill>
                   <a:schemeClr val="bg1"/>
                 </a:solidFill>
+                <a:latin typeface="AppleSystemUIFont" pitchFamily="2"/>
               </a:rPr>
-              <a:t>What the root causes of the results were</a:t>
-            </a:r>
-          </a:p>
-          <a:p>
-            <a:pPr marL="342900" indent="-342900"/>
-            <a:r>
-              <a:rPr lang="en-US" dirty="0">
-                <a:solidFill>
-                  <a:schemeClr val="bg1"/>
-                </a:solidFill>
-              </a:rPr>
-              <a:t>Bugs in our testing code</a:t>
-            </a:r>
-          </a:p>
-          <a:p>
-            <a:pPr marL="342900" indent="-342900"/>
-            <a:r>
-              <a:rPr lang="en-US" dirty="0">
-                <a:solidFill>
-                  <a:schemeClr val="bg1"/>
-                </a:solidFill>
-              </a:rPr>
-              <a:t>Bugs in SPEL/</a:t>
-            </a:r>
-            <a:r>
-              <a:rPr lang="en-US" dirty="0" err="1">
-                <a:solidFill>
-                  <a:schemeClr val="bg1"/>
-                </a:solidFill>
-              </a:rPr>
-              <a:t>LakeTemperature</a:t>
-            </a:r>
-            <a:endParaRPr lang="en-US" dirty="0">
-              <a:solidFill>
-                <a:schemeClr val="bg1"/>
-              </a:solidFill>
-            </a:endParaRPr>
+              <a:t>How many combinatorial test cases generated, executed, passed, skipped, failed, crashed</a:t>
+            </a:r>
           </a:p>
         </p:txBody>
       </p:sp>
     </p:spTree>
+    <p:extLst>
+      <p:ext uri="{BB962C8B-B14F-4D97-AF65-F5344CB8AC3E}">
+        <p14:creationId xmlns:p14="http://schemas.microsoft.com/office/powerpoint/2010/main" val="2353400714"/>
+      </p:ext>
+    </p:extLst>
   </p:cSld>
   <p:clrMapOvr>
     <a:masterClrMapping/>
   </p:clrMapOvr>
+  <p:extLst>
+    <p:ext uri="{6950BFC3-D8DA-4A85-94F7-54DA5524770B}">
+      <p188:commentRel xmlns:p188="http://schemas.microsoft.com/office/powerpoint/2018/8/main" r:id="rId2"/>
+    </p:ext>
+  </p:extLst>
 </p:sld>
 </file>
 
-<file path=ppt/slides/slide7.xml><?xml version="1.0" encoding="utf-8"?>
+<file path=ppt/slides/slide8.xml><?xml version="1.0" encoding="utf-8"?>
 <p:sld xmlns:a="http://schemas.openxmlformats.org/drawingml/2006/main" xmlns:r="http://schemas.openxmlformats.org/officeDocument/2006/relationships" xmlns:p="http://schemas.openxmlformats.org/presentationml/2006/main">
-  <p:cSld name="page11">
+  <p:cSld>
     <p:spTree>
       <p:nvGrpSpPr>
         <p:cNvPr id="1" name=""/>
@@ -6317,37 +8767,59 @@
           <p:cNvPr id="2" name="Title 1">
             <a:extLst>
               <a:ext uri="{FF2B5EF4-FFF2-40B4-BE49-F238E27FC236}">
-                <a16:creationId xmlns:a16="http://schemas.microsoft.com/office/drawing/2014/main" id="{32B0991F-E501-52E1-8A9D-C12A1C6D7A3F}"/>
+                <a16:creationId xmlns:a16="http://schemas.microsoft.com/office/drawing/2014/main" id="{3B229438-C75A-6BD0-0DC0-AB63F95B648C}"/>
               </a:ext>
             </a:extLst>
           </p:cNvPr>
           <p:cNvSpPr txBox="1">
-            <a:spLocks noGrp="1"/>
-          </p:cNvSpPr>
-          <p:nvPr>
-            <p:ph type="title" idx="4294967295"/>
-          </p:nvPr>
+            <a:spLocks/>
+          </p:cNvSpPr>
+          <p:nvPr/>
         </p:nvSpPr>
         <p:spPr>
           <a:xfrm>
             <a:off x="503999" y="422301"/>
             <a:ext cx="9071640" cy="553998"/>
           </a:xfrm>
+          <a:prstGeom prst="rect">
+            <a:avLst/>
+          </a:prstGeom>
+          <a:noFill/>
+          <a:ln>
+            <a:noFill/>
+          </a:ln>
         </p:spPr>
         <p:txBody>
-          <a:bodyPr>
+          <a:bodyPr vert="horz" lIns="0" tIns="0" rIns="0" bIns="0" anchor="ctr">
             <a:spAutoFit/>
           </a:bodyPr>
-          <a:lstStyle/>
-          <a:p>
-            <a:pPr lvl="0"/>
+          <a:lstStyle>
+            <a:lvl1pPr lvl="0" algn="ctr" rtl="0" hangingPunct="0">
+              <a:buNone/>
+              <a:tabLst/>
+              <a:defRPr lang="en-US" sz="3600" b="0" i="0" u="none" strike="noStrike" kern="1200" cap="none">
+                <a:ln>
+                  <a:noFill/>
+                </a:ln>
+                <a:highlight>
+                  <a:scrgbClr r="0" g="0" b="0">
+                    <a:alpha val="0"/>
+                  </a:scrgbClr>
+                </a:highlight>
+                <a:latin typeface="URW Bookman" pitchFamily="2"/>
+                <a:ea typeface="Nimbus Sans" pitchFamily="2"/>
+                <a:cs typeface="FreeSans" pitchFamily="2"/>
+              </a:defRPr>
+            </a:lvl1pPr>
+          </a:lstStyle>
+          <a:p>
             <a:r>
               <a:rPr lang="en-US" dirty="0">
                 <a:solidFill>
                   <a:schemeClr val="bg1"/>
                 </a:solidFill>
               </a:rPr>
-              <a:t>Change-Impact Analysis Background</a:t>
+              <a:t>DOI 4 Data</a:t>
             </a:r>
           </a:p>
         </p:txBody>
@@ -6357,21 +8829,245 @@
           <p:cNvPr id="3" name="Text Placeholder 2">
             <a:extLst>
               <a:ext uri="{FF2B5EF4-FFF2-40B4-BE49-F238E27FC236}">
-                <a16:creationId xmlns:a16="http://schemas.microsoft.com/office/drawing/2014/main" id="{0111FD90-B5FD-9164-8583-51A1777539F7}"/>
+                <a16:creationId xmlns:a16="http://schemas.microsoft.com/office/drawing/2014/main" id="{56064C14-1601-F022-7F3D-615176F6A82B}"/>
               </a:ext>
             </a:extLst>
           </p:cNvPr>
           <p:cNvSpPr txBox="1">
-            <a:spLocks noGrp="1"/>
-          </p:cNvSpPr>
-          <p:nvPr>
-            <p:ph type="body" idx="4294967295"/>
-          </p:nvPr>
-        </p:nvSpPr>
-        <p:spPr/>
-        <p:txBody>
-          <a:bodyPr/>
-          <a:lstStyle/>
+            <a:spLocks/>
+          </p:cNvSpPr>
+          <p:nvPr/>
+        </p:nvSpPr>
+        <p:spPr>
+          <a:xfrm>
+            <a:off x="503999" y="1326600"/>
+            <a:ext cx="9071640" cy="3288239"/>
+          </a:xfrm>
+          <a:prstGeom prst="rect">
+            <a:avLst/>
+          </a:prstGeom>
+          <a:noFill/>
+          <a:ln>
+            <a:noFill/>
+          </a:ln>
+        </p:spPr>
+        <p:txBody>
+          <a:bodyPr vert="horz" lIns="0" tIns="0" rIns="0" bIns="0">
+            <a:normAutofit/>
+          </a:bodyPr>
+          <a:lstStyle>
+            <a:lvl1pPr lvl="0" rtl="0" hangingPunct="0">
+              <a:spcBef>
+                <a:spcPts val="1417"/>
+              </a:spcBef>
+              <a:spcAft>
+                <a:spcPts val="0"/>
+              </a:spcAft>
+              <a:buSzPct val="45000"/>
+              <a:buFont typeface="OpenSymbol"/>
+              <a:buChar char="●"/>
+              <a:tabLst/>
+              <a:defRPr lang="en-US" sz="2400" b="0" i="0" u="none" strike="noStrike" kern="1200" cap="none">
+                <a:ln>
+                  <a:noFill/>
+                </a:ln>
+                <a:highlight>
+                  <a:scrgbClr r="0" g="0" b="0">
+                    <a:alpha val="0"/>
+                  </a:scrgbClr>
+                </a:highlight>
+                <a:latin typeface="URW Bookman" pitchFamily="2"/>
+                <a:ea typeface="Nimbus Sans" pitchFamily="2"/>
+                <a:cs typeface="FreeSans" pitchFamily="2"/>
+              </a:defRPr>
+            </a:lvl1pPr>
+            <a:lvl2pPr lvl="1" rtl="0" hangingPunct="0">
+              <a:spcBef>
+                <a:spcPts val="1417"/>
+              </a:spcBef>
+              <a:spcAft>
+                <a:spcPts val="0"/>
+              </a:spcAft>
+              <a:buSzPct val="75000"/>
+              <a:buFont typeface="OpenSymbol"/>
+              <a:buChar char="–"/>
+              <a:tabLst/>
+              <a:defRPr lang="en-US" sz="2400" b="0" i="0" u="none" strike="noStrike" kern="1200" cap="none">
+                <a:ln>
+                  <a:noFill/>
+                </a:ln>
+                <a:highlight>
+                  <a:scrgbClr r="0" g="0" b="0">
+                    <a:alpha val="0"/>
+                  </a:scrgbClr>
+                </a:highlight>
+                <a:latin typeface="URW Bookman" pitchFamily="2"/>
+                <a:ea typeface="Nimbus Sans" pitchFamily="2"/>
+                <a:cs typeface="FreeSans" pitchFamily="2"/>
+              </a:defRPr>
+            </a:lvl2pPr>
+            <a:lvl3pPr lvl="2" rtl="0" hangingPunct="0">
+              <a:spcBef>
+                <a:spcPts val="1417"/>
+              </a:spcBef>
+              <a:spcAft>
+                <a:spcPts val="0"/>
+              </a:spcAft>
+              <a:buSzPct val="45000"/>
+              <a:buFont typeface="OpenSymbol"/>
+              <a:buChar char="●"/>
+              <a:tabLst/>
+              <a:defRPr lang="en-US" sz="2400" b="0" i="0" u="none" strike="noStrike" kern="1200" cap="none">
+                <a:ln>
+                  <a:noFill/>
+                </a:ln>
+                <a:highlight>
+                  <a:scrgbClr r="0" g="0" b="0">
+                    <a:alpha val="0"/>
+                  </a:scrgbClr>
+                </a:highlight>
+                <a:latin typeface="URW Bookman" pitchFamily="2"/>
+                <a:ea typeface="Nimbus Sans" pitchFamily="2"/>
+                <a:cs typeface="FreeSans" pitchFamily="2"/>
+              </a:defRPr>
+            </a:lvl3pPr>
+            <a:lvl4pPr lvl="3" rtl="0" hangingPunct="0">
+              <a:spcBef>
+                <a:spcPts val="1417"/>
+              </a:spcBef>
+              <a:spcAft>
+                <a:spcPts val="0"/>
+              </a:spcAft>
+              <a:buSzPct val="75000"/>
+              <a:buFont typeface="OpenSymbol"/>
+              <a:buChar char="–"/>
+              <a:tabLst/>
+              <a:defRPr lang="en-US" sz="2400" b="0" i="0" u="none" strike="noStrike" kern="1200" cap="none">
+                <a:ln>
+                  <a:noFill/>
+                </a:ln>
+                <a:highlight>
+                  <a:scrgbClr r="0" g="0" b="0">
+                    <a:alpha val="0"/>
+                  </a:scrgbClr>
+                </a:highlight>
+                <a:latin typeface="URW Bookman" pitchFamily="2"/>
+                <a:ea typeface="Nimbus Sans" pitchFamily="2"/>
+                <a:cs typeface="FreeSans" pitchFamily="2"/>
+              </a:defRPr>
+            </a:lvl4pPr>
+            <a:lvl5pPr lvl="4" rtl="0" hangingPunct="0">
+              <a:spcBef>
+                <a:spcPts val="1417"/>
+              </a:spcBef>
+              <a:spcAft>
+                <a:spcPts val="0"/>
+              </a:spcAft>
+              <a:buSzPct val="45000"/>
+              <a:buFont typeface="OpenSymbol"/>
+              <a:buChar char="●"/>
+              <a:tabLst/>
+              <a:defRPr lang="en-US" sz="2400" b="0" i="0" u="none" strike="noStrike" kern="1200" cap="none">
+                <a:ln>
+                  <a:noFill/>
+                </a:ln>
+                <a:highlight>
+                  <a:scrgbClr r="0" g="0" b="0">
+                    <a:alpha val="0"/>
+                  </a:scrgbClr>
+                </a:highlight>
+                <a:latin typeface="URW Bookman" pitchFamily="2"/>
+                <a:ea typeface="Nimbus Sans" pitchFamily="2"/>
+                <a:cs typeface="FreeSans" pitchFamily="2"/>
+              </a:defRPr>
+            </a:lvl5pPr>
+            <a:lvl6pPr lvl="5" rtl="0" hangingPunct="0">
+              <a:spcBef>
+                <a:spcPts val="1417"/>
+              </a:spcBef>
+              <a:spcAft>
+                <a:spcPts val="0"/>
+              </a:spcAft>
+              <a:buSzPct val="45000"/>
+              <a:buFont typeface="OpenSymbol"/>
+              <a:buChar char="●"/>
+              <a:tabLst/>
+              <a:defRPr lang="en-US" sz="2400" b="0" i="0" u="none" strike="noStrike" kern="1200" cap="none">
+                <a:ln>
+                  <a:noFill/>
+                </a:ln>
+                <a:highlight>
+                  <a:scrgbClr r="0" g="0" b="0">
+                    <a:alpha val="0"/>
+                  </a:scrgbClr>
+                </a:highlight>
+                <a:latin typeface="URW Bookman" pitchFamily="2"/>
+                <a:ea typeface="Nimbus Sans" pitchFamily="2"/>
+                <a:cs typeface="FreeSans" pitchFamily="2"/>
+              </a:defRPr>
+            </a:lvl6pPr>
+            <a:lvl7pPr lvl="6" rtl="0" hangingPunct="0">
+              <a:spcBef>
+                <a:spcPts val="1417"/>
+              </a:spcBef>
+              <a:spcAft>
+                <a:spcPts val="0"/>
+              </a:spcAft>
+              <a:buSzPct val="45000"/>
+              <a:buFont typeface="OpenSymbol"/>
+              <a:buChar char="●"/>
+              <a:tabLst/>
+              <a:defRPr lang="en-US" sz="2400" b="0" i="0" u="none" strike="noStrike" kern="1200" cap="none">
+                <a:ln>
+                  <a:noFill/>
+                </a:ln>
+                <a:highlight>
+                  <a:scrgbClr r="0" g="0" b="0">
+                    <a:alpha val="0"/>
+                  </a:scrgbClr>
+                </a:highlight>
+                <a:latin typeface="URW Bookman" pitchFamily="2"/>
+                <a:ea typeface="Nimbus Sans" pitchFamily="2"/>
+                <a:cs typeface="FreeSans" pitchFamily="2"/>
+              </a:defRPr>
+            </a:lvl7pPr>
+            <a:lvl8pPr marL="3429000" indent="-228600" algn="l" defTabSz="914400" rtl="0" eaLnBrk="1" latinLnBrk="0" hangingPunct="1">
+              <a:lnSpc>
+                <a:spcPct val="90000"/>
+              </a:lnSpc>
+              <a:spcBef>
+                <a:spcPts val="500"/>
+              </a:spcBef>
+              <a:buFont typeface="Arial" panose="020B0604020202020204" pitchFamily="34" charset="0"/>
+              <a:buChar char="•"/>
+              <a:defRPr sz="1800" kern="1200">
+                <a:solidFill>
+                  <a:schemeClr val="tx1"/>
+                </a:solidFill>
+                <a:latin typeface="+mn-lt"/>
+                <a:ea typeface="+mn-ea"/>
+                <a:cs typeface="+mn-cs"/>
+              </a:defRPr>
+            </a:lvl8pPr>
+            <a:lvl9pPr marL="3886200" indent="-228600" algn="l" defTabSz="914400" rtl="0" eaLnBrk="1" latinLnBrk="0" hangingPunct="1">
+              <a:lnSpc>
+                <a:spcPct val="90000"/>
+              </a:lnSpc>
+              <a:spcBef>
+                <a:spcPts val="500"/>
+              </a:spcBef>
+              <a:buFont typeface="Arial" panose="020B0604020202020204" pitchFamily="34" charset="0"/>
+              <a:buChar char="•"/>
+              <a:defRPr sz="1800" kern="1200">
+                <a:solidFill>
+                  <a:schemeClr val="tx1"/>
+                </a:solidFill>
+                <a:latin typeface="+mn-lt"/>
+                <a:ea typeface="+mn-ea"/>
+                <a:cs typeface="+mn-cs"/>
+              </a:defRPr>
+            </a:lvl9pPr>
+          </a:lstStyle>
           <a:p>
             <a:pPr marL="342900" indent="-342900"/>
             <a:r>
@@ -6379,8 +9075,9 @@
                 <a:solidFill>
                   <a:schemeClr val="bg1"/>
                 </a:solidFill>
+                <a:latin typeface="AppleSystemUIFont" pitchFamily="2"/>
               </a:rPr>
-              <a:t>Introduce the change-impact analysis problem</a:t>
+              <a:t>DOI 4 results in 50,031 test cases</a:t>
             </a:r>
           </a:p>
           <a:p>
@@ -6390,23 +9087,34 @@
                 <a:solidFill>
                   <a:schemeClr val="bg1"/>
                 </a:solidFill>
+                <a:latin typeface="AppleSystemUIFont" pitchFamily="2"/>
               </a:rPr>
-              <a:t>How did specific changes to constants affect model output?</a:t>
+              <a:t>How many combinatorial test cases generated, executed, passed, skipped, failed, crashed</a:t>
             </a:r>
           </a:p>
         </p:txBody>
       </p:sp>
     </p:spTree>
+    <p:extLst>
+      <p:ext uri="{BB962C8B-B14F-4D97-AF65-F5344CB8AC3E}">
+        <p14:creationId xmlns:p14="http://schemas.microsoft.com/office/powerpoint/2010/main" val="3165592934"/>
+      </p:ext>
+    </p:extLst>
   </p:cSld>
   <p:clrMapOvr>
     <a:masterClrMapping/>
   </p:clrMapOvr>
+  <p:extLst>
+    <p:ext uri="{6950BFC3-D8DA-4A85-94F7-54DA5524770B}">
+      <p188:commentRel xmlns:p188="http://schemas.microsoft.com/office/powerpoint/2018/8/main" r:id="rId2"/>
+    </p:ext>
+  </p:extLst>
 </p:sld>
 </file>
 
-<file path=ppt/slides/slide8.xml><?xml version="1.0" encoding="utf-8"?>
+<file path=ppt/slides/slide9.xml><?xml version="1.0" encoding="utf-8"?>
 <p:sld xmlns:a="http://schemas.openxmlformats.org/drawingml/2006/main" xmlns:r="http://schemas.openxmlformats.org/officeDocument/2006/relationships" xmlns:p="http://schemas.openxmlformats.org/presentationml/2006/main">
-  <p:cSld name="page13">
+  <p:cSld>
     <p:spTree>
       <p:nvGrpSpPr>
         <p:cNvPr id="1" name=""/>
@@ -6426,146 +9134,59 @@
           <p:cNvPr id="2" name="Title 1">
             <a:extLst>
               <a:ext uri="{FF2B5EF4-FFF2-40B4-BE49-F238E27FC236}">
-                <a16:creationId xmlns:a16="http://schemas.microsoft.com/office/drawing/2014/main" id="{E1CD01BF-1533-F276-6A2B-362353BBED49}"/>
+                <a16:creationId xmlns:a16="http://schemas.microsoft.com/office/drawing/2014/main" id="{3BF6498E-98A7-DD6B-79FB-40EF89C7FFC8}"/>
               </a:ext>
             </a:extLst>
           </p:cNvPr>
           <p:cNvSpPr txBox="1">
-            <a:spLocks noGrp="1"/>
-          </p:cNvSpPr>
-          <p:nvPr>
-            <p:ph type="title" idx="4294967295"/>
-          </p:nvPr>
-        </p:nvSpPr>
-        <p:spPr>
-          <a:xfrm>
-            <a:off x="0" y="422301"/>
-            <a:ext cx="10080000" cy="553998"/>
-          </a:xfrm>
-        </p:spPr>
-        <p:txBody>
-          <a:bodyPr>
-            <a:spAutoFit/>
-          </a:bodyPr>
-          <a:lstStyle/>
-          <a:p>
-            <a:pPr lvl="0"/>
-            <a:r>
-              <a:rPr lang="en-US" dirty="0">
-                <a:solidFill>
-                  <a:schemeClr val="bg1"/>
-                </a:solidFill>
-              </a:rPr>
-              <a:t>Preliminary Results</a:t>
-            </a:r>
-          </a:p>
-        </p:txBody>
-      </p:sp>
-      <p:sp>
-        <p:nvSpPr>
-          <p:cNvPr id="3" name="Text Placeholder 2">
-            <a:extLst>
-              <a:ext uri="{FF2B5EF4-FFF2-40B4-BE49-F238E27FC236}">
-                <a16:creationId xmlns:a16="http://schemas.microsoft.com/office/drawing/2014/main" id="{056EED88-9F40-EBDF-7DF3-2409A094E3C5}"/>
-              </a:ext>
-            </a:extLst>
-          </p:cNvPr>
-          <p:cNvSpPr txBox="1">
-            <a:spLocks noGrp="1"/>
-          </p:cNvSpPr>
-          <p:nvPr>
-            <p:ph type="body" idx="4294967295"/>
-          </p:nvPr>
-        </p:nvSpPr>
-        <p:spPr/>
-        <p:txBody>
-          <a:bodyPr/>
-          <a:lstStyle/>
-          <a:p>
-            <a:pPr marL="342900" indent="-342900"/>
-            <a:r>
-              <a:rPr lang="en-US" dirty="0">
-                <a:solidFill>
-                  <a:schemeClr val="bg1"/>
-                </a:solidFill>
-              </a:rPr>
-              <a:t>Which constants affect which outputs</a:t>
-            </a:r>
-          </a:p>
-          <a:p>
-            <a:pPr marL="342900" indent="-342900"/>
-            <a:r>
-              <a:rPr lang="en-US" dirty="0">
-                <a:solidFill>
-                  <a:schemeClr val="bg1"/>
-                </a:solidFill>
-              </a:rPr>
-              <a:t>How we did this analysis</a:t>
-            </a:r>
-          </a:p>
-        </p:txBody>
-      </p:sp>
-    </p:spTree>
-  </p:cSld>
-  <p:clrMapOvr>
-    <a:masterClrMapping/>
-  </p:clrMapOvr>
-</p:sld>
-</file>
-
-<file path=ppt/slides/slide9.xml><?xml version="1.0" encoding="utf-8"?>
-<p:sld xmlns:a="http://schemas.openxmlformats.org/drawingml/2006/main" xmlns:r="http://schemas.openxmlformats.org/officeDocument/2006/relationships" xmlns:p="http://schemas.openxmlformats.org/presentationml/2006/main">
-  <p:cSld name="page14">
-    <p:spTree>
-      <p:nvGrpSpPr>
-        <p:cNvPr id="1" name=""/>
-        <p:cNvGrpSpPr/>
-        <p:nvPr/>
-      </p:nvGrpSpPr>
-      <p:grpSpPr>
-        <a:xfrm>
-          <a:off x="0" y="0"/>
-          <a:ext cx="0" cy="0"/>
-          <a:chOff x="0" y="0"/>
-          <a:chExt cx="0" cy="0"/>
-        </a:xfrm>
-      </p:grpSpPr>
-      <p:sp>
-        <p:nvSpPr>
-          <p:cNvPr id="2" name="Title 1">
-            <a:extLst>
-              <a:ext uri="{FF2B5EF4-FFF2-40B4-BE49-F238E27FC236}">
-                <a16:creationId xmlns:a16="http://schemas.microsoft.com/office/drawing/2014/main" id="{7213FEA8-EFA0-0ABF-B290-871B771B9A08}"/>
-              </a:ext>
-            </a:extLst>
-          </p:cNvPr>
-          <p:cNvSpPr txBox="1">
-            <a:spLocks noGrp="1"/>
-          </p:cNvSpPr>
-          <p:nvPr>
-            <p:ph type="title" idx="4294967295"/>
-          </p:nvPr>
+            <a:spLocks/>
+          </p:cNvSpPr>
+          <p:nvPr/>
         </p:nvSpPr>
         <p:spPr>
           <a:xfrm>
             <a:off x="503999" y="422301"/>
             <a:ext cx="9071640" cy="553998"/>
           </a:xfrm>
+          <a:prstGeom prst="rect">
+            <a:avLst/>
+          </a:prstGeom>
+          <a:noFill/>
+          <a:ln>
+            <a:noFill/>
+          </a:ln>
         </p:spPr>
         <p:txBody>
-          <a:bodyPr>
+          <a:bodyPr vert="horz" lIns="0" tIns="0" rIns="0" bIns="0" anchor="ctr">
             <a:spAutoFit/>
           </a:bodyPr>
-          <a:lstStyle/>
-          <a:p>
-            <a:pPr lvl="0"/>
+          <a:lstStyle>
+            <a:lvl1pPr lvl="0" algn="ctr" rtl="0" hangingPunct="0">
+              <a:buNone/>
+              <a:tabLst/>
+              <a:defRPr lang="en-US" sz="3600" b="0" i="0" u="none" strike="noStrike" kern="1200" cap="none">
+                <a:ln>
+                  <a:noFill/>
+                </a:ln>
+                <a:highlight>
+                  <a:scrgbClr r="0" g="0" b="0">
+                    <a:alpha val="0"/>
+                  </a:scrgbClr>
+                </a:highlight>
+                <a:latin typeface="URW Bookman" pitchFamily="2"/>
+                <a:ea typeface="Nimbus Sans" pitchFamily="2"/>
+                <a:cs typeface="FreeSans" pitchFamily="2"/>
+              </a:defRPr>
+            </a:lvl1pPr>
+          </a:lstStyle>
+          <a:p>
             <a:r>
               <a:rPr lang="en-US" dirty="0">
                 <a:solidFill>
                   <a:schemeClr val="bg1"/>
                 </a:solidFill>
               </a:rPr>
-              <a:t>Challenges</a:t>
+              <a:t>DOI 5 Data</a:t>
             </a:r>
           </a:p>
         </p:txBody>
@@ -6575,26 +9196,245 @@
           <p:cNvPr id="3" name="Text Placeholder 2">
             <a:extLst>
               <a:ext uri="{FF2B5EF4-FFF2-40B4-BE49-F238E27FC236}">
-                <a16:creationId xmlns:a16="http://schemas.microsoft.com/office/drawing/2014/main" id="{C220D056-3C9A-0F26-01B7-EC49552EA02A}"/>
+                <a16:creationId xmlns:a16="http://schemas.microsoft.com/office/drawing/2014/main" id="{31720598-1CB0-E7F3-3417-23A2488D52ED}"/>
               </a:ext>
             </a:extLst>
           </p:cNvPr>
           <p:cNvSpPr txBox="1">
-            <a:spLocks noGrp="1"/>
-          </p:cNvSpPr>
-          <p:nvPr>
-            <p:ph type="body" idx="4294967295"/>
-          </p:nvPr>
+            <a:spLocks/>
+          </p:cNvSpPr>
+          <p:nvPr/>
         </p:nvSpPr>
         <p:spPr>
           <a:xfrm>
-            <a:off x="507959" y="1172520"/>
-            <a:ext cx="9071640" cy="3828239"/>
+            <a:off x="503999" y="1326600"/>
+            <a:ext cx="9071640" cy="3288239"/>
           </a:xfrm>
+          <a:prstGeom prst="rect">
+            <a:avLst/>
+          </a:prstGeom>
+          <a:noFill/>
+          <a:ln>
+            <a:noFill/>
+          </a:ln>
         </p:spPr>
         <p:txBody>
-          <a:bodyPr/>
-          <a:lstStyle/>
+          <a:bodyPr vert="horz" lIns="0" tIns="0" rIns="0" bIns="0">
+            <a:normAutofit/>
+          </a:bodyPr>
+          <a:lstStyle>
+            <a:lvl1pPr lvl="0" rtl="0" hangingPunct="0">
+              <a:spcBef>
+                <a:spcPts val="1417"/>
+              </a:spcBef>
+              <a:spcAft>
+                <a:spcPts val="0"/>
+              </a:spcAft>
+              <a:buSzPct val="45000"/>
+              <a:buFont typeface="OpenSymbol"/>
+              <a:buChar char="●"/>
+              <a:tabLst/>
+              <a:defRPr lang="en-US" sz="2400" b="0" i="0" u="none" strike="noStrike" kern="1200" cap="none">
+                <a:ln>
+                  <a:noFill/>
+                </a:ln>
+                <a:highlight>
+                  <a:scrgbClr r="0" g="0" b="0">
+                    <a:alpha val="0"/>
+                  </a:scrgbClr>
+                </a:highlight>
+                <a:latin typeface="URW Bookman" pitchFamily="2"/>
+                <a:ea typeface="Nimbus Sans" pitchFamily="2"/>
+                <a:cs typeface="FreeSans" pitchFamily="2"/>
+              </a:defRPr>
+            </a:lvl1pPr>
+            <a:lvl2pPr lvl="1" rtl="0" hangingPunct="0">
+              <a:spcBef>
+                <a:spcPts val="1417"/>
+              </a:spcBef>
+              <a:spcAft>
+                <a:spcPts val="0"/>
+              </a:spcAft>
+              <a:buSzPct val="75000"/>
+              <a:buFont typeface="OpenSymbol"/>
+              <a:buChar char="–"/>
+              <a:tabLst/>
+              <a:defRPr lang="en-US" sz="2400" b="0" i="0" u="none" strike="noStrike" kern="1200" cap="none">
+                <a:ln>
+                  <a:noFill/>
+                </a:ln>
+                <a:highlight>
+                  <a:scrgbClr r="0" g="0" b="0">
+                    <a:alpha val="0"/>
+                  </a:scrgbClr>
+                </a:highlight>
+                <a:latin typeface="URW Bookman" pitchFamily="2"/>
+                <a:ea typeface="Nimbus Sans" pitchFamily="2"/>
+                <a:cs typeface="FreeSans" pitchFamily="2"/>
+              </a:defRPr>
+            </a:lvl2pPr>
+            <a:lvl3pPr lvl="2" rtl="0" hangingPunct="0">
+              <a:spcBef>
+                <a:spcPts val="1417"/>
+              </a:spcBef>
+              <a:spcAft>
+                <a:spcPts val="0"/>
+              </a:spcAft>
+              <a:buSzPct val="45000"/>
+              <a:buFont typeface="OpenSymbol"/>
+              <a:buChar char="●"/>
+              <a:tabLst/>
+              <a:defRPr lang="en-US" sz="2400" b="0" i="0" u="none" strike="noStrike" kern="1200" cap="none">
+                <a:ln>
+                  <a:noFill/>
+                </a:ln>
+                <a:highlight>
+                  <a:scrgbClr r="0" g="0" b="0">
+                    <a:alpha val="0"/>
+                  </a:scrgbClr>
+                </a:highlight>
+                <a:latin typeface="URW Bookman" pitchFamily="2"/>
+                <a:ea typeface="Nimbus Sans" pitchFamily="2"/>
+                <a:cs typeface="FreeSans" pitchFamily="2"/>
+              </a:defRPr>
+            </a:lvl3pPr>
+            <a:lvl4pPr lvl="3" rtl="0" hangingPunct="0">
+              <a:spcBef>
+                <a:spcPts val="1417"/>
+              </a:spcBef>
+              <a:spcAft>
+                <a:spcPts val="0"/>
+              </a:spcAft>
+              <a:buSzPct val="75000"/>
+              <a:buFont typeface="OpenSymbol"/>
+              <a:buChar char="–"/>
+              <a:tabLst/>
+              <a:defRPr lang="en-US" sz="2400" b="0" i="0" u="none" strike="noStrike" kern="1200" cap="none">
+                <a:ln>
+                  <a:noFill/>
+                </a:ln>
+                <a:highlight>
+                  <a:scrgbClr r="0" g="0" b="0">
+                    <a:alpha val="0"/>
+                  </a:scrgbClr>
+                </a:highlight>
+                <a:latin typeface="URW Bookman" pitchFamily="2"/>
+                <a:ea typeface="Nimbus Sans" pitchFamily="2"/>
+                <a:cs typeface="FreeSans" pitchFamily="2"/>
+              </a:defRPr>
+            </a:lvl4pPr>
+            <a:lvl5pPr lvl="4" rtl="0" hangingPunct="0">
+              <a:spcBef>
+                <a:spcPts val="1417"/>
+              </a:spcBef>
+              <a:spcAft>
+                <a:spcPts val="0"/>
+              </a:spcAft>
+              <a:buSzPct val="45000"/>
+              <a:buFont typeface="OpenSymbol"/>
+              <a:buChar char="●"/>
+              <a:tabLst/>
+              <a:defRPr lang="en-US" sz="2400" b="0" i="0" u="none" strike="noStrike" kern="1200" cap="none">
+                <a:ln>
+                  <a:noFill/>
+                </a:ln>
+                <a:highlight>
+                  <a:scrgbClr r="0" g="0" b="0">
+                    <a:alpha val="0"/>
+                  </a:scrgbClr>
+                </a:highlight>
+                <a:latin typeface="URW Bookman" pitchFamily="2"/>
+                <a:ea typeface="Nimbus Sans" pitchFamily="2"/>
+                <a:cs typeface="FreeSans" pitchFamily="2"/>
+              </a:defRPr>
+            </a:lvl5pPr>
+            <a:lvl6pPr lvl="5" rtl="0" hangingPunct="0">
+              <a:spcBef>
+                <a:spcPts val="1417"/>
+              </a:spcBef>
+              <a:spcAft>
+                <a:spcPts val="0"/>
+              </a:spcAft>
+              <a:buSzPct val="45000"/>
+              <a:buFont typeface="OpenSymbol"/>
+              <a:buChar char="●"/>
+              <a:tabLst/>
+              <a:defRPr lang="en-US" sz="2400" b="0" i="0" u="none" strike="noStrike" kern="1200" cap="none">
+                <a:ln>
+                  <a:noFill/>
+                </a:ln>
+                <a:highlight>
+                  <a:scrgbClr r="0" g="0" b="0">
+                    <a:alpha val="0"/>
+                  </a:scrgbClr>
+                </a:highlight>
+                <a:latin typeface="URW Bookman" pitchFamily="2"/>
+                <a:ea typeface="Nimbus Sans" pitchFamily="2"/>
+                <a:cs typeface="FreeSans" pitchFamily="2"/>
+              </a:defRPr>
+            </a:lvl6pPr>
+            <a:lvl7pPr lvl="6" rtl="0" hangingPunct="0">
+              <a:spcBef>
+                <a:spcPts val="1417"/>
+              </a:spcBef>
+              <a:spcAft>
+                <a:spcPts val="0"/>
+              </a:spcAft>
+              <a:buSzPct val="45000"/>
+              <a:buFont typeface="OpenSymbol"/>
+              <a:buChar char="●"/>
+              <a:tabLst/>
+              <a:defRPr lang="en-US" sz="2400" b="0" i="0" u="none" strike="noStrike" kern="1200" cap="none">
+                <a:ln>
+                  <a:noFill/>
+                </a:ln>
+                <a:highlight>
+                  <a:scrgbClr r="0" g="0" b="0">
+                    <a:alpha val="0"/>
+                  </a:scrgbClr>
+                </a:highlight>
+                <a:latin typeface="URW Bookman" pitchFamily="2"/>
+                <a:ea typeface="Nimbus Sans" pitchFamily="2"/>
+                <a:cs typeface="FreeSans" pitchFamily="2"/>
+              </a:defRPr>
+            </a:lvl7pPr>
+            <a:lvl8pPr marL="3429000" indent="-228600" algn="l" defTabSz="914400" rtl="0" eaLnBrk="1" latinLnBrk="0" hangingPunct="1">
+              <a:lnSpc>
+                <a:spcPct val="90000"/>
+              </a:lnSpc>
+              <a:spcBef>
+                <a:spcPts val="500"/>
+              </a:spcBef>
+              <a:buFont typeface="Arial" panose="020B0604020202020204" pitchFamily="34" charset="0"/>
+              <a:buChar char="•"/>
+              <a:defRPr sz="1800" kern="1200">
+                <a:solidFill>
+                  <a:schemeClr val="tx1"/>
+                </a:solidFill>
+                <a:latin typeface="+mn-lt"/>
+                <a:ea typeface="+mn-ea"/>
+                <a:cs typeface="+mn-cs"/>
+              </a:defRPr>
+            </a:lvl8pPr>
+            <a:lvl9pPr marL="3886200" indent="-228600" algn="l" defTabSz="914400" rtl="0" eaLnBrk="1" latinLnBrk="0" hangingPunct="1">
+              <a:lnSpc>
+                <a:spcPct val="90000"/>
+              </a:lnSpc>
+              <a:spcBef>
+                <a:spcPts val="500"/>
+              </a:spcBef>
+              <a:buFont typeface="Arial" panose="020B0604020202020204" pitchFamily="34" charset="0"/>
+              <a:buChar char="•"/>
+              <a:defRPr sz="1800" kern="1200">
+                <a:solidFill>
+                  <a:schemeClr val="tx1"/>
+                </a:solidFill>
+                <a:latin typeface="+mn-lt"/>
+                <a:ea typeface="+mn-ea"/>
+                <a:cs typeface="+mn-cs"/>
+              </a:defRPr>
+            </a:lvl9pPr>
+          </a:lstStyle>
           <a:p>
             <a:pPr marL="342900" indent="-342900"/>
             <a:r>
@@ -6602,8 +9442,9 @@
                 <a:solidFill>
                   <a:schemeClr val="bg1"/>
                 </a:solidFill>
+                <a:latin typeface="AppleSystemUIFont" pitchFamily="2"/>
               </a:rPr>
-              <a:t>Often, many model outputs change per model constant</a:t>
+              <a:t>DOI 5 results in 689,735 test cases</a:t>
             </a:r>
           </a:p>
           <a:p>
@@ -6613,28 +9454,28 @@
                 <a:solidFill>
                   <a:schemeClr val="bg1"/>
                 </a:solidFill>
+                <a:latin typeface="AppleSystemUIFont" pitchFamily="2"/>
               </a:rPr>
-              <a:t>Output is multidimensional</a:t>
-            </a:r>
-          </a:p>
-          <a:p>
-            <a:pPr marL="342900" indent="-342900"/>
-            <a:r>
-              <a:rPr lang="en-US" dirty="0">
-                <a:solidFill>
-                  <a:schemeClr val="bg1"/>
-                </a:solidFill>
-              </a:rPr>
-              <a:t>How did we pick the 3 dimensions</a:t>
+              <a:t>How many combinatorial test cases generated, executed, passed, skipped, failed, crashed</a:t>
             </a:r>
           </a:p>
         </p:txBody>
       </p:sp>
     </p:spTree>
+    <p:extLst>
+      <p:ext uri="{BB962C8B-B14F-4D97-AF65-F5344CB8AC3E}">
+        <p14:creationId xmlns:p14="http://schemas.microsoft.com/office/powerpoint/2010/main" val="3954683613"/>
+      </p:ext>
+    </p:extLst>
   </p:cSld>
   <p:clrMapOvr>
     <a:masterClrMapping/>
   </p:clrMapOvr>
+  <p:extLst>
+    <p:ext uri="{6950BFC3-D8DA-4A85-94F7-54DA5524770B}">
+      <p188:commentRel xmlns:p188="http://schemas.microsoft.com/office/powerpoint/2018/8/main" r:id="rId2"/>
+    </p:ext>
+  </p:extLst>
 </p:sld>
 </file>
 

--- a/documentation/for_collaborators/AnalysisOverview.pptx
+++ b/documentation/for_collaborators/AnalysisOverview.pptx
@@ -189,8 +189,8 @@
       <pc:docMk xmlns:pc="http://schemas.microsoft.com/office/powerpoint/2013/main/command"/>
       <pc:sldMk xmlns:pc="http://schemas.microsoft.com/office/powerpoint/2013/main/command" cId="0" sldId="265"/>
       <ac:spMk id="3" creationId="{C9367797-CD5B-309B-985B-DF6091246510}"/>
-      <ac:txMk cp="301" len="21">
-        <ac:context len="519" hash="4040391054"/>
+      <ac:txMk cp="297" len="21">
+        <ac:context len="515" hash="3133738915"/>
       </ac:txMk>
     </ac:txMkLst>
     <p188:pos x="2747202" y="2605320"/>
@@ -5736,7 +5736,7 @@
                   <a:schemeClr val="bg1"/>
                 </a:solidFill>
               </a:rPr>
-              <a:t>Some checks were interpreted incorrectly by us and had to be corrected. </a:t>
+              <a:t>Some checks were interpreted incorrectly by us and had to be fixed. </a:t>
             </a:r>
           </a:p>
           <a:p>
@@ -6906,7 +6906,7 @@
                   <a:schemeClr val="bg1"/>
                 </a:solidFill>
               </a:rPr>
-              <a:t>over a period of 35 time steps for a single lake column.</a:t>
+              <a:t>over a period of 35 time steps for the lake column numbered 336.</a:t>
             </a:r>
           </a:p>
         </p:txBody>
@@ -7111,7 +7111,7 @@
                   <a:schemeClr val="bg1"/>
                 </a:solidFill>
               </a:rPr>
-              <a:t>The output data in the form of a </a:t>
+              <a:t>Output data in the form of a </a:t>
             </a:r>
             <a:r>
               <a:rPr lang="en-US" dirty="0" err="1">
@@ -7147,6 +7147,14 @@
                 </a:solidFill>
               </a:rPr>
               <a:t>vkc</a:t>
+            </a:r>
+            <a:r>
+              <a:rPr lang="en-US" i="1" dirty="0">
+                <a:solidFill>
+                  <a:schemeClr val="bg1"/>
+                </a:solidFill>
+              </a:rPr>
+              <a:t>.</a:t>
             </a:r>
             <a:endParaRPr lang="en-US" dirty="0">
               <a:solidFill>
@@ -7173,7 +7181,23 @@
                   <a:schemeClr val="bg1"/>
                 </a:solidFill>
               </a:rPr>
-              <a:t>From the output data is pulled the values for a single model output at a single column. </a:t>
+              <a:t>From the output data is pulled the values for the model output </a:t>
+            </a:r>
+            <a:r>
+              <a:rPr lang="en-US" i="1" dirty="0">
+                <a:solidFill>
+                  <a:schemeClr val="bg1"/>
+                </a:solidFill>
+              </a:rPr>
+              <a:t>lakestate_vars__savedtke1_col</a:t>
+            </a:r>
+            <a:r>
+              <a:rPr lang="en-US" dirty="0">
+                <a:solidFill>
+                  <a:schemeClr val="bg1"/>
+                </a:solidFill>
+              </a:rPr>
+              <a:t> at the column numbered 336. </a:t>
             </a:r>
           </a:p>
           <a:p>
@@ -7528,7 +7552,7 @@
                   <a:schemeClr val="bg1"/>
                 </a:solidFill>
               </a:rPr>
-              <a:t>The ideal way to test which combinations of input values result in erroneous output would be to test every single combination of input values.</a:t>
+              <a:t>The ideal way to test which combinations of parameter values result in erroneous output would be to test every single combination of parameter values.</a:t>
             </a:r>
           </a:p>
           <a:p>
@@ -7539,7 +7563,7 @@
                   <a:schemeClr val="bg1"/>
                 </a:solidFill>
               </a:rPr>
-              <a:t>However, having many input variables that can each take many values will result in too many cases to test. </a:t>
+              <a:t>However, having many parameters that can each take many values will result in too many cases to test. </a:t>
             </a:r>
           </a:p>
           <a:p>
@@ -7948,7 +7972,7 @@
         </p:spPr>
         <p:txBody>
           <a:bodyPr>
-            <a:normAutofit fontScale="92500" lnSpcReduction="20000"/>
+            <a:normAutofit fontScale="92500"/>
           </a:bodyPr>
           <a:lstStyle/>
           <a:p>
@@ -7977,25 +8001,7 @@
                   <a:schemeClr val="bg1"/>
                 </a:solidFill>
               </a:rPr>
-              <a:t> runs, are used as the ‘input’ data for the combinatorial test cases. The model inputs, which determine the starting point of </a:t>
-            </a:r>
-            <a:r>
-              <a:rPr lang="en-US" dirty="0" err="1">
-                <a:solidFill>
-                  <a:schemeClr val="bg1"/>
-                </a:solidFill>
-                <a:latin typeface="Courier New" panose="02070309020205020404" pitchFamily="49" charset="0"/>
-                <a:cs typeface="Courier New" panose="02070309020205020404" pitchFamily="49" charset="0"/>
-              </a:rPr>
-              <a:t>LakeTemperature</a:t>
-            </a:r>
-            <a:r>
-              <a:rPr lang="en-US" dirty="0">
-                <a:solidFill>
-                  <a:schemeClr val="bg1"/>
-                </a:solidFill>
-              </a:rPr>
-              <a:t>, are not being tested. </a:t>
+              <a:t> runs, are used as the parameters for the combinatorial test cases. </a:t>
             </a:r>
           </a:p>
           <a:p>

--- a/documentation/for_collaborators/AnalysisOverview.pptx
+++ b/documentation/for_collaborators/AnalysisOverview.pptx
@@ -5,10 +5,10 @@
     <p:sldMasterId id="2147483648" r:id="rId1"/>
   </p:sldMasterIdLst>
   <p:notesMasterIdLst>
-    <p:notesMasterId r:id="rId18"/>
+    <p:notesMasterId r:id="rId22"/>
   </p:notesMasterIdLst>
   <p:handoutMasterIdLst>
-    <p:handoutMasterId r:id="rId19"/>
+    <p:handoutMasterId r:id="rId23"/>
   </p:handoutMasterIdLst>
   <p:sldIdLst>
     <p:sldId id="256" r:id="rId2"/>
@@ -21,12 +21,16 @@
     <p:sldId id="277" r:id="rId9"/>
     <p:sldId id="278" r:id="rId10"/>
     <p:sldId id="265" r:id="rId11"/>
-    <p:sldId id="266" r:id="rId12"/>
-    <p:sldId id="268" r:id="rId13"/>
-    <p:sldId id="279" r:id="rId14"/>
-    <p:sldId id="269" r:id="rId15"/>
-    <p:sldId id="271" r:id="rId16"/>
-    <p:sldId id="274" r:id="rId17"/>
+    <p:sldId id="284" r:id="rId12"/>
+    <p:sldId id="269" r:id="rId13"/>
+    <p:sldId id="271" r:id="rId14"/>
+    <p:sldId id="274" r:id="rId15"/>
+    <p:sldId id="266" r:id="rId16"/>
+    <p:sldId id="268" r:id="rId17"/>
+    <p:sldId id="280" r:id="rId18"/>
+    <p:sldId id="281" r:id="rId19"/>
+    <p:sldId id="282" r:id="rId20"/>
+    <p:sldId id="283" r:id="rId21"/>
   </p:sldIdLst>
   <p:sldSz cx="10080625" cy="5670550"/>
   <p:notesSz cx="7559675" cy="10691813"/>
@@ -146,8 +150,8 @@
       <pc:docMk xmlns:pc="http://schemas.microsoft.com/office/powerpoint/2013/main/command"/>
       <pc:sldMk xmlns:pc="http://schemas.microsoft.com/office/powerpoint/2013/main/command" cId="0" sldId="262"/>
       <ac:spMk id="3" creationId="{3F589F92-B484-4E15-0CDC-FFD075A2A74E}"/>
-      <ac:txMk cp="17" len="3">
-        <ac:context len="34" hash="4212311320"/>
+      <ac:txMk cp="41" len="3">
+        <ac:context len="147" hash="1310068719"/>
       </ac:txMk>
     </ac:txMkLst>
     <p188:pos x="2899601" y="1264200"/>
@@ -189,8 +193,8 @@
       <pc:docMk xmlns:pc="http://schemas.microsoft.com/office/powerpoint/2013/main/command"/>
       <pc:sldMk xmlns:pc="http://schemas.microsoft.com/office/powerpoint/2013/main/command" cId="0" sldId="265"/>
       <ac:spMk id="3" creationId="{C9367797-CD5B-309B-985B-DF6091246510}"/>
-      <ac:txMk cp="297" len="21">
-        <ac:context len="515" hash="3133738915"/>
+      <ac:txMk cp="297" len="4">
+        <ac:context len="651" hash="2079769833"/>
       </ac:txMk>
     </ac:txMkLst>
     <p188:pos x="2747202" y="2605320"/>
@@ -216,7 +220,7 @@
       <pc:sldMk xmlns:pc="http://schemas.microsoft.com/office/powerpoint/2013/main/command" cId="2353400714" sldId="276"/>
       <ac:spMk id="3" creationId="{5CF707B8-09A9-A28B-36FE-7651ACC03308}"/>
       <ac:txMk cp="17" len="5">
-        <ac:context len="122" hash="2162704515"/>
+        <ac:context len="212" hash="3724621750"/>
       </ac:txMk>
     </ac:txMkLst>
     <p188:pos x="3041841" y="370120"/>
@@ -242,7 +246,7 @@
       <pc:sldMk xmlns:pc="http://schemas.microsoft.com/office/powerpoint/2013/main/command" cId="3165592934" sldId="277"/>
       <ac:spMk id="3" creationId="{56064C14-1601-F022-7F3D-615176F6A82B}"/>
       <ac:txMk cp="17" len="6">
-        <ac:context len="123" hash="649244174"/>
+        <ac:context len="213" hash="2402704641"/>
       </ac:txMk>
     </ac:txMkLst>
     <p188:pos x="3194241" y="370120"/>
@@ -268,7 +272,7 @@
       <pc:sldMk xmlns:pc="http://schemas.microsoft.com/office/powerpoint/2013/main/command" cId="3954683613" sldId="278"/>
       <ac:spMk id="3" creationId="{31720598-1CB0-E7F3-3417-23A2488D52ED}"/>
       <ac:txMk cp="17" len="7">
-        <ac:context len="124" hash="4187825020"/>
+        <ac:context len="214" hash="2875817967"/>
       </ac:txMk>
     </ac:txMkLst>
     <p188:pos x="3346641" y="370120"/>
@@ -1086,7 +1090,13 @@
   <p:cSld>
     <p:spTree>
       <p:nvGrpSpPr>
-        <p:cNvPr id="1" name=""/>
+        <p:cNvPr id="1" name="">
+          <a:extLst>
+            <a:ext uri="{FF2B5EF4-FFF2-40B4-BE49-F238E27FC236}">
+              <a16:creationId xmlns:a16="http://schemas.microsoft.com/office/drawing/2014/main" id="{9FAFC9F6-EA65-0C54-A58C-56CEBCBB6250}"/>
+            </a:ext>
+          </a:extLst>
+        </p:cNvPr>
         <p:cNvGrpSpPr/>
         <p:nvPr/>
       </p:nvGrpSpPr>
@@ -1103,7 +1113,7 @@
           <p:cNvPr id="7" name="Slide Number Placeholder 6">
             <a:extLst>
               <a:ext uri="{FF2B5EF4-FFF2-40B4-BE49-F238E27FC236}">
-                <a16:creationId xmlns:a16="http://schemas.microsoft.com/office/drawing/2014/main" id="{086CABF4-8EE6-FB4C-1190-D6538499F54A}"/>
+                <a16:creationId xmlns:a16="http://schemas.microsoft.com/office/drawing/2014/main" id="{FE4C9592-46B7-54B2-77BA-090D48E2107B}"/>
               </a:ext>
             </a:extLst>
           </p:cNvPr>
@@ -1124,7 +1134,7 @@
           <a:lstStyle/>
           <a:p>
             <a:pPr lvl="0"/>
-            <a:fld id="{2F2A8F5F-D570-7943-BC26-CE189838C058}" type="slidenum">
+            <a:fld id="{59065317-6997-AF48-9E2D-F3DC91694882}" type="slidenum">
               <a:t>15</a:t>
             </a:fld>
             <a:endParaRPr lang="en-US"/>
@@ -1136,7 +1146,7 @@
           <p:cNvPr id="2" name="Slide Image Placeholder 1">
             <a:extLst>
               <a:ext uri="{FF2B5EF4-FFF2-40B4-BE49-F238E27FC236}">
-                <a16:creationId xmlns:a16="http://schemas.microsoft.com/office/drawing/2014/main" id="{0705804A-2E38-13E8-0E3B-093387BC9070}"/>
+                <a16:creationId xmlns:a16="http://schemas.microsoft.com/office/drawing/2014/main" id="{474F864F-37C8-78A5-1408-1E29D5F5B0AA}"/>
               </a:ext>
             </a:extLst>
           </p:cNvPr>
@@ -1168,7 +1178,7 @@
           <p:cNvPr id="3" name="Notes Placeholder 2">
             <a:extLst>
               <a:ext uri="{FF2B5EF4-FFF2-40B4-BE49-F238E27FC236}">
-                <a16:creationId xmlns:a16="http://schemas.microsoft.com/office/drawing/2014/main" id="{65025C25-8073-C251-4130-4E8A6F9B2003}"/>
+                <a16:creationId xmlns:a16="http://schemas.microsoft.com/office/drawing/2014/main" id="{D775867F-B7F2-92E2-05C6-B0989CE3DCF7}"/>
               </a:ext>
             </a:extLst>
           </p:cNvPr>
@@ -1192,6 +1202,11 @@
         </p:txBody>
       </p:sp>
     </p:spTree>
+    <p:extLst>
+      <p:ext uri="{BB962C8B-B14F-4D97-AF65-F5344CB8AC3E}">
+        <p14:creationId xmlns:p14="http://schemas.microsoft.com/office/powerpoint/2010/main" val="2257860987"/>
+      </p:ext>
+    </p:extLst>
   </p:cSld>
   <p:clrMapOvr>
     <a:masterClrMapping/>
@@ -1204,7 +1219,13 @@
   <p:cSld>
     <p:spTree>
       <p:nvGrpSpPr>
-        <p:cNvPr id="1" name=""/>
+        <p:cNvPr id="1" name="">
+          <a:extLst>
+            <a:ext uri="{FF2B5EF4-FFF2-40B4-BE49-F238E27FC236}">
+              <a16:creationId xmlns:a16="http://schemas.microsoft.com/office/drawing/2014/main" id="{AA7B3C66-DFF8-2563-D9FD-38DA71CAC764}"/>
+            </a:ext>
+          </a:extLst>
+        </p:cNvPr>
         <p:cNvGrpSpPr/>
         <p:nvPr/>
       </p:nvGrpSpPr>
@@ -1221,7 +1242,7 @@
           <p:cNvPr id="7" name="Slide Number Placeholder 6">
             <a:extLst>
               <a:ext uri="{FF2B5EF4-FFF2-40B4-BE49-F238E27FC236}">
-                <a16:creationId xmlns:a16="http://schemas.microsoft.com/office/drawing/2014/main" id="{81D7E73B-CB1C-74AA-C247-71A036C7D8B8}"/>
+                <a16:creationId xmlns:a16="http://schemas.microsoft.com/office/drawing/2014/main" id="{60628A4E-EE91-D8F3-FA4B-F27CDD99D07D}"/>
               </a:ext>
             </a:extLst>
           </p:cNvPr>
@@ -1242,7 +1263,7 @@
           <a:lstStyle/>
           <a:p>
             <a:pPr lvl="0"/>
-            <a:fld id="{2B0E6C16-0556-494D-BECC-21D8D6E18886}" type="slidenum">
+            <a:fld id="{805BC73B-1373-A04C-9AEE-DE1873EAA8E9}" type="slidenum">
               <a:t>16</a:t>
             </a:fld>
             <a:endParaRPr lang="en-US"/>
@@ -1254,7 +1275,7 @@
           <p:cNvPr id="2" name="Slide Image Placeholder 1">
             <a:extLst>
               <a:ext uri="{FF2B5EF4-FFF2-40B4-BE49-F238E27FC236}">
-                <a16:creationId xmlns:a16="http://schemas.microsoft.com/office/drawing/2014/main" id="{1120FD65-AAE5-39C0-1FBE-01E05B8B1192}"/>
+                <a16:creationId xmlns:a16="http://schemas.microsoft.com/office/drawing/2014/main" id="{3DD50D68-2917-9D81-6FED-BEEDAD354DEC}"/>
               </a:ext>
             </a:extLst>
           </p:cNvPr>
@@ -1286,7 +1307,7 @@
           <p:cNvPr id="3" name="Notes Placeholder 2">
             <a:extLst>
               <a:ext uri="{FF2B5EF4-FFF2-40B4-BE49-F238E27FC236}">
-                <a16:creationId xmlns:a16="http://schemas.microsoft.com/office/drawing/2014/main" id="{33BAACB7-43A4-D6A0-6589-4626431F3F33}"/>
+                <a16:creationId xmlns:a16="http://schemas.microsoft.com/office/drawing/2014/main" id="{2C10623E-271D-B54F-4BAD-827F864B4521}"/>
               </a:ext>
             </a:extLst>
           </p:cNvPr>
@@ -1310,6 +1331,11 @@
         </p:txBody>
       </p:sp>
     </p:spTree>
+    <p:extLst>
+      <p:ext uri="{BB962C8B-B14F-4D97-AF65-F5344CB8AC3E}">
+        <p14:creationId xmlns:p14="http://schemas.microsoft.com/office/powerpoint/2010/main" val="1723004312"/>
+      </p:ext>
+    </p:extLst>
   </p:cSld>
   <p:clrMapOvr>
     <a:masterClrMapping/>
@@ -1929,7 +1955,7 @@
           <p:cNvPr id="7" name="Slide Number Placeholder 6">
             <a:extLst>
               <a:ext uri="{FF2B5EF4-FFF2-40B4-BE49-F238E27FC236}">
-                <a16:creationId xmlns:a16="http://schemas.microsoft.com/office/drawing/2014/main" id="{5104245F-5FA6-9630-BDC6-0D986215DEFD}"/>
+                <a16:creationId xmlns:a16="http://schemas.microsoft.com/office/drawing/2014/main" id="{E97E3ACB-D483-72B5-FBDE-06C6B73919A3}"/>
               </a:ext>
             </a:extLst>
           </p:cNvPr>
@@ -1950,8 +1976,8 @@
           <a:lstStyle/>
           <a:p>
             <a:pPr lvl="0"/>
-            <a:fld id="{59065317-6997-AF48-9E2D-F3DC91694882}" type="slidenum">
-              <a:t>11</a:t>
+            <a:fld id="{D37FEB87-33B9-194E-AD80-2EA93F043D18}" type="slidenum">
+              <a:t>12</a:t>
             </a:fld>
             <a:endParaRPr lang="en-US"/>
           </a:p>
@@ -1962,7 +1988,7 @@
           <p:cNvPr id="2" name="Slide Image Placeholder 1">
             <a:extLst>
               <a:ext uri="{FF2B5EF4-FFF2-40B4-BE49-F238E27FC236}">
-                <a16:creationId xmlns:a16="http://schemas.microsoft.com/office/drawing/2014/main" id="{D130441A-2952-E6FC-83CA-F59CC50FCC43}"/>
+                <a16:creationId xmlns:a16="http://schemas.microsoft.com/office/drawing/2014/main" id="{C8BE4815-1680-9CB1-FD4C-157B2D1CD47D}"/>
               </a:ext>
             </a:extLst>
           </p:cNvPr>
@@ -1994,7 +2020,7 @@
           <p:cNvPr id="3" name="Notes Placeholder 2">
             <a:extLst>
               <a:ext uri="{FF2B5EF4-FFF2-40B4-BE49-F238E27FC236}">
-                <a16:creationId xmlns:a16="http://schemas.microsoft.com/office/drawing/2014/main" id="{6CE295F0-94A4-3997-8178-59F2A7477AEB}"/>
+                <a16:creationId xmlns:a16="http://schemas.microsoft.com/office/drawing/2014/main" id="{0FC151F7-BD15-9170-E590-B75070D0D838}"/>
               </a:ext>
             </a:extLst>
           </p:cNvPr>
@@ -2047,7 +2073,7 @@
           <p:cNvPr id="7" name="Slide Number Placeholder 6">
             <a:extLst>
               <a:ext uri="{FF2B5EF4-FFF2-40B4-BE49-F238E27FC236}">
-                <a16:creationId xmlns:a16="http://schemas.microsoft.com/office/drawing/2014/main" id="{B706AE35-433D-42FD-0F8C-CF9C94209FBD}"/>
+                <a16:creationId xmlns:a16="http://schemas.microsoft.com/office/drawing/2014/main" id="{086CABF4-8EE6-FB4C-1190-D6538499F54A}"/>
               </a:ext>
             </a:extLst>
           </p:cNvPr>
@@ -2068,8 +2094,8 @@
           <a:lstStyle/>
           <a:p>
             <a:pPr lvl="0"/>
-            <a:fld id="{805BC73B-1373-A04C-9AEE-DE1873EAA8E9}" type="slidenum">
-              <a:t>12</a:t>
+            <a:fld id="{2F2A8F5F-D570-7943-BC26-CE189838C058}" type="slidenum">
+              <a:t>13</a:t>
             </a:fld>
             <a:endParaRPr lang="en-US"/>
           </a:p>
@@ -2080,7 +2106,7 @@
           <p:cNvPr id="2" name="Slide Image Placeholder 1">
             <a:extLst>
               <a:ext uri="{FF2B5EF4-FFF2-40B4-BE49-F238E27FC236}">
-                <a16:creationId xmlns:a16="http://schemas.microsoft.com/office/drawing/2014/main" id="{4F4D5113-22CF-E3F9-6470-8FDCC6858B91}"/>
+                <a16:creationId xmlns:a16="http://schemas.microsoft.com/office/drawing/2014/main" id="{0705804A-2E38-13E8-0E3B-093387BC9070}"/>
               </a:ext>
             </a:extLst>
           </p:cNvPr>
@@ -2112,7 +2138,7 @@
           <p:cNvPr id="3" name="Notes Placeholder 2">
             <a:extLst>
               <a:ext uri="{FF2B5EF4-FFF2-40B4-BE49-F238E27FC236}">
-                <a16:creationId xmlns:a16="http://schemas.microsoft.com/office/drawing/2014/main" id="{3B615CED-37C3-4A68-B9BF-E21FC5F2E36D}"/>
+                <a16:creationId xmlns:a16="http://schemas.microsoft.com/office/drawing/2014/main" id="{65025C25-8073-C251-4130-4E8A6F9B2003}"/>
               </a:ext>
             </a:extLst>
           </p:cNvPr>
@@ -2148,7 +2174,13 @@
   <p:cSld>
     <p:spTree>
       <p:nvGrpSpPr>
-        <p:cNvPr id="1" name=""/>
+        <p:cNvPr id="1" name="">
+          <a:extLst>
+            <a:ext uri="{FF2B5EF4-FFF2-40B4-BE49-F238E27FC236}">
+              <a16:creationId xmlns:a16="http://schemas.microsoft.com/office/drawing/2014/main" id="{C9E1173D-AA60-4AEB-6644-DE4BCA20136C}"/>
+            </a:ext>
+          </a:extLst>
+        </p:cNvPr>
         <p:cNvGrpSpPr/>
         <p:nvPr/>
       </p:nvGrpSpPr>
@@ -2165,7 +2197,7 @@
           <p:cNvPr id="7" name="Slide Number Placeholder 6">
             <a:extLst>
               <a:ext uri="{FF2B5EF4-FFF2-40B4-BE49-F238E27FC236}">
-                <a16:creationId xmlns:a16="http://schemas.microsoft.com/office/drawing/2014/main" id="{E97E3ACB-D483-72B5-FBDE-06C6B73919A3}"/>
+                <a16:creationId xmlns:a16="http://schemas.microsoft.com/office/drawing/2014/main" id="{D3D3B8F1-959C-B12A-0AE9-BE4F5241B61D}"/>
               </a:ext>
             </a:extLst>
           </p:cNvPr>
@@ -2186,7 +2218,7 @@
           <a:lstStyle/>
           <a:p>
             <a:pPr lvl="0"/>
-            <a:fld id="{D37FEB87-33B9-194E-AD80-2EA93F043D18}" type="slidenum">
+            <a:fld id="{2B0E6C16-0556-494D-BECC-21D8D6E18886}" type="slidenum">
               <a:t>14</a:t>
             </a:fld>
             <a:endParaRPr lang="en-US"/>
@@ -2198,7 +2230,7 @@
           <p:cNvPr id="2" name="Slide Image Placeholder 1">
             <a:extLst>
               <a:ext uri="{FF2B5EF4-FFF2-40B4-BE49-F238E27FC236}">
-                <a16:creationId xmlns:a16="http://schemas.microsoft.com/office/drawing/2014/main" id="{C8BE4815-1680-9CB1-FD4C-157B2D1CD47D}"/>
+                <a16:creationId xmlns:a16="http://schemas.microsoft.com/office/drawing/2014/main" id="{8225B9E7-F817-BC08-5681-F53BE5AE55D9}"/>
               </a:ext>
             </a:extLst>
           </p:cNvPr>
@@ -2230,7 +2262,7 @@
           <p:cNvPr id="3" name="Notes Placeholder 2">
             <a:extLst>
               <a:ext uri="{FF2B5EF4-FFF2-40B4-BE49-F238E27FC236}">
-                <a16:creationId xmlns:a16="http://schemas.microsoft.com/office/drawing/2014/main" id="{0FC151F7-BD15-9170-E590-B75070D0D838}"/>
+                <a16:creationId xmlns:a16="http://schemas.microsoft.com/office/drawing/2014/main" id="{03D934EA-B162-B1A2-2EE0-9E14FEF400CD}"/>
               </a:ext>
             </a:extLst>
           </p:cNvPr>
@@ -2254,6 +2286,11 @@
         </p:txBody>
       </p:sp>
     </p:spTree>
+    <p:extLst>
+      <p:ext uri="{BB962C8B-B14F-4D97-AF65-F5344CB8AC3E}">
+        <p14:creationId xmlns:p14="http://schemas.microsoft.com/office/powerpoint/2010/main" val="3297424757"/>
+      </p:ext>
+    </p:extLst>
   </p:cSld>
   <p:clrMapOvr>
     <a:masterClrMapping/>
@@ -5709,7 +5746,7 @@
         <p:spPr>
           <a:xfrm>
             <a:off x="503998" y="1326600"/>
-            <a:ext cx="9071639" cy="3288239"/>
+            <a:ext cx="9071639" cy="3921649"/>
           </a:xfrm>
         </p:spPr>
         <p:txBody>
@@ -5753,21 +5790,58 @@
           <a:p>
             <a:pPr marL="342900" indent="-342900"/>
             <a:r>
+              <a:rPr lang="en-US" i="1" dirty="0">
+                <a:solidFill>
+                  <a:schemeClr val="bg1"/>
+                </a:solidFill>
+              </a:rPr>
+              <a:t>SPEL </a:t>
+            </a:r>
+            <a:r>
               <a:rPr lang="en-US" dirty="0">
                 <a:solidFill>
                   <a:schemeClr val="bg1"/>
                 </a:solidFill>
               </a:rPr>
-              <a:t>No bugs found in </a:t>
-            </a:r>
-            <a:r>
-              <a:rPr lang="en-US" i="1" dirty="0">
-                <a:solidFill>
-                  <a:schemeClr val="bg1"/>
-                </a:solidFill>
-              </a:rPr>
-              <a:t>SPEL</a:t>
-            </a:r>
+              <a:t>might be initializing data with nan values that </a:t>
+            </a:r>
+            <a:r>
+              <a:rPr lang="en-US" dirty="0" err="1">
+                <a:solidFill>
+                  <a:schemeClr val="bg1"/>
+                </a:solidFill>
+              </a:rPr>
+              <a:t>LakeTemperature</a:t>
+            </a:r>
+            <a:r>
+              <a:rPr lang="en-US" dirty="0">
+                <a:solidFill>
+                  <a:schemeClr val="bg1"/>
+                </a:solidFill>
+              </a:rPr>
+              <a:t> then never overwrites or </a:t>
+            </a:r>
+            <a:r>
+              <a:rPr lang="en-US" dirty="0" err="1">
+                <a:solidFill>
+                  <a:schemeClr val="bg1"/>
+                </a:solidFill>
+              </a:rPr>
+              <a:t>LakeTemperature</a:t>
+            </a:r>
+            <a:r>
+              <a:rPr lang="en-US" dirty="0">
+                <a:solidFill>
+                  <a:schemeClr val="bg1"/>
+                </a:solidFill>
+              </a:rPr>
+              <a:t> might be outputting data with nan values. </a:t>
+            </a:r>
+            <a:endParaRPr lang="en-US" i="1" dirty="0">
+              <a:solidFill>
+                <a:schemeClr val="bg1"/>
+              </a:solidFill>
+            </a:endParaRPr>
           </a:p>
           <a:p>
             <a:pPr marL="342900" indent="-342900"/>
@@ -5795,7 +5869,7 @@
                   <a:schemeClr val="bg1"/>
                 </a:solidFill>
               </a:rPr>
-              <a:t> output data was valid and within physical bounds. However, edge cases resulted in physically impossible output, likely due to combinations between a few model constants. </a:t>
+              <a:t> output data was valid and within physical bounds. However, edge cases resulted in some physically impossible output, likely due to combinations between a few model constants. </a:t>
             </a:r>
           </a:p>
         </p:txBody>
@@ -5814,501 +5888,6 @@
 </file>
 
 <file path=ppt/slides/slide11.xml><?xml version="1.0" encoding="utf-8"?>
-<p:sld xmlns:a="http://schemas.openxmlformats.org/drawingml/2006/main" xmlns:r="http://schemas.openxmlformats.org/officeDocument/2006/relationships" xmlns:p="http://schemas.openxmlformats.org/presentationml/2006/main">
-  <p:cSld name="page11">
-    <p:spTree>
-      <p:nvGrpSpPr>
-        <p:cNvPr id="1" name=""/>
-        <p:cNvGrpSpPr/>
-        <p:nvPr/>
-      </p:nvGrpSpPr>
-      <p:grpSpPr>
-        <a:xfrm>
-          <a:off x="0" y="0"/>
-          <a:ext cx="0" cy="0"/>
-          <a:chOff x="0" y="0"/>
-          <a:chExt cx="0" cy="0"/>
-        </a:xfrm>
-      </p:grpSpPr>
-      <p:sp>
-        <p:nvSpPr>
-          <p:cNvPr id="2" name="Title 1">
-            <a:extLst>
-              <a:ext uri="{FF2B5EF4-FFF2-40B4-BE49-F238E27FC236}">
-                <a16:creationId xmlns:a16="http://schemas.microsoft.com/office/drawing/2014/main" id="{32B0991F-E501-52E1-8A9D-C12A1C6D7A3F}"/>
-              </a:ext>
-            </a:extLst>
-          </p:cNvPr>
-          <p:cNvSpPr txBox="1">
-            <a:spLocks noGrp="1"/>
-          </p:cNvSpPr>
-          <p:nvPr>
-            <p:ph type="title" idx="4294967295"/>
-          </p:nvPr>
-        </p:nvSpPr>
-        <p:spPr>
-          <a:xfrm>
-            <a:off x="503999" y="422301"/>
-            <a:ext cx="9071640" cy="553998"/>
-          </a:xfrm>
-        </p:spPr>
-        <p:txBody>
-          <a:bodyPr>
-            <a:spAutoFit/>
-          </a:bodyPr>
-          <a:lstStyle/>
-          <a:p>
-            <a:pPr lvl="0"/>
-            <a:r>
-              <a:rPr lang="en-US" dirty="0">
-                <a:solidFill>
-                  <a:schemeClr val="bg1"/>
-                </a:solidFill>
-              </a:rPr>
-              <a:t>Change-Impact Analysis Background</a:t>
-            </a:r>
-          </a:p>
-        </p:txBody>
-      </p:sp>
-      <p:sp>
-        <p:nvSpPr>
-          <p:cNvPr id="3" name="Text Placeholder 2">
-            <a:extLst>
-              <a:ext uri="{FF2B5EF4-FFF2-40B4-BE49-F238E27FC236}">
-                <a16:creationId xmlns:a16="http://schemas.microsoft.com/office/drawing/2014/main" id="{0111FD90-B5FD-9164-8583-51A1777539F7}"/>
-              </a:ext>
-            </a:extLst>
-          </p:cNvPr>
-          <p:cNvSpPr txBox="1">
-            <a:spLocks noGrp="1"/>
-          </p:cNvSpPr>
-          <p:nvPr>
-            <p:ph type="body" idx="4294967295"/>
-          </p:nvPr>
-        </p:nvSpPr>
-        <p:spPr/>
-        <p:txBody>
-          <a:bodyPr/>
-          <a:lstStyle/>
-          <a:p>
-            <a:pPr marL="342900" indent="-342900"/>
-            <a:r>
-              <a:rPr lang="en-US" dirty="0">
-                <a:solidFill>
-                  <a:schemeClr val="bg1"/>
-                </a:solidFill>
-              </a:rPr>
-              <a:t>Change-Impact Analysis seeks to find how specific changes to individual model constants affect model output. </a:t>
-            </a:r>
-          </a:p>
-          <a:p>
-            <a:pPr marL="342900" indent="-342900"/>
-            <a:r>
-              <a:rPr lang="en-US" dirty="0">
-                <a:solidFill>
-                  <a:schemeClr val="bg1"/>
-                </a:solidFill>
-              </a:rPr>
-              <a:t>It does this by changing a single model constant across its range of values while keeping all other model constants the same. </a:t>
-            </a:r>
-          </a:p>
-        </p:txBody>
-      </p:sp>
-    </p:spTree>
-  </p:cSld>
-  <p:clrMapOvr>
-    <a:masterClrMapping/>
-  </p:clrMapOvr>
-</p:sld>
-</file>
-
-<file path=ppt/slides/slide12.xml><?xml version="1.0" encoding="utf-8"?>
-<p:sld xmlns:a="http://schemas.openxmlformats.org/drawingml/2006/main" xmlns:r="http://schemas.openxmlformats.org/officeDocument/2006/relationships" xmlns:p="http://schemas.openxmlformats.org/presentationml/2006/main">
-  <p:cSld name="page13">
-    <p:spTree>
-      <p:nvGrpSpPr>
-        <p:cNvPr id="1" name=""/>
-        <p:cNvGrpSpPr/>
-        <p:nvPr/>
-      </p:nvGrpSpPr>
-      <p:grpSpPr>
-        <a:xfrm>
-          <a:off x="0" y="0"/>
-          <a:ext cx="0" cy="0"/>
-          <a:chOff x="0" y="0"/>
-          <a:chExt cx="0" cy="0"/>
-        </a:xfrm>
-      </p:grpSpPr>
-      <p:sp>
-        <p:nvSpPr>
-          <p:cNvPr id="2" name="Title 1">
-            <a:extLst>
-              <a:ext uri="{FF2B5EF4-FFF2-40B4-BE49-F238E27FC236}">
-                <a16:creationId xmlns:a16="http://schemas.microsoft.com/office/drawing/2014/main" id="{E1CD01BF-1533-F276-6A2B-362353BBED49}"/>
-              </a:ext>
-            </a:extLst>
-          </p:cNvPr>
-          <p:cNvSpPr txBox="1">
-            <a:spLocks noGrp="1"/>
-          </p:cNvSpPr>
-          <p:nvPr>
-            <p:ph type="title" idx="4294967295"/>
-          </p:nvPr>
-        </p:nvSpPr>
-        <p:spPr>
-          <a:xfrm>
-            <a:off x="0" y="180883"/>
-            <a:ext cx="10080000" cy="553998"/>
-          </a:xfrm>
-        </p:spPr>
-        <p:txBody>
-          <a:bodyPr>
-            <a:spAutoFit/>
-          </a:bodyPr>
-          <a:lstStyle/>
-          <a:p>
-            <a:pPr lvl="0"/>
-            <a:r>
-              <a:rPr lang="en-US" dirty="0">
-                <a:solidFill>
-                  <a:schemeClr val="bg1"/>
-                </a:solidFill>
-              </a:rPr>
-              <a:t>Preliminary Results</a:t>
-            </a:r>
-          </a:p>
-        </p:txBody>
-      </p:sp>
-      <p:grpSp>
-        <p:nvGrpSpPr>
-          <p:cNvPr id="10" name="Group 9">
-            <a:extLst>
-              <a:ext uri="{FF2B5EF4-FFF2-40B4-BE49-F238E27FC236}">
-                <a16:creationId xmlns:a16="http://schemas.microsoft.com/office/drawing/2014/main" id="{72E9366F-7D4D-7AEC-B4EF-4B95779DB708}"/>
-              </a:ext>
-            </a:extLst>
-          </p:cNvPr>
-          <p:cNvGrpSpPr>
-            <a:grpSpLocks noChangeAspect="1"/>
-          </p:cNvGrpSpPr>
-          <p:nvPr/>
-        </p:nvGrpSpPr>
-        <p:grpSpPr>
-          <a:xfrm>
-            <a:off x="2265052" y="976299"/>
-            <a:ext cx="5635901" cy="4661469"/>
-            <a:chOff x="2865704" y="1174750"/>
-            <a:chExt cx="5435600" cy="4495799"/>
-          </a:xfrm>
-        </p:grpSpPr>
-        <p:sp>
-          <p:nvSpPr>
-            <p:cNvPr id="9" name="Rectangle 8">
-              <a:extLst>
-                <a:ext uri="{FF2B5EF4-FFF2-40B4-BE49-F238E27FC236}">
-                  <a16:creationId xmlns:a16="http://schemas.microsoft.com/office/drawing/2014/main" id="{740EDBCF-6E5E-C542-932C-D07D659DB2A1}"/>
-                </a:ext>
-              </a:extLst>
-            </p:cNvPr>
-            <p:cNvSpPr>
-              <a:spLocks/>
-            </p:cNvSpPr>
-            <p:nvPr/>
-          </p:nvSpPr>
-          <p:spPr>
-            <a:xfrm>
-              <a:off x="2865704" y="1174750"/>
-              <a:ext cx="5435600" cy="4495799"/>
-            </a:xfrm>
-            <a:prstGeom prst="rect">
-              <a:avLst/>
-            </a:prstGeom>
-            <a:solidFill>
-              <a:schemeClr val="bg1"/>
-            </a:solidFill>
-          </p:spPr>
-          <p:style>
-            <a:lnRef idx="2">
-              <a:schemeClr val="accent1">
-                <a:shade val="15000"/>
-              </a:schemeClr>
-            </a:lnRef>
-            <a:fillRef idx="1">
-              <a:schemeClr val="accent1"/>
-            </a:fillRef>
-            <a:effectRef idx="0">
-              <a:schemeClr val="accent1"/>
-            </a:effectRef>
-            <a:fontRef idx="minor">
-              <a:schemeClr val="lt1"/>
-            </a:fontRef>
-          </p:style>
-          <p:txBody>
-            <a:bodyPr rtlCol="0" anchor="ctr"/>
-            <a:lstStyle/>
-            <a:p>
-              <a:pPr algn="ctr"/>
-              <a:endParaRPr lang="en-US"/>
-            </a:p>
-          </p:txBody>
-        </p:sp>
-        <p:pic>
-          <p:nvPicPr>
-            <p:cNvPr id="7" name="Picture 6">
-              <a:extLst>
-                <a:ext uri="{FF2B5EF4-FFF2-40B4-BE49-F238E27FC236}">
-                  <a16:creationId xmlns:a16="http://schemas.microsoft.com/office/drawing/2014/main" id="{D9155960-EBF6-47BF-2D13-66FAC7CCE797}"/>
-                </a:ext>
-              </a:extLst>
-            </p:cNvPr>
-            <p:cNvPicPr>
-              <a:picLocks noChangeAspect="1"/>
-            </p:cNvPicPr>
-            <p:nvPr/>
-          </p:nvPicPr>
-          <p:blipFill>
-            <a:blip r:embed="rId3"/>
-            <a:stretch>
-              <a:fillRect/>
-            </a:stretch>
-          </p:blipFill>
-          <p:spPr>
-            <a:xfrm>
-              <a:off x="2948683" y="1243382"/>
-              <a:ext cx="5352620" cy="4427167"/>
-            </a:xfrm>
-            <a:prstGeom prst="rect">
-              <a:avLst/>
-            </a:prstGeom>
-          </p:spPr>
-        </p:pic>
-      </p:grpSp>
-      <p:grpSp>
-        <p:nvGrpSpPr>
-          <p:cNvPr id="15" name="Group 14">
-            <a:extLst>
-              <a:ext uri="{FF2B5EF4-FFF2-40B4-BE49-F238E27FC236}">
-                <a16:creationId xmlns:a16="http://schemas.microsoft.com/office/drawing/2014/main" id="{9D0941FA-E95F-6AFD-3833-285F2955FAC8}"/>
-              </a:ext>
-            </a:extLst>
-          </p:cNvPr>
-          <p:cNvGrpSpPr/>
-          <p:nvPr/>
-        </p:nvGrpSpPr>
-        <p:grpSpPr>
-          <a:xfrm>
-            <a:off x="7508240" y="-25579"/>
-            <a:ext cx="2571761" cy="5696128"/>
-            <a:chOff x="7508240" y="-25579"/>
-            <a:chExt cx="2571761" cy="5696128"/>
-          </a:xfrm>
-        </p:grpSpPr>
-        <p:pic>
-          <p:nvPicPr>
-            <p:cNvPr id="5" name="Picture 4">
-              <a:extLst>
-                <a:ext uri="{FF2B5EF4-FFF2-40B4-BE49-F238E27FC236}">
-                  <a16:creationId xmlns:a16="http://schemas.microsoft.com/office/drawing/2014/main" id="{33061DBC-44AC-B3E9-9B86-1E2656399D55}"/>
-                </a:ext>
-              </a:extLst>
-            </p:cNvPr>
-            <p:cNvPicPr>
-              <a:picLocks noChangeAspect="1"/>
-            </p:cNvPicPr>
-            <p:nvPr/>
-          </p:nvPicPr>
-          <p:blipFill>
-            <a:blip r:embed="rId4"/>
-            <a:stretch>
-              <a:fillRect/>
-            </a:stretch>
-          </p:blipFill>
-          <p:spPr>
-            <a:xfrm>
-              <a:off x="8059448" y="897750"/>
-              <a:ext cx="1497623" cy="4772799"/>
-            </a:xfrm>
-            <a:prstGeom prst="rect">
-              <a:avLst/>
-            </a:prstGeom>
-          </p:spPr>
-        </p:pic>
-        <p:sp>
-          <p:nvSpPr>
-            <p:cNvPr id="8" name="TextBox 7">
-              <a:extLst>
-                <a:ext uri="{FF2B5EF4-FFF2-40B4-BE49-F238E27FC236}">
-                  <a16:creationId xmlns:a16="http://schemas.microsoft.com/office/drawing/2014/main" id="{B61CE515-032B-D888-C961-80FAD2677FF9}"/>
-                </a:ext>
-              </a:extLst>
-            </p:cNvPr>
-            <p:cNvSpPr txBox="1"/>
-            <p:nvPr/>
-          </p:nvSpPr>
-          <p:spPr>
-            <a:xfrm>
-              <a:off x="7508240" y="-25579"/>
-              <a:ext cx="2571761" cy="923330"/>
-            </a:xfrm>
-            <a:prstGeom prst="rect">
-              <a:avLst/>
-            </a:prstGeom>
-            <a:noFill/>
-          </p:spPr>
-          <p:txBody>
-            <a:bodyPr wrap="square" rtlCol="0">
-              <a:spAutoFit/>
-            </a:bodyPr>
-            <a:lstStyle/>
-            <a:p>
-              <a:pPr algn="ctr"/>
-              <a:r>
-                <a:rPr lang="en-US" dirty="0">
-                  <a:solidFill>
-                    <a:schemeClr val="bg1"/>
-                  </a:solidFill>
-                </a:rPr>
-                <a:t>Model output that didn’t change in response to any model constants</a:t>
-              </a:r>
-            </a:p>
-          </p:txBody>
-        </p:sp>
-      </p:grpSp>
-      <p:grpSp>
-        <p:nvGrpSpPr>
-          <p:cNvPr id="14" name="Group 13">
-            <a:extLst>
-              <a:ext uri="{FF2B5EF4-FFF2-40B4-BE49-F238E27FC236}">
-                <a16:creationId xmlns:a16="http://schemas.microsoft.com/office/drawing/2014/main" id="{8EA8B47B-ED39-38F5-F797-A57072FA74C1}"/>
-              </a:ext>
-            </a:extLst>
-          </p:cNvPr>
-          <p:cNvGrpSpPr/>
-          <p:nvPr/>
-        </p:nvGrpSpPr>
-        <p:grpSpPr>
-          <a:xfrm>
-            <a:off x="-3454" y="32782"/>
-            <a:ext cx="2268506" cy="2786181"/>
-            <a:chOff x="-36613" y="150059"/>
-            <a:chExt cx="2268506" cy="2786181"/>
-          </a:xfrm>
-        </p:grpSpPr>
-        <p:pic>
-          <p:nvPicPr>
-            <p:cNvPr id="12" name="Picture 11">
-              <a:extLst>
-                <a:ext uri="{FF2B5EF4-FFF2-40B4-BE49-F238E27FC236}">
-                  <a16:creationId xmlns:a16="http://schemas.microsoft.com/office/drawing/2014/main" id="{9660E9FA-F102-2295-3BFB-5B865515C7AE}"/>
-                </a:ext>
-              </a:extLst>
-            </p:cNvPr>
-            <p:cNvPicPr>
-              <a:picLocks noChangeAspect="1"/>
-            </p:cNvPicPr>
-            <p:nvPr/>
-          </p:nvPicPr>
-          <p:blipFill>
-            <a:blip r:embed="rId5"/>
-            <a:stretch>
-              <a:fillRect/>
-            </a:stretch>
-          </p:blipFill>
-          <p:spPr>
-            <a:xfrm>
-              <a:off x="606525" y="1073389"/>
-              <a:ext cx="982231" cy="1862851"/>
-            </a:xfrm>
-            <a:prstGeom prst="rect">
-              <a:avLst/>
-            </a:prstGeom>
-          </p:spPr>
-        </p:pic>
-        <p:sp>
-          <p:nvSpPr>
-            <p:cNvPr id="13" name="TextBox 12">
-              <a:extLst>
-                <a:ext uri="{FF2B5EF4-FFF2-40B4-BE49-F238E27FC236}">
-                  <a16:creationId xmlns:a16="http://schemas.microsoft.com/office/drawing/2014/main" id="{5F1FA329-1241-A2E4-B9B8-5A666AB4CBB7}"/>
-                </a:ext>
-              </a:extLst>
-            </p:cNvPr>
-            <p:cNvSpPr txBox="1"/>
-            <p:nvPr/>
-          </p:nvSpPr>
-          <p:spPr>
-            <a:xfrm>
-              <a:off x="-36613" y="150059"/>
-              <a:ext cx="2268506" cy="923330"/>
-            </a:xfrm>
-            <a:prstGeom prst="rect">
-              <a:avLst/>
-            </a:prstGeom>
-            <a:noFill/>
-          </p:spPr>
-          <p:txBody>
-            <a:bodyPr wrap="square" rtlCol="0">
-              <a:spAutoFit/>
-            </a:bodyPr>
-            <a:lstStyle/>
-            <a:p>
-              <a:pPr algn="ctr"/>
-              <a:r>
-                <a:rPr lang="en-US" dirty="0">
-                  <a:solidFill>
-                    <a:schemeClr val="bg1"/>
-                  </a:solidFill>
-                </a:rPr>
-                <a:t>Model constants that had no effect on any model output</a:t>
-              </a:r>
-            </a:p>
-          </p:txBody>
-        </p:sp>
-      </p:grpSp>
-      <p:sp>
-        <p:nvSpPr>
-          <p:cNvPr id="16" name="TextBox 15">
-            <a:extLst>
-              <a:ext uri="{FF2B5EF4-FFF2-40B4-BE49-F238E27FC236}">
-                <a16:creationId xmlns:a16="http://schemas.microsoft.com/office/drawing/2014/main" id="{EFC0668C-EBC7-3F6A-E632-B11933CC749D}"/>
-              </a:ext>
-            </a:extLst>
-          </p:cNvPr>
-          <p:cNvSpPr txBox="1"/>
-          <p:nvPr/>
-        </p:nvSpPr>
-        <p:spPr>
-          <a:xfrm>
-            <a:off x="2293065" y="976299"/>
-            <a:ext cx="2431335" cy="830997"/>
-          </a:xfrm>
-          <a:prstGeom prst="rect">
-            <a:avLst/>
-          </a:prstGeom>
-          <a:noFill/>
-        </p:spPr>
-        <p:txBody>
-          <a:bodyPr wrap="square" rtlCol="0">
-            <a:spAutoFit/>
-          </a:bodyPr>
-          <a:lstStyle/>
-          <a:p>
-            <a:r>
-              <a:rPr lang="en-US" sz="1600" dirty="0"/>
-              <a:t>Model constants (columns) and the model outputs (rows) they affect</a:t>
-            </a:r>
-          </a:p>
-        </p:txBody>
-      </p:sp>
-    </p:spTree>
-  </p:cSld>
-  <p:clrMapOvr>
-    <a:masterClrMapping/>
-  </p:clrMapOvr>
-</p:sld>
-</file>
-
-<file path=ppt/slides/slide13.xml><?xml version="1.0" encoding="utf-8"?>
 <p:sld xmlns:a="http://schemas.openxmlformats.org/drawingml/2006/main" xmlns:r="http://schemas.openxmlformats.org/officeDocument/2006/relationships" xmlns:p="http://schemas.openxmlformats.org/presentationml/2006/main">
   <p:cSld>
     <p:spTree>
@@ -6330,7 +5909,7 @@
           <p:cNvPr id="2" name="Title 1">
             <a:extLst>
               <a:ext uri="{FF2B5EF4-FFF2-40B4-BE49-F238E27FC236}">
-                <a16:creationId xmlns:a16="http://schemas.microsoft.com/office/drawing/2014/main" id="{F305543B-14A8-20DC-2B1F-73CBE4DA70A4}"/>
+                <a16:creationId xmlns:a16="http://schemas.microsoft.com/office/drawing/2014/main" id="{79070A95-7E8C-0828-88E3-001BBB4E331D}"/>
               </a:ext>
             </a:extLst>
           </p:cNvPr>
@@ -6382,7 +5961,7 @@
                   <a:schemeClr val="bg1"/>
                 </a:solidFill>
               </a:rPr>
-              <a:t>How we did Change-Impact Analysis</a:t>
+              <a:t>Change-Impact Analysis</a:t>
             </a:r>
           </a:p>
         </p:txBody>
@@ -6392,7 +5971,7 @@
           <p:cNvPr id="3" name="Text Placeholder 2">
             <a:extLst>
               <a:ext uri="{FF2B5EF4-FFF2-40B4-BE49-F238E27FC236}">
-                <a16:creationId xmlns:a16="http://schemas.microsoft.com/office/drawing/2014/main" id="{BA300590-519D-7808-E5BF-704E28F68FEC}"/>
+                <a16:creationId xmlns:a16="http://schemas.microsoft.com/office/drawing/2014/main" id="{87EC0F28-AC2C-142C-EF6A-7F163D42DEC9}"/>
               </a:ext>
             </a:extLst>
           </p:cNvPr>
@@ -6639,7 +6218,7 @@
                   <a:schemeClr val="bg1"/>
                 </a:solidFill>
               </a:rPr>
-              <a:t>I will have to look into this</a:t>
+              <a:t>A method of visualizing the impact of changing a single model constant at a time on the model output. </a:t>
             </a:r>
           </a:p>
         </p:txBody>
@@ -6647,7 +6226,7 @@
     </p:spTree>
     <p:extLst>
       <p:ext uri="{BB962C8B-B14F-4D97-AF65-F5344CB8AC3E}">
-        <p14:creationId xmlns:p14="http://schemas.microsoft.com/office/powerpoint/2010/main" val="1057921343"/>
+        <p14:creationId xmlns:p14="http://schemas.microsoft.com/office/powerpoint/2010/main" val="2569724074"/>
       </p:ext>
     </p:extLst>
   </p:cSld>
@@ -6657,7 +6236,7 @@
 </p:sld>
 </file>
 
-<file path=ppt/slides/slide14.xml><?xml version="1.0" encoding="utf-8"?>
+<file path=ppt/slides/slide12.xml><?xml version="1.0" encoding="utf-8"?>
 <p:sld xmlns:a="http://schemas.openxmlformats.org/drawingml/2006/main" xmlns:r="http://schemas.openxmlformats.org/officeDocument/2006/relationships" xmlns:p="http://schemas.openxmlformats.org/presentationml/2006/main">
   <p:cSld name="page14">
     <p:spTree>
@@ -6709,7 +6288,7 @@
                   <a:schemeClr val="bg1"/>
                 </a:solidFill>
               </a:rPr>
-              <a:t>Challenges of Graphing Output</a:t>
+              <a:t>Challenges</a:t>
             </a:r>
           </a:p>
         </p:txBody>
@@ -6782,7 +6361,7 @@
 </p:sld>
 </file>
 
-<file path=ppt/slides/slide15.xml><?xml version="1.0" encoding="utf-8"?>
+<file path=ppt/slides/slide13.xml><?xml version="1.0" encoding="utf-8"?>
 <p:sld xmlns:a="http://schemas.openxmlformats.org/drawingml/2006/main" xmlns:r="http://schemas.openxmlformats.org/officeDocument/2006/relationships" xmlns:p="http://schemas.openxmlformats.org/presentationml/2006/main">
   <p:cSld name="page16">
     <p:spTree>
@@ -7021,12 +6600,18 @@
 </p:sld>
 </file>
 
-<file path=ppt/slides/slide16.xml><?xml version="1.0" encoding="utf-8"?>
+<file path=ppt/slides/slide14.xml><?xml version="1.0" encoding="utf-8"?>
 <p:sld xmlns:a="http://schemas.openxmlformats.org/drawingml/2006/main" xmlns:r="http://schemas.openxmlformats.org/officeDocument/2006/relationships" xmlns:p="http://schemas.openxmlformats.org/presentationml/2006/main">
-  <p:cSld name="page19">
+  <p:cSld>
     <p:spTree>
       <p:nvGrpSpPr>
-        <p:cNvPr id="1" name=""/>
+        <p:cNvPr id="1" name="">
+          <a:extLst>
+            <a:ext uri="{FF2B5EF4-FFF2-40B4-BE49-F238E27FC236}">
+              <a16:creationId xmlns:a16="http://schemas.microsoft.com/office/drawing/2014/main" id="{2B569827-9521-53AA-9742-36EB856A3BAB}"/>
+            </a:ext>
+          </a:extLst>
+        </p:cNvPr>
         <p:cNvGrpSpPr/>
         <p:nvPr/>
       </p:nvGrpSpPr>
@@ -7043,7 +6628,7 @@
           <p:cNvPr id="2" name="Title 1">
             <a:extLst>
               <a:ext uri="{FF2B5EF4-FFF2-40B4-BE49-F238E27FC236}">
-                <a16:creationId xmlns:a16="http://schemas.microsoft.com/office/drawing/2014/main" id="{2F82740C-7F1B-EC7D-7088-FA26AFC8054D}"/>
+                <a16:creationId xmlns:a16="http://schemas.microsoft.com/office/drawing/2014/main" id="{C65C185C-7590-576F-35F7-50C042B441F9}"/>
               </a:ext>
             </a:extLst>
           </p:cNvPr>
@@ -7083,7 +6668,7 @@
           <p:cNvPr id="3" name="Text Placeholder 2">
             <a:extLst>
               <a:ext uri="{FF2B5EF4-FFF2-40B4-BE49-F238E27FC236}">
-                <a16:creationId xmlns:a16="http://schemas.microsoft.com/office/drawing/2014/main" id="{2B8C89AD-099F-A9EF-C1EE-CABA203BB97B}"/>
+                <a16:creationId xmlns:a16="http://schemas.microsoft.com/office/drawing/2014/main" id="{16380487-782B-D373-4A68-3CAF18B86D6A}"/>
               </a:ext>
             </a:extLst>
           </p:cNvPr>
@@ -7214,6 +6799,11 @@
         </p:txBody>
       </p:sp>
     </p:spTree>
+    <p:extLst>
+      <p:ext uri="{BB962C8B-B14F-4D97-AF65-F5344CB8AC3E}">
+        <p14:creationId xmlns:p14="http://schemas.microsoft.com/office/powerpoint/2010/main" val="2352501276"/>
+      </p:ext>
+    </p:extLst>
   </p:cSld>
   <p:clrMapOvr>
     <a:masterClrMapping/>
@@ -7221,12 +6811,18 @@
 </p:sld>
 </file>
 
-<file path=ppt/slides/slide2.xml><?xml version="1.0" encoding="utf-8"?>
+<file path=ppt/slides/slide15.xml><?xml version="1.0" encoding="utf-8"?>
 <p:sld xmlns:a="http://schemas.openxmlformats.org/drawingml/2006/main" xmlns:r="http://schemas.openxmlformats.org/officeDocument/2006/relationships" xmlns:p="http://schemas.openxmlformats.org/presentationml/2006/main">
   <p:cSld>
     <p:spTree>
       <p:nvGrpSpPr>
-        <p:cNvPr id="1" name=""/>
+        <p:cNvPr id="1" name="">
+          <a:extLst>
+            <a:ext uri="{FF2B5EF4-FFF2-40B4-BE49-F238E27FC236}">
+              <a16:creationId xmlns:a16="http://schemas.microsoft.com/office/drawing/2014/main" id="{4E5DEF85-FAA0-A884-49E4-D90F71A30E97}"/>
+            </a:ext>
+          </a:extLst>
+        </p:cNvPr>
         <p:cNvGrpSpPr/>
         <p:nvPr/>
       </p:nvGrpSpPr>
@@ -7243,7 +6839,524 @@
           <p:cNvPr id="2" name="Title 1">
             <a:extLst>
               <a:ext uri="{FF2B5EF4-FFF2-40B4-BE49-F238E27FC236}">
-                <a16:creationId xmlns:a16="http://schemas.microsoft.com/office/drawing/2014/main" id="{B8086899-15DA-5703-76E2-51D23E842D09}"/>
+                <a16:creationId xmlns:a16="http://schemas.microsoft.com/office/drawing/2014/main" id="{2D635B58-763E-B189-503F-B8A6AECE0C14}"/>
+              </a:ext>
+            </a:extLst>
+          </p:cNvPr>
+          <p:cNvSpPr txBox="1">
+            <a:spLocks noGrp="1"/>
+          </p:cNvSpPr>
+          <p:nvPr>
+            <p:ph type="title" idx="4294967295"/>
+          </p:nvPr>
+        </p:nvSpPr>
+        <p:spPr>
+          <a:xfrm>
+            <a:off x="503999" y="422301"/>
+            <a:ext cx="9071640" cy="553998"/>
+          </a:xfrm>
+        </p:spPr>
+        <p:txBody>
+          <a:bodyPr>
+            <a:spAutoFit/>
+          </a:bodyPr>
+          <a:lstStyle/>
+          <a:p>
+            <a:pPr lvl="0"/>
+            <a:r>
+              <a:rPr lang="en-US" dirty="0">
+                <a:solidFill>
+                  <a:schemeClr val="bg1"/>
+                </a:solidFill>
+              </a:rPr>
+              <a:t>Change Detection Analysis</a:t>
+            </a:r>
+          </a:p>
+        </p:txBody>
+      </p:sp>
+      <p:sp>
+        <p:nvSpPr>
+          <p:cNvPr id="3" name="Text Placeholder 2">
+            <a:extLst>
+              <a:ext uri="{FF2B5EF4-FFF2-40B4-BE49-F238E27FC236}">
+                <a16:creationId xmlns:a16="http://schemas.microsoft.com/office/drawing/2014/main" id="{25E00617-F975-DE3A-0675-236E19993C53}"/>
+              </a:ext>
+            </a:extLst>
+          </p:cNvPr>
+          <p:cNvSpPr txBox="1">
+            <a:spLocks noGrp="1"/>
+          </p:cNvSpPr>
+          <p:nvPr>
+            <p:ph type="body" idx="4294967295"/>
+          </p:nvPr>
+        </p:nvSpPr>
+        <p:spPr/>
+        <p:txBody>
+          <a:bodyPr/>
+          <a:lstStyle/>
+          <a:p>
+            <a:pPr marL="342900" indent="-342900"/>
+            <a:r>
+              <a:rPr lang="en-US" dirty="0">
+                <a:solidFill>
+                  <a:schemeClr val="bg1"/>
+                </a:solidFill>
+              </a:rPr>
+              <a:t>Change Detection Analysis seeks to find how specific changes to individual model constants affect model output. </a:t>
+            </a:r>
+          </a:p>
+          <a:p>
+            <a:pPr marL="342900" indent="-342900"/>
+            <a:r>
+              <a:rPr lang="en-US" dirty="0">
+                <a:solidFill>
+                  <a:schemeClr val="bg1"/>
+                </a:solidFill>
+              </a:rPr>
+              <a:t>It does this by changing a single model constant across its range of values while keeping all other model constants the same. </a:t>
+            </a:r>
+          </a:p>
+        </p:txBody>
+      </p:sp>
+    </p:spTree>
+    <p:extLst>
+      <p:ext uri="{BB962C8B-B14F-4D97-AF65-F5344CB8AC3E}">
+        <p14:creationId xmlns:p14="http://schemas.microsoft.com/office/powerpoint/2010/main" val="4249625218"/>
+      </p:ext>
+    </p:extLst>
+  </p:cSld>
+  <p:clrMapOvr>
+    <a:masterClrMapping/>
+  </p:clrMapOvr>
+</p:sld>
+</file>
+
+<file path=ppt/slides/slide16.xml><?xml version="1.0" encoding="utf-8"?>
+<p:sld xmlns:a="http://schemas.openxmlformats.org/drawingml/2006/main" xmlns:r="http://schemas.openxmlformats.org/officeDocument/2006/relationships" xmlns:p="http://schemas.openxmlformats.org/presentationml/2006/main">
+  <p:cSld>
+    <p:spTree>
+      <p:nvGrpSpPr>
+        <p:cNvPr id="1" name="">
+          <a:extLst>
+            <a:ext uri="{FF2B5EF4-FFF2-40B4-BE49-F238E27FC236}">
+              <a16:creationId xmlns:a16="http://schemas.microsoft.com/office/drawing/2014/main" id="{ABD097B4-55B8-5CCF-9FB2-54192CDBA376}"/>
+            </a:ext>
+          </a:extLst>
+        </p:cNvPr>
+        <p:cNvGrpSpPr/>
+        <p:nvPr/>
+      </p:nvGrpSpPr>
+      <p:grpSpPr>
+        <a:xfrm>
+          <a:off x="0" y="0"/>
+          <a:ext cx="0" cy="0"/>
+          <a:chOff x="0" y="0"/>
+          <a:chExt cx="0" cy="0"/>
+        </a:xfrm>
+      </p:grpSpPr>
+      <p:sp>
+        <p:nvSpPr>
+          <p:cNvPr id="2" name="Title 1">
+            <a:extLst>
+              <a:ext uri="{FF2B5EF4-FFF2-40B4-BE49-F238E27FC236}">
+                <a16:creationId xmlns:a16="http://schemas.microsoft.com/office/drawing/2014/main" id="{F4A5592A-4B1F-9A54-FA90-7679C9AB1E1F}"/>
+              </a:ext>
+            </a:extLst>
+          </p:cNvPr>
+          <p:cNvSpPr txBox="1">
+            <a:spLocks noGrp="1"/>
+          </p:cNvSpPr>
+          <p:nvPr>
+            <p:ph type="title" idx="4294967295"/>
+          </p:nvPr>
+        </p:nvSpPr>
+        <p:spPr>
+          <a:xfrm>
+            <a:off x="0" y="180883"/>
+            <a:ext cx="10080000" cy="553998"/>
+          </a:xfrm>
+        </p:spPr>
+        <p:txBody>
+          <a:bodyPr>
+            <a:spAutoFit/>
+          </a:bodyPr>
+          <a:lstStyle/>
+          <a:p>
+            <a:pPr lvl="0"/>
+            <a:r>
+              <a:rPr lang="en-US" dirty="0">
+                <a:solidFill>
+                  <a:schemeClr val="bg1"/>
+                </a:solidFill>
+              </a:rPr>
+              <a:t>Preliminary Results</a:t>
+            </a:r>
+          </a:p>
+        </p:txBody>
+      </p:sp>
+      <p:grpSp>
+        <p:nvGrpSpPr>
+          <p:cNvPr id="10" name="Group 9">
+            <a:extLst>
+              <a:ext uri="{FF2B5EF4-FFF2-40B4-BE49-F238E27FC236}">
+                <a16:creationId xmlns:a16="http://schemas.microsoft.com/office/drawing/2014/main" id="{1F3D43E0-C6FA-BF34-85B0-F49C4E479482}"/>
+              </a:ext>
+            </a:extLst>
+          </p:cNvPr>
+          <p:cNvGrpSpPr>
+            <a:grpSpLocks noChangeAspect="1"/>
+          </p:cNvGrpSpPr>
+          <p:nvPr/>
+        </p:nvGrpSpPr>
+        <p:grpSpPr>
+          <a:xfrm>
+            <a:off x="2265052" y="976299"/>
+            <a:ext cx="5635901" cy="4661469"/>
+            <a:chOff x="2865704" y="1174750"/>
+            <a:chExt cx="5435600" cy="4495799"/>
+          </a:xfrm>
+        </p:grpSpPr>
+        <p:sp>
+          <p:nvSpPr>
+            <p:cNvPr id="9" name="Rectangle 8">
+              <a:extLst>
+                <a:ext uri="{FF2B5EF4-FFF2-40B4-BE49-F238E27FC236}">
+                  <a16:creationId xmlns:a16="http://schemas.microsoft.com/office/drawing/2014/main" id="{0DE7C1EF-3A48-F5C4-8FCB-54C1337FDD5B}"/>
+                </a:ext>
+              </a:extLst>
+            </p:cNvPr>
+            <p:cNvSpPr>
+              <a:spLocks/>
+            </p:cNvSpPr>
+            <p:nvPr/>
+          </p:nvSpPr>
+          <p:spPr>
+            <a:xfrm>
+              <a:off x="2865704" y="1174750"/>
+              <a:ext cx="5435600" cy="4495799"/>
+            </a:xfrm>
+            <a:prstGeom prst="rect">
+              <a:avLst/>
+            </a:prstGeom>
+            <a:solidFill>
+              <a:schemeClr val="bg1"/>
+            </a:solidFill>
+          </p:spPr>
+          <p:style>
+            <a:lnRef idx="2">
+              <a:schemeClr val="accent1">
+                <a:shade val="15000"/>
+              </a:schemeClr>
+            </a:lnRef>
+            <a:fillRef idx="1">
+              <a:schemeClr val="accent1"/>
+            </a:fillRef>
+            <a:effectRef idx="0">
+              <a:schemeClr val="accent1"/>
+            </a:effectRef>
+            <a:fontRef idx="minor">
+              <a:schemeClr val="lt1"/>
+            </a:fontRef>
+          </p:style>
+          <p:txBody>
+            <a:bodyPr rtlCol="0" anchor="ctr"/>
+            <a:lstStyle/>
+            <a:p>
+              <a:pPr algn="ctr"/>
+              <a:endParaRPr lang="en-US"/>
+            </a:p>
+          </p:txBody>
+        </p:sp>
+        <p:pic>
+          <p:nvPicPr>
+            <p:cNvPr id="7" name="Picture 6">
+              <a:extLst>
+                <a:ext uri="{FF2B5EF4-FFF2-40B4-BE49-F238E27FC236}">
+                  <a16:creationId xmlns:a16="http://schemas.microsoft.com/office/drawing/2014/main" id="{0D28EDBF-6674-8F29-0F89-F521FFA3B182}"/>
+                </a:ext>
+              </a:extLst>
+            </p:cNvPr>
+            <p:cNvPicPr>
+              <a:picLocks noChangeAspect="1"/>
+            </p:cNvPicPr>
+            <p:nvPr/>
+          </p:nvPicPr>
+          <p:blipFill>
+            <a:blip r:embed="rId3"/>
+            <a:stretch>
+              <a:fillRect/>
+            </a:stretch>
+          </p:blipFill>
+          <p:spPr>
+            <a:xfrm>
+              <a:off x="2948683" y="1243382"/>
+              <a:ext cx="5352620" cy="4427167"/>
+            </a:xfrm>
+            <a:prstGeom prst="rect">
+              <a:avLst/>
+            </a:prstGeom>
+          </p:spPr>
+        </p:pic>
+      </p:grpSp>
+      <p:grpSp>
+        <p:nvGrpSpPr>
+          <p:cNvPr id="15" name="Group 14">
+            <a:extLst>
+              <a:ext uri="{FF2B5EF4-FFF2-40B4-BE49-F238E27FC236}">
+                <a16:creationId xmlns:a16="http://schemas.microsoft.com/office/drawing/2014/main" id="{50A0C997-0F63-EB37-9086-C20FB2B6D66F}"/>
+              </a:ext>
+            </a:extLst>
+          </p:cNvPr>
+          <p:cNvGrpSpPr/>
+          <p:nvPr/>
+        </p:nvGrpSpPr>
+        <p:grpSpPr>
+          <a:xfrm>
+            <a:off x="7508240" y="-25579"/>
+            <a:ext cx="2571761" cy="5696128"/>
+            <a:chOff x="7508240" y="-25579"/>
+            <a:chExt cx="2571761" cy="5696128"/>
+          </a:xfrm>
+        </p:grpSpPr>
+        <p:pic>
+          <p:nvPicPr>
+            <p:cNvPr id="5" name="Picture 4">
+              <a:extLst>
+                <a:ext uri="{FF2B5EF4-FFF2-40B4-BE49-F238E27FC236}">
+                  <a16:creationId xmlns:a16="http://schemas.microsoft.com/office/drawing/2014/main" id="{C3D924F0-237C-762C-6BA6-DCBEB54BFB15}"/>
+                </a:ext>
+              </a:extLst>
+            </p:cNvPr>
+            <p:cNvPicPr>
+              <a:picLocks noChangeAspect="1"/>
+            </p:cNvPicPr>
+            <p:nvPr/>
+          </p:nvPicPr>
+          <p:blipFill>
+            <a:blip r:embed="rId4"/>
+            <a:stretch>
+              <a:fillRect/>
+            </a:stretch>
+          </p:blipFill>
+          <p:spPr>
+            <a:xfrm>
+              <a:off x="8059448" y="897750"/>
+              <a:ext cx="1497623" cy="4772799"/>
+            </a:xfrm>
+            <a:prstGeom prst="rect">
+              <a:avLst/>
+            </a:prstGeom>
+          </p:spPr>
+        </p:pic>
+        <p:sp>
+          <p:nvSpPr>
+            <p:cNvPr id="8" name="TextBox 7">
+              <a:extLst>
+                <a:ext uri="{FF2B5EF4-FFF2-40B4-BE49-F238E27FC236}">
+                  <a16:creationId xmlns:a16="http://schemas.microsoft.com/office/drawing/2014/main" id="{AADE1AF1-666D-5B1B-9024-1D4CFA089FD8}"/>
+                </a:ext>
+              </a:extLst>
+            </p:cNvPr>
+            <p:cNvSpPr txBox="1"/>
+            <p:nvPr/>
+          </p:nvSpPr>
+          <p:spPr>
+            <a:xfrm>
+              <a:off x="7508240" y="-25579"/>
+              <a:ext cx="2571761" cy="923330"/>
+            </a:xfrm>
+            <a:prstGeom prst="rect">
+              <a:avLst/>
+            </a:prstGeom>
+            <a:noFill/>
+          </p:spPr>
+          <p:txBody>
+            <a:bodyPr wrap="square" rtlCol="0">
+              <a:spAutoFit/>
+            </a:bodyPr>
+            <a:lstStyle/>
+            <a:p>
+              <a:pPr algn="ctr"/>
+              <a:r>
+                <a:rPr lang="en-US" dirty="0">
+                  <a:solidFill>
+                    <a:schemeClr val="bg1"/>
+                  </a:solidFill>
+                </a:rPr>
+                <a:t>Model output that didn’t change in response to any model constants</a:t>
+              </a:r>
+            </a:p>
+          </p:txBody>
+        </p:sp>
+      </p:grpSp>
+      <p:grpSp>
+        <p:nvGrpSpPr>
+          <p:cNvPr id="14" name="Group 13">
+            <a:extLst>
+              <a:ext uri="{FF2B5EF4-FFF2-40B4-BE49-F238E27FC236}">
+                <a16:creationId xmlns:a16="http://schemas.microsoft.com/office/drawing/2014/main" id="{9A12C58B-D1FE-9F56-5D20-93E453989754}"/>
+              </a:ext>
+            </a:extLst>
+          </p:cNvPr>
+          <p:cNvGrpSpPr/>
+          <p:nvPr/>
+        </p:nvGrpSpPr>
+        <p:grpSpPr>
+          <a:xfrm>
+            <a:off x="-3454" y="32782"/>
+            <a:ext cx="2268506" cy="2786181"/>
+            <a:chOff x="-36613" y="150059"/>
+            <a:chExt cx="2268506" cy="2786181"/>
+          </a:xfrm>
+        </p:grpSpPr>
+        <p:pic>
+          <p:nvPicPr>
+            <p:cNvPr id="12" name="Picture 11">
+              <a:extLst>
+                <a:ext uri="{FF2B5EF4-FFF2-40B4-BE49-F238E27FC236}">
+                  <a16:creationId xmlns:a16="http://schemas.microsoft.com/office/drawing/2014/main" id="{4795AC22-3BE2-27FC-F54A-668838B3FD14}"/>
+                </a:ext>
+              </a:extLst>
+            </p:cNvPr>
+            <p:cNvPicPr>
+              <a:picLocks noChangeAspect="1"/>
+            </p:cNvPicPr>
+            <p:nvPr/>
+          </p:nvPicPr>
+          <p:blipFill>
+            <a:blip r:embed="rId5"/>
+            <a:stretch>
+              <a:fillRect/>
+            </a:stretch>
+          </p:blipFill>
+          <p:spPr>
+            <a:xfrm>
+              <a:off x="606525" y="1073389"/>
+              <a:ext cx="982231" cy="1862851"/>
+            </a:xfrm>
+            <a:prstGeom prst="rect">
+              <a:avLst/>
+            </a:prstGeom>
+          </p:spPr>
+        </p:pic>
+        <p:sp>
+          <p:nvSpPr>
+            <p:cNvPr id="13" name="TextBox 12">
+              <a:extLst>
+                <a:ext uri="{FF2B5EF4-FFF2-40B4-BE49-F238E27FC236}">
+                  <a16:creationId xmlns:a16="http://schemas.microsoft.com/office/drawing/2014/main" id="{7097E64F-55C0-67C9-2130-B5C9BEC26953}"/>
+                </a:ext>
+              </a:extLst>
+            </p:cNvPr>
+            <p:cNvSpPr txBox="1"/>
+            <p:nvPr/>
+          </p:nvSpPr>
+          <p:spPr>
+            <a:xfrm>
+              <a:off x="-36613" y="150059"/>
+              <a:ext cx="2268506" cy="923330"/>
+            </a:xfrm>
+            <a:prstGeom prst="rect">
+              <a:avLst/>
+            </a:prstGeom>
+            <a:noFill/>
+          </p:spPr>
+          <p:txBody>
+            <a:bodyPr wrap="square" rtlCol="0">
+              <a:spAutoFit/>
+            </a:bodyPr>
+            <a:lstStyle/>
+            <a:p>
+              <a:pPr algn="ctr"/>
+              <a:r>
+                <a:rPr lang="en-US" dirty="0">
+                  <a:solidFill>
+                    <a:schemeClr val="bg1"/>
+                  </a:solidFill>
+                </a:rPr>
+                <a:t>Model constants that had no effect on any model output</a:t>
+              </a:r>
+            </a:p>
+          </p:txBody>
+        </p:sp>
+      </p:grpSp>
+      <p:sp>
+        <p:nvSpPr>
+          <p:cNvPr id="16" name="TextBox 15">
+            <a:extLst>
+              <a:ext uri="{FF2B5EF4-FFF2-40B4-BE49-F238E27FC236}">
+                <a16:creationId xmlns:a16="http://schemas.microsoft.com/office/drawing/2014/main" id="{93E6A676-DFFD-7CB9-1E8F-7B8B65E065F3}"/>
+              </a:ext>
+            </a:extLst>
+          </p:cNvPr>
+          <p:cNvSpPr txBox="1"/>
+          <p:nvPr/>
+        </p:nvSpPr>
+        <p:spPr>
+          <a:xfrm>
+            <a:off x="2293065" y="976299"/>
+            <a:ext cx="2431335" cy="830997"/>
+          </a:xfrm>
+          <a:prstGeom prst="rect">
+            <a:avLst/>
+          </a:prstGeom>
+          <a:noFill/>
+        </p:spPr>
+        <p:txBody>
+          <a:bodyPr wrap="square" rtlCol="0">
+            <a:spAutoFit/>
+          </a:bodyPr>
+          <a:lstStyle/>
+          <a:p>
+            <a:r>
+              <a:rPr lang="en-US" sz="1600" dirty="0"/>
+              <a:t>Model constants (columns) and the model outputs (rows) they affect</a:t>
+            </a:r>
+          </a:p>
+        </p:txBody>
+      </p:sp>
+    </p:spTree>
+    <p:extLst>
+      <p:ext uri="{BB962C8B-B14F-4D97-AF65-F5344CB8AC3E}">
+        <p14:creationId xmlns:p14="http://schemas.microsoft.com/office/powerpoint/2010/main" val="4053683747"/>
+      </p:ext>
+    </p:extLst>
+  </p:cSld>
+  <p:clrMapOvr>
+    <a:masterClrMapping/>
+  </p:clrMapOvr>
+</p:sld>
+</file>
+
+<file path=ppt/slides/slide17.xml><?xml version="1.0" encoding="utf-8"?>
+<p:sld xmlns:a="http://schemas.openxmlformats.org/drawingml/2006/main" xmlns:r="http://schemas.openxmlformats.org/officeDocument/2006/relationships" xmlns:p="http://schemas.openxmlformats.org/presentationml/2006/main">
+  <p:cSld>
+    <p:spTree>
+      <p:nvGrpSpPr>
+        <p:cNvPr id="1" name="">
+          <a:extLst>
+            <a:ext uri="{FF2B5EF4-FFF2-40B4-BE49-F238E27FC236}">
+              <a16:creationId xmlns:a16="http://schemas.microsoft.com/office/drawing/2014/main" id="{ED31208B-2A05-1B86-73F0-EB143D2555E8}"/>
+            </a:ext>
+          </a:extLst>
+        </p:cNvPr>
+        <p:cNvGrpSpPr/>
+        <p:nvPr/>
+      </p:nvGrpSpPr>
+      <p:grpSpPr>
+        <a:xfrm>
+          <a:off x="0" y="0"/>
+          <a:ext cx="0" cy="0"/>
+          <a:chOff x="0" y="0"/>
+          <a:chExt cx="0" cy="0"/>
+        </a:xfrm>
+      </p:grpSpPr>
+      <p:sp>
+        <p:nvSpPr>
+          <p:cNvPr id="2" name="Title 1">
+            <a:extLst>
+              <a:ext uri="{FF2B5EF4-FFF2-40B4-BE49-F238E27FC236}">
+                <a16:creationId xmlns:a16="http://schemas.microsoft.com/office/drawing/2014/main" id="{8E7FE489-9349-DA38-F1AB-F4D40E20FA18}"/>
               </a:ext>
             </a:extLst>
           </p:cNvPr>
@@ -7295,7 +7408,7 @@
                   <a:schemeClr val="bg1"/>
                 </a:solidFill>
               </a:rPr>
-              <a:t>Problem of Analysis</a:t>
+              <a:t>Assumptions</a:t>
             </a:r>
           </a:p>
         </p:txBody>
@@ -7305,7 +7418,7 @@
           <p:cNvPr id="3" name="Text Placeholder 2">
             <a:extLst>
               <a:ext uri="{FF2B5EF4-FFF2-40B4-BE49-F238E27FC236}">
-                <a16:creationId xmlns:a16="http://schemas.microsoft.com/office/drawing/2014/main" id="{0CD48D6A-4BDE-1B52-9184-3845B1664AB8}"/>
+                <a16:creationId xmlns:a16="http://schemas.microsoft.com/office/drawing/2014/main" id="{1758AE0D-3928-68B2-851F-3466DEF4D1CE}"/>
               </a:ext>
             </a:extLst>
           </p:cNvPr>
@@ -7317,7 +7430,7 @@
         <p:spPr>
           <a:xfrm>
             <a:off x="503999" y="1326600"/>
-            <a:ext cx="9071640" cy="3288239"/>
+            <a:ext cx="9071640" cy="4022640"/>
           </a:xfrm>
           <a:prstGeom prst="rect">
             <a:avLst/>
@@ -7552,7 +7665,7 @@
                   <a:schemeClr val="bg1"/>
                 </a:solidFill>
               </a:rPr>
-              <a:t>The ideal way to test which combinations of parameter values result in erroneous output would be to test every single combination of parameter values.</a:t>
+              <a:t>However, initial analysis was built on a few key assumptions. </a:t>
             </a:r>
           </a:p>
           <a:p>
@@ -7563,7 +7676,7 @@
                   <a:schemeClr val="bg1"/>
                 </a:solidFill>
               </a:rPr>
-              <a:t>However, having many parameters that can each take many values will result in too many cases to test. </a:t>
+              <a:t>First, that not all the constants had an effect on the model output. </a:t>
             </a:r>
           </a:p>
           <a:p>
@@ -7574,7 +7687,29 @@
                   <a:schemeClr val="bg1"/>
                 </a:solidFill>
               </a:rPr>
-              <a:t>Combinatorial test reduces the number of tests while ensuring pseudo-comprehensive testing. </a:t>
+              <a:t>Second, that model constants did not influence what values other model constants could take.</a:t>
+            </a:r>
+          </a:p>
+          <a:p>
+            <a:pPr marL="342900" indent="-342900"/>
+            <a:r>
+              <a:rPr lang="en-US" dirty="0">
+                <a:solidFill>
+                  <a:schemeClr val="bg1"/>
+                </a:solidFill>
+              </a:rPr>
+              <a:t>Third, that model constants effects on model output aren’t determined by preconditions being met. </a:t>
+            </a:r>
+          </a:p>
+          <a:p>
+            <a:pPr marL="342900" indent="-342900"/>
+            <a:r>
+              <a:rPr lang="en-US" dirty="0">
+                <a:solidFill>
+                  <a:schemeClr val="bg1"/>
+                </a:solidFill>
+              </a:rPr>
+              <a:t>These assumptions were based on the initial results from the change detection analysis plugin. </a:t>
             </a:r>
           </a:p>
         </p:txBody>
@@ -7582,7 +7717,7 @@
     </p:spTree>
     <p:extLst>
       <p:ext uri="{BB962C8B-B14F-4D97-AF65-F5344CB8AC3E}">
-        <p14:creationId xmlns:p14="http://schemas.microsoft.com/office/powerpoint/2010/main" val="3043626"/>
+        <p14:creationId xmlns:p14="http://schemas.microsoft.com/office/powerpoint/2010/main" val="2898562490"/>
       </p:ext>
     </p:extLst>
   </p:cSld>
@@ -7592,12 +7727,18 @@
 </p:sld>
 </file>
 
-<file path=ppt/slides/slide3.xml><?xml version="1.0" encoding="utf-8"?>
+<file path=ppt/slides/slide18.xml><?xml version="1.0" encoding="utf-8"?>
 <p:sld xmlns:a="http://schemas.openxmlformats.org/drawingml/2006/main" xmlns:r="http://schemas.openxmlformats.org/officeDocument/2006/relationships" xmlns:p="http://schemas.openxmlformats.org/presentationml/2006/main">
-  <p:cSld name="page2">
+  <p:cSld>
     <p:spTree>
       <p:nvGrpSpPr>
-        <p:cNvPr id="1" name=""/>
+        <p:cNvPr id="1" name="">
+          <a:extLst>
+            <a:ext uri="{FF2B5EF4-FFF2-40B4-BE49-F238E27FC236}">
+              <a16:creationId xmlns:a16="http://schemas.microsoft.com/office/drawing/2014/main" id="{6DE4F59C-6FFF-C3C6-285D-89E37A94AAE8}"/>
+            </a:ext>
+          </a:extLst>
+        </p:cNvPr>
         <p:cNvGrpSpPr/>
         <p:nvPr/>
       </p:nvGrpSpPr>
@@ -7614,799 +7755,7 @@
           <p:cNvPr id="2" name="Title 1">
             <a:extLst>
               <a:ext uri="{FF2B5EF4-FFF2-40B4-BE49-F238E27FC236}">
-                <a16:creationId xmlns:a16="http://schemas.microsoft.com/office/drawing/2014/main" id="{3329BCE0-57D7-B440-3433-0B98B154F9AD}"/>
-              </a:ext>
-            </a:extLst>
-          </p:cNvPr>
-          <p:cNvSpPr txBox="1">
-            <a:spLocks noGrp="1"/>
-          </p:cNvSpPr>
-          <p:nvPr>
-            <p:ph type="title" idx="4294967295"/>
-          </p:nvPr>
-        </p:nvSpPr>
-        <p:spPr>
-          <a:xfrm>
-            <a:off x="503999" y="422301"/>
-            <a:ext cx="9071640" cy="553998"/>
-          </a:xfrm>
-        </p:spPr>
-        <p:txBody>
-          <a:bodyPr>
-            <a:spAutoFit/>
-          </a:bodyPr>
-          <a:lstStyle/>
-          <a:p>
-            <a:pPr lvl="0"/>
-            <a:r>
-              <a:rPr lang="en-US" dirty="0">
-                <a:solidFill>
-                  <a:schemeClr val="bg1"/>
-                </a:solidFill>
-              </a:rPr>
-              <a:t>Combinatorial Analysis Background</a:t>
-            </a:r>
-          </a:p>
-        </p:txBody>
-      </p:sp>
-      <p:sp>
-        <p:nvSpPr>
-          <p:cNvPr id="3" name="Text Placeholder 2">
-            <a:extLst>
-              <a:ext uri="{FF2B5EF4-FFF2-40B4-BE49-F238E27FC236}">
-                <a16:creationId xmlns:a16="http://schemas.microsoft.com/office/drawing/2014/main" id="{C12EA507-D828-F915-2FD8-9BBE5948C904}"/>
-              </a:ext>
-            </a:extLst>
-          </p:cNvPr>
-          <p:cNvSpPr txBox="1">
-            <a:spLocks noGrp="1"/>
-          </p:cNvSpPr>
-          <p:nvPr>
-            <p:ph type="body" idx="4294967295"/>
-          </p:nvPr>
-        </p:nvSpPr>
-        <p:spPr/>
-        <p:txBody>
-          <a:bodyPr>
-            <a:normAutofit/>
-          </a:bodyPr>
-          <a:lstStyle/>
-          <a:p>
-            <a:pPr marL="342900" indent="-342900"/>
-            <a:r>
-              <a:rPr lang="en-US" i="1" dirty="0">
-                <a:solidFill>
-                  <a:schemeClr val="bg1"/>
-                </a:solidFill>
-              </a:rPr>
-              <a:t>NIST</a:t>
-            </a:r>
-            <a:r>
-              <a:rPr lang="en-US" dirty="0">
-                <a:solidFill>
-                  <a:schemeClr val="bg1"/>
-                </a:solidFill>
-              </a:rPr>
-              <a:t> research found most software bugs are caused by combinations of a few parameters</a:t>
-            </a:r>
-            <a:r>
-              <a:rPr lang="en-US" i="1" baseline="30000" dirty="0">
-                <a:solidFill>
-                  <a:schemeClr val="bg1"/>
-                </a:solidFill>
-              </a:rPr>
-              <a:t>1</a:t>
-            </a:r>
-            <a:r>
-              <a:rPr lang="en-US" dirty="0">
-                <a:solidFill>
-                  <a:schemeClr val="bg1"/>
-                </a:solidFill>
-              </a:rPr>
-              <a:t>. </a:t>
-            </a:r>
-          </a:p>
-          <a:p>
-            <a:pPr marL="342900" indent="-342900"/>
-            <a:r>
-              <a:rPr lang="en-US" dirty="0">
-                <a:solidFill>
-                  <a:schemeClr val="bg1"/>
-                </a:solidFill>
-              </a:rPr>
-              <a:t>By testing all combinations of a certain number of parameters, most software bugs can be found with much fewer test cases. </a:t>
-            </a:r>
-          </a:p>
-          <a:p>
-            <a:pPr marL="342900" indent="-342900"/>
-            <a:r>
-              <a:rPr lang="en-US" i="1" dirty="0">
-                <a:solidFill>
-                  <a:schemeClr val="bg1"/>
-                </a:solidFill>
-              </a:rPr>
-              <a:t>ACTS</a:t>
-            </a:r>
-            <a:r>
-              <a:rPr lang="en-US" dirty="0">
-                <a:solidFill>
-                  <a:schemeClr val="bg1"/>
-                </a:solidFill>
-              </a:rPr>
-              <a:t> can generate covering arrays from 1-way to 6-way</a:t>
-            </a:r>
-            <a:r>
-              <a:rPr lang="en-US" baseline="30000" dirty="0">
-                <a:solidFill>
-                  <a:schemeClr val="bg1"/>
-                </a:solidFill>
-              </a:rPr>
-              <a:t>2</a:t>
-            </a:r>
-            <a:r>
-              <a:rPr lang="en-US" dirty="0">
-                <a:solidFill>
-                  <a:schemeClr val="bg1"/>
-                </a:solidFill>
-              </a:rPr>
-              <a:t>. </a:t>
-            </a:r>
-          </a:p>
-        </p:txBody>
-      </p:sp>
-      <p:sp>
-        <p:nvSpPr>
-          <p:cNvPr id="5" name="TextBox 4">
-            <a:extLst>
-              <a:ext uri="{FF2B5EF4-FFF2-40B4-BE49-F238E27FC236}">
-                <a16:creationId xmlns:a16="http://schemas.microsoft.com/office/drawing/2014/main" id="{9747BCA8-A847-7114-04B9-16833F38B983}"/>
-              </a:ext>
-            </a:extLst>
-          </p:cNvPr>
-          <p:cNvSpPr txBox="1"/>
-          <p:nvPr/>
-        </p:nvSpPr>
-        <p:spPr>
-          <a:xfrm>
-            <a:off x="251506" y="4820323"/>
-            <a:ext cx="9576626" cy="646331"/>
-          </a:xfrm>
-          <a:prstGeom prst="rect">
-            <a:avLst/>
-          </a:prstGeom>
-          <a:noFill/>
-        </p:spPr>
-        <p:txBody>
-          <a:bodyPr wrap="square" rtlCol="0">
-            <a:spAutoFit/>
-          </a:bodyPr>
-          <a:lstStyle/>
-          <a:p>
-            <a:r>
-              <a:rPr lang="en-US" sz="1200" dirty="0">
-                <a:solidFill>
-                  <a:schemeClr val="bg1"/>
-                </a:solidFill>
-              </a:rPr>
-              <a:t>1. </a:t>
-            </a:r>
-            <a:r>
-              <a:rPr lang="en-US" sz="1200" i="1" dirty="0">
-                <a:solidFill>
-                  <a:schemeClr val="bg1"/>
-                </a:solidFill>
-              </a:rPr>
-              <a:t>Automated Combinatorial Testing for Software (ACTS)</a:t>
-            </a:r>
-            <a:r>
-              <a:rPr lang="en-US" sz="1200" dirty="0">
-                <a:solidFill>
-                  <a:schemeClr val="bg1"/>
-                </a:solidFill>
-              </a:rPr>
-              <a:t>. NIST Computer Security Division. (2016, July 20). https://</a:t>
-            </a:r>
-            <a:r>
-              <a:rPr lang="en-US" sz="1200" dirty="0" err="1">
-                <a:solidFill>
-                  <a:schemeClr val="bg1"/>
-                </a:solidFill>
-              </a:rPr>
-              <a:t>csrc.nist.rip</a:t>
-            </a:r>
-            <a:r>
-              <a:rPr lang="en-US" sz="1200" dirty="0">
-                <a:solidFill>
-                  <a:schemeClr val="bg1"/>
-                </a:solidFill>
-              </a:rPr>
-              <a:t>/groups/SNS/acts/ </a:t>
-            </a:r>
-          </a:p>
-          <a:p>
-            <a:r>
-              <a:rPr lang="en-US" sz="1200" dirty="0">
-                <a:solidFill>
-                  <a:schemeClr val="bg1"/>
-                </a:solidFill>
-              </a:rPr>
-              <a:t>2. </a:t>
-            </a:r>
-            <a:r>
-              <a:rPr lang="en-US" sz="1200" i="1" dirty="0">
-                <a:solidFill>
-                  <a:schemeClr val="bg1"/>
-                </a:solidFill>
-              </a:rPr>
-              <a:t>User Guide for ACTS</a:t>
-            </a:r>
-            <a:r>
-              <a:rPr lang="en-US" sz="1200" dirty="0">
-                <a:solidFill>
-                  <a:schemeClr val="bg1"/>
-                </a:solidFill>
-              </a:rPr>
-              <a:t>. NIST. (n.d.). https://</a:t>
-            </a:r>
-            <a:r>
-              <a:rPr lang="en-US" sz="1200" dirty="0" err="1">
-                <a:solidFill>
-                  <a:schemeClr val="bg1"/>
-                </a:solidFill>
-              </a:rPr>
-              <a:t>csrc.nist.gov</a:t>
-            </a:r>
-            <a:r>
-              <a:rPr lang="en-US" sz="1200" dirty="0">
-                <a:solidFill>
-                  <a:schemeClr val="bg1"/>
-                </a:solidFill>
-              </a:rPr>
-              <a:t>/</a:t>
-            </a:r>
-            <a:r>
-              <a:rPr lang="en-US" sz="1200" dirty="0" err="1">
-                <a:solidFill>
-                  <a:schemeClr val="bg1"/>
-                </a:solidFill>
-              </a:rPr>
-              <a:t>csrc</a:t>
-            </a:r>
-            <a:r>
-              <a:rPr lang="en-US" sz="1200" dirty="0">
-                <a:solidFill>
-                  <a:schemeClr val="bg1"/>
-                </a:solidFill>
-              </a:rPr>
-              <a:t>/media/Projects/automated-combinatorial-testing-for-software/documents/acts_user_guide_for_basic1.0_and_advanced3.3_versions_nov23.pdf </a:t>
-            </a:r>
-          </a:p>
-        </p:txBody>
-      </p:sp>
-    </p:spTree>
-  </p:cSld>
-  <p:clrMapOvr>
-    <a:masterClrMapping/>
-  </p:clrMapOvr>
-</p:sld>
-</file>
-
-<file path=ppt/slides/slide4.xml><?xml version="1.0" encoding="utf-8"?>
-<p:sld xmlns:a="http://schemas.openxmlformats.org/drawingml/2006/main" xmlns:r="http://schemas.openxmlformats.org/officeDocument/2006/relationships" xmlns:p="http://schemas.openxmlformats.org/presentationml/2006/main">
-  <p:cSld name="page3">
-    <p:spTree>
-      <p:nvGrpSpPr>
-        <p:cNvPr id="1" name=""/>
-        <p:cNvGrpSpPr/>
-        <p:nvPr/>
-      </p:nvGrpSpPr>
-      <p:grpSpPr>
-        <a:xfrm>
-          <a:off x="0" y="0"/>
-          <a:ext cx="0" cy="0"/>
-          <a:chOff x="0" y="0"/>
-          <a:chExt cx="0" cy="0"/>
-        </a:xfrm>
-      </p:grpSpPr>
-      <p:sp>
-        <p:nvSpPr>
-          <p:cNvPr id="2" name="Title 1">
-            <a:extLst>
-              <a:ext uri="{FF2B5EF4-FFF2-40B4-BE49-F238E27FC236}">
-                <a16:creationId xmlns:a16="http://schemas.microsoft.com/office/drawing/2014/main" id="{1F22CA55-51A0-611A-7B91-13ABAA9983C9}"/>
-              </a:ext>
-            </a:extLst>
-          </p:cNvPr>
-          <p:cNvSpPr txBox="1">
-            <a:spLocks noGrp="1"/>
-          </p:cNvSpPr>
-          <p:nvPr>
-            <p:ph type="title" idx="4294967295"/>
-          </p:nvPr>
-        </p:nvSpPr>
-        <p:spPr>
-          <a:xfrm>
-            <a:off x="503999" y="422301"/>
-            <a:ext cx="9071640" cy="553998"/>
-          </a:xfrm>
-        </p:spPr>
-        <p:txBody>
-          <a:bodyPr>
-            <a:spAutoFit/>
-          </a:bodyPr>
-          <a:lstStyle/>
-          <a:p>
-            <a:pPr lvl="0"/>
-            <a:r>
-              <a:rPr lang="en-US" dirty="0">
-                <a:solidFill>
-                  <a:schemeClr val="bg1"/>
-                </a:solidFill>
-              </a:rPr>
-              <a:t>Our Implementation</a:t>
-            </a:r>
-          </a:p>
-        </p:txBody>
-      </p:sp>
-      <p:sp>
-        <p:nvSpPr>
-          <p:cNvPr id="3" name="Text Placeholder 2">
-            <a:extLst>
-              <a:ext uri="{FF2B5EF4-FFF2-40B4-BE49-F238E27FC236}">
-                <a16:creationId xmlns:a16="http://schemas.microsoft.com/office/drawing/2014/main" id="{4FC0F3B3-D388-0133-98BD-A5D2EC76DF23}"/>
-              </a:ext>
-            </a:extLst>
-          </p:cNvPr>
-          <p:cNvSpPr txBox="1">
-            <a:spLocks noGrp="1"/>
-          </p:cNvSpPr>
-          <p:nvPr>
-            <p:ph type="body" idx="4294967295"/>
-          </p:nvPr>
-        </p:nvSpPr>
-        <p:spPr>
-          <a:xfrm>
-            <a:off x="503999" y="1326600"/>
-            <a:ext cx="9071640" cy="3613679"/>
-          </a:xfrm>
-        </p:spPr>
-        <p:txBody>
-          <a:bodyPr>
-            <a:normAutofit fontScale="92500"/>
-          </a:bodyPr>
-          <a:lstStyle/>
-          <a:p>
-            <a:pPr marL="342900" indent="-342900"/>
-            <a:r>
-              <a:rPr lang="en-US" dirty="0">
-                <a:solidFill>
-                  <a:schemeClr val="bg1"/>
-                </a:solidFill>
-              </a:rPr>
-              <a:t>The model constants, which determine how </a:t>
-            </a:r>
-            <a:r>
-              <a:rPr lang="en-US" dirty="0" err="1">
-                <a:solidFill>
-                  <a:schemeClr val="bg1"/>
-                </a:solidFill>
-                <a:latin typeface="Courier New" panose="02070309020205020404" pitchFamily="49" charset="0"/>
-                <a:cs typeface="Courier New" panose="02070309020205020404" pitchFamily="49" charset="0"/>
-              </a:rPr>
-              <a:t>LakeTemperature</a:t>
-            </a:r>
-            <a:r>
-              <a:rPr lang="en-US" dirty="0">
-                <a:solidFill>
-                  <a:schemeClr val="bg1"/>
-                </a:solidFill>
-              </a:rPr>
-              <a:t> runs, are used as the parameters for the combinatorial test cases. </a:t>
-            </a:r>
-          </a:p>
-          <a:p>
-            <a:pPr marL="342900" indent="-342900"/>
-            <a:r>
-              <a:rPr lang="en-US" dirty="0">
-                <a:solidFill>
-                  <a:schemeClr val="bg1"/>
-                </a:solidFill>
-              </a:rPr>
-              <a:t>Booleans can be either 0 or 1.</a:t>
-            </a:r>
-          </a:p>
-          <a:p>
-            <a:pPr marL="342900" indent="-342900"/>
-            <a:r>
-              <a:rPr lang="en-US" dirty="0">
-                <a:solidFill>
-                  <a:schemeClr val="bg1"/>
-                </a:solidFill>
-              </a:rPr>
-              <a:t>For integers, we linearly interpolate over their range to get up to 11 values. </a:t>
-            </a:r>
-          </a:p>
-          <a:p>
-            <a:pPr marL="342900" indent="-342900"/>
-            <a:r>
-              <a:rPr lang="en-US" dirty="0">
-                <a:solidFill>
-                  <a:schemeClr val="bg1"/>
-                </a:solidFill>
-              </a:rPr>
-              <a:t>For floats, we linearly interpolate over their range to get exactly 11 values. </a:t>
-            </a:r>
-          </a:p>
-          <a:p>
-            <a:pPr marL="342900" indent="-342900"/>
-            <a:r>
-              <a:rPr lang="en-US" i="1" dirty="0">
-                <a:solidFill>
-                  <a:schemeClr val="bg1"/>
-                </a:solidFill>
-              </a:rPr>
-              <a:t>ACTS</a:t>
-            </a:r>
-            <a:r>
-              <a:rPr lang="en-US" dirty="0">
-                <a:solidFill>
-                  <a:schemeClr val="bg1"/>
-                </a:solidFill>
-              </a:rPr>
-              <a:t> generates covering arrays from 2-way to 5-way and outputs a CSV file, from which </a:t>
-            </a:r>
-            <a:r>
-              <a:rPr lang="en-US" i="1" dirty="0" err="1">
-                <a:solidFill>
-                  <a:schemeClr val="bg1"/>
-                </a:solidFill>
-              </a:rPr>
-              <a:t>NetCDF</a:t>
-            </a:r>
-            <a:r>
-              <a:rPr lang="en-US" dirty="0">
-                <a:solidFill>
-                  <a:schemeClr val="bg1"/>
-                </a:solidFill>
-              </a:rPr>
-              <a:t> files are created using a Python script (</a:t>
-            </a:r>
-            <a:r>
-              <a:rPr lang="en-US" dirty="0">
-                <a:solidFill>
-                  <a:schemeClr val="bg1"/>
-                </a:solidFill>
-                <a:latin typeface="Courier New" panose="02070309020205020404" pitchFamily="49" charset="0"/>
-                <a:cs typeface="Courier New" panose="02070309020205020404" pitchFamily="49" charset="0"/>
-              </a:rPr>
-              <a:t>csv2nc</a:t>
-            </a:r>
-            <a:r>
-              <a:rPr lang="en-US" dirty="0">
-                <a:solidFill>
-                  <a:schemeClr val="bg1"/>
-                </a:solidFill>
-              </a:rPr>
-              <a:t>). These are run on the model using the </a:t>
-            </a:r>
-            <a:r>
-              <a:rPr lang="en-US" i="1" dirty="0" err="1">
-                <a:solidFill>
-                  <a:schemeClr val="bg1"/>
-                </a:solidFill>
-              </a:rPr>
-              <a:t>NetCDF</a:t>
-            </a:r>
-            <a:r>
-              <a:rPr lang="en-US" dirty="0">
-                <a:solidFill>
-                  <a:schemeClr val="bg1"/>
-                </a:solidFill>
-              </a:rPr>
-              <a:t> Cases Sampling Plugin. </a:t>
-            </a:r>
-            <a:endParaRPr lang="en-US" i="1" dirty="0">
-              <a:solidFill>
-                <a:schemeClr val="bg1"/>
-              </a:solidFill>
-            </a:endParaRPr>
-          </a:p>
-        </p:txBody>
-      </p:sp>
-    </p:spTree>
-  </p:cSld>
-  <p:clrMapOvr>
-    <a:masterClrMapping/>
-  </p:clrMapOvr>
-</p:sld>
-</file>
-
-<file path=ppt/slides/slide5.xml><?xml version="1.0" encoding="utf-8"?>
-<p:sld xmlns:a="http://schemas.openxmlformats.org/drawingml/2006/main" xmlns:r="http://schemas.openxmlformats.org/officeDocument/2006/relationships" xmlns:p="http://schemas.openxmlformats.org/presentationml/2006/main">
-  <p:cSld name="page4">
-    <p:spTree>
-      <p:nvGrpSpPr>
-        <p:cNvPr id="1" name=""/>
-        <p:cNvGrpSpPr/>
-        <p:nvPr/>
-      </p:nvGrpSpPr>
-      <p:grpSpPr>
-        <a:xfrm>
-          <a:off x="0" y="0"/>
-          <a:ext cx="0" cy="0"/>
-          <a:chOff x="0" y="0"/>
-          <a:chExt cx="0" cy="0"/>
-        </a:xfrm>
-      </p:grpSpPr>
-      <p:sp>
-        <p:nvSpPr>
-          <p:cNvPr id="2" name="Title 1">
-            <a:extLst>
-              <a:ext uri="{FF2B5EF4-FFF2-40B4-BE49-F238E27FC236}">
-                <a16:creationId xmlns:a16="http://schemas.microsoft.com/office/drawing/2014/main" id="{C4490A42-8874-BE43-3396-EC82FA0BDFFE}"/>
-              </a:ext>
-            </a:extLst>
-          </p:cNvPr>
-          <p:cNvSpPr txBox="1">
-            <a:spLocks noGrp="1"/>
-          </p:cNvSpPr>
-          <p:nvPr>
-            <p:ph type="title" idx="4294967295"/>
-          </p:nvPr>
-        </p:nvSpPr>
-        <p:spPr>
-          <a:xfrm>
-            <a:off x="503999" y="422301"/>
-            <a:ext cx="9071640" cy="553998"/>
-          </a:xfrm>
-        </p:spPr>
-        <p:txBody>
-          <a:bodyPr>
-            <a:spAutoFit/>
-          </a:bodyPr>
-          <a:lstStyle/>
-          <a:p>
-            <a:pPr lvl="0"/>
-            <a:r>
-              <a:rPr lang="en-US" dirty="0">
-                <a:solidFill>
-                  <a:schemeClr val="bg1"/>
-                </a:solidFill>
-              </a:rPr>
-              <a:t>Test Oracle Problem</a:t>
-            </a:r>
-          </a:p>
-        </p:txBody>
-      </p:sp>
-      <p:sp>
-        <p:nvSpPr>
-          <p:cNvPr id="3" name="Text Placeholder 2">
-            <a:extLst>
-              <a:ext uri="{FF2B5EF4-FFF2-40B4-BE49-F238E27FC236}">
-                <a16:creationId xmlns:a16="http://schemas.microsoft.com/office/drawing/2014/main" id="{86FF665C-42E1-DF86-A85F-54C67BE68385}"/>
-              </a:ext>
-            </a:extLst>
-          </p:cNvPr>
-          <p:cNvSpPr txBox="1">
-            <a:spLocks noGrp="1"/>
-          </p:cNvSpPr>
-          <p:nvPr>
-            <p:ph type="body" idx="4294967295"/>
-          </p:nvPr>
-        </p:nvSpPr>
-        <p:spPr/>
-        <p:txBody>
-          <a:bodyPr>
-            <a:normAutofit/>
-          </a:bodyPr>
-          <a:lstStyle/>
-          <a:p>
-            <a:pPr marL="342900" indent="-342900"/>
-            <a:r>
-              <a:rPr lang="en-US" dirty="0">
-                <a:solidFill>
-                  <a:schemeClr val="bg1"/>
-                </a:solidFill>
-              </a:rPr>
-              <a:t>Scientific software verification is difficult due to lacking a test oracle. </a:t>
-            </a:r>
-          </a:p>
-          <a:p>
-            <a:pPr marL="342900" indent="-342900"/>
-            <a:r>
-              <a:rPr lang="en-US" dirty="0">
-                <a:solidFill>
-                  <a:schemeClr val="bg1"/>
-                </a:solidFill>
-              </a:rPr>
-              <a:t>We implement checks that validate output, supported by the Fault Finding Analysis Plugin. </a:t>
-            </a:r>
-          </a:p>
-          <a:p>
-            <a:pPr marL="342900" indent="-342900"/>
-            <a:r>
-              <a:rPr lang="en-US" dirty="0">
-                <a:solidFill>
-                  <a:schemeClr val="bg1"/>
-                </a:solidFill>
-              </a:rPr>
-              <a:t>Checks include ranges of outputs, signs, enumerated values, finiteness, relationships to other inputs/outputs, and certain physical laws and restraints.</a:t>
-            </a:r>
-          </a:p>
-        </p:txBody>
-      </p:sp>
-    </p:spTree>
-  </p:cSld>
-  <p:clrMapOvr>
-    <a:masterClrMapping/>
-  </p:clrMapOvr>
-</p:sld>
-</file>
-
-<file path=ppt/slides/slide6.xml><?xml version="1.0" encoding="utf-8"?>
-<p:sld xmlns:a="http://schemas.openxmlformats.org/drawingml/2006/main" xmlns:r="http://schemas.openxmlformats.org/officeDocument/2006/relationships" xmlns:p="http://schemas.openxmlformats.org/presentationml/2006/main">
-  <p:cSld name="page7">
-    <p:spTree>
-      <p:nvGrpSpPr>
-        <p:cNvPr id="1" name=""/>
-        <p:cNvGrpSpPr/>
-        <p:nvPr/>
-      </p:nvGrpSpPr>
-      <p:grpSpPr>
-        <a:xfrm>
-          <a:off x="0" y="0"/>
-          <a:ext cx="0" cy="0"/>
-          <a:chOff x="0" y="0"/>
-          <a:chExt cx="0" cy="0"/>
-        </a:xfrm>
-      </p:grpSpPr>
-      <p:sp>
-        <p:nvSpPr>
-          <p:cNvPr id="2" name="Title 1">
-            <a:extLst>
-              <a:ext uri="{FF2B5EF4-FFF2-40B4-BE49-F238E27FC236}">
-                <a16:creationId xmlns:a16="http://schemas.microsoft.com/office/drawing/2014/main" id="{44B3FCDA-4EC5-B19D-5009-23CEC9F74198}"/>
-              </a:ext>
-            </a:extLst>
-          </p:cNvPr>
-          <p:cNvSpPr txBox="1">
-            <a:spLocks noGrp="1"/>
-          </p:cNvSpPr>
-          <p:nvPr>
-            <p:ph type="title" idx="4294967295"/>
-          </p:nvPr>
-        </p:nvSpPr>
-        <p:spPr>
-          <a:xfrm>
-            <a:off x="503999" y="422301"/>
-            <a:ext cx="3346641" cy="553998"/>
-          </a:xfrm>
-        </p:spPr>
-        <p:txBody>
-          <a:bodyPr wrap="square">
-            <a:spAutoFit/>
-          </a:bodyPr>
-          <a:lstStyle/>
-          <a:p>
-            <a:pPr lvl="0"/>
-            <a:r>
-              <a:rPr lang="en-US" dirty="0">
-                <a:solidFill>
-                  <a:schemeClr val="bg1"/>
-                </a:solidFill>
-              </a:rPr>
-              <a:t>DOI 2 Data</a:t>
-            </a:r>
-          </a:p>
-        </p:txBody>
-      </p:sp>
-      <p:sp>
-        <p:nvSpPr>
-          <p:cNvPr id="3" name="Text Placeholder 2">
-            <a:extLst>
-              <a:ext uri="{FF2B5EF4-FFF2-40B4-BE49-F238E27FC236}">
-                <a16:creationId xmlns:a16="http://schemas.microsoft.com/office/drawing/2014/main" id="{3F589F92-B484-4E15-0CDC-FFD075A2A74E}"/>
-              </a:ext>
-            </a:extLst>
-          </p:cNvPr>
-          <p:cNvSpPr txBox="1">
-            <a:spLocks noGrp="1"/>
-          </p:cNvSpPr>
-          <p:nvPr>
-            <p:ph type="body" idx="4294967295"/>
-          </p:nvPr>
-        </p:nvSpPr>
-        <p:spPr>
-          <a:xfrm>
-            <a:off x="503999" y="1326600"/>
-            <a:ext cx="3346641" cy="3288239"/>
-          </a:xfrm>
-        </p:spPr>
-        <p:txBody>
-          <a:bodyPr>
-            <a:normAutofit/>
-          </a:bodyPr>
-          <a:lstStyle/>
-          <a:p>
-            <a:pPr marL="342900" indent="-342900"/>
-            <a:r>
-              <a:rPr lang="en-US" dirty="0">
-                <a:solidFill>
-                  <a:schemeClr val="bg1"/>
-                </a:solidFill>
-                <a:latin typeface="AppleSystemUIFont" pitchFamily="2"/>
-              </a:rPr>
-              <a:t>DOI 2 results in 133 test cases. </a:t>
-            </a:r>
-          </a:p>
-        </p:txBody>
-      </p:sp>
-      <p:pic>
-        <p:nvPicPr>
-          <p:cNvPr id="5" name="Picture 4">
-            <a:extLst>
-              <a:ext uri="{FF2B5EF4-FFF2-40B4-BE49-F238E27FC236}">
-                <a16:creationId xmlns:a16="http://schemas.microsoft.com/office/drawing/2014/main" id="{15C94A79-243F-8D40-B5DA-BED8A49E8184}"/>
-              </a:ext>
-            </a:extLst>
-          </p:cNvPr>
-          <p:cNvPicPr>
-            <a:picLocks noChangeAspect="1"/>
-          </p:cNvPicPr>
-          <p:nvPr/>
-        </p:nvPicPr>
-        <p:blipFill>
-          <a:blip r:embed="rId4"/>
-          <a:stretch>
-            <a:fillRect/>
-          </a:stretch>
-        </p:blipFill>
-        <p:spPr>
-          <a:xfrm>
-            <a:off x="4114644" y="0"/>
-            <a:ext cx="6037257" cy="5670550"/>
-          </a:xfrm>
-          <a:prstGeom prst="rect">
-            <a:avLst/>
-          </a:prstGeom>
-        </p:spPr>
-      </p:pic>
-    </p:spTree>
-  </p:cSld>
-  <p:clrMapOvr>
-    <a:masterClrMapping/>
-  </p:clrMapOvr>
-  <p:extLst>
-    <p:ext uri="{6950BFC3-D8DA-4A85-94F7-54DA5524770B}">
-      <p188:commentRel xmlns:p188="http://schemas.microsoft.com/office/powerpoint/2018/8/main" r:id="rId3"/>
-    </p:ext>
-  </p:extLst>
-</p:sld>
-</file>
-
-<file path=ppt/slides/slide7.xml><?xml version="1.0" encoding="utf-8"?>
-<p:sld xmlns:a="http://schemas.openxmlformats.org/drawingml/2006/main" xmlns:r="http://schemas.openxmlformats.org/officeDocument/2006/relationships" xmlns:p="http://schemas.openxmlformats.org/presentationml/2006/main">
-  <p:cSld>
-    <p:spTree>
-      <p:nvGrpSpPr>
-        <p:cNvPr id="1" name=""/>
-        <p:cNvGrpSpPr/>
-        <p:nvPr/>
-      </p:nvGrpSpPr>
-      <p:grpSpPr>
-        <a:xfrm>
-          <a:off x="0" y="0"/>
-          <a:ext cx="0" cy="0"/>
-          <a:chOff x="0" y="0"/>
-          <a:chExt cx="0" cy="0"/>
-        </a:xfrm>
-      </p:grpSpPr>
-      <p:sp>
-        <p:nvSpPr>
-          <p:cNvPr id="2" name="Title 1">
-            <a:extLst>
-              <a:ext uri="{FF2B5EF4-FFF2-40B4-BE49-F238E27FC236}">
-                <a16:creationId xmlns:a16="http://schemas.microsoft.com/office/drawing/2014/main" id="{9DF1FC1F-B83D-D043-0A53-60E474E50EFB}"/>
+                <a16:creationId xmlns:a16="http://schemas.microsoft.com/office/drawing/2014/main" id="{95792ACF-8B91-65F3-C165-44BD25127222}"/>
               </a:ext>
             </a:extLst>
           </p:cNvPr>
@@ -8458,7 +7807,7 @@
                   <a:schemeClr val="bg1"/>
                 </a:solidFill>
               </a:rPr>
-              <a:t>DOI 3 Data</a:t>
+              <a:t>Rationale</a:t>
             </a:r>
           </a:p>
         </p:txBody>
@@ -8468,7 +7817,7 @@
           <p:cNvPr id="3" name="Text Placeholder 2">
             <a:extLst>
               <a:ext uri="{FF2B5EF4-FFF2-40B4-BE49-F238E27FC236}">
-                <a16:creationId xmlns:a16="http://schemas.microsoft.com/office/drawing/2014/main" id="{5CF707B8-09A9-A28B-36FE-7651ACC03308}"/>
+                <a16:creationId xmlns:a16="http://schemas.microsoft.com/office/drawing/2014/main" id="{4C9AF8C3-95D2-3D5A-AB6D-61F870774A13}"/>
               </a:ext>
             </a:extLst>
           </p:cNvPr>
@@ -8480,7 +7829,7 @@
         <p:spPr>
           <a:xfrm>
             <a:off x="503999" y="1326600"/>
-            <a:ext cx="9071640" cy="3288239"/>
+            <a:ext cx="9071640" cy="4022640"/>
           </a:xfrm>
           <a:prstGeom prst="rect">
             <a:avLst/>
@@ -8714,9 +8063,8 @@
                 <a:solidFill>
                   <a:schemeClr val="bg1"/>
                 </a:solidFill>
-                <a:latin typeface="AppleSystemUIFont" pitchFamily="2"/>
-              </a:rPr>
-              <a:t>DOI 3 results in 3,516 test cases</a:t>
+              </a:rPr>
+              <a:t>To attempt to determine which model constants affect which model outputs, 11 cases were created for every model constant where every model constant stayed consistent at a single default value except the one which was being tested, which was linearly interpolated to get 11 values evenly spread across its valid range. </a:t>
             </a:r>
           </a:p>
           <a:p>
@@ -8726,9 +8074,8 @@
                 <a:solidFill>
                   <a:schemeClr val="bg1"/>
                 </a:solidFill>
-                <a:latin typeface="AppleSystemUIFont" pitchFamily="2"/>
-              </a:rPr>
-              <a:t>How many combinatorial test cases generated, executed, passed, skipped, failed, crashed</a:t>
+              </a:rPr>
+              <a:t>This assumed that each model constant’s values are independent of each other and that no preconditions have to be met for a constant to have an effect on model output. </a:t>
             </a:r>
           </a:p>
         </p:txBody>
@@ -8736,27 +8083,28 @@
     </p:spTree>
     <p:extLst>
       <p:ext uri="{BB962C8B-B14F-4D97-AF65-F5344CB8AC3E}">
-        <p14:creationId xmlns:p14="http://schemas.microsoft.com/office/powerpoint/2010/main" val="2353400714"/>
+        <p14:creationId xmlns:p14="http://schemas.microsoft.com/office/powerpoint/2010/main" val="1891868766"/>
       </p:ext>
     </p:extLst>
   </p:cSld>
   <p:clrMapOvr>
     <a:masterClrMapping/>
   </p:clrMapOvr>
-  <p:extLst>
-    <p:ext uri="{6950BFC3-D8DA-4A85-94F7-54DA5524770B}">
-      <p188:commentRel xmlns:p188="http://schemas.microsoft.com/office/powerpoint/2018/8/main" r:id="rId2"/>
-    </p:ext>
-  </p:extLst>
 </p:sld>
 </file>
 
-<file path=ppt/slides/slide8.xml><?xml version="1.0" encoding="utf-8"?>
+<file path=ppt/slides/slide19.xml><?xml version="1.0" encoding="utf-8"?>
 <p:sld xmlns:a="http://schemas.openxmlformats.org/drawingml/2006/main" xmlns:r="http://schemas.openxmlformats.org/officeDocument/2006/relationships" xmlns:p="http://schemas.openxmlformats.org/presentationml/2006/main">
   <p:cSld>
     <p:spTree>
       <p:nvGrpSpPr>
-        <p:cNvPr id="1" name=""/>
+        <p:cNvPr id="1" name="">
+          <a:extLst>
+            <a:ext uri="{FF2B5EF4-FFF2-40B4-BE49-F238E27FC236}">
+              <a16:creationId xmlns:a16="http://schemas.microsoft.com/office/drawing/2014/main" id="{53889456-9645-62B5-CEF7-93100EE58DA5}"/>
+            </a:ext>
+          </a:extLst>
+        </p:cNvPr>
         <p:cNvGrpSpPr/>
         <p:nvPr/>
       </p:nvGrpSpPr>
@@ -8773,7 +8121,7 @@
           <p:cNvPr id="2" name="Title 1">
             <a:extLst>
               <a:ext uri="{FF2B5EF4-FFF2-40B4-BE49-F238E27FC236}">
-                <a16:creationId xmlns:a16="http://schemas.microsoft.com/office/drawing/2014/main" id="{3B229438-C75A-6BD0-0DC0-AB63F95B648C}"/>
+                <a16:creationId xmlns:a16="http://schemas.microsoft.com/office/drawing/2014/main" id="{FF948969-FBF8-F841-EF3D-2F47142074C9}"/>
               </a:ext>
             </a:extLst>
           </p:cNvPr>
@@ -8825,7 +8173,7 @@
                   <a:schemeClr val="bg1"/>
                 </a:solidFill>
               </a:rPr>
-              <a:t>DOI 4 Data</a:t>
+              <a:t>Usefulness</a:t>
             </a:r>
           </a:p>
         </p:txBody>
@@ -8835,7 +8183,7 @@
           <p:cNvPr id="3" name="Text Placeholder 2">
             <a:extLst>
               <a:ext uri="{FF2B5EF4-FFF2-40B4-BE49-F238E27FC236}">
-                <a16:creationId xmlns:a16="http://schemas.microsoft.com/office/drawing/2014/main" id="{56064C14-1601-F022-7F3D-615176F6A82B}"/>
+                <a16:creationId xmlns:a16="http://schemas.microsoft.com/office/drawing/2014/main" id="{D926F0B4-1B9D-DB2A-0E29-633B1967A33D}"/>
               </a:ext>
             </a:extLst>
           </p:cNvPr>
@@ -8847,7 +8195,405 @@
         <p:spPr>
           <a:xfrm>
             <a:off x="503999" y="1326600"/>
-            <a:ext cx="9071640" cy="3288239"/>
+            <a:ext cx="9071640" cy="4022640"/>
+          </a:xfrm>
+          <a:prstGeom prst="rect">
+            <a:avLst/>
+          </a:prstGeom>
+          <a:noFill/>
+          <a:ln>
+            <a:noFill/>
+          </a:ln>
+        </p:spPr>
+        <p:txBody>
+          <a:bodyPr vert="horz" lIns="0" tIns="0" rIns="0" bIns="0">
+            <a:normAutofit lnSpcReduction="10000"/>
+          </a:bodyPr>
+          <a:lstStyle>
+            <a:lvl1pPr lvl="0" rtl="0" hangingPunct="0">
+              <a:spcBef>
+                <a:spcPts val="1417"/>
+              </a:spcBef>
+              <a:spcAft>
+                <a:spcPts val="0"/>
+              </a:spcAft>
+              <a:buSzPct val="45000"/>
+              <a:buFont typeface="OpenSymbol"/>
+              <a:buChar char="●"/>
+              <a:tabLst/>
+              <a:defRPr lang="en-US" sz="2400" b="0" i="0" u="none" strike="noStrike" kern="1200" cap="none">
+                <a:ln>
+                  <a:noFill/>
+                </a:ln>
+                <a:highlight>
+                  <a:scrgbClr r="0" g="0" b="0">
+                    <a:alpha val="0"/>
+                  </a:scrgbClr>
+                </a:highlight>
+                <a:latin typeface="URW Bookman" pitchFamily="2"/>
+                <a:ea typeface="Nimbus Sans" pitchFamily="2"/>
+                <a:cs typeface="FreeSans" pitchFamily="2"/>
+              </a:defRPr>
+            </a:lvl1pPr>
+            <a:lvl2pPr lvl="1" rtl="0" hangingPunct="0">
+              <a:spcBef>
+                <a:spcPts val="1417"/>
+              </a:spcBef>
+              <a:spcAft>
+                <a:spcPts val="0"/>
+              </a:spcAft>
+              <a:buSzPct val="75000"/>
+              <a:buFont typeface="OpenSymbol"/>
+              <a:buChar char="–"/>
+              <a:tabLst/>
+              <a:defRPr lang="en-US" sz="2400" b="0" i="0" u="none" strike="noStrike" kern="1200" cap="none">
+                <a:ln>
+                  <a:noFill/>
+                </a:ln>
+                <a:highlight>
+                  <a:scrgbClr r="0" g="0" b="0">
+                    <a:alpha val="0"/>
+                  </a:scrgbClr>
+                </a:highlight>
+                <a:latin typeface="URW Bookman" pitchFamily="2"/>
+                <a:ea typeface="Nimbus Sans" pitchFamily="2"/>
+                <a:cs typeface="FreeSans" pitchFamily="2"/>
+              </a:defRPr>
+            </a:lvl2pPr>
+            <a:lvl3pPr lvl="2" rtl="0" hangingPunct="0">
+              <a:spcBef>
+                <a:spcPts val="1417"/>
+              </a:spcBef>
+              <a:spcAft>
+                <a:spcPts val="0"/>
+              </a:spcAft>
+              <a:buSzPct val="45000"/>
+              <a:buFont typeface="OpenSymbol"/>
+              <a:buChar char="●"/>
+              <a:tabLst/>
+              <a:defRPr lang="en-US" sz="2400" b="0" i="0" u="none" strike="noStrike" kern="1200" cap="none">
+                <a:ln>
+                  <a:noFill/>
+                </a:ln>
+                <a:highlight>
+                  <a:scrgbClr r="0" g="0" b="0">
+                    <a:alpha val="0"/>
+                  </a:scrgbClr>
+                </a:highlight>
+                <a:latin typeface="URW Bookman" pitchFamily="2"/>
+                <a:ea typeface="Nimbus Sans" pitchFamily="2"/>
+                <a:cs typeface="FreeSans" pitchFamily="2"/>
+              </a:defRPr>
+            </a:lvl3pPr>
+            <a:lvl4pPr lvl="3" rtl="0" hangingPunct="0">
+              <a:spcBef>
+                <a:spcPts val="1417"/>
+              </a:spcBef>
+              <a:spcAft>
+                <a:spcPts val="0"/>
+              </a:spcAft>
+              <a:buSzPct val="75000"/>
+              <a:buFont typeface="OpenSymbol"/>
+              <a:buChar char="–"/>
+              <a:tabLst/>
+              <a:defRPr lang="en-US" sz="2400" b="0" i="0" u="none" strike="noStrike" kern="1200" cap="none">
+                <a:ln>
+                  <a:noFill/>
+                </a:ln>
+                <a:highlight>
+                  <a:scrgbClr r="0" g="0" b="0">
+                    <a:alpha val="0"/>
+                  </a:scrgbClr>
+                </a:highlight>
+                <a:latin typeface="URW Bookman" pitchFamily="2"/>
+                <a:ea typeface="Nimbus Sans" pitchFamily="2"/>
+                <a:cs typeface="FreeSans" pitchFamily="2"/>
+              </a:defRPr>
+            </a:lvl4pPr>
+            <a:lvl5pPr lvl="4" rtl="0" hangingPunct="0">
+              <a:spcBef>
+                <a:spcPts val="1417"/>
+              </a:spcBef>
+              <a:spcAft>
+                <a:spcPts val="0"/>
+              </a:spcAft>
+              <a:buSzPct val="45000"/>
+              <a:buFont typeface="OpenSymbol"/>
+              <a:buChar char="●"/>
+              <a:tabLst/>
+              <a:defRPr lang="en-US" sz="2400" b="0" i="0" u="none" strike="noStrike" kern="1200" cap="none">
+                <a:ln>
+                  <a:noFill/>
+                </a:ln>
+                <a:highlight>
+                  <a:scrgbClr r="0" g="0" b="0">
+                    <a:alpha val="0"/>
+                  </a:scrgbClr>
+                </a:highlight>
+                <a:latin typeface="URW Bookman" pitchFamily="2"/>
+                <a:ea typeface="Nimbus Sans" pitchFamily="2"/>
+                <a:cs typeface="FreeSans" pitchFamily="2"/>
+              </a:defRPr>
+            </a:lvl5pPr>
+            <a:lvl6pPr lvl="5" rtl="0" hangingPunct="0">
+              <a:spcBef>
+                <a:spcPts val="1417"/>
+              </a:spcBef>
+              <a:spcAft>
+                <a:spcPts val="0"/>
+              </a:spcAft>
+              <a:buSzPct val="45000"/>
+              <a:buFont typeface="OpenSymbol"/>
+              <a:buChar char="●"/>
+              <a:tabLst/>
+              <a:defRPr lang="en-US" sz="2400" b="0" i="0" u="none" strike="noStrike" kern="1200" cap="none">
+                <a:ln>
+                  <a:noFill/>
+                </a:ln>
+                <a:highlight>
+                  <a:scrgbClr r="0" g="0" b="0">
+                    <a:alpha val="0"/>
+                  </a:scrgbClr>
+                </a:highlight>
+                <a:latin typeface="URW Bookman" pitchFamily="2"/>
+                <a:ea typeface="Nimbus Sans" pitchFamily="2"/>
+                <a:cs typeface="FreeSans" pitchFamily="2"/>
+              </a:defRPr>
+            </a:lvl6pPr>
+            <a:lvl7pPr lvl="6" rtl="0" hangingPunct="0">
+              <a:spcBef>
+                <a:spcPts val="1417"/>
+              </a:spcBef>
+              <a:spcAft>
+                <a:spcPts val="0"/>
+              </a:spcAft>
+              <a:buSzPct val="45000"/>
+              <a:buFont typeface="OpenSymbol"/>
+              <a:buChar char="●"/>
+              <a:tabLst/>
+              <a:defRPr lang="en-US" sz="2400" b="0" i="0" u="none" strike="noStrike" kern="1200" cap="none">
+                <a:ln>
+                  <a:noFill/>
+                </a:ln>
+                <a:highlight>
+                  <a:scrgbClr r="0" g="0" b="0">
+                    <a:alpha val="0"/>
+                  </a:scrgbClr>
+                </a:highlight>
+                <a:latin typeface="URW Bookman" pitchFamily="2"/>
+                <a:ea typeface="Nimbus Sans" pitchFamily="2"/>
+                <a:cs typeface="FreeSans" pitchFamily="2"/>
+              </a:defRPr>
+            </a:lvl7pPr>
+            <a:lvl8pPr marL="3429000" indent="-228600" algn="l" defTabSz="914400" rtl="0" eaLnBrk="1" latinLnBrk="0" hangingPunct="1">
+              <a:lnSpc>
+                <a:spcPct val="90000"/>
+              </a:lnSpc>
+              <a:spcBef>
+                <a:spcPts val="500"/>
+              </a:spcBef>
+              <a:buFont typeface="Arial" panose="020B0604020202020204" pitchFamily="34" charset="0"/>
+              <a:buChar char="•"/>
+              <a:defRPr sz="1800" kern="1200">
+                <a:solidFill>
+                  <a:schemeClr val="tx1"/>
+                </a:solidFill>
+                <a:latin typeface="+mn-lt"/>
+                <a:ea typeface="+mn-ea"/>
+                <a:cs typeface="+mn-cs"/>
+              </a:defRPr>
+            </a:lvl8pPr>
+            <a:lvl9pPr marL="3886200" indent="-228600" algn="l" defTabSz="914400" rtl="0" eaLnBrk="1" latinLnBrk="0" hangingPunct="1">
+              <a:lnSpc>
+                <a:spcPct val="90000"/>
+              </a:lnSpc>
+              <a:spcBef>
+                <a:spcPts val="500"/>
+              </a:spcBef>
+              <a:buFont typeface="Arial" panose="020B0604020202020204" pitchFamily="34" charset="0"/>
+              <a:buChar char="•"/>
+              <a:defRPr sz="1800" kern="1200">
+                <a:solidFill>
+                  <a:schemeClr val="tx1"/>
+                </a:solidFill>
+                <a:latin typeface="+mn-lt"/>
+                <a:ea typeface="+mn-ea"/>
+                <a:cs typeface="+mn-cs"/>
+              </a:defRPr>
+            </a:lvl9pPr>
+          </a:lstStyle>
+          <a:p>
+            <a:pPr marL="342900" indent="-342900"/>
+            <a:r>
+              <a:rPr lang="en-US" dirty="0">
+                <a:solidFill>
+                  <a:schemeClr val="bg1"/>
+                </a:solidFill>
+              </a:rPr>
+              <a:t>By discussing with the domain scientists and examining </a:t>
+            </a:r>
+            <a:r>
+              <a:rPr lang="en-US" dirty="0" err="1">
+                <a:solidFill>
+                  <a:schemeClr val="bg1"/>
+                </a:solidFill>
+              </a:rPr>
+              <a:t>LakeTemperature</a:t>
+            </a:r>
+            <a:r>
+              <a:rPr lang="en-US" dirty="0">
+                <a:solidFill>
+                  <a:schemeClr val="bg1"/>
+                </a:solidFill>
+              </a:rPr>
+              <a:t> source code, these assumptions turned out to be wrong, meaning the results don’t include all of model outputs that the model constants effect. </a:t>
+            </a:r>
+          </a:p>
+          <a:p>
+            <a:pPr marL="342900" indent="-342900"/>
+            <a:r>
+              <a:rPr lang="en-US" dirty="0">
+                <a:solidFill>
+                  <a:schemeClr val="bg1"/>
+                </a:solidFill>
+              </a:rPr>
+              <a:t>However, this doesn’t discount the results of Change Detection Analysis. </a:t>
+            </a:r>
+          </a:p>
+          <a:p>
+            <a:pPr marL="342900" indent="-342900"/>
+            <a:r>
+              <a:rPr lang="en-US" dirty="0">
+                <a:solidFill>
+                  <a:schemeClr val="bg1"/>
+                </a:solidFill>
+              </a:rPr>
+              <a:t>It led to the discovery that certain constants only have an effect on the output under certain conditions.</a:t>
+            </a:r>
+          </a:p>
+          <a:p>
+            <a:pPr marL="342900" indent="-342900"/>
+            <a:r>
+              <a:rPr lang="en-US" dirty="0">
+                <a:solidFill>
+                  <a:schemeClr val="bg1"/>
+                </a:solidFill>
+              </a:rPr>
+              <a:t>Its results are also still valid and useful when specifically referring to the default values used in the test cases. </a:t>
+            </a:r>
+          </a:p>
+        </p:txBody>
+      </p:sp>
+    </p:spTree>
+    <p:extLst>
+      <p:ext uri="{BB962C8B-B14F-4D97-AF65-F5344CB8AC3E}">
+        <p14:creationId xmlns:p14="http://schemas.microsoft.com/office/powerpoint/2010/main" val="1387652670"/>
+      </p:ext>
+    </p:extLst>
+  </p:cSld>
+  <p:clrMapOvr>
+    <a:masterClrMapping/>
+  </p:clrMapOvr>
+</p:sld>
+</file>
+
+<file path=ppt/slides/slide2.xml><?xml version="1.0" encoding="utf-8"?>
+<p:sld xmlns:a="http://schemas.openxmlformats.org/drawingml/2006/main" xmlns:r="http://schemas.openxmlformats.org/officeDocument/2006/relationships" xmlns:p="http://schemas.openxmlformats.org/presentationml/2006/main">
+  <p:cSld>
+    <p:spTree>
+      <p:nvGrpSpPr>
+        <p:cNvPr id="1" name=""/>
+        <p:cNvGrpSpPr/>
+        <p:nvPr/>
+      </p:nvGrpSpPr>
+      <p:grpSpPr>
+        <a:xfrm>
+          <a:off x="0" y="0"/>
+          <a:ext cx="0" cy="0"/>
+          <a:chOff x="0" y="0"/>
+          <a:chExt cx="0" cy="0"/>
+        </a:xfrm>
+      </p:grpSpPr>
+      <p:sp>
+        <p:nvSpPr>
+          <p:cNvPr id="2" name="Title 1">
+            <a:extLst>
+              <a:ext uri="{FF2B5EF4-FFF2-40B4-BE49-F238E27FC236}">
+                <a16:creationId xmlns:a16="http://schemas.microsoft.com/office/drawing/2014/main" id="{B8086899-15DA-5703-76E2-51D23E842D09}"/>
+              </a:ext>
+            </a:extLst>
+          </p:cNvPr>
+          <p:cNvSpPr txBox="1">
+            <a:spLocks/>
+          </p:cNvSpPr>
+          <p:nvPr/>
+        </p:nvSpPr>
+        <p:spPr>
+          <a:xfrm>
+            <a:off x="503999" y="422301"/>
+            <a:ext cx="9071640" cy="553998"/>
+          </a:xfrm>
+          <a:prstGeom prst="rect">
+            <a:avLst/>
+          </a:prstGeom>
+          <a:noFill/>
+          <a:ln>
+            <a:noFill/>
+          </a:ln>
+        </p:spPr>
+        <p:txBody>
+          <a:bodyPr vert="horz" lIns="0" tIns="0" rIns="0" bIns="0" anchor="ctr">
+            <a:spAutoFit/>
+          </a:bodyPr>
+          <a:lstStyle>
+            <a:lvl1pPr lvl="0" algn="ctr" rtl="0" hangingPunct="0">
+              <a:buNone/>
+              <a:tabLst/>
+              <a:defRPr lang="en-US" sz="3600" b="0" i="0" u="none" strike="noStrike" kern="1200" cap="none">
+                <a:ln>
+                  <a:noFill/>
+                </a:ln>
+                <a:highlight>
+                  <a:scrgbClr r="0" g="0" b="0">
+                    <a:alpha val="0"/>
+                  </a:scrgbClr>
+                </a:highlight>
+                <a:latin typeface="URW Bookman" pitchFamily="2"/>
+                <a:ea typeface="Nimbus Sans" pitchFamily="2"/>
+                <a:cs typeface="FreeSans" pitchFamily="2"/>
+              </a:defRPr>
+            </a:lvl1pPr>
+          </a:lstStyle>
+          <a:p>
+            <a:r>
+              <a:rPr lang="en-US" dirty="0">
+                <a:solidFill>
+                  <a:schemeClr val="bg1"/>
+                </a:solidFill>
+              </a:rPr>
+              <a:t>Problem of Analysis</a:t>
+            </a:r>
+          </a:p>
+        </p:txBody>
+      </p:sp>
+      <p:sp>
+        <p:nvSpPr>
+          <p:cNvPr id="3" name="Text Placeholder 2">
+            <a:extLst>
+              <a:ext uri="{FF2B5EF4-FFF2-40B4-BE49-F238E27FC236}">
+                <a16:creationId xmlns:a16="http://schemas.microsoft.com/office/drawing/2014/main" id="{0CD48D6A-4BDE-1B52-9184-3845B1664AB8}"/>
+              </a:ext>
+            </a:extLst>
+          </p:cNvPr>
+          <p:cNvSpPr txBox="1">
+            <a:spLocks/>
+          </p:cNvSpPr>
+          <p:nvPr/>
+        </p:nvSpPr>
+        <p:spPr>
+          <a:xfrm>
+            <a:off x="503999" y="1326600"/>
+            <a:ext cx="9071640" cy="4022640"/>
           </a:xfrm>
           <a:prstGeom prst="rect">
             <a:avLst/>
@@ -9081,9 +8827,8 @@
                 <a:solidFill>
                   <a:schemeClr val="bg1"/>
                 </a:solidFill>
-                <a:latin typeface="AppleSystemUIFont" pitchFamily="2"/>
-              </a:rPr>
-              <a:t>DOI 4 results in 50,031 test cases</a:t>
+              </a:rPr>
+              <a:t>The ideal way to test which combinations of model constant values result in erroneous output would be to test every single combination of model constant values.</a:t>
             </a:r>
           </a:p>
           <a:p>
@@ -9093,9 +8838,19 @@
                 <a:solidFill>
                   <a:schemeClr val="bg1"/>
                 </a:solidFill>
-                <a:latin typeface="AppleSystemUIFont" pitchFamily="2"/>
-              </a:rPr>
-              <a:t>How many combinatorial test cases generated, executed, passed, skipped, failed, crashed</a:t>
+              </a:rPr>
+              <a:t>However, having many model constants that can each take many values will result in too many cases to test. </a:t>
+            </a:r>
+          </a:p>
+          <a:p>
+            <a:pPr marL="342900" indent="-342900"/>
+            <a:r>
+              <a:rPr lang="en-US" dirty="0">
+                <a:solidFill>
+                  <a:schemeClr val="bg1"/>
+                </a:solidFill>
+              </a:rPr>
+              <a:t>Combinatorial testing reduces the number of tests while ensuring pseudo-comprehensive testing.</a:t>
             </a:r>
           </a:p>
         </p:txBody>
@@ -9103,27 +8858,28 @@
     </p:spTree>
     <p:extLst>
       <p:ext uri="{BB962C8B-B14F-4D97-AF65-F5344CB8AC3E}">
-        <p14:creationId xmlns:p14="http://schemas.microsoft.com/office/powerpoint/2010/main" val="3165592934"/>
+        <p14:creationId xmlns:p14="http://schemas.microsoft.com/office/powerpoint/2010/main" val="3043626"/>
       </p:ext>
     </p:extLst>
   </p:cSld>
   <p:clrMapOvr>
     <a:masterClrMapping/>
   </p:clrMapOvr>
-  <p:extLst>
-    <p:ext uri="{6950BFC3-D8DA-4A85-94F7-54DA5524770B}">
-      <p188:commentRel xmlns:p188="http://schemas.microsoft.com/office/powerpoint/2018/8/main" r:id="rId2"/>
-    </p:ext>
-  </p:extLst>
 </p:sld>
 </file>
 
-<file path=ppt/slides/slide9.xml><?xml version="1.0" encoding="utf-8"?>
+<file path=ppt/slides/slide20.xml><?xml version="1.0" encoding="utf-8"?>
 <p:sld xmlns:a="http://schemas.openxmlformats.org/drawingml/2006/main" xmlns:r="http://schemas.openxmlformats.org/officeDocument/2006/relationships" xmlns:p="http://schemas.openxmlformats.org/presentationml/2006/main">
   <p:cSld>
     <p:spTree>
       <p:nvGrpSpPr>
-        <p:cNvPr id="1" name=""/>
+        <p:cNvPr id="1" name="">
+          <a:extLst>
+            <a:ext uri="{FF2B5EF4-FFF2-40B4-BE49-F238E27FC236}">
+              <a16:creationId xmlns:a16="http://schemas.microsoft.com/office/drawing/2014/main" id="{28210578-CC0F-D325-9650-3E80E2459D87}"/>
+            </a:ext>
+          </a:extLst>
+        </p:cNvPr>
         <p:cNvGrpSpPr/>
         <p:nvPr/>
       </p:nvGrpSpPr>
@@ -9140,7 +8896,7 @@
           <p:cNvPr id="2" name="Title 1">
             <a:extLst>
               <a:ext uri="{FF2B5EF4-FFF2-40B4-BE49-F238E27FC236}">
-                <a16:creationId xmlns:a16="http://schemas.microsoft.com/office/drawing/2014/main" id="{3BF6498E-98A7-DD6B-79FB-40EF89C7FFC8}"/>
+                <a16:creationId xmlns:a16="http://schemas.microsoft.com/office/drawing/2014/main" id="{EACC0D67-4B12-A98C-A6C5-08921402F63A}"/>
               </a:ext>
             </a:extLst>
           </p:cNvPr>
@@ -9192,7 +8948,7 @@
                   <a:schemeClr val="bg1"/>
                 </a:solidFill>
               </a:rPr>
-              <a:t>DOI 5 Data</a:t>
+              <a:t>Problems/Solutions</a:t>
             </a:r>
           </a:p>
         </p:txBody>
@@ -9202,7 +8958,7 @@
           <p:cNvPr id="3" name="Text Placeholder 2">
             <a:extLst>
               <a:ext uri="{FF2B5EF4-FFF2-40B4-BE49-F238E27FC236}">
-                <a16:creationId xmlns:a16="http://schemas.microsoft.com/office/drawing/2014/main" id="{31720598-1CB0-E7F3-3417-23A2488D52ED}"/>
+                <a16:creationId xmlns:a16="http://schemas.microsoft.com/office/drawing/2014/main" id="{01C9A9F4-F886-2FC8-7FF5-AFA930FA673E}"/>
               </a:ext>
             </a:extLst>
           </p:cNvPr>
@@ -9214,7 +8970,7 @@
         <p:spPr>
           <a:xfrm>
             <a:off x="503999" y="1326600"/>
-            <a:ext cx="9071640" cy="3288239"/>
+            <a:ext cx="9071640" cy="4022640"/>
           </a:xfrm>
           <a:prstGeom prst="rect">
             <a:avLst/>
@@ -9448,15 +9204,2005 @@
                 <a:solidFill>
                   <a:schemeClr val="bg1"/>
                 </a:solidFill>
+              </a:rPr>
+              <a:t>So far, the combinatorial test cases were only using the constants assumed to have an impact on model output. Now, they include all of the constants so that the results of the combinatorial test cases do not depend on previous results being correct or not. </a:t>
+            </a:r>
+          </a:p>
+          <a:p>
+            <a:pPr marL="342900" indent="-342900"/>
+            <a:r>
+              <a:rPr lang="en-US" dirty="0">
+                <a:solidFill>
+                  <a:schemeClr val="bg1"/>
+                </a:solidFill>
+              </a:rPr>
+              <a:t>The Change Detection analysis might be redone in the future by examining preconditions through </a:t>
+            </a:r>
+            <a:r>
+              <a:rPr lang="en-US" dirty="0" err="1">
+                <a:solidFill>
+                  <a:schemeClr val="bg1"/>
+                </a:solidFill>
+              </a:rPr>
+              <a:t>LakeTemperature</a:t>
+            </a:r>
+            <a:r>
+              <a:rPr lang="en-US" dirty="0">
+                <a:solidFill>
+                  <a:schemeClr val="bg1"/>
+                </a:solidFill>
+              </a:rPr>
+              <a:t> source code but future testing, such as combinatorial testing and change-impact analysis, will not depend on these results. </a:t>
+            </a:r>
+          </a:p>
+        </p:txBody>
+      </p:sp>
+    </p:spTree>
+    <p:extLst>
+      <p:ext uri="{BB962C8B-B14F-4D97-AF65-F5344CB8AC3E}">
+        <p14:creationId xmlns:p14="http://schemas.microsoft.com/office/powerpoint/2010/main" val="428248981"/>
+      </p:ext>
+    </p:extLst>
+  </p:cSld>
+  <p:clrMapOvr>
+    <a:masterClrMapping/>
+  </p:clrMapOvr>
+</p:sld>
+</file>
+
+<file path=ppt/slides/slide3.xml><?xml version="1.0" encoding="utf-8"?>
+<p:sld xmlns:a="http://schemas.openxmlformats.org/drawingml/2006/main" xmlns:r="http://schemas.openxmlformats.org/officeDocument/2006/relationships" xmlns:p="http://schemas.openxmlformats.org/presentationml/2006/main">
+  <p:cSld name="page2">
+    <p:spTree>
+      <p:nvGrpSpPr>
+        <p:cNvPr id="1" name=""/>
+        <p:cNvGrpSpPr/>
+        <p:nvPr/>
+      </p:nvGrpSpPr>
+      <p:grpSpPr>
+        <a:xfrm>
+          <a:off x="0" y="0"/>
+          <a:ext cx="0" cy="0"/>
+          <a:chOff x="0" y="0"/>
+          <a:chExt cx="0" cy="0"/>
+        </a:xfrm>
+      </p:grpSpPr>
+      <p:sp>
+        <p:nvSpPr>
+          <p:cNvPr id="2" name="Title 1">
+            <a:extLst>
+              <a:ext uri="{FF2B5EF4-FFF2-40B4-BE49-F238E27FC236}">
+                <a16:creationId xmlns:a16="http://schemas.microsoft.com/office/drawing/2014/main" id="{3329BCE0-57D7-B440-3433-0B98B154F9AD}"/>
+              </a:ext>
+            </a:extLst>
+          </p:cNvPr>
+          <p:cNvSpPr txBox="1">
+            <a:spLocks noGrp="1"/>
+          </p:cNvSpPr>
+          <p:nvPr>
+            <p:ph type="title" idx="4294967295"/>
+          </p:nvPr>
+        </p:nvSpPr>
+        <p:spPr>
+          <a:xfrm>
+            <a:off x="503999" y="422301"/>
+            <a:ext cx="9071640" cy="553998"/>
+          </a:xfrm>
+        </p:spPr>
+        <p:txBody>
+          <a:bodyPr>
+            <a:spAutoFit/>
+          </a:bodyPr>
+          <a:lstStyle/>
+          <a:p>
+            <a:pPr lvl="0"/>
+            <a:r>
+              <a:rPr lang="en-US" dirty="0">
+                <a:solidFill>
+                  <a:schemeClr val="bg1"/>
+                </a:solidFill>
+              </a:rPr>
+              <a:t>Combinatorial Analysis Background</a:t>
+            </a:r>
+          </a:p>
+        </p:txBody>
+      </p:sp>
+      <p:sp>
+        <p:nvSpPr>
+          <p:cNvPr id="3" name="Text Placeholder 2">
+            <a:extLst>
+              <a:ext uri="{FF2B5EF4-FFF2-40B4-BE49-F238E27FC236}">
+                <a16:creationId xmlns:a16="http://schemas.microsoft.com/office/drawing/2014/main" id="{C12EA507-D828-F915-2FD8-9BBE5948C904}"/>
+              </a:ext>
+            </a:extLst>
+          </p:cNvPr>
+          <p:cNvSpPr txBox="1">
+            <a:spLocks noGrp="1"/>
+          </p:cNvSpPr>
+          <p:nvPr>
+            <p:ph type="body" idx="4294967295"/>
+          </p:nvPr>
+        </p:nvSpPr>
+        <p:spPr/>
+        <p:txBody>
+          <a:bodyPr>
+            <a:normAutofit/>
+          </a:bodyPr>
+          <a:lstStyle/>
+          <a:p>
+            <a:pPr marL="342900" indent="-342900"/>
+            <a:r>
+              <a:rPr lang="en-US" i="1" dirty="0">
+                <a:solidFill>
+                  <a:schemeClr val="bg1"/>
+                </a:solidFill>
+              </a:rPr>
+              <a:t>NIST</a:t>
+            </a:r>
+            <a:r>
+              <a:rPr lang="en-US" dirty="0">
+                <a:solidFill>
+                  <a:schemeClr val="bg1"/>
+                </a:solidFill>
+              </a:rPr>
+              <a:t> research found most software bugs are caused by combinations of a few parameters</a:t>
+            </a:r>
+            <a:r>
+              <a:rPr lang="en-US" i="1" baseline="30000" dirty="0">
+                <a:solidFill>
+                  <a:schemeClr val="bg1"/>
+                </a:solidFill>
+              </a:rPr>
+              <a:t>1</a:t>
+            </a:r>
+            <a:r>
+              <a:rPr lang="en-US" dirty="0">
+                <a:solidFill>
+                  <a:schemeClr val="bg1"/>
+                </a:solidFill>
+              </a:rPr>
+              <a:t>. </a:t>
+            </a:r>
+          </a:p>
+          <a:p>
+            <a:pPr marL="342900" indent="-342900"/>
+            <a:r>
+              <a:rPr lang="en-US" dirty="0">
+                <a:solidFill>
+                  <a:schemeClr val="bg1"/>
+                </a:solidFill>
+              </a:rPr>
+              <a:t>By testing all combinations of a certain number of parameters, most software bugs can be found with much fewer test cases. </a:t>
+            </a:r>
+          </a:p>
+          <a:p>
+            <a:pPr marL="342900" indent="-342900"/>
+            <a:r>
+              <a:rPr lang="en-US" i="1" dirty="0">
+                <a:solidFill>
+                  <a:schemeClr val="bg1"/>
+                </a:solidFill>
+              </a:rPr>
+              <a:t>ACTS</a:t>
+            </a:r>
+            <a:r>
+              <a:rPr lang="en-US" dirty="0">
+                <a:solidFill>
+                  <a:schemeClr val="bg1"/>
+                </a:solidFill>
+              </a:rPr>
+              <a:t> can generate covering arrays from 1-way to 6-way</a:t>
+            </a:r>
+            <a:r>
+              <a:rPr lang="en-US" baseline="30000" dirty="0">
+                <a:solidFill>
+                  <a:schemeClr val="bg1"/>
+                </a:solidFill>
+              </a:rPr>
+              <a:t> </a:t>
+            </a:r>
+            <a:r>
+              <a:rPr lang="en-US" dirty="0">
+                <a:solidFill>
+                  <a:schemeClr val="bg1"/>
+                </a:solidFill>
+              </a:rPr>
+              <a:t>or with mixed coverage</a:t>
+            </a:r>
+            <a:r>
+              <a:rPr lang="en-US" baseline="30000" dirty="0">
+                <a:solidFill>
+                  <a:schemeClr val="bg1"/>
+                </a:solidFill>
+              </a:rPr>
+              <a:t>2</a:t>
+            </a:r>
+            <a:r>
+              <a:rPr lang="en-US" dirty="0">
+                <a:solidFill>
+                  <a:schemeClr val="bg1"/>
+                </a:solidFill>
+              </a:rPr>
+              <a:t>. </a:t>
+            </a:r>
+          </a:p>
+        </p:txBody>
+      </p:sp>
+      <p:sp>
+        <p:nvSpPr>
+          <p:cNvPr id="5" name="TextBox 4">
+            <a:extLst>
+              <a:ext uri="{FF2B5EF4-FFF2-40B4-BE49-F238E27FC236}">
+                <a16:creationId xmlns:a16="http://schemas.microsoft.com/office/drawing/2014/main" id="{9747BCA8-A847-7114-04B9-16833F38B983}"/>
+              </a:ext>
+            </a:extLst>
+          </p:cNvPr>
+          <p:cNvSpPr txBox="1"/>
+          <p:nvPr/>
+        </p:nvSpPr>
+        <p:spPr>
+          <a:xfrm>
+            <a:off x="251506" y="4820323"/>
+            <a:ext cx="9576626" cy="646331"/>
+          </a:xfrm>
+          <a:prstGeom prst="rect">
+            <a:avLst/>
+          </a:prstGeom>
+          <a:noFill/>
+        </p:spPr>
+        <p:txBody>
+          <a:bodyPr wrap="square" rtlCol="0">
+            <a:spAutoFit/>
+          </a:bodyPr>
+          <a:lstStyle/>
+          <a:p>
+            <a:r>
+              <a:rPr lang="en-US" sz="1200" dirty="0">
+                <a:solidFill>
+                  <a:schemeClr val="bg1"/>
+                </a:solidFill>
+              </a:rPr>
+              <a:t>1. </a:t>
+            </a:r>
+            <a:r>
+              <a:rPr lang="en-US" sz="1200" i="1" dirty="0">
+                <a:solidFill>
+                  <a:schemeClr val="bg1"/>
+                </a:solidFill>
+              </a:rPr>
+              <a:t>Automated Combinatorial Testing for Software (ACTS)</a:t>
+            </a:r>
+            <a:r>
+              <a:rPr lang="en-US" sz="1200" dirty="0">
+                <a:solidFill>
+                  <a:schemeClr val="bg1"/>
+                </a:solidFill>
+              </a:rPr>
+              <a:t>. NIST Computer Security Division. (2016, July 20). https://</a:t>
+            </a:r>
+            <a:r>
+              <a:rPr lang="en-US" sz="1200" dirty="0" err="1">
+                <a:solidFill>
+                  <a:schemeClr val="bg1"/>
+                </a:solidFill>
+              </a:rPr>
+              <a:t>csrc.nist.rip</a:t>
+            </a:r>
+            <a:r>
+              <a:rPr lang="en-US" sz="1200" dirty="0">
+                <a:solidFill>
+                  <a:schemeClr val="bg1"/>
+                </a:solidFill>
+              </a:rPr>
+              <a:t>/groups/SNS/acts/ </a:t>
+            </a:r>
+          </a:p>
+          <a:p>
+            <a:r>
+              <a:rPr lang="en-US" sz="1200" dirty="0">
+                <a:solidFill>
+                  <a:schemeClr val="bg1"/>
+                </a:solidFill>
+              </a:rPr>
+              <a:t>2. </a:t>
+            </a:r>
+            <a:r>
+              <a:rPr lang="en-US" sz="1200" i="1" dirty="0">
+                <a:solidFill>
+                  <a:schemeClr val="bg1"/>
+                </a:solidFill>
+              </a:rPr>
+              <a:t>User Guide for ACTS</a:t>
+            </a:r>
+            <a:r>
+              <a:rPr lang="en-US" sz="1200" dirty="0">
+                <a:solidFill>
+                  <a:schemeClr val="bg1"/>
+                </a:solidFill>
+              </a:rPr>
+              <a:t>. NIST. (n.d.). https://</a:t>
+            </a:r>
+            <a:r>
+              <a:rPr lang="en-US" sz="1200" dirty="0" err="1">
+                <a:solidFill>
+                  <a:schemeClr val="bg1"/>
+                </a:solidFill>
+              </a:rPr>
+              <a:t>csrc.nist.gov</a:t>
+            </a:r>
+            <a:r>
+              <a:rPr lang="en-US" sz="1200" dirty="0">
+                <a:solidFill>
+                  <a:schemeClr val="bg1"/>
+                </a:solidFill>
+              </a:rPr>
+              <a:t>/</a:t>
+            </a:r>
+            <a:r>
+              <a:rPr lang="en-US" sz="1200" dirty="0" err="1">
+                <a:solidFill>
+                  <a:schemeClr val="bg1"/>
+                </a:solidFill>
+              </a:rPr>
+              <a:t>csrc</a:t>
+            </a:r>
+            <a:r>
+              <a:rPr lang="en-US" sz="1200" dirty="0">
+                <a:solidFill>
+                  <a:schemeClr val="bg1"/>
+                </a:solidFill>
+              </a:rPr>
+              <a:t>/media/Projects/automated-combinatorial-testing-for-software/documents/acts_user_guide_for_basic1.0_and_advanced3.3_versions_nov23.pdf </a:t>
+            </a:r>
+          </a:p>
+        </p:txBody>
+      </p:sp>
+    </p:spTree>
+  </p:cSld>
+  <p:clrMapOvr>
+    <a:masterClrMapping/>
+  </p:clrMapOvr>
+</p:sld>
+</file>
+
+<file path=ppt/slides/slide4.xml><?xml version="1.0" encoding="utf-8"?>
+<p:sld xmlns:a="http://schemas.openxmlformats.org/drawingml/2006/main" xmlns:r="http://schemas.openxmlformats.org/officeDocument/2006/relationships" xmlns:p="http://schemas.openxmlformats.org/presentationml/2006/main">
+  <p:cSld name="page3">
+    <p:spTree>
+      <p:nvGrpSpPr>
+        <p:cNvPr id="1" name=""/>
+        <p:cNvGrpSpPr/>
+        <p:nvPr/>
+      </p:nvGrpSpPr>
+      <p:grpSpPr>
+        <a:xfrm>
+          <a:off x="0" y="0"/>
+          <a:ext cx="0" cy="0"/>
+          <a:chOff x="0" y="0"/>
+          <a:chExt cx="0" cy="0"/>
+        </a:xfrm>
+      </p:grpSpPr>
+      <p:sp>
+        <p:nvSpPr>
+          <p:cNvPr id="2" name="Title 1">
+            <a:extLst>
+              <a:ext uri="{FF2B5EF4-FFF2-40B4-BE49-F238E27FC236}">
+                <a16:creationId xmlns:a16="http://schemas.microsoft.com/office/drawing/2014/main" id="{1F22CA55-51A0-611A-7B91-13ABAA9983C9}"/>
+              </a:ext>
+            </a:extLst>
+          </p:cNvPr>
+          <p:cNvSpPr txBox="1">
+            <a:spLocks noGrp="1"/>
+          </p:cNvSpPr>
+          <p:nvPr>
+            <p:ph type="title" idx="4294967295"/>
+          </p:nvPr>
+        </p:nvSpPr>
+        <p:spPr>
+          <a:xfrm>
+            <a:off x="503999" y="422301"/>
+            <a:ext cx="9071640" cy="553998"/>
+          </a:xfrm>
+        </p:spPr>
+        <p:txBody>
+          <a:bodyPr>
+            <a:spAutoFit/>
+          </a:bodyPr>
+          <a:lstStyle/>
+          <a:p>
+            <a:pPr lvl="0"/>
+            <a:r>
+              <a:rPr lang="en-US" dirty="0">
+                <a:solidFill>
+                  <a:schemeClr val="bg1"/>
+                </a:solidFill>
+              </a:rPr>
+              <a:t>Our Implementation</a:t>
+            </a:r>
+          </a:p>
+        </p:txBody>
+      </p:sp>
+      <p:sp>
+        <p:nvSpPr>
+          <p:cNvPr id="3" name="Text Placeholder 2">
+            <a:extLst>
+              <a:ext uri="{FF2B5EF4-FFF2-40B4-BE49-F238E27FC236}">
+                <a16:creationId xmlns:a16="http://schemas.microsoft.com/office/drawing/2014/main" id="{4FC0F3B3-D388-0133-98BD-A5D2EC76DF23}"/>
+              </a:ext>
+            </a:extLst>
+          </p:cNvPr>
+          <p:cNvSpPr txBox="1">
+            <a:spLocks noGrp="1"/>
+          </p:cNvSpPr>
+          <p:nvPr>
+            <p:ph type="body" idx="4294967295"/>
+          </p:nvPr>
+        </p:nvSpPr>
+        <p:spPr>
+          <a:xfrm>
+            <a:off x="503999" y="1326600"/>
+            <a:ext cx="9071640" cy="3613679"/>
+          </a:xfrm>
+        </p:spPr>
+        <p:txBody>
+          <a:bodyPr>
+            <a:normAutofit fontScale="92500"/>
+          </a:bodyPr>
+          <a:lstStyle/>
+          <a:p>
+            <a:pPr marL="342900" indent="-342900"/>
+            <a:r>
+              <a:rPr lang="en-US" dirty="0">
+                <a:solidFill>
+                  <a:schemeClr val="bg1"/>
+                </a:solidFill>
+              </a:rPr>
+              <a:t>The model constants, which determine how </a:t>
+            </a:r>
+            <a:r>
+              <a:rPr lang="en-US" dirty="0" err="1">
+                <a:solidFill>
+                  <a:schemeClr val="bg1"/>
+                </a:solidFill>
+                <a:latin typeface="Courier New" panose="02070309020205020404" pitchFamily="49" charset="0"/>
+                <a:cs typeface="Courier New" panose="02070309020205020404" pitchFamily="49" charset="0"/>
+              </a:rPr>
+              <a:t>LakeTemperature</a:t>
+            </a:r>
+            <a:r>
+              <a:rPr lang="en-US" dirty="0">
+                <a:solidFill>
+                  <a:schemeClr val="bg1"/>
+                </a:solidFill>
+              </a:rPr>
+              <a:t> runs, are used as the parameters for the combinatorial test cases. </a:t>
+            </a:r>
+          </a:p>
+          <a:p>
+            <a:pPr marL="342900" indent="-342900"/>
+            <a:r>
+              <a:rPr lang="en-US" dirty="0">
+                <a:solidFill>
+                  <a:schemeClr val="bg1"/>
+                </a:solidFill>
+              </a:rPr>
+              <a:t>Booleans can be either 0 or 1.</a:t>
+            </a:r>
+          </a:p>
+          <a:p>
+            <a:pPr marL="342900" indent="-342900"/>
+            <a:r>
+              <a:rPr lang="en-US" dirty="0">
+                <a:solidFill>
+                  <a:schemeClr val="bg1"/>
+                </a:solidFill>
+              </a:rPr>
+              <a:t>For integers, we linearly interpolate over their range to get up to 11 values. </a:t>
+            </a:r>
+          </a:p>
+          <a:p>
+            <a:pPr marL="342900" indent="-342900"/>
+            <a:r>
+              <a:rPr lang="en-US" dirty="0">
+                <a:solidFill>
+                  <a:schemeClr val="bg1"/>
+                </a:solidFill>
+              </a:rPr>
+              <a:t>For floats, we linearly interpolate over their range to get exactly 11 values. </a:t>
+            </a:r>
+          </a:p>
+          <a:p>
+            <a:pPr marL="342900" indent="-342900"/>
+            <a:r>
+              <a:rPr lang="en-US" i="1" dirty="0">
+                <a:solidFill>
+                  <a:schemeClr val="bg1"/>
+                </a:solidFill>
+              </a:rPr>
+              <a:t>ACTS</a:t>
+            </a:r>
+            <a:r>
+              <a:rPr lang="en-US" dirty="0">
+                <a:solidFill>
+                  <a:schemeClr val="bg1"/>
+                </a:solidFill>
+              </a:rPr>
+              <a:t> generates covering arrays from 2-way to 5-way and outputs a CSV file, from which </a:t>
+            </a:r>
+            <a:r>
+              <a:rPr lang="en-US" i="1" dirty="0" err="1">
+                <a:solidFill>
+                  <a:schemeClr val="bg1"/>
+                </a:solidFill>
+              </a:rPr>
+              <a:t>NetCDF</a:t>
+            </a:r>
+            <a:r>
+              <a:rPr lang="en-US" dirty="0">
+                <a:solidFill>
+                  <a:schemeClr val="bg1"/>
+                </a:solidFill>
+              </a:rPr>
+              <a:t> files are created using a Python script (</a:t>
+            </a:r>
+            <a:r>
+              <a:rPr lang="en-US" dirty="0">
+                <a:solidFill>
+                  <a:schemeClr val="bg1"/>
+                </a:solidFill>
+                <a:latin typeface="Courier New" panose="02070309020205020404" pitchFamily="49" charset="0"/>
+                <a:cs typeface="Courier New" panose="02070309020205020404" pitchFamily="49" charset="0"/>
+              </a:rPr>
+              <a:t>csv2nc</a:t>
+            </a:r>
+            <a:r>
+              <a:rPr lang="en-US" dirty="0">
+                <a:solidFill>
+                  <a:schemeClr val="bg1"/>
+                </a:solidFill>
+              </a:rPr>
+              <a:t>). These are run on the model using the </a:t>
+            </a:r>
+            <a:r>
+              <a:rPr lang="en-US" i="1" dirty="0" err="1">
+                <a:solidFill>
+                  <a:schemeClr val="bg1"/>
+                </a:solidFill>
+              </a:rPr>
+              <a:t>NetCDF</a:t>
+            </a:r>
+            <a:r>
+              <a:rPr lang="en-US" dirty="0">
+                <a:solidFill>
+                  <a:schemeClr val="bg1"/>
+                </a:solidFill>
+              </a:rPr>
+              <a:t> Cases Sampling Plugin. </a:t>
+            </a:r>
+            <a:endParaRPr lang="en-US" i="1" dirty="0">
+              <a:solidFill>
+                <a:schemeClr val="bg1"/>
+              </a:solidFill>
+            </a:endParaRPr>
+          </a:p>
+        </p:txBody>
+      </p:sp>
+    </p:spTree>
+  </p:cSld>
+  <p:clrMapOvr>
+    <a:masterClrMapping/>
+  </p:clrMapOvr>
+</p:sld>
+</file>
+
+<file path=ppt/slides/slide5.xml><?xml version="1.0" encoding="utf-8"?>
+<p:sld xmlns:a="http://schemas.openxmlformats.org/drawingml/2006/main" xmlns:r="http://schemas.openxmlformats.org/officeDocument/2006/relationships" xmlns:p="http://schemas.openxmlformats.org/presentationml/2006/main">
+  <p:cSld name="page4">
+    <p:spTree>
+      <p:nvGrpSpPr>
+        <p:cNvPr id="1" name=""/>
+        <p:cNvGrpSpPr/>
+        <p:nvPr/>
+      </p:nvGrpSpPr>
+      <p:grpSpPr>
+        <a:xfrm>
+          <a:off x="0" y="0"/>
+          <a:ext cx="0" cy="0"/>
+          <a:chOff x="0" y="0"/>
+          <a:chExt cx="0" cy="0"/>
+        </a:xfrm>
+      </p:grpSpPr>
+      <p:sp>
+        <p:nvSpPr>
+          <p:cNvPr id="2" name="Title 1">
+            <a:extLst>
+              <a:ext uri="{FF2B5EF4-FFF2-40B4-BE49-F238E27FC236}">
+                <a16:creationId xmlns:a16="http://schemas.microsoft.com/office/drawing/2014/main" id="{C4490A42-8874-BE43-3396-EC82FA0BDFFE}"/>
+              </a:ext>
+            </a:extLst>
+          </p:cNvPr>
+          <p:cNvSpPr txBox="1">
+            <a:spLocks noGrp="1"/>
+          </p:cNvSpPr>
+          <p:nvPr>
+            <p:ph type="title" idx="4294967295"/>
+          </p:nvPr>
+        </p:nvSpPr>
+        <p:spPr>
+          <a:xfrm>
+            <a:off x="503999" y="422301"/>
+            <a:ext cx="9071640" cy="553998"/>
+          </a:xfrm>
+        </p:spPr>
+        <p:txBody>
+          <a:bodyPr>
+            <a:spAutoFit/>
+          </a:bodyPr>
+          <a:lstStyle/>
+          <a:p>
+            <a:pPr lvl="0"/>
+            <a:r>
+              <a:rPr lang="en-US" dirty="0">
+                <a:solidFill>
+                  <a:schemeClr val="bg1"/>
+                </a:solidFill>
+              </a:rPr>
+              <a:t>Test Oracle Problem</a:t>
+            </a:r>
+          </a:p>
+        </p:txBody>
+      </p:sp>
+      <p:sp>
+        <p:nvSpPr>
+          <p:cNvPr id="3" name="Text Placeholder 2">
+            <a:extLst>
+              <a:ext uri="{FF2B5EF4-FFF2-40B4-BE49-F238E27FC236}">
+                <a16:creationId xmlns:a16="http://schemas.microsoft.com/office/drawing/2014/main" id="{86FF665C-42E1-DF86-A85F-54C67BE68385}"/>
+              </a:ext>
+            </a:extLst>
+          </p:cNvPr>
+          <p:cNvSpPr txBox="1">
+            <a:spLocks noGrp="1"/>
+          </p:cNvSpPr>
+          <p:nvPr>
+            <p:ph type="body" idx="4294967295"/>
+          </p:nvPr>
+        </p:nvSpPr>
+        <p:spPr/>
+        <p:txBody>
+          <a:bodyPr>
+            <a:normAutofit/>
+          </a:bodyPr>
+          <a:lstStyle/>
+          <a:p>
+            <a:pPr marL="342900" indent="-342900"/>
+            <a:r>
+              <a:rPr lang="en-US" dirty="0">
+                <a:solidFill>
+                  <a:schemeClr val="bg1"/>
+                </a:solidFill>
+              </a:rPr>
+              <a:t>Scientific software verification is difficult due to lacking a test oracle. </a:t>
+            </a:r>
+          </a:p>
+          <a:p>
+            <a:pPr marL="342900" indent="-342900"/>
+            <a:r>
+              <a:rPr lang="en-US" dirty="0">
+                <a:solidFill>
+                  <a:schemeClr val="bg1"/>
+                </a:solidFill>
+              </a:rPr>
+              <a:t>We implement checks that validate output, supported by the Fault Finding Analysis Plugin. </a:t>
+            </a:r>
+          </a:p>
+          <a:p>
+            <a:pPr marL="342900" indent="-342900"/>
+            <a:r>
+              <a:rPr lang="en-US" dirty="0">
+                <a:solidFill>
+                  <a:schemeClr val="bg1"/>
+                </a:solidFill>
+              </a:rPr>
+              <a:t>Checks include ranges of outputs, signs, enumerated values, finiteness, relationships to other inputs/outputs, and certain physical laws and restraints.</a:t>
+            </a:r>
+          </a:p>
+        </p:txBody>
+      </p:sp>
+    </p:spTree>
+  </p:cSld>
+  <p:clrMapOvr>
+    <a:masterClrMapping/>
+  </p:clrMapOvr>
+</p:sld>
+</file>
+
+<file path=ppt/slides/slide6.xml><?xml version="1.0" encoding="utf-8"?>
+<p:sld xmlns:a="http://schemas.openxmlformats.org/drawingml/2006/main" xmlns:r="http://schemas.openxmlformats.org/officeDocument/2006/relationships" xmlns:p="http://schemas.openxmlformats.org/presentationml/2006/main">
+  <p:cSld name="page7">
+    <p:spTree>
+      <p:nvGrpSpPr>
+        <p:cNvPr id="1" name=""/>
+        <p:cNvGrpSpPr/>
+        <p:nvPr/>
+      </p:nvGrpSpPr>
+      <p:grpSpPr>
+        <a:xfrm>
+          <a:off x="0" y="0"/>
+          <a:ext cx="0" cy="0"/>
+          <a:chOff x="0" y="0"/>
+          <a:chExt cx="0" cy="0"/>
+        </a:xfrm>
+      </p:grpSpPr>
+      <p:sp>
+        <p:nvSpPr>
+          <p:cNvPr id="2" name="Title 1">
+            <a:extLst>
+              <a:ext uri="{FF2B5EF4-FFF2-40B4-BE49-F238E27FC236}">
+                <a16:creationId xmlns:a16="http://schemas.microsoft.com/office/drawing/2014/main" id="{44B3FCDA-4EC5-B19D-5009-23CEC9F74198}"/>
+              </a:ext>
+            </a:extLst>
+          </p:cNvPr>
+          <p:cNvSpPr txBox="1">
+            <a:spLocks noGrp="1"/>
+          </p:cNvSpPr>
+          <p:nvPr>
+            <p:ph type="title" idx="4294967295"/>
+          </p:nvPr>
+        </p:nvSpPr>
+        <p:spPr>
+          <a:xfrm>
+            <a:off x="503999" y="422301"/>
+            <a:ext cx="3346641" cy="553998"/>
+          </a:xfrm>
+        </p:spPr>
+        <p:txBody>
+          <a:bodyPr wrap="square">
+            <a:spAutoFit/>
+          </a:bodyPr>
+          <a:lstStyle/>
+          <a:p>
+            <a:pPr lvl="0"/>
+            <a:r>
+              <a:rPr lang="en-US" dirty="0">
+                <a:solidFill>
+                  <a:schemeClr val="bg1"/>
+                </a:solidFill>
+              </a:rPr>
+              <a:t>DOI 2 Data</a:t>
+            </a:r>
+          </a:p>
+        </p:txBody>
+      </p:sp>
+      <p:sp>
+        <p:nvSpPr>
+          <p:cNvPr id="3" name="Text Placeholder 2">
+            <a:extLst>
+              <a:ext uri="{FF2B5EF4-FFF2-40B4-BE49-F238E27FC236}">
+                <a16:creationId xmlns:a16="http://schemas.microsoft.com/office/drawing/2014/main" id="{3F589F92-B484-4E15-0CDC-FFD075A2A74E}"/>
+              </a:ext>
+            </a:extLst>
+          </p:cNvPr>
+          <p:cNvSpPr txBox="1">
+            <a:spLocks noGrp="1"/>
+          </p:cNvSpPr>
+          <p:nvPr>
+            <p:ph type="body" idx="4294967295"/>
+          </p:nvPr>
+        </p:nvSpPr>
+        <p:spPr>
+          <a:xfrm>
+            <a:off x="503999" y="1326600"/>
+            <a:ext cx="3346641" cy="3288239"/>
+          </a:xfrm>
+        </p:spPr>
+        <p:txBody>
+          <a:bodyPr>
+            <a:normAutofit/>
+          </a:bodyPr>
+          <a:lstStyle/>
+          <a:p>
+            <a:pPr marL="342900" indent="-342900"/>
+            <a:r>
+              <a:rPr lang="en-US" dirty="0">
+                <a:solidFill>
+                  <a:schemeClr val="bg1"/>
+                </a:solidFill>
                 <a:latin typeface="AppleSystemUIFont" pitchFamily="2"/>
               </a:rPr>
-              <a:t>DOI 5 results in 689,735 test cases</a:t>
-            </a:r>
-          </a:p>
+              <a:t>Degree of Interaction (DOI) 2 results in 133 test cases when only changing the values of constants known to effect the output of </a:t>
+            </a:r>
+            <a:r>
+              <a:rPr lang="en-US" dirty="0" err="1">
+                <a:solidFill>
+                  <a:schemeClr val="bg1"/>
+                </a:solidFill>
+                <a:latin typeface="AppleSystemUIFont" pitchFamily="2"/>
+              </a:rPr>
+              <a:t>LakeTemperature</a:t>
+            </a:r>
+            <a:r>
+              <a:rPr lang="en-US" dirty="0">
+                <a:solidFill>
+                  <a:schemeClr val="bg1"/>
+                </a:solidFill>
+                <a:latin typeface="AppleSystemUIFont" pitchFamily="2"/>
+              </a:rPr>
+              <a:t>. </a:t>
+            </a:r>
+          </a:p>
+        </p:txBody>
+      </p:sp>
+      <p:pic>
+        <p:nvPicPr>
+          <p:cNvPr id="5" name="Picture 4">
+            <a:extLst>
+              <a:ext uri="{FF2B5EF4-FFF2-40B4-BE49-F238E27FC236}">
+                <a16:creationId xmlns:a16="http://schemas.microsoft.com/office/drawing/2014/main" id="{15C94A79-243F-8D40-B5DA-BED8A49E8184}"/>
+              </a:ext>
+            </a:extLst>
+          </p:cNvPr>
+          <p:cNvPicPr>
+            <a:picLocks noChangeAspect="1"/>
+          </p:cNvPicPr>
+          <p:nvPr/>
+        </p:nvPicPr>
+        <p:blipFill>
+          <a:blip r:embed="rId4"/>
+          <a:stretch>
+            <a:fillRect/>
+          </a:stretch>
+        </p:blipFill>
+        <p:spPr>
+          <a:xfrm>
+            <a:off x="4114644" y="0"/>
+            <a:ext cx="6037257" cy="5670550"/>
+          </a:xfrm>
+          <a:prstGeom prst="rect">
+            <a:avLst/>
+          </a:prstGeom>
+        </p:spPr>
+      </p:pic>
+    </p:spTree>
+  </p:cSld>
+  <p:clrMapOvr>
+    <a:masterClrMapping/>
+  </p:clrMapOvr>
+  <p:extLst>
+    <p:ext uri="{6950BFC3-D8DA-4A85-94F7-54DA5524770B}">
+      <p188:commentRel xmlns:p188="http://schemas.microsoft.com/office/powerpoint/2018/8/main" r:id="rId3"/>
+    </p:ext>
+  </p:extLst>
+</p:sld>
+</file>
+
+<file path=ppt/slides/slide7.xml><?xml version="1.0" encoding="utf-8"?>
+<p:sld xmlns:a="http://schemas.openxmlformats.org/drawingml/2006/main" xmlns:r="http://schemas.openxmlformats.org/officeDocument/2006/relationships" xmlns:p="http://schemas.openxmlformats.org/presentationml/2006/main">
+  <p:cSld>
+    <p:spTree>
+      <p:nvGrpSpPr>
+        <p:cNvPr id="1" name=""/>
+        <p:cNvGrpSpPr/>
+        <p:nvPr/>
+      </p:nvGrpSpPr>
+      <p:grpSpPr>
+        <a:xfrm>
+          <a:off x="0" y="0"/>
+          <a:ext cx="0" cy="0"/>
+          <a:chOff x="0" y="0"/>
+          <a:chExt cx="0" cy="0"/>
+        </a:xfrm>
+      </p:grpSpPr>
+      <p:sp>
+        <p:nvSpPr>
+          <p:cNvPr id="2" name="Title 1">
+            <a:extLst>
+              <a:ext uri="{FF2B5EF4-FFF2-40B4-BE49-F238E27FC236}">
+                <a16:creationId xmlns:a16="http://schemas.microsoft.com/office/drawing/2014/main" id="{9DF1FC1F-B83D-D043-0A53-60E474E50EFB}"/>
+              </a:ext>
+            </a:extLst>
+          </p:cNvPr>
+          <p:cNvSpPr txBox="1">
+            <a:spLocks/>
+          </p:cNvSpPr>
+          <p:nvPr/>
+        </p:nvSpPr>
+        <p:spPr>
+          <a:xfrm>
+            <a:off x="503999" y="422301"/>
+            <a:ext cx="9071640" cy="553998"/>
+          </a:xfrm>
+          <a:prstGeom prst="rect">
+            <a:avLst/>
+          </a:prstGeom>
+          <a:noFill/>
+          <a:ln>
+            <a:noFill/>
+          </a:ln>
+        </p:spPr>
+        <p:txBody>
+          <a:bodyPr vert="horz" lIns="0" tIns="0" rIns="0" bIns="0" anchor="ctr">
+            <a:spAutoFit/>
+          </a:bodyPr>
+          <a:lstStyle>
+            <a:lvl1pPr lvl="0" algn="ctr" rtl="0" hangingPunct="0">
+              <a:buNone/>
+              <a:tabLst/>
+              <a:defRPr lang="en-US" sz="3600" b="0" i="0" u="none" strike="noStrike" kern="1200" cap="none">
+                <a:ln>
+                  <a:noFill/>
+                </a:ln>
+                <a:highlight>
+                  <a:scrgbClr r="0" g="0" b="0">
+                    <a:alpha val="0"/>
+                  </a:scrgbClr>
+                </a:highlight>
+                <a:latin typeface="URW Bookman" pitchFamily="2"/>
+                <a:ea typeface="Nimbus Sans" pitchFamily="2"/>
+                <a:cs typeface="FreeSans" pitchFamily="2"/>
+              </a:defRPr>
+            </a:lvl1pPr>
+          </a:lstStyle>
+          <a:p>
+            <a:r>
+              <a:rPr lang="en-US" dirty="0">
+                <a:solidFill>
+                  <a:schemeClr val="bg1"/>
+                </a:solidFill>
+              </a:rPr>
+              <a:t>DOI 3 Data</a:t>
+            </a:r>
+          </a:p>
+        </p:txBody>
+      </p:sp>
+      <p:sp>
+        <p:nvSpPr>
+          <p:cNvPr id="3" name="Text Placeholder 2">
+            <a:extLst>
+              <a:ext uri="{FF2B5EF4-FFF2-40B4-BE49-F238E27FC236}">
+                <a16:creationId xmlns:a16="http://schemas.microsoft.com/office/drawing/2014/main" id="{5CF707B8-09A9-A28B-36FE-7651ACC03308}"/>
+              </a:ext>
+            </a:extLst>
+          </p:cNvPr>
+          <p:cNvSpPr txBox="1">
+            <a:spLocks/>
+          </p:cNvSpPr>
+          <p:nvPr/>
+        </p:nvSpPr>
+        <p:spPr>
+          <a:xfrm>
+            <a:off x="503999" y="1326600"/>
+            <a:ext cx="9071640" cy="3288239"/>
+          </a:xfrm>
+          <a:prstGeom prst="rect">
+            <a:avLst/>
+          </a:prstGeom>
+          <a:noFill/>
+          <a:ln>
+            <a:noFill/>
+          </a:ln>
+        </p:spPr>
+        <p:txBody>
+          <a:bodyPr vert="horz" lIns="0" tIns="0" rIns="0" bIns="0">
+            <a:normAutofit/>
+          </a:bodyPr>
+          <a:lstStyle>
+            <a:lvl1pPr lvl="0" rtl="0" hangingPunct="0">
+              <a:spcBef>
+                <a:spcPts val="1417"/>
+              </a:spcBef>
+              <a:spcAft>
+                <a:spcPts val="0"/>
+              </a:spcAft>
+              <a:buSzPct val="45000"/>
+              <a:buFont typeface="OpenSymbol"/>
+              <a:buChar char="●"/>
+              <a:tabLst/>
+              <a:defRPr lang="en-US" sz="2400" b="0" i="0" u="none" strike="noStrike" kern="1200" cap="none">
+                <a:ln>
+                  <a:noFill/>
+                </a:ln>
+                <a:highlight>
+                  <a:scrgbClr r="0" g="0" b="0">
+                    <a:alpha val="0"/>
+                  </a:scrgbClr>
+                </a:highlight>
+                <a:latin typeface="URW Bookman" pitchFamily="2"/>
+                <a:ea typeface="Nimbus Sans" pitchFamily="2"/>
+                <a:cs typeface="FreeSans" pitchFamily="2"/>
+              </a:defRPr>
+            </a:lvl1pPr>
+            <a:lvl2pPr lvl="1" rtl="0" hangingPunct="0">
+              <a:spcBef>
+                <a:spcPts val="1417"/>
+              </a:spcBef>
+              <a:spcAft>
+                <a:spcPts val="0"/>
+              </a:spcAft>
+              <a:buSzPct val="75000"/>
+              <a:buFont typeface="OpenSymbol"/>
+              <a:buChar char="–"/>
+              <a:tabLst/>
+              <a:defRPr lang="en-US" sz="2400" b="0" i="0" u="none" strike="noStrike" kern="1200" cap="none">
+                <a:ln>
+                  <a:noFill/>
+                </a:ln>
+                <a:highlight>
+                  <a:scrgbClr r="0" g="0" b="0">
+                    <a:alpha val="0"/>
+                  </a:scrgbClr>
+                </a:highlight>
+                <a:latin typeface="URW Bookman" pitchFamily="2"/>
+                <a:ea typeface="Nimbus Sans" pitchFamily="2"/>
+                <a:cs typeface="FreeSans" pitchFamily="2"/>
+              </a:defRPr>
+            </a:lvl2pPr>
+            <a:lvl3pPr lvl="2" rtl="0" hangingPunct="0">
+              <a:spcBef>
+                <a:spcPts val="1417"/>
+              </a:spcBef>
+              <a:spcAft>
+                <a:spcPts val="0"/>
+              </a:spcAft>
+              <a:buSzPct val="45000"/>
+              <a:buFont typeface="OpenSymbol"/>
+              <a:buChar char="●"/>
+              <a:tabLst/>
+              <a:defRPr lang="en-US" sz="2400" b="0" i="0" u="none" strike="noStrike" kern="1200" cap="none">
+                <a:ln>
+                  <a:noFill/>
+                </a:ln>
+                <a:highlight>
+                  <a:scrgbClr r="0" g="0" b="0">
+                    <a:alpha val="0"/>
+                  </a:scrgbClr>
+                </a:highlight>
+                <a:latin typeface="URW Bookman" pitchFamily="2"/>
+                <a:ea typeface="Nimbus Sans" pitchFamily="2"/>
+                <a:cs typeface="FreeSans" pitchFamily="2"/>
+              </a:defRPr>
+            </a:lvl3pPr>
+            <a:lvl4pPr lvl="3" rtl="0" hangingPunct="0">
+              <a:spcBef>
+                <a:spcPts val="1417"/>
+              </a:spcBef>
+              <a:spcAft>
+                <a:spcPts val="0"/>
+              </a:spcAft>
+              <a:buSzPct val="75000"/>
+              <a:buFont typeface="OpenSymbol"/>
+              <a:buChar char="–"/>
+              <a:tabLst/>
+              <a:defRPr lang="en-US" sz="2400" b="0" i="0" u="none" strike="noStrike" kern="1200" cap="none">
+                <a:ln>
+                  <a:noFill/>
+                </a:ln>
+                <a:highlight>
+                  <a:scrgbClr r="0" g="0" b="0">
+                    <a:alpha val="0"/>
+                  </a:scrgbClr>
+                </a:highlight>
+                <a:latin typeface="URW Bookman" pitchFamily="2"/>
+                <a:ea typeface="Nimbus Sans" pitchFamily="2"/>
+                <a:cs typeface="FreeSans" pitchFamily="2"/>
+              </a:defRPr>
+            </a:lvl4pPr>
+            <a:lvl5pPr lvl="4" rtl="0" hangingPunct="0">
+              <a:spcBef>
+                <a:spcPts val="1417"/>
+              </a:spcBef>
+              <a:spcAft>
+                <a:spcPts val="0"/>
+              </a:spcAft>
+              <a:buSzPct val="45000"/>
+              <a:buFont typeface="OpenSymbol"/>
+              <a:buChar char="●"/>
+              <a:tabLst/>
+              <a:defRPr lang="en-US" sz="2400" b="0" i="0" u="none" strike="noStrike" kern="1200" cap="none">
+                <a:ln>
+                  <a:noFill/>
+                </a:ln>
+                <a:highlight>
+                  <a:scrgbClr r="0" g="0" b="0">
+                    <a:alpha val="0"/>
+                  </a:scrgbClr>
+                </a:highlight>
+                <a:latin typeface="URW Bookman" pitchFamily="2"/>
+                <a:ea typeface="Nimbus Sans" pitchFamily="2"/>
+                <a:cs typeface="FreeSans" pitchFamily="2"/>
+              </a:defRPr>
+            </a:lvl5pPr>
+            <a:lvl6pPr lvl="5" rtl="0" hangingPunct="0">
+              <a:spcBef>
+                <a:spcPts val="1417"/>
+              </a:spcBef>
+              <a:spcAft>
+                <a:spcPts val="0"/>
+              </a:spcAft>
+              <a:buSzPct val="45000"/>
+              <a:buFont typeface="OpenSymbol"/>
+              <a:buChar char="●"/>
+              <a:tabLst/>
+              <a:defRPr lang="en-US" sz="2400" b="0" i="0" u="none" strike="noStrike" kern="1200" cap="none">
+                <a:ln>
+                  <a:noFill/>
+                </a:ln>
+                <a:highlight>
+                  <a:scrgbClr r="0" g="0" b="0">
+                    <a:alpha val="0"/>
+                  </a:scrgbClr>
+                </a:highlight>
+                <a:latin typeface="URW Bookman" pitchFamily="2"/>
+                <a:ea typeface="Nimbus Sans" pitchFamily="2"/>
+                <a:cs typeface="FreeSans" pitchFamily="2"/>
+              </a:defRPr>
+            </a:lvl6pPr>
+            <a:lvl7pPr lvl="6" rtl="0" hangingPunct="0">
+              <a:spcBef>
+                <a:spcPts val="1417"/>
+              </a:spcBef>
+              <a:spcAft>
+                <a:spcPts val="0"/>
+              </a:spcAft>
+              <a:buSzPct val="45000"/>
+              <a:buFont typeface="OpenSymbol"/>
+              <a:buChar char="●"/>
+              <a:tabLst/>
+              <a:defRPr lang="en-US" sz="2400" b="0" i="0" u="none" strike="noStrike" kern="1200" cap="none">
+                <a:ln>
+                  <a:noFill/>
+                </a:ln>
+                <a:highlight>
+                  <a:scrgbClr r="0" g="0" b="0">
+                    <a:alpha val="0"/>
+                  </a:scrgbClr>
+                </a:highlight>
+                <a:latin typeface="URW Bookman" pitchFamily="2"/>
+                <a:ea typeface="Nimbus Sans" pitchFamily="2"/>
+                <a:cs typeface="FreeSans" pitchFamily="2"/>
+              </a:defRPr>
+            </a:lvl7pPr>
+            <a:lvl8pPr marL="3429000" indent="-228600" algn="l" defTabSz="914400" rtl="0" eaLnBrk="1" latinLnBrk="0" hangingPunct="1">
+              <a:lnSpc>
+                <a:spcPct val="90000"/>
+              </a:lnSpc>
+              <a:spcBef>
+                <a:spcPts val="500"/>
+              </a:spcBef>
+              <a:buFont typeface="Arial" panose="020B0604020202020204" pitchFamily="34" charset="0"/>
+              <a:buChar char="•"/>
+              <a:defRPr sz="1800" kern="1200">
+                <a:solidFill>
+                  <a:schemeClr val="tx1"/>
+                </a:solidFill>
+                <a:latin typeface="+mn-lt"/>
+                <a:ea typeface="+mn-ea"/>
+                <a:cs typeface="+mn-cs"/>
+              </a:defRPr>
+            </a:lvl8pPr>
+            <a:lvl9pPr marL="3886200" indent="-228600" algn="l" defTabSz="914400" rtl="0" eaLnBrk="1" latinLnBrk="0" hangingPunct="1">
+              <a:lnSpc>
+                <a:spcPct val="90000"/>
+              </a:lnSpc>
+              <a:spcBef>
+                <a:spcPts val="500"/>
+              </a:spcBef>
+              <a:buFont typeface="Arial" panose="020B0604020202020204" pitchFamily="34" charset="0"/>
+              <a:buChar char="•"/>
+              <a:defRPr sz="1800" kern="1200">
+                <a:solidFill>
+                  <a:schemeClr val="tx1"/>
+                </a:solidFill>
+                <a:latin typeface="+mn-lt"/>
+                <a:ea typeface="+mn-ea"/>
+                <a:cs typeface="+mn-cs"/>
+              </a:defRPr>
+            </a:lvl9pPr>
+          </a:lstStyle>
           <a:p>
             <a:pPr marL="342900" indent="-342900"/>
             <a:r>
               <a:rPr lang="en-US" dirty="0">
+                <a:solidFill>
+                  <a:schemeClr val="bg1"/>
+                </a:solidFill>
+                <a:latin typeface="AppleSystemUIFont" pitchFamily="2"/>
+              </a:rPr>
+              <a:t>DOI 3 results in 3,516 test cases when only changing the values of constants known to effect the output of </a:t>
+            </a:r>
+            <a:r>
+              <a:rPr lang="en-US" dirty="0" err="1">
+                <a:solidFill>
+                  <a:schemeClr val="bg1"/>
+                </a:solidFill>
+                <a:latin typeface="AppleSystemUIFont" pitchFamily="2"/>
+              </a:rPr>
+              <a:t>LakeTemperature</a:t>
+            </a:r>
+            <a:r>
+              <a:rPr lang="en-US" dirty="0">
+                <a:solidFill>
+                  <a:schemeClr val="bg1"/>
+                </a:solidFill>
+                <a:latin typeface="AppleSystemUIFont" pitchFamily="2"/>
+              </a:rPr>
+              <a:t>.</a:t>
+            </a:r>
+          </a:p>
+          <a:p>
+            <a:pPr marL="342900" indent="-342900"/>
+            <a:r>
+              <a:rPr lang="en-US" i="1" dirty="0">
+                <a:solidFill>
+                  <a:schemeClr val="bg1"/>
+                </a:solidFill>
+                <a:latin typeface="AppleSystemUIFont" pitchFamily="2"/>
+              </a:rPr>
+              <a:t>How many combinatorial test cases generated, executed, passed, skipped, failed, crashed</a:t>
+            </a:r>
+          </a:p>
+        </p:txBody>
+      </p:sp>
+    </p:spTree>
+    <p:extLst>
+      <p:ext uri="{BB962C8B-B14F-4D97-AF65-F5344CB8AC3E}">
+        <p14:creationId xmlns:p14="http://schemas.microsoft.com/office/powerpoint/2010/main" val="2353400714"/>
+      </p:ext>
+    </p:extLst>
+  </p:cSld>
+  <p:clrMapOvr>
+    <a:masterClrMapping/>
+  </p:clrMapOvr>
+  <p:extLst>
+    <p:ext uri="{6950BFC3-D8DA-4A85-94F7-54DA5524770B}">
+      <p188:commentRel xmlns:p188="http://schemas.microsoft.com/office/powerpoint/2018/8/main" r:id="rId2"/>
+    </p:ext>
+  </p:extLst>
+</p:sld>
+</file>
+
+<file path=ppt/slides/slide8.xml><?xml version="1.0" encoding="utf-8"?>
+<p:sld xmlns:a="http://schemas.openxmlformats.org/drawingml/2006/main" xmlns:r="http://schemas.openxmlformats.org/officeDocument/2006/relationships" xmlns:p="http://schemas.openxmlformats.org/presentationml/2006/main">
+  <p:cSld>
+    <p:spTree>
+      <p:nvGrpSpPr>
+        <p:cNvPr id="1" name=""/>
+        <p:cNvGrpSpPr/>
+        <p:nvPr/>
+      </p:nvGrpSpPr>
+      <p:grpSpPr>
+        <a:xfrm>
+          <a:off x="0" y="0"/>
+          <a:ext cx="0" cy="0"/>
+          <a:chOff x="0" y="0"/>
+          <a:chExt cx="0" cy="0"/>
+        </a:xfrm>
+      </p:grpSpPr>
+      <p:sp>
+        <p:nvSpPr>
+          <p:cNvPr id="2" name="Title 1">
+            <a:extLst>
+              <a:ext uri="{FF2B5EF4-FFF2-40B4-BE49-F238E27FC236}">
+                <a16:creationId xmlns:a16="http://schemas.microsoft.com/office/drawing/2014/main" id="{3B229438-C75A-6BD0-0DC0-AB63F95B648C}"/>
+              </a:ext>
+            </a:extLst>
+          </p:cNvPr>
+          <p:cNvSpPr txBox="1">
+            <a:spLocks/>
+          </p:cNvSpPr>
+          <p:nvPr/>
+        </p:nvSpPr>
+        <p:spPr>
+          <a:xfrm>
+            <a:off x="503999" y="422301"/>
+            <a:ext cx="9071640" cy="553998"/>
+          </a:xfrm>
+          <a:prstGeom prst="rect">
+            <a:avLst/>
+          </a:prstGeom>
+          <a:noFill/>
+          <a:ln>
+            <a:noFill/>
+          </a:ln>
+        </p:spPr>
+        <p:txBody>
+          <a:bodyPr vert="horz" lIns="0" tIns="0" rIns="0" bIns="0" anchor="ctr">
+            <a:spAutoFit/>
+          </a:bodyPr>
+          <a:lstStyle>
+            <a:lvl1pPr lvl="0" algn="ctr" rtl="0" hangingPunct="0">
+              <a:buNone/>
+              <a:tabLst/>
+              <a:defRPr lang="en-US" sz="3600" b="0" i="0" u="none" strike="noStrike" kern="1200" cap="none">
+                <a:ln>
+                  <a:noFill/>
+                </a:ln>
+                <a:highlight>
+                  <a:scrgbClr r="0" g="0" b="0">
+                    <a:alpha val="0"/>
+                  </a:scrgbClr>
+                </a:highlight>
+                <a:latin typeface="URW Bookman" pitchFamily="2"/>
+                <a:ea typeface="Nimbus Sans" pitchFamily="2"/>
+                <a:cs typeface="FreeSans" pitchFamily="2"/>
+              </a:defRPr>
+            </a:lvl1pPr>
+          </a:lstStyle>
+          <a:p>
+            <a:r>
+              <a:rPr lang="en-US" dirty="0">
+                <a:solidFill>
+                  <a:schemeClr val="bg1"/>
+                </a:solidFill>
+              </a:rPr>
+              <a:t>DOI 4 Data</a:t>
+            </a:r>
+          </a:p>
+        </p:txBody>
+      </p:sp>
+      <p:sp>
+        <p:nvSpPr>
+          <p:cNvPr id="3" name="Text Placeholder 2">
+            <a:extLst>
+              <a:ext uri="{FF2B5EF4-FFF2-40B4-BE49-F238E27FC236}">
+                <a16:creationId xmlns:a16="http://schemas.microsoft.com/office/drawing/2014/main" id="{56064C14-1601-F022-7F3D-615176F6A82B}"/>
+              </a:ext>
+            </a:extLst>
+          </p:cNvPr>
+          <p:cNvSpPr txBox="1">
+            <a:spLocks/>
+          </p:cNvSpPr>
+          <p:nvPr/>
+        </p:nvSpPr>
+        <p:spPr>
+          <a:xfrm>
+            <a:off x="503999" y="1326600"/>
+            <a:ext cx="9071640" cy="3288239"/>
+          </a:xfrm>
+          <a:prstGeom prst="rect">
+            <a:avLst/>
+          </a:prstGeom>
+          <a:noFill/>
+          <a:ln>
+            <a:noFill/>
+          </a:ln>
+        </p:spPr>
+        <p:txBody>
+          <a:bodyPr vert="horz" lIns="0" tIns="0" rIns="0" bIns="0">
+            <a:normAutofit/>
+          </a:bodyPr>
+          <a:lstStyle>
+            <a:lvl1pPr lvl="0" rtl="0" hangingPunct="0">
+              <a:spcBef>
+                <a:spcPts val="1417"/>
+              </a:spcBef>
+              <a:spcAft>
+                <a:spcPts val="0"/>
+              </a:spcAft>
+              <a:buSzPct val="45000"/>
+              <a:buFont typeface="OpenSymbol"/>
+              <a:buChar char="●"/>
+              <a:tabLst/>
+              <a:defRPr lang="en-US" sz="2400" b="0" i="0" u="none" strike="noStrike" kern="1200" cap="none">
+                <a:ln>
+                  <a:noFill/>
+                </a:ln>
+                <a:highlight>
+                  <a:scrgbClr r="0" g="0" b="0">
+                    <a:alpha val="0"/>
+                  </a:scrgbClr>
+                </a:highlight>
+                <a:latin typeface="URW Bookman" pitchFamily="2"/>
+                <a:ea typeface="Nimbus Sans" pitchFamily="2"/>
+                <a:cs typeface="FreeSans" pitchFamily="2"/>
+              </a:defRPr>
+            </a:lvl1pPr>
+            <a:lvl2pPr lvl="1" rtl="0" hangingPunct="0">
+              <a:spcBef>
+                <a:spcPts val="1417"/>
+              </a:spcBef>
+              <a:spcAft>
+                <a:spcPts val="0"/>
+              </a:spcAft>
+              <a:buSzPct val="75000"/>
+              <a:buFont typeface="OpenSymbol"/>
+              <a:buChar char="–"/>
+              <a:tabLst/>
+              <a:defRPr lang="en-US" sz="2400" b="0" i="0" u="none" strike="noStrike" kern="1200" cap="none">
+                <a:ln>
+                  <a:noFill/>
+                </a:ln>
+                <a:highlight>
+                  <a:scrgbClr r="0" g="0" b="0">
+                    <a:alpha val="0"/>
+                  </a:scrgbClr>
+                </a:highlight>
+                <a:latin typeface="URW Bookman" pitchFamily="2"/>
+                <a:ea typeface="Nimbus Sans" pitchFamily="2"/>
+                <a:cs typeface="FreeSans" pitchFamily="2"/>
+              </a:defRPr>
+            </a:lvl2pPr>
+            <a:lvl3pPr lvl="2" rtl="0" hangingPunct="0">
+              <a:spcBef>
+                <a:spcPts val="1417"/>
+              </a:spcBef>
+              <a:spcAft>
+                <a:spcPts val="0"/>
+              </a:spcAft>
+              <a:buSzPct val="45000"/>
+              <a:buFont typeface="OpenSymbol"/>
+              <a:buChar char="●"/>
+              <a:tabLst/>
+              <a:defRPr lang="en-US" sz="2400" b="0" i="0" u="none" strike="noStrike" kern="1200" cap="none">
+                <a:ln>
+                  <a:noFill/>
+                </a:ln>
+                <a:highlight>
+                  <a:scrgbClr r="0" g="0" b="0">
+                    <a:alpha val="0"/>
+                  </a:scrgbClr>
+                </a:highlight>
+                <a:latin typeface="URW Bookman" pitchFamily="2"/>
+                <a:ea typeface="Nimbus Sans" pitchFamily="2"/>
+                <a:cs typeface="FreeSans" pitchFamily="2"/>
+              </a:defRPr>
+            </a:lvl3pPr>
+            <a:lvl4pPr lvl="3" rtl="0" hangingPunct="0">
+              <a:spcBef>
+                <a:spcPts val="1417"/>
+              </a:spcBef>
+              <a:spcAft>
+                <a:spcPts val="0"/>
+              </a:spcAft>
+              <a:buSzPct val="75000"/>
+              <a:buFont typeface="OpenSymbol"/>
+              <a:buChar char="–"/>
+              <a:tabLst/>
+              <a:defRPr lang="en-US" sz="2400" b="0" i="0" u="none" strike="noStrike" kern="1200" cap="none">
+                <a:ln>
+                  <a:noFill/>
+                </a:ln>
+                <a:highlight>
+                  <a:scrgbClr r="0" g="0" b="0">
+                    <a:alpha val="0"/>
+                  </a:scrgbClr>
+                </a:highlight>
+                <a:latin typeface="URW Bookman" pitchFamily="2"/>
+                <a:ea typeface="Nimbus Sans" pitchFamily="2"/>
+                <a:cs typeface="FreeSans" pitchFamily="2"/>
+              </a:defRPr>
+            </a:lvl4pPr>
+            <a:lvl5pPr lvl="4" rtl="0" hangingPunct="0">
+              <a:spcBef>
+                <a:spcPts val="1417"/>
+              </a:spcBef>
+              <a:spcAft>
+                <a:spcPts val="0"/>
+              </a:spcAft>
+              <a:buSzPct val="45000"/>
+              <a:buFont typeface="OpenSymbol"/>
+              <a:buChar char="●"/>
+              <a:tabLst/>
+              <a:defRPr lang="en-US" sz="2400" b="0" i="0" u="none" strike="noStrike" kern="1200" cap="none">
+                <a:ln>
+                  <a:noFill/>
+                </a:ln>
+                <a:highlight>
+                  <a:scrgbClr r="0" g="0" b="0">
+                    <a:alpha val="0"/>
+                  </a:scrgbClr>
+                </a:highlight>
+                <a:latin typeface="URW Bookman" pitchFamily="2"/>
+                <a:ea typeface="Nimbus Sans" pitchFamily="2"/>
+                <a:cs typeface="FreeSans" pitchFamily="2"/>
+              </a:defRPr>
+            </a:lvl5pPr>
+            <a:lvl6pPr lvl="5" rtl="0" hangingPunct="0">
+              <a:spcBef>
+                <a:spcPts val="1417"/>
+              </a:spcBef>
+              <a:spcAft>
+                <a:spcPts val="0"/>
+              </a:spcAft>
+              <a:buSzPct val="45000"/>
+              <a:buFont typeface="OpenSymbol"/>
+              <a:buChar char="●"/>
+              <a:tabLst/>
+              <a:defRPr lang="en-US" sz="2400" b="0" i="0" u="none" strike="noStrike" kern="1200" cap="none">
+                <a:ln>
+                  <a:noFill/>
+                </a:ln>
+                <a:highlight>
+                  <a:scrgbClr r="0" g="0" b="0">
+                    <a:alpha val="0"/>
+                  </a:scrgbClr>
+                </a:highlight>
+                <a:latin typeface="URW Bookman" pitchFamily="2"/>
+                <a:ea typeface="Nimbus Sans" pitchFamily="2"/>
+                <a:cs typeface="FreeSans" pitchFamily="2"/>
+              </a:defRPr>
+            </a:lvl6pPr>
+            <a:lvl7pPr lvl="6" rtl="0" hangingPunct="0">
+              <a:spcBef>
+                <a:spcPts val="1417"/>
+              </a:spcBef>
+              <a:spcAft>
+                <a:spcPts val="0"/>
+              </a:spcAft>
+              <a:buSzPct val="45000"/>
+              <a:buFont typeface="OpenSymbol"/>
+              <a:buChar char="●"/>
+              <a:tabLst/>
+              <a:defRPr lang="en-US" sz="2400" b="0" i="0" u="none" strike="noStrike" kern="1200" cap="none">
+                <a:ln>
+                  <a:noFill/>
+                </a:ln>
+                <a:highlight>
+                  <a:scrgbClr r="0" g="0" b="0">
+                    <a:alpha val="0"/>
+                  </a:scrgbClr>
+                </a:highlight>
+                <a:latin typeface="URW Bookman" pitchFamily="2"/>
+                <a:ea typeface="Nimbus Sans" pitchFamily="2"/>
+                <a:cs typeface="FreeSans" pitchFamily="2"/>
+              </a:defRPr>
+            </a:lvl7pPr>
+            <a:lvl8pPr marL="3429000" indent="-228600" algn="l" defTabSz="914400" rtl="0" eaLnBrk="1" latinLnBrk="0" hangingPunct="1">
+              <a:lnSpc>
+                <a:spcPct val="90000"/>
+              </a:lnSpc>
+              <a:spcBef>
+                <a:spcPts val="500"/>
+              </a:spcBef>
+              <a:buFont typeface="Arial" panose="020B0604020202020204" pitchFamily="34" charset="0"/>
+              <a:buChar char="•"/>
+              <a:defRPr sz="1800" kern="1200">
+                <a:solidFill>
+                  <a:schemeClr val="tx1"/>
+                </a:solidFill>
+                <a:latin typeface="+mn-lt"/>
+                <a:ea typeface="+mn-ea"/>
+                <a:cs typeface="+mn-cs"/>
+              </a:defRPr>
+            </a:lvl8pPr>
+            <a:lvl9pPr marL="3886200" indent="-228600" algn="l" defTabSz="914400" rtl="0" eaLnBrk="1" latinLnBrk="0" hangingPunct="1">
+              <a:lnSpc>
+                <a:spcPct val="90000"/>
+              </a:lnSpc>
+              <a:spcBef>
+                <a:spcPts val="500"/>
+              </a:spcBef>
+              <a:buFont typeface="Arial" panose="020B0604020202020204" pitchFamily="34" charset="0"/>
+              <a:buChar char="•"/>
+              <a:defRPr sz="1800" kern="1200">
+                <a:solidFill>
+                  <a:schemeClr val="tx1"/>
+                </a:solidFill>
+                <a:latin typeface="+mn-lt"/>
+                <a:ea typeface="+mn-ea"/>
+                <a:cs typeface="+mn-cs"/>
+              </a:defRPr>
+            </a:lvl9pPr>
+          </a:lstStyle>
+          <a:p>
+            <a:pPr marL="342900" indent="-342900"/>
+            <a:r>
+              <a:rPr lang="en-US" dirty="0">
+                <a:solidFill>
+                  <a:schemeClr val="bg1"/>
+                </a:solidFill>
+                <a:latin typeface="AppleSystemUIFont" pitchFamily="2"/>
+              </a:rPr>
+              <a:t>DOI 4 results in 50,031 test cases when only changing the values of constants known to effect the output of </a:t>
+            </a:r>
+            <a:r>
+              <a:rPr lang="en-US" dirty="0" err="1">
+                <a:solidFill>
+                  <a:schemeClr val="bg1"/>
+                </a:solidFill>
+                <a:latin typeface="AppleSystemUIFont" pitchFamily="2"/>
+              </a:rPr>
+              <a:t>LakeTemperature</a:t>
+            </a:r>
+            <a:r>
+              <a:rPr lang="en-US" dirty="0">
+                <a:solidFill>
+                  <a:schemeClr val="bg1"/>
+                </a:solidFill>
+                <a:latin typeface="AppleSystemUIFont" pitchFamily="2"/>
+              </a:rPr>
+              <a:t>.</a:t>
+            </a:r>
+          </a:p>
+          <a:p>
+            <a:pPr marL="342900" indent="-342900"/>
+            <a:r>
+              <a:rPr lang="en-US" i="1" dirty="0">
+                <a:solidFill>
+                  <a:schemeClr val="bg1"/>
+                </a:solidFill>
+                <a:latin typeface="AppleSystemUIFont" pitchFamily="2"/>
+              </a:rPr>
+              <a:t>How many combinatorial test cases generated, executed, passed, skipped, failed, crashed</a:t>
+            </a:r>
+          </a:p>
+        </p:txBody>
+      </p:sp>
+    </p:spTree>
+    <p:extLst>
+      <p:ext uri="{BB962C8B-B14F-4D97-AF65-F5344CB8AC3E}">
+        <p14:creationId xmlns:p14="http://schemas.microsoft.com/office/powerpoint/2010/main" val="3165592934"/>
+      </p:ext>
+    </p:extLst>
+  </p:cSld>
+  <p:clrMapOvr>
+    <a:masterClrMapping/>
+  </p:clrMapOvr>
+  <p:extLst>
+    <p:ext uri="{6950BFC3-D8DA-4A85-94F7-54DA5524770B}">
+      <p188:commentRel xmlns:p188="http://schemas.microsoft.com/office/powerpoint/2018/8/main" r:id="rId2"/>
+    </p:ext>
+  </p:extLst>
+</p:sld>
+</file>
+
+<file path=ppt/slides/slide9.xml><?xml version="1.0" encoding="utf-8"?>
+<p:sld xmlns:a="http://schemas.openxmlformats.org/drawingml/2006/main" xmlns:r="http://schemas.openxmlformats.org/officeDocument/2006/relationships" xmlns:p="http://schemas.openxmlformats.org/presentationml/2006/main">
+  <p:cSld>
+    <p:spTree>
+      <p:nvGrpSpPr>
+        <p:cNvPr id="1" name=""/>
+        <p:cNvGrpSpPr/>
+        <p:nvPr/>
+      </p:nvGrpSpPr>
+      <p:grpSpPr>
+        <a:xfrm>
+          <a:off x="0" y="0"/>
+          <a:ext cx="0" cy="0"/>
+          <a:chOff x="0" y="0"/>
+          <a:chExt cx="0" cy="0"/>
+        </a:xfrm>
+      </p:grpSpPr>
+      <p:sp>
+        <p:nvSpPr>
+          <p:cNvPr id="2" name="Title 1">
+            <a:extLst>
+              <a:ext uri="{FF2B5EF4-FFF2-40B4-BE49-F238E27FC236}">
+                <a16:creationId xmlns:a16="http://schemas.microsoft.com/office/drawing/2014/main" id="{3BF6498E-98A7-DD6B-79FB-40EF89C7FFC8}"/>
+              </a:ext>
+            </a:extLst>
+          </p:cNvPr>
+          <p:cNvSpPr txBox="1">
+            <a:spLocks/>
+          </p:cNvSpPr>
+          <p:nvPr/>
+        </p:nvSpPr>
+        <p:spPr>
+          <a:xfrm>
+            <a:off x="503999" y="422301"/>
+            <a:ext cx="9071640" cy="553998"/>
+          </a:xfrm>
+          <a:prstGeom prst="rect">
+            <a:avLst/>
+          </a:prstGeom>
+          <a:noFill/>
+          <a:ln>
+            <a:noFill/>
+          </a:ln>
+        </p:spPr>
+        <p:txBody>
+          <a:bodyPr vert="horz" lIns="0" tIns="0" rIns="0" bIns="0" anchor="ctr">
+            <a:spAutoFit/>
+          </a:bodyPr>
+          <a:lstStyle>
+            <a:lvl1pPr lvl="0" algn="ctr" rtl="0" hangingPunct="0">
+              <a:buNone/>
+              <a:tabLst/>
+              <a:defRPr lang="en-US" sz="3600" b="0" i="0" u="none" strike="noStrike" kern="1200" cap="none">
+                <a:ln>
+                  <a:noFill/>
+                </a:ln>
+                <a:highlight>
+                  <a:scrgbClr r="0" g="0" b="0">
+                    <a:alpha val="0"/>
+                  </a:scrgbClr>
+                </a:highlight>
+                <a:latin typeface="URW Bookman" pitchFamily="2"/>
+                <a:ea typeface="Nimbus Sans" pitchFamily="2"/>
+                <a:cs typeface="FreeSans" pitchFamily="2"/>
+              </a:defRPr>
+            </a:lvl1pPr>
+          </a:lstStyle>
+          <a:p>
+            <a:r>
+              <a:rPr lang="en-US" dirty="0">
+                <a:solidFill>
+                  <a:schemeClr val="bg1"/>
+                </a:solidFill>
+              </a:rPr>
+              <a:t>DOI 5 Data</a:t>
+            </a:r>
+          </a:p>
+        </p:txBody>
+      </p:sp>
+      <p:sp>
+        <p:nvSpPr>
+          <p:cNvPr id="3" name="Text Placeholder 2">
+            <a:extLst>
+              <a:ext uri="{FF2B5EF4-FFF2-40B4-BE49-F238E27FC236}">
+                <a16:creationId xmlns:a16="http://schemas.microsoft.com/office/drawing/2014/main" id="{31720598-1CB0-E7F3-3417-23A2488D52ED}"/>
+              </a:ext>
+            </a:extLst>
+          </p:cNvPr>
+          <p:cNvSpPr txBox="1">
+            <a:spLocks/>
+          </p:cNvSpPr>
+          <p:nvPr/>
+        </p:nvSpPr>
+        <p:spPr>
+          <a:xfrm>
+            <a:off x="503999" y="1326600"/>
+            <a:ext cx="9071640" cy="3288239"/>
+          </a:xfrm>
+          <a:prstGeom prst="rect">
+            <a:avLst/>
+          </a:prstGeom>
+          <a:noFill/>
+          <a:ln>
+            <a:noFill/>
+          </a:ln>
+        </p:spPr>
+        <p:txBody>
+          <a:bodyPr vert="horz" lIns="0" tIns="0" rIns="0" bIns="0">
+            <a:normAutofit/>
+          </a:bodyPr>
+          <a:lstStyle>
+            <a:lvl1pPr lvl="0" rtl="0" hangingPunct="0">
+              <a:spcBef>
+                <a:spcPts val="1417"/>
+              </a:spcBef>
+              <a:spcAft>
+                <a:spcPts val="0"/>
+              </a:spcAft>
+              <a:buSzPct val="45000"/>
+              <a:buFont typeface="OpenSymbol"/>
+              <a:buChar char="●"/>
+              <a:tabLst/>
+              <a:defRPr lang="en-US" sz="2400" b="0" i="0" u="none" strike="noStrike" kern="1200" cap="none">
+                <a:ln>
+                  <a:noFill/>
+                </a:ln>
+                <a:highlight>
+                  <a:scrgbClr r="0" g="0" b="0">
+                    <a:alpha val="0"/>
+                  </a:scrgbClr>
+                </a:highlight>
+                <a:latin typeface="URW Bookman" pitchFamily="2"/>
+                <a:ea typeface="Nimbus Sans" pitchFamily="2"/>
+                <a:cs typeface="FreeSans" pitchFamily="2"/>
+              </a:defRPr>
+            </a:lvl1pPr>
+            <a:lvl2pPr lvl="1" rtl="0" hangingPunct="0">
+              <a:spcBef>
+                <a:spcPts val="1417"/>
+              </a:spcBef>
+              <a:spcAft>
+                <a:spcPts val="0"/>
+              </a:spcAft>
+              <a:buSzPct val="75000"/>
+              <a:buFont typeface="OpenSymbol"/>
+              <a:buChar char="–"/>
+              <a:tabLst/>
+              <a:defRPr lang="en-US" sz="2400" b="0" i="0" u="none" strike="noStrike" kern="1200" cap="none">
+                <a:ln>
+                  <a:noFill/>
+                </a:ln>
+                <a:highlight>
+                  <a:scrgbClr r="0" g="0" b="0">
+                    <a:alpha val="0"/>
+                  </a:scrgbClr>
+                </a:highlight>
+                <a:latin typeface="URW Bookman" pitchFamily="2"/>
+                <a:ea typeface="Nimbus Sans" pitchFamily="2"/>
+                <a:cs typeface="FreeSans" pitchFamily="2"/>
+              </a:defRPr>
+            </a:lvl2pPr>
+            <a:lvl3pPr lvl="2" rtl="0" hangingPunct="0">
+              <a:spcBef>
+                <a:spcPts val="1417"/>
+              </a:spcBef>
+              <a:spcAft>
+                <a:spcPts val="0"/>
+              </a:spcAft>
+              <a:buSzPct val="45000"/>
+              <a:buFont typeface="OpenSymbol"/>
+              <a:buChar char="●"/>
+              <a:tabLst/>
+              <a:defRPr lang="en-US" sz="2400" b="0" i="0" u="none" strike="noStrike" kern="1200" cap="none">
+                <a:ln>
+                  <a:noFill/>
+                </a:ln>
+                <a:highlight>
+                  <a:scrgbClr r="0" g="0" b="0">
+                    <a:alpha val="0"/>
+                  </a:scrgbClr>
+                </a:highlight>
+                <a:latin typeface="URW Bookman" pitchFamily="2"/>
+                <a:ea typeface="Nimbus Sans" pitchFamily="2"/>
+                <a:cs typeface="FreeSans" pitchFamily="2"/>
+              </a:defRPr>
+            </a:lvl3pPr>
+            <a:lvl4pPr lvl="3" rtl="0" hangingPunct="0">
+              <a:spcBef>
+                <a:spcPts val="1417"/>
+              </a:spcBef>
+              <a:spcAft>
+                <a:spcPts val="0"/>
+              </a:spcAft>
+              <a:buSzPct val="75000"/>
+              <a:buFont typeface="OpenSymbol"/>
+              <a:buChar char="–"/>
+              <a:tabLst/>
+              <a:defRPr lang="en-US" sz="2400" b="0" i="0" u="none" strike="noStrike" kern="1200" cap="none">
+                <a:ln>
+                  <a:noFill/>
+                </a:ln>
+                <a:highlight>
+                  <a:scrgbClr r="0" g="0" b="0">
+                    <a:alpha val="0"/>
+                  </a:scrgbClr>
+                </a:highlight>
+                <a:latin typeface="URW Bookman" pitchFamily="2"/>
+                <a:ea typeface="Nimbus Sans" pitchFamily="2"/>
+                <a:cs typeface="FreeSans" pitchFamily="2"/>
+              </a:defRPr>
+            </a:lvl4pPr>
+            <a:lvl5pPr lvl="4" rtl="0" hangingPunct="0">
+              <a:spcBef>
+                <a:spcPts val="1417"/>
+              </a:spcBef>
+              <a:spcAft>
+                <a:spcPts val="0"/>
+              </a:spcAft>
+              <a:buSzPct val="45000"/>
+              <a:buFont typeface="OpenSymbol"/>
+              <a:buChar char="●"/>
+              <a:tabLst/>
+              <a:defRPr lang="en-US" sz="2400" b="0" i="0" u="none" strike="noStrike" kern="1200" cap="none">
+                <a:ln>
+                  <a:noFill/>
+                </a:ln>
+                <a:highlight>
+                  <a:scrgbClr r="0" g="0" b="0">
+                    <a:alpha val="0"/>
+                  </a:scrgbClr>
+                </a:highlight>
+                <a:latin typeface="URW Bookman" pitchFamily="2"/>
+                <a:ea typeface="Nimbus Sans" pitchFamily="2"/>
+                <a:cs typeface="FreeSans" pitchFamily="2"/>
+              </a:defRPr>
+            </a:lvl5pPr>
+            <a:lvl6pPr lvl="5" rtl="0" hangingPunct="0">
+              <a:spcBef>
+                <a:spcPts val="1417"/>
+              </a:spcBef>
+              <a:spcAft>
+                <a:spcPts val="0"/>
+              </a:spcAft>
+              <a:buSzPct val="45000"/>
+              <a:buFont typeface="OpenSymbol"/>
+              <a:buChar char="●"/>
+              <a:tabLst/>
+              <a:defRPr lang="en-US" sz="2400" b="0" i="0" u="none" strike="noStrike" kern="1200" cap="none">
+                <a:ln>
+                  <a:noFill/>
+                </a:ln>
+                <a:highlight>
+                  <a:scrgbClr r="0" g="0" b="0">
+                    <a:alpha val="0"/>
+                  </a:scrgbClr>
+                </a:highlight>
+                <a:latin typeface="URW Bookman" pitchFamily="2"/>
+                <a:ea typeface="Nimbus Sans" pitchFamily="2"/>
+                <a:cs typeface="FreeSans" pitchFamily="2"/>
+              </a:defRPr>
+            </a:lvl6pPr>
+            <a:lvl7pPr lvl="6" rtl="0" hangingPunct="0">
+              <a:spcBef>
+                <a:spcPts val="1417"/>
+              </a:spcBef>
+              <a:spcAft>
+                <a:spcPts val="0"/>
+              </a:spcAft>
+              <a:buSzPct val="45000"/>
+              <a:buFont typeface="OpenSymbol"/>
+              <a:buChar char="●"/>
+              <a:tabLst/>
+              <a:defRPr lang="en-US" sz="2400" b="0" i="0" u="none" strike="noStrike" kern="1200" cap="none">
+                <a:ln>
+                  <a:noFill/>
+                </a:ln>
+                <a:highlight>
+                  <a:scrgbClr r="0" g="0" b="0">
+                    <a:alpha val="0"/>
+                  </a:scrgbClr>
+                </a:highlight>
+                <a:latin typeface="URW Bookman" pitchFamily="2"/>
+                <a:ea typeface="Nimbus Sans" pitchFamily="2"/>
+                <a:cs typeface="FreeSans" pitchFamily="2"/>
+              </a:defRPr>
+            </a:lvl7pPr>
+            <a:lvl8pPr marL="3429000" indent="-228600" algn="l" defTabSz="914400" rtl="0" eaLnBrk="1" latinLnBrk="0" hangingPunct="1">
+              <a:lnSpc>
+                <a:spcPct val="90000"/>
+              </a:lnSpc>
+              <a:spcBef>
+                <a:spcPts val="500"/>
+              </a:spcBef>
+              <a:buFont typeface="Arial" panose="020B0604020202020204" pitchFamily="34" charset="0"/>
+              <a:buChar char="•"/>
+              <a:defRPr sz="1800" kern="1200">
+                <a:solidFill>
+                  <a:schemeClr val="tx1"/>
+                </a:solidFill>
+                <a:latin typeface="+mn-lt"/>
+                <a:ea typeface="+mn-ea"/>
+                <a:cs typeface="+mn-cs"/>
+              </a:defRPr>
+            </a:lvl8pPr>
+            <a:lvl9pPr marL="3886200" indent="-228600" algn="l" defTabSz="914400" rtl="0" eaLnBrk="1" latinLnBrk="0" hangingPunct="1">
+              <a:lnSpc>
+                <a:spcPct val="90000"/>
+              </a:lnSpc>
+              <a:spcBef>
+                <a:spcPts val="500"/>
+              </a:spcBef>
+              <a:buFont typeface="Arial" panose="020B0604020202020204" pitchFamily="34" charset="0"/>
+              <a:buChar char="•"/>
+              <a:defRPr sz="1800" kern="1200">
+                <a:solidFill>
+                  <a:schemeClr val="tx1"/>
+                </a:solidFill>
+                <a:latin typeface="+mn-lt"/>
+                <a:ea typeface="+mn-ea"/>
+                <a:cs typeface="+mn-cs"/>
+              </a:defRPr>
+            </a:lvl9pPr>
+          </a:lstStyle>
+          <a:p>
+            <a:pPr marL="342900" indent="-342900"/>
+            <a:r>
+              <a:rPr lang="en-US" dirty="0">
+                <a:solidFill>
+                  <a:schemeClr val="bg1"/>
+                </a:solidFill>
+                <a:latin typeface="AppleSystemUIFont" pitchFamily="2"/>
+              </a:rPr>
+              <a:t>DOI 5 results in 689,735 test cases when only changing the values of constants known to effect the output of </a:t>
+            </a:r>
+            <a:r>
+              <a:rPr lang="en-US" dirty="0" err="1">
+                <a:solidFill>
+                  <a:schemeClr val="bg1"/>
+                </a:solidFill>
+                <a:latin typeface="AppleSystemUIFont" pitchFamily="2"/>
+              </a:rPr>
+              <a:t>LakeTemperature</a:t>
+            </a:r>
+            <a:r>
+              <a:rPr lang="en-US" dirty="0">
+                <a:solidFill>
+                  <a:schemeClr val="bg1"/>
+                </a:solidFill>
+                <a:latin typeface="AppleSystemUIFont" pitchFamily="2"/>
+              </a:rPr>
+              <a:t>.</a:t>
+            </a:r>
+          </a:p>
+          <a:p>
+            <a:pPr marL="342900" indent="-342900"/>
+            <a:r>
+              <a:rPr lang="en-US" i="1" dirty="0">
                 <a:solidFill>
                   <a:schemeClr val="bg1"/>
                 </a:solidFill>

--- a/documentation/for_collaborators/AnalysisOverview.pptx
+++ b/documentation/for_collaborators/AnalysisOverview.pptx
@@ -12,23 +12,23 @@
   </p:handoutMasterIdLst>
   <p:sldIdLst>
     <p:sldId id="256" r:id="rId2"/>
-    <p:sldId id="275" r:id="rId3"/>
-    <p:sldId id="257" r:id="rId4"/>
-    <p:sldId id="258" r:id="rId5"/>
-    <p:sldId id="259" r:id="rId6"/>
-    <p:sldId id="262" r:id="rId7"/>
-    <p:sldId id="276" r:id="rId8"/>
-    <p:sldId id="277" r:id="rId9"/>
-    <p:sldId id="278" r:id="rId10"/>
-    <p:sldId id="265" r:id="rId11"/>
-    <p:sldId id="284" r:id="rId12"/>
-    <p:sldId id="269" r:id="rId13"/>
-    <p:sldId id="271" r:id="rId14"/>
-    <p:sldId id="274" r:id="rId15"/>
+    <p:sldId id="284" r:id="rId3"/>
+    <p:sldId id="269" r:id="rId4"/>
+    <p:sldId id="274" r:id="rId5"/>
+    <p:sldId id="271" r:id="rId6"/>
+    <p:sldId id="275" r:id="rId7"/>
+    <p:sldId id="257" r:id="rId8"/>
+    <p:sldId id="258" r:id="rId9"/>
+    <p:sldId id="259" r:id="rId10"/>
+    <p:sldId id="262" r:id="rId11"/>
+    <p:sldId id="276" r:id="rId12"/>
+    <p:sldId id="277" r:id="rId13"/>
+    <p:sldId id="278" r:id="rId14"/>
+    <p:sldId id="265" r:id="rId15"/>
     <p:sldId id="266" r:id="rId16"/>
-    <p:sldId id="268" r:id="rId17"/>
-    <p:sldId id="280" r:id="rId18"/>
-    <p:sldId id="281" r:id="rId19"/>
+    <p:sldId id="280" r:id="rId17"/>
+    <p:sldId id="281" r:id="rId18"/>
+    <p:sldId id="268" r:id="rId19"/>
     <p:sldId id="282" r:id="rId20"/>
     <p:sldId id="283" r:id="rId21"/>
   </p:sldIdLst>
@@ -130,6 +130,46 @@
     </a:lvl9pPr>
   </p:defaultTextStyle>
   <p:extLst>
+    <p:ext uri="{521415D9-36F7-43E2-AB2F-B90AF26B5E84}">
+      <p14:sectionLst xmlns:p14="http://schemas.microsoft.com/office/powerpoint/2010/main">
+        <p14:section name="Intro" id="{58868C31-AF05-FA43-9F2B-14E462FA2511}">
+          <p14:sldIdLst>
+            <p14:sldId id="256"/>
+          </p14:sldIdLst>
+        </p14:section>
+        <p14:section name="Change-Impact Analysis" id="{F60ED532-C5C2-3543-9961-BFB43030A630}">
+          <p14:sldIdLst>
+            <p14:sldId id="284"/>
+            <p14:sldId id="269"/>
+            <p14:sldId id="274"/>
+            <p14:sldId id="271"/>
+          </p14:sldIdLst>
+        </p14:section>
+        <p14:section name="Combinatorial Testing" id="{E8D23FAB-DC86-6847-BB21-3D254C80F20B}">
+          <p14:sldIdLst>
+            <p14:sldId id="275"/>
+            <p14:sldId id="257"/>
+            <p14:sldId id="258"/>
+            <p14:sldId id="259"/>
+            <p14:sldId id="262"/>
+            <p14:sldId id="276"/>
+            <p14:sldId id="277"/>
+            <p14:sldId id="278"/>
+            <p14:sldId id="265"/>
+          </p14:sldIdLst>
+        </p14:section>
+        <p14:section name="Change Detection Analysis" id="{F4CB8B9B-3F14-B44C-98CD-83837120112F}">
+          <p14:sldIdLst>
+            <p14:sldId id="266"/>
+            <p14:sldId id="280"/>
+            <p14:sldId id="281"/>
+            <p14:sldId id="268"/>
+            <p14:sldId id="282"/>
+            <p14:sldId id="283"/>
+          </p14:sldIdLst>
+        </p14:section>
+      </p14:sectionLst>
+    </p:ext>
     <p:ext uri="{EFAFB233-063F-42B5-8137-9DF3F51BA10A}">
       <p15:sldGuideLst xmlns:p15="http://schemas.microsoft.com/office/powerpoint/2012/main"/>
     </p:ext>
@@ -151,7 +191,7 @@
       <pc:sldMk xmlns:pc="http://schemas.microsoft.com/office/powerpoint/2013/main/command" cId="0" sldId="262"/>
       <ac:spMk id="3" creationId="{3F589F92-B484-4E15-0CDC-FFD075A2A74E}"/>
       <ac:txMk cp="41" len="3">
-        <ac:context len="147" hash="1310068719"/>
+        <ac:context len="148" hash="802315166"/>
       </ac:txMk>
     </ac:txMkLst>
     <p188:pos x="2899601" y="1264200"/>
@@ -194,7 +234,7 @@
       <pc:sldMk xmlns:pc="http://schemas.microsoft.com/office/powerpoint/2013/main/command" cId="0" sldId="265"/>
       <ac:spMk id="3" creationId="{C9367797-CD5B-309B-985B-DF6091246510}"/>
       <ac:txMk cp="297" len="4">
-        <ac:context len="651" hash="2079769833"/>
+        <ac:context len="652" hash="196227196"/>
       </ac:txMk>
     </ac:txMkLst>
     <p188:pos x="2747202" y="2605320"/>
@@ -220,7 +260,7 @@
       <pc:sldMk xmlns:pc="http://schemas.microsoft.com/office/powerpoint/2013/main/command" cId="2353400714" sldId="276"/>
       <ac:spMk id="3" creationId="{5CF707B8-09A9-A28B-36FE-7651ACC03308}"/>
       <ac:txMk cp="17" len="5">
-        <ac:context len="212" hash="3724621750"/>
+        <ac:context len="213" hash="1652090085"/>
       </ac:txMk>
     </ac:txMkLst>
     <p188:pos x="3041841" y="370120"/>
@@ -246,7 +286,7 @@
       <pc:sldMk xmlns:pc="http://schemas.microsoft.com/office/powerpoint/2013/main/command" cId="3165592934" sldId="277"/>
       <ac:spMk id="3" creationId="{56064C14-1601-F022-7F3D-615176F6A82B}"/>
       <ac:txMk cp="17" len="6">
-        <ac:context len="213" hash="2402704641"/>
+        <ac:context len="214" hash="978498448"/>
       </ac:txMk>
     </ac:txMkLst>
     <p188:pos x="3194241" y="370120"/>
@@ -272,7 +312,7 @@
       <pc:sldMk xmlns:pc="http://schemas.microsoft.com/office/powerpoint/2013/main/command" cId="3954683613" sldId="278"/>
       <ac:spMk id="3" creationId="{31720598-1CB0-E7F3-3417-23A2488D52ED}"/>
       <ac:txMk cp="17" len="7">
-        <ac:context len="214" hash="2875817967"/>
+        <ac:context len="215" hash="3706336318"/>
       </ac:txMk>
     </ac:txMkLst>
     <p188:pos x="3346641" y="370120"/>
@@ -1264,7 +1304,7 @@
           <a:p>
             <a:pPr lvl="0"/>
             <a:fld id="{805BC73B-1373-A04C-9AEE-DE1873EAA8E9}" type="slidenum">
-              <a:t>16</a:t>
+              <a:t>18</a:t>
             </a:fld>
             <a:endParaRPr lang="en-US"/>
           </a:p>
@@ -1365,7 +1405,7 @@
           <p:cNvPr id="7" name="Slide Number Placeholder 6">
             <a:extLst>
               <a:ext uri="{FF2B5EF4-FFF2-40B4-BE49-F238E27FC236}">
-                <a16:creationId xmlns:a16="http://schemas.microsoft.com/office/drawing/2014/main" id="{87246C39-F7EF-C8F6-A5F2-4737A9FF5BEA}"/>
+                <a16:creationId xmlns:a16="http://schemas.microsoft.com/office/drawing/2014/main" id="{E97E3ACB-D483-72B5-FBDE-06C6B73919A3}"/>
               </a:ext>
             </a:extLst>
           </p:cNvPr>
@@ -1386,7 +1426,7 @@
           <a:lstStyle/>
           <a:p>
             <a:pPr lvl="0"/>
-            <a:fld id="{74B2BE70-CC58-924D-BB02-AD4AA9B63134}" type="slidenum">
+            <a:fld id="{D37FEB87-33B9-194E-AD80-2EA93F043D18}" type="slidenum">
               <a:t>3</a:t>
             </a:fld>
             <a:endParaRPr lang="en-US"/>
@@ -1398,7 +1438,7 @@
           <p:cNvPr id="2" name="Slide Image Placeholder 1">
             <a:extLst>
               <a:ext uri="{FF2B5EF4-FFF2-40B4-BE49-F238E27FC236}">
-                <a16:creationId xmlns:a16="http://schemas.microsoft.com/office/drawing/2014/main" id="{30B6807E-27CC-5290-EEEE-21C87A02E8D7}"/>
+                <a16:creationId xmlns:a16="http://schemas.microsoft.com/office/drawing/2014/main" id="{C8BE4815-1680-9CB1-FD4C-157B2D1CD47D}"/>
               </a:ext>
             </a:extLst>
           </p:cNvPr>
@@ -1430,7 +1470,7 @@
           <p:cNvPr id="3" name="Notes Placeholder 2">
             <a:extLst>
               <a:ext uri="{FF2B5EF4-FFF2-40B4-BE49-F238E27FC236}">
-                <a16:creationId xmlns:a16="http://schemas.microsoft.com/office/drawing/2014/main" id="{18DC66CC-FF2B-6A27-39EA-AE194A008AB9}"/>
+                <a16:creationId xmlns:a16="http://schemas.microsoft.com/office/drawing/2014/main" id="{0FC151F7-BD15-9170-E590-B75070D0D838}"/>
               </a:ext>
             </a:extLst>
           </p:cNvPr>
@@ -1466,7 +1506,13 @@
   <p:cSld>
     <p:spTree>
       <p:nvGrpSpPr>
-        <p:cNvPr id="1" name=""/>
+        <p:cNvPr id="1" name="">
+          <a:extLst>
+            <a:ext uri="{FF2B5EF4-FFF2-40B4-BE49-F238E27FC236}">
+              <a16:creationId xmlns:a16="http://schemas.microsoft.com/office/drawing/2014/main" id="{C9E1173D-AA60-4AEB-6644-DE4BCA20136C}"/>
+            </a:ext>
+          </a:extLst>
+        </p:cNvPr>
         <p:cNvGrpSpPr/>
         <p:nvPr/>
       </p:nvGrpSpPr>
@@ -1483,7 +1529,7 @@
           <p:cNvPr id="7" name="Slide Number Placeholder 6">
             <a:extLst>
               <a:ext uri="{FF2B5EF4-FFF2-40B4-BE49-F238E27FC236}">
-                <a16:creationId xmlns:a16="http://schemas.microsoft.com/office/drawing/2014/main" id="{8F566B37-0908-2EE3-EEBB-987402C98D9C}"/>
+                <a16:creationId xmlns:a16="http://schemas.microsoft.com/office/drawing/2014/main" id="{D3D3B8F1-959C-B12A-0AE9-BE4F5241B61D}"/>
               </a:ext>
             </a:extLst>
           </p:cNvPr>
@@ -1504,7 +1550,7 @@
           <a:lstStyle/>
           <a:p>
             <a:pPr lvl="0"/>
-            <a:fld id="{46DC6A57-27CA-2945-BA58-25741BFA1969}" type="slidenum">
+            <a:fld id="{2B0E6C16-0556-494D-BECC-21D8D6E18886}" type="slidenum">
               <a:t>4</a:t>
             </a:fld>
             <a:endParaRPr lang="en-US"/>
@@ -1516,7 +1562,7 @@
           <p:cNvPr id="2" name="Slide Image Placeholder 1">
             <a:extLst>
               <a:ext uri="{FF2B5EF4-FFF2-40B4-BE49-F238E27FC236}">
-                <a16:creationId xmlns:a16="http://schemas.microsoft.com/office/drawing/2014/main" id="{7622ED5D-A6F3-B88C-C442-646AB8485103}"/>
+                <a16:creationId xmlns:a16="http://schemas.microsoft.com/office/drawing/2014/main" id="{8225B9E7-F817-BC08-5681-F53BE5AE55D9}"/>
               </a:ext>
             </a:extLst>
           </p:cNvPr>
@@ -1548,7 +1594,7 @@
           <p:cNvPr id="3" name="Notes Placeholder 2">
             <a:extLst>
               <a:ext uri="{FF2B5EF4-FFF2-40B4-BE49-F238E27FC236}">
-                <a16:creationId xmlns:a16="http://schemas.microsoft.com/office/drawing/2014/main" id="{D3E5210D-1007-26F9-72F8-BB536ADCDCE6}"/>
+                <a16:creationId xmlns:a16="http://schemas.microsoft.com/office/drawing/2014/main" id="{03D934EA-B162-B1A2-2EE0-9E14FEF400CD}"/>
               </a:ext>
             </a:extLst>
           </p:cNvPr>
@@ -1572,6 +1618,11 @@
         </p:txBody>
       </p:sp>
     </p:spTree>
+    <p:extLst>
+      <p:ext uri="{BB962C8B-B14F-4D97-AF65-F5344CB8AC3E}">
+        <p14:creationId xmlns:p14="http://schemas.microsoft.com/office/powerpoint/2010/main" val="3297424757"/>
+      </p:ext>
+    </p:extLst>
   </p:cSld>
   <p:clrMapOvr>
     <a:masterClrMapping/>
@@ -1601,7 +1652,7 @@
           <p:cNvPr id="7" name="Slide Number Placeholder 6">
             <a:extLst>
               <a:ext uri="{FF2B5EF4-FFF2-40B4-BE49-F238E27FC236}">
-                <a16:creationId xmlns:a16="http://schemas.microsoft.com/office/drawing/2014/main" id="{540BB736-270A-5617-ED56-90CFB5654E66}"/>
+                <a16:creationId xmlns:a16="http://schemas.microsoft.com/office/drawing/2014/main" id="{086CABF4-8EE6-FB4C-1190-D6538499F54A}"/>
               </a:ext>
             </a:extLst>
           </p:cNvPr>
@@ -1622,7 +1673,7 @@
           <a:lstStyle/>
           <a:p>
             <a:pPr lvl="0"/>
-            <a:fld id="{FE90A4ED-5FD0-B044-8E31-F6C0BAFF2FAB}" type="slidenum">
+            <a:fld id="{2F2A8F5F-D570-7943-BC26-CE189838C058}" type="slidenum">
               <a:t>5</a:t>
             </a:fld>
             <a:endParaRPr lang="en-US"/>
@@ -1634,7 +1685,7 @@
           <p:cNvPr id="2" name="Slide Image Placeholder 1">
             <a:extLst>
               <a:ext uri="{FF2B5EF4-FFF2-40B4-BE49-F238E27FC236}">
-                <a16:creationId xmlns:a16="http://schemas.microsoft.com/office/drawing/2014/main" id="{68D84902-6734-20C1-0323-4213F13F12B1}"/>
+                <a16:creationId xmlns:a16="http://schemas.microsoft.com/office/drawing/2014/main" id="{0705804A-2E38-13E8-0E3B-093387BC9070}"/>
               </a:ext>
             </a:extLst>
           </p:cNvPr>
@@ -1666,7 +1717,7 @@
           <p:cNvPr id="3" name="Notes Placeholder 2">
             <a:extLst>
               <a:ext uri="{FF2B5EF4-FFF2-40B4-BE49-F238E27FC236}">
-                <a16:creationId xmlns:a16="http://schemas.microsoft.com/office/drawing/2014/main" id="{02720450-8312-156D-E8CB-F3019597C58F}"/>
+                <a16:creationId xmlns:a16="http://schemas.microsoft.com/office/drawing/2014/main" id="{65025C25-8073-C251-4130-4E8A6F9B2003}"/>
               </a:ext>
             </a:extLst>
           </p:cNvPr>
@@ -1719,7 +1770,7 @@
           <p:cNvPr id="7" name="Slide Number Placeholder 6">
             <a:extLst>
               <a:ext uri="{FF2B5EF4-FFF2-40B4-BE49-F238E27FC236}">
-                <a16:creationId xmlns:a16="http://schemas.microsoft.com/office/drawing/2014/main" id="{C61522D3-D471-6654-5647-49B4C7B57F13}"/>
+                <a16:creationId xmlns:a16="http://schemas.microsoft.com/office/drawing/2014/main" id="{87246C39-F7EF-C8F6-A5F2-4737A9FF5BEA}"/>
               </a:ext>
             </a:extLst>
           </p:cNvPr>
@@ -1740,8 +1791,8 @@
           <a:lstStyle/>
           <a:p>
             <a:pPr lvl="0"/>
-            <a:fld id="{30A5194F-B1BB-9D4C-AE76-7B3B08E77197}" type="slidenum">
-              <a:t>6</a:t>
+            <a:fld id="{74B2BE70-CC58-924D-BB02-AD4AA9B63134}" type="slidenum">
+              <a:t>7</a:t>
             </a:fld>
             <a:endParaRPr lang="en-US"/>
           </a:p>
@@ -1752,7 +1803,7 @@
           <p:cNvPr id="2" name="Slide Image Placeholder 1">
             <a:extLst>
               <a:ext uri="{FF2B5EF4-FFF2-40B4-BE49-F238E27FC236}">
-                <a16:creationId xmlns:a16="http://schemas.microsoft.com/office/drawing/2014/main" id="{CD5122A9-AAF5-017F-2713-8D6736D1658F}"/>
+                <a16:creationId xmlns:a16="http://schemas.microsoft.com/office/drawing/2014/main" id="{30B6807E-27CC-5290-EEEE-21C87A02E8D7}"/>
               </a:ext>
             </a:extLst>
           </p:cNvPr>
@@ -1784,7 +1835,7 @@
           <p:cNvPr id="3" name="Notes Placeholder 2">
             <a:extLst>
               <a:ext uri="{FF2B5EF4-FFF2-40B4-BE49-F238E27FC236}">
-                <a16:creationId xmlns:a16="http://schemas.microsoft.com/office/drawing/2014/main" id="{BB2F8224-C160-9DAC-0CE9-C8590AB34774}"/>
+                <a16:creationId xmlns:a16="http://schemas.microsoft.com/office/drawing/2014/main" id="{18DC66CC-FF2B-6A27-39EA-AE194A008AB9}"/>
               </a:ext>
             </a:extLst>
           </p:cNvPr>
@@ -1837,7 +1888,7 @@
           <p:cNvPr id="7" name="Slide Number Placeholder 6">
             <a:extLst>
               <a:ext uri="{FF2B5EF4-FFF2-40B4-BE49-F238E27FC236}">
-                <a16:creationId xmlns:a16="http://schemas.microsoft.com/office/drawing/2014/main" id="{809DFAEF-D49A-EDEF-37EA-BF8CA8BAEB34}"/>
+                <a16:creationId xmlns:a16="http://schemas.microsoft.com/office/drawing/2014/main" id="{8F566B37-0908-2EE3-EEBB-987402C98D9C}"/>
               </a:ext>
             </a:extLst>
           </p:cNvPr>
@@ -1858,8 +1909,8 @@
           <a:lstStyle/>
           <a:p>
             <a:pPr lvl="0"/>
-            <a:fld id="{18702C2E-8935-084B-8A6A-C1C4FB937928}" type="slidenum">
-              <a:t>10</a:t>
+            <a:fld id="{46DC6A57-27CA-2945-BA58-25741BFA1969}" type="slidenum">
+              <a:t>8</a:t>
             </a:fld>
             <a:endParaRPr lang="en-US"/>
           </a:p>
@@ -1870,7 +1921,7 @@
           <p:cNvPr id="2" name="Slide Image Placeholder 1">
             <a:extLst>
               <a:ext uri="{FF2B5EF4-FFF2-40B4-BE49-F238E27FC236}">
-                <a16:creationId xmlns:a16="http://schemas.microsoft.com/office/drawing/2014/main" id="{6912D205-377A-A92C-1183-B406480DC954}"/>
+                <a16:creationId xmlns:a16="http://schemas.microsoft.com/office/drawing/2014/main" id="{7622ED5D-A6F3-B88C-C442-646AB8485103}"/>
               </a:ext>
             </a:extLst>
           </p:cNvPr>
@@ -1902,7 +1953,7 @@
           <p:cNvPr id="3" name="Notes Placeholder 2">
             <a:extLst>
               <a:ext uri="{FF2B5EF4-FFF2-40B4-BE49-F238E27FC236}">
-                <a16:creationId xmlns:a16="http://schemas.microsoft.com/office/drawing/2014/main" id="{316F2BDE-8A06-022A-339A-A9CBAD27BFAA}"/>
+                <a16:creationId xmlns:a16="http://schemas.microsoft.com/office/drawing/2014/main" id="{D3E5210D-1007-26F9-72F8-BB536ADCDCE6}"/>
               </a:ext>
             </a:extLst>
           </p:cNvPr>
@@ -1955,7 +2006,7 @@
           <p:cNvPr id="7" name="Slide Number Placeholder 6">
             <a:extLst>
               <a:ext uri="{FF2B5EF4-FFF2-40B4-BE49-F238E27FC236}">
-                <a16:creationId xmlns:a16="http://schemas.microsoft.com/office/drawing/2014/main" id="{E97E3ACB-D483-72B5-FBDE-06C6B73919A3}"/>
+                <a16:creationId xmlns:a16="http://schemas.microsoft.com/office/drawing/2014/main" id="{540BB736-270A-5617-ED56-90CFB5654E66}"/>
               </a:ext>
             </a:extLst>
           </p:cNvPr>
@@ -1976,8 +2027,8 @@
           <a:lstStyle/>
           <a:p>
             <a:pPr lvl="0"/>
-            <a:fld id="{D37FEB87-33B9-194E-AD80-2EA93F043D18}" type="slidenum">
-              <a:t>12</a:t>
+            <a:fld id="{FE90A4ED-5FD0-B044-8E31-F6C0BAFF2FAB}" type="slidenum">
+              <a:t>9</a:t>
             </a:fld>
             <a:endParaRPr lang="en-US"/>
           </a:p>
@@ -1988,7 +2039,7 @@
           <p:cNvPr id="2" name="Slide Image Placeholder 1">
             <a:extLst>
               <a:ext uri="{FF2B5EF4-FFF2-40B4-BE49-F238E27FC236}">
-                <a16:creationId xmlns:a16="http://schemas.microsoft.com/office/drawing/2014/main" id="{C8BE4815-1680-9CB1-FD4C-157B2D1CD47D}"/>
+                <a16:creationId xmlns:a16="http://schemas.microsoft.com/office/drawing/2014/main" id="{68D84902-6734-20C1-0323-4213F13F12B1}"/>
               </a:ext>
             </a:extLst>
           </p:cNvPr>
@@ -2020,7 +2071,7 @@
           <p:cNvPr id="3" name="Notes Placeholder 2">
             <a:extLst>
               <a:ext uri="{FF2B5EF4-FFF2-40B4-BE49-F238E27FC236}">
-                <a16:creationId xmlns:a16="http://schemas.microsoft.com/office/drawing/2014/main" id="{0FC151F7-BD15-9170-E590-B75070D0D838}"/>
+                <a16:creationId xmlns:a16="http://schemas.microsoft.com/office/drawing/2014/main" id="{02720450-8312-156D-E8CB-F3019597C58F}"/>
               </a:ext>
             </a:extLst>
           </p:cNvPr>
@@ -2073,7 +2124,7 @@
           <p:cNvPr id="7" name="Slide Number Placeholder 6">
             <a:extLst>
               <a:ext uri="{FF2B5EF4-FFF2-40B4-BE49-F238E27FC236}">
-                <a16:creationId xmlns:a16="http://schemas.microsoft.com/office/drawing/2014/main" id="{086CABF4-8EE6-FB4C-1190-D6538499F54A}"/>
+                <a16:creationId xmlns:a16="http://schemas.microsoft.com/office/drawing/2014/main" id="{C61522D3-D471-6654-5647-49B4C7B57F13}"/>
               </a:ext>
             </a:extLst>
           </p:cNvPr>
@@ -2094,8 +2145,8 @@
           <a:lstStyle/>
           <a:p>
             <a:pPr lvl="0"/>
-            <a:fld id="{2F2A8F5F-D570-7943-BC26-CE189838C058}" type="slidenum">
-              <a:t>13</a:t>
+            <a:fld id="{30A5194F-B1BB-9D4C-AE76-7B3B08E77197}" type="slidenum">
+              <a:t>10</a:t>
             </a:fld>
             <a:endParaRPr lang="en-US"/>
           </a:p>
@@ -2106,7 +2157,7 @@
           <p:cNvPr id="2" name="Slide Image Placeholder 1">
             <a:extLst>
               <a:ext uri="{FF2B5EF4-FFF2-40B4-BE49-F238E27FC236}">
-                <a16:creationId xmlns:a16="http://schemas.microsoft.com/office/drawing/2014/main" id="{0705804A-2E38-13E8-0E3B-093387BC9070}"/>
+                <a16:creationId xmlns:a16="http://schemas.microsoft.com/office/drawing/2014/main" id="{CD5122A9-AAF5-017F-2713-8D6736D1658F}"/>
               </a:ext>
             </a:extLst>
           </p:cNvPr>
@@ -2138,7 +2189,7 @@
           <p:cNvPr id="3" name="Notes Placeholder 2">
             <a:extLst>
               <a:ext uri="{FF2B5EF4-FFF2-40B4-BE49-F238E27FC236}">
-                <a16:creationId xmlns:a16="http://schemas.microsoft.com/office/drawing/2014/main" id="{65025C25-8073-C251-4130-4E8A6F9B2003}"/>
+                <a16:creationId xmlns:a16="http://schemas.microsoft.com/office/drawing/2014/main" id="{BB2F8224-C160-9DAC-0CE9-C8590AB34774}"/>
               </a:ext>
             </a:extLst>
           </p:cNvPr>
@@ -2174,13 +2225,7 @@
   <p:cSld>
     <p:spTree>
       <p:nvGrpSpPr>
-        <p:cNvPr id="1" name="">
-          <a:extLst>
-            <a:ext uri="{FF2B5EF4-FFF2-40B4-BE49-F238E27FC236}">
-              <a16:creationId xmlns:a16="http://schemas.microsoft.com/office/drawing/2014/main" id="{C9E1173D-AA60-4AEB-6644-DE4BCA20136C}"/>
-            </a:ext>
-          </a:extLst>
-        </p:cNvPr>
+        <p:cNvPr id="1" name=""/>
         <p:cNvGrpSpPr/>
         <p:nvPr/>
       </p:nvGrpSpPr>
@@ -2197,7 +2242,7 @@
           <p:cNvPr id="7" name="Slide Number Placeholder 6">
             <a:extLst>
               <a:ext uri="{FF2B5EF4-FFF2-40B4-BE49-F238E27FC236}">
-                <a16:creationId xmlns:a16="http://schemas.microsoft.com/office/drawing/2014/main" id="{D3D3B8F1-959C-B12A-0AE9-BE4F5241B61D}"/>
+                <a16:creationId xmlns:a16="http://schemas.microsoft.com/office/drawing/2014/main" id="{809DFAEF-D49A-EDEF-37EA-BF8CA8BAEB34}"/>
               </a:ext>
             </a:extLst>
           </p:cNvPr>
@@ -2218,7 +2263,7 @@
           <a:lstStyle/>
           <a:p>
             <a:pPr lvl="0"/>
-            <a:fld id="{2B0E6C16-0556-494D-BECC-21D8D6E18886}" type="slidenum">
+            <a:fld id="{18702C2E-8935-084B-8A6A-C1C4FB937928}" type="slidenum">
               <a:t>14</a:t>
             </a:fld>
             <a:endParaRPr lang="en-US"/>
@@ -2230,7 +2275,7 @@
           <p:cNvPr id="2" name="Slide Image Placeholder 1">
             <a:extLst>
               <a:ext uri="{FF2B5EF4-FFF2-40B4-BE49-F238E27FC236}">
-                <a16:creationId xmlns:a16="http://schemas.microsoft.com/office/drawing/2014/main" id="{8225B9E7-F817-BC08-5681-F53BE5AE55D9}"/>
+                <a16:creationId xmlns:a16="http://schemas.microsoft.com/office/drawing/2014/main" id="{6912D205-377A-A92C-1183-B406480DC954}"/>
               </a:ext>
             </a:extLst>
           </p:cNvPr>
@@ -2262,7 +2307,7 @@
           <p:cNvPr id="3" name="Notes Placeholder 2">
             <a:extLst>
               <a:ext uri="{FF2B5EF4-FFF2-40B4-BE49-F238E27FC236}">
-                <a16:creationId xmlns:a16="http://schemas.microsoft.com/office/drawing/2014/main" id="{03D934EA-B162-B1A2-2EE0-9E14FEF400CD}"/>
+                <a16:creationId xmlns:a16="http://schemas.microsoft.com/office/drawing/2014/main" id="{316F2BDE-8A06-022A-339A-A9CBAD27BFAA}"/>
               </a:ext>
             </a:extLst>
           </p:cNvPr>
@@ -2286,11 +2331,6 @@
         </p:txBody>
       </p:sp>
     </p:spTree>
-    <p:extLst>
-      <p:ext uri="{BB962C8B-B14F-4D97-AF65-F5344CB8AC3E}">
-        <p14:creationId xmlns:p14="http://schemas.microsoft.com/office/powerpoint/2010/main" val="3297424757"/>
-      </p:ext>
-    </p:extLst>
   </p:cSld>
   <p:clrMapOvr>
     <a:masterClrMapping/>
@@ -5611,7 +5651,7 @@
                 </a:solidFill>
                 <a:latin typeface="Liberation Mono" pitchFamily="49"/>
               </a:rPr>
-              <a:t>Combinatorial &amp; Change-Impact Analysis</a:t>
+              <a:t>Change-Impact Analysis &amp; Combinatorial Testing</a:t>
             </a:r>
             <a:endParaRPr lang="en-US" dirty="0">
               <a:solidFill>
@@ -5639,7 +5679,7 @@
         </p:nvSpPr>
         <p:spPr>
           <a:xfrm>
-            <a:off x="503999" y="2833920"/>
+            <a:off x="503999" y="2973260"/>
             <a:ext cx="9071640" cy="271800"/>
           </a:xfrm>
         </p:spPr>
@@ -5672,7 +5712,7 @@
 
 <file path=ppt/slides/slide10.xml><?xml version="1.0" encoding="utf-8"?>
 <p:sld xmlns:a="http://schemas.openxmlformats.org/drawingml/2006/main" xmlns:r="http://schemas.openxmlformats.org/officeDocument/2006/relationships" xmlns:p="http://schemas.openxmlformats.org/presentationml/2006/main">
-  <p:cSld name="page10">
+  <p:cSld name="page7">
     <p:spTree>
       <p:nvGrpSpPr>
         <p:cNvPr id="1" name=""/>
@@ -5692,7 +5732,7 @@
           <p:cNvPr id="2" name="Title 1">
             <a:extLst>
               <a:ext uri="{FF2B5EF4-FFF2-40B4-BE49-F238E27FC236}">
-                <a16:creationId xmlns:a16="http://schemas.microsoft.com/office/drawing/2014/main" id="{96CB14EF-3B5C-5292-14CB-3720F1B94FC4}"/>
+                <a16:creationId xmlns:a16="http://schemas.microsoft.com/office/drawing/2014/main" id="{44B3FCDA-4EC5-B19D-5009-23CEC9F74198}"/>
               </a:ext>
             </a:extLst>
           </p:cNvPr>
@@ -5706,11 +5746,11 @@
         <p:spPr>
           <a:xfrm>
             <a:off x="503999" y="422301"/>
-            <a:ext cx="9071640" cy="553998"/>
+            <a:ext cx="3346641" cy="553998"/>
           </a:xfrm>
         </p:spPr>
         <p:txBody>
-          <a:bodyPr>
+          <a:bodyPr wrap="square">
             <a:spAutoFit/>
           </a:bodyPr>
           <a:lstStyle/>
@@ -5722,7 +5762,7 @@
                   <a:schemeClr val="bg1"/>
                 </a:solidFill>
               </a:rPr>
-              <a:t>Results</a:t>
+              <a:t>DOI 2 Results</a:t>
             </a:r>
           </a:p>
         </p:txBody>
@@ -5732,7 +5772,7 @@
           <p:cNvPr id="3" name="Text Placeholder 2">
             <a:extLst>
               <a:ext uri="{FF2B5EF4-FFF2-40B4-BE49-F238E27FC236}">
-                <a16:creationId xmlns:a16="http://schemas.microsoft.com/office/drawing/2014/main" id="{C9367797-CD5B-309B-985B-DF6091246510}"/>
+                <a16:creationId xmlns:a16="http://schemas.microsoft.com/office/drawing/2014/main" id="{3F589F92-B484-4E15-0CDC-FFD075A2A74E}"/>
               </a:ext>
             </a:extLst>
           </p:cNvPr>
@@ -5745,13 +5785,13 @@
         </p:nvSpPr>
         <p:spPr>
           <a:xfrm>
-            <a:off x="503998" y="1326600"/>
-            <a:ext cx="9071639" cy="3921649"/>
+            <a:off x="503999" y="1326600"/>
+            <a:ext cx="3346641" cy="3288239"/>
           </a:xfrm>
         </p:spPr>
         <p:txBody>
           <a:bodyPr>
-            <a:normAutofit fontScale="92500" lnSpcReduction="10000"/>
+            <a:normAutofit/>
           </a:bodyPr>
           <a:lstStyle/>
           <a:p>
@@ -5761,97 +5801,9 @@
                 <a:solidFill>
                   <a:schemeClr val="bg1"/>
                 </a:solidFill>
-              </a:rPr>
-              <a:t>Our test cases originally had invalid values for constants, causing crashes. </a:t>
-            </a:r>
-          </a:p>
-          <a:p>
-            <a:pPr marL="342900" indent="-342900"/>
-            <a:r>
-              <a:rPr lang="en-US" dirty="0">
-                <a:solidFill>
-                  <a:schemeClr val="bg1"/>
-                </a:solidFill>
-              </a:rPr>
-              <a:t>Some checks were interpreted incorrectly by us and had to be fixed. </a:t>
-            </a:r>
-          </a:p>
-          <a:p>
-            <a:pPr marL="342900" indent="-342900"/>
-            <a:r>
-              <a:rPr lang="en-US" dirty="0">
-                <a:solidFill>
-                  <a:schemeClr val="bg1"/>
-                </a:solidFill>
-              </a:rPr>
-              <a:t>Tests checking for things other than non-finite values had to ignore non-finite values, otherwise they’d fail and output an inaccurate error message.</a:t>
-            </a:r>
-          </a:p>
-          <a:p>
-            <a:pPr marL="342900" indent="-342900"/>
-            <a:r>
-              <a:rPr lang="en-US" i="1" dirty="0">
-                <a:solidFill>
-                  <a:schemeClr val="bg1"/>
-                </a:solidFill>
-              </a:rPr>
-              <a:t>SPEL </a:t>
-            </a:r>
-            <a:r>
-              <a:rPr lang="en-US" dirty="0">
-                <a:solidFill>
-                  <a:schemeClr val="bg1"/>
-                </a:solidFill>
-              </a:rPr>
-              <a:t>might be initializing data with nan values that </a:t>
-            </a:r>
-            <a:r>
-              <a:rPr lang="en-US" dirty="0" err="1">
-                <a:solidFill>
-                  <a:schemeClr val="bg1"/>
-                </a:solidFill>
-              </a:rPr>
-              <a:t>LakeTemperature</a:t>
-            </a:r>
-            <a:r>
-              <a:rPr lang="en-US" dirty="0">
-                <a:solidFill>
-                  <a:schemeClr val="bg1"/>
-                </a:solidFill>
-              </a:rPr>
-              <a:t> then never overwrites or </a:t>
-            </a:r>
-            <a:r>
-              <a:rPr lang="en-US" dirty="0" err="1">
-                <a:solidFill>
-                  <a:schemeClr val="bg1"/>
-                </a:solidFill>
-              </a:rPr>
-              <a:t>LakeTemperature</a:t>
-            </a:r>
-            <a:r>
-              <a:rPr lang="en-US" dirty="0">
-                <a:solidFill>
-                  <a:schemeClr val="bg1"/>
-                </a:solidFill>
-              </a:rPr>
-              <a:t> might be outputting data with nan values. </a:t>
-            </a:r>
-            <a:endParaRPr lang="en-US" i="1" dirty="0">
-              <a:solidFill>
-                <a:schemeClr val="bg1"/>
-              </a:solidFill>
-            </a:endParaRPr>
-          </a:p>
-          <a:p>
-            <a:pPr marL="342900" indent="-342900"/>
-            <a:r>
-              <a:rPr lang="en-US" dirty="0">
-                <a:solidFill>
-                  <a:schemeClr val="bg1"/>
-                </a:solidFill>
-              </a:rPr>
-              <a:t>Largely, </a:t>
+                <a:latin typeface="AppleSystemUIFont" pitchFamily="2"/>
+              </a:rPr>
+              <a:t>Degree of Interaction (DOI) 2 results in 133 test cases when only changing the values of constants known to affect the outputs of </a:t>
             </a:r>
             <a:r>
               <a:rPr lang="en-US" dirty="0" err="1">
@@ -5868,12 +5820,43 @@
                 <a:solidFill>
                   <a:schemeClr val="bg1"/>
                 </a:solidFill>
-              </a:rPr>
-              <a:t> output data was valid and within physical bounds. However, edge cases resulted in some physically impossible output, likely due to combinations between a few model constants. </a:t>
-            </a:r>
-          </a:p>
-        </p:txBody>
-      </p:sp>
+                <a:latin typeface="AppleSystemUIFont" pitchFamily="2"/>
+              </a:rPr>
+              <a:t>. </a:t>
+            </a:r>
+          </a:p>
+        </p:txBody>
+      </p:sp>
+      <p:pic>
+        <p:nvPicPr>
+          <p:cNvPr id="5" name="Picture 4">
+            <a:extLst>
+              <a:ext uri="{FF2B5EF4-FFF2-40B4-BE49-F238E27FC236}">
+                <a16:creationId xmlns:a16="http://schemas.microsoft.com/office/drawing/2014/main" id="{15C94A79-243F-8D40-B5DA-BED8A49E8184}"/>
+              </a:ext>
+            </a:extLst>
+          </p:cNvPr>
+          <p:cNvPicPr>
+            <a:picLocks noChangeAspect="1"/>
+          </p:cNvPicPr>
+          <p:nvPr/>
+        </p:nvPicPr>
+        <p:blipFill>
+          <a:blip r:embed="rId4"/>
+          <a:stretch>
+            <a:fillRect/>
+          </a:stretch>
+        </p:blipFill>
+        <p:spPr>
+          <a:xfrm>
+            <a:off x="4114644" y="0"/>
+            <a:ext cx="6037257" cy="5670550"/>
+          </a:xfrm>
+          <a:prstGeom prst="rect">
+            <a:avLst/>
+          </a:prstGeom>
+        </p:spPr>
+      </p:pic>
     </p:spTree>
   </p:cSld>
   <p:clrMapOvr>
@@ -5909,7 +5892,7 @@
           <p:cNvPr id="2" name="Title 1">
             <a:extLst>
               <a:ext uri="{FF2B5EF4-FFF2-40B4-BE49-F238E27FC236}">
-                <a16:creationId xmlns:a16="http://schemas.microsoft.com/office/drawing/2014/main" id="{79070A95-7E8C-0828-88E3-001BBB4E331D}"/>
+                <a16:creationId xmlns:a16="http://schemas.microsoft.com/office/drawing/2014/main" id="{9DF1FC1F-B83D-D043-0A53-60E474E50EFB}"/>
               </a:ext>
             </a:extLst>
           </p:cNvPr>
@@ -5961,7 +5944,7 @@
                   <a:schemeClr val="bg1"/>
                 </a:solidFill>
               </a:rPr>
-              <a:t>Change-Impact Analysis</a:t>
+              <a:t>DOI 3 Results</a:t>
             </a:r>
           </a:p>
         </p:txBody>
@@ -5971,7 +5954,7 @@
           <p:cNvPr id="3" name="Text Placeholder 2">
             <a:extLst>
               <a:ext uri="{FF2B5EF4-FFF2-40B4-BE49-F238E27FC236}">
-                <a16:creationId xmlns:a16="http://schemas.microsoft.com/office/drawing/2014/main" id="{87EC0F28-AC2C-142C-EF6A-7F163D42DEC9}"/>
+                <a16:creationId xmlns:a16="http://schemas.microsoft.com/office/drawing/2014/main" id="{5CF707B8-09A9-A28B-36FE-7651ACC03308}"/>
               </a:ext>
             </a:extLst>
           </p:cNvPr>
@@ -5982,8 +5965,8 @@
         </p:nvSpPr>
         <p:spPr>
           <a:xfrm>
-            <a:off x="507959" y="1172520"/>
-            <a:ext cx="9071640" cy="3828239"/>
+            <a:off x="503999" y="1326600"/>
+            <a:ext cx="9071640" cy="3288239"/>
           </a:xfrm>
           <a:prstGeom prst="rect">
             <a:avLst/>
@@ -6217,8 +6200,40 @@
                 <a:solidFill>
                   <a:schemeClr val="bg1"/>
                 </a:solidFill>
-              </a:rPr>
-              <a:t>A method of visualizing the impact of changing a single model constant at a time on the model output. </a:t>
+                <a:latin typeface="AppleSystemUIFont" pitchFamily="2"/>
+              </a:rPr>
+              <a:t>DOI 3 results in 3,516 test cases when only changing the values of constants known to affect the outputs of </a:t>
+            </a:r>
+            <a:r>
+              <a:rPr lang="en-US" dirty="0" err="1">
+                <a:solidFill>
+                  <a:schemeClr val="bg1"/>
+                </a:solidFill>
+                <a:latin typeface="Courier New" panose="02070309020205020404" pitchFamily="49" charset="0"/>
+                <a:cs typeface="Courier New" panose="02070309020205020404" pitchFamily="49" charset="0"/>
+              </a:rPr>
+              <a:t>LakeTemperature</a:t>
+            </a:r>
+            <a:r>
+              <a:rPr lang="en-US" dirty="0">
+                <a:solidFill>
+                  <a:schemeClr val="bg1"/>
+                </a:solidFill>
+                <a:latin typeface="AppleSystemUIFont" pitchFamily="2"/>
+              </a:rPr>
+              <a:t>.</a:t>
+            </a:r>
+          </a:p>
+          <a:p>
+            <a:pPr marL="342900" indent="-342900"/>
+            <a:r>
+              <a:rPr lang="en-US" i="1" dirty="0">
+                <a:solidFill>
+                  <a:schemeClr val="bg1"/>
+                </a:solidFill>
+                <a:latin typeface="AppleSystemUIFont" pitchFamily="2"/>
+              </a:rPr>
+              <a:t>How many combinatorial test cases generated, executed, passed, skipped, failed, crashed</a:t>
             </a:r>
           </a:p>
         </p:txBody>
@@ -6226,19 +6241,24 @@
     </p:spTree>
     <p:extLst>
       <p:ext uri="{BB962C8B-B14F-4D97-AF65-F5344CB8AC3E}">
-        <p14:creationId xmlns:p14="http://schemas.microsoft.com/office/powerpoint/2010/main" val="2569724074"/>
+        <p14:creationId xmlns:p14="http://schemas.microsoft.com/office/powerpoint/2010/main" val="2353400714"/>
       </p:ext>
     </p:extLst>
   </p:cSld>
   <p:clrMapOvr>
     <a:masterClrMapping/>
   </p:clrMapOvr>
+  <p:extLst>
+    <p:ext uri="{6950BFC3-D8DA-4A85-94F7-54DA5524770B}">
+      <p188:commentRel xmlns:p188="http://schemas.microsoft.com/office/powerpoint/2018/8/main" r:id="rId2"/>
+    </p:ext>
+  </p:extLst>
 </p:sld>
 </file>
 
 <file path=ppt/slides/slide12.xml><?xml version="1.0" encoding="utf-8"?>
 <p:sld xmlns:a="http://schemas.openxmlformats.org/drawingml/2006/main" xmlns:r="http://schemas.openxmlformats.org/officeDocument/2006/relationships" xmlns:p="http://schemas.openxmlformats.org/presentationml/2006/main">
-  <p:cSld name="page14">
+  <p:cSld>
     <p:spTree>
       <p:nvGrpSpPr>
         <p:cNvPr id="1" name=""/>
@@ -6258,1105 +6278,7 @@
           <p:cNvPr id="2" name="Title 1">
             <a:extLst>
               <a:ext uri="{FF2B5EF4-FFF2-40B4-BE49-F238E27FC236}">
-                <a16:creationId xmlns:a16="http://schemas.microsoft.com/office/drawing/2014/main" id="{7213FEA8-EFA0-0ABF-B290-871B771B9A08}"/>
-              </a:ext>
-            </a:extLst>
-          </p:cNvPr>
-          <p:cNvSpPr txBox="1">
-            <a:spLocks noGrp="1"/>
-          </p:cNvSpPr>
-          <p:nvPr>
-            <p:ph type="title" idx="4294967295"/>
-          </p:nvPr>
-        </p:nvSpPr>
-        <p:spPr>
-          <a:xfrm>
-            <a:off x="503999" y="422301"/>
-            <a:ext cx="9071640" cy="553998"/>
-          </a:xfrm>
-        </p:spPr>
-        <p:txBody>
-          <a:bodyPr>
-            <a:spAutoFit/>
-          </a:bodyPr>
-          <a:lstStyle/>
-          <a:p>
-            <a:pPr lvl="0"/>
-            <a:r>
-              <a:rPr lang="en-US" dirty="0">
-                <a:solidFill>
-                  <a:schemeClr val="bg1"/>
-                </a:solidFill>
-              </a:rPr>
-              <a:t>Challenges</a:t>
-            </a:r>
-          </a:p>
-        </p:txBody>
-      </p:sp>
-      <p:sp>
-        <p:nvSpPr>
-          <p:cNvPr id="3" name="Text Placeholder 2">
-            <a:extLst>
-              <a:ext uri="{FF2B5EF4-FFF2-40B4-BE49-F238E27FC236}">
-                <a16:creationId xmlns:a16="http://schemas.microsoft.com/office/drawing/2014/main" id="{C220D056-3C9A-0F26-01B7-EC49552EA02A}"/>
-              </a:ext>
-            </a:extLst>
-          </p:cNvPr>
-          <p:cNvSpPr txBox="1">
-            <a:spLocks noGrp="1"/>
-          </p:cNvSpPr>
-          <p:nvPr>
-            <p:ph type="body" idx="4294967295"/>
-          </p:nvPr>
-        </p:nvSpPr>
-        <p:spPr>
-          <a:xfrm>
-            <a:off x="507959" y="1172520"/>
-            <a:ext cx="9071640" cy="3828239"/>
-          </a:xfrm>
-        </p:spPr>
-        <p:txBody>
-          <a:bodyPr/>
-          <a:lstStyle/>
-          <a:p>
-            <a:pPr marL="342900" indent="-342900"/>
-            <a:r>
-              <a:rPr lang="en-US" dirty="0">
-                <a:solidFill>
-                  <a:schemeClr val="bg1"/>
-                </a:solidFill>
-              </a:rPr>
-              <a:t>Most model constants effect multiple model outputs</a:t>
-            </a:r>
-          </a:p>
-          <a:p>
-            <a:pPr marL="342900" indent="-342900"/>
-            <a:r>
-              <a:rPr lang="en-US" dirty="0">
-                <a:solidFill>
-                  <a:schemeClr val="bg1"/>
-                </a:solidFill>
-              </a:rPr>
-              <a:t>Model output is multidimensional</a:t>
-            </a:r>
-          </a:p>
-          <a:p>
-            <a:pPr marL="342900" indent="-342900"/>
-            <a:r>
-              <a:rPr lang="en-US" dirty="0">
-                <a:solidFill>
-                  <a:schemeClr val="bg1"/>
-                </a:solidFill>
-              </a:rPr>
-              <a:t>To solve these problems, we can choose a single column from the output data, use time as the x-axis, use the one model constant we changed as the y-axis, and use a single model output as the z-axis.  </a:t>
-            </a:r>
-          </a:p>
-        </p:txBody>
-      </p:sp>
-    </p:spTree>
-  </p:cSld>
-  <p:clrMapOvr>
-    <a:masterClrMapping/>
-  </p:clrMapOvr>
-</p:sld>
-</file>
-
-<file path=ppt/slides/slide13.xml><?xml version="1.0" encoding="utf-8"?>
-<p:sld xmlns:a="http://schemas.openxmlformats.org/drawingml/2006/main" xmlns:r="http://schemas.openxmlformats.org/officeDocument/2006/relationships" xmlns:p="http://schemas.openxmlformats.org/presentationml/2006/main">
-  <p:cSld name="page16">
-    <p:spTree>
-      <p:nvGrpSpPr>
-        <p:cNvPr id="1" name=""/>
-        <p:cNvGrpSpPr/>
-        <p:nvPr/>
-      </p:nvGrpSpPr>
-      <p:grpSpPr>
-        <a:xfrm>
-          <a:off x="0" y="0"/>
-          <a:ext cx="0" cy="0"/>
-          <a:chOff x="0" y="0"/>
-          <a:chExt cx="0" cy="0"/>
-        </a:xfrm>
-      </p:grpSpPr>
-      <p:sp>
-        <p:nvSpPr>
-          <p:cNvPr id="2" name="Title 1">
-            <a:extLst>
-              <a:ext uri="{FF2B5EF4-FFF2-40B4-BE49-F238E27FC236}">
-                <a16:creationId xmlns:a16="http://schemas.microsoft.com/office/drawing/2014/main" id="{652DE034-012A-BDCC-27D6-45696F0169C2}"/>
-              </a:ext>
-            </a:extLst>
-          </p:cNvPr>
-          <p:cNvSpPr txBox="1">
-            <a:spLocks noGrp="1"/>
-          </p:cNvSpPr>
-          <p:nvPr>
-            <p:ph type="title" idx="4294967295"/>
-          </p:nvPr>
-        </p:nvSpPr>
-        <p:spPr>
-          <a:xfrm>
-            <a:off x="503999" y="422301"/>
-            <a:ext cx="3052001" cy="553998"/>
-          </a:xfrm>
-        </p:spPr>
-        <p:txBody>
-          <a:bodyPr wrap="square">
-            <a:spAutoFit/>
-          </a:bodyPr>
-          <a:lstStyle/>
-          <a:p>
-            <a:pPr lvl="0"/>
-            <a:r>
-              <a:rPr lang="en-US" dirty="0">
-                <a:solidFill>
-                  <a:schemeClr val="bg1"/>
-                </a:solidFill>
-              </a:rPr>
-              <a:t>Example Graph</a:t>
-            </a:r>
-          </a:p>
-        </p:txBody>
-      </p:sp>
-      <p:sp>
-        <p:nvSpPr>
-          <p:cNvPr id="3" name="Text Placeholder 2">
-            <a:extLst>
-              <a:ext uri="{FF2B5EF4-FFF2-40B4-BE49-F238E27FC236}">
-                <a16:creationId xmlns:a16="http://schemas.microsoft.com/office/drawing/2014/main" id="{E0FB6333-45B1-C200-1206-F5409AA482B6}"/>
-              </a:ext>
-            </a:extLst>
-          </p:cNvPr>
-          <p:cNvSpPr txBox="1">
-            <a:spLocks noGrp="1"/>
-          </p:cNvSpPr>
-          <p:nvPr>
-            <p:ph type="body" idx="4294967295"/>
-          </p:nvPr>
-        </p:nvSpPr>
-        <p:spPr>
-          <a:xfrm>
-            <a:off x="340123" y="1081994"/>
-            <a:ext cx="3461504" cy="3719520"/>
-          </a:xfrm>
-        </p:spPr>
-        <p:txBody>
-          <a:bodyPr>
-            <a:normAutofit/>
-          </a:bodyPr>
-          <a:lstStyle/>
-          <a:p>
-            <a:pPr marL="342900" indent="-342900"/>
-            <a:r>
-              <a:rPr lang="en-US" dirty="0">
-                <a:solidFill>
-                  <a:schemeClr val="bg1"/>
-                </a:solidFill>
-              </a:rPr>
-              <a:t>This graph shows how the model constant </a:t>
-            </a:r>
-            <a:r>
-              <a:rPr lang="en-US" i="1" dirty="0" err="1">
-                <a:solidFill>
-                  <a:schemeClr val="bg1"/>
-                </a:solidFill>
-              </a:rPr>
-              <a:t>vkc</a:t>
-            </a:r>
-            <a:r>
-              <a:rPr lang="en-US" dirty="0">
-                <a:solidFill>
-                  <a:schemeClr val="bg1"/>
-                </a:solidFill>
-              </a:rPr>
-              <a:t> affects the model output </a:t>
-            </a:r>
-            <a:r>
-              <a:rPr lang="en-US" i="1" dirty="0">
-                <a:solidFill>
-                  <a:schemeClr val="bg1"/>
-                </a:solidFill>
-              </a:rPr>
-              <a:t>lakestate_vars__savedtke1_col </a:t>
-            </a:r>
-            <a:r>
-              <a:rPr lang="en-US" dirty="0">
-                <a:solidFill>
-                  <a:schemeClr val="bg1"/>
-                </a:solidFill>
-              </a:rPr>
-              <a:t>over a period of 35 time steps for the lake column numbered 336.</a:t>
-            </a:r>
-          </a:p>
-        </p:txBody>
-      </p:sp>
-      <p:grpSp>
-        <p:nvGrpSpPr>
-          <p:cNvPr id="7" name="Group 6">
-            <a:extLst>
-              <a:ext uri="{FF2B5EF4-FFF2-40B4-BE49-F238E27FC236}">
-                <a16:creationId xmlns:a16="http://schemas.microsoft.com/office/drawing/2014/main" id="{AF25E7DB-69CA-4FAC-8C45-99C8D86EF4E1}"/>
-              </a:ext>
-            </a:extLst>
-          </p:cNvPr>
-          <p:cNvGrpSpPr>
-            <a:grpSpLocks noChangeAspect="1"/>
-          </p:cNvGrpSpPr>
-          <p:nvPr/>
-        </p:nvGrpSpPr>
-        <p:grpSpPr>
-          <a:xfrm>
-            <a:off x="4047254" y="-392"/>
-            <a:ext cx="6033371" cy="5670942"/>
-            <a:chOff x="3779383" y="0"/>
-            <a:chExt cx="5955938" cy="5598160"/>
-          </a:xfrm>
-        </p:grpSpPr>
-        <p:sp>
-          <p:nvSpPr>
-            <p:cNvPr id="6" name="Rectangle 5">
-              <a:extLst>
-                <a:ext uri="{FF2B5EF4-FFF2-40B4-BE49-F238E27FC236}">
-                  <a16:creationId xmlns:a16="http://schemas.microsoft.com/office/drawing/2014/main" id="{9253F05C-EA1D-8060-2D15-4444A5C4C9ED}"/>
-                </a:ext>
-              </a:extLst>
-            </p:cNvPr>
-            <p:cNvSpPr/>
-            <p:nvPr/>
-          </p:nvSpPr>
-          <p:spPr>
-            <a:xfrm>
-              <a:off x="3779383" y="0"/>
-              <a:ext cx="5955938" cy="5598160"/>
-            </a:xfrm>
-            <a:prstGeom prst="rect">
-              <a:avLst/>
-            </a:prstGeom>
-            <a:solidFill>
-              <a:schemeClr val="bg1"/>
-            </a:solidFill>
-          </p:spPr>
-          <p:style>
-            <a:lnRef idx="2">
-              <a:schemeClr val="accent1">
-                <a:shade val="15000"/>
-              </a:schemeClr>
-            </a:lnRef>
-            <a:fillRef idx="1">
-              <a:schemeClr val="accent1"/>
-            </a:fillRef>
-            <a:effectRef idx="0">
-              <a:schemeClr val="accent1"/>
-            </a:effectRef>
-            <a:fontRef idx="minor">
-              <a:schemeClr val="lt1"/>
-            </a:fontRef>
-          </p:style>
-          <p:txBody>
-            <a:bodyPr rtlCol="0" anchor="ctr"/>
-            <a:lstStyle/>
-            <a:p>
-              <a:pPr algn="ctr"/>
-              <a:endParaRPr lang="en-US"/>
-            </a:p>
-          </p:txBody>
-        </p:sp>
-        <p:pic>
-          <p:nvPicPr>
-            <p:cNvPr id="5" name="Picture 4">
-              <a:extLst>
-                <a:ext uri="{FF2B5EF4-FFF2-40B4-BE49-F238E27FC236}">
-                  <a16:creationId xmlns:a16="http://schemas.microsoft.com/office/drawing/2014/main" id="{8172BEEA-49A1-F1D6-759E-47E640BAE2B9}"/>
-                </a:ext>
-              </a:extLst>
-            </p:cNvPr>
-            <p:cNvPicPr>
-              <a:picLocks noChangeAspect="1"/>
-            </p:cNvPicPr>
-            <p:nvPr/>
-          </p:nvPicPr>
-          <p:blipFill>
-            <a:blip r:embed="rId3"/>
-            <a:stretch>
-              <a:fillRect/>
-            </a:stretch>
-          </p:blipFill>
-          <p:spPr>
-            <a:xfrm>
-              <a:off x="3860084" y="40640"/>
-              <a:ext cx="5794535" cy="5516880"/>
-            </a:xfrm>
-            <a:prstGeom prst="rect">
-              <a:avLst/>
-            </a:prstGeom>
-          </p:spPr>
-        </p:pic>
-      </p:grpSp>
-    </p:spTree>
-  </p:cSld>
-  <p:clrMapOvr>
-    <a:masterClrMapping/>
-  </p:clrMapOvr>
-</p:sld>
-</file>
-
-<file path=ppt/slides/slide14.xml><?xml version="1.0" encoding="utf-8"?>
-<p:sld xmlns:a="http://schemas.openxmlformats.org/drawingml/2006/main" xmlns:r="http://schemas.openxmlformats.org/officeDocument/2006/relationships" xmlns:p="http://schemas.openxmlformats.org/presentationml/2006/main">
-  <p:cSld>
-    <p:spTree>
-      <p:nvGrpSpPr>
-        <p:cNvPr id="1" name="">
-          <a:extLst>
-            <a:ext uri="{FF2B5EF4-FFF2-40B4-BE49-F238E27FC236}">
-              <a16:creationId xmlns:a16="http://schemas.microsoft.com/office/drawing/2014/main" id="{2B569827-9521-53AA-9742-36EB856A3BAB}"/>
-            </a:ext>
-          </a:extLst>
-        </p:cNvPr>
-        <p:cNvGrpSpPr/>
-        <p:nvPr/>
-      </p:nvGrpSpPr>
-      <p:grpSpPr>
-        <a:xfrm>
-          <a:off x="0" y="0"/>
-          <a:ext cx="0" cy="0"/>
-          <a:chOff x="0" y="0"/>
-          <a:chExt cx="0" cy="0"/>
-        </a:xfrm>
-      </p:grpSpPr>
-      <p:sp>
-        <p:nvSpPr>
-          <p:cNvPr id="2" name="Title 1">
-            <a:extLst>
-              <a:ext uri="{FF2B5EF4-FFF2-40B4-BE49-F238E27FC236}">
-                <a16:creationId xmlns:a16="http://schemas.microsoft.com/office/drawing/2014/main" id="{C65C185C-7590-576F-35F7-50C042B441F9}"/>
-              </a:ext>
-            </a:extLst>
-          </p:cNvPr>
-          <p:cNvSpPr txBox="1">
-            <a:spLocks noGrp="1"/>
-          </p:cNvSpPr>
-          <p:nvPr>
-            <p:ph type="title" idx="4294967295"/>
-          </p:nvPr>
-        </p:nvSpPr>
-        <p:spPr>
-          <a:xfrm>
-            <a:off x="503999" y="422301"/>
-            <a:ext cx="9071640" cy="553998"/>
-          </a:xfrm>
-        </p:spPr>
-        <p:txBody>
-          <a:bodyPr>
-            <a:spAutoFit/>
-          </a:bodyPr>
-          <a:lstStyle/>
-          <a:p>
-            <a:pPr lvl="0"/>
-            <a:r>
-              <a:rPr lang="en-US" dirty="0">
-                <a:solidFill>
-                  <a:schemeClr val="bg1"/>
-                </a:solidFill>
-              </a:rPr>
-              <a:t>Graphing Process</a:t>
-            </a:r>
-          </a:p>
-        </p:txBody>
-      </p:sp>
-      <p:sp>
-        <p:nvSpPr>
-          <p:cNvPr id="3" name="Text Placeholder 2">
-            <a:extLst>
-              <a:ext uri="{FF2B5EF4-FFF2-40B4-BE49-F238E27FC236}">
-                <a16:creationId xmlns:a16="http://schemas.microsoft.com/office/drawing/2014/main" id="{16380487-782B-D373-4A68-3CAF18B86D6A}"/>
-              </a:ext>
-            </a:extLst>
-          </p:cNvPr>
-          <p:cNvSpPr txBox="1">
-            <a:spLocks noGrp="1"/>
-          </p:cNvSpPr>
-          <p:nvPr>
-            <p:ph type="body" idx="4294967295"/>
-          </p:nvPr>
-        </p:nvSpPr>
-        <p:spPr>
-          <a:xfrm>
-            <a:off x="503999" y="1326600"/>
-            <a:ext cx="9001800" cy="3664440"/>
-          </a:xfrm>
-        </p:spPr>
-        <p:txBody>
-          <a:bodyPr/>
-          <a:lstStyle/>
-          <a:p>
-            <a:pPr marL="342900" indent="-342900"/>
-            <a:r>
-              <a:rPr lang="en-US" dirty="0">
-                <a:solidFill>
-                  <a:schemeClr val="bg1"/>
-                </a:solidFill>
-              </a:rPr>
-              <a:t>Output data in the form of a </a:t>
-            </a:r>
-            <a:r>
-              <a:rPr lang="en-US" dirty="0" err="1">
-                <a:solidFill>
-                  <a:schemeClr val="bg1"/>
-                </a:solidFill>
-              </a:rPr>
-              <a:t>NetCDF</a:t>
-            </a:r>
-            <a:r>
-              <a:rPr lang="en-US" dirty="0">
-                <a:solidFill>
-                  <a:schemeClr val="bg1"/>
-                </a:solidFill>
-              </a:rPr>
-              <a:t> file is used. </a:t>
-            </a:r>
-          </a:p>
-          <a:p>
-            <a:pPr marL="342900" indent="-342900"/>
-            <a:r>
-              <a:rPr lang="en-US" dirty="0">
-                <a:solidFill>
-                  <a:schemeClr val="bg1"/>
-                </a:solidFill>
-              </a:rPr>
-              <a:t>From the output data is pulled the values for the model constant </a:t>
-            </a:r>
-            <a:r>
-              <a:rPr lang="en-US" i="1" dirty="0" err="1">
-                <a:solidFill>
-                  <a:schemeClr val="bg1"/>
-                </a:solidFill>
-              </a:rPr>
-              <a:t>vkc</a:t>
-            </a:r>
-            <a:r>
-              <a:rPr lang="en-US" i="1" dirty="0">
-                <a:solidFill>
-                  <a:schemeClr val="bg1"/>
-                </a:solidFill>
-              </a:rPr>
-              <a:t>.</a:t>
-            </a:r>
-            <a:endParaRPr lang="en-US" dirty="0">
-              <a:solidFill>
-                <a:schemeClr val="bg1"/>
-              </a:solidFill>
-            </a:endParaRPr>
-          </a:p>
-          <a:p>
-            <a:pPr marL="342900" indent="-342900"/>
-            <a:r>
-              <a:rPr lang="en-US" dirty="0">
-                <a:solidFill>
-                  <a:schemeClr val="bg1"/>
-                </a:solidFill>
-              </a:rPr>
-              <a:t>Time is just interpolated from 0 to 35. </a:t>
-            </a:r>
-          </a:p>
-          <a:p>
-            <a:pPr marL="342900" indent="-342900"/>
-            <a:r>
-              <a:rPr lang="en-US" dirty="0">
-                <a:solidFill>
-                  <a:schemeClr val="bg1"/>
-                </a:solidFill>
-              </a:rPr>
-              <a:t>From the output data is pulled the values for the model output </a:t>
-            </a:r>
-            <a:r>
-              <a:rPr lang="en-US" i="1" dirty="0">
-                <a:solidFill>
-                  <a:schemeClr val="bg1"/>
-                </a:solidFill>
-              </a:rPr>
-              <a:t>lakestate_vars__savedtke1_col</a:t>
-            </a:r>
-            <a:r>
-              <a:rPr lang="en-US" dirty="0">
-                <a:solidFill>
-                  <a:schemeClr val="bg1"/>
-                </a:solidFill>
-              </a:rPr>
-              <a:t> at the column numbered 336. </a:t>
-            </a:r>
-          </a:p>
-          <a:p>
-            <a:pPr marL="342900" indent="-342900"/>
-            <a:r>
-              <a:rPr lang="en-US" dirty="0">
-                <a:solidFill>
-                  <a:schemeClr val="bg1"/>
-                </a:solidFill>
-              </a:rPr>
-              <a:t>Using matplotlib, all three dimensions are graphed. </a:t>
-            </a:r>
-          </a:p>
-        </p:txBody>
-      </p:sp>
-    </p:spTree>
-    <p:extLst>
-      <p:ext uri="{BB962C8B-B14F-4D97-AF65-F5344CB8AC3E}">
-        <p14:creationId xmlns:p14="http://schemas.microsoft.com/office/powerpoint/2010/main" val="2352501276"/>
-      </p:ext>
-    </p:extLst>
-  </p:cSld>
-  <p:clrMapOvr>
-    <a:masterClrMapping/>
-  </p:clrMapOvr>
-</p:sld>
-</file>
-
-<file path=ppt/slides/slide15.xml><?xml version="1.0" encoding="utf-8"?>
-<p:sld xmlns:a="http://schemas.openxmlformats.org/drawingml/2006/main" xmlns:r="http://schemas.openxmlformats.org/officeDocument/2006/relationships" xmlns:p="http://schemas.openxmlformats.org/presentationml/2006/main">
-  <p:cSld>
-    <p:spTree>
-      <p:nvGrpSpPr>
-        <p:cNvPr id="1" name="">
-          <a:extLst>
-            <a:ext uri="{FF2B5EF4-FFF2-40B4-BE49-F238E27FC236}">
-              <a16:creationId xmlns:a16="http://schemas.microsoft.com/office/drawing/2014/main" id="{4E5DEF85-FAA0-A884-49E4-D90F71A30E97}"/>
-            </a:ext>
-          </a:extLst>
-        </p:cNvPr>
-        <p:cNvGrpSpPr/>
-        <p:nvPr/>
-      </p:nvGrpSpPr>
-      <p:grpSpPr>
-        <a:xfrm>
-          <a:off x="0" y="0"/>
-          <a:ext cx="0" cy="0"/>
-          <a:chOff x="0" y="0"/>
-          <a:chExt cx="0" cy="0"/>
-        </a:xfrm>
-      </p:grpSpPr>
-      <p:sp>
-        <p:nvSpPr>
-          <p:cNvPr id="2" name="Title 1">
-            <a:extLst>
-              <a:ext uri="{FF2B5EF4-FFF2-40B4-BE49-F238E27FC236}">
-                <a16:creationId xmlns:a16="http://schemas.microsoft.com/office/drawing/2014/main" id="{2D635B58-763E-B189-503F-B8A6AECE0C14}"/>
-              </a:ext>
-            </a:extLst>
-          </p:cNvPr>
-          <p:cNvSpPr txBox="1">
-            <a:spLocks noGrp="1"/>
-          </p:cNvSpPr>
-          <p:nvPr>
-            <p:ph type="title" idx="4294967295"/>
-          </p:nvPr>
-        </p:nvSpPr>
-        <p:spPr>
-          <a:xfrm>
-            <a:off x="503999" y="422301"/>
-            <a:ext cx="9071640" cy="553998"/>
-          </a:xfrm>
-        </p:spPr>
-        <p:txBody>
-          <a:bodyPr>
-            <a:spAutoFit/>
-          </a:bodyPr>
-          <a:lstStyle/>
-          <a:p>
-            <a:pPr lvl="0"/>
-            <a:r>
-              <a:rPr lang="en-US" dirty="0">
-                <a:solidFill>
-                  <a:schemeClr val="bg1"/>
-                </a:solidFill>
-              </a:rPr>
-              <a:t>Change Detection Analysis</a:t>
-            </a:r>
-          </a:p>
-        </p:txBody>
-      </p:sp>
-      <p:sp>
-        <p:nvSpPr>
-          <p:cNvPr id="3" name="Text Placeholder 2">
-            <a:extLst>
-              <a:ext uri="{FF2B5EF4-FFF2-40B4-BE49-F238E27FC236}">
-                <a16:creationId xmlns:a16="http://schemas.microsoft.com/office/drawing/2014/main" id="{25E00617-F975-DE3A-0675-236E19993C53}"/>
-              </a:ext>
-            </a:extLst>
-          </p:cNvPr>
-          <p:cNvSpPr txBox="1">
-            <a:spLocks noGrp="1"/>
-          </p:cNvSpPr>
-          <p:nvPr>
-            <p:ph type="body" idx="4294967295"/>
-          </p:nvPr>
-        </p:nvSpPr>
-        <p:spPr/>
-        <p:txBody>
-          <a:bodyPr/>
-          <a:lstStyle/>
-          <a:p>
-            <a:pPr marL="342900" indent="-342900"/>
-            <a:r>
-              <a:rPr lang="en-US" dirty="0">
-                <a:solidFill>
-                  <a:schemeClr val="bg1"/>
-                </a:solidFill>
-              </a:rPr>
-              <a:t>Change Detection Analysis seeks to find how specific changes to individual model constants affect model output. </a:t>
-            </a:r>
-          </a:p>
-          <a:p>
-            <a:pPr marL="342900" indent="-342900"/>
-            <a:r>
-              <a:rPr lang="en-US" dirty="0">
-                <a:solidFill>
-                  <a:schemeClr val="bg1"/>
-                </a:solidFill>
-              </a:rPr>
-              <a:t>It does this by changing a single model constant across its range of values while keeping all other model constants the same. </a:t>
-            </a:r>
-          </a:p>
-        </p:txBody>
-      </p:sp>
-    </p:spTree>
-    <p:extLst>
-      <p:ext uri="{BB962C8B-B14F-4D97-AF65-F5344CB8AC3E}">
-        <p14:creationId xmlns:p14="http://schemas.microsoft.com/office/powerpoint/2010/main" val="4249625218"/>
-      </p:ext>
-    </p:extLst>
-  </p:cSld>
-  <p:clrMapOvr>
-    <a:masterClrMapping/>
-  </p:clrMapOvr>
-</p:sld>
-</file>
-
-<file path=ppt/slides/slide16.xml><?xml version="1.0" encoding="utf-8"?>
-<p:sld xmlns:a="http://schemas.openxmlformats.org/drawingml/2006/main" xmlns:r="http://schemas.openxmlformats.org/officeDocument/2006/relationships" xmlns:p="http://schemas.openxmlformats.org/presentationml/2006/main">
-  <p:cSld>
-    <p:spTree>
-      <p:nvGrpSpPr>
-        <p:cNvPr id="1" name="">
-          <a:extLst>
-            <a:ext uri="{FF2B5EF4-FFF2-40B4-BE49-F238E27FC236}">
-              <a16:creationId xmlns:a16="http://schemas.microsoft.com/office/drawing/2014/main" id="{ABD097B4-55B8-5CCF-9FB2-54192CDBA376}"/>
-            </a:ext>
-          </a:extLst>
-        </p:cNvPr>
-        <p:cNvGrpSpPr/>
-        <p:nvPr/>
-      </p:nvGrpSpPr>
-      <p:grpSpPr>
-        <a:xfrm>
-          <a:off x="0" y="0"/>
-          <a:ext cx="0" cy="0"/>
-          <a:chOff x="0" y="0"/>
-          <a:chExt cx="0" cy="0"/>
-        </a:xfrm>
-      </p:grpSpPr>
-      <p:sp>
-        <p:nvSpPr>
-          <p:cNvPr id="2" name="Title 1">
-            <a:extLst>
-              <a:ext uri="{FF2B5EF4-FFF2-40B4-BE49-F238E27FC236}">
-                <a16:creationId xmlns:a16="http://schemas.microsoft.com/office/drawing/2014/main" id="{F4A5592A-4B1F-9A54-FA90-7679C9AB1E1F}"/>
-              </a:ext>
-            </a:extLst>
-          </p:cNvPr>
-          <p:cNvSpPr txBox="1">
-            <a:spLocks noGrp="1"/>
-          </p:cNvSpPr>
-          <p:nvPr>
-            <p:ph type="title" idx="4294967295"/>
-          </p:nvPr>
-        </p:nvSpPr>
-        <p:spPr>
-          <a:xfrm>
-            <a:off x="0" y="180883"/>
-            <a:ext cx="10080000" cy="553998"/>
-          </a:xfrm>
-        </p:spPr>
-        <p:txBody>
-          <a:bodyPr>
-            <a:spAutoFit/>
-          </a:bodyPr>
-          <a:lstStyle/>
-          <a:p>
-            <a:pPr lvl="0"/>
-            <a:r>
-              <a:rPr lang="en-US" dirty="0">
-                <a:solidFill>
-                  <a:schemeClr val="bg1"/>
-                </a:solidFill>
-              </a:rPr>
-              <a:t>Preliminary Results</a:t>
-            </a:r>
-          </a:p>
-        </p:txBody>
-      </p:sp>
-      <p:grpSp>
-        <p:nvGrpSpPr>
-          <p:cNvPr id="10" name="Group 9">
-            <a:extLst>
-              <a:ext uri="{FF2B5EF4-FFF2-40B4-BE49-F238E27FC236}">
-                <a16:creationId xmlns:a16="http://schemas.microsoft.com/office/drawing/2014/main" id="{1F3D43E0-C6FA-BF34-85B0-F49C4E479482}"/>
-              </a:ext>
-            </a:extLst>
-          </p:cNvPr>
-          <p:cNvGrpSpPr>
-            <a:grpSpLocks noChangeAspect="1"/>
-          </p:cNvGrpSpPr>
-          <p:nvPr/>
-        </p:nvGrpSpPr>
-        <p:grpSpPr>
-          <a:xfrm>
-            <a:off x="2265052" y="976299"/>
-            <a:ext cx="5635901" cy="4661469"/>
-            <a:chOff x="2865704" y="1174750"/>
-            <a:chExt cx="5435600" cy="4495799"/>
-          </a:xfrm>
-        </p:grpSpPr>
-        <p:sp>
-          <p:nvSpPr>
-            <p:cNvPr id="9" name="Rectangle 8">
-              <a:extLst>
-                <a:ext uri="{FF2B5EF4-FFF2-40B4-BE49-F238E27FC236}">
-                  <a16:creationId xmlns:a16="http://schemas.microsoft.com/office/drawing/2014/main" id="{0DE7C1EF-3A48-F5C4-8FCB-54C1337FDD5B}"/>
-                </a:ext>
-              </a:extLst>
-            </p:cNvPr>
-            <p:cNvSpPr>
-              <a:spLocks/>
-            </p:cNvSpPr>
-            <p:nvPr/>
-          </p:nvSpPr>
-          <p:spPr>
-            <a:xfrm>
-              <a:off x="2865704" y="1174750"/>
-              <a:ext cx="5435600" cy="4495799"/>
-            </a:xfrm>
-            <a:prstGeom prst="rect">
-              <a:avLst/>
-            </a:prstGeom>
-            <a:solidFill>
-              <a:schemeClr val="bg1"/>
-            </a:solidFill>
-          </p:spPr>
-          <p:style>
-            <a:lnRef idx="2">
-              <a:schemeClr val="accent1">
-                <a:shade val="15000"/>
-              </a:schemeClr>
-            </a:lnRef>
-            <a:fillRef idx="1">
-              <a:schemeClr val="accent1"/>
-            </a:fillRef>
-            <a:effectRef idx="0">
-              <a:schemeClr val="accent1"/>
-            </a:effectRef>
-            <a:fontRef idx="minor">
-              <a:schemeClr val="lt1"/>
-            </a:fontRef>
-          </p:style>
-          <p:txBody>
-            <a:bodyPr rtlCol="0" anchor="ctr"/>
-            <a:lstStyle/>
-            <a:p>
-              <a:pPr algn="ctr"/>
-              <a:endParaRPr lang="en-US"/>
-            </a:p>
-          </p:txBody>
-        </p:sp>
-        <p:pic>
-          <p:nvPicPr>
-            <p:cNvPr id="7" name="Picture 6">
-              <a:extLst>
-                <a:ext uri="{FF2B5EF4-FFF2-40B4-BE49-F238E27FC236}">
-                  <a16:creationId xmlns:a16="http://schemas.microsoft.com/office/drawing/2014/main" id="{0D28EDBF-6674-8F29-0F89-F521FFA3B182}"/>
-                </a:ext>
-              </a:extLst>
-            </p:cNvPr>
-            <p:cNvPicPr>
-              <a:picLocks noChangeAspect="1"/>
-            </p:cNvPicPr>
-            <p:nvPr/>
-          </p:nvPicPr>
-          <p:blipFill>
-            <a:blip r:embed="rId3"/>
-            <a:stretch>
-              <a:fillRect/>
-            </a:stretch>
-          </p:blipFill>
-          <p:spPr>
-            <a:xfrm>
-              <a:off x="2948683" y="1243382"/>
-              <a:ext cx="5352620" cy="4427167"/>
-            </a:xfrm>
-            <a:prstGeom prst="rect">
-              <a:avLst/>
-            </a:prstGeom>
-          </p:spPr>
-        </p:pic>
-      </p:grpSp>
-      <p:grpSp>
-        <p:nvGrpSpPr>
-          <p:cNvPr id="15" name="Group 14">
-            <a:extLst>
-              <a:ext uri="{FF2B5EF4-FFF2-40B4-BE49-F238E27FC236}">
-                <a16:creationId xmlns:a16="http://schemas.microsoft.com/office/drawing/2014/main" id="{50A0C997-0F63-EB37-9086-C20FB2B6D66F}"/>
-              </a:ext>
-            </a:extLst>
-          </p:cNvPr>
-          <p:cNvGrpSpPr/>
-          <p:nvPr/>
-        </p:nvGrpSpPr>
-        <p:grpSpPr>
-          <a:xfrm>
-            <a:off x="7508240" y="-25579"/>
-            <a:ext cx="2571761" cy="5696128"/>
-            <a:chOff x="7508240" y="-25579"/>
-            <a:chExt cx="2571761" cy="5696128"/>
-          </a:xfrm>
-        </p:grpSpPr>
-        <p:pic>
-          <p:nvPicPr>
-            <p:cNvPr id="5" name="Picture 4">
-              <a:extLst>
-                <a:ext uri="{FF2B5EF4-FFF2-40B4-BE49-F238E27FC236}">
-                  <a16:creationId xmlns:a16="http://schemas.microsoft.com/office/drawing/2014/main" id="{C3D924F0-237C-762C-6BA6-DCBEB54BFB15}"/>
-                </a:ext>
-              </a:extLst>
-            </p:cNvPr>
-            <p:cNvPicPr>
-              <a:picLocks noChangeAspect="1"/>
-            </p:cNvPicPr>
-            <p:nvPr/>
-          </p:nvPicPr>
-          <p:blipFill>
-            <a:blip r:embed="rId4"/>
-            <a:stretch>
-              <a:fillRect/>
-            </a:stretch>
-          </p:blipFill>
-          <p:spPr>
-            <a:xfrm>
-              <a:off x="8059448" y="897750"/>
-              <a:ext cx="1497623" cy="4772799"/>
-            </a:xfrm>
-            <a:prstGeom prst="rect">
-              <a:avLst/>
-            </a:prstGeom>
-          </p:spPr>
-        </p:pic>
-        <p:sp>
-          <p:nvSpPr>
-            <p:cNvPr id="8" name="TextBox 7">
-              <a:extLst>
-                <a:ext uri="{FF2B5EF4-FFF2-40B4-BE49-F238E27FC236}">
-                  <a16:creationId xmlns:a16="http://schemas.microsoft.com/office/drawing/2014/main" id="{AADE1AF1-666D-5B1B-9024-1D4CFA089FD8}"/>
-                </a:ext>
-              </a:extLst>
-            </p:cNvPr>
-            <p:cNvSpPr txBox="1"/>
-            <p:nvPr/>
-          </p:nvSpPr>
-          <p:spPr>
-            <a:xfrm>
-              <a:off x="7508240" y="-25579"/>
-              <a:ext cx="2571761" cy="923330"/>
-            </a:xfrm>
-            <a:prstGeom prst="rect">
-              <a:avLst/>
-            </a:prstGeom>
-            <a:noFill/>
-          </p:spPr>
-          <p:txBody>
-            <a:bodyPr wrap="square" rtlCol="0">
-              <a:spAutoFit/>
-            </a:bodyPr>
-            <a:lstStyle/>
-            <a:p>
-              <a:pPr algn="ctr"/>
-              <a:r>
-                <a:rPr lang="en-US" dirty="0">
-                  <a:solidFill>
-                    <a:schemeClr val="bg1"/>
-                  </a:solidFill>
-                </a:rPr>
-                <a:t>Model output that didn’t change in response to any model constants</a:t>
-              </a:r>
-            </a:p>
-          </p:txBody>
-        </p:sp>
-      </p:grpSp>
-      <p:grpSp>
-        <p:nvGrpSpPr>
-          <p:cNvPr id="14" name="Group 13">
-            <a:extLst>
-              <a:ext uri="{FF2B5EF4-FFF2-40B4-BE49-F238E27FC236}">
-                <a16:creationId xmlns:a16="http://schemas.microsoft.com/office/drawing/2014/main" id="{9A12C58B-D1FE-9F56-5D20-93E453989754}"/>
-              </a:ext>
-            </a:extLst>
-          </p:cNvPr>
-          <p:cNvGrpSpPr/>
-          <p:nvPr/>
-        </p:nvGrpSpPr>
-        <p:grpSpPr>
-          <a:xfrm>
-            <a:off x="-3454" y="32782"/>
-            <a:ext cx="2268506" cy="2786181"/>
-            <a:chOff x="-36613" y="150059"/>
-            <a:chExt cx="2268506" cy="2786181"/>
-          </a:xfrm>
-        </p:grpSpPr>
-        <p:pic>
-          <p:nvPicPr>
-            <p:cNvPr id="12" name="Picture 11">
-              <a:extLst>
-                <a:ext uri="{FF2B5EF4-FFF2-40B4-BE49-F238E27FC236}">
-                  <a16:creationId xmlns:a16="http://schemas.microsoft.com/office/drawing/2014/main" id="{4795AC22-3BE2-27FC-F54A-668838B3FD14}"/>
-                </a:ext>
-              </a:extLst>
-            </p:cNvPr>
-            <p:cNvPicPr>
-              <a:picLocks noChangeAspect="1"/>
-            </p:cNvPicPr>
-            <p:nvPr/>
-          </p:nvPicPr>
-          <p:blipFill>
-            <a:blip r:embed="rId5"/>
-            <a:stretch>
-              <a:fillRect/>
-            </a:stretch>
-          </p:blipFill>
-          <p:spPr>
-            <a:xfrm>
-              <a:off x="606525" y="1073389"/>
-              <a:ext cx="982231" cy="1862851"/>
-            </a:xfrm>
-            <a:prstGeom prst="rect">
-              <a:avLst/>
-            </a:prstGeom>
-          </p:spPr>
-        </p:pic>
-        <p:sp>
-          <p:nvSpPr>
-            <p:cNvPr id="13" name="TextBox 12">
-              <a:extLst>
-                <a:ext uri="{FF2B5EF4-FFF2-40B4-BE49-F238E27FC236}">
-                  <a16:creationId xmlns:a16="http://schemas.microsoft.com/office/drawing/2014/main" id="{7097E64F-55C0-67C9-2130-B5C9BEC26953}"/>
-                </a:ext>
-              </a:extLst>
-            </p:cNvPr>
-            <p:cNvSpPr txBox="1"/>
-            <p:nvPr/>
-          </p:nvSpPr>
-          <p:spPr>
-            <a:xfrm>
-              <a:off x="-36613" y="150059"/>
-              <a:ext cx="2268506" cy="923330"/>
-            </a:xfrm>
-            <a:prstGeom prst="rect">
-              <a:avLst/>
-            </a:prstGeom>
-            <a:noFill/>
-          </p:spPr>
-          <p:txBody>
-            <a:bodyPr wrap="square" rtlCol="0">
-              <a:spAutoFit/>
-            </a:bodyPr>
-            <a:lstStyle/>
-            <a:p>
-              <a:pPr algn="ctr"/>
-              <a:r>
-                <a:rPr lang="en-US" dirty="0">
-                  <a:solidFill>
-                    <a:schemeClr val="bg1"/>
-                  </a:solidFill>
-                </a:rPr>
-                <a:t>Model constants that had no effect on any model output</a:t>
-              </a:r>
-            </a:p>
-          </p:txBody>
-        </p:sp>
-      </p:grpSp>
-      <p:sp>
-        <p:nvSpPr>
-          <p:cNvPr id="16" name="TextBox 15">
-            <a:extLst>
-              <a:ext uri="{FF2B5EF4-FFF2-40B4-BE49-F238E27FC236}">
-                <a16:creationId xmlns:a16="http://schemas.microsoft.com/office/drawing/2014/main" id="{93E6A676-DFFD-7CB9-1E8F-7B8B65E065F3}"/>
-              </a:ext>
-            </a:extLst>
-          </p:cNvPr>
-          <p:cNvSpPr txBox="1"/>
-          <p:nvPr/>
-        </p:nvSpPr>
-        <p:spPr>
-          <a:xfrm>
-            <a:off x="2293065" y="976299"/>
-            <a:ext cx="2431335" cy="830997"/>
-          </a:xfrm>
-          <a:prstGeom prst="rect">
-            <a:avLst/>
-          </a:prstGeom>
-          <a:noFill/>
-        </p:spPr>
-        <p:txBody>
-          <a:bodyPr wrap="square" rtlCol="0">
-            <a:spAutoFit/>
-          </a:bodyPr>
-          <a:lstStyle/>
-          <a:p>
-            <a:r>
-              <a:rPr lang="en-US" sz="1600" dirty="0"/>
-              <a:t>Model constants (columns) and the model outputs (rows) they affect</a:t>
-            </a:r>
-          </a:p>
-        </p:txBody>
-      </p:sp>
-    </p:spTree>
-    <p:extLst>
-      <p:ext uri="{BB962C8B-B14F-4D97-AF65-F5344CB8AC3E}">
-        <p14:creationId xmlns:p14="http://schemas.microsoft.com/office/powerpoint/2010/main" val="4053683747"/>
-      </p:ext>
-    </p:extLst>
-  </p:cSld>
-  <p:clrMapOvr>
-    <a:masterClrMapping/>
-  </p:clrMapOvr>
-</p:sld>
-</file>
-
-<file path=ppt/slides/slide17.xml><?xml version="1.0" encoding="utf-8"?>
-<p:sld xmlns:a="http://schemas.openxmlformats.org/drawingml/2006/main" xmlns:r="http://schemas.openxmlformats.org/officeDocument/2006/relationships" xmlns:p="http://schemas.openxmlformats.org/presentationml/2006/main">
-  <p:cSld>
-    <p:spTree>
-      <p:nvGrpSpPr>
-        <p:cNvPr id="1" name="">
-          <a:extLst>
-            <a:ext uri="{FF2B5EF4-FFF2-40B4-BE49-F238E27FC236}">
-              <a16:creationId xmlns:a16="http://schemas.microsoft.com/office/drawing/2014/main" id="{ED31208B-2A05-1B86-73F0-EB143D2555E8}"/>
-            </a:ext>
-          </a:extLst>
-        </p:cNvPr>
-        <p:cNvGrpSpPr/>
-        <p:nvPr/>
-      </p:nvGrpSpPr>
-      <p:grpSpPr>
-        <a:xfrm>
-          <a:off x="0" y="0"/>
-          <a:ext cx="0" cy="0"/>
-          <a:chOff x="0" y="0"/>
-          <a:chExt cx="0" cy="0"/>
-        </a:xfrm>
-      </p:grpSpPr>
-      <p:sp>
-        <p:nvSpPr>
-          <p:cNvPr id="2" name="Title 1">
-            <a:extLst>
-              <a:ext uri="{FF2B5EF4-FFF2-40B4-BE49-F238E27FC236}">
-                <a16:creationId xmlns:a16="http://schemas.microsoft.com/office/drawing/2014/main" id="{8E7FE489-9349-DA38-F1AB-F4D40E20FA18}"/>
+                <a16:creationId xmlns:a16="http://schemas.microsoft.com/office/drawing/2014/main" id="{3B229438-C75A-6BD0-0DC0-AB63F95B648C}"/>
               </a:ext>
             </a:extLst>
           </p:cNvPr>
@@ -7408,7 +6330,7 @@
                   <a:schemeClr val="bg1"/>
                 </a:solidFill>
               </a:rPr>
-              <a:t>Assumptions</a:t>
+              <a:t>DOI 4 Results</a:t>
             </a:r>
           </a:p>
         </p:txBody>
@@ -7418,7 +6340,7 @@
           <p:cNvPr id="3" name="Text Placeholder 2">
             <a:extLst>
               <a:ext uri="{FF2B5EF4-FFF2-40B4-BE49-F238E27FC236}">
-                <a16:creationId xmlns:a16="http://schemas.microsoft.com/office/drawing/2014/main" id="{1758AE0D-3928-68B2-851F-3466DEF4D1CE}"/>
+                <a16:creationId xmlns:a16="http://schemas.microsoft.com/office/drawing/2014/main" id="{56064C14-1601-F022-7F3D-615176F6A82B}"/>
               </a:ext>
             </a:extLst>
           </p:cNvPr>
@@ -7430,7 +6352,7 @@
         <p:spPr>
           <a:xfrm>
             <a:off x="503999" y="1326600"/>
-            <a:ext cx="9071640" cy="4022640"/>
+            <a:ext cx="9071640" cy="3288239"/>
           </a:xfrm>
           <a:prstGeom prst="rect">
             <a:avLst/>
@@ -7664,52 +6586,40 @@
                 <a:solidFill>
                   <a:schemeClr val="bg1"/>
                 </a:solidFill>
-              </a:rPr>
-              <a:t>However, initial analysis was built on a few key assumptions. </a:t>
+                <a:latin typeface="AppleSystemUIFont" pitchFamily="2"/>
+              </a:rPr>
+              <a:t>DOI 4 results in 50,031 test cases when only changing the values of constants known to affect the outputs of </a:t>
+            </a:r>
+            <a:r>
+              <a:rPr lang="en-US" dirty="0" err="1">
+                <a:solidFill>
+                  <a:schemeClr val="bg1"/>
+                </a:solidFill>
+                <a:latin typeface="Courier New" panose="02070309020205020404" pitchFamily="49" charset="0"/>
+                <a:cs typeface="Courier New" panose="02070309020205020404" pitchFamily="49" charset="0"/>
+              </a:rPr>
+              <a:t>LakeTemperature</a:t>
+            </a:r>
+            <a:r>
+              <a:rPr lang="en-US" dirty="0">
+                <a:solidFill>
+                  <a:schemeClr val="bg1"/>
+                </a:solidFill>
+                <a:latin typeface="AppleSystemUIFont" pitchFamily="2"/>
+              </a:rPr>
+              <a:t>.</a:t>
             </a:r>
           </a:p>
           <a:p>
             <a:pPr marL="342900" indent="-342900"/>
             <a:r>
-              <a:rPr lang="en-US" dirty="0">
-                <a:solidFill>
-                  <a:schemeClr val="bg1"/>
-                </a:solidFill>
-              </a:rPr>
-              <a:t>First, that not all the constants had an effect on the model output. </a:t>
-            </a:r>
-          </a:p>
-          <a:p>
-            <a:pPr marL="342900" indent="-342900"/>
-            <a:r>
-              <a:rPr lang="en-US" dirty="0">
-                <a:solidFill>
-                  <a:schemeClr val="bg1"/>
-                </a:solidFill>
-              </a:rPr>
-              <a:t>Second, that model constants did not influence what values other model constants could take.</a:t>
-            </a:r>
-          </a:p>
-          <a:p>
-            <a:pPr marL="342900" indent="-342900"/>
-            <a:r>
-              <a:rPr lang="en-US" dirty="0">
-                <a:solidFill>
-                  <a:schemeClr val="bg1"/>
-                </a:solidFill>
-              </a:rPr>
-              <a:t>Third, that model constants effects on model output aren’t determined by preconditions being met. </a:t>
-            </a:r>
-          </a:p>
-          <a:p>
-            <a:pPr marL="342900" indent="-342900"/>
-            <a:r>
-              <a:rPr lang="en-US" dirty="0">
-                <a:solidFill>
-                  <a:schemeClr val="bg1"/>
-                </a:solidFill>
-              </a:rPr>
-              <a:t>These assumptions were based on the initial results from the change detection analysis plugin. </a:t>
+              <a:rPr lang="en-US" i="1" dirty="0">
+                <a:solidFill>
+                  <a:schemeClr val="bg1"/>
+                </a:solidFill>
+                <a:latin typeface="AppleSystemUIFont" pitchFamily="2"/>
+              </a:rPr>
+              <a:t>How many combinatorial test cases generated, executed, passed, skipped, failed, crashed</a:t>
             </a:r>
           </a:p>
         </p:txBody>
@@ -7717,28 +6627,27 @@
     </p:spTree>
     <p:extLst>
       <p:ext uri="{BB962C8B-B14F-4D97-AF65-F5344CB8AC3E}">
-        <p14:creationId xmlns:p14="http://schemas.microsoft.com/office/powerpoint/2010/main" val="2898562490"/>
+        <p14:creationId xmlns:p14="http://schemas.microsoft.com/office/powerpoint/2010/main" val="3165592934"/>
       </p:ext>
     </p:extLst>
   </p:cSld>
   <p:clrMapOvr>
     <a:masterClrMapping/>
   </p:clrMapOvr>
+  <p:extLst>
+    <p:ext uri="{6950BFC3-D8DA-4A85-94F7-54DA5524770B}">
+      <p188:commentRel xmlns:p188="http://schemas.microsoft.com/office/powerpoint/2018/8/main" r:id="rId2"/>
+    </p:ext>
+  </p:extLst>
 </p:sld>
 </file>
 
-<file path=ppt/slides/slide18.xml><?xml version="1.0" encoding="utf-8"?>
+<file path=ppt/slides/slide13.xml><?xml version="1.0" encoding="utf-8"?>
 <p:sld xmlns:a="http://schemas.openxmlformats.org/drawingml/2006/main" xmlns:r="http://schemas.openxmlformats.org/officeDocument/2006/relationships" xmlns:p="http://schemas.openxmlformats.org/presentationml/2006/main">
   <p:cSld>
     <p:spTree>
       <p:nvGrpSpPr>
-        <p:cNvPr id="1" name="">
-          <a:extLst>
-            <a:ext uri="{FF2B5EF4-FFF2-40B4-BE49-F238E27FC236}">
-              <a16:creationId xmlns:a16="http://schemas.microsoft.com/office/drawing/2014/main" id="{6DE4F59C-6FFF-C3C6-285D-89E37A94AAE8}"/>
-            </a:ext>
-          </a:extLst>
-        </p:cNvPr>
+        <p:cNvPr id="1" name=""/>
         <p:cNvGrpSpPr/>
         <p:nvPr/>
       </p:nvGrpSpPr>
@@ -7755,7 +6664,7 @@
           <p:cNvPr id="2" name="Title 1">
             <a:extLst>
               <a:ext uri="{FF2B5EF4-FFF2-40B4-BE49-F238E27FC236}">
-                <a16:creationId xmlns:a16="http://schemas.microsoft.com/office/drawing/2014/main" id="{95792ACF-8B91-65F3-C165-44BD25127222}"/>
+                <a16:creationId xmlns:a16="http://schemas.microsoft.com/office/drawing/2014/main" id="{3BF6498E-98A7-DD6B-79FB-40EF89C7FFC8}"/>
               </a:ext>
             </a:extLst>
           </p:cNvPr>
@@ -7807,7 +6716,7 @@
                   <a:schemeClr val="bg1"/>
                 </a:solidFill>
               </a:rPr>
-              <a:t>Rationale</a:t>
+              <a:t>DOI 5 Data</a:t>
             </a:r>
           </a:p>
         </p:txBody>
@@ -7817,7 +6726,7 @@
           <p:cNvPr id="3" name="Text Placeholder 2">
             <a:extLst>
               <a:ext uri="{FF2B5EF4-FFF2-40B4-BE49-F238E27FC236}">
-                <a16:creationId xmlns:a16="http://schemas.microsoft.com/office/drawing/2014/main" id="{4C9AF8C3-95D2-3D5A-AB6D-61F870774A13}"/>
+                <a16:creationId xmlns:a16="http://schemas.microsoft.com/office/drawing/2014/main" id="{31720598-1CB0-E7F3-3417-23A2488D52ED}"/>
               </a:ext>
             </a:extLst>
           </p:cNvPr>
@@ -7829,7 +6738,7 @@
         <p:spPr>
           <a:xfrm>
             <a:off x="503999" y="1326600"/>
-            <a:ext cx="9071640" cy="4022640"/>
+            <a:ext cx="9071640" cy="3288239"/>
           </a:xfrm>
           <a:prstGeom prst="rect">
             <a:avLst/>
@@ -8063,19 +6972,1202 @@
                 <a:solidFill>
                   <a:schemeClr val="bg1"/>
                 </a:solidFill>
-              </a:rPr>
-              <a:t>To attempt to determine which model constants affect which model outputs, 11 cases were created for every model constant where every model constant stayed consistent at a single default value except the one which was being tested, which was linearly interpolated to get 11 values evenly spread across its valid range. </a:t>
+                <a:latin typeface="AppleSystemUIFont" pitchFamily="2"/>
+              </a:rPr>
+              <a:t>DOI 5 results in 689,735 test cases when only changing the values of constants known to affect the outputs of </a:t>
+            </a:r>
+            <a:r>
+              <a:rPr lang="en-US" dirty="0" err="1">
+                <a:solidFill>
+                  <a:schemeClr val="bg1"/>
+                </a:solidFill>
+                <a:latin typeface="Courier New" panose="02070309020205020404" pitchFamily="49" charset="0"/>
+                <a:cs typeface="Courier New" panose="02070309020205020404" pitchFamily="49" charset="0"/>
+              </a:rPr>
+              <a:t>LakeTemperature</a:t>
+            </a:r>
+            <a:r>
+              <a:rPr lang="en-US" dirty="0">
+                <a:solidFill>
+                  <a:schemeClr val="bg1"/>
+                </a:solidFill>
+                <a:latin typeface="AppleSystemUIFont" pitchFamily="2"/>
+              </a:rPr>
+              <a:t>.</a:t>
             </a:r>
           </a:p>
           <a:p>
             <a:pPr marL="342900" indent="-342900"/>
             <a:r>
+              <a:rPr lang="en-US" i="1" dirty="0">
+                <a:solidFill>
+                  <a:schemeClr val="bg1"/>
+                </a:solidFill>
+                <a:latin typeface="AppleSystemUIFont" pitchFamily="2"/>
+              </a:rPr>
+              <a:t>How many combinatorial test cases generated, executed, passed, skipped, failed, crashed</a:t>
+            </a:r>
+          </a:p>
+        </p:txBody>
+      </p:sp>
+    </p:spTree>
+    <p:extLst>
+      <p:ext uri="{BB962C8B-B14F-4D97-AF65-F5344CB8AC3E}">
+        <p14:creationId xmlns:p14="http://schemas.microsoft.com/office/powerpoint/2010/main" val="3954683613"/>
+      </p:ext>
+    </p:extLst>
+  </p:cSld>
+  <p:clrMapOvr>
+    <a:masterClrMapping/>
+  </p:clrMapOvr>
+  <p:extLst>
+    <p:ext uri="{6950BFC3-D8DA-4A85-94F7-54DA5524770B}">
+      <p188:commentRel xmlns:p188="http://schemas.microsoft.com/office/powerpoint/2018/8/main" r:id="rId2"/>
+    </p:ext>
+  </p:extLst>
+</p:sld>
+</file>
+
+<file path=ppt/slides/slide14.xml><?xml version="1.0" encoding="utf-8"?>
+<p:sld xmlns:a="http://schemas.openxmlformats.org/drawingml/2006/main" xmlns:r="http://schemas.openxmlformats.org/officeDocument/2006/relationships" xmlns:p="http://schemas.openxmlformats.org/presentationml/2006/main">
+  <p:cSld name="page10">
+    <p:spTree>
+      <p:nvGrpSpPr>
+        <p:cNvPr id="1" name=""/>
+        <p:cNvGrpSpPr/>
+        <p:nvPr/>
+      </p:nvGrpSpPr>
+      <p:grpSpPr>
+        <a:xfrm>
+          <a:off x="0" y="0"/>
+          <a:ext cx="0" cy="0"/>
+          <a:chOff x="0" y="0"/>
+          <a:chExt cx="0" cy="0"/>
+        </a:xfrm>
+      </p:grpSpPr>
+      <p:sp>
+        <p:nvSpPr>
+          <p:cNvPr id="2" name="Title 1">
+            <a:extLst>
+              <a:ext uri="{FF2B5EF4-FFF2-40B4-BE49-F238E27FC236}">
+                <a16:creationId xmlns:a16="http://schemas.microsoft.com/office/drawing/2014/main" id="{96CB14EF-3B5C-5292-14CB-3720F1B94FC4}"/>
+              </a:ext>
+            </a:extLst>
+          </p:cNvPr>
+          <p:cNvSpPr txBox="1">
+            <a:spLocks noGrp="1"/>
+          </p:cNvSpPr>
+          <p:nvPr>
+            <p:ph type="title" idx="4294967295"/>
+          </p:nvPr>
+        </p:nvSpPr>
+        <p:spPr>
+          <a:xfrm>
+            <a:off x="503999" y="422301"/>
+            <a:ext cx="9071640" cy="553998"/>
+          </a:xfrm>
+        </p:spPr>
+        <p:txBody>
+          <a:bodyPr>
+            <a:spAutoFit/>
+          </a:bodyPr>
+          <a:lstStyle/>
+          <a:p>
+            <a:pPr lvl="0"/>
+            <a:r>
               <a:rPr lang="en-US" dirty="0">
                 <a:solidFill>
                   <a:schemeClr val="bg1"/>
                 </a:solidFill>
               </a:rPr>
-              <a:t>This assumed that each model constant’s values are independent of each other and that no preconditions have to be met for a constant to have an effect on model output. </a:t>
+              <a:t>Findings from Testing</a:t>
+            </a:r>
+          </a:p>
+        </p:txBody>
+      </p:sp>
+      <p:sp>
+        <p:nvSpPr>
+          <p:cNvPr id="3" name="Text Placeholder 2">
+            <a:extLst>
+              <a:ext uri="{FF2B5EF4-FFF2-40B4-BE49-F238E27FC236}">
+                <a16:creationId xmlns:a16="http://schemas.microsoft.com/office/drawing/2014/main" id="{C9367797-CD5B-309B-985B-DF6091246510}"/>
+              </a:ext>
+            </a:extLst>
+          </p:cNvPr>
+          <p:cNvSpPr txBox="1">
+            <a:spLocks noGrp="1"/>
+          </p:cNvSpPr>
+          <p:nvPr>
+            <p:ph type="body" idx="4294967295"/>
+          </p:nvPr>
+        </p:nvSpPr>
+        <p:spPr>
+          <a:xfrm>
+            <a:off x="503998" y="1326600"/>
+            <a:ext cx="9071639" cy="3921649"/>
+          </a:xfrm>
+        </p:spPr>
+        <p:txBody>
+          <a:bodyPr>
+            <a:normAutofit fontScale="92500" lnSpcReduction="10000"/>
+          </a:bodyPr>
+          <a:lstStyle/>
+          <a:p>
+            <a:pPr marL="342900" indent="-342900"/>
+            <a:r>
+              <a:rPr lang="en-US" dirty="0">
+                <a:solidFill>
+                  <a:schemeClr val="bg1"/>
+                </a:solidFill>
+              </a:rPr>
+              <a:t>Our test cases originally had invalid values for constants, causing crashes. </a:t>
+            </a:r>
+          </a:p>
+          <a:p>
+            <a:pPr marL="342900" indent="-342900"/>
+            <a:r>
+              <a:rPr lang="en-US" dirty="0">
+                <a:solidFill>
+                  <a:schemeClr val="bg1"/>
+                </a:solidFill>
+              </a:rPr>
+              <a:t>Some checks were interpreted incorrectly by us and had to be fixed. </a:t>
+            </a:r>
+          </a:p>
+          <a:p>
+            <a:pPr marL="342900" indent="-342900"/>
+            <a:r>
+              <a:rPr lang="en-US" dirty="0">
+                <a:solidFill>
+                  <a:schemeClr val="bg1"/>
+                </a:solidFill>
+              </a:rPr>
+              <a:t>Tests checking for things other than non-finite values had to ignore non-finite values, otherwise they’d fail and output an inaccurate error message.</a:t>
+            </a:r>
+          </a:p>
+          <a:p>
+            <a:pPr marL="342900" indent="-342900"/>
+            <a:r>
+              <a:rPr lang="en-US" dirty="0">
+                <a:solidFill>
+                  <a:schemeClr val="bg1"/>
+                </a:solidFill>
+              </a:rPr>
+              <a:t>SPEL</a:t>
+            </a:r>
+            <a:r>
+              <a:rPr lang="en-US" i="1" dirty="0">
+                <a:solidFill>
+                  <a:schemeClr val="bg1"/>
+                </a:solidFill>
+              </a:rPr>
+              <a:t> </a:t>
+            </a:r>
+            <a:r>
+              <a:rPr lang="en-US" dirty="0">
+                <a:solidFill>
+                  <a:schemeClr val="bg1"/>
+                </a:solidFill>
+              </a:rPr>
+              <a:t>might be initializing data with </a:t>
+            </a:r>
+            <a:r>
+              <a:rPr lang="en-US" dirty="0" err="1">
+                <a:solidFill>
+                  <a:schemeClr val="bg1"/>
+                </a:solidFill>
+              </a:rPr>
+              <a:t>NaN</a:t>
+            </a:r>
+            <a:r>
+              <a:rPr lang="en-US" dirty="0">
+                <a:solidFill>
+                  <a:schemeClr val="bg1"/>
+                </a:solidFill>
+              </a:rPr>
+              <a:t> values that </a:t>
+            </a:r>
+            <a:r>
+              <a:rPr lang="en-US" dirty="0" err="1">
+                <a:solidFill>
+                  <a:schemeClr val="bg1"/>
+                </a:solidFill>
+                <a:latin typeface="Courier New" panose="02070309020205020404" pitchFamily="49" charset="0"/>
+                <a:cs typeface="Courier New" panose="02070309020205020404" pitchFamily="49" charset="0"/>
+              </a:rPr>
+              <a:t>LakeTemperature</a:t>
+            </a:r>
+            <a:r>
+              <a:rPr lang="en-US" dirty="0">
+                <a:solidFill>
+                  <a:schemeClr val="bg1"/>
+                </a:solidFill>
+              </a:rPr>
+              <a:t> then never overwrites or </a:t>
+            </a:r>
+            <a:r>
+              <a:rPr lang="en-US" dirty="0" err="1">
+                <a:solidFill>
+                  <a:schemeClr val="bg1"/>
+                </a:solidFill>
+                <a:latin typeface="Courier New" panose="02070309020205020404" pitchFamily="49" charset="0"/>
+                <a:cs typeface="Courier New" panose="02070309020205020404" pitchFamily="49" charset="0"/>
+              </a:rPr>
+              <a:t>LakeTemperature</a:t>
+            </a:r>
+            <a:r>
+              <a:rPr lang="en-US" dirty="0">
+                <a:solidFill>
+                  <a:schemeClr val="bg1"/>
+                </a:solidFill>
+              </a:rPr>
+              <a:t> might be outputting data with </a:t>
+            </a:r>
+            <a:r>
+              <a:rPr lang="en-US" dirty="0" err="1">
+                <a:solidFill>
+                  <a:schemeClr val="bg1"/>
+                </a:solidFill>
+              </a:rPr>
+              <a:t>NaN</a:t>
+            </a:r>
+            <a:r>
+              <a:rPr lang="en-US" dirty="0">
+                <a:solidFill>
+                  <a:schemeClr val="bg1"/>
+                </a:solidFill>
+              </a:rPr>
+              <a:t> values. </a:t>
+            </a:r>
+            <a:endParaRPr lang="en-US" i="1" dirty="0">
+              <a:solidFill>
+                <a:schemeClr val="bg1"/>
+              </a:solidFill>
+            </a:endParaRPr>
+          </a:p>
+          <a:p>
+            <a:pPr marL="342900" indent="-342900"/>
+            <a:r>
+              <a:rPr lang="en-US" dirty="0">
+                <a:solidFill>
+                  <a:schemeClr val="bg1"/>
+                </a:solidFill>
+              </a:rPr>
+              <a:t>Largely, </a:t>
+            </a:r>
+            <a:r>
+              <a:rPr lang="en-US" dirty="0" err="1">
+                <a:solidFill>
+                  <a:schemeClr val="bg1"/>
+                </a:solidFill>
+                <a:latin typeface="Courier New" panose="02070309020205020404" pitchFamily="49" charset="0"/>
+                <a:cs typeface="Courier New" panose="02070309020205020404" pitchFamily="49" charset="0"/>
+              </a:rPr>
+              <a:t>LakeTemperature</a:t>
+            </a:r>
+            <a:r>
+              <a:rPr lang="en-US" dirty="0">
+                <a:solidFill>
+                  <a:schemeClr val="bg1"/>
+                </a:solidFill>
+              </a:rPr>
+              <a:t> output data was valid and within physical bounds. However, edge cases resulted in some physically impossible outputs, likely due to combinations between a few model constants. </a:t>
+            </a:r>
+          </a:p>
+        </p:txBody>
+      </p:sp>
+    </p:spTree>
+  </p:cSld>
+  <p:clrMapOvr>
+    <a:masterClrMapping/>
+  </p:clrMapOvr>
+  <p:extLst>
+    <p:ext uri="{6950BFC3-D8DA-4A85-94F7-54DA5524770B}">
+      <p188:commentRel xmlns:p188="http://schemas.microsoft.com/office/powerpoint/2018/8/main" r:id="rId3"/>
+    </p:ext>
+  </p:extLst>
+</p:sld>
+</file>
+
+<file path=ppt/slides/slide15.xml><?xml version="1.0" encoding="utf-8"?>
+<p:sld xmlns:a="http://schemas.openxmlformats.org/drawingml/2006/main" xmlns:r="http://schemas.openxmlformats.org/officeDocument/2006/relationships" xmlns:p="http://schemas.openxmlformats.org/presentationml/2006/main">
+  <p:cSld>
+    <p:spTree>
+      <p:nvGrpSpPr>
+        <p:cNvPr id="1" name="">
+          <a:extLst>
+            <a:ext uri="{FF2B5EF4-FFF2-40B4-BE49-F238E27FC236}">
+              <a16:creationId xmlns:a16="http://schemas.microsoft.com/office/drawing/2014/main" id="{4E5DEF85-FAA0-A884-49E4-D90F71A30E97}"/>
+            </a:ext>
+          </a:extLst>
+        </p:cNvPr>
+        <p:cNvGrpSpPr/>
+        <p:nvPr/>
+      </p:nvGrpSpPr>
+      <p:grpSpPr>
+        <a:xfrm>
+          <a:off x="0" y="0"/>
+          <a:ext cx="0" cy="0"/>
+          <a:chOff x="0" y="0"/>
+          <a:chExt cx="0" cy="0"/>
+        </a:xfrm>
+      </p:grpSpPr>
+      <p:sp>
+        <p:nvSpPr>
+          <p:cNvPr id="2" name="Title 1">
+            <a:extLst>
+              <a:ext uri="{FF2B5EF4-FFF2-40B4-BE49-F238E27FC236}">
+                <a16:creationId xmlns:a16="http://schemas.microsoft.com/office/drawing/2014/main" id="{2D635B58-763E-B189-503F-B8A6AECE0C14}"/>
+              </a:ext>
+            </a:extLst>
+          </p:cNvPr>
+          <p:cNvSpPr txBox="1">
+            <a:spLocks noGrp="1"/>
+          </p:cNvSpPr>
+          <p:nvPr>
+            <p:ph type="title" idx="4294967295"/>
+          </p:nvPr>
+        </p:nvSpPr>
+        <p:spPr>
+          <a:xfrm>
+            <a:off x="503999" y="422301"/>
+            <a:ext cx="9071640" cy="553998"/>
+          </a:xfrm>
+        </p:spPr>
+        <p:txBody>
+          <a:bodyPr>
+            <a:spAutoFit/>
+          </a:bodyPr>
+          <a:lstStyle/>
+          <a:p>
+            <a:pPr lvl="0"/>
+            <a:r>
+              <a:rPr lang="en-US" dirty="0">
+                <a:solidFill>
+                  <a:schemeClr val="bg1"/>
+                </a:solidFill>
+              </a:rPr>
+              <a:t>Change Detection Analysis</a:t>
+            </a:r>
+          </a:p>
+        </p:txBody>
+      </p:sp>
+      <p:sp>
+        <p:nvSpPr>
+          <p:cNvPr id="3" name="Text Placeholder 2">
+            <a:extLst>
+              <a:ext uri="{FF2B5EF4-FFF2-40B4-BE49-F238E27FC236}">
+                <a16:creationId xmlns:a16="http://schemas.microsoft.com/office/drawing/2014/main" id="{25E00617-F975-DE3A-0675-236E19993C53}"/>
+              </a:ext>
+            </a:extLst>
+          </p:cNvPr>
+          <p:cNvSpPr txBox="1">
+            <a:spLocks noGrp="1"/>
+          </p:cNvSpPr>
+          <p:nvPr>
+            <p:ph type="body" idx="4294967295"/>
+          </p:nvPr>
+        </p:nvSpPr>
+        <p:spPr/>
+        <p:txBody>
+          <a:bodyPr/>
+          <a:lstStyle/>
+          <a:p>
+            <a:pPr marL="342900" indent="-342900"/>
+            <a:r>
+              <a:rPr lang="en-US" dirty="0">
+                <a:solidFill>
+                  <a:schemeClr val="bg1"/>
+                </a:solidFill>
+              </a:rPr>
+              <a:t>Change Detection Analysis seeks to find how changes to individual model constants affect model outputs. </a:t>
+            </a:r>
+          </a:p>
+          <a:p>
+            <a:pPr marL="342900" indent="-342900"/>
+            <a:r>
+              <a:rPr lang="en-US" dirty="0">
+                <a:solidFill>
+                  <a:schemeClr val="bg1"/>
+                </a:solidFill>
+              </a:rPr>
+              <a:t>It does this by changing a single model constant across its range of values while holding all other model constants at their default values.</a:t>
+            </a:r>
+          </a:p>
+          <a:p>
+            <a:pPr marL="342900" indent="-342900"/>
+            <a:r>
+              <a:rPr lang="en-US" dirty="0">
+                <a:solidFill>
+                  <a:schemeClr val="bg1"/>
+                </a:solidFill>
+              </a:rPr>
+              <a:t>Provides a simple form of qualitative analysis (one-constant-at-a-time) but misses interactions among constants and their joint effect on output changes</a:t>
+            </a:r>
+          </a:p>
+        </p:txBody>
+      </p:sp>
+    </p:spTree>
+    <p:extLst>
+      <p:ext uri="{BB962C8B-B14F-4D97-AF65-F5344CB8AC3E}">
+        <p14:creationId xmlns:p14="http://schemas.microsoft.com/office/powerpoint/2010/main" val="4249625218"/>
+      </p:ext>
+    </p:extLst>
+  </p:cSld>
+  <p:clrMapOvr>
+    <a:masterClrMapping/>
+  </p:clrMapOvr>
+</p:sld>
+</file>
+
+<file path=ppt/slides/slide16.xml><?xml version="1.0" encoding="utf-8"?>
+<p:sld xmlns:a="http://schemas.openxmlformats.org/drawingml/2006/main" xmlns:r="http://schemas.openxmlformats.org/officeDocument/2006/relationships" xmlns:p="http://schemas.openxmlformats.org/presentationml/2006/main">
+  <p:cSld>
+    <p:spTree>
+      <p:nvGrpSpPr>
+        <p:cNvPr id="1" name="">
+          <a:extLst>
+            <a:ext uri="{FF2B5EF4-FFF2-40B4-BE49-F238E27FC236}">
+              <a16:creationId xmlns:a16="http://schemas.microsoft.com/office/drawing/2014/main" id="{ED31208B-2A05-1B86-73F0-EB143D2555E8}"/>
+            </a:ext>
+          </a:extLst>
+        </p:cNvPr>
+        <p:cNvGrpSpPr/>
+        <p:nvPr/>
+      </p:nvGrpSpPr>
+      <p:grpSpPr>
+        <a:xfrm>
+          <a:off x="0" y="0"/>
+          <a:ext cx="0" cy="0"/>
+          <a:chOff x="0" y="0"/>
+          <a:chExt cx="0" cy="0"/>
+        </a:xfrm>
+      </p:grpSpPr>
+      <p:sp>
+        <p:nvSpPr>
+          <p:cNvPr id="2" name="Title 1">
+            <a:extLst>
+              <a:ext uri="{FF2B5EF4-FFF2-40B4-BE49-F238E27FC236}">
+                <a16:creationId xmlns:a16="http://schemas.microsoft.com/office/drawing/2014/main" id="{8E7FE489-9349-DA38-F1AB-F4D40E20FA18}"/>
+              </a:ext>
+            </a:extLst>
+          </p:cNvPr>
+          <p:cNvSpPr txBox="1">
+            <a:spLocks/>
+          </p:cNvSpPr>
+          <p:nvPr/>
+        </p:nvSpPr>
+        <p:spPr>
+          <a:xfrm>
+            <a:off x="503999" y="422301"/>
+            <a:ext cx="9071640" cy="553998"/>
+          </a:xfrm>
+          <a:prstGeom prst="rect">
+            <a:avLst/>
+          </a:prstGeom>
+          <a:noFill/>
+          <a:ln>
+            <a:noFill/>
+          </a:ln>
+        </p:spPr>
+        <p:txBody>
+          <a:bodyPr vert="horz" lIns="0" tIns="0" rIns="0" bIns="0" anchor="ctr">
+            <a:spAutoFit/>
+          </a:bodyPr>
+          <a:lstStyle>
+            <a:lvl1pPr lvl="0" algn="ctr" rtl="0" hangingPunct="0">
+              <a:buNone/>
+              <a:tabLst/>
+              <a:defRPr lang="en-US" sz="3600" b="0" i="0" u="none" strike="noStrike" kern="1200" cap="none">
+                <a:ln>
+                  <a:noFill/>
+                </a:ln>
+                <a:highlight>
+                  <a:scrgbClr r="0" g="0" b="0">
+                    <a:alpha val="0"/>
+                  </a:scrgbClr>
+                </a:highlight>
+                <a:latin typeface="URW Bookman" pitchFamily="2"/>
+                <a:ea typeface="Nimbus Sans" pitchFamily="2"/>
+                <a:cs typeface="FreeSans" pitchFamily="2"/>
+              </a:defRPr>
+            </a:lvl1pPr>
+          </a:lstStyle>
+          <a:p>
+            <a:r>
+              <a:rPr lang="en-US" dirty="0">
+                <a:solidFill>
+                  <a:schemeClr val="bg1"/>
+                </a:solidFill>
+              </a:rPr>
+              <a:t>Assumptions</a:t>
+            </a:r>
+          </a:p>
+        </p:txBody>
+      </p:sp>
+      <p:sp>
+        <p:nvSpPr>
+          <p:cNvPr id="3" name="Text Placeholder 2">
+            <a:extLst>
+              <a:ext uri="{FF2B5EF4-FFF2-40B4-BE49-F238E27FC236}">
+                <a16:creationId xmlns:a16="http://schemas.microsoft.com/office/drawing/2014/main" id="{1758AE0D-3928-68B2-851F-3466DEF4D1CE}"/>
+              </a:ext>
+            </a:extLst>
+          </p:cNvPr>
+          <p:cNvSpPr txBox="1">
+            <a:spLocks/>
+          </p:cNvSpPr>
+          <p:nvPr/>
+        </p:nvSpPr>
+        <p:spPr>
+          <a:xfrm>
+            <a:off x="503999" y="1326600"/>
+            <a:ext cx="9071640" cy="4022640"/>
+          </a:xfrm>
+          <a:prstGeom prst="rect">
+            <a:avLst/>
+          </a:prstGeom>
+          <a:noFill/>
+          <a:ln>
+            <a:noFill/>
+          </a:ln>
+        </p:spPr>
+        <p:txBody>
+          <a:bodyPr vert="horz" lIns="0" tIns="0" rIns="0" bIns="0">
+            <a:normAutofit/>
+          </a:bodyPr>
+          <a:lstStyle>
+            <a:lvl1pPr lvl="0" rtl="0" hangingPunct="0">
+              <a:spcBef>
+                <a:spcPts val="1417"/>
+              </a:spcBef>
+              <a:spcAft>
+                <a:spcPts val="0"/>
+              </a:spcAft>
+              <a:buSzPct val="45000"/>
+              <a:buFont typeface="OpenSymbol"/>
+              <a:buChar char="●"/>
+              <a:tabLst/>
+              <a:defRPr lang="en-US" sz="2400" b="0" i="0" u="none" strike="noStrike" kern="1200" cap="none">
+                <a:ln>
+                  <a:noFill/>
+                </a:ln>
+                <a:highlight>
+                  <a:scrgbClr r="0" g="0" b="0">
+                    <a:alpha val="0"/>
+                  </a:scrgbClr>
+                </a:highlight>
+                <a:latin typeface="URW Bookman" pitchFamily="2"/>
+                <a:ea typeface="Nimbus Sans" pitchFamily="2"/>
+                <a:cs typeface="FreeSans" pitchFamily="2"/>
+              </a:defRPr>
+            </a:lvl1pPr>
+            <a:lvl2pPr lvl="1" rtl="0" hangingPunct="0">
+              <a:spcBef>
+                <a:spcPts val="1417"/>
+              </a:spcBef>
+              <a:spcAft>
+                <a:spcPts val="0"/>
+              </a:spcAft>
+              <a:buSzPct val="75000"/>
+              <a:buFont typeface="OpenSymbol"/>
+              <a:buChar char="–"/>
+              <a:tabLst/>
+              <a:defRPr lang="en-US" sz="2400" b="0" i="0" u="none" strike="noStrike" kern="1200" cap="none">
+                <a:ln>
+                  <a:noFill/>
+                </a:ln>
+                <a:highlight>
+                  <a:scrgbClr r="0" g="0" b="0">
+                    <a:alpha val="0"/>
+                  </a:scrgbClr>
+                </a:highlight>
+                <a:latin typeface="URW Bookman" pitchFamily="2"/>
+                <a:ea typeface="Nimbus Sans" pitchFamily="2"/>
+                <a:cs typeface="FreeSans" pitchFamily="2"/>
+              </a:defRPr>
+            </a:lvl2pPr>
+            <a:lvl3pPr lvl="2" rtl="0" hangingPunct="0">
+              <a:spcBef>
+                <a:spcPts val="1417"/>
+              </a:spcBef>
+              <a:spcAft>
+                <a:spcPts val="0"/>
+              </a:spcAft>
+              <a:buSzPct val="45000"/>
+              <a:buFont typeface="OpenSymbol"/>
+              <a:buChar char="●"/>
+              <a:tabLst/>
+              <a:defRPr lang="en-US" sz="2400" b="0" i="0" u="none" strike="noStrike" kern="1200" cap="none">
+                <a:ln>
+                  <a:noFill/>
+                </a:ln>
+                <a:highlight>
+                  <a:scrgbClr r="0" g="0" b="0">
+                    <a:alpha val="0"/>
+                  </a:scrgbClr>
+                </a:highlight>
+                <a:latin typeface="URW Bookman" pitchFamily="2"/>
+                <a:ea typeface="Nimbus Sans" pitchFamily="2"/>
+                <a:cs typeface="FreeSans" pitchFamily="2"/>
+              </a:defRPr>
+            </a:lvl3pPr>
+            <a:lvl4pPr lvl="3" rtl="0" hangingPunct="0">
+              <a:spcBef>
+                <a:spcPts val="1417"/>
+              </a:spcBef>
+              <a:spcAft>
+                <a:spcPts val="0"/>
+              </a:spcAft>
+              <a:buSzPct val="75000"/>
+              <a:buFont typeface="OpenSymbol"/>
+              <a:buChar char="–"/>
+              <a:tabLst/>
+              <a:defRPr lang="en-US" sz="2400" b="0" i="0" u="none" strike="noStrike" kern="1200" cap="none">
+                <a:ln>
+                  <a:noFill/>
+                </a:ln>
+                <a:highlight>
+                  <a:scrgbClr r="0" g="0" b="0">
+                    <a:alpha val="0"/>
+                  </a:scrgbClr>
+                </a:highlight>
+                <a:latin typeface="URW Bookman" pitchFamily="2"/>
+                <a:ea typeface="Nimbus Sans" pitchFamily="2"/>
+                <a:cs typeface="FreeSans" pitchFamily="2"/>
+              </a:defRPr>
+            </a:lvl4pPr>
+            <a:lvl5pPr lvl="4" rtl="0" hangingPunct="0">
+              <a:spcBef>
+                <a:spcPts val="1417"/>
+              </a:spcBef>
+              <a:spcAft>
+                <a:spcPts val="0"/>
+              </a:spcAft>
+              <a:buSzPct val="45000"/>
+              <a:buFont typeface="OpenSymbol"/>
+              <a:buChar char="●"/>
+              <a:tabLst/>
+              <a:defRPr lang="en-US" sz="2400" b="0" i="0" u="none" strike="noStrike" kern="1200" cap="none">
+                <a:ln>
+                  <a:noFill/>
+                </a:ln>
+                <a:highlight>
+                  <a:scrgbClr r="0" g="0" b="0">
+                    <a:alpha val="0"/>
+                  </a:scrgbClr>
+                </a:highlight>
+                <a:latin typeface="URW Bookman" pitchFamily="2"/>
+                <a:ea typeface="Nimbus Sans" pitchFamily="2"/>
+                <a:cs typeface="FreeSans" pitchFamily="2"/>
+              </a:defRPr>
+            </a:lvl5pPr>
+            <a:lvl6pPr lvl="5" rtl="0" hangingPunct="0">
+              <a:spcBef>
+                <a:spcPts val="1417"/>
+              </a:spcBef>
+              <a:spcAft>
+                <a:spcPts val="0"/>
+              </a:spcAft>
+              <a:buSzPct val="45000"/>
+              <a:buFont typeface="OpenSymbol"/>
+              <a:buChar char="●"/>
+              <a:tabLst/>
+              <a:defRPr lang="en-US" sz="2400" b="0" i="0" u="none" strike="noStrike" kern="1200" cap="none">
+                <a:ln>
+                  <a:noFill/>
+                </a:ln>
+                <a:highlight>
+                  <a:scrgbClr r="0" g="0" b="0">
+                    <a:alpha val="0"/>
+                  </a:scrgbClr>
+                </a:highlight>
+                <a:latin typeface="URW Bookman" pitchFamily="2"/>
+                <a:ea typeface="Nimbus Sans" pitchFamily="2"/>
+                <a:cs typeface="FreeSans" pitchFamily="2"/>
+              </a:defRPr>
+            </a:lvl6pPr>
+            <a:lvl7pPr lvl="6" rtl="0" hangingPunct="0">
+              <a:spcBef>
+                <a:spcPts val="1417"/>
+              </a:spcBef>
+              <a:spcAft>
+                <a:spcPts val="0"/>
+              </a:spcAft>
+              <a:buSzPct val="45000"/>
+              <a:buFont typeface="OpenSymbol"/>
+              <a:buChar char="●"/>
+              <a:tabLst/>
+              <a:defRPr lang="en-US" sz="2400" b="0" i="0" u="none" strike="noStrike" kern="1200" cap="none">
+                <a:ln>
+                  <a:noFill/>
+                </a:ln>
+                <a:highlight>
+                  <a:scrgbClr r="0" g="0" b="0">
+                    <a:alpha val="0"/>
+                  </a:scrgbClr>
+                </a:highlight>
+                <a:latin typeface="URW Bookman" pitchFamily="2"/>
+                <a:ea typeface="Nimbus Sans" pitchFamily="2"/>
+                <a:cs typeface="FreeSans" pitchFamily="2"/>
+              </a:defRPr>
+            </a:lvl7pPr>
+            <a:lvl8pPr marL="3429000" indent="-228600" algn="l" defTabSz="914400" rtl="0" eaLnBrk="1" latinLnBrk="0" hangingPunct="1">
+              <a:lnSpc>
+                <a:spcPct val="90000"/>
+              </a:lnSpc>
+              <a:spcBef>
+                <a:spcPts val="500"/>
+              </a:spcBef>
+              <a:buFont typeface="Arial" panose="020B0604020202020204" pitchFamily="34" charset="0"/>
+              <a:buChar char="•"/>
+              <a:defRPr sz="1800" kern="1200">
+                <a:solidFill>
+                  <a:schemeClr val="tx1"/>
+                </a:solidFill>
+                <a:latin typeface="+mn-lt"/>
+                <a:ea typeface="+mn-ea"/>
+                <a:cs typeface="+mn-cs"/>
+              </a:defRPr>
+            </a:lvl8pPr>
+            <a:lvl9pPr marL="3886200" indent="-228600" algn="l" defTabSz="914400" rtl="0" eaLnBrk="1" latinLnBrk="0" hangingPunct="1">
+              <a:lnSpc>
+                <a:spcPct val="90000"/>
+              </a:lnSpc>
+              <a:spcBef>
+                <a:spcPts val="500"/>
+              </a:spcBef>
+              <a:buFont typeface="Arial" panose="020B0604020202020204" pitchFamily="34" charset="0"/>
+              <a:buChar char="•"/>
+              <a:defRPr sz="1800" kern="1200">
+                <a:solidFill>
+                  <a:schemeClr val="tx1"/>
+                </a:solidFill>
+                <a:latin typeface="+mn-lt"/>
+                <a:ea typeface="+mn-ea"/>
+                <a:cs typeface="+mn-cs"/>
+              </a:defRPr>
+            </a:lvl9pPr>
+          </a:lstStyle>
+          <a:p>
+            <a:pPr marL="342900" indent="-342900"/>
+            <a:r>
+              <a:rPr lang="en-US" dirty="0">
+                <a:solidFill>
+                  <a:schemeClr val="bg1"/>
+                </a:solidFill>
+              </a:rPr>
+              <a:t>Initial analysis was built on a few key assumptions. </a:t>
+            </a:r>
+          </a:p>
+          <a:p>
+            <a:pPr marL="342900" indent="-342900"/>
+            <a:r>
+              <a:rPr lang="en-US" dirty="0">
+                <a:solidFill>
+                  <a:schemeClr val="bg1"/>
+                </a:solidFill>
+              </a:rPr>
+              <a:t>First, not all the constants had an effect on the model outputs. </a:t>
+            </a:r>
+          </a:p>
+          <a:p>
+            <a:pPr marL="342900" indent="-342900"/>
+            <a:r>
+              <a:rPr lang="en-US" dirty="0">
+                <a:solidFill>
+                  <a:schemeClr val="bg1"/>
+                </a:solidFill>
+              </a:rPr>
+              <a:t>Second, model constants did not influence what values other model constants could take.</a:t>
+            </a:r>
+          </a:p>
+          <a:p>
+            <a:pPr marL="342900" indent="-342900"/>
+            <a:r>
+              <a:rPr lang="en-US" dirty="0">
+                <a:solidFill>
+                  <a:schemeClr val="bg1"/>
+                </a:solidFill>
+              </a:rPr>
+              <a:t>Third, model constants’ effects on model outputs aren’t determined by preconditions being met. </a:t>
+            </a:r>
+          </a:p>
+          <a:p>
+            <a:pPr marL="342900" indent="-342900"/>
+            <a:r>
+              <a:rPr lang="en-US" dirty="0">
+                <a:solidFill>
+                  <a:schemeClr val="bg1"/>
+                </a:solidFill>
+              </a:rPr>
+              <a:t>These assumptions underlie the initial results from the change detection analysis plugin. </a:t>
+            </a:r>
+          </a:p>
+        </p:txBody>
+      </p:sp>
+    </p:spTree>
+    <p:extLst>
+      <p:ext uri="{BB962C8B-B14F-4D97-AF65-F5344CB8AC3E}">
+        <p14:creationId xmlns:p14="http://schemas.microsoft.com/office/powerpoint/2010/main" val="2898562490"/>
+      </p:ext>
+    </p:extLst>
+  </p:cSld>
+  <p:clrMapOvr>
+    <a:masterClrMapping/>
+  </p:clrMapOvr>
+</p:sld>
+</file>
+
+<file path=ppt/slides/slide17.xml><?xml version="1.0" encoding="utf-8"?>
+<p:sld xmlns:a="http://schemas.openxmlformats.org/drawingml/2006/main" xmlns:r="http://schemas.openxmlformats.org/officeDocument/2006/relationships" xmlns:p="http://schemas.openxmlformats.org/presentationml/2006/main">
+  <p:cSld>
+    <p:spTree>
+      <p:nvGrpSpPr>
+        <p:cNvPr id="1" name="">
+          <a:extLst>
+            <a:ext uri="{FF2B5EF4-FFF2-40B4-BE49-F238E27FC236}">
+              <a16:creationId xmlns:a16="http://schemas.microsoft.com/office/drawing/2014/main" id="{6DE4F59C-6FFF-C3C6-285D-89E37A94AAE8}"/>
+            </a:ext>
+          </a:extLst>
+        </p:cNvPr>
+        <p:cNvGrpSpPr/>
+        <p:nvPr/>
+      </p:nvGrpSpPr>
+      <p:grpSpPr>
+        <a:xfrm>
+          <a:off x="0" y="0"/>
+          <a:ext cx="0" cy="0"/>
+          <a:chOff x="0" y="0"/>
+          <a:chExt cx="0" cy="0"/>
+        </a:xfrm>
+      </p:grpSpPr>
+      <p:sp>
+        <p:nvSpPr>
+          <p:cNvPr id="2" name="Title 1">
+            <a:extLst>
+              <a:ext uri="{FF2B5EF4-FFF2-40B4-BE49-F238E27FC236}">
+                <a16:creationId xmlns:a16="http://schemas.microsoft.com/office/drawing/2014/main" id="{95792ACF-8B91-65F3-C165-44BD25127222}"/>
+              </a:ext>
+            </a:extLst>
+          </p:cNvPr>
+          <p:cNvSpPr txBox="1">
+            <a:spLocks/>
+          </p:cNvSpPr>
+          <p:nvPr/>
+        </p:nvSpPr>
+        <p:spPr>
+          <a:xfrm>
+            <a:off x="503999" y="422301"/>
+            <a:ext cx="9071640" cy="553998"/>
+          </a:xfrm>
+          <a:prstGeom prst="rect">
+            <a:avLst/>
+          </a:prstGeom>
+          <a:noFill/>
+          <a:ln>
+            <a:noFill/>
+          </a:ln>
+        </p:spPr>
+        <p:txBody>
+          <a:bodyPr vert="horz" lIns="0" tIns="0" rIns="0" bIns="0" anchor="ctr">
+            <a:spAutoFit/>
+          </a:bodyPr>
+          <a:lstStyle>
+            <a:lvl1pPr lvl="0" algn="ctr" rtl="0" hangingPunct="0">
+              <a:buNone/>
+              <a:tabLst/>
+              <a:defRPr lang="en-US" sz="3600" b="0" i="0" u="none" strike="noStrike" kern="1200" cap="none">
+                <a:ln>
+                  <a:noFill/>
+                </a:ln>
+                <a:highlight>
+                  <a:scrgbClr r="0" g="0" b="0">
+                    <a:alpha val="0"/>
+                  </a:scrgbClr>
+                </a:highlight>
+                <a:latin typeface="URW Bookman" pitchFamily="2"/>
+                <a:ea typeface="Nimbus Sans" pitchFamily="2"/>
+                <a:cs typeface="FreeSans" pitchFamily="2"/>
+              </a:defRPr>
+            </a:lvl1pPr>
+          </a:lstStyle>
+          <a:p>
+            <a:r>
+              <a:rPr lang="en-US" dirty="0">
+                <a:solidFill>
+                  <a:schemeClr val="bg1"/>
+                </a:solidFill>
+              </a:rPr>
+              <a:t>Rationale</a:t>
+            </a:r>
+          </a:p>
+        </p:txBody>
+      </p:sp>
+      <p:sp>
+        <p:nvSpPr>
+          <p:cNvPr id="3" name="Text Placeholder 2">
+            <a:extLst>
+              <a:ext uri="{FF2B5EF4-FFF2-40B4-BE49-F238E27FC236}">
+                <a16:creationId xmlns:a16="http://schemas.microsoft.com/office/drawing/2014/main" id="{4C9AF8C3-95D2-3D5A-AB6D-61F870774A13}"/>
+              </a:ext>
+            </a:extLst>
+          </p:cNvPr>
+          <p:cNvSpPr txBox="1">
+            <a:spLocks/>
+          </p:cNvSpPr>
+          <p:nvPr/>
+        </p:nvSpPr>
+        <p:spPr>
+          <a:xfrm>
+            <a:off x="503999" y="1326600"/>
+            <a:ext cx="9071640" cy="4022640"/>
+          </a:xfrm>
+          <a:prstGeom prst="rect">
+            <a:avLst/>
+          </a:prstGeom>
+          <a:noFill/>
+          <a:ln>
+            <a:noFill/>
+          </a:ln>
+        </p:spPr>
+        <p:txBody>
+          <a:bodyPr vert="horz" lIns="0" tIns="0" rIns="0" bIns="0">
+            <a:normAutofit/>
+          </a:bodyPr>
+          <a:lstStyle>
+            <a:lvl1pPr lvl="0" rtl="0" hangingPunct="0">
+              <a:spcBef>
+                <a:spcPts val="1417"/>
+              </a:spcBef>
+              <a:spcAft>
+                <a:spcPts val="0"/>
+              </a:spcAft>
+              <a:buSzPct val="45000"/>
+              <a:buFont typeface="OpenSymbol"/>
+              <a:buChar char="●"/>
+              <a:tabLst/>
+              <a:defRPr lang="en-US" sz="2400" b="0" i="0" u="none" strike="noStrike" kern="1200" cap="none">
+                <a:ln>
+                  <a:noFill/>
+                </a:ln>
+                <a:highlight>
+                  <a:scrgbClr r="0" g="0" b="0">
+                    <a:alpha val="0"/>
+                  </a:scrgbClr>
+                </a:highlight>
+                <a:latin typeface="URW Bookman" pitchFamily="2"/>
+                <a:ea typeface="Nimbus Sans" pitchFamily="2"/>
+                <a:cs typeface="FreeSans" pitchFamily="2"/>
+              </a:defRPr>
+            </a:lvl1pPr>
+            <a:lvl2pPr lvl="1" rtl="0" hangingPunct="0">
+              <a:spcBef>
+                <a:spcPts val="1417"/>
+              </a:spcBef>
+              <a:spcAft>
+                <a:spcPts val="0"/>
+              </a:spcAft>
+              <a:buSzPct val="75000"/>
+              <a:buFont typeface="OpenSymbol"/>
+              <a:buChar char="–"/>
+              <a:tabLst/>
+              <a:defRPr lang="en-US" sz="2400" b="0" i="0" u="none" strike="noStrike" kern="1200" cap="none">
+                <a:ln>
+                  <a:noFill/>
+                </a:ln>
+                <a:highlight>
+                  <a:scrgbClr r="0" g="0" b="0">
+                    <a:alpha val="0"/>
+                  </a:scrgbClr>
+                </a:highlight>
+                <a:latin typeface="URW Bookman" pitchFamily="2"/>
+                <a:ea typeface="Nimbus Sans" pitchFamily="2"/>
+                <a:cs typeface="FreeSans" pitchFamily="2"/>
+              </a:defRPr>
+            </a:lvl2pPr>
+            <a:lvl3pPr lvl="2" rtl="0" hangingPunct="0">
+              <a:spcBef>
+                <a:spcPts val="1417"/>
+              </a:spcBef>
+              <a:spcAft>
+                <a:spcPts val="0"/>
+              </a:spcAft>
+              <a:buSzPct val="45000"/>
+              <a:buFont typeface="OpenSymbol"/>
+              <a:buChar char="●"/>
+              <a:tabLst/>
+              <a:defRPr lang="en-US" sz="2400" b="0" i="0" u="none" strike="noStrike" kern="1200" cap="none">
+                <a:ln>
+                  <a:noFill/>
+                </a:ln>
+                <a:highlight>
+                  <a:scrgbClr r="0" g="0" b="0">
+                    <a:alpha val="0"/>
+                  </a:scrgbClr>
+                </a:highlight>
+                <a:latin typeface="URW Bookman" pitchFamily="2"/>
+                <a:ea typeface="Nimbus Sans" pitchFamily="2"/>
+                <a:cs typeface="FreeSans" pitchFamily="2"/>
+              </a:defRPr>
+            </a:lvl3pPr>
+            <a:lvl4pPr lvl="3" rtl="0" hangingPunct="0">
+              <a:spcBef>
+                <a:spcPts val="1417"/>
+              </a:spcBef>
+              <a:spcAft>
+                <a:spcPts val="0"/>
+              </a:spcAft>
+              <a:buSzPct val="75000"/>
+              <a:buFont typeface="OpenSymbol"/>
+              <a:buChar char="–"/>
+              <a:tabLst/>
+              <a:defRPr lang="en-US" sz="2400" b="0" i="0" u="none" strike="noStrike" kern="1200" cap="none">
+                <a:ln>
+                  <a:noFill/>
+                </a:ln>
+                <a:highlight>
+                  <a:scrgbClr r="0" g="0" b="0">
+                    <a:alpha val="0"/>
+                  </a:scrgbClr>
+                </a:highlight>
+                <a:latin typeface="URW Bookman" pitchFamily="2"/>
+                <a:ea typeface="Nimbus Sans" pitchFamily="2"/>
+                <a:cs typeface="FreeSans" pitchFamily="2"/>
+              </a:defRPr>
+            </a:lvl4pPr>
+            <a:lvl5pPr lvl="4" rtl="0" hangingPunct="0">
+              <a:spcBef>
+                <a:spcPts val="1417"/>
+              </a:spcBef>
+              <a:spcAft>
+                <a:spcPts val="0"/>
+              </a:spcAft>
+              <a:buSzPct val="45000"/>
+              <a:buFont typeface="OpenSymbol"/>
+              <a:buChar char="●"/>
+              <a:tabLst/>
+              <a:defRPr lang="en-US" sz="2400" b="0" i="0" u="none" strike="noStrike" kern="1200" cap="none">
+                <a:ln>
+                  <a:noFill/>
+                </a:ln>
+                <a:highlight>
+                  <a:scrgbClr r="0" g="0" b="0">
+                    <a:alpha val="0"/>
+                  </a:scrgbClr>
+                </a:highlight>
+                <a:latin typeface="URW Bookman" pitchFamily="2"/>
+                <a:ea typeface="Nimbus Sans" pitchFamily="2"/>
+                <a:cs typeface="FreeSans" pitchFamily="2"/>
+              </a:defRPr>
+            </a:lvl5pPr>
+            <a:lvl6pPr lvl="5" rtl="0" hangingPunct="0">
+              <a:spcBef>
+                <a:spcPts val="1417"/>
+              </a:spcBef>
+              <a:spcAft>
+                <a:spcPts val="0"/>
+              </a:spcAft>
+              <a:buSzPct val="45000"/>
+              <a:buFont typeface="OpenSymbol"/>
+              <a:buChar char="●"/>
+              <a:tabLst/>
+              <a:defRPr lang="en-US" sz="2400" b="0" i="0" u="none" strike="noStrike" kern="1200" cap="none">
+                <a:ln>
+                  <a:noFill/>
+                </a:ln>
+                <a:highlight>
+                  <a:scrgbClr r="0" g="0" b="0">
+                    <a:alpha val="0"/>
+                  </a:scrgbClr>
+                </a:highlight>
+                <a:latin typeface="URW Bookman" pitchFamily="2"/>
+                <a:ea typeface="Nimbus Sans" pitchFamily="2"/>
+                <a:cs typeface="FreeSans" pitchFamily="2"/>
+              </a:defRPr>
+            </a:lvl6pPr>
+            <a:lvl7pPr lvl="6" rtl="0" hangingPunct="0">
+              <a:spcBef>
+                <a:spcPts val="1417"/>
+              </a:spcBef>
+              <a:spcAft>
+                <a:spcPts val="0"/>
+              </a:spcAft>
+              <a:buSzPct val="45000"/>
+              <a:buFont typeface="OpenSymbol"/>
+              <a:buChar char="●"/>
+              <a:tabLst/>
+              <a:defRPr lang="en-US" sz="2400" b="0" i="0" u="none" strike="noStrike" kern="1200" cap="none">
+                <a:ln>
+                  <a:noFill/>
+                </a:ln>
+                <a:highlight>
+                  <a:scrgbClr r="0" g="0" b="0">
+                    <a:alpha val="0"/>
+                  </a:scrgbClr>
+                </a:highlight>
+                <a:latin typeface="URW Bookman" pitchFamily="2"/>
+                <a:ea typeface="Nimbus Sans" pitchFamily="2"/>
+                <a:cs typeface="FreeSans" pitchFamily="2"/>
+              </a:defRPr>
+            </a:lvl7pPr>
+            <a:lvl8pPr marL="3429000" indent="-228600" algn="l" defTabSz="914400" rtl="0" eaLnBrk="1" latinLnBrk="0" hangingPunct="1">
+              <a:lnSpc>
+                <a:spcPct val="90000"/>
+              </a:lnSpc>
+              <a:spcBef>
+                <a:spcPts val="500"/>
+              </a:spcBef>
+              <a:buFont typeface="Arial" panose="020B0604020202020204" pitchFamily="34" charset="0"/>
+              <a:buChar char="•"/>
+              <a:defRPr sz="1800" kern="1200">
+                <a:solidFill>
+                  <a:schemeClr val="tx1"/>
+                </a:solidFill>
+                <a:latin typeface="+mn-lt"/>
+                <a:ea typeface="+mn-ea"/>
+                <a:cs typeface="+mn-cs"/>
+              </a:defRPr>
+            </a:lvl8pPr>
+            <a:lvl9pPr marL="3886200" indent="-228600" algn="l" defTabSz="914400" rtl="0" eaLnBrk="1" latinLnBrk="0" hangingPunct="1">
+              <a:lnSpc>
+                <a:spcPct val="90000"/>
+              </a:lnSpc>
+              <a:spcBef>
+                <a:spcPts val="500"/>
+              </a:spcBef>
+              <a:buFont typeface="Arial" panose="020B0604020202020204" pitchFamily="34" charset="0"/>
+              <a:buChar char="•"/>
+              <a:defRPr sz="1800" kern="1200">
+                <a:solidFill>
+                  <a:schemeClr val="tx1"/>
+                </a:solidFill>
+                <a:latin typeface="+mn-lt"/>
+                <a:ea typeface="+mn-ea"/>
+                <a:cs typeface="+mn-cs"/>
+              </a:defRPr>
+            </a:lvl9pPr>
+          </a:lstStyle>
+          <a:p>
+            <a:pPr marL="342900" indent="-342900"/>
+            <a:r>
+              <a:rPr lang="en-US" dirty="0">
+                <a:solidFill>
+                  <a:schemeClr val="bg1"/>
+                </a:solidFill>
+              </a:rPr>
+              <a:t>To determine which model constants affect which model outputs, 11 cases were created for every model constant, where all model constants were held at their default values except the one which was being tested, which was linearly interpolated to get 11 values evenly spread across its valid range. </a:t>
+            </a:r>
+          </a:p>
+          <a:p>
+            <a:pPr marL="342900" indent="-342900"/>
+            <a:r>
+              <a:rPr lang="en-US" dirty="0">
+                <a:solidFill>
+                  <a:schemeClr val="bg1"/>
+                </a:solidFill>
+              </a:rPr>
+              <a:t>This assumed that each model constant’s values are independent of each other and that no preconditions have to be met for a constant to have an effect on model outputs. </a:t>
             </a:r>
           </a:p>
         </p:txBody>
@@ -8084,6 +8176,403 @@
     <p:extLst>
       <p:ext uri="{BB962C8B-B14F-4D97-AF65-F5344CB8AC3E}">
         <p14:creationId xmlns:p14="http://schemas.microsoft.com/office/powerpoint/2010/main" val="1891868766"/>
+      </p:ext>
+    </p:extLst>
+  </p:cSld>
+  <p:clrMapOvr>
+    <a:masterClrMapping/>
+  </p:clrMapOvr>
+</p:sld>
+</file>
+
+<file path=ppt/slides/slide18.xml><?xml version="1.0" encoding="utf-8"?>
+<p:sld xmlns:a="http://schemas.openxmlformats.org/drawingml/2006/main" xmlns:r="http://schemas.openxmlformats.org/officeDocument/2006/relationships" xmlns:p="http://schemas.openxmlformats.org/presentationml/2006/main">
+  <p:cSld>
+    <p:spTree>
+      <p:nvGrpSpPr>
+        <p:cNvPr id="1" name="">
+          <a:extLst>
+            <a:ext uri="{FF2B5EF4-FFF2-40B4-BE49-F238E27FC236}">
+              <a16:creationId xmlns:a16="http://schemas.microsoft.com/office/drawing/2014/main" id="{ABD097B4-55B8-5CCF-9FB2-54192CDBA376}"/>
+            </a:ext>
+          </a:extLst>
+        </p:cNvPr>
+        <p:cNvGrpSpPr/>
+        <p:nvPr/>
+      </p:nvGrpSpPr>
+      <p:grpSpPr>
+        <a:xfrm>
+          <a:off x="0" y="0"/>
+          <a:ext cx="0" cy="0"/>
+          <a:chOff x="0" y="0"/>
+          <a:chExt cx="0" cy="0"/>
+        </a:xfrm>
+      </p:grpSpPr>
+      <p:sp>
+        <p:nvSpPr>
+          <p:cNvPr id="2" name="Title 1">
+            <a:extLst>
+              <a:ext uri="{FF2B5EF4-FFF2-40B4-BE49-F238E27FC236}">
+                <a16:creationId xmlns:a16="http://schemas.microsoft.com/office/drawing/2014/main" id="{F4A5592A-4B1F-9A54-FA90-7679C9AB1E1F}"/>
+              </a:ext>
+            </a:extLst>
+          </p:cNvPr>
+          <p:cNvSpPr txBox="1">
+            <a:spLocks noGrp="1"/>
+          </p:cNvSpPr>
+          <p:nvPr>
+            <p:ph type="title" idx="4294967295"/>
+          </p:nvPr>
+        </p:nvSpPr>
+        <p:spPr>
+          <a:xfrm>
+            <a:off x="0" y="180883"/>
+            <a:ext cx="10080000" cy="553998"/>
+          </a:xfrm>
+        </p:spPr>
+        <p:txBody>
+          <a:bodyPr>
+            <a:spAutoFit/>
+          </a:bodyPr>
+          <a:lstStyle/>
+          <a:p>
+            <a:pPr lvl="0"/>
+            <a:r>
+              <a:rPr lang="en-US" dirty="0">
+                <a:solidFill>
+                  <a:schemeClr val="bg1"/>
+                </a:solidFill>
+              </a:rPr>
+              <a:t>Preliminary Results</a:t>
+            </a:r>
+          </a:p>
+        </p:txBody>
+      </p:sp>
+      <p:grpSp>
+        <p:nvGrpSpPr>
+          <p:cNvPr id="10" name="Group 9">
+            <a:extLst>
+              <a:ext uri="{FF2B5EF4-FFF2-40B4-BE49-F238E27FC236}">
+                <a16:creationId xmlns:a16="http://schemas.microsoft.com/office/drawing/2014/main" id="{1F3D43E0-C6FA-BF34-85B0-F49C4E479482}"/>
+              </a:ext>
+            </a:extLst>
+          </p:cNvPr>
+          <p:cNvGrpSpPr>
+            <a:grpSpLocks noChangeAspect="1"/>
+          </p:cNvGrpSpPr>
+          <p:nvPr/>
+        </p:nvGrpSpPr>
+        <p:grpSpPr>
+          <a:xfrm>
+            <a:off x="2107106" y="976299"/>
+            <a:ext cx="5635901" cy="4661469"/>
+            <a:chOff x="2865704" y="1174750"/>
+            <a:chExt cx="5435600" cy="4495799"/>
+          </a:xfrm>
+        </p:grpSpPr>
+        <p:sp>
+          <p:nvSpPr>
+            <p:cNvPr id="9" name="Rectangle 8">
+              <a:extLst>
+                <a:ext uri="{FF2B5EF4-FFF2-40B4-BE49-F238E27FC236}">
+                  <a16:creationId xmlns:a16="http://schemas.microsoft.com/office/drawing/2014/main" id="{0DE7C1EF-3A48-F5C4-8FCB-54C1337FDD5B}"/>
+                </a:ext>
+              </a:extLst>
+            </p:cNvPr>
+            <p:cNvSpPr>
+              <a:spLocks/>
+            </p:cNvSpPr>
+            <p:nvPr/>
+          </p:nvSpPr>
+          <p:spPr>
+            <a:xfrm>
+              <a:off x="2865704" y="1174750"/>
+              <a:ext cx="5435600" cy="4495799"/>
+            </a:xfrm>
+            <a:prstGeom prst="rect">
+              <a:avLst/>
+            </a:prstGeom>
+            <a:solidFill>
+              <a:schemeClr val="bg1"/>
+            </a:solidFill>
+          </p:spPr>
+          <p:style>
+            <a:lnRef idx="2">
+              <a:schemeClr val="accent1">
+                <a:shade val="15000"/>
+              </a:schemeClr>
+            </a:lnRef>
+            <a:fillRef idx="1">
+              <a:schemeClr val="accent1"/>
+            </a:fillRef>
+            <a:effectRef idx="0">
+              <a:schemeClr val="accent1"/>
+            </a:effectRef>
+            <a:fontRef idx="minor">
+              <a:schemeClr val="lt1"/>
+            </a:fontRef>
+          </p:style>
+          <p:txBody>
+            <a:bodyPr rtlCol="0" anchor="ctr"/>
+            <a:lstStyle/>
+            <a:p>
+              <a:pPr algn="ctr"/>
+              <a:endParaRPr lang="en-US"/>
+            </a:p>
+          </p:txBody>
+        </p:sp>
+        <p:pic>
+          <p:nvPicPr>
+            <p:cNvPr id="7" name="Picture 6">
+              <a:extLst>
+                <a:ext uri="{FF2B5EF4-FFF2-40B4-BE49-F238E27FC236}">
+                  <a16:creationId xmlns:a16="http://schemas.microsoft.com/office/drawing/2014/main" id="{0D28EDBF-6674-8F29-0F89-F521FFA3B182}"/>
+                </a:ext>
+              </a:extLst>
+            </p:cNvPr>
+            <p:cNvPicPr>
+              <a:picLocks noChangeAspect="1"/>
+            </p:cNvPicPr>
+            <p:nvPr/>
+          </p:nvPicPr>
+          <p:blipFill>
+            <a:blip r:embed="rId3"/>
+            <a:stretch>
+              <a:fillRect/>
+            </a:stretch>
+          </p:blipFill>
+          <p:spPr>
+            <a:xfrm>
+              <a:off x="2948683" y="1243382"/>
+              <a:ext cx="5352620" cy="4427167"/>
+            </a:xfrm>
+            <a:prstGeom prst="rect">
+              <a:avLst/>
+            </a:prstGeom>
+          </p:spPr>
+        </p:pic>
+      </p:grpSp>
+      <p:grpSp>
+        <p:nvGrpSpPr>
+          <p:cNvPr id="15" name="Group 14">
+            <a:extLst>
+              <a:ext uri="{FF2B5EF4-FFF2-40B4-BE49-F238E27FC236}">
+                <a16:creationId xmlns:a16="http://schemas.microsoft.com/office/drawing/2014/main" id="{50A0C997-0F63-EB37-9086-C20FB2B6D66F}"/>
+              </a:ext>
+            </a:extLst>
+          </p:cNvPr>
+          <p:cNvGrpSpPr/>
+          <p:nvPr/>
+        </p:nvGrpSpPr>
+        <p:grpSpPr>
+          <a:xfrm>
+            <a:off x="7348452" y="-25579"/>
+            <a:ext cx="2731550" cy="5696128"/>
+            <a:chOff x="7348452" y="-25579"/>
+            <a:chExt cx="2731550" cy="5696128"/>
+          </a:xfrm>
+        </p:grpSpPr>
+        <p:pic>
+          <p:nvPicPr>
+            <p:cNvPr id="5" name="Picture 4">
+              <a:extLst>
+                <a:ext uri="{FF2B5EF4-FFF2-40B4-BE49-F238E27FC236}">
+                  <a16:creationId xmlns:a16="http://schemas.microsoft.com/office/drawing/2014/main" id="{C3D924F0-237C-762C-6BA6-DCBEB54BFB15}"/>
+                </a:ext>
+              </a:extLst>
+            </p:cNvPr>
+            <p:cNvPicPr>
+              <a:picLocks noChangeAspect="1"/>
+            </p:cNvPicPr>
+            <p:nvPr/>
+          </p:nvPicPr>
+          <p:blipFill>
+            <a:blip r:embed="rId4"/>
+            <a:stretch>
+              <a:fillRect/>
+            </a:stretch>
+          </p:blipFill>
+          <p:spPr>
+            <a:xfrm>
+              <a:off x="8059448" y="897750"/>
+              <a:ext cx="1497623" cy="4772799"/>
+            </a:xfrm>
+            <a:prstGeom prst="rect">
+              <a:avLst/>
+            </a:prstGeom>
+          </p:spPr>
+        </p:pic>
+        <p:sp>
+          <p:nvSpPr>
+            <p:cNvPr id="8" name="TextBox 7">
+              <a:extLst>
+                <a:ext uri="{FF2B5EF4-FFF2-40B4-BE49-F238E27FC236}">
+                  <a16:creationId xmlns:a16="http://schemas.microsoft.com/office/drawing/2014/main" id="{AADE1AF1-666D-5B1B-9024-1D4CFA089FD8}"/>
+                </a:ext>
+              </a:extLst>
+            </p:cNvPr>
+            <p:cNvSpPr txBox="1"/>
+            <p:nvPr/>
+          </p:nvSpPr>
+          <p:spPr>
+            <a:xfrm>
+              <a:off x="7348452" y="-25579"/>
+              <a:ext cx="2731550" cy="923330"/>
+            </a:xfrm>
+            <a:prstGeom prst="rect">
+              <a:avLst/>
+            </a:prstGeom>
+            <a:noFill/>
+          </p:spPr>
+          <p:txBody>
+            <a:bodyPr wrap="square" rtlCol="0">
+              <a:spAutoFit/>
+            </a:bodyPr>
+            <a:lstStyle/>
+            <a:p>
+              <a:pPr algn="ctr"/>
+              <a:r>
+                <a:rPr lang="en-US" dirty="0">
+                  <a:solidFill>
+                    <a:schemeClr val="bg1"/>
+                  </a:solidFill>
+                </a:rPr>
+                <a:t>Model outputs that didn’t change in response to any model constants</a:t>
+              </a:r>
+            </a:p>
+          </p:txBody>
+        </p:sp>
+      </p:grpSp>
+      <p:grpSp>
+        <p:nvGrpSpPr>
+          <p:cNvPr id="14" name="Group 13">
+            <a:extLst>
+              <a:ext uri="{FF2B5EF4-FFF2-40B4-BE49-F238E27FC236}">
+                <a16:creationId xmlns:a16="http://schemas.microsoft.com/office/drawing/2014/main" id="{9A12C58B-D1FE-9F56-5D20-93E453989754}"/>
+              </a:ext>
+            </a:extLst>
+          </p:cNvPr>
+          <p:cNvGrpSpPr/>
+          <p:nvPr/>
+        </p:nvGrpSpPr>
+        <p:grpSpPr>
+          <a:xfrm>
+            <a:off x="-3454" y="32782"/>
+            <a:ext cx="2268506" cy="2786181"/>
+            <a:chOff x="-36613" y="150059"/>
+            <a:chExt cx="2268506" cy="2786181"/>
+          </a:xfrm>
+        </p:grpSpPr>
+        <p:pic>
+          <p:nvPicPr>
+            <p:cNvPr id="12" name="Picture 11">
+              <a:extLst>
+                <a:ext uri="{FF2B5EF4-FFF2-40B4-BE49-F238E27FC236}">
+                  <a16:creationId xmlns:a16="http://schemas.microsoft.com/office/drawing/2014/main" id="{4795AC22-3BE2-27FC-F54A-668838B3FD14}"/>
+                </a:ext>
+              </a:extLst>
+            </p:cNvPr>
+            <p:cNvPicPr>
+              <a:picLocks noChangeAspect="1"/>
+            </p:cNvPicPr>
+            <p:nvPr/>
+          </p:nvPicPr>
+          <p:blipFill>
+            <a:blip r:embed="rId5"/>
+            <a:stretch>
+              <a:fillRect/>
+            </a:stretch>
+          </p:blipFill>
+          <p:spPr>
+            <a:xfrm>
+              <a:off x="606525" y="1073389"/>
+              <a:ext cx="982231" cy="1862851"/>
+            </a:xfrm>
+            <a:prstGeom prst="rect">
+              <a:avLst/>
+            </a:prstGeom>
+          </p:spPr>
+        </p:pic>
+        <p:sp>
+          <p:nvSpPr>
+            <p:cNvPr id="13" name="TextBox 12">
+              <a:extLst>
+                <a:ext uri="{FF2B5EF4-FFF2-40B4-BE49-F238E27FC236}">
+                  <a16:creationId xmlns:a16="http://schemas.microsoft.com/office/drawing/2014/main" id="{7097E64F-55C0-67C9-2130-B5C9BEC26953}"/>
+                </a:ext>
+              </a:extLst>
+            </p:cNvPr>
+            <p:cNvSpPr txBox="1"/>
+            <p:nvPr/>
+          </p:nvSpPr>
+          <p:spPr>
+            <a:xfrm>
+              <a:off x="-36613" y="150059"/>
+              <a:ext cx="2268506" cy="923330"/>
+            </a:xfrm>
+            <a:prstGeom prst="rect">
+              <a:avLst/>
+            </a:prstGeom>
+            <a:noFill/>
+          </p:spPr>
+          <p:txBody>
+            <a:bodyPr wrap="square" rtlCol="0">
+              <a:spAutoFit/>
+            </a:bodyPr>
+            <a:lstStyle/>
+            <a:p>
+              <a:pPr algn="ctr"/>
+              <a:r>
+                <a:rPr lang="en-US" dirty="0">
+                  <a:solidFill>
+                    <a:schemeClr val="bg1"/>
+                  </a:solidFill>
+                </a:rPr>
+                <a:t>Model constants that had no effect on any model output</a:t>
+              </a:r>
+            </a:p>
+          </p:txBody>
+        </p:sp>
+      </p:grpSp>
+      <p:sp>
+        <p:nvSpPr>
+          <p:cNvPr id="16" name="TextBox 15">
+            <a:extLst>
+              <a:ext uri="{FF2B5EF4-FFF2-40B4-BE49-F238E27FC236}">
+                <a16:creationId xmlns:a16="http://schemas.microsoft.com/office/drawing/2014/main" id="{93E6A676-DFFD-7CB9-1E8F-7B8B65E065F3}"/>
+              </a:ext>
+            </a:extLst>
+          </p:cNvPr>
+          <p:cNvSpPr txBox="1"/>
+          <p:nvPr/>
+        </p:nvSpPr>
+        <p:spPr>
+          <a:xfrm>
+            <a:off x="2293065" y="976299"/>
+            <a:ext cx="2431335" cy="830997"/>
+          </a:xfrm>
+          <a:prstGeom prst="rect">
+            <a:avLst/>
+          </a:prstGeom>
+          <a:noFill/>
+        </p:spPr>
+        <p:txBody>
+          <a:bodyPr wrap="square" rtlCol="0">
+            <a:spAutoFit/>
+          </a:bodyPr>
+          <a:lstStyle/>
+          <a:p>
+            <a:r>
+              <a:rPr lang="en-US" sz="1600" dirty="0"/>
+              <a:t>Model constants (columns) and the model outputs (rows) they affect</a:t>
+            </a:r>
+          </a:p>
+        </p:txBody>
+      </p:sp>
+    </p:spTree>
+    <p:extLst>
+      <p:ext uri="{BB962C8B-B14F-4D97-AF65-F5344CB8AC3E}">
+        <p14:creationId xmlns:p14="http://schemas.microsoft.com/office/powerpoint/2010/main" val="4053683747"/>
       </p:ext>
     </p:extLst>
   </p:cSld>
@@ -8437,6 +8926,8 @@
                 <a:solidFill>
                   <a:schemeClr val="bg1"/>
                 </a:solidFill>
+                <a:latin typeface="Courier New" panose="02070309020205020404" pitchFamily="49" charset="0"/>
+                <a:cs typeface="Courier New" panose="02070309020205020404" pitchFamily="49" charset="0"/>
               </a:rPr>
               <a:t>LakeTemperature</a:t>
             </a:r>
@@ -8446,7 +8937,7 @@
                   <a:schemeClr val="bg1"/>
                 </a:solidFill>
               </a:rPr>
-              <a:t> source code, these assumptions turned out to be wrong, meaning the results don’t include all of model outputs that the model constants effect. </a:t>
+              <a:t> source code, these assumptions turned out to be wrong, meaning the results don’t include all of model outputs that the model constants affect. </a:t>
             </a:r>
           </a:p>
           <a:p>
@@ -8468,7 +8959,7 @@
                   <a:schemeClr val="bg1"/>
                 </a:solidFill>
               </a:rPr>
-              <a:t>It led to the discovery that certain constants only have an effect on the output under certain conditions.</a:t>
+              <a:t>It led to the discovery that certain constants only have an effect on the outputs under certain conditions.</a:t>
             </a:r>
           </a:p>
           <a:p>
@@ -8519,7 +9010,7 @@
           <p:cNvPr id="2" name="Title 1">
             <a:extLst>
               <a:ext uri="{FF2B5EF4-FFF2-40B4-BE49-F238E27FC236}">
-                <a16:creationId xmlns:a16="http://schemas.microsoft.com/office/drawing/2014/main" id="{B8086899-15DA-5703-76E2-51D23E842D09}"/>
+                <a16:creationId xmlns:a16="http://schemas.microsoft.com/office/drawing/2014/main" id="{79070A95-7E8C-0828-88E3-001BBB4E331D}"/>
               </a:ext>
             </a:extLst>
           </p:cNvPr>
@@ -8571,7 +9062,7 @@
                   <a:schemeClr val="bg1"/>
                 </a:solidFill>
               </a:rPr>
-              <a:t>Problem of Analysis</a:t>
+              <a:t>Change-Impact Analysis</a:t>
             </a:r>
           </a:p>
         </p:txBody>
@@ -8581,7 +9072,7 @@
           <p:cNvPr id="3" name="Text Placeholder 2">
             <a:extLst>
               <a:ext uri="{FF2B5EF4-FFF2-40B4-BE49-F238E27FC236}">
-                <a16:creationId xmlns:a16="http://schemas.microsoft.com/office/drawing/2014/main" id="{0CD48D6A-4BDE-1B52-9184-3845B1664AB8}"/>
+                <a16:creationId xmlns:a16="http://schemas.microsoft.com/office/drawing/2014/main" id="{87EC0F28-AC2C-142C-EF6A-7F163D42DEC9}"/>
               </a:ext>
             </a:extLst>
           </p:cNvPr>
@@ -8592,8 +9083,8 @@
         </p:nvSpPr>
         <p:spPr>
           <a:xfrm>
-            <a:off x="503999" y="1326600"/>
-            <a:ext cx="9071640" cy="4022640"/>
+            <a:off x="507959" y="1172520"/>
+            <a:ext cx="9071640" cy="3828239"/>
           </a:xfrm>
           <a:prstGeom prst="rect">
             <a:avLst/>
@@ -8828,37 +9319,39 @@
                   <a:schemeClr val="bg1"/>
                 </a:solidFill>
               </a:rPr>
-              <a:t>The ideal way to test which combinations of model constant values result in erroneous output would be to test every single combination of model constant values.</a:t>
+              <a:t>The goal is to visualize the impact of model constants on model outputs.</a:t>
             </a:r>
           </a:p>
           <a:p>
             <a:pPr marL="342900" indent="-342900"/>
-            <a:r>
-              <a:rPr lang="en-US" dirty="0">
-                <a:solidFill>
-                  <a:schemeClr val="bg1"/>
-                </a:solidFill>
-              </a:rPr>
-              <a:t>However, having many model constants that can each take many values will result in too many cases to test. </a:t>
-            </a:r>
+            <a:endParaRPr lang="en-US" dirty="0">
+              <a:solidFill>
+                <a:schemeClr val="bg1"/>
+              </a:solidFill>
+            </a:endParaRPr>
           </a:p>
           <a:p>
             <a:pPr marL="342900" indent="-342900"/>
-            <a:r>
-              <a:rPr lang="en-US" dirty="0">
-                <a:solidFill>
-                  <a:schemeClr val="bg1"/>
-                </a:solidFill>
-              </a:rPr>
-              <a:t>Combinatorial testing reduces the number of tests while ensuring pseudo-comprehensive testing.</a:t>
-            </a:r>
+            <a:endParaRPr lang="en-US" dirty="0">
+              <a:solidFill>
+                <a:schemeClr val="bg1"/>
+              </a:solidFill>
+            </a:endParaRPr>
+          </a:p>
+          <a:p>
+            <a:pPr marL="342900" indent="-342900"/>
+            <a:endParaRPr lang="en-US" dirty="0">
+              <a:solidFill>
+                <a:schemeClr val="bg1"/>
+              </a:solidFill>
+            </a:endParaRPr>
           </a:p>
         </p:txBody>
       </p:sp>
     </p:spTree>
     <p:extLst>
       <p:ext uri="{BB962C8B-B14F-4D97-AF65-F5344CB8AC3E}">
-        <p14:creationId xmlns:p14="http://schemas.microsoft.com/office/powerpoint/2010/main" val="3043626"/>
+        <p14:creationId xmlns:p14="http://schemas.microsoft.com/office/powerpoint/2010/main" val="2569724074"/>
       </p:ext>
     </p:extLst>
   </p:cSld>
@@ -9205,7 +9698,7 @@
                   <a:schemeClr val="bg1"/>
                 </a:solidFill>
               </a:rPr>
-              <a:t>So far, the combinatorial test cases were only using the constants assumed to have an impact on model output. Now, they include all of the constants so that the results of the combinatorial test cases do not depend on previous results being correct or not. </a:t>
+              <a:t>So far, the combinatorial test cases were only using the constants assumed to have an impact on model outputs. Now, they include all of the constants. </a:t>
             </a:r>
           </a:p>
           <a:p>
@@ -9232,7 +9725,39 @@
                   <a:schemeClr val="bg1"/>
                 </a:solidFill>
               </a:rPr>
-              <a:t> source code but future testing, such as combinatorial testing and change-impact analysis, will not depend on these results. </a:t>
+              <a:t> source code but </a:t>
+            </a:r>
+            <a:r>
+              <a:rPr lang="en-US">
+                <a:solidFill>
+                  <a:schemeClr val="bg1"/>
+                </a:solidFill>
+              </a:rPr>
+              <a:t>future combinatorial </a:t>
+            </a:r>
+            <a:r>
+              <a:rPr lang="en-US" dirty="0">
+                <a:solidFill>
+                  <a:schemeClr val="bg1"/>
+                </a:solidFill>
+              </a:rPr>
+              <a:t>testing and </a:t>
+            </a:r>
+            <a:r>
+              <a:rPr lang="en-US">
+                <a:solidFill>
+                  <a:schemeClr val="bg1"/>
+                </a:solidFill>
+              </a:rPr>
+              <a:t>change-impact analysis </a:t>
+            </a:r>
+            <a:r>
+              <a:rPr lang="en-US" dirty="0">
+                <a:solidFill>
+                  <a:schemeClr val="bg1"/>
+                </a:solidFill>
+              </a:rPr>
+              <a:t>will not depend on these results. </a:t>
             </a:r>
           </a:p>
         </p:txBody>
@@ -9252,7 +9777,7 @@
 
 <file path=ppt/slides/slide3.xml><?xml version="1.0" encoding="utf-8"?>
 <p:sld xmlns:a="http://schemas.openxmlformats.org/drawingml/2006/main" xmlns:r="http://schemas.openxmlformats.org/officeDocument/2006/relationships" xmlns:p="http://schemas.openxmlformats.org/presentationml/2006/main">
-  <p:cSld name="page2">
+  <p:cSld name="page14">
     <p:spTree>
       <p:nvGrpSpPr>
         <p:cNvPr id="1" name=""/>
@@ -9272,7 +9797,7 @@
           <p:cNvPr id="2" name="Title 1">
             <a:extLst>
               <a:ext uri="{FF2B5EF4-FFF2-40B4-BE49-F238E27FC236}">
-                <a16:creationId xmlns:a16="http://schemas.microsoft.com/office/drawing/2014/main" id="{3329BCE0-57D7-B440-3433-0B98B154F9AD}"/>
+                <a16:creationId xmlns:a16="http://schemas.microsoft.com/office/drawing/2014/main" id="{7213FEA8-EFA0-0ABF-B290-871B771B9A08}"/>
               </a:ext>
             </a:extLst>
           </p:cNvPr>
@@ -9302,7 +9827,7 @@
                   <a:schemeClr val="bg1"/>
                 </a:solidFill>
               </a:rPr>
-              <a:t>Combinatorial Analysis Background</a:t>
+              <a:t>Challenges</a:t>
             </a:r>
           </a:p>
         </p:txBody>
@@ -9312,7 +9837,7 @@
           <p:cNvPr id="3" name="Text Placeholder 2">
             <a:extLst>
               <a:ext uri="{FF2B5EF4-FFF2-40B4-BE49-F238E27FC236}">
-                <a16:creationId xmlns:a16="http://schemas.microsoft.com/office/drawing/2014/main" id="{C12EA507-D828-F915-2FD8-9BBE5948C904}"/>
+                <a16:creationId xmlns:a16="http://schemas.microsoft.com/office/drawing/2014/main" id="{C220D056-3C9A-0F26-01B7-EC49552EA02A}"/>
               </a:ext>
             </a:extLst>
           </p:cNvPr>
@@ -9323,236 +9848,46 @@
             <p:ph type="body" idx="4294967295"/>
           </p:nvPr>
         </p:nvSpPr>
-        <p:spPr/>
-        <p:txBody>
-          <a:bodyPr>
-            <a:normAutofit/>
-          </a:bodyPr>
-          <a:lstStyle/>
-          <a:p>
-            <a:pPr marL="342900" indent="-342900"/>
-            <a:r>
-              <a:rPr lang="en-US" i="1" dirty="0">
-                <a:solidFill>
-                  <a:schemeClr val="bg1"/>
-                </a:solidFill>
-              </a:rPr>
-              <a:t>NIST</a:t>
-            </a:r>
-            <a:r>
-              <a:rPr lang="en-US" dirty="0">
-                <a:solidFill>
-                  <a:schemeClr val="bg1"/>
-                </a:solidFill>
-              </a:rPr>
-              <a:t> research found most software bugs are caused by combinations of a few parameters</a:t>
-            </a:r>
-            <a:r>
-              <a:rPr lang="en-US" i="1" baseline="30000" dirty="0">
-                <a:solidFill>
-                  <a:schemeClr val="bg1"/>
-                </a:solidFill>
-              </a:rPr>
-              <a:t>1</a:t>
-            </a:r>
-            <a:r>
-              <a:rPr lang="en-US" dirty="0">
-                <a:solidFill>
-                  <a:schemeClr val="bg1"/>
-                </a:solidFill>
-              </a:rPr>
-              <a:t>. </a:t>
-            </a:r>
-          </a:p>
-          <a:p>
-            <a:pPr marL="342900" indent="-342900"/>
-            <a:r>
-              <a:rPr lang="en-US" dirty="0">
-                <a:solidFill>
-                  <a:schemeClr val="bg1"/>
-                </a:solidFill>
-              </a:rPr>
-              <a:t>By testing all combinations of a certain number of parameters, most software bugs can be found with much fewer test cases. </a:t>
-            </a:r>
-          </a:p>
-          <a:p>
-            <a:pPr marL="342900" indent="-342900"/>
-            <a:r>
-              <a:rPr lang="en-US" i="1" dirty="0">
-                <a:solidFill>
-                  <a:schemeClr val="bg1"/>
-                </a:solidFill>
-              </a:rPr>
-              <a:t>ACTS</a:t>
-            </a:r>
-            <a:r>
-              <a:rPr lang="en-US" dirty="0">
-                <a:solidFill>
-                  <a:schemeClr val="bg1"/>
-                </a:solidFill>
-              </a:rPr>
-              <a:t> can generate covering arrays from 1-way to 6-way</a:t>
-            </a:r>
-            <a:r>
-              <a:rPr lang="en-US" baseline="30000" dirty="0">
-                <a:solidFill>
-                  <a:schemeClr val="bg1"/>
-                </a:solidFill>
-              </a:rPr>
-              <a:t> </a:t>
-            </a:r>
-            <a:r>
-              <a:rPr lang="en-US" dirty="0">
-                <a:solidFill>
-                  <a:schemeClr val="bg1"/>
-                </a:solidFill>
-              </a:rPr>
-              <a:t>or with mixed coverage</a:t>
-            </a:r>
-            <a:r>
-              <a:rPr lang="en-US" baseline="30000" dirty="0">
-                <a:solidFill>
-                  <a:schemeClr val="bg1"/>
-                </a:solidFill>
-              </a:rPr>
-              <a:t>2</a:t>
-            </a:r>
-            <a:r>
-              <a:rPr lang="en-US" dirty="0">
-                <a:solidFill>
-                  <a:schemeClr val="bg1"/>
-                </a:solidFill>
-              </a:rPr>
-              <a:t>. </a:t>
-            </a:r>
-          </a:p>
-        </p:txBody>
-      </p:sp>
-      <p:sp>
-        <p:nvSpPr>
-          <p:cNvPr id="5" name="TextBox 4">
-            <a:extLst>
-              <a:ext uri="{FF2B5EF4-FFF2-40B4-BE49-F238E27FC236}">
-                <a16:creationId xmlns:a16="http://schemas.microsoft.com/office/drawing/2014/main" id="{9747BCA8-A847-7114-04B9-16833F38B983}"/>
-              </a:ext>
-            </a:extLst>
-          </p:cNvPr>
-          <p:cNvSpPr txBox="1"/>
-          <p:nvPr/>
-        </p:nvSpPr>
         <p:spPr>
           <a:xfrm>
-            <a:off x="251506" y="4820323"/>
-            <a:ext cx="9576626" cy="646331"/>
+            <a:off x="507959" y="1172520"/>
+            <a:ext cx="9071640" cy="3828239"/>
           </a:xfrm>
-          <a:prstGeom prst="rect">
-            <a:avLst/>
-          </a:prstGeom>
-          <a:noFill/>
         </p:spPr>
         <p:txBody>
-          <a:bodyPr wrap="square" rtlCol="0">
-            <a:spAutoFit/>
-          </a:bodyPr>
+          <a:bodyPr/>
           <a:lstStyle/>
           <a:p>
-            <a:r>
-              <a:rPr lang="en-US" sz="1200" dirty="0">
-                <a:solidFill>
-                  <a:schemeClr val="bg1"/>
-                </a:solidFill>
-              </a:rPr>
-              <a:t>1. </a:t>
-            </a:r>
-            <a:r>
-              <a:rPr lang="en-US" sz="1200" i="1" dirty="0">
-                <a:solidFill>
-                  <a:schemeClr val="bg1"/>
-                </a:solidFill>
-              </a:rPr>
-              <a:t>Automated Combinatorial Testing for Software (ACTS)</a:t>
-            </a:r>
-            <a:r>
-              <a:rPr lang="en-US" sz="1200" dirty="0">
-                <a:solidFill>
-                  <a:schemeClr val="bg1"/>
-                </a:solidFill>
-              </a:rPr>
-              <a:t>. NIST Computer Security Division. (2016, July 20). https://</a:t>
-            </a:r>
-            <a:r>
-              <a:rPr lang="en-US" sz="1200" dirty="0" err="1">
-                <a:solidFill>
-                  <a:schemeClr val="bg1"/>
-                </a:solidFill>
-              </a:rPr>
-              <a:t>csrc.nist.rip</a:t>
-            </a:r>
-            <a:r>
-              <a:rPr lang="en-US" sz="1200" dirty="0">
-                <a:solidFill>
-                  <a:schemeClr val="bg1"/>
-                </a:solidFill>
-              </a:rPr>
-              <a:t>/groups/SNS/acts/ </a:t>
-            </a:r>
-          </a:p>
-          <a:p>
-            <a:r>
-              <a:rPr lang="en-US" sz="1200" dirty="0">
-                <a:solidFill>
-                  <a:schemeClr val="bg1"/>
-                </a:solidFill>
-              </a:rPr>
-              <a:t>2. </a:t>
-            </a:r>
-            <a:r>
-              <a:rPr lang="en-US" sz="1200" i="1" dirty="0">
-                <a:solidFill>
-                  <a:schemeClr val="bg1"/>
-                </a:solidFill>
-              </a:rPr>
-              <a:t>User Guide for ACTS</a:t>
-            </a:r>
-            <a:r>
-              <a:rPr lang="en-US" sz="1200" dirty="0">
-                <a:solidFill>
-                  <a:schemeClr val="bg1"/>
-                </a:solidFill>
-              </a:rPr>
-              <a:t>. NIST. (n.d.). https://</a:t>
-            </a:r>
-            <a:r>
-              <a:rPr lang="en-US" sz="1200" dirty="0" err="1">
-                <a:solidFill>
-                  <a:schemeClr val="bg1"/>
-                </a:solidFill>
-              </a:rPr>
-              <a:t>csrc.nist.gov</a:t>
-            </a:r>
-            <a:r>
-              <a:rPr lang="en-US" sz="1200" dirty="0">
-                <a:solidFill>
-                  <a:schemeClr val="bg1"/>
-                </a:solidFill>
-              </a:rPr>
-              <a:t>/</a:t>
-            </a:r>
-            <a:r>
-              <a:rPr lang="en-US" sz="1200" dirty="0" err="1">
-                <a:solidFill>
-                  <a:schemeClr val="bg1"/>
-                </a:solidFill>
-              </a:rPr>
-              <a:t>csrc</a:t>
-            </a:r>
-            <a:r>
-              <a:rPr lang="en-US" sz="1200" dirty="0">
-                <a:solidFill>
-                  <a:schemeClr val="bg1"/>
-                </a:solidFill>
-              </a:rPr>
-              <a:t>/media/Projects/automated-combinatorial-testing-for-software/documents/acts_user_guide_for_basic1.0_and_advanced3.3_versions_nov23.pdf </a:t>
+            <a:pPr marL="342900" indent="-342900"/>
+            <a:r>
+              <a:rPr lang="en-US" dirty="0">
+                <a:solidFill>
+                  <a:schemeClr val="bg1"/>
+                </a:solidFill>
+              </a:rPr>
+              <a:t>Most model constants affect multiple model outputs.</a:t>
+            </a:r>
+          </a:p>
+          <a:p>
+            <a:pPr marL="342900" indent="-342900"/>
+            <a:r>
+              <a:rPr lang="en-US" dirty="0">
+                <a:solidFill>
+                  <a:schemeClr val="bg1"/>
+                </a:solidFill>
+              </a:rPr>
+              <a:t>Model outputs are multidimensional.</a:t>
+            </a:r>
+          </a:p>
+          <a:p>
+            <a:pPr marL="342900" indent="-342900"/>
+            <a:r>
+              <a:rPr lang="en-US" dirty="0">
+                <a:solidFill>
+                  <a:schemeClr val="bg1"/>
+                </a:solidFill>
+              </a:rPr>
+              <a:t>To obtain a 3D graph, we chose a single column from one output’s data, used time as the x-axis, the one model constant we changed as the y-axis, and the single column (of the single model output) as the z-axis.  </a:t>
             </a:r>
           </a:p>
         </p:txBody>
@@ -9567,7 +9902,218 @@
 
 <file path=ppt/slides/slide4.xml><?xml version="1.0" encoding="utf-8"?>
 <p:sld xmlns:a="http://schemas.openxmlformats.org/drawingml/2006/main" xmlns:r="http://schemas.openxmlformats.org/officeDocument/2006/relationships" xmlns:p="http://schemas.openxmlformats.org/presentationml/2006/main">
-  <p:cSld name="page3">
+  <p:cSld>
+    <p:spTree>
+      <p:nvGrpSpPr>
+        <p:cNvPr id="1" name="">
+          <a:extLst>
+            <a:ext uri="{FF2B5EF4-FFF2-40B4-BE49-F238E27FC236}">
+              <a16:creationId xmlns:a16="http://schemas.microsoft.com/office/drawing/2014/main" id="{2B569827-9521-53AA-9742-36EB856A3BAB}"/>
+            </a:ext>
+          </a:extLst>
+        </p:cNvPr>
+        <p:cNvGrpSpPr/>
+        <p:nvPr/>
+      </p:nvGrpSpPr>
+      <p:grpSpPr>
+        <a:xfrm>
+          <a:off x="0" y="0"/>
+          <a:ext cx="0" cy="0"/>
+          <a:chOff x="0" y="0"/>
+          <a:chExt cx="0" cy="0"/>
+        </a:xfrm>
+      </p:grpSpPr>
+      <p:sp>
+        <p:nvSpPr>
+          <p:cNvPr id="2" name="Title 1">
+            <a:extLst>
+              <a:ext uri="{FF2B5EF4-FFF2-40B4-BE49-F238E27FC236}">
+                <a16:creationId xmlns:a16="http://schemas.microsoft.com/office/drawing/2014/main" id="{C65C185C-7590-576F-35F7-50C042B441F9}"/>
+              </a:ext>
+            </a:extLst>
+          </p:cNvPr>
+          <p:cNvSpPr txBox="1">
+            <a:spLocks noGrp="1"/>
+          </p:cNvSpPr>
+          <p:nvPr>
+            <p:ph type="title" idx="4294967295"/>
+          </p:nvPr>
+        </p:nvSpPr>
+        <p:spPr>
+          <a:xfrm>
+            <a:off x="503999" y="422301"/>
+            <a:ext cx="9071640" cy="553998"/>
+          </a:xfrm>
+        </p:spPr>
+        <p:txBody>
+          <a:bodyPr>
+            <a:spAutoFit/>
+          </a:bodyPr>
+          <a:lstStyle/>
+          <a:p>
+            <a:pPr lvl="0"/>
+            <a:r>
+              <a:rPr lang="en-US" dirty="0">
+                <a:solidFill>
+                  <a:schemeClr val="bg1"/>
+                </a:solidFill>
+              </a:rPr>
+              <a:t>Graphing Process</a:t>
+            </a:r>
+          </a:p>
+        </p:txBody>
+      </p:sp>
+      <p:sp>
+        <p:nvSpPr>
+          <p:cNvPr id="3" name="Text Placeholder 2">
+            <a:extLst>
+              <a:ext uri="{FF2B5EF4-FFF2-40B4-BE49-F238E27FC236}">
+                <a16:creationId xmlns:a16="http://schemas.microsoft.com/office/drawing/2014/main" id="{16380487-782B-D373-4A68-3CAF18B86D6A}"/>
+              </a:ext>
+            </a:extLst>
+          </p:cNvPr>
+          <p:cNvSpPr txBox="1">
+            <a:spLocks noGrp="1"/>
+          </p:cNvSpPr>
+          <p:nvPr>
+            <p:ph type="body" idx="4294967295"/>
+          </p:nvPr>
+        </p:nvSpPr>
+        <p:spPr>
+          <a:xfrm>
+            <a:off x="503999" y="1326600"/>
+            <a:ext cx="9001800" cy="3664440"/>
+          </a:xfrm>
+        </p:spPr>
+        <p:txBody>
+          <a:bodyPr/>
+          <a:lstStyle/>
+          <a:p>
+            <a:pPr marL="342900" indent="-342900"/>
+            <a:r>
+              <a:rPr lang="en-US" dirty="0">
+                <a:solidFill>
+                  <a:schemeClr val="bg1"/>
+                </a:solidFill>
+              </a:rPr>
+              <a:t>Output data in the form of a </a:t>
+            </a:r>
+            <a:r>
+              <a:rPr lang="en-US" dirty="0" err="1">
+                <a:solidFill>
+                  <a:schemeClr val="bg1"/>
+                </a:solidFill>
+              </a:rPr>
+              <a:t>NetCDF</a:t>
+            </a:r>
+            <a:r>
+              <a:rPr lang="en-US" dirty="0">
+                <a:solidFill>
+                  <a:schemeClr val="bg1"/>
+                </a:solidFill>
+              </a:rPr>
+              <a:t> file is used. </a:t>
+            </a:r>
+          </a:p>
+          <a:p>
+            <a:pPr marL="342900" indent="-342900"/>
+            <a:r>
+              <a:rPr lang="en-US" dirty="0">
+                <a:solidFill>
+                  <a:schemeClr val="bg1"/>
+                </a:solidFill>
+              </a:rPr>
+              <a:t>From the output data we pulled the values for the model constant </a:t>
+            </a:r>
+            <a:r>
+              <a:rPr lang="en-US" i="1" dirty="0" err="1">
+                <a:solidFill>
+                  <a:schemeClr val="bg1"/>
+                </a:solidFill>
+              </a:rPr>
+              <a:t>vkc</a:t>
+            </a:r>
+            <a:r>
+              <a:rPr lang="en-US" i="1" dirty="0">
+                <a:solidFill>
+                  <a:schemeClr val="bg1"/>
+                </a:solidFill>
+              </a:rPr>
+              <a:t>.</a:t>
+            </a:r>
+            <a:endParaRPr lang="en-US" dirty="0">
+              <a:solidFill>
+                <a:schemeClr val="bg1"/>
+              </a:solidFill>
+            </a:endParaRPr>
+          </a:p>
+          <a:p>
+            <a:pPr marL="342900" indent="-342900"/>
+            <a:r>
+              <a:rPr lang="en-US" dirty="0">
+                <a:solidFill>
+                  <a:schemeClr val="bg1"/>
+                </a:solidFill>
+              </a:rPr>
+              <a:t>Time is interpolated from 0 to 35. </a:t>
+            </a:r>
+          </a:p>
+          <a:p>
+            <a:pPr marL="342900" indent="-342900"/>
+            <a:r>
+              <a:rPr lang="en-US" dirty="0">
+                <a:solidFill>
+                  <a:schemeClr val="bg1"/>
+                </a:solidFill>
+              </a:rPr>
+              <a:t>From the output data we pulled the values for the model output </a:t>
+            </a:r>
+            <a:r>
+              <a:rPr lang="en-US" i="1" dirty="0">
+                <a:solidFill>
+                  <a:schemeClr val="bg1"/>
+                </a:solidFill>
+              </a:rPr>
+              <a:t>lakestate_vars__savedtke1_col</a:t>
+            </a:r>
+            <a:r>
+              <a:rPr lang="en-US" dirty="0">
+                <a:solidFill>
+                  <a:schemeClr val="bg1"/>
+                </a:solidFill>
+              </a:rPr>
+              <a:t> at the column numbered 336. </a:t>
+            </a:r>
+          </a:p>
+          <a:p>
+            <a:pPr marL="342900" indent="-342900"/>
+            <a:r>
+              <a:rPr lang="en-US" dirty="0">
+                <a:solidFill>
+                  <a:schemeClr val="bg1"/>
+                </a:solidFill>
+              </a:rPr>
+              <a:t>Using matplotlib, all three dimensions were graphed. </a:t>
+            </a:r>
+          </a:p>
+        </p:txBody>
+      </p:sp>
+    </p:spTree>
+    <p:extLst>
+      <p:ext uri="{BB962C8B-B14F-4D97-AF65-F5344CB8AC3E}">
+        <p14:creationId xmlns:p14="http://schemas.microsoft.com/office/powerpoint/2010/main" val="2352501276"/>
+      </p:ext>
+    </p:extLst>
+  </p:cSld>
+  <p:clrMapOvr>
+    <a:masterClrMapping/>
+  </p:clrMapOvr>
+</p:sld>
+</file>
+
+<file path=ppt/slides/slide5.xml><?xml version="1.0" encoding="utf-8"?>
+<p:sld xmlns:a="http://schemas.openxmlformats.org/drawingml/2006/main" xmlns:r="http://schemas.openxmlformats.org/officeDocument/2006/relationships" xmlns:p="http://schemas.openxmlformats.org/presentationml/2006/main">
+  <p:cSld name="page16">
     <p:spTree>
       <p:nvGrpSpPr>
         <p:cNvPr id="1" name=""/>
@@ -9587,7 +10133,7 @@
           <p:cNvPr id="2" name="Title 1">
             <a:extLst>
               <a:ext uri="{FF2B5EF4-FFF2-40B4-BE49-F238E27FC236}">
-                <a16:creationId xmlns:a16="http://schemas.microsoft.com/office/drawing/2014/main" id="{1F22CA55-51A0-611A-7B91-13ABAA9983C9}"/>
+                <a16:creationId xmlns:a16="http://schemas.microsoft.com/office/drawing/2014/main" id="{652DE034-012A-BDCC-27D6-45696F0169C2}"/>
               </a:ext>
             </a:extLst>
           </p:cNvPr>
@@ -9600,12 +10146,12 @@
         </p:nvSpPr>
         <p:spPr>
           <a:xfrm>
-            <a:off x="503999" y="422301"/>
-            <a:ext cx="9071640" cy="553998"/>
+            <a:off x="340123" y="422301"/>
+            <a:ext cx="3461504" cy="553998"/>
           </a:xfrm>
         </p:spPr>
         <p:txBody>
-          <a:bodyPr>
+          <a:bodyPr wrap="square">
             <a:spAutoFit/>
           </a:bodyPr>
           <a:lstStyle/>
@@ -9617,7 +10163,7 @@
                   <a:schemeClr val="bg1"/>
                 </a:solidFill>
               </a:rPr>
-              <a:t>Our Implementation</a:t>
+              <a:t>An Example Graph</a:t>
             </a:r>
           </a:p>
         </p:txBody>
@@ -9627,7 +10173,7 @@
           <p:cNvPr id="3" name="Text Placeholder 2">
             <a:extLst>
               <a:ext uri="{FF2B5EF4-FFF2-40B4-BE49-F238E27FC236}">
-                <a16:creationId xmlns:a16="http://schemas.microsoft.com/office/drawing/2014/main" id="{4FC0F3B3-D388-0133-98BD-A5D2EC76DF23}"/>
+                <a16:creationId xmlns:a16="http://schemas.microsoft.com/office/drawing/2014/main" id="{E0FB6333-45B1-C200-1206-F5409AA482B6}"/>
               </a:ext>
             </a:extLst>
           </p:cNvPr>
@@ -9640,235 +10186,10 @@
         </p:nvSpPr>
         <p:spPr>
           <a:xfrm>
-            <a:off x="503999" y="1326600"/>
-            <a:ext cx="9071640" cy="3613679"/>
+            <a:off x="340123" y="1081994"/>
+            <a:ext cx="3461504" cy="3719520"/>
           </a:xfrm>
         </p:spPr>
-        <p:txBody>
-          <a:bodyPr>
-            <a:normAutofit fontScale="92500"/>
-          </a:bodyPr>
-          <a:lstStyle/>
-          <a:p>
-            <a:pPr marL="342900" indent="-342900"/>
-            <a:r>
-              <a:rPr lang="en-US" dirty="0">
-                <a:solidFill>
-                  <a:schemeClr val="bg1"/>
-                </a:solidFill>
-              </a:rPr>
-              <a:t>The model constants, which determine how </a:t>
-            </a:r>
-            <a:r>
-              <a:rPr lang="en-US" dirty="0" err="1">
-                <a:solidFill>
-                  <a:schemeClr val="bg1"/>
-                </a:solidFill>
-                <a:latin typeface="Courier New" panose="02070309020205020404" pitchFamily="49" charset="0"/>
-                <a:cs typeface="Courier New" panose="02070309020205020404" pitchFamily="49" charset="0"/>
-              </a:rPr>
-              <a:t>LakeTemperature</a:t>
-            </a:r>
-            <a:r>
-              <a:rPr lang="en-US" dirty="0">
-                <a:solidFill>
-                  <a:schemeClr val="bg1"/>
-                </a:solidFill>
-              </a:rPr>
-              <a:t> runs, are used as the parameters for the combinatorial test cases. </a:t>
-            </a:r>
-          </a:p>
-          <a:p>
-            <a:pPr marL="342900" indent="-342900"/>
-            <a:r>
-              <a:rPr lang="en-US" dirty="0">
-                <a:solidFill>
-                  <a:schemeClr val="bg1"/>
-                </a:solidFill>
-              </a:rPr>
-              <a:t>Booleans can be either 0 or 1.</a:t>
-            </a:r>
-          </a:p>
-          <a:p>
-            <a:pPr marL="342900" indent="-342900"/>
-            <a:r>
-              <a:rPr lang="en-US" dirty="0">
-                <a:solidFill>
-                  <a:schemeClr val="bg1"/>
-                </a:solidFill>
-              </a:rPr>
-              <a:t>For integers, we linearly interpolate over their range to get up to 11 values. </a:t>
-            </a:r>
-          </a:p>
-          <a:p>
-            <a:pPr marL="342900" indent="-342900"/>
-            <a:r>
-              <a:rPr lang="en-US" dirty="0">
-                <a:solidFill>
-                  <a:schemeClr val="bg1"/>
-                </a:solidFill>
-              </a:rPr>
-              <a:t>For floats, we linearly interpolate over their range to get exactly 11 values. </a:t>
-            </a:r>
-          </a:p>
-          <a:p>
-            <a:pPr marL="342900" indent="-342900"/>
-            <a:r>
-              <a:rPr lang="en-US" i="1" dirty="0">
-                <a:solidFill>
-                  <a:schemeClr val="bg1"/>
-                </a:solidFill>
-              </a:rPr>
-              <a:t>ACTS</a:t>
-            </a:r>
-            <a:r>
-              <a:rPr lang="en-US" dirty="0">
-                <a:solidFill>
-                  <a:schemeClr val="bg1"/>
-                </a:solidFill>
-              </a:rPr>
-              <a:t> generates covering arrays from 2-way to 5-way and outputs a CSV file, from which </a:t>
-            </a:r>
-            <a:r>
-              <a:rPr lang="en-US" i="1" dirty="0" err="1">
-                <a:solidFill>
-                  <a:schemeClr val="bg1"/>
-                </a:solidFill>
-              </a:rPr>
-              <a:t>NetCDF</a:t>
-            </a:r>
-            <a:r>
-              <a:rPr lang="en-US" dirty="0">
-                <a:solidFill>
-                  <a:schemeClr val="bg1"/>
-                </a:solidFill>
-              </a:rPr>
-              <a:t> files are created using a Python script (</a:t>
-            </a:r>
-            <a:r>
-              <a:rPr lang="en-US" dirty="0">
-                <a:solidFill>
-                  <a:schemeClr val="bg1"/>
-                </a:solidFill>
-                <a:latin typeface="Courier New" panose="02070309020205020404" pitchFamily="49" charset="0"/>
-                <a:cs typeface="Courier New" panose="02070309020205020404" pitchFamily="49" charset="0"/>
-              </a:rPr>
-              <a:t>csv2nc</a:t>
-            </a:r>
-            <a:r>
-              <a:rPr lang="en-US" dirty="0">
-                <a:solidFill>
-                  <a:schemeClr val="bg1"/>
-                </a:solidFill>
-              </a:rPr>
-              <a:t>). These are run on the model using the </a:t>
-            </a:r>
-            <a:r>
-              <a:rPr lang="en-US" i="1" dirty="0" err="1">
-                <a:solidFill>
-                  <a:schemeClr val="bg1"/>
-                </a:solidFill>
-              </a:rPr>
-              <a:t>NetCDF</a:t>
-            </a:r>
-            <a:r>
-              <a:rPr lang="en-US" dirty="0">
-                <a:solidFill>
-                  <a:schemeClr val="bg1"/>
-                </a:solidFill>
-              </a:rPr>
-              <a:t> Cases Sampling Plugin. </a:t>
-            </a:r>
-            <a:endParaRPr lang="en-US" i="1" dirty="0">
-              <a:solidFill>
-                <a:schemeClr val="bg1"/>
-              </a:solidFill>
-            </a:endParaRPr>
-          </a:p>
-        </p:txBody>
-      </p:sp>
-    </p:spTree>
-  </p:cSld>
-  <p:clrMapOvr>
-    <a:masterClrMapping/>
-  </p:clrMapOvr>
-</p:sld>
-</file>
-
-<file path=ppt/slides/slide5.xml><?xml version="1.0" encoding="utf-8"?>
-<p:sld xmlns:a="http://schemas.openxmlformats.org/drawingml/2006/main" xmlns:r="http://schemas.openxmlformats.org/officeDocument/2006/relationships" xmlns:p="http://schemas.openxmlformats.org/presentationml/2006/main">
-  <p:cSld name="page4">
-    <p:spTree>
-      <p:nvGrpSpPr>
-        <p:cNvPr id="1" name=""/>
-        <p:cNvGrpSpPr/>
-        <p:nvPr/>
-      </p:nvGrpSpPr>
-      <p:grpSpPr>
-        <a:xfrm>
-          <a:off x="0" y="0"/>
-          <a:ext cx="0" cy="0"/>
-          <a:chOff x="0" y="0"/>
-          <a:chExt cx="0" cy="0"/>
-        </a:xfrm>
-      </p:grpSpPr>
-      <p:sp>
-        <p:nvSpPr>
-          <p:cNvPr id="2" name="Title 1">
-            <a:extLst>
-              <a:ext uri="{FF2B5EF4-FFF2-40B4-BE49-F238E27FC236}">
-                <a16:creationId xmlns:a16="http://schemas.microsoft.com/office/drawing/2014/main" id="{C4490A42-8874-BE43-3396-EC82FA0BDFFE}"/>
-              </a:ext>
-            </a:extLst>
-          </p:cNvPr>
-          <p:cNvSpPr txBox="1">
-            <a:spLocks noGrp="1"/>
-          </p:cNvSpPr>
-          <p:nvPr>
-            <p:ph type="title" idx="4294967295"/>
-          </p:nvPr>
-        </p:nvSpPr>
-        <p:spPr>
-          <a:xfrm>
-            <a:off x="503999" y="422301"/>
-            <a:ext cx="9071640" cy="553998"/>
-          </a:xfrm>
-        </p:spPr>
-        <p:txBody>
-          <a:bodyPr>
-            <a:spAutoFit/>
-          </a:bodyPr>
-          <a:lstStyle/>
-          <a:p>
-            <a:pPr lvl="0"/>
-            <a:r>
-              <a:rPr lang="en-US" dirty="0">
-                <a:solidFill>
-                  <a:schemeClr val="bg1"/>
-                </a:solidFill>
-              </a:rPr>
-              <a:t>Test Oracle Problem</a:t>
-            </a:r>
-          </a:p>
-        </p:txBody>
-      </p:sp>
-      <p:sp>
-        <p:nvSpPr>
-          <p:cNvPr id="3" name="Text Placeholder 2">
-            <a:extLst>
-              <a:ext uri="{FF2B5EF4-FFF2-40B4-BE49-F238E27FC236}">
-                <a16:creationId xmlns:a16="http://schemas.microsoft.com/office/drawing/2014/main" id="{86FF665C-42E1-DF86-A85F-54C67BE68385}"/>
-              </a:ext>
-            </a:extLst>
-          </p:cNvPr>
-          <p:cNvSpPr txBox="1">
-            <a:spLocks noGrp="1"/>
-          </p:cNvSpPr>
-          <p:nvPr>
-            <p:ph type="body" idx="4294967295"/>
-          </p:nvPr>
-        </p:nvSpPr>
-        <p:spPr/>
         <p:txBody>
           <a:bodyPr>
             <a:normAutofit/>
@@ -9882,33 +10203,145 @@
                   <a:schemeClr val="bg1"/>
                 </a:solidFill>
               </a:rPr>
-              <a:t>Scientific software verification is difficult due to lacking a test oracle. </a:t>
-            </a:r>
-          </a:p>
-          <a:p>
-            <a:pPr marL="342900" indent="-342900"/>
+              <a:t>This graph shows how the model constant </a:t>
+            </a:r>
+            <a:r>
+              <a:rPr lang="en-US" i="1" dirty="0" err="1">
+                <a:solidFill>
+                  <a:schemeClr val="bg1"/>
+                </a:solidFill>
+              </a:rPr>
+              <a:t>vkc</a:t>
+            </a:r>
             <a:r>
               <a:rPr lang="en-US" dirty="0">
                 <a:solidFill>
                   <a:schemeClr val="bg1"/>
                 </a:solidFill>
               </a:rPr>
-              <a:t>We implement checks that validate output, supported by the Fault Finding Analysis Plugin. </a:t>
-            </a:r>
-          </a:p>
-          <a:p>
-            <a:pPr marL="342900" indent="-342900"/>
+              <a:t> affects the model output </a:t>
+            </a:r>
+            <a:r>
+              <a:rPr lang="en-US" i="1" dirty="0">
+                <a:solidFill>
+                  <a:schemeClr val="bg1"/>
+                </a:solidFill>
+              </a:rPr>
+              <a:t>lakestate_vars__savedtke1_col </a:t>
+            </a:r>
             <a:r>
               <a:rPr lang="en-US" dirty="0">
                 <a:solidFill>
                   <a:schemeClr val="bg1"/>
                 </a:solidFill>
               </a:rPr>
-              <a:t>Checks include ranges of outputs, signs, enumerated values, finiteness, relationships to other inputs/outputs, and certain physical laws and restraints.</a:t>
-            </a:r>
-          </a:p>
-        </p:txBody>
-      </p:sp>
+              <a:t>over a period of 35 time steps for the lake column numbered 336.</a:t>
+            </a:r>
+          </a:p>
+        </p:txBody>
+      </p:sp>
+      <p:grpSp>
+        <p:nvGrpSpPr>
+          <p:cNvPr id="7" name="Group 6">
+            <a:extLst>
+              <a:ext uri="{FF2B5EF4-FFF2-40B4-BE49-F238E27FC236}">
+                <a16:creationId xmlns:a16="http://schemas.microsoft.com/office/drawing/2014/main" id="{AF25E7DB-69CA-4FAC-8C45-99C8D86EF4E1}"/>
+              </a:ext>
+            </a:extLst>
+          </p:cNvPr>
+          <p:cNvGrpSpPr>
+            <a:grpSpLocks noChangeAspect="1"/>
+          </p:cNvGrpSpPr>
+          <p:nvPr/>
+        </p:nvGrpSpPr>
+        <p:grpSpPr>
+          <a:xfrm>
+            <a:off x="4047254" y="-392"/>
+            <a:ext cx="6033371" cy="5670942"/>
+            <a:chOff x="3779383" y="0"/>
+            <a:chExt cx="5955938" cy="5598160"/>
+          </a:xfrm>
+        </p:grpSpPr>
+        <p:sp>
+          <p:nvSpPr>
+            <p:cNvPr id="6" name="Rectangle 5">
+              <a:extLst>
+                <a:ext uri="{FF2B5EF4-FFF2-40B4-BE49-F238E27FC236}">
+                  <a16:creationId xmlns:a16="http://schemas.microsoft.com/office/drawing/2014/main" id="{9253F05C-EA1D-8060-2D15-4444A5C4C9ED}"/>
+                </a:ext>
+              </a:extLst>
+            </p:cNvPr>
+            <p:cNvSpPr/>
+            <p:nvPr/>
+          </p:nvSpPr>
+          <p:spPr>
+            <a:xfrm>
+              <a:off x="3779383" y="0"/>
+              <a:ext cx="5955938" cy="5598160"/>
+            </a:xfrm>
+            <a:prstGeom prst="rect">
+              <a:avLst/>
+            </a:prstGeom>
+            <a:solidFill>
+              <a:schemeClr val="bg1"/>
+            </a:solidFill>
+          </p:spPr>
+          <p:style>
+            <a:lnRef idx="2">
+              <a:schemeClr val="accent1">
+                <a:shade val="15000"/>
+              </a:schemeClr>
+            </a:lnRef>
+            <a:fillRef idx="1">
+              <a:schemeClr val="accent1"/>
+            </a:fillRef>
+            <a:effectRef idx="0">
+              <a:schemeClr val="accent1"/>
+            </a:effectRef>
+            <a:fontRef idx="minor">
+              <a:schemeClr val="lt1"/>
+            </a:fontRef>
+          </p:style>
+          <p:txBody>
+            <a:bodyPr rtlCol="0" anchor="ctr"/>
+            <a:lstStyle/>
+            <a:p>
+              <a:pPr algn="ctr"/>
+              <a:endParaRPr lang="en-US"/>
+            </a:p>
+          </p:txBody>
+        </p:sp>
+        <p:pic>
+          <p:nvPicPr>
+            <p:cNvPr id="5" name="Picture 4">
+              <a:extLst>
+                <a:ext uri="{FF2B5EF4-FFF2-40B4-BE49-F238E27FC236}">
+                  <a16:creationId xmlns:a16="http://schemas.microsoft.com/office/drawing/2014/main" id="{8172BEEA-49A1-F1D6-759E-47E640BAE2B9}"/>
+                </a:ext>
+              </a:extLst>
+            </p:cNvPr>
+            <p:cNvPicPr>
+              <a:picLocks noChangeAspect="1"/>
+            </p:cNvPicPr>
+            <p:nvPr/>
+          </p:nvPicPr>
+          <p:blipFill>
+            <a:blip r:embed="rId3"/>
+            <a:stretch>
+              <a:fillRect/>
+            </a:stretch>
+          </p:blipFill>
+          <p:spPr>
+            <a:xfrm>
+              <a:off x="3860084" y="40640"/>
+              <a:ext cx="5794535" cy="5516880"/>
+            </a:xfrm>
+            <a:prstGeom prst="rect">
+              <a:avLst/>
+            </a:prstGeom>
+          </p:spPr>
+        </p:pic>
+      </p:grpSp>
     </p:spTree>
   </p:cSld>
   <p:clrMapOvr>
@@ -9918,165 +10351,6 @@
 </file>
 
 <file path=ppt/slides/slide6.xml><?xml version="1.0" encoding="utf-8"?>
-<p:sld xmlns:a="http://schemas.openxmlformats.org/drawingml/2006/main" xmlns:r="http://schemas.openxmlformats.org/officeDocument/2006/relationships" xmlns:p="http://schemas.openxmlformats.org/presentationml/2006/main">
-  <p:cSld name="page7">
-    <p:spTree>
-      <p:nvGrpSpPr>
-        <p:cNvPr id="1" name=""/>
-        <p:cNvGrpSpPr/>
-        <p:nvPr/>
-      </p:nvGrpSpPr>
-      <p:grpSpPr>
-        <a:xfrm>
-          <a:off x="0" y="0"/>
-          <a:ext cx="0" cy="0"/>
-          <a:chOff x="0" y="0"/>
-          <a:chExt cx="0" cy="0"/>
-        </a:xfrm>
-      </p:grpSpPr>
-      <p:sp>
-        <p:nvSpPr>
-          <p:cNvPr id="2" name="Title 1">
-            <a:extLst>
-              <a:ext uri="{FF2B5EF4-FFF2-40B4-BE49-F238E27FC236}">
-                <a16:creationId xmlns:a16="http://schemas.microsoft.com/office/drawing/2014/main" id="{44B3FCDA-4EC5-B19D-5009-23CEC9F74198}"/>
-              </a:ext>
-            </a:extLst>
-          </p:cNvPr>
-          <p:cNvSpPr txBox="1">
-            <a:spLocks noGrp="1"/>
-          </p:cNvSpPr>
-          <p:nvPr>
-            <p:ph type="title" idx="4294967295"/>
-          </p:nvPr>
-        </p:nvSpPr>
-        <p:spPr>
-          <a:xfrm>
-            <a:off x="503999" y="422301"/>
-            <a:ext cx="3346641" cy="553998"/>
-          </a:xfrm>
-        </p:spPr>
-        <p:txBody>
-          <a:bodyPr wrap="square">
-            <a:spAutoFit/>
-          </a:bodyPr>
-          <a:lstStyle/>
-          <a:p>
-            <a:pPr lvl="0"/>
-            <a:r>
-              <a:rPr lang="en-US" dirty="0">
-                <a:solidFill>
-                  <a:schemeClr val="bg1"/>
-                </a:solidFill>
-              </a:rPr>
-              <a:t>DOI 2 Data</a:t>
-            </a:r>
-          </a:p>
-        </p:txBody>
-      </p:sp>
-      <p:sp>
-        <p:nvSpPr>
-          <p:cNvPr id="3" name="Text Placeholder 2">
-            <a:extLst>
-              <a:ext uri="{FF2B5EF4-FFF2-40B4-BE49-F238E27FC236}">
-                <a16:creationId xmlns:a16="http://schemas.microsoft.com/office/drawing/2014/main" id="{3F589F92-B484-4E15-0CDC-FFD075A2A74E}"/>
-              </a:ext>
-            </a:extLst>
-          </p:cNvPr>
-          <p:cNvSpPr txBox="1">
-            <a:spLocks noGrp="1"/>
-          </p:cNvSpPr>
-          <p:nvPr>
-            <p:ph type="body" idx="4294967295"/>
-          </p:nvPr>
-        </p:nvSpPr>
-        <p:spPr>
-          <a:xfrm>
-            <a:off x="503999" y="1326600"/>
-            <a:ext cx="3346641" cy="3288239"/>
-          </a:xfrm>
-        </p:spPr>
-        <p:txBody>
-          <a:bodyPr>
-            <a:normAutofit/>
-          </a:bodyPr>
-          <a:lstStyle/>
-          <a:p>
-            <a:pPr marL="342900" indent="-342900"/>
-            <a:r>
-              <a:rPr lang="en-US" dirty="0">
-                <a:solidFill>
-                  <a:schemeClr val="bg1"/>
-                </a:solidFill>
-                <a:latin typeface="AppleSystemUIFont" pitchFamily="2"/>
-              </a:rPr>
-              <a:t>Degree of Interaction (DOI) 2 results in 133 test cases when only changing the values of constants known to effect the output of </a:t>
-            </a:r>
-            <a:r>
-              <a:rPr lang="en-US" dirty="0" err="1">
-                <a:solidFill>
-                  <a:schemeClr val="bg1"/>
-                </a:solidFill>
-                <a:latin typeface="AppleSystemUIFont" pitchFamily="2"/>
-              </a:rPr>
-              <a:t>LakeTemperature</a:t>
-            </a:r>
-            <a:r>
-              <a:rPr lang="en-US" dirty="0">
-                <a:solidFill>
-                  <a:schemeClr val="bg1"/>
-                </a:solidFill>
-                <a:latin typeface="AppleSystemUIFont" pitchFamily="2"/>
-              </a:rPr>
-              <a:t>. </a:t>
-            </a:r>
-          </a:p>
-        </p:txBody>
-      </p:sp>
-      <p:pic>
-        <p:nvPicPr>
-          <p:cNvPr id="5" name="Picture 4">
-            <a:extLst>
-              <a:ext uri="{FF2B5EF4-FFF2-40B4-BE49-F238E27FC236}">
-                <a16:creationId xmlns:a16="http://schemas.microsoft.com/office/drawing/2014/main" id="{15C94A79-243F-8D40-B5DA-BED8A49E8184}"/>
-              </a:ext>
-            </a:extLst>
-          </p:cNvPr>
-          <p:cNvPicPr>
-            <a:picLocks noChangeAspect="1"/>
-          </p:cNvPicPr>
-          <p:nvPr/>
-        </p:nvPicPr>
-        <p:blipFill>
-          <a:blip r:embed="rId4"/>
-          <a:stretch>
-            <a:fillRect/>
-          </a:stretch>
-        </p:blipFill>
-        <p:spPr>
-          <a:xfrm>
-            <a:off x="4114644" y="0"/>
-            <a:ext cx="6037257" cy="5670550"/>
-          </a:xfrm>
-          <a:prstGeom prst="rect">
-            <a:avLst/>
-          </a:prstGeom>
-        </p:spPr>
-      </p:pic>
-    </p:spTree>
-  </p:cSld>
-  <p:clrMapOvr>
-    <a:masterClrMapping/>
-  </p:clrMapOvr>
-  <p:extLst>
-    <p:ext uri="{6950BFC3-D8DA-4A85-94F7-54DA5524770B}">
-      <p188:commentRel xmlns:p188="http://schemas.microsoft.com/office/powerpoint/2018/8/main" r:id="rId3"/>
-    </p:ext>
-  </p:extLst>
-</p:sld>
-</file>
-
-<file path=ppt/slides/slide7.xml><?xml version="1.0" encoding="utf-8"?>
 <p:sld xmlns:a="http://schemas.openxmlformats.org/drawingml/2006/main" xmlns:r="http://schemas.openxmlformats.org/officeDocument/2006/relationships" xmlns:p="http://schemas.openxmlformats.org/presentationml/2006/main">
   <p:cSld>
     <p:spTree>
@@ -10098,7 +10372,7 @@
           <p:cNvPr id="2" name="Title 1">
             <a:extLst>
               <a:ext uri="{FF2B5EF4-FFF2-40B4-BE49-F238E27FC236}">
-                <a16:creationId xmlns:a16="http://schemas.microsoft.com/office/drawing/2014/main" id="{9DF1FC1F-B83D-D043-0A53-60E474E50EFB}"/>
+                <a16:creationId xmlns:a16="http://schemas.microsoft.com/office/drawing/2014/main" id="{B8086899-15DA-5703-76E2-51D23E842D09}"/>
               </a:ext>
             </a:extLst>
           </p:cNvPr>
@@ -10150,7 +10424,7 @@
                   <a:schemeClr val="bg1"/>
                 </a:solidFill>
               </a:rPr>
-              <a:t>DOI 3 Data</a:t>
+              <a:t>Why Combinatorial Testing (CT)?</a:t>
             </a:r>
           </a:p>
         </p:txBody>
@@ -10160,7 +10434,7 @@
           <p:cNvPr id="3" name="Text Placeholder 2">
             <a:extLst>
               <a:ext uri="{FF2B5EF4-FFF2-40B4-BE49-F238E27FC236}">
-                <a16:creationId xmlns:a16="http://schemas.microsoft.com/office/drawing/2014/main" id="{5CF707B8-09A9-A28B-36FE-7651ACC03308}"/>
+                <a16:creationId xmlns:a16="http://schemas.microsoft.com/office/drawing/2014/main" id="{0CD48D6A-4BDE-1B52-9184-3845B1664AB8}"/>
               </a:ext>
             </a:extLst>
           </p:cNvPr>
@@ -10172,7 +10446,7 @@
         <p:spPr>
           <a:xfrm>
             <a:off x="503999" y="1326600"/>
-            <a:ext cx="9071640" cy="3288239"/>
+            <a:ext cx="9071640" cy="4022640"/>
           </a:xfrm>
           <a:prstGeom prst="rect">
             <a:avLst/>
@@ -10406,16 +10680,16 @@
                 <a:solidFill>
                   <a:schemeClr val="bg1"/>
                 </a:solidFill>
-                <a:latin typeface="AppleSystemUIFont" pitchFamily="2"/>
-              </a:rPr>
-              <a:t>DOI 3 results in 3,516 test cases when only changing the values of constants known to effect the output of </a:t>
+              </a:rPr>
+              <a:t>Ideally, </a:t>
             </a:r>
             <a:r>
               <a:rPr lang="en-US" dirty="0" err="1">
                 <a:solidFill>
                   <a:schemeClr val="bg1"/>
                 </a:solidFill>
-                <a:latin typeface="AppleSystemUIFont" pitchFamily="2"/>
+                <a:latin typeface="Courier New" panose="02070309020205020404" pitchFamily="49" charset="0"/>
+                <a:cs typeface="Courier New" panose="02070309020205020404" pitchFamily="49" charset="0"/>
               </a:rPr>
               <a:t>LakeTemperature</a:t>
             </a:r>
@@ -10424,21 +10698,41 @@
                 <a:solidFill>
                   <a:schemeClr val="bg1"/>
                 </a:solidFill>
-                <a:latin typeface="AppleSystemUIFont" pitchFamily="2"/>
-              </a:rPr>
-              <a:t>.</a:t>
+              </a:rPr>
+              <a:t> should be validated against all possible combinations of model constant values to ensure that no combination results in erroneous output.</a:t>
             </a:r>
           </a:p>
           <a:p>
             <a:pPr marL="342900" indent="-342900"/>
             <a:r>
-              <a:rPr lang="en-US" i="1" dirty="0">
-                <a:solidFill>
-                  <a:schemeClr val="bg1"/>
-                </a:solidFill>
-                <a:latin typeface="AppleSystemUIFont" pitchFamily="2"/>
-              </a:rPr>
-              <a:t>How many combinatorial test cases generated, executed, passed, skipped, failed, crashed</a:t>
+              <a:rPr lang="en-US" dirty="0">
+                <a:solidFill>
+                  <a:schemeClr val="bg1"/>
+                </a:solidFill>
+              </a:rPr>
+              <a:t>Exhaustive testing is neither practical nor feasible due to the vast number of all possible combinations. </a:t>
+            </a:r>
+          </a:p>
+          <a:p>
+            <a:pPr marL="342900" indent="-342900"/>
+            <a:r>
+              <a:rPr lang="en-US" dirty="0">
+                <a:solidFill>
+                  <a:schemeClr val="bg1"/>
+                </a:solidFill>
+              </a:rPr>
+              <a:t>Combinatorial testing substantially reduces the number of required test cases while achieving near-exhaustive coverage.</a:t>
+            </a:r>
+          </a:p>
+          <a:p>
+            <a:pPr marL="342900" indent="-342900"/>
+            <a:r>
+              <a:rPr lang="en-US" dirty="0">
+                <a:solidFill>
+                  <a:schemeClr val="bg1"/>
+                </a:solidFill>
+              </a:rPr>
+              <a:t>Assuming most of the bugs are triggered by the interactions of model constants</a:t>
             </a:r>
           </a:p>
         </p:txBody>
@@ -10446,24 +10740,19 @@
     </p:spTree>
     <p:extLst>
       <p:ext uri="{BB962C8B-B14F-4D97-AF65-F5344CB8AC3E}">
-        <p14:creationId xmlns:p14="http://schemas.microsoft.com/office/powerpoint/2010/main" val="2353400714"/>
+        <p14:creationId xmlns:p14="http://schemas.microsoft.com/office/powerpoint/2010/main" val="3043626"/>
       </p:ext>
     </p:extLst>
   </p:cSld>
   <p:clrMapOvr>
     <a:masterClrMapping/>
   </p:clrMapOvr>
-  <p:extLst>
-    <p:ext uri="{6950BFC3-D8DA-4A85-94F7-54DA5524770B}">
-      <p188:commentRel xmlns:p188="http://schemas.microsoft.com/office/powerpoint/2018/8/main" r:id="rId2"/>
-    </p:ext>
-  </p:extLst>
 </p:sld>
 </file>
 
-<file path=ppt/slides/slide8.xml><?xml version="1.0" encoding="utf-8"?>
+<file path=ppt/slides/slide7.xml><?xml version="1.0" encoding="utf-8"?>
 <p:sld xmlns:a="http://schemas.openxmlformats.org/drawingml/2006/main" xmlns:r="http://schemas.openxmlformats.org/officeDocument/2006/relationships" xmlns:p="http://schemas.openxmlformats.org/presentationml/2006/main">
-  <p:cSld>
+  <p:cSld name="page2">
     <p:spTree>
       <p:nvGrpSpPr>
         <p:cNvPr id="1" name=""/>
@@ -10483,59 +10772,37 @@
           <p:cNvPr id="2" name="Title 1">
             <a:extLst>
               <a:ext uri="{FF2B5EF4-FFF2-40B4-BE49-F238E27FC236}">
-                <a16:creationId xmlns:a16="http://schemas.microsoft.com/office/drawing/2014/main" id="{3B229438-C75A-6BD0-0DC0-AB63F95B648C}"/>
+                <a16:creationId xmlns:a16="http://schemas.microsoft.com/office/drawing/2014/main" id="{3329BCE0-57D7-B440-3433-0B98B154F9AD}"/>
               </a:ext>
             </a:extLst>
           </p:cNvPr>
           <p:cNvSpPr txBox="1">
-            <a:spLocks/>
-          </p:cNvSpPr>
-          <p:nvPr/>
+            <a:spLocks noGrp="1"/>
+          </p:cNvSpPr>
+          <p:nvPr>
+            <p:ph type="title" idx="4294967295"/>
+          </p:nvPr>
         </p:nvSpPr>
         <p:spPr>
           <a:xfrm>
             <a:off x="503999" y="422301"/>
             <a:ext cx="9071640" cy="553998"/>
           </a:xfrm>
-          <a:prstGeom prst="rect">
-            <a:avLst/>
-          </a:prstGeom>
-          <a:noFill/>
-          <a:ln>
-            <a:noFill/>
-          </a:ln>
         </p:spPr>
         <p:txBody>
-          <a:bodyPr vert="horz" lIns="0" tIns="0" rIns="0" bIns="0" anchor="ctr">
+          <a:bodyPr>
             <a:spAutoFit/>
           </a:bodyPr>
-          <a:lstStyle>
-            <a:lvl1pPr lvl="0" algn="ctr" rtl="0" hangingPunct="0">
-              <a:buNone/>
-              <a:tabLst/>
-              <a:defRPr lang="en-US" sz="3600" b="0" i="0" u="none" strike="noStrike" kern="1200" cap="none">
-                <a:ln>
-                  <a:noFill/>
-                </a:ln>
-                <a:highlight>
-                  <a:scrgbClr r="0" g="0" b="0">
-                    <a:alpha val="0"/>
-                  </a:scrgbClr>
-                </a:highlight>
-                <a:latin typeface="URW Bookman" pitchFamily="2"/>
-                <a:ea typeface="Nimbus Sans" pitchFamily="2"/>
-                <a:cs typeface="FreeSans" pitchFamily="2"/>
-              </a:defRPr>
-            </a:lvl1pPr>
-          </a:lstStyle>
-          <a:p>
+          <a:lstStyle/>
+          <a:p>
+            <a:pPr lvl="0"/>
             <a:r>
               <a:rPr lang="en-US" dirty="0">
                 <a:solidFill>
                   <a:schemeClr val="bg1"/>
                 </a:solidFill>
               </a:rPr>
-              <a:t>DOI 4 Data</a:t>
+              <a:t>Background of Combinatorial Testing</a:t>
             </a:r>
           </a:p>
         </p:txBody>
@@ -10545,310 +10812,247 @@
           <p:cNvPr id="3" name="Text Placeholder 2">
             <a:extLst>
               <a:ext uri="{FF2B5EF4-FFF2-40B4-BE49-F238E27FC236}">
-                <a16:creationId xmlns:a16="http://schemas.microsoft.com/office/drawing/2014/main" id="{56064C14-1601-F022-7F3D-615176F6A82B}"/>
+                <a16:creationId xmlns:a16="http://schemas.microsoft.com/office/drawing/2014/main" id="{C12EA507-D828-F915-2FD8-9BBE5948C904}"/>
               </a:ext>
             </a:extLst>
           </p:cNvPr>
           <p:cNvSpPr txBox="1">
-            <a:spLocks/>
-          </p:cNvSpPr>
+            <a:spLocks noGrp="1"/>
+          </p:cNvSpPr>
+          <p:nvPr>
+            <p:ph type="body" idx="4294967295"/>
+          </p:nvPr>
+        </p:nvSpPr>
+        <p:spPr/>
+        <p:txBody>
+          <a:bodyPr>
+            <a:normAutofit/>
+          </a:bodyPr>
+          <a:lstStyle/>
+          <a:p>
+            <a:pPr marL="342900" indent="-342900"/>
+            <a:r>
+              <a:rPr lang="en-US" dirty="0">
+                <a:solidFill>
+                  <a:schemeClr val="bg1"/>
+                </a:solidFill>
+              </a:rPr>
+              <a:t>NIST research found most software bugs are caused by interactions of only a small number of parameters</a:t>
+            </a:r>
+            <a:r>
+              <a:rPr lang="en-US" i="1" baseline="30000" dirty="0">
+                <a:solidFill>
+                  <a:schemeClr val="bg1"/>
+                </a:solidFill>
+              </a:rPr>
+              <a:t>1</a:t>
+            </a:r>
+            <a:r>
+              <a:rPr lang="en-US" dirty="0">
+                <a:solidFill>
+                  <a:schemeClr val="bg1"/>
+                </a:solidFill>
+              </a:rPr>
+              <a:t>. </a:t>
+            </a:r>
+          </a:p>
+          <a:p>
+            <a:pPr marL="342900" indent="-342900"/>
+            <a:r>
+              <a:rPr lang="en-US" dirty="0">
+                <a:solidFill>
+                  <a:schemeClr val="bg1"/>
+                </a:solidFill>
+              </a:rPr>
+              <a:t>By testing all combinations of a certain number of parameters, most software bugs can be found with much fewer test cases. </a:t>
+            </a:r>
+          </a:p>
+          <a:p>
+            <a:pPr marL="342900" indent="-342900"/>
+            <a:r>
+              <a:rPr lang="en-US" dirty="0">
+                <a:solidFill>
+                  <a:schemeClr val="bg1"/>
+                </a:solidFill>
+              </a:rPr>
+              <a:t>NIST’s</a:t>
+            </a:r>
+            <a:r>
+              <a:rPr lang="en-US" i="1" dirty="0">
+                <a:solidFill>
+                  <a:schemeClr val="bg1"/>
+                </a:solidFill>
+              </a:rPr>
+              <a:t> </a:t>
+            </a:r>
+            <a:r>
+              <a:rPr lang="en-US" dirty="0">
+                <a:solidFill>
+                  <a:schemeClr val="bg1"/>
+                </a:solidFill>
+              </a:rPr>
+              <a:t>ACTS tool can generate covering arrays from 1-way to 6-way</a:t>
+            </a:r>
+            <a:r>
+              <a:rPr lang="en-US" baseline="30000" dirty="0">
+                <a:solidFill>
+                  <a:schemeClr val="bg1"/>
+                </a:solidFill>
+              </a:rPr>
+              <a:t> </a:t>
+            </a:r>
+            <a:r>
+              <a:rPr lang="en-US" dirty="0">
+                <a:solidFill>
+                  <a:schemeClr val="bg1"/>
+                </a:solidFill>
+              </a:rPr>
+              <a:t>or with mixed coverage</a:t>
+            </a:r>
+            <a:r>
+              <a:rPr lang="en-US" baseline="30000" dirty="0">
+                <a:solidFill>
+                  <a:schemeClr val="bg1"/>
+                </a:solidFill>
+              </a:rPr>
+              <a:t>2</a:t>
+            </a:r>
+            <a:r>
+              <a:rPr lang="en-US" dirty="0">
+                <a:solidFill>
+                  <a:schemeClr val="bg1"/>
+                </a:solidFill>
+              </a:rPr>
+              <a:t>. </a:t>
+            </a:r>
+          </a:p>
+        </p:txBody>
+      </p:sp>
+      <p:sp>
+        <p:nvSpPr>
+          <p:cNvPr id="5" name="TextBox 4">
+            <a:extLst>
+              <a:ext uri="{FF2B5EF4-FFF2-40B4-BE49-F238E27FC236}">
+                <a16:creationId xmlns:a16="http://schemas.microsoft.com/office/drawing/2014/main" id="{9747BCA8-A847-7114-04B9-16833F38B983}"/>
+              </a:ext>
+            </a:extLst>
+          </p:cNvPr>
+          <p:cNvSpPr txBox="1"/>
           <p:nvPr/>
         </p:nvSpPr>
         <p:spPr>
           <a:xfrm>
-            <a:off x="503999" y="1326600"/>
-            <a:ext cx="9071640" cy="3288239"/>
+            <a:off x="1129149" y="4549641"/>
+            <a:ext cx="7821340" cy="830997"/>
           </a:xfrm>
           <a:prstGeom prst="rect">
             <a:avLst/>
           </a:prstGeom>
           <a:noFill/>
-          <a:ln>
-            <a:noFill/>
-          </a:ln>
         </p:spPr>
         <p:txBody>
-          <a:bodyPr vert="horz" lIns="0" tIns="0" rIns="0" bIns="0">
-            <a:normAutofit/>
+          <a:bodyPr wrap="square" rtlCol="0">
+            <a:spAutoFit/>
           </a:bodyPr>
-          <a:lstStyle>
-            <a:lvl1pPr lvl="0" rtl="0" hangingPunct="0">
-              <a:spcBef>
-                <a:spcPts val="1417"/>
-              </a:spcBef>
-              <a:spcAft>
-                <a:spcPts val="0"/>
-              </a:spcAft>
-              <a:buSzPct val="45000"/>
-              <a:buFont typeface="OpenSymbol"/>
-              <a:buChar char="●"/>
-              <a:tabLst/>
-              <a:defRPr lang="en-US" sz="2400" b="0" i="0" u="none" strike="noStrike" kern="1200" cap="none">
-                <a:ln>
-                  <a:noFill/>
-                </a:ln>
-                <a:highlight>
-                  <a:scrgbClr r="0" g="0" b="0">
-                    <a:alpha val="0"/>
-                  </a:scrgbClr>
-                </a:highlight>
-                <a:latin typeface="URW Bookman" pitchFamily="2"/>
-                <a:ea typeface="Nimbus Sans" pitchFamily="2"/>
-                <a:cs typeface="FreeSans" pitchFamily="2"/>
-              </a:defRPr>
-            </a:lvl1pPr>
-            <a:lvl2pPr lvl="1" rtl="0" hangingPunct="0">
-              <a:spcBef>
-                <a:spcPts val="1417"/>
-              </a:spcBef>
-              <a:spcAft>
-                <a:spcPts val="0"/>
-              </a:spcAft>
-              <a:buSzPct val="75000"/>
-              <a:buFont typeface="OpenSymbol"/>
-              <a:buChar char="–"/>
-              <a:tabLst/>
-              <a:defRPr lang="en-US" sz="2400" b="0" i="0" u="none" strike="noStrike" kern="1200" cap="none">
-                <a:ln>
-                  <a:noFill/>
-                </a:ln>
-                <a:highlight>
-                  <a:scrgbClr r="0" g="0" b="0">
-                    <a:alpha val="0"/>
-                  </a:scrgbClr>
-                </a:highlight>
-                <a:latin typeface="URW Bookman" pitchFamily="2"/>
-                <a:ea typeface="Nimbus Sans" pitchFamily="2"/>
-                <a:cs typeface="FreeSans" pitchFamily="2"/>
-              </a:defRPr>
-            </a:lvl2pPr>
-            <a:lvl3pPr lvl="2" rtl="0" hangingPunct="0">
-              <a:spcBef>
-                <a:spcPts val="1417"/>
-              </a:spcBef>
-              <a:spcAft>
-                <a:spcPts val="0"/>
-              </a:spcAft>
-              <a:buSzPct val="45000"/>
-              <a:buFont typeface="OpenSymbol"/>
-              <a:buChar char="●"/>
-              <a:tabLst/>
-              <a:defRPr lang="en-US" sz="2400" b="0" i="0" u="none" strike="noStrike" kern="1200" cap="none">
-                <a:ln>
-                  <a:noFill/>
-                </a:ln>
-                <a:highlight>
-                  <a:scrgbClr r="0" g="0" b="0">
-                    <a:alpha val="0"/>
-                  </a:scrgbClr>
-                </a:highlight>
-                <a:latin typeface="URW Bookman" pitchFamily="2"/>
-                <a:ea typeface="Nimbus Sans" pitchFamily="2"/>
-                <a:cs typeface="FreeSans" pitchFamily="2"/>
-              </a:defRPr>
-            </a:lvl3pPr>
-            <a:lvl4pPr lvl="3" rtl="0" hangingPunct="0">
-              <a:spcBef>
-                <a:spcPts val="1417"/>
-              </a:spcBef>
-              <a:spcAft>
-                <a:spcPts val="0"/>
-              </a:spcAft>
-              <a:buSzPct val="75000"/>
-              <a:buFont typeface="OpenSymbol"/>
-              <a:buChar char="–"/>
-              <a:tabLst/>
-              <a:defRPr lang="en-US" sz="2400" b="0" i="0" u="none" strike="noStrike" kern="1200" cap="none">
-                <a:ln>
-                  <a:noFill/>
-                </a:ln>
-                <a:highlight>
-                  <a:scrgbClr r="0" g="0" b="0">
-                    <a:alpha val="0"/>
-                  </a:scrgbClr>
-                </a:highlight>
-                <a:latin typeface="URW Bookman" pitchFamily="2"/>
-                <a:ea typeface="Nimbus Sans" pitchFamily="2"/>
-                <a:cs typeface="FreeSans" pitchFamily="2"/>
-              </a:defRPr>
-            </a:lvl4pPr>
-            <a:lvl5pPr lvl="4" rtl="0" hangingPunct="0">
-              <a:spcBef>
-                <a:spcPts val="1417"/>
-              </a:spcBef>
-              <a:spcAft>
-                <a:spcPts val="0"/>
-              </a:spcAft>
-              <a:buSzPct val="45000"/>
-              <a:buFont typeface="OpenSymbol"/>
-              <a:buChar char="●"/>
-              <a:tabLst/>
-              <a:defRPr lang="en-US" sz="2400" b="0" i="0" u="none" strike="noStrike" kern="1200" cap="none">
-                <a:ln>
-                  <a:noFill/>
-                </a:ln>
-                <a:highlight>
-                  <a:scrgbClr r="0" g="0" b="0">
-                    <a:alpha val="0"/>
-                  </a:scrgbClr>
-                </a:highlight>
-                <a:latin typeface="URW Bookman" pitchFamily="2"/>
-                <a:ea typeface="Nimbus Sans" pitchFamily="2"/>
-                <a:cs typeface="FreeSans" pitchFamily="2"/>
-              </a:defRPr>
-            </a:lvl5pPr>
-            <a:lvl6pPr lvl="5" rtl="0" hangingPunct="0">
-              <a:spcBef>
-                <a:spcPts val="1417"/>
-              </a:spcBef>
-              <a:spcAft>
-                <a:spcPts val="0"/>
-              </a:spcAft>
-              <a:buSzPct val="45000"/>
-              <a:buFont typeface="OpenSymbol"/>
-              <a:buChar char="●"/>
-              <a:tabLst/>
-              <a:defRPr lang="en-US" sz="2400" b="0" i="0" u="none" strike="noStrike" kern="1200" cap="none">
-                <a:ln>
-                  <a:noFill/>
-                </a:ln>
-                <a:highlight>
-                  <a:scrgbClr r="0" g="0" b="0">
-                    <a:alpha val="0"/>
-                  </a:scrgbClr>
-                </a:highlight>
-                <a:latin typeface="URW Bookman" pitchFamily="2"/>
-                <a:ea typeface="Nimbus Sans" pitchFamily="2"/>
-                <a:cs typeface="FreeSans" pitchFamily="2"/>
-              </a:defRPr>
-            </a:lvl6pPr>
-            <a:lvl7pPr lvl="6" rtl="0" hangingPunct="0">
-              <a:spcBef>
-                <a:spcPts val="1417"/>
-              </a:spcBef>
-              <a:spcAft>
-                <a:spcPts val="0"/>
-              </a:spcAft>
-              <a:buSzPct val="45000"/>
-              <a:buFont typeface="OpenSymbol"/>
-              <a:buChar char="●"/>
-              <a:tabLst/>
-              <a:defRPr lang="en-US" sz="2400" b="0" i="0" u="none" strike="noStrike" kern="1200" cap="none">
-                <a:ln>
-                  <a:noFill/>
-                </a:ln>
-                <a:highlight>
-                  <a:scrgbClr r="0" g="0" b="0">
-                    <a:alpha val="0"/>
-                  </a:scrgbClr>
-                </a:highlight>
-                <a:latin typeface="URW Bookman" pitchFamily="2"/>
-                <a:ea typeface="Nimbus Sans" pitchFamily="2"/>
-                <a:cs typeface="FreeSans" pitchFamily="2"/>
-              </a:defRPr>
-            </a:lvl7pPr>
-            <a:lvl8pPr marL="3429000" indent="-228600" algn="l" defTabSz="914400" rtl="0" eaLnBrk="1" latinLnBrk="0" hangingPunct="1">
-              <a:lnSpc>
-                <a:spcPct val="90000"/>
-              </a:lnSpc>
-              <a:spcBef>
-                <a:spcPts val="500"/>
-              </a:spcBef>
-              <a:buFont typeface="Arial" panose="020B0604020202020204" pitchFamily="34" charset="0"/>
-              <a:buChar char="•"/>
-              <a:defRPr sz="1800" kern="1200">
-                <a:solidFill>
-                  <a:schemeClr val="tx1"/>
-                </a:solidFill>
-                <a:latin typeface="+mn-lt"/>
-                <a:ea typeface="+mn-ea"/>
-                <a:cs typeface="+mn-cs"/>
-              </a:defRPr>
-            </a:lvl8pPr>
-            <a:lvl9pPr marL="3886200" indent="-228600" algn="l" defTabSz="914400" rtl="0" eaLnBrk="1" latinLnBrk="0" hangingPunct="1">
-              <a:lnSpc>
-                <a:spcPct val="90000"/>
-              </a:lnSpc>
-              <a:spcBef>
-                <a:spcPts val="500"/>
-              </a:spcBef>
-              <a:buFont typeface="Arial" panose="020B0604020202020204" pitchFamily="34" charset="0"/>
-              <a:buChar char="•"/>
-              <a:defRPr sz="1800" kern="1200">
-                <a:solidFill>
-                  <a:schemeClr val="tx1"/>
-                </a:solidFill>
-                <a:latin typeface="+mn-lt"/>
-                <a:ea typeface="+mn-ea"/>
-                <a:cs typeface="+mn-cs"/>
-              </a:defRPr>
-            </a:lvl9pPr>
-          </a:lstStyle>
-          <a:p>
-            <a:pPr marL="342900" indent="-342900"/>
-            <a:r>
-              <a:rPr lang="en-US" dirty="0">
-                <a:solidFill>
-                  <a:schemeClr val="bg1"/>
-                </a:solidFill>
-                <a:latin typeface="AppleSystemUIFont" pitchFamily="2"/>
-              </a:rPr>
-              <a:t>DOI 4 results in 50,031 test cases when only changing the values of constants known to effect the output of </a:t>
-            </a:r>
-            <a:r>
-              <a:rPr lang="en-US" dirty="0" err="1">
-                <a:solidFill>
-                  <a:schemeClr val="bg1"/>
-                </a:solidFill>
-                <a:latin typeface="AppleSystemUIFont" pitchFamily="2"/>
-              </a:rPr>
-              <a:t>LakeTemperature</a:t>
-            </a:r>
-            <a:r>
-              <a:rPr lang="en-US" dirty="0">
-                <a:solidFill>
-                  <a:schemeClr val="bg1"/>
-                </a:solidFill>
-                <a:latin typeface="AppleSystemUIFont" pitchFamily="2"/>
-              </a:rPr>
-              <a:t>.</a:t>
-            </a:r>
-          </a:p>
-          <a:p>
-            <a:pPr marL="342900" indent="-342900"/>
-            <a:r>
-              <a:rPr lang="en-US" i="1" dirty="0">
-                <a:solidFill>
-                  <a:schemeClr val="bg1"/>
-                </a:solidFill>
-                <a:latin typeface="AppleSystemUIFont" pitchFamily="2"/>
-              </a:rPr>
-              <a:t>How many combinatorial test cases generated, executed, passed, skipped, failed, crashed</a:t>
+          <a:lstStyle/>
+          <a:p>
+            <a:r>
+              <a:rPr lang="en-US" sz="1200" dirty="0">
+                <a:solidFill>
+                  <a:schemeClr val="bg1"/>
+                </a:solidFill>
+              </a:rPr>
+              <a:t>1. </a:t>
+            </a:r>
+            <a:r>
+              <a:rPr lang="en-US" sz="1200" i="1" dirty="0">
+                <a:solidFill>
+                  <a:schemeClr val="bg1"/>
+                </a:solidFill>
+              </a:rPr>
+              <a:t>Automated Combinatorial Testing for Software (ACTS)</a:t>
+            </a:r>
+            <a:r>
+              <a:rPr lang="en-US" sz="1200" dirty="0">
+                <a:solidFill>
+                  <a:schemeClr val="bg1"/>
+                </a:solidFill>
+              </a:rPr>
+              <a:t>. NIST Computer Security Division. (2016, July 20). https://</a:t>
+            </a:r>
+            <a:r>
+              <a:rPr lang="en-US" sz="1200" dirty="0" err="1">
+                <a:solidFill>
+                  <a:schemeClr val="bg1"/>
+                </a:solidFill>
+              </a:rPr>
+              <a:t>csrc.nist.rip</a:t>
+            </a:r>
+            <a:r>
+              <a:rPr lang="en-US" sz="1200" dirty="0">
+                <a:solidFill>
+                  <a:schemeClr val="bg1"/>
+                </a:solidFill>
+              </a:rPr>
+              <a:t>/groups/SNS/acts/ </a:t>
+            </a:r>
+          </a:p>
+          <a:p>
+            <a:r>
+              <a:rPr lang="en-US" sz="1200" dirty="0">
+                <a:solidFill>
+                  <a:schemeClr val="bg1"/>
+                </a:solidFill>
+              </a:rPr>
+              <a:t>2. </a:t>
+            </a:r>
+            <a:r>
+              <a:rPr lang="en-US" sz="1200" i="1" dirty="0">
+                <a:solidFill>
+                  <a:schemeClr val="bg1"/>
+                </a:solidFill>
+              </a:rPr>
+              <a:t>User Guide for ACTS</a:t>
+            </a:r>
+            <a:r>
+              <a:rPr lang="en-US" sz="1200" dirty="0">
+                <a:solidFill>
+                  <a:schemeClr val="bg1"/>
+                </a:solidFill>
+              </a:rPr>
+              <a:t>. NIST. (n.d.). </a:t>
+            </a:r>
+            <a:r>
+              <a:rPr lang="en-US" sz="1200" u="sng" dirty="0">
+                <a:solidFill>
+                  <a:schemeClr val="bg1"/>
+                </a:solidFill>
+                <a:hlinkClick r:id="rId3"/>
+              </a:rPr>
+              <a:t>https://csrc.nist.gov/csrc/media/Projects/automated-combinatorial-testing-for-software/documents/acts_user_guide_for_basic1.0_and_advanced3.3_versions_nov23.pdf</a:t>
+            </a:r>
+            <a:r>
+              <a:rPr lang="en-US" sz="1200" u="sng" dirty="0">
+                <a:solidFill>
+                  <a:schemeClr val="bg1"/>
+                </a:solidFill>
+              </a:rPr>
+              <a:t> </a:t>
             </a:r>
           </a:p>
         </p:txBody>
       </p:sp>
     </p:spTree>
-    <p:extLst>
-      <p:ext uri="{BB962C8B-B14F-4D97-AF65-F5344CB8AC3E}">
-        <p14:creationId xmlns:p14="http://schemas.microsoft.com/office/powerpoint/2010/main" val="3165592934"/>
-      </p:ext>
-    </p:extLst>
   </p:cSld>
   <p:clrMapOvr>
     <a:masterClrMapping/>
   </p:clrMapOvr>
-  <p:extLst>
-    <p:ext uri="{6950BFC3-D8DA-4A85-94F7-54DA5524770B}">
-      <p188:commentRel xmlns:p188="http://schemas.microsoft.com/office/powerpoint/2018/8/main" r:id="rId2"/>
-    </p:ext>
-  </p:extLst>
 </p:sld>
 </file>
 
-<file path=ppt/slides/slide9.xml><?xml version="1.0" encoding="utf-8"?>
+<file path=ppt/slides/slide8.xml><?xml version="1.0" encoding="utf-8"?>
 <p:sld xmlns:a="http://schemas.openxmlformats.org/drawingml/2006/main" xmlns:r="http://schemas.openxmlformats.org/officeDocument/2006/relationships" xmlns:p="http://schemas.openxmlformats.org/presentationml/2006/main">
-  <p:cSld>
+  <p:cSld name="page3">
     <p:spTree>
       <p:nvGrpSpPr>
         <p:cNvPr id="1" name=""/>
@@ -10868,60 +11072,55 @@
           <p:cNvPr id="2" name="Title 1">
             <a:extLst>
               <a:ext uri="{FF2B5EF4-FFF2-40B4-BE49-F238E27FC236}">
-                <a16:creationId xmlns:a16="http://schemas.microsoft.com/office/drawing/2014/main" id="{3BF6498E-98A7-DD6B-79FB-40EF89C7FFC8}"/>
+                <a16:creationId xmlns:a16="http://schemas.microsoft.com/office/drawing/2014/main" id="{1F22CA55-51A0-611A-7B91-13ABAA9983C9}"/>
               </a:ext>
             </a:extLst>
           </p:cNvPr>
           <p:cNvSpPr txBox="1">
-            <a:spLocks/>
-          </p:cNvSpPr>
-          <p:nvPr/>
+            <a:spLocks noGrp="1"/>
+          </p:cNvSpPr>
+          <p:nvPr>
+            <p:ph type="title" idx="4294967295"/>
+          </p:nvPr>
         </p:nvSpPr>
         <p:spPr>
           <a:xfrm>
             <a:off x="503999" y="422301"/>
             <a:ext cx="9071640" cy="553998"/>
           </a:xfrm>
-          <a:prstGeom prst="rect">
-            <a:avLst/>
-          </a:prstGeom>
-          <a:noFill/>
-          <a:ln>
-            <a:noFill/>
-          </a:ln>
         </p:spPr>
         <p:txBody>
-          <a:bodyPr vert="horz" lIns="0" tIns="0" rIns="0" bIns="0" anchor="ctr">
+          <a:bodyPr>
             <a:spAutoFit/>
           </a:bodyPr>
-          <a:lstStyle>
-            <a:lvl1pPr lvl="0" algn="ctr" rtl="0" hangingPunct="0">
-              <a:buNone/>
-              <a:tabLst/>
-              <a:defRPr lang="en-US" sz="3600" b="0" i="0" u="none" strike="noStrike" kern="1200" cap="none">
-                <a:ln>
-                  <a:noFill/>
-                </a:ln>
-                <a:highlight>
-                  <a:scrgbClr r="0" g="0" b="0">
-                    <a:alpha val="0"/>
-                  </a:scrgbClr>
-                </a:highlight>
-                <a:latin typeface="URW Bookman" pitchFamily="2"/>
-                <a:ea typeface="Nimbus Sans" pitchFamily="2"/>
-                <a:cs typeface="FreeSans" pitchFamily="2"/>
-              </a:defRPr>
-            </a:lvl1pPr>
-          </a:lstStyle>
-          <a:p>
+          <a:lstStyle/>
+          <a:p>
+            <a:pPr lvl="0"/>
             <a:r>
               <a:rPr lang="en-US" dirty="0">
                 <a:solidFill>
                   <a:schemeClr val="bg1"/>
                 </a:solidFill>
               </a:rPr>
-              <a:t>DOI 5 Data</a:t>
-            </a:r>
+              <a:t>Application of CT to </a:t>
+            </a:r>
+            <a:r>
+              <a:rPr lang="en-US" dirty="0" err="1">
+                <a:solidFill>
+                  <a:schemeClr val="bg1"/>
+                </a:solidFill>
+                <a:latin typeface="Courier New" panose="02070309020205020404" pitchFamily="49" charset="0"/>
+                <a:cs typeface="Courier New" panose="02070309020205020404" pitchFamily="49" charset="0"/>
+              </a:rPr>
+              <a:t>LakeTemperature</a:t>
+            </a:r>
+            <a:endParaRPr lang="en-US" dirty="0">
+              <a:solidFill>
+                <a:schemeClr val="bg1"/>
+              </a:solidFill>
+              <a:latin typeface="Courier New" panose="02070309020205020404" pitchFamily="49" charset="0"/>
+              <a:cs typeface="Courier New" panose="02070309020205020404" pitchFamily="49" charset="0"/>
+            </a:endParaRPr>
           </a:p>
         </p:txBody>
       </p:sp>
@@ -10930,245 +11129,28 @@
           <p:cNvPr id="3" name="Text Placeholder 2">
             <a:extLst>
               <a:ext uri="{FF2B5EF4-FFF2-40B4-BE49-F238E27FC236}">
-                <a16:creationId xmlns:a16="http://schemas.microsoft.com/office/drawing/2014/main" id="{31720598-1CB0-E7F3-3417-23A2488D52ED}"/>
+                <a16:creationId xmlns:a16="http://schemas.microsoft.com/office/drawing/2014/main" id="{4FC0F3B3-D388-0133-98BD-A5D2EC76DF23}"/>
               </a:ext>
             </a:extLst>
           </p:cNvPr>
           <p:cNvSpPr txBox="1">
-            <a:spLocks/>
-          </p:cNvSpPr>
-          <p:nvPr/>
+            <a:spLocks noGrp="1"/>
+          </p:cNvSpPr>
+          <p:nvPr>
+            <p:ph type="body" idx="4294967295"/>
+          </p:nvPr>
         </p:nvSpPr>
         <p:spPr>
           <a:xfrm>
             <a:off x="503999" y="1326600"/>
-            <a:ext cx="9071640" cy="3288239"/>
+            <a:ext cx="9071640" cy="3613679"/>
           </a:xfrm>
-          <a:prstGeom prst="rect">
-            <a:avLst/>
-          </a:prstGeom>
-          <a:noFill/>
-          <a:ln>
-            <a:noFill/>
-          </a:ln>
         </p:spPr>
         <p:txBody>
-          <a:bodyPr vert="horz" lIns="0" tIns="0" rIns="0" bIns="0">
-            <a:normAutofit/>
+          <a:bodyPr>
+            <a:normAutofit fontScale="92500" lnSpcReduction="20000"/>
           </a:bodyPr>
-          <a:lstStyle>
-            <a:lvl1pPr lvl="0" rtl="0" hangingPunct="0">
-              <a:spcBef>
-                <a:spcPts val="1417"/>
-              </a:spcBef>
-              <a:spcAft>
-                <a:spcPts val="0"/>
-              </a:spcAft>
-              <a:buSzPct val="45000"/>
-              <a:buFont typeface="OpenSymbol"/>
-              <a:buChar char="●"/>
-              <a:tabLst/>
-              <a:defRPr lang="en-US" sz="2400" b="0" i="0" u="none" strike="noStrike" kern="1200" cap="none">
-                <a:ln>
-                  <a:noFill/>
-                </a:ln>
-                <a:highlight>
-                  <a:scrgbClr r="0" g="0" b="0">
-                    <a:alpha val="0"/>
-                  </a:scrgbClr>
-                </a:highlight>
-                <a:latin typeface="URW Bookman" pitchFamily="2"/>
-                <a:ea typeface="Nimbus Sans" pitchFamily="2"/>
-                <a:cs typeface="FreeSans" pitchFamily="2"/>
-              </a:defRPr>
-            </a:lvl1pPr>
-            <a:lvl2pPr lvl="1" rtl="0" hangingPunct="0">
-              <a:spcBef>
-                <a:spcPts val="1417"/>
-              </a:spcBef>
-              <a:spcAft>
-                <a:spcPts val="0"/>
-              </a:spcAft>
-              <a:buSzPct val="75000"/>
-              <a:buFont typeface="OpenSymbol"/>
-              <a:buChar char="–"/>
-              <a:tabLst/>
-              <a:defRPr lang="en-US" sz="2400" b="0" i="0" u="none" strike="noStrike" kern="1200" cap="none">
-                <a:ln>
-                  <a:noFill/>
-                </a:ln>
-                <a:highlight>
-                  <a:scrgbClr r="0" g="0" b="0">
-                    <a:alpha val="0"/>
-                  </a:scrgbClr>
-                </a:highlight>
-                <a:latin typeface="URW Bookman" pitchFamily="2"/>
-                <a:ea typeface="Nimbus Sans" pitchFamily="2"/>
-                <a:cs typeface="FreeSans" pitchFamily="2"/>
-              </a:defRPr>
-            </a:lvl2pPr>
-            <a:lvl3pPr lvl="2" rtl="0" hangingPunct="0">
-              <a:spcBef>
-                <a:spcPts val="1417"/>
-              </a:spcBef>
-              <a:spcAft>
-                <a:spcPts val="0"/>
-              </a:spcAft>
-              <a:buSzPct val="45000"/>
-              <a:buFont typeface="OpenSymbol"/>
-              <a:buChar char="●"/>
-              <a:tabLst/>
-              <a:defRPr lang="en-US" sz="2400" b="0" i="0" u="none" strike="noStrike" kern="1200" cap="none">
-                <a:ln>
-                  <a:noFill/>
-                </a:ln>
-                <a:highlight>
-                  <a:scrgbClr r="0" g="0" b="0">
-                    <a:alpha val="0"/>
-                  </a:scrgbClr>
-                </a:highlight>
-                <a:latin typeface="URW Bookman" pitchFamily="2"/>
-                <a:ea typeface="Nimbus Sans" pitchFamily="2"/>
-                <a:cs typeface="FreeSans" pitchFamily="2"/>
-              </a:defRPr>
-            </a:lvl3pPr>
-            <a:lvl4pPr lvl="3" rtl="0" hangingPunct="0">
-              <a:spcBef>
-                <a:spcPts val="1417"/>
-              </a:spcBef>
-              <a:spcAft>
-                <a:spcPts val="0"/>
-              </a:spcAft>
-              <a:buSzPct val="75000"/>
-              <a:buFont typeface="OpenSymbol"/>
-              <a:buChar char="–"/>
-              <a:tabLst/>
-              <a:defRPr lang="en-US" sz="2400" b="0" i="0" u="none" strike="noStrike" kern="1200" cap="none">
-                <a:ln>
-                  <a:noFill/>
-                </a:ln>
-                <a:highlight>
-                  <a:scrgbClr r="0" g="0" b="0">
-                    <a:alpha val="0"/>
-                  </a:scrgbClr>
-                </a:highlight>
-                <a:latin typeface="URW Bookman" pitchFamily="2"/>
-                <a:ea typeface="Nimbus Sans" pitchFamily="2"/>
-                <a:cs typeface="FreeSans" pitchFamily="2"/>
-              </a:defRPr>
-            </a:lvl4pPr>
-            <a:lvl5pPr lvl="4" rtl="0" hangingPunct="0">
-              <a:spcBef>
-                <a:spcPts val="1417"/>
-              </a:spcBef>
-              <a:spcAft>
-                <a:spcPts val="0"/>
-              </a:spcAft>
-              <a:buSzPct val="45000"/>
-              <a:buFont typeface="OpenSymbol"/>
-              <a:buChar char="●"/>
-              <a:tabLst/>
-              <a:defRPr lang="en-US" sz="2400" b="0" i="0" u="none" strike="noStrike" kern="1200" cap="none">
-                <a:ln>
-                  <a:noFill/>
-                </a:ln>
-                <a:highlight>
-                  <a:scrgbClr r="0" g="0" b="0">
-                    <a:alpha val="0"/>
-                  </a:scrgbClr>
-                </a:highlight>
-                <a:latin typeface="URW Bookman" pitchFamily="2"/>
-                <a:ea typeface="Nimbus Sans" pitchFamily="2"/>
-                <a:cs typeface="FreeSans" pitchFamily="2"/>
-              </a:defRPr>
-            </a:lvl5pPr>
-            <a:lvl6pPr lvl="5" rtl="0" hangingPunct="0">
-              <a:spcBef>
-                <a:spcPts val="1417"/>
-              </a:spcBef>
-              <a:spcAft>
-                <a:spcPts val="0"/>
-              </a:spcAft>
-              <a:buSzPct val="45000"/>
-              <a:buFont typeface="OpenSymbol"/>
-              <a:buChar char="●"/>
-              <a:tabLst/>
-              <a:defRPr lang="en-US" sz="2400" b="0" i="0" u="none" strike="noStrike" kern="1200" cap="none">
-                <a:ln>
-                  <a:noFill/>
-                </a:ln>
-                <a:highlight>
-                  <a:scrgbClr r="0" g="0" b="0">
-                    <a:alpha val="0"/>
-                  </a:scrgbClr>
-                </a:highlight>
-                <a:latin typeface="URW Bookman" pitchFamily="2"/>
-                <a:ea typeface="Nimbus Sans" pitchFamily="2"/>
-                <a:cs typeface="FreeSans" pitchFamily="2"/>
-              </a:defRPr>
-            </a:lvl6pPr>
-            <a:lvl7pPr lvl="6" rtl="0" hangingPunct="0">
-              <a:spcBef>
-                <a:spcPts val="1417"/>
-              </a:spcBef>
-              <a:spcAft>
-                <a:spcPts val="0"/>
-              </a:spcAft>
-              <a:buSzPct val="45000"/>
-              <a:buFont typeface="OpenSymbol"/>
-              <a:buChar char="●"/>
-              <a:tabLst/>
-              <a:defRPr lang="en-US" sz="2400" b="0" i="0" u="none" strike="noStrike" kern="1200" cap="none">
-                <a:ln>
-                  <a:noFill/>
-                </a:ln>
-                <a:highlight>
-                  <a:scrgbClr r="0" g="0" b="0">
-                    <a:alpha val="0"/>
-                  </a:scrgbClr>
-                </a:highlight>
-                <a:latin typeface="URW Bookman" pitchFamily="2"/>
-                <a:ea typeface="Nimbus Sans" pitchFamily="2"/>
-                <a:cs typeface="FreeSans" pitchFamily="2"/>
-              </a:defRPr>
-            </a:lvl7pPr>
-            <a:lvl8pPr marL="3429000" indent="-228600" algn="l" defTabSz="914400" rtl="0" eaLnBrk="1" latinLnBrk="0" hangingPunct="1">
-              <a:lnSpc>
-                <a:spcPct val="90000"/>
-              </a:lnSpc>
-              <a:spcBef>
-                <a:spcPts val="500"/>
-              </a:spcBef>
-              <a:buFont typeface="Arial" panose="020B0604020202020204" pitchFamily="34" charset="0"/>
-              <a:buChar char="•"/>
-              <a:defRPr sz="1800" kern="1200">
-                <a:solidFill>
-                  <a:schemeClr val="tx1"/>
-                </a:solidFill>
-                <a:latin typeface="+mn-lt"/>
-                <a:ea typeface="+mn-ea"/>
-                <a:cs typeface="+mn-cs"/>
-              </a:defRPr>
-            </a:lvl8pPr>
-            <a:lvl9pPr marL="3886200" indent="-228600" algn="l" defTabSz="914400" rtl="0" eaLnBrk="1" latinLnBrk="0" hangingPunct="1">
-              <a:lnSpc>
-                <a:spcPct val="90000"/>
-              </a:lnSpc>
-              <a:spcBef>
-                <a:spcPts val="500"/>
-              </a:spcBef>
-              <a:buFont typeface="Arial" panose="020B0604020202020204" pitchFamily="34" charset="0"/>
-              <a:buChar char="•"/>
-              <a:defRPr sz="1800" kern="1200">
-                <a:solidFill>
-                  <a:schemeClr val="tx1"/>
-                </a:solidFill>
-                <a:latin typeface="+mn-lt"/>
-                <a:ea typeface="+mn-ea"/>
-                <a:cs typeface="+mn-cs"/>
-              </a:defRPr>
-            </a:lvl9pPr>
-          </a:lstStyle>
+          <a:lstStyle/>
           <a:p>
             <a:pPr marL="342900" indent="-342900"/>
             <a:r>
@@ -11176,16 +11158,16 @@
                 <a:solidFill>
                   <a:schemeClr val="bg1"/>
                 </a:solidFill>
-                <a:latin typeface="AppleSystemUIFont" pitchFamily="2"/>
-              </a:rPr>
-              <a:t>DOI 5 results in 689,735 test cases when only changing the values of constants known to effect the output of </a:t>
+              </a:rPr>
+              <a:t>The model constants, which we can control when running </a:t>
             </a:r>
             <a:r>
               <a:rPr lang="en-US" dirty="0" err="1">
                 <a:solidFill>
                   <a:schemeClr val="bg1"/>
                 </a:solidFill>
-                <a:latin typeface="AppleSystemUIFont" pitchFamily="2"/>
+                <a:latin typeface="Courier New" panose="02070309020205020404" pitchFamily="49" charset="0"/>
+                <a:cs typeface="Courier New" panose="02070309020205020404" pitchFamily="49" charset="0"/>
               </a:rPr>
               <a:t>LakeTemperature</a:t>
             </a:r>
@@ -11194,40 +11176,238 @@
                 <a:solidFill>
                   <a:schemeClr val="bg1"/>
                 </a:solidFill>
-                <a:latin typeface="AppleSystemUIFont" pitchFamily="2"/>
-              </a:rPr>
-              <a:t>.</a:t>
+              </a:rPr>
+              <a:t>, are used as the parameters for the combinatorial test cases. </a:t>
             </a:r>
           </a:p>
           <a:p>
             <a:pPr marL="342900" indent="-342900"/>
             <a:r>
-              <a:rPr lang="en-US" i="1" dirty="0">
-                <a:solidFill>
-                  <a:schemeClr val="bg1"/>
-                </a:solidFill>
-                <a:latin typeface="AppleSystemUIFont" pitchFamily="2"/>
-              </a:rPr>
-              <a:t>How many combinatorial test cases generated, executed, passed, skipped, failed, crashed</a:t>
-            </a:r>
+              <a:rPr lang="en-US" dirty="0">
+                <a:solidFill>
+                  <a:schemeClr val="bg1"/>
+                </a:solidFill>
+              </a:rPr>
+              <a:t>Booleans can be either 0 or 1.</a:t>
+            </a:r>
+          </a:p>
+          <a:p>
+            <a:pPr marL="342900" indent="-342900"/>
+            <a:r>
+              <a:rPr lang="en-US" dirty="0">
+                <a:solidFill>
+                  <a:schemeClr val="bg1"/>
+                </a:solidFill>
+              </a:rPr>
+              <a:t>For integers, we linearly interpolate over their ranges to get up to 11 values. </a:t>
+            </a:r>
+          </a:p>
+          <a:p>
+            <a:pPr marL="342900" indent="-342900"/>
+            <a:r>
+              <a:rPr lang="en-US" dirty="0">
+                <a:solidFill>
+                  <a:schemeClr val="bg1"/>
+                </a:solidFill>
+              </a:rPr>
+              <a:t>For floats, we linearly interpolate over their ranges to get exactly 11 values. </a:t>
+            </a:r>
+          </a:p>
+          <a:p>
+            <a:pPr marL="342900" indent="-342900"/>
+            <a:r>
+              <a:rPr lang="en-US" dirty="0">
+                <a:solidFill>
+                  <a:schemeClr val="bg1"/>
+                </a:solidFill>
+              </a:rPr>
+              <a:t>ACTS generates covering arrays from 2-way to 5-way and outputs a CSV file for each, from which </a:t>
+            </a:r>
+            <a:r>
+              <a:rPr lang="en-US" dirty="0" err="1">
+                <a:solidFill>
+                  <a:schemeClr val="bg1"/>
+                </a:solidFill>
+              </a:rPr>
+              <a:t>NetCDF</a:t>
+            </a:r>
+            <a:r>
+              <a:rPr lang="en-US" dirty="0">
+                <a:solidFill>
+                  <a:schemeClr val="bg1"/>
+                </a:solidFill>
+              </a:rPr>
+              <a:t> files are created using a Python script (</a:t>
+            </a:r>
+            <a:r>
+              <a:rPr lang="en-US" dirty="0">
+                <a:solidFill>
+                  <a:schemeClr val="bg1"/>
+                </a:solidFill>
+                <a:latin typeface="Courier New" panose="02070309020205020404" pitchFamily="49" charset="0"/>
+                <a:cs typeface="Courier New" panose="02070309020205020404" pitchFamily="49" charset="0"/>
+              </a:rPr>
+              <a:t>csv2nc</a:t>
+            </a:r>
+            <a:r>
+              <a:rPr lang="en-US" dirty="0">
+                <a:solidFill>
+                  <a:schemeClr val="bg1"/>
+                </a:solidFill>
+              </a:rPr>
+              <a:t>). These are run on the model using the </a:t>
+            </a:r>
+            <a:r>
+              <a:rPr lang="en-US" dirty="0" err="1">
+                <a:solidFill>
+                  <a:schemeClr val="bg1"/>
+                </a:solidFill>
+              </a:rPr>
+              <a:t>NetCDF</a:t>
+            </a:r>
+            <a:r>
+              <a:rPr lang="en-US" dirty="0">
+                <a:solidFill>
+                  <a:schemeClr val="bg1"/>
+                </a:solidFill>
+              </a:rPr>
+              <a:t> Cases Sampling Plugin. </a:t>
+            </a:r>
+            <a:endParaRPr lang="en-US" i="1" dirty="0">
+              <a:solidFill>
+                <a:schemeClr val="bg1"/>
+              </a:solidFill>
+            </a:endParaRPr>
           </a:p>
         </p:txBody>
       </p:sp>
     </p:spTree>
-    <p:extLst>
-      <p:ext uri="{BB962C8B-B14F-4D97-AF65-F5344CB8AC3E}">
-        <p14:creationId xmlns:p14="http://schemas.microsoft.com/office/powerpoint/2010/main" val="3954683613"/>
-      </p:ext>
-    </p:extLst>
   </p:cSld>
   <p:clrMapOvr>
     <a:masterClrMapping/>
   </p:clrMapOvr>
-  <p:extLst>
-    <p:ext uri="{6950BFC3-D8DA-4A85-94F7-54DA5524770B}">
-      <p188:commentRel xmlns:p188="http://schemas.microsoft.com/office/powerpoint/2018/8/main" r:id="rId2"/>
-    </p:ext>
-  </p:extLst>
+</p:sld>
+</file>
+
+<file path=ppt/slides/slide9.xml><?xml version="1.0" encoding="utf-8"?>
+<p:sld xmlns:a="http://schemas.openxmlformats.org/drawingml/2006/main" xmlns:r="http://schemas.openxmlformats.org/officeDocument/2006/relationships" xmlns:p="http://schemas.openxmlformats.org/presentationml/2006/main">
+  <p:cSld name="page4">
+    <p:spTree>
+      <p:nvGrpSpPr>
+        <p:cNvPr id="1" name=""/>
+        <p:cNvGrpSpPr/>
+        <p:nvPr/>
+      </p:nvGrpSpPr>
+      <p:grpSpPr>
+        <a:xfrm>
+          <a:off x="0" y="0"/>
+          <a:ext cx="0" cy="0"/>
+          <a:chOff x="0" y="0"/>
+          <a:chExt cx="0" cy="0"/>
+        </a:xfrm>
+      </p:grpSpPr>
+      <p:sp>
+        <p:nvSpPr>
+          <p:cNvPr id="2" name="Title 1">
+            <a:extLst>
+              <a:ext uri="{FF2B5EF4-FFF2-40B4-BE49-F238E27FC236}">
+                <a16:creationId xmlns:a16="http://schemas.microsoft.com/office/drawing/2014/main" id="{C4490A42-8874-BE43-3396-EC82FA0BDFFE}"/>
+              </a:ext>
+            </a:extLst>
+          </p:cNvPr>
+          <p:cNvSpPr txBox="1">
+            <a:spLocks noGrp="1"/>
+          </p:cNvSpPr>
+          <p:nvPr>
+            <p:ph type="title" idx="4294967295"/>
+          </p:nvPr>
+        </p:nvSpPr>
+        <p:spPr>
+          <a:xfrm>
+            <a:off x="503999" y="422301"/>
+            <a:ext cx="9071640" cy="553998"/>
+          </a:xfrm>
+        </p:spPr>
+        <p:txBody>
+          <a:bodyPr>
+            <a:spAutoFit/>
+          </a:bodyPr>
+          <a:lstStyle/>
+          <a:p>
+            <a:pPr lvl="0"/>
+            <a:r>
+              <a:rPr lang="en-US" dirty="0">
+                <a:solidFill>
+                  <a:schemeClr val="bg1"/>
+                </a:solidFill>
+              </a:rPr>
+              <a:t>Test Oracle</a:t>
+            </a:r>
+          </a:p>
+        </p:txBody>
+      </p:sp>
+      <p:sp>
+        <p:nvSpPr>
+          <p:cNvPr id="3" name="Text Placeholder 2">
+            <a:extLst>
+              <a:ext uri="{FF2B5EF4-FFF2-40B4-BE49-F238E27FC236}">
+                <a16:creationId xmlns:a16="http://schemas.microsoft.com/office/drawing/2014/main" id="{86FF665C-42E1-DF86-A85F-54C67BE68385}"/>
+              </a:ext>
+            </a:extLst>
+          </p:cNvPr>
+          <p:cNvSpPr txBox="1">
+            <a:spLocks noGrp="1"/>
+          </p:cNvSpPr>
+          <p:nvPr>
+            <p:ph type="body" idx="4294967295"/>
+          </p:nvPr>
+        </p:nvSpPr>
+        <p:spPr/>
+        <p:txBody>
+          <a:bodyPr>
+            <a:normAutofit/>
+          </a:bodyPr>
+          <a:lstStyle/>
+          <a:p>
+            <a:pPr marL="342900" indent="-342900"/>
+            <a:r>
+              <a:rPr lang="en-US" dirty="0">
+                <a:solidFill>
+                  <a:schemeClr val="bg1"/>
+                </a:solidFill>
+              </a:rPr>
+              <a:t>Scientific software verification is challenging due to often lacking a test oracle. </a:t>
+            </a:r>
+          </a:p>
+          <a:p>
+            <a:pPr marL="342900" indent="-342900"/>
+            <a:r>
+              <a:rPr lang="en-US" dirty="0">
+                <a:solidFill>
+                  <a:schemeClr val="bg1"/>
+                </a:solidFill>
+              </a:rPr>
+              <a:t>We implemented checks that validate model outputs, supported by the Fault Finding Analysis Plugin. </a:t>
+            </a:r>
+          </a:p>
+          <a:p>
+            <a:pPr marL="342900" indent="-342900"/>
+            <a:r>
+              <a:rPr lang="en-US" dirty="0">
+                <a:solidFill>
+                  <a:schemeClr val="bg1"/>
+                </a:solidFill>
+              </a:rPr>
+              <a:t>Checks include ranges of outputs, signs, enumerated values, finiteness, relationships to other inputs/outputs, and certain physical laws and constraints.</a:t>
+            </a:r>
+          </a:p>
+        </p:txBody>
+      </p:sp>
+    </p:spTree>
+  </p:cSld>
+  <p:clrMapOvr>
+    <a:masterClrMapping/>
+  </p:clrMapOvr>
 </p:sld>
 </file>
 

--- a/documentation/for_collaborators/AnalysisOverview.pptx
+++ b/documentation/for_collaborators/AnalysisOverview.pptx
@@ -12,25 +12,25 @@
   </p:handoutMasterIdLst>
   <p:sldIdLst>
     <p:sldId id="256" r:id="rId2"/>
-    <p:sldId id="284" r:id="rId3"/>
-    <p:sldId id="269" r:id="rId4"/>
-    <p:sldId id="274" r:id="rId5"/>
-    <p:sldId id="271" r:id="rId6"/>
-    <p:sldId id="275" r:id="rId7"/>
-    <p:sldId id="257" r:id="rId8"/>
-    <p:sldId id="258" r:id="rId9"/>
-    <p:sldId id="259" r:id="rId10"/>
-    <p:sldId id="262" r:id="rId11"/>
-    <p:sldId id="276" r:id="rId12"/>
-    <p:sldId id="277" r:id="rId13"/>
-    <p:sldId id="278" r:id="rId14"/>
-    <p:sldId id="265" r:id="rId15"/>
-    <p:sldId id="266" r:id="rId16"/>
-    <p:sldId id="280" r:id="rId17"/>
-    <p:sldId id="281" r:id="rId18"/>
-    <p:sldId id="268" r:id="rId19"/>
-    <p:sldId id="282" r:id="rId20"/>
-    <p:sldId id="283" r:id="rId21"/>
+    <p:sldId id="266" r:id="rId3"/>
+    <p:sldId id="280" r:id="rId4"/>
+    <p:sldId id="281" r:id="rId5"/>
+    <p:sldId id="268" r:id="rId6"/>
+    <p:sldId id="282" r:id="rId7"/>
+    <p:sldId id="283" r:id="rId8"/>
+    <p:sldId id="284" r:id="rId9"/>
+    <p:sldId id="269" r:id="rId10"/>
+    <p:sldId id="274" r:id="rId11"/>
+    <p:sldId id="271" r:id="rId12"/>
+    <p:sldId id="275" r:id="rId13"/>
+    <p:sldId id="257" r:id="rId14"/>
+    <p:sldId id="258" r:id="rId15"/>
+    <p:sldId id="259" r:id="rId16"/>
+    <p:sldId id="262" r:id="rId17"/>
+    <p:sldId id="276" r:id="rId18"/>
+    <p:sldId id="277" r:id="rId19"/>
+    <p:sldId id="278" r:id="rId20"/>
+    <p:sldId id="265" r:id="rId21"/>
   </p:sldIdLst>
   <p:sldSz cx="10080625" cy="5670550"/>
   <p:notesSz cx="7559675" cy="10691813"/>
@@ -137,6 +137,16 @@
             <p14:sldId id="256"/>
           </p14:sldIdLst>
         </p14:section>
+        <p14:section name="Change Detection Analysis" id="{F4CB8B9B-3F14-B44C-98CD-83837120112F}">
+          <p14:sldIdLst>
+            <p14:sldId id="266"/>
+            <p14:sldId id="280"/>
+            <p14:sldId id="281"/>
+            <p14:sldId id="268"/>
+            <p14:sldId id="282"/>
+            <p14:sldId id="283"/>
+          </p14:sldIdLst>
+        </p14:section>
         <p14:section name="Change-Impact Analysis" id="{F60ED532-C5C2-3543-9961-BFB43030A630}">
           <p14:sldIdLst>
             <p14:sldId id="284"/>
@@ -156,16 +166,6 @@
             <p14:sldId id="277"/>
             <p14:sldId id="278"/>
             <p14:sldId id="265"/>
-          </p14:sldIdLst>
-        </p14:section>
-        <p14:section name="Change Detection Analysis" id="{F4CB8B9B-3F14-B44C-98CD-83837120112F}">
-          <p14:sldIdLst>
-            <p14:sldId id="266"/>
-            <p14:sldId id="280"/>
-            <p14:sldId id="281"/>
-            <p14:sldId id="268"/>
-            <p14:sldId id="282"/>
-            <p14:sldId id="283"/>
           </p14:sldIdLst>
         </p14:section>
       </p14:sectionLst>
@@ -1130,6 +1130,242 @@
   <p:cSld>
     <p:spTree>
       <p:nvGrpSpPr>
+        <p:cNvPr id="1" name=""/>
+        <p:cNvGrpSpPr/>
+        <p:nvPr/>
+      </p:nvGrpSpPr>
+      <p:grpSpPr>
+        <a:xfrm>
+          <a:off x="0" y="0"/>
+          <a:ext cx="0" cy="0"/>
+          <a:chOff x="0" y="0"/>
+          <a:chExt cx="0" cy="0"/>
+        </a:xfrm>
+      </p:grpSpPr>
+      <p:sp>
+        <p:nvSpPr>
+          <p:cNvPr id="7" name="Slide Number Placeholder 6">
+            <a:extLst>
+              <a:ext uri="{FF2B5EF4-FFF2-40B4-BE49-F238E27FC236}">
+                <a16:creationId xmlns:a16="http://schemas.microsoft.com/office/drawing/2014/main" id="{C61522D3-D471-6654-5647-49B4C7B57F13}"/>
+              </a:ext>
+            </a:extLst>
+          </p:cNvPr>
+          <p:cNvSpPr txBox="1">
+            <a:spLocks noGrp="1"/>
+          </p:cNvSpPr>
+          <p:nvPr>
+            <p:ph type="sldNum" sz="quarter" idx="5"/>
+          </p:nvPr>
+        </p:nvSpPr>
+        <p:spPr>
+          <a:ln/>
+        </p:spPr>
+        <p:txBody>
+          <a:bodyPr vert="horz" lIns="0" tIns="0" rIns="0" bIns="0" anchor="b" anchorCtr="0">
+            <a:noAutofit/>
+          </a:bodyPr>
+          <a:lstStyle/>
+          <a:p>
+            <a:pPr lvl="0"/>
+            <a:fld id="{30A5194F-B1BB-9D4C-AE76-7B3B08E77197}" type="slidenum">
+              <a:t>16</a:t>
+            </a:fld>
+            <a:endParaRPr lang="en-US"/>
+          </a:p>
+        </p:txBody>
+      </p:sp>
+      <p:sp>
+        <p:nvSpPr>
+          <p:cNvPr id="2" name="Slide Image Placeholder 1">
+            <a:extLst>
+              <a:ext uri="{FF2B5EF4-FFF2-40B4-BE49-F238E27FC236}">
+                <a16:creationId xmlns:a16="http://schemas.microsoft.com/office/drawing/2014/main" id="{CD5122A9-AAF5-017F-2713-8D6736D1658F}"/>
+              </a:ext>
+            </a:extLst>
+          </p:cNvPr>
+          <p:cNvSpPr>
+            <a:spLocks noGrp="1" noRot="1" noChangeAspect="1" noResize="1"/>
+          </p:cNvSpPr>
+          <p:nvPr>
+            <p:ph type="sldImg"/>
+          </p:nvPr>
+        </p:nvSpPr>
+        <p:spPr>
+          <a:xfrm>
+            <a:off x="217488" y="812800"/>
+            <a:ext cx="7124700" cy="4008438"/>
+          </a:xfrm>
+          <a:solidFill>
+            <a:srgbClr val="729FCF"/>
+          </a:solidFill>
+          <a:ln w="25400">
+            <a:solidFill>
+              <a:srgbClr val="3465A4"/>
+            </a:solidFill>
+            <a:prstDash val="solid"/>
+          </a:ln>
+        </p:spPr>
+      </p:sp>
+      <p:sp>
+        <p:nvSpPr>
+          <p:cNvPr id="3" name="Notes Placeholder 2">
+            <a:extLst>
+              <a:ext uri="{FF2B5EF4-FFF2-40B4-BE49-F238E27FC236}">
+                <a16:creationId xmlns:a16="http://schemas.microsoft.com/office/drawing/2014/main" id="{BB2F8224-C160-9DAC-0CE9-C8590AB34774}"/>
+              </a:ext>
+            </a:extLst>
+          </p:cNvPr>
+          <p:cNvSpPr txBox="1">
+            <a:spLocks noGrp="1"/>
+          </p:cNvSpPr>
+          <p:nvPr>
+            <p:ph type="body" sz="quarter" idx="1"/>
+          </p:nvPr>
+        </p:nvSpPr>
+        <p:spPr/>
+        <p:txBody>
+          <a:bodyPr vert="horz">
+            <a:noAutofit/>
+          </a:bodyPr>
+          <a:lstStyle/>
+          <a:p>
+            <a:pPr rtl="0"/>
+            <a:endParaRPr lang="en-US"/>
+          </a:p>
+        </p:txBody>
+      </p:sp>
+    </p:spTree>
+  </p:cSld>
+  <p:clrMapOvr>
+    <a:masterClrMapping/>
+  </p:clrMapOvr>
+</p:notes>
+</file>
+
+<file path=ppt/notesSlides/notesSlide11.xml><?xml version="1.0" encoding="utf-8"?>
+<p:notes xmlns:a="http://schemas.openxmlformats.org/drawingml/2006/main" xmlns:r="http://schemas.openxmlformats.org/officeDocument/2006/relationships" xmlns:p="http://schemas.openxmlformats.org/presentationml/2006/main">
+  <p:cSld>
+    <p:spTree>
+      <p:nvGrpSpPr>
+        <p:cNvPr id="1" name=""/>
+        <p:cNvGrpSpPr/>
+        <p:nvPr/>
+      </p:nvGrpSpPr>
+      <p:grpSpPr>
+        <a:xfrm>
+          <a:off x="0" y="0"/>
+          <a:ext cx="0" cy="0"/>
+          <a:chOff x="0" y="0"/>
+          <a:chExt cx="0" cy="0"/>
+        </a:xfrm>
+      </p:grpSpPr>
+      <p:sp>
+        <p:nvSpPr>
+          <p:cNvPr id="7" name="Slide Number Placeholder 6">
+            <a:extLst>
+              <a:ext uri="{FF2B5EF4-FFF2-40B4-BE49-F238E27FC236}">
+                <a16:creationId xmlns:a16="http://schemas.microsoft.com/office/drawing/2014/main" id="{809DFAEF-D49A-EDEF-37EA-BF8CA8BAEB34}"/>
+              </a:ext>
+            </a:extLst>
+          </p:cNvPr>
+          <p:cNvSpPr txBox="1">
+            <a:spLocks noGrp="1"/>
+          </p:cNvSpPr>
+          <p:nvPr>
+            <p:ph type="sldNum" sz="quarter" idx="5"/>
+          </p:nvPr>
+        </p:nvSpPr>
+        <p:spPr>
+          <a:ln/>
+        </p:spPr>
+        <p:txBody>
+          <a:bodyPr vert="horz" lIns="0" tIns="0" rIns="0" bIns="0" anchor="b" anchorCtr="0">
+            <a:noAutofit/>
+          </a:bodyPr>
+          <a:lstStyle/>
+          <a:p>
+            <a:pPr lvl="0"/>
+            <a:fld id="{18702C2E-8935-084B-8A6A-C1C4FB937928}" type="slidenum">
+              <a:t>20</a:t>
+            </a:fld>
+            <a:endParaRPr lang="en-US"/>
+          </a:p>
+        </p:txBody>
+      </p:sp>
+      <p:sp>
+        <p:nvSpPr>
+          <p:cNvPr id="2" name="Slide Image Placeholder 1">
+            <a:extLst>
+              <a:ext uri="{FF2B5EF4-FFF2-40B4-BE49-F238E27FC236}">
+                <a16:creationId xmlns:a16="http://schemas.microsoft.com/office/drawing/2014/main" id="{6912D205-377A-A92C-1183-B406480DC954}"/>
+              </a:ext>
+            </a:extLst>
+          </p:cNvPr>
+          <p:cNvSpPr>
+            <a:spLocks noGrp="1" noRot="1" noChangeAspect="1" noResize="1"/>
+          </p:cNvSpPr>
+          <p:nvPr>
+            <p:ph type="sldImg"/>
+          </p:nvPr>
+        </p:nvSpPr>
+        <p:spPr>
+          <a:xfrm>
+            <a:off x="217488" y="812800"/>
+            <a:ext cx="7124700" cy="4008438"/>
+          </a:xfrm>
+          <a:solidFill>
+            <a:srgbClr val="729FCF"/>
+          </a:solidFill>
+          <a:ln w="25400">
+            <a:solidFill>
+              <a:srgbClr val="3465A4"/>
+            </a:solidFill>
+            <a:prstDash val="solid"/>
+          </a:ln>
+        </p:spPr>
+      </p:sp>
+      <p:sp>
+        <p:nvSpPr>
+          <p:cNvPr id="3" name="Notes Placeholder 2">
+            <a:extLst>
+              <a:ext uri="{FF2B5EF4-FFF2-40B4-BE49-F238E27FC236}">
+                <a16:creationId xmlns:a16="http://schemas.microsoft.com/office/drawing/2014/main" id="{316F2BDE-8A06-022A-339A-A9CBAD27BFAA}"/>
+              </a:ext>
+            </a:extLst>
+          </p:cNvPr>
+          <p:cNvSpPr txBox="1">
+            <a:spLocks noGrp="1"/>
+          </p:cNvSpPr>
+          <p:nvPr>
+            <p:ph type="body" sz="quarter" idx="1"/>
+          </p:nvPr>
+        </p:nvSpPr>
+        <p:spPr/>
+        <p:txBody>
+          <a:bodyPr vert="horz">
+            <a:noAutofit/>
+          </a:bodyPr>
+          <a:lstStyle/>
+          <a:p>
+            <a:pPr rtl="0"/>
+            <a:endParaRPr lang="en-US"/>
+          </a:p>
+        </p:txBody>
+      </p:sp>
+    </p:spTree>
+  </p:cSld>
+  <p:clrMapOvr>
+    <a:masterClrMapping/>
+  </p:clrMapOvr>
+</p:notes>
+</file>
+
+<file path=ppt/notesSlides/notesSlide2.xml><?xml version="1.0" encoding="utf-8"?>
+<p:notes xmlns:a="http://schemas.openxmlformats.org/drawingml/2006/main" xmlns:r="http://schemas.openxmlformats.org/officeDocument/2006/relationships" xmlns:p="http://schemas.openxmlformats.org/presentationml/2006/main">
+  <p:cSld>
+    <p:spTree>
+      <p:nvGrpSpPr>
         <p:cNvPr id="1" name="">
           <a:extLst>
             <a:ext uri="{FF2B5EF4-FFF2-40B4-BE49-F238E27FC236}">
@@ -1175,7 +1411,7 @@
           <a:p>
             <a:pPr lvl="0"/>
             <a:fld id="{59065317-6997-AF48-9E2D-F3DC91694882}" type="slidenum">
-              <a:t>15</a:t>
+              <a:t>2</a:t>
             </a:fld>
             <a:endParaRPr lang="en-US"/>
           </a:p>
@@ -1254,7 +1490,7 @@
 </p:notes>
 </file>
 
-<file path=ppt/notesSlides/notesSlide11.xml><?xml version="1.0" encoding="utf-8"?>
+<file path=ppt/notesSlides/notesSlide3.xml><?xml version="1.0" encoding="utf-8"?>
 <p:notes xmlns:a="http://schemas.openxmlformats.org/drawingml/2006/main" xmlns:r="http://schemas.openxmlformats.org/officeDocument/2006/relationships" xmlns:p="http://schemas.openxmlformats.org/presentationml/2006/main">
   <p:cSld>
     <p:spTree>
@@ -1304,7 +1540,7 @@
           <a:p>
             <a:pPr lvl="0"/>
             <a:fld id="{805BC73B-1373-A04C-9AEE-DE1873EAA8E9}" type="slidenum">
-              <a:t>18</a:t>
+              <a:t>5</a:t>
             </a:fld>
             <a:endParaRPr lang="en-US"/>
           </a:p>
@@ -1374,253 +1610,6 @@
     <p:extLst>
       <p:ext uri="{BB962C8B-B14F-4D97-AF65-F5344CB8AC3E}">
         <p14:creationId xmlns:p14="http://schemas.microsoft.com/office/powerpoint/2010/main" val="1723004312"/>
-      </p:ext>
-    </p:extLst>
-  </p:cSld>
-  <p:clrMapOvr>
-    <a:masterClrMapping/>
-  </p:clrMapOvr>
-</p:notes>
-</file>
-
-<file path=ppt/notesSlides/notesSlide2.xml><?xml version="1.0" encoding="utf-8"?>
-<p:notes xmlns:a="http://schemas.openxmlformats.org/drawingml/2006/main" xmlns:r="http://schemas.openxmlformats.org/officeDocument/2006/relationships" xmlns:p="http://schemas.openxmlformats.org/presentationml/2006/main">
-  <p:cSld>
-    <p:spTree>
-      <p:nvGrpSpPr>
-        <p:cNvPr id="1" name=""/>
-        <p:cNvGrpSpPr/>
-        <p:nvPr/>
-      </p:nvGrpSpPr>
-      <p:grpSpPr>
-        <a:xfrm>
-          <a:off x="0" y="0"/>
-          <a:ext cx="0" cy="0"/>
-          <a:chOff x="0" y="0"/>
-          <a:chExt cx="0" cy="0"/>
-        </a:xfrm>
-      </p:grpSpPr>
-      <p:sp>
-        <p:nvSpPr>
-          <p:cNvPr id="7" name="Slide Number Placeholder 6">
-            <a:extLst>
-              <a:ext uri="{FF2B5EF4-FFF2-40B4-BE49-F238E27FC236}">
-                <a16:creationId xmlns:a16="http://schemas.microsoft.com/office/drawing/2014/main" id="{E97E3ACB-D483-72B5-FBDE-06C6B73919A3}"/>
-              </a:ext>
-            </a:extLst>
-          </p:cNvPr>
-          <p:cNvSpPr txBox="1">
-            <a:spLocks noGrp="1"/>
-          </p:cNvSpPr>
-          <p:nvPr>
-            <p:ph type="sldNum" sz="quarter" idx="5"/>
-          </p:nvPr>
-        </p:nvSpPr>
-        <p:spPr>
-          <a:ln/>
-        </p:spPr>
-        <p:txBody>
-          <a:bodyPr vert="horz" lIns="0" tIns="0" rIns="0" bIns="0" anchor="b" anchorCtr="0">
-            <a:noAutofit/>
-          </a:bodyPr>
-          <a:lstStyle/>
-          <a:p>
-            <a:pPr lvl="0"/>
-            <a:fld id="{D37FEB87-33B9-194E-AD80-2EA93F043D18}" type="slidenum">
-              <a:t>3</a:t>
-            </a:fld>
-            <a:endParaRPr lang="en-US"/>
-          </a:p>
-        </p:txBody>
-      </p:sp>
-      <p:sp>
-        <p:nvSpPr>
-          <p:cNvPr id="2" name="Slide Image Placeholder 1">
-            <a:extLst>
-              <a:ext uri="{FF2B5EF4-FFF2-40B4-BE49-F238E27FC236}">
-                <a16:creationId xmlns:a16="http://schemas.microsoft.com/office/drawing/2014/main" id="{C8BE4815-1680-9CB1-FD4C-157B2D1CD47D}"/>
-              </a:ext>
-            </a:extLst>
-          </p:cNvPr>
-          <p:cNvSpPr>
-            <a:spLocks noGrp="1" noRot="1" noChangeAspect="1" noResize="1"/>
-          </p:cNvSpPr>
-          <p:nvPr>
-            <p:ph type="sldImg"/>
-          </p:nvPr>
-        </p:nvSpPr>
-        <p:spPr>
-          <a:xfrm>
-            <a:off x="217488" y="812800"/>
-            <a:ext cx="7124700" cy="4008438"/>
-          </a:xfrm>
-          <a:solidFill>
-            <a:srgbClr val="729FCF"/>
-          </a:solidFill>
-          <a:ln w="25400">
-            <a:solidFill>
-              <a:srgbClr val="3465A4"/>
-            </a:solidFill>
-            <a:prstDash val="solid"/>
-          </a:ln>
-        </p:spPr>
-      </p:sp>
-      <p:sp>
-        <p:nvSpPr>
-          <p:cNvPr id="3" name="Notes Placeholder 2">
-            <a:extLst>
-              <a:ext uri="{FF2B5EF4-FFF2-40B4-BE49-F238E27FC236}">
-                <a16:creationId xmlns:a16="http://schemas.microsoft.com/office/drawing/2014/main" id="{0FC151F7-BD15-9170-E590-B75070D0D838}"/>
-              </a:ext>
-            </a:extLst>
-          </p:cNvPr>
-          <p:cNvSpPr txBox="1">
-            <a:spLocks noGrp="1"/>
-          </p:cNvSpPr>
-          <p:nvPr>
-            <p:ph type="body" sz="quarter" idx="1"/>
-          </p:nvPr>
-        </p:nvSpPr>
-        <p:spPr/>
-        <p:txBody>
-          <a:bodyPr vert="horz">
-            <a:noAutofit/>
-          </a:bodyPr>
-          <a:lstStyle/>
-          <a:p>
-            <a:pPr rtl="0"/>
-            <a:endParaRPr lang="en-US"/>
-          </a:p>
-        </p:txBody>
-      </p:sp>
-    </p:spTree>
-  </p:cSld>
-  <p:clrMapOvr>
-    <a:masterClrMapping/>
-  </p:clrMapOvr>
-</p:notes>
-</file>
-
-<file path=ppt/notesSlides/notesSlide3.xml><?xml version="1.0" encoding="utf-8"?>
-<p:notes xmlns:a="http://schemas.openxmlformats.org/drawingml/2006/main" xmlns:r="http://schemas.openxmlformats.org/officeDocument/2006/relationships" xmlns:p="http://schemas.openxmlformats.org/presentationml/2006/main">
-  <p:cSld>
-    <p:spTree>
-      <p:nvGrpSpPr>
-        <p:cNvPr id="1" name="">
-          <a:extLst>
-            <a:ext uri="{FF2B5EF4-FFF2-40B4-BE49-F238E27FC236}">
-              <a16:creationId xmlns:a16="http://schemas.microsoft.com/office/drawing/2014/main" id="{C9E1173D-AA60-4AEB-6644-DE4BCA20136C}"/>
-            </a:ext>
-          </a:extLst>
-        </p:cNvPr>
-        <p:cNvGrpSpPr/>
-        <p:nvPr/>
-      </p:nvGrpSpPr>
-      <p:grpSpPr>
-        <a:xfrm>
-          <a:off x="0" y="0"/>
-          <a:ext cx="0" cy="0"/>
-          <a:chOff x="0" y="0"/>
-          <a:chExt cx="0" cy="0"/>
-        </a:xfrm>
-      </p:grpSpPr>
-      <p:sp>
-        <p:nvSpPr>
-          <p:cNvPr id="7" name="Slide Number Placeholder 6">
-            <a:extLst>
-              <a:ext uri="{FF2B5EF4-FFF2-40B4-BE49-F238E27FC236}">
-                <a16:creationId xmlns:a16="http://schemas.microsoft.com/office/drawing/2014/main" id="{D3D3B8F1-959C-B12A-0AE9-BE4F5241B61D}"/>
-              </a:ext>
-            </a:extLst>
-          </p:cNvPr>
-          <p:cNvSpPr txBox="1">
-            <a:spLocks noGrp="1"/>
-          </p:cNvSpPr>
-          <p:nvPr>
-            <p:ph type="sldNum" sz="quarter" idx="5"/>
-          </p:nvPr>
-        </p:nvSpPr>
-        <p:spPr>
-          <a:ln/>
-        </p:spPr>
-        <p:txBody>
-          <a:bodyPr vert="horz" lIns="0" tIns="0" rIns="0" bIns="0" anchor="b" anchorCtr="0">
-            <a:noAutofit/>
-          </a:bodyPr>
-          <a:lstStyle/>
-          <a:p>
-            <a:pPr lvl="0"/>
-            <a:fld id="{2B0E6C16-0556-494D-BECC-21D8D6E18886}" type="slidenum">
-              <a:t>4</a:t>
-            </a:fld>
-            <a:endParaRPr lang="en-US"/>
-          </a:p>
-        </p:txBody>
-      </p:sp>
-      <p:sp>
-        <p:nvSpPr>
-          <p:cNvPr id="2" name="Slide Image Placeholder 1">
-            <a:extLst>
-              <a:ext uri="{FF2B5EF4-FFF2-40B4-BE49-F238E27FC236}">
-                <a16:creationId xmlns:a16="http://schemas.microsoft.com/office/drawing/2014/main" id="{8225B9E7-F817-BC08-5681-F53BE5AE55D9}"/>
-              </a:ext>
-            </a:extLst>
-          </p:cNvPr>
-          <p:cNvSpPr>
-            <a:spLocks noGrp="1" noRot="1" noChangeAspect="1" noResize="1"/>
-          </p:cNvSpPr>
-          <p:nvPr>
-            <p:ph type="sldImg"/>
-          </p:nvPr>
-        </p:nvSpPr>
-        <p:spPr>
-          <a:xfrm>
-            <a:off x="217488" y="812800"/>
-            <a:ext cx="7124700" cy="4008438"/>
-          </a:xfrm>
-          <a:solidFill>
-            <a:srgbClr val="729FCF"/>
-          </a:solidFill>
-          <a:ln w="25400">
-            <a:solidFill>
-              <a:srgbClr val="3465A4"/>
-            </a:solidFill>
-            <a:prstDash val="solid"/>
-          </a:ln>
-        </p:spPr>
-      </p:sp>
-      <p:sp>
-        <p:nvSpPr>
-          <p:cNvPr id="3" name="Notes Placeholder 2">
-            <a:extLst>
-              <a:ext uri="{FF2B5EF4-FFF2-40B4-BE49-F238E27FC236}">
-                <a16:creationId xmlns:a16="http://schemas.microsoft.com/office/drawing/2014/main" id="{03D934EA-B162-B1A2-2EE0-9E14FEF400CD}"/>
-              </a:ext>
-            </a:extLst>
-          </p:cNvPr>
-          <p:cNvSpPr txBox="1">
-            <a:spLocks noGrp="1"/>
-          </p:cNvSpPr>
-          <p:nvPr>
-            <p:ph type="body" sz="quarter" idx="1"/>
-          </p:nvPr>
-        </p:nvSpPr>
-        <p:spPr/>
-        <p:txBody>
-          <a:bodyPr vert="horz">
-            <a:noAutofit/>
-          </a:bodyPr>
-          <a:lstStyle/>
-          <a:p>
-            <a:pPr rtl="0"/>
-            <a:endParaRPr lang="en-US"/>
-          </a:p>
-        </p:txBody>
-      </p:sp>
-    </p:spTree>
-    <p:extLst>
-      <p:ext uri="{BB962C8B-B14F-4D97-AF65-F5344CB8AC3E}">
-        <p14:creationId xmlns:p14="http://schemas.microsoft.com/office/powerpoint/2010/main" val="3297424757"/>
       </p:ext>
     </p:extLst>
   </p:cSld>
@@ -1652,7 +1641,7 @@
           <p:cNvPr id="7" name="Slide Number Placeholder 6">
             <a:extLst>
               <a:ext uri="{FF2B5EF4-FFF2-40B4-BE49-F238E27FC236}">
-                <a16:creationId xmlns:a16="http://schemas.microsoft.com/office/drawing/2014/main" id="{086CABF4-8EE6-FB4C-1190-D6538499F54A}"/>
+                <a16:creationId xmlns:a16="http://schemas.microsoft.com/office/drawing/2014/main" id="{E97E3ACB-D483-72B5-FBDE-06C6B73919A3}"/>
               </a:ext>
             </a:extLst>
           </p:cNvPr>
@@ -1673,8 +1662,8 @@
           <a:lstStyle/>
           <a:p>
             <a:pPr lvl="0"/>
-            <a:fld id="{2F2A8F5F-D570-7943-BC26-CE189838C058}" type="slidenum">
-              <a:t>5</a:t>
+            <a:fld id="{D37FEB87-33B9-194E-AD80-2EA93F043D18}" type="slidenum">
+              <a:t>9</a:t>
             </a:fld>
             <a:endParaRPr lang="en-US"/>
           </a:p>
@@ -1685,7 +1674,7 @@
           <p:cNvPr id="2" name="Slide Image Placeholder 1">
             <a:extLst>
               <a:ext uri="{FF2B5EF4-FFF2-40B4-BE49-F238E27FC236}">
-                <a16:creationId xmlns:a16="http://schemas.microsoft.com/office/drawing/2014/main" id="{0705804A-2E38-13E8-0E3B-093387BC9070}"/>
+                <a16:creationId xmlns:a16="http://schemas.microsoft.com/office/drawing/2014/main" id="{C8BE4815-1680-9CB1-FD4C-157B2D1CD47D}"/>
               </a:ext>
             </a:extLst>
           </p:cNvPr>
@@ -1717,7 +1706,7 @@
           <p:cNvPr id="3" name="Notes Placeholder 2">
             <a:extLst>
               <a:ext uri="{FF2B5EF4-FFF2-40B4-BE49-F238E27FC236}">
-                <a16:creationId xmlns:a16="http://schemas.microsoft.com/office/drawing/2014/main" id="{65025C25-8073-C251-4130-4E8A6F9B2003}"/>
+                <a16:creationId xmlns:a16="http://schemas.microsoft.com/office/drawing/2014/main" id="{0FC151F7-BD15-9170-E590-B75070D0D838}"/>
               </a:ext>
             </a:extLst>
           </p:cNvPr>
@@ -1753,7 +1742,13 @@
   <p:cSld>
     <p:spTree>
       <p:nvGrpSpPr>
-        <p:cNvPr id="1" name=""/>
+        <p:cNvPr id="1" name="">
+          <a:extLst>
+            <a:ext uri="{FF2B5EF4-FFF2-40B4-BE49-F238E27FC236}">
+              <a16:creationId xmlns:a16="http://schemas.microsoft.com/office/drawing/2014/main" id="{C9E1173D-AA60-4AEB-6644-DE4BCA20136C}"/>
+            </a:ext>
+          </a:extLst>
+        </p:cNvPr>
         <p:cNvGrpSpPr/>
         <p:nvPr/>
       </p:nvGrpSpPr>
@@ -1770,7 +1765,7 @@
           <p:cNvPr id="7" name="Slide Number Placeholder 6">
             <a:extLst>
               <a:ext uri="{FF2B5EF4-FFF2-40B4-BE49-F238E27FC236}">
-                <a16:creationId xmlns:a16="http://schemas.microsoft.com/office/drawing/2014/main" id="{87246C39-F7EF-C8F6-A5F2-4737A9FF5BEA}"/>
+                <a16:creationId xmlns:a16="http://schemas.microsoft.com/office/drawing/2014/main" id="{D3D3B8F1-959C-B12A-0AE9-BE4F5241B61D}"/>
               </a:ext>
             </a:extLst>
           </p:cNvPr>
@@ -1791,8 +1786,8 @@
           <a:lstStyle/>
           <a:p>
             <a:pPr lvl="0"/>
-            <a:fld id="{74B2BE70-CC58-924D-BB02-AD4AA9B63134}" type="slidenum">
-              <a:t>7</a:t>
+            <a:fld id="{2B0E6C16-0556-494D-BECC-21D8D6E18886}" type="slidenum">
+              <a:t>10</a:t>
             </a:fld>
             <a:endParaRPr lang="en-US"/>
           </a:p>
@@ -1803,7 +1798,7 @@
           <p:cNvPr id="2" name="Slide Image Placeholder 1">
             <a:extLst>
               <a:ext uri="{FF2B5EF4-FFF2-40B4-BE49-F238E27FC236}">
-                <a16:creationId xmlns:a16="http://schemas.microsoft.com/office/drawing/2014/main" id="{30B6807E-27CC-5290-EEEE-21C87A02E8D7}"/>
+                <a16:creationId xmlns:a16="http://schemas.microsoft.com/office/drawing/2014/main" id="{8225B9E7-F817-BC08-5681-F53BE5AE55D9}"/>
               </a:ext>
             </a:extLst>
           </p:cNvPr>
@@ -1835,7 +1830,7 @@
           <p:cNvPr id="3" name="Notes Placeholder 2">
             <a:extLst>
               <a:ext uri="{FF2B5EF4-FFF2-40B4-BE49-F238E27FC236}">
-                <a16:creationId xmlns:a16="http://schemas.microsoft.com/office/drawing/2014/main" id="{18DC66CC-FF2B-6A27-39EA-AE194A008AB9}"/>
+                <a16:creationId xmlns:a16="http://schemas.microsoft.com/office/drawing/2014/main" id="{03D934EA-B162-B1A2-2EE0-9E14FEF400CD}"/>
               </a:ext>
             </a:extLst>
           </p:cNvPr>
@@ -1859,6 +1854,11 @@
         </p:txBody>
       </p:sp>
     </p:spTree>
+    <p:extLst>
+      <p:ext uri="{BB962C8B-B14F-4D97-AF65-F5344CB8AC3E}">
+        <p14:creationId xmlns:p14="http://schemas.microsoft.com/office/powerpoint/2010/main" val="3297424757"/>
+      </p:ext>
+    </p:extLst>
   </p:cSld>
   <p:clrMapOvr>
     <a:masterClrMapping/>
@@ -1888,7 +1888,7 @@
           <p:cNvPr id="7" name="Slide Number Placeholder 6">
             <a:extLst>
               <a:ext uri="{FF2B5EF4-FFF2-40B4-BE49-F238E27FC236}">
-                <a16:creationId xmlns:a16="http://schemas.microsoft.com/office/drawing/2014/main" id="{8F566B37-0908-2EE3-EEBB-987402C98D9C}"/>
+                <a16:creationId xmlns:a16="http://schemas.microsoft.com/office/drawing/2014/main" id="{086CABF4-8EE6-FB4C-1190-D6538499F54A}"/>
               </a:ext>
             </a:extLst>
           </p:cNvPr>
@@ -1909,8 +1909,8 @@
           <a:lstStyle/>
           <a:p>
             <a:pPr lvl="0"/>
-            <a:fld id="{46DC6A57-27CA-2945-BA58-25741BFA1969}" type="slidenum">
-              <a:t>8</a:t>
+            <a:fld id="{2F2A8F5F-D570-7943-BC26-CE189838C058}" type="slidenum">
+              <a:t>11</a:t>
             </a:fld>
             <a:endParaRPr lang="en-US"/>
           </a:p>
@@ -1921,7 +1921,7 @@
           <p:cNvPr id="2" name="Slide Image Placeholder 1">
             <a:extLst>
               <a:ext uri="{FF2B5EF4-FFF2-40B4-BE49-F238E27FC236}">
-                <a16:creationId xmlns:a16="http://schemas.microsoft.com/office/drawing/2014/main" id="{7622ED5D-A6F3-B88C-C442-646AB8485103}"/>
+                <a16:creationId xmlns:a16="http://schemas.microsoft.com/office/drawing/2014/main" id="{0705804A-2E38-13E8-0E3B-093387BC9070}"/>
               </a:ext>
             </a:extLst>
           </p:cNvPr>
@@ -1953,7 +1953,7 @@
           <p:cNvPr id="3" name="Notes Placeholder 2">
             <a:extLst>
               <a:ext uri="{FF2B5EF4-FFF2-40B4-BE49-F238E27FC236}">
-                <a16:creationId xmlns:a16="http://schemas.microsoft.com/office/drawing/2014/main" id="{D3E5210D-1007-26F9-72F8-BB536ADCDCE6}"/>
+                <a16:creationId xmlns:a16="http://schemas.microsoft.com/office/drawing/2014/main" id="{65025C25-8073-C251-4130-4E8A6F9B2003}"/>
               </a:ext>
             </a:extLst>
           </p:cNvPr>
@@ -2006,7 +2006,7 @@
           <p:cNvPr id="7" name="Slide Number Placeholder 6">
             <a:extLst>
               <a:ext uri="{FF2B5EF4-FFF2-40B4-BE49-F238E27FC236}">
-                <a16:creationId xmlns:a16="http://schemas.microsoft.com/office/drawing/2014/main" id="{540BB736-270A-5617-ED56-90CFB5654E66}"/>
+                <a16:creationId xmlns:a16="http://schemas.microsoft.com/office/drawing/2014/main" id="{87246C39-F7EF-C8F6-A5F2-4737A9FF5BEA}"/>
               </a:ext>
             </a:extLst>
           </p:cNvPr>
@@ -2027,8 +2027,8 @@
           <a:lstStyle/>
           <a:p>
             <a:pPr lvl="0"/>
-            <a:fld id="{FE90A4ED-5FD0-B044-8E31-F6C0BAFF2FAB}" type="slidenum">
-              <a:t>9</a:t>
+            <a:fld id="{74B2BE70-CC58-924D-BB02-AD4AA9B63134}" type="slidenum">
+              <a:t>13</a:t>
             </a:fld>
             <a:endParaRPr lang="en-US"/>
           </a:p>
@@ -2039,7 +2039,7 @@
           <p:cNvPr id="2" name="Slide Image Placeholder 1">
             <a:extLst>
               <a:ext uri="{FF2B5EF4-FFF2-40B4-BE49-F238E27FC236}">
-                <a16:creationId xmlns:a16="http://schemas.microsoft.com/office/drawing/2014/main" id="{68D84902-6734-20C1-0323-4213F13F12B1}"/>
+                <a16:creationId xmlns:a16="http://schemas.microsoft.com/office/drawing/2014/main" id="{30B6807E-27CC-5290-EEEE-21C87A02E8D7}"/>
               </a:ext>
             </a:extLst>
           </p:cNvPr>
@@ -2071,7 +2071,7 @@
           <p:cNvPr id="3" name="Notes Placeholder 2">
             <a:extLst>
               <a:ext uri="{FF2B5EF4-FFF2-40B4-BE49-F238E27FC236}">
-                <a16:creationId xmlns:a16="http://schemas.microsoft.com/office/drawing/2014/main" id="{02720450-8312-156D-E8CB-F3019597C58F}"/>
+                <a16:creationId xmlns:a16="http://schemas.microsoft.com/office/drawing/2014/main" id="{18DC66CC-FF2B-6A27-39EA-AE194A008AB9}"/>
               </a:ext>
             </a:extLst>
           </p:cNvPr>
@@ -2124,7 +2124,7 @@
           <p:cNvPr id="7" name="Slide Number Placeholder 6">
             <a:extLst>
               <a:ext uri="{FF2B5EF4-FFF2-40B4-BE49-F238E27FC236}">
-                <a16:creationId xmlns:a16="http://schemas.microsoft.com/office/drawing/2014/main" id="{C61522D3-D471-6654-5647-49B4C7B57F13}"/>
+                <a16:creationId xmlns:a16="http://schemas.microsoft.com/office/drawing/2014/main" id="{8F566B37-0908-2EE3-EEBB-987402C98D9C}"/>
               </a:ext>
             </a:extLst>
           </p:cNvPr>
@@ -2145,8 +2145,8 @@
           <a:lstStyle/>
           <a:p>
             <a:pPr lvl="0"/>
-            <a:fld id="{30A5194F-B1BB-9D4C-AE76-7B3B08E77197}" type="slidenum">
-              <a:t>10</a:t>
+            <a:fld id="{46DC6A57-27CA-2945-BA58-25741BFA1969}" type="slidenum">
+              <a:t>14</a:t>
             </a:fld>
             <a:endParaRPr lang="en-US"/>
           </a:p>
@@ -2157,7 +2157,7 @@
           <p:cNvPr id="2" name="Slide Image Placeholder 1">
             <a:extLst>
               <a:ext uri="{FF2B5EF4-FFF2-40B4-BE49-F238E27FC236}">
-                <a16:creationId xmlns:a16="http://schemas.microsoft.com/office/drawing/2014/main" id="{CD5122A9-AAF5-017F-2713-8D6736D1658F}"/>
+                <a16:creationId xmlns:a16="http://schemas.microsoft.com/office/drawing/2014/main" id="{7622ED5D-A6F3-B88C-C442-646AB8485103}"/>
               </a:ext>
             </a:extLst>
           </p:cNvPr>
@@ -2189,7 +2189,7 @@
           <p:cNvPr id="3" name="Notes Placeholder 2">
             <a:extLst>
               <a:ext uri="{FF2B5EF4-FFF2-40B4-BE49-F238E27FC236}">
-                <a16:creationId xmlns:a16="http://schemas.microsoft.com/office/drawing/2014/main" id="{BB2F8224-C160-9DAC-0CE9-C8590AB34774}"/>
+                <a16:creationId xmlns:a16="http://schemas.microsoft.com/office/drawing/2014/main" id="{D3E5210D-1007-26F9-72F8-BB536ADCDCE6}"/>
               </a:ext>
             </a:extLst>
           </p:cNvPr>
@@ -2242,7 +2242,7 @@
           <p:cNvPr id="7" name="Slide Number Placeholder 6">
             <a:extLst>
               <a:ext uri="{FF2B5EF4-FFF2-40B4-BE49-F238E27FC236}">
-                <a16:creationId xmlns:a16="http://schemas.microsoft.com/office/drawing/2014/main" id="{809DFAEF-D49A-EDEF-37EA-BF8CA8BAEB34}"/>
+                <a16:creationId xmlns:a16="http://schemas.microsoft.com/office/drawing/2014/main" id="{540BB736-270A-5617-ED56-90CFB5654E66}"/>
               </a:ext>
             </a:extLst>
           </p:cNvPr>
@@ -2263,8 +2263,8 @@
           <a:lstStyle/>
           <a:p>
             <a:pPr lvl="0"/>
-            <a:fld id="{18702C2E-8935-084B-8A6A-C1C4FB937928}" type="slidenum">
-              <a:t>14</a:t>
+            <a:fld id="{FE90A4ED-5FD0-B044-8E31-F6C0BAFF2FAB}" type="slidenum">
+              <a:t>15</a:t>
             </a:fld>
             <a:endParaRPr lang="en-US"/>
           </a:p>
@@ -2275,7 +2275,7 @@
           <p:cNvPr id="2" name="Slide Image Placeholder 1">
             <a:extLst>
               <a:ext uri="{FF2B5EF4-FFF2-40B4-BE49-F238E27FC236}">
-                <a16:creationId xmlns:a16="http://schemas.microsoft.com/office/drawing/2014/main" id="{6912D205-377A-A92C-1183-B406480DC954}"/>
+                <a16:creationId xmlns:a16="http://schemas.microsoft.com/office/drawing/2014/main" id="{68D84902-6734-20C1-0323-4213F13F12B1}"/>
               </a:ext>
             </a:extLst>
           </p:cNvPr>
@@ -2307,7 +2307,7 @@
           <p:cNvPr id="3" name="Notes Placeholder 2">
             <a:extLst>
               <a:ext uri="{FF2B5EF4-FFF2-40B4-BE49-F238E27FC236}">
-                <a16:creationId xmlns:a16="http://schemas.microsoft.com/office/drawing/2014/main" id="{316F2BDE-8A06-022A-339A-A9CBAD27BFAA}"/>
+                <a16:creationId xmlns:a16="http://schemas.microsoft.com/office/drawing/2014/main" id="{02720450-8312-156D-E8CB-F3019597C58F}"/>
               </a:ext>
             </a:extLst>
           </p:cNvPr>
@@ -5712,7 +5712,218 @@
 
 <file path=ppt/slides/slide10.xml><?xml version="1.0" encoding="utf-8"?>
 <p:sld xmlns:a="http://schemas.openxmlformats.org/drawingml/2006/main" xmlns:r="http://schemas.openxmlformats.org/officeDocument/2006/relationships" xmlns:p="http://schemas.openxmlformats.org/presentationml/2006/main">
-  <p:cSld name="page7">
+  <p:cSld>
+    <p:spTree>
+      <p:nvGrpSpPr>
+        <p:cNvPr id="1" name="">
+          <a:extLst>
+            <a:ext uri="{FF2B5EF4-FFF2-40B4-BE49-F238E27FC236}">
+              <a16:creationId xmlns:a16="http://schemas.microsoft.com/office/drawing/2014/main" id="{2B569827-9521-53AA-9742-36EB856A3BAB}"/>
+            </a:ext>
+          </a:extLst>
+        </p:cNvPr>
+        <p:cNvGrpSpPr/>
+        <p:nvPr/>
+      </p:nvGrpSpPr>
+      <p:grpSpPr>
+        <a:xfrm>
+          <a:off x="0" y="0"/>
+          <a:ext cx="0" cy="0"/>
+          <a:chOff x="0" y="0"/>
+          <a:chExt cx="0" cy="0"/>
+        </a:xfrm>
+      </p:grpSpPr>
+      <p:sp>
+        <p:nvSpPr>
+          <p:cNvPr id="2" name="Title 1">
+            <a:extLst>
+              <a:ext uri="{FF2B5EF4-FFF2-40B4-BE49-F238E27FC236}">
+                <a16:creationId xmlns:a16="http://schemas.microsoft.com/office/drawing/2014/main" id="{C65C185C-7590-576F-35F7-50C042B441F9}"/>
+              </a:ext>
+            </a:extLst>
+          </p:cNvPr>
+          <p:cNvSpPr txBox="1">
+            <a:spLocks noGrp="1"/>
+          </p:cNvSpPr>
+          <p:nvPr>
+            <p:ph type="title" idx="4294967295"/>
+          </p:nvPr>
+        </p:nvSpPr>
+        <p:spPr>
+          <a:xfrm>
+            <a:off x="503999" y="422301"/>
+            <a:ext cx="9071640" cy="553998"/>
+          </a:xfrm>
+        </p:spPr>
+        <p:txBody>
+          <a:bodyPr>
+            <a:spAutoFit/>
+          </a:bodyPr>
+          <a:lstStyle/>
+          <a:p>
+            <a:pPr lvl="0"/>
+            <a:r>
+              <a:rPr lang="en-US" dirty="0">
+                <a:solidFill>
+                  <a:schemeClr val="bg1"/>
+                </a:solidFill>
+              </a:rPr>
+              <a:t>Graphing Process</a:t>
+            </a:r>
+          </a:p>
+        </p:txBody>
+      </p:sp>
+      <p:sp>
+        <p:nvSpPr>
+          <p:cNvPr id="3" name="Text Placeholder 2">
+            <a:extLst>
+              <a:ext uri="{FF2B5EF4-FFF2-40B4-BE49-F238E27FC236}">
+                <a16:creationId xmlns:a16="http://schemas.microsoft.com/office/drawing/2014/main" id="{16380487-782B-D373-4A68-3CAF18B86D6A}"/>
+              </a:ext>
+            </a:extLst>
+          </p:cNvPr>
+          <p:cNvSpPr txBox="1">
+            <a:spLocks noGrp="1"/>
+          </p:cNvSpPr>
+          <p:nvPr>
+            <p:ph type="body" idx="4294967295"/>
+          </p:nvPr>
+        </p:nvSpPr>
+        <p:spPr>
+          <a:xfrm>
+            <a:off x="503999" y="1326600"/>
+            <a:ext cx="9001800" cy="3664440"/>
+          </a:xfrm>
+        </p:spPr>
+        <p:txBody>
+          <a:bodyPr/>
+          <a:lstStyle/>
+          <a:p>
+            <a:pPr marL="342900" indent="-342900"/>
+            <a:r>
+              <a:rPr lang="en-US" dirty="0">
+                <a:solidFill>
+                  <a:schemeClr val="bg1"/>
+                </a:solidFill>
+              </a:rPr>
+              <a:t>Output data in the form of a </a:t>
+            </a:r>
+            <a:r>
+              <a:rPr lang="en-US" dirty="0" err="1">
+                <a:solidFill>
+                  <a:schemeClr val="bg1"/>
+                </a:solidFill>
+              </a:rPr>
+              <a:t>NetCDF</a:t>
+            </a:r>
+            <a:r>
+              <a:rPr lang="en-US" dirty="0">
+                <a:solidFill>
+                  <a:schemeClr val="bg1"/>
+                </a:solidFill>
+              </a:rPr>
+              <a:t> file is used. </a:t>
+            </a:r>
+          </a:p>
+          <a:p>
+            <a:pPr marL="342900" indent="-342900"/>
+            <a:r>
+              <a:rPr lang="en-US" dirty="0">
+                <a:solidFill>
+                  <a:schemeClr val="bg1"/>
+                </a:solidFill>
+              </a:rPr>
+              <a:t>From the output data we pulled the values for the model constant </a:t>
+            </a:r>
+            <a:r>
+              <a:rPr lang="en-US" i="1" dirty="0" err="1">
+                <a:solidFill>
+                  <a:schemeClr val="bg1"/>
+                </a:solidFill>
+              </a:rPr>
+              <a:t>vkc</a:t>
+            </a:r>
+            <a:r>
+              <a:rPr lang="en-US" i="1" dirty="0">
+                <a:solidFill>
+                  <a:schemeClr val="bg1"/>
+                </a:solidFill>
+              </a:rPr>
+              <a:t>.</a:t>
+            </a:r>
+            <a:endParaRPr lang="en-US" dirty="0">
+              <a:solidFill>
+                <a:schemeClr val="bg1"/>
+              </a:solidFill>
+            </a:endParaRPr>
+          </a:p>
+          <a:p>
+            <a:pPr marL="342900" indent="-342900"/>
+            <a:r>
+              <a:rPr lang="en-US" dirty="0">
+                <a:solidFill>
+                  <a:schemeClr val="bg1"/>
+                </a:solidFill>
+              </a:rPr>
+              <a:t>Time is interpolated from 0 to 35. </a:t>
+            </a:r>
+          </a:p>
+          <a:p>
+            <a:pPr marL="342900" indent="-342900"/>
+            <a:r>
+              <a:rPr lang="en-US" dirty="0">
+                <a:solidFill>
+                  <a:schemeClr val="bg1"/>
+                </a:solidFill>
+              </a:rPr>
+              <a:t>From the output data we pulled the values for the model output </a:t>
+            </a:r>
+            <a:r>
+              <a:rPr lang="en-US" i="1" dirty="0">
+                <a:solidFill>
+                  <a:schemeClr val="bg1"/>
+                </a:solidFill>
+              </a:rPr>
+              <a:t>lakestate_vars__savedtke1_col</a:t>
+            </a:r>
+            <a:r>
+              <a:rPr lang="en-US" dirty="0">
+                <a:solidFill>
+                  <a:schemeClr val="bg1"/>
+                </a:solidFill>
+              </a:rPr>
+              <a:t> at the column numbered 336. </a:t>
+            </a:r>
+          </a:p>
+          <a:p>
+            <a:pPr marL="342900" indent="-342900"/>
+            <a:r>
+              <a:rPr lang="en-US" dirty="0">
+                <a:solidFill>
+                  <a:schemeClr val="bg1"/>
+                </a:solidFill>
+              </a:rPr>
+              <a:t>Using matplotlib, all three dimensions were graphed. </a:t>
+            </a:r>
+          </a:p>
+        </p:txBody>
+      </p:sp>
+    </p:spTree>
+    <p:extLst>
+      <p:ext uri="{BB962C8B-B14F-4D97-AF65-F5344CB8AC3E}">
+        <p14:creationId xmlns:p14="http://schemas.microsoft.com/office/powerpoint/2010/main" val="2352501276"/>
+      </p:ext>
+    </p:extLst>
+  </p:cSld>
+  <p:clrMapOvr>
+    <a:masterClrMapping/>
+  </p:clrMapOvr>
+</p:sld>
+</file>
+
+<file path=ppt/slides/slide11.xml><?xml version="1.0" encoding="utf-8"?>
+<p:sld xmlns:a="http://schemas.openxmlformats.org/drawingml/2006/main" xmlns:r="http://schemas.openxmlformats.org/officeDocument/2006/relationships" xmlns:p="http://schemas.openxmlformats.org/presentationml/2006/main">
+  <p:cSld name="page16">
     <p:spTree>
       <p:nvGrpSpPr>
         <p:cNvPr id="1" name=""/>
@@ -5732,7 +5943,7 @@
           <p:cNvPr id="2" name="Title 1">
             <a:extLst>
               <a:ext uri="{FF2B5EF4-FFF2-40B4-BE49-F238E27FC236}">
-                <a16:creationId xmlns:a16="http://schemas.microsoft.com/office/drawing/2014/main" id="{44B3FCDA-4EC5-B19D-5009-23CEC9F74198}"/>
+                <a16:creationId xmlns:a16="http://schemas.microsoft.com/office/drawing/2014/main" id="{652DE034-012A-BDCC-27D6-45696F0169C2}"/>
               </a:ext>
             </a:extLst>
           </p:cNvPr>
@@ -5745,8 +5956,8 @@
         </p:nvSpPr>
         <p:spPr>
           <a:xfrm>
-            <a:off x="503999" y="422301"/>
-            <a:ext cx="3346641" cy="553998"/>
+            <a:off x="340123" y="422301"/>
+            <a:ext cx="3461504" cy="553998"/>
           </a:xfrm>
         </p:spPr>
         <p:txBody>
@@ -5762,7 +5973,7 @@
                   <a:schemeClr val="bg1"/>
                 </a:solidFill>
               </a:rPr>
-              <a:t>DOI 2 Results</a:t>
+              <a:t>An Example Graph</a:t>
             </a:r>
           </a:p>
         </p:txBody>
@@ -5772,7 +5983,7 @@
           <p:cNvPr id="3" name="Text Placeholder 2">
             <a:extLst>
               <a:ext uri="{FF2B5EF4-FFF2-40B4-BE49-F238E27FC236}">
-                <a16:creationId xmlns:a16="http://schemas.microsoft.com/office/drawing/2014/main" id="{3F589F92-B484-4E15-0CDC-FFD075A2A74E}"/>
+                <a16:creationId xmlns:a16="http://schemas.microsoft.com/office/drawing/2014/main" id="{E0FB6333-45B1-C200-1206-F5409AA482B6}"/>
               </a:ext>
             </a:extLst>
           </p:cNvPr>
@@ -5785,8 +5996,8 @@
         </p:nvSpPr>
         <p:spPr>
           <a:xfrm>
-            <a:off x="503999" y="1326600"/>
-            <a:ext cx="3346641" cy="3288239"/>
+            <a:off x="340123" y="1081994"/>
+            <a:ext cx="3461504" cy="3719520"/>
           </a:xfrm>
         </p:spPr>
         <p:txBody>
@@ -5801,76 +6012,155 @@
                 <a:solidFill>
                   <a:schemeClr val="bg1"/>
                 </a:solidFill>
-                <a:latin typeface="AppleSystemUIFont" pitchFamily="2"/>
-              </a:rPr>
-              <a:t>Degree of Interaction (DOI) 2 results in 133 test cases when only changing the values of constants known to affect the outputs of </a:t>
-            </a:r>
-            <a:r>
-              <a:rPr lang="en-US" dirty="0" err="1">
-                <a:solidFill>
-                  <a:schemeClr val="bg1"/>
-                </a:solidFill>
-                <a:latin typeface="Courier New" panose="02070309020205020404" pitchFamily="49" charset="0"/>
-                <a:cs typeface="Courier New" panose="02070309020205020404" pitchFamily="49" charset="0"/>
-              </a:rPr>
-              <a:t>LakeTemperature</a:t>
+              </a:rPr>
+              <a:t>This graph shows how the model constant </a:t>
+            </a:r>
+            <a:r>
+              <a:rPr lang="en-US" i="1" dirty="0" err="1">
+                <a:solidFill>
+                  <a:schemeClr val="bg1"/>
+                </a:solidFill>
+              </a:rPr>
+              <a:t>vkc</a:t>
             </a:r>
             <a:r>
               <a:rPr lang="en-US" dirty="0">
                 <a:solidFill>
                   <a:schemeClr val="bg1"/>
                 </a:solidFill>
-                <a:latin typeface="AppleSystemUIFont" pitchFamily="2"/>
-              </a:rPr>
-              <a:t>. </a:t>
-            </a:r>
-          </a:p>
-        </p:txBody>
-      </p:sp>
-      <p:pic>
-        <p:nvPicPr>
-          <p:cNvPr id="5" name="Picture 4">
-            <a:extLst>
-              <a:ext uri="{FF2B5EF4-FFF2-40B4-BE49-F238E27FC236}">
-                <a16:creationId xmlns:a16="http://schemas.microsoft.com/office/drawing/2014/main" id="{15C94A79-243F-8D40-B5DA-BED8A49E8184}"/>
-              </a:ext>
-            </a:extLst>
-          </p:cNvPr>
-          <p:cNvPicPr>
-            <a:picLocks noChangeAspect="1"/>
-          </p:cNvPicPr>
+              </a:rPr>
+              <a:t> affects the model output </a:t>
+            </a:r>
+            <a:r>
+              <a:rPr lang="en-US" i="1" dirty="0">
+                <a:solidFill>
+                  <a:schemeClr val="bg1"/>
+                </a:solidFill>
+              </a:rPr>
+              <a:t>lakestate_vars__savedtke1_col </a:t>
+            </a:r>
+            <a:r>
+              <a:rPr lang="en-US" dirty="0">
+                <a:solidFill>
+                  <a:schemeClr val="bg1"/>
+                </a:solidFill>
+              </a:rPr>
+              <a:t>over a period of 35 time steps for the lake column numbered 336.</a:t>
+            </a:r>
+          </a:p>
+        </p:txBody>
+      </p:sp>
+      <p:grpSp>
+        <p:nvGrpSpPr>
+          <p:cNvPr id="7" name="Group 6">
+            <a:extLst>
+              <a:ext uri="{FF2B5EF4-FFF2-40B4-BE49-F238E27FC236}">
+                <a16:creationId xmlns:a16="http://schemas.microsoft.com/office/drawing/2014/main" id="{AF25E7DB-69CA-4FAC-8C45-99C8D86EF4E1}"/>
+              </a:ext>
+            </a:extLst>
+          </p:cNvPr>
+          <p:cNvGrpSpPr>
+            <a:grpSpLocks noChangeAspect="1"/>
+          </p:cNvGrpSpPr>
           <p:nvPr/>
-        </p:nvPicPr>
-        <p:blipFill>
-          <a:blip r:embed="rId4"/>
-          <a:stretch>
-            <a:fillRect/>
-          </a:stretch>
-        </p:blipFill>
-        <p:spPr>
+        </p:nvGrpSpPr>
+        <p:grpSpPr>
           <a:xfrm>
-            <a:off x="4114644" y="0"/>
-            <a:ext cx="6037257" cy="5670550"/>
+            <a:off x="4047254" y="-392"/>
+            <a:ext cx="6033371" cy="5670942"/>
+            <a:chOff x="3779383" y="0"/>
+            <a:chExt cx="5955938" cy="5598160"/>
           </a:xfrm>
-          <a:prstGeom prst="rect">
-            <a:avLst/>
-          </a:prstGeom>
-        </p:spPr>
-      </p:pic>
+        </p:grpSpPr>
+        <p:sp>
+          <p:nvSpPr>
+            <p:cNvPr id="6" name="Rectangle 5">
+              <a:extLst>
+                <a:ext uri="{FF2B5EF4-FFF2-40B4-BE49-F238E27FC236}">
+                  <a16:creationId xmlns:a16="http://schemas.microsoft.com/office/drawing/2014/main" id="{9253F05C-EA1D-8060-2D15-4444A5C4C9ED}"/>
+                </a:ext>
+              </a:extLst>
+            </p:cNvPr>
+            <p:cNvSpPr/>
+            <p:nvPr/>
+          </p:nvSpPr>
+          <p:spPr>
+            <a:xfrm>
+              <a:off x="3779383" y="0"/>
+              <a:ext cx="5955938" cy="5598160"/>
+            </a:xfrm>
+            <a:prstGeom prst="rect">
+              <a:avLst/>
+            </a:prstGeom>
+            <a:solidFill>
+              <a:schemeClr val="bg1"/>
+            </a:solidFill>
+          </p:spPr>
+          <p:style>
+            <a:lnRef idx="2">
+              <a:schemeClr val="accent1">
+                <a:shade val="15000"/>
+              </a:schemeClr>
+            </a:lnRef>
+            <a:fillRef idx="1">
+              <a:schemeClr val="accent1"/>
+            </a:fillRef>
+            <a:effectRef idx="0">
+              <a:schemeClr val="accent1"/>
+            </a:effectRef>
+            <a:fontRef idx="minor">
+              <a:schemeClr val="lt1"/>
+            </a:fontRef>
+          </p:style>
+          <p:txBody>
+            <a:bodyPr rtlCol="0" anchor="ctr"/>
+            <a:lstStyle/>
+            <a:p>
+              <a:pPr algn="ctr"/>
+              <a:endParaRPr lang="en-US"/>
+            </a:p>
+          </p:txBody>
+        </p:sp>
+        <p:pic>
+          <p:nvPicPr>
+            <p:cNvPr id="5" name="Picture 4">
+              <a:extLst>
+                <a:ext uri="{FF2B5EF4-FFF2-40B4-BE49-F238E27FC236}">
+                  <a16:creationId xmlns:a16="http://schemas.microsoft.com/office/drawing/2014/main" id="{8172BEEA-49A1-F1D6-759E-47E640BAE2B9}"/>
+                </a:ext>
+              </a:extLst>
+            </p:cNvPr>
+            <p:cNvPicPr>
+              <a:picLocks noChangeAspect="1"/>
+            </p:cNvPicPr>
+            <p:nvPr/>
+          </p:nvPicPr>
+          <p:blipFill>
+            <a:blip r:embed="rId3"/>
+            <a:stretch>
+              <a:fillRect/>
+            </a:stretch>
+          </p:blipFill>
+          <p:spPr>
+            <a:xfrm>
+              <a:off x="3860084" y="40640"/>
+              <a:ext cx="5794535" cy="5516880"/>
+            </a:xfrm>
+            <a:prstGeom prst="rect">
+              <a:avLst/>
+            </a:prstGeom>
+          </p:spPr>
+        </p:pic>
+      </p:grpSp>
     </p:spTree>
   </p:cSld>
   <p:clrMapOvr>
     <a:masterClrMapping/>
   </p:clrMapOvr>
-  <p:extLst>
-    <p:ext uri="{6950BFC3-D8DA-4A85-94F7-54DA5524770B}">
-      <p188:commentRel xmlns:p188="http://schemas.microsoft.com/office/powerpoint/2018/8/main" r:id="rId3"/>
-    </p:ext>
-  </p:extLst>
 </p:sld>
 </file>
 
-<file path=ppt/slides/slide11.xml><?xml version="1.0" encoding="utf-8"?>
+<file path=ppt/slides/slide12.xml><?xml version="1.0" encoding="utf-8"?>
 <p:sld xmlns:a="http://schemas.openxmlformats.org/drawingml/2006/main" xmlns:r="http://schemas.openxmlformats.org/officeDocument/2006/relationships" xmlns:p="http://schemas.openxmlformats.org/presentationml/2006/main">
   <p:cSld>
     <p:spTree>
@@ -5892,7 +6182,7 @@
           <p:cNvPr id="2" name="Title 1">
             <a:extLst>
               <a:ext uri="{FF2B5EF4-FFF2-40B4-BE49-F238E27FC236}">
-                <a16:creationId xmlns:a16="http://schemas.microsoft.com/office/drawing/2014/main" id="{9DF1FC1F-B83D-D043-0A53-60E474E50EFB}"/>
+                <a16:creationId xmlns:a16="http://schemas.microsoft.com/office/drawing/2014/main" id="{B8086899-15DA-5703-76E2-51D23E842D09}"/>
               </a:ext>
             </a:extLst>
           </p:cNvPr>
@@ -5944,7 +6234,7 @@
                   <a:schemeClr val="bg1"/>
                 </a:solidFill>
               </a:rPr>
-              <a:t>DOI 3 Results</a:t>
+              <a:t>Why Combinatorial Testing (CT)?</a:t>
             </a:r>
           </a:p>
         </p:txBody>
@@ -5954,7 +6244,7 @@
           <p:cNvPr id="3" name="Text Placeholder 2">
             <a:extLst>
               <a:ext uri="{FF2B5EF4-FFF2-40B4-BE49-F238E27FC236}">
-                <a16:creationId xmlns:a16="http://schemas.microsoft.com/office/drawing/2014/main" id="{5CF707B8-09A9-A28B-36FE-7651ACC03308}"/>
+                <a16:creationId xmlns:a16="http://schemas.microsoft.com/office/drawing/2014/main" id="{0CD48D6A-4BDE-1B52-9184-3845B1664AB8}"/>
               </a:ext>
             </a:extLst>
           </p:cNvPr>
@@ -5966,7 +6256,7 @@
         <p:spPr>
           <a:xfrm>
             <a:off x="503999" y="1326600"/>
-            <a:ext cx="9071640" cy="3288239"/>
+            <a:ext cx="9071640" cy="4022640"/>
           </a:xfrm>
           <a:prstGeom prst="rect">
             <a:avLst/>
@@ -6200,9 +6490,8 @@
                 <a:solidFill>
                   <a:schemeClr val="bg1"/>
                 </a:solidFill>
-                <a:latin typeface="AppleSystemUIFont" pitchFamily="2"/>
-              </a:rPr>
-              <a:t>DOI 3 results in 3,516 test cases when only changing the values of constants known to affect the outputs of </a:t>
+              </a:rPr>
+              <a:t>Ideally, </a:t>
             </a:r>
             <a:r>
               <a:rPr lang="en-US" dirty="0" err="1">
@@ -6219,21 +6508,41 @@
                 <a:solidFill>
                   <a:schemeClr val="bg1"/>
                 </a:solidFill>
-                <a:latin typeface="AppleSystemUIFont" pitchFamily="2"/>
-              </a:rPr>
-              <a:t>.</a:t>
+              </a:rPr>
+              <a:t> should be validated against all possible combinations of model constant values to ensure that no combination results in erroneous output.</a:t>
             </a:r>
           </a:p>
           <a:p>
             <a:pPr marL="342900" indent="-342900"/>
             <a:r>
-              <a:rPr lang="en-US" i="1" dirty="0">
-                <a:solidFill>
-                  <a:schemeClr val="bg1"/>
-                </a:solidFill>
-                <a:latin typeface="AppleSystemUIFont" pitchFamily="2"/>
-              </a:rPr>
-              <a:t>How many combinatorial test cases generated, executed, passed, skipped, failed, crashed</a:t>
+              <a:rPr lang="en-US" dirty="0">
+                <a:solidFill>
+                  <a:schemeClr val="bg1"/>
+                </a:solidFill>
+              </a:rPr>
+              <a:t>Exhaustive testing is neither practical nor feasible due to the vast number of all possible combinations. </a:t>
+            </a:r>
+          </a:p>
+          <a:p>
+            <a:pPr marL="342900" indent="-342900"/>
+            <a:r>
+              <a:rPr lang="en-US" dirty="0">
+                <a:solidFill>
+                  <a:schemeClr val="bg1"/>
+                </a:solidFill>
+              </a:rPr>
+              <a:t>Combinatorial testing substantially reduces the number of required test cases while achieving near-exhaustive coverage.</a:t>
+            </a:r>
+          </a:p>
+          <a:p>
+            <a:pPr marL="342900" indent="-342900"/>
+            <a:r>
+              <a:rPr lang="en-US" dirty="0">
+                <a:solidFill>
+                  <a:schemeClr val="bg1"/>
+                </a:solidFill>
+              </a:rPr>
+              <a:t>Assuming most of the bugs are triggered by the interactions of model constants</a:t>
             </a:r>
           </a:p>
         </p:txBody>
@@ -6241,22 +6550,862 @@
     </p:spTree>
     <p:extLst>
       <p:ext uri="{BB962C8B-B14F-4D97-AF65-F5344CB8AC3E}">
-        <p14:creationId xmlns:p14="http://schemas.microsoft.com/office/powerpoint/2010/main" val="2353400714"/>
+        <p14:creationId xmlns:p14="http://schemas.microsoft.com/office/powerpoint/2010/main" val="3043626"/>
       </p:ext>
     </p:extLst>
   </p:cSld>
   <p:clrMapOvr>
     <a:masterClrMapping/>
   </p:clrMapOvr>
+</p:sld>
+</file>
+
+<file path=ppt/slides/slide13.xml><?xml version="1.0" encoding="utf-8"?>
+<p:sld xmlns:a="http://schemas.openxmlformats.org/drawingml/2006/main" xmlns:r="http://schemas.openxmlformats.org/officeDocument/2006/relationships" xmlns:p="http://schemas.openxmlformats.org/presentationml/2006/main">
+  <p:cSld name="page2">
+    <p:spTree>
+      <p:nvGrpSpPr>
+        <p:cNvPr id="1" name=""/>
+        <p:cNvGrpSpPr/>
+        <p:nvPr/>
+      </p:nvGrpSpPr>
+      <p:grpSpPr>
+        <a:xfrm>
+          <a:off x="0" y="0"/>
+          <a:ext cx="0" cy="0"/>
+          <a:chOff x="0" y="0"/>
+          <a:chExt cx="0" cy="0"/>
+        </a:xfrm>
+      </p:grpSpPr>
+      <p:sp>
+        <p:nvSpPr>
+          <p:cNvPr id="2" name="Title 1">
+            <a:extLst>
+              <a:ext uri="{FF2B5EF4-FFF2-40B4-BE49-F238E27FC236}">
+                <a16:creationId xmlns:a16="http://schemas.microsoft.com/office/drawing/2014/main" id="{3329BCE0-57D7-B440-3433-0B98B154F9AD}"/>
+              </a:ext>
+            </a:extLst>
+          </p:cNvPr>
+          <p:cNvSpPr txBox="1">
+            <a:spLocks noGrp="1"/>
+          </p:cNvSpPr>
+          <p:nvPr>
+            <p:ph type="title" idx="4294967295"/>
+          </p:nvPr>
+        </p:nvSpPr>
+        <p:spPr>
+          <a:xfrm>
+            <a:off x="503999" y="422301"/>
+            <a:ext cx="9071640" cy="553998"/>
+          </a:xfrm>
+        </p:spPr>
+        <p:txBody>
+          <a:bodyPr>
+            <a:spAutoFit/>
+          </a:bodyPr>
+          <a:lstStyle/>
+          <a:p>
+            <a:pPr lvl="0"/>
+            <a:r>
+              <a:rPr lang="en-US" dirty="0">
+                <a:solidFill>
+                  <a:schemeClr val="bg1"/>
+                </a:solidFill>
+              </a:rPr>
+              <a:t>Background of Combinatorial Testing</a:t>
+            </a:r>
+          </a:p>
+        </p:txBody>
+      </p:sp>
+      <p:sp>
+        <p:nvSpPr>
+          <p:cNvPr id="3" name="Text Placeholder 2">
+            <a:extLst>
+              <a:ext uri="{FF2B5EF4-FFF2-40B4-BE49-F238E27FC236}">
+                <a16:creationId xmlns:a16="http://schemas.microsoft.com/office/drawing/2014/main" id="{C12EA507-D828-F915-2FD8-9BBE5948C904}"/>
+              </a:ext>
+            </a:extLst>
+          </p:cNvPr>
+          <p:cNvSpPr txBox="1">
+            <a:spLocks noGrp="1"/>
+          </p:cNvSpPr>
+          <p:nvPr>
+            <p:ph type="body" idx="4294967295"/>
+          </p:nvPr>
+        </p:nvSpPr>
+        <p:spPr/>
+        <p:txBody>
+          <a:bodyPr>
+            <a:normAutofit/>
+          </a:bodyPr>
+          <a:lstStyle/>
+          <a:p>
+            <a:pPr marL="342900" indent="-342900"/>
+            <a:r>
+              <a:rPr lang="en-US" dirty="0">
+                <a:solidFill>
+                  <a:schemeClr val="bg1"/>
+                </a:solidFill>
+              </a:rPr>
+              <a:t>NIST research found most software bugs are caused by interactions of only a small number of parameters</a:t>
+            </a:r>
+            <a:r>
+              <a:rPr lang="en-US" i="1" baseline="30000" dirty="0">
+                <a:solidFill>
+                  <a:schemeClr val="bg1"/>
+                </a:solidFill>
+              </a:rPr>
+              <a:t>1</a:t>
+            </a:r>
+            <a:r>
+              <a:rPr lang="en-US" dirty="0">
+                <a:solidFill>
+                  <a:schemeClr val="bg1"/>
+                </a:solidFill>
+              </a:rPr>
+              <a:t>. </a:t>
+            </a:r>
+          </a:p>
+          <a:p>
+            <a:pPr marL="342900" indent="-342900"/>
+            <a:r>
+              <a:rPr lang="en-US" dirty="0">
+                <a:solidFill>
+                  <a:schemeClr val="bg1"/>
+                </a:solidFill>
+              </a:rPr>
+              <a:t>By testing all combinations of a certain number of parameters, most software bugs can be found with much fewer test cases. </a:t>
+            </a:r>
+          </a:p>
+          <a:p>
+            <a:pPr marL="342900" indent="-342900"/>
+            <a:r>
+              <a:rPr lang="en-US" dirty="0">
+                <a:solidFill>
+                  <a:schemeClr val="bg1"/>
+                </a:solidFill>
+              </a:rPr>
+              <a:t>NIST’s</a:t>
+            </a:r>
+            <a:r>
+              <a:rPr lang="en-US" i="1" dirty="0">
+                <a:solidFill>
+                  <a:schemeClr val="bg1"/>
+                </a:solidFill>
+              </a:rPr>
+              <a:t> </a:t>
+            </a:r>
+            <a:r>
+              <a:rPr lang="en-US" dirty="0">
+                <a:solidFill>
+                  <a:schemeClr val="bg1"/>
+                </a:solidFill>
+              </a:rPr>
+              <a:t>ACTS tool can generate covering arrays from 1-way to 6-way</a:t>
+            </a:r>
+            <a:r>
+              <a:rPr lang="en-US" baseline="30000" dirty="0">
+                <a:solidFill>
+                  <a:schemeClr val="bg1"/>
+                </a:solidFill>
+              </a:rPr>
+              <a:t> </a:t>
+            </a:r>
+            <a:r>
+              <a:rPr lang="en-US" dirty="0">
+                <a:solidFill>
+                  <a:schemeClr val="bg1"/>
+                </a:solidFill>
+              </a:rPr>
+              <a:t>or with mixed coverage</a:t>
+            </a:r>
+            <a:r>
+              <a:rPr lang="en-US" baseline="30000" dirty="0">
+                <a:solidFill>
+                  <a:schemeClr val="bg1"/>
+                </a:solidFill>
+              </a:rPr>
+              <a:t>2</a:t>
+            </a:r>
+            <a:r>
+              <a:rPr lang="en-US" dirty="0">
+                <a:solidFill>
+                  <a:schemeClr val="bg1"/>
+                </a:solidFill>
+              </a:rPr>
+              <a:t>. </a:t>
+            </a:r>
+          </a:p>
+        </p:txBody>
+      </p:sp>
+      <p:sp>
+        <p:nvSpPr>
+          <p:cNvPr id="5" name="TextBox 4">
+            <a:extLst>
+              <a:ext uri="{FF2B5EF4-FFF2-40B4-BE49-F238E27FC236}">
+                <a16:creationId xmlns:a16="http://schemas.microsoft.com/office/drawing/2014/main" id="{9747BCA8-A847-7114-04B9-16833F38B983}"/>
+              </a:ext>
+            </a:extLst>
+          </p:cNvPr>
+          <p:cNvSpPr txBox="1"/>
+          <p:nvPr/>
+        </p:nvSpPr>
+        <p:spPr>
+          <a:xfrm>
+            <a:off x="1129149" y="4549641"/>
+            <a:ext cx="7821340" cy="830997"/>
+          </a:xfrm>
+          <a:prstGeom prst="rect">
+            <a:avLst/>
+          </a:prstGeom>
+          <a:noFill/>
+        </p:spPr>
+        <p:txBody>
+          <a:bodyPr wrap="square" rtlCol="0">
+            <a:spAutoFit/>
+          </a:bodyPr>
+          <a:lstStyle/>
+          <a:p>
+            <a:r>
+              <a:rPr lang="en-US" sz="1200" dirty="0">
+                <a:solidFill>
+                  <a:schemeClr val="bg1"/>
+                </a:solidFill>
+              </a:rPr>
+              <a:t>1. </a:t>
+            </a:r>
+            <a:r>
+              <a:rPr lang="en-US" sz="1200" i="1" dirty="0">
+                <a:solidFill>
+                  <a:schemeClr val="bg1"/>
+                </a:solidFill>
+              </a:rPr>
+              <a:t>Automated Combinatorial Testing for Software (ACTS)</a:t>
+            </a:r>
+            <a:r>
+              <a:rPr lang="en-US" sz="1200" dirty="0">
+                <a:solidFill>
+                  <a:schemeClr val="bg1"/>
+                </a:solidFill>
+              </a:rPr>
+              <a:t>. NIST Computer Security Division. (2016, July 20). https://</a:t>
+            </a:r>
+            <a:r>
+              <a:rPr lang="en-US" sz="1200" dirty="0" err="1">
+                <a:solidFill>
+                  <a:schemeClr val="bg1"/>
+                </a:solidFill>
+              </a:rPr>
+              <a:t>csrc.nist.rip</a:t>
+            </a:r>
+            <a:r>
+              <a:rPr lang="en-US" sz="1200" dirty="0">
+                <a:solidFill>
+                  <a:schemeClr val="bg1"/>
+                </a:solidFill>
+              </a:rPr>
+              <a:t>/groups/SNS/acts/ </a:t>
+            </a:r>
+          </a:p>
+          <a:p>
+            <a:r>
+              <a:rPr lang="en-US" sz="1200" dirty="0">
+                <a:solidFill>
+                  <a:schemeClr val="bg1"/>
+                </a:solidFill>
+              </a:rPr>
+              <a:t>2. </a:t>
+            </a:r>
+            <a:r>
+              <a:rPr lang="en-US" sz="1200" i="1" dirty="0">
+                <a:solidFill>
+                  <a:schemeClr val="bg1"/>
+                </a:solidFill>
+              </a:rPr>
+              <a:t>User Guide for ACTS</a:t>
+            </a:r>
+            <a:r>
+              <a:rPr lang="en-US" sz="1200" dirty="0">
+                <a:solidFill>
+                  <a:schemeClr val="bg1"/>
+                </a:solidFill>
+              </a:rPr>
+              <a:t>. NIST. (n.d.). </a:t>
+            </a:r>
+            <a:r>
+              <a:rPr lang="en-US" sz="1200" u="sng" dirty="0">
+                <a:solidFill>
+                  <a:schemeClr val="bg1"/>
+                </a:solidFill>
+                <a:hlinkClick r:id="rId3"/>
+              </a:rPr>
+              <a:t>https://csrc.nist.gov/csrc/media/Projects/automated-combinatorial-testing-for-software/documents/acts_user_guide_for_basic1.0_and_advanced3.3_versions_nov23.pdf</a:t>
+            </a:r>
+            <a:r>
+              <a:rPr lang="en-US" sz="1200" u="sng" dirty="0">
+                <a:solidFill>
+                  <a:schemeClr val="bg1"/>
+                </a:solidFill>
+              </a:rPr>
+              <a:t> </a:t>
+            </a:r>
+          </a:p>
+        </p:txBody>
+      </p:sp>
+    </p:spTree>
+  </p:cSld>
+  <p:clrMapOvr>
+    <a:masterClrMapping/>
+  </p:clrMapOvr>
+</p:sld>
+</file>
+
+<file path=ppt/slides/slide14.xml><?xml version="1.0" encoding="utf-8"?>
+<p:sld xmlns:a="http://schemas.openxmlformats.org/drawingml/2006/main" xmlns:r="http://schemas.openxmlformats.org/officeDocument/2006/relationships" xmlns:p="http://schemas.openxmlformats.org/presentationml/2006/main">
+  <p:cSld name="page3">
+    <p:spTree>
+      <p:nvGrpSpPr>
+        <p:cNvPr id="1" name=""/>
+        <p:cNvGrpSpPr/>
+        <p:nvPr/>
+      </p:nvGrpSpPr>
+      <p:grpSpPr>
+        <a:xfrm>
+          <a:off x="0" y="0"/>
+          <a:ext cx="0" cy="0"/>
+          <a:chOff x="0" y="0"/>
+          <a:chExt cx="0" cy="0"/>
+        </a:xfrm>
+      </p:grpSpPr>
+      <p:sp>
+        <p:nvSpPr>
+          <p:cNvPr id="2" name="Title 1">
+            <a:extLst>
+              <a:ext uri="{FF2B5EF4-FFF2-40B4-BE49-F238E27FC236}">
+                <a16:creationId xmlns:a16="http://schemas.microsoft.com/office/drawing/2014/main" id="{1F22CA55-51A0-611A-7B91-13ABAA9983C9}"/>
+              </a:ext>
+            </a:extLst>
+          </p:cNvPr>
+          <p:cNvSpPr txBox="1">
+            <a:spLocks noGrp="1"/>
+          </p:cNvSpPr>
+          <p:nvPr>
+            <p:ph type="title" idx="4294967295"/>
+          </p:nvPr>
+        </p:nvSpPr>
+        <p:spPr>
+          <a:xfrm>
+            <a:off x="503999" y="422301"/>
+            <a:ext cx="9071640" cy="553998"/>
+          </a:xfrm>
+        </p:spPr>
+        <p:txBody>
+          <a:bodyPr>
+            <a:spAutoFit/>
+          </a:bodyPr>
+          <a:lstStyle/>
+          <a:p>
+            <a:pPr lvl="0"/>
+            <a:r>
+              <a:rPr lang="en-US" dirty="0">
+                <a:solidFill>
+                  <a:schemeClr val="bg1"/>
+                </a:solidFill>
+              </a:rPr>
+              <a:t>Application of CT to </a:t>
+            </a:r>
+            <a:r>
+              <a:rPr lang="en-US" dirty="0" err="1">
+                <a:solidFill>
+                  <a:schemeClr val="bg1"/>
+                </a:solidFill>
+                <a:latin typeface="Courier New" panose="02070309020205020404" pitchFamily="49" charset="0"/>
+                <a:cs typeface="Courier New" panose="02070309020205020404" pitchFamily="49" charset="0"/>
+              </a:rPr>
+              <a:t>LakeTemperature</a:t>
+            </a:r>
+            <a:endParaRPr lang="en-US" dirty="0">
+              <a:solidFill>
+                <a:schemeClr val="bg1"/>
+              </a:solidFill>
+              <a:latin typeface="Courier New" panose="02070309020205020404" pitchFamily="49" charset="0"/>
+              <a:cs typeface="Courier New" panose="02070309020205020404" pitchFamily="49" charset="0"/>
+            </a:endParaRPr>
+          </a:p>
+        </p:txBody>
+      </p:sp>
+      <p:sp>
+        <p:nvSpPr>
+          <p:cNvPr id="3" name="Text Placeholder 2">
+            <a:extLst>
+              <a:ext uri="{FF2B5EF4-FFF2-40B4-BE49-F238E27FC236}">
+                <a16:creationId xmlns:a16="http://schemas.microsoft.com/office/drawing/2014/main" id="{4FC0F3B3-D388-0133-98BD-A5D2EC76DF23}"/>
+              </a:ext>
+            </a:extLst>
+          </p:cNvPr>
+          <p:cNvSpPr txBox="1">
+            <a:spLocks noGrp="1"/>
+          </p:cNvSpPr>
+          <p:nvPr>
+            <p:ph type="body" idx="4294967295"/>
+          </p:nvPr>
+        </p:nvSpPr>
+        <p:spPr>
+          <a:xfrm>
+            <a:off x="503999" y="1326600"/>
+            <a:ext cx="9071640" cy="3613679"/>
+          </a:xfrm>
+        </p:spPr>
+        <p:txBody>
+          <a:bodyPr>
+            <a:normAutofit fontScale="85000" lnSpcReduction="10000"/>
+          </a:bodyPr>
+          <a:lstStyle/>
+          <a:p>
+            <a:pPr marL="342900" indent="-342900"/>
+            <a:r>
+              <a:rPr lang="en-US" dirty="0">
+                <a:solidFill>
+                  <a:schemeClr val="bg1"/>
+                </a:solidFill>
+              </a:rPr>
+              <a:t>The model constants, which we can control when running </a:t>
+            </a:r>
+            <a:r>
+              <a:rPr lang="en-US" dirty="0" err="1">
+                <a:solidFill>
+                  <a:schemeClr val="bg1"/>
+                </a:solidFill>
+                <a:latin typeface="Courier New" panose="02070309020205020404" pitchFamily="49" charset="0"/>
+                <a:cs typeface="Courier New" panose="02070309020205020404" pitchFamily="49" charset="0"/>
+              </a:rPr>
+              <a:t>LakeTemperature</a:t>
+            </a:r>
+            <a:r>
+              <a:rPr lang="en-US" dirty="0">
+                <a:solidFill>
+                  <a:schemeClr val="bg1"/>
+                </a:solidFill>
+              </a:rPr>
+              <a:t>, are used as the parameters for the combinatorial test cases. </a:t>
+            </a:r>
+          </a:p>
+          <a:p>
+            <a:pPr marL="342900" indent="-342900"/>
+            <a:r>
+              <a:rPr lang="en-US" dirty="0">
+                <a:solidFill>
+                  <a:schemeClr val="bg1"/>
+                </a:solidFill>
+              </a:rPr>
+              <a:t>3 constants are Booleans, 7 are integers, and 15 </a:t>
+            </a:r>
+            <a:r>
+              <a:rPr lang="en-US">
+                <a:solidFill>
+                  <a:schemeClr val="bg1"/>
+                </a:solidFill>
+              </a:rPr>
+              <a:t>are floats. </a:t>
+            </a:r>
+            <a:endParaRPr lang="en-US" dirty="0">
+              <a:solidFill>
+                <a:schemeClr val="bg1"/>
+              </a:solidFill>
+            </a:endParaRPr>
+          </a:p>
+          <a:p>
+            <a:pPr marL="342900" indent="-342900"/>
+            <a:r>
+              <a:rPr lang="en-US" dirty="0">
+                <a:solidFill>
+                  <a:schemeClr val="bg1"/>
+                </a:solidFill>
+              </a:rPr>
+              <a:t>Booleans can be either 0 or 1.</a:t>
+            </a:r>
+          </a:p>
+          <a:p>
+            <a:pPr marL="342900" indent="-342900"/>
+            <a:r>
+              <a:rPr lang="en-US" dirty="0">
+                <a:solidFill>
+                  <a:schemeClr val="bg1"/>
+                </a:solidFill>
+              </a:rPr>
+              <a:t>For integers, we linearly interpolate over their ranges to get up to 11 values. </a:t>
+            </a:r>
+          </a:p>
+          <a:p>
+            <a:pPr marL="342900" indent="-342900"/>
+            <a:r>
+              <a:rPr lang="en-US" dirty="0">
+                <a:solidFill>
+                  <a:schemeClr val="bg1"/>
+                </a:solidFill>
+              </a:rPr>
+              <a:t>For floats, we linearly interpolate over their ranges to get exactly 11 values. </a:t>
+            </a:r>
+          </a:p>
+          <a:p>
+            <a:pPr marL="342900" indent="-342900"/>
+            <a:r>
+              <a:rPr lang="en-US" dirty="0">
+                <a:solidFill>
+                  <a:schemeClr val="bg1"/>
+                </a:solidFill>
+              </a:rPr>
+              <a:t>ACTS generates covering arrays from 2-way to 5-way and outputs a CSV file for each, from which </a:t>
+            </a:r>
+            <a:r>
+              <a:rPr lang="en-US" dirty="0" err="1">
+                <a:solidFill>
+                  <a:schemeClr val="bg1"/>
+                </a:solidFill>
+              </a:rPr>
+              <a:t>NetCDF</a:t>
+            </a:r>
+            <a:r>
+              <a:rPr lang="en-US" dirty="0">
+                <a:solidFill>
+                  <a:schemeClr val="bg1"/>
+                </a:solidFill>
+              </a:rPr>
+              <a:t> files are created using a Python script (</a:t>
+            </a:r>
+            <a:r>
+              <a:rPr lang="en-US" dirty="0">
+                <a:solidFill>
+                  <a:schemeClr val="bg1"/>
+                </a:solidFill>
+                <a:latin typeface="Courier New" panose="02070309020205020404" pitchFamily="49" charset="0"/>
+                <a:cs typeface="Courier New" panose="02070309020205020404" pitchFamily="49" charset="0"/>
+              </a:rPr>
+              <a:t>csv2nc</a:t>
+            </a:r>
+            <a:r>
+              <a:rPr lang="en-US" dirty="0">
+                <a:solidFill>
+                  <a:schemeClr val="bg1"/>
+                </a:solidFill>
+              </a:rPr>
+              <a:t>). These are run on the model using the </a:t>
+            </a:r>
+            <a:r>
+              <a:rPr lang="en-US" dirty="0" err="1">
+                <a:solidFill>
+                  <a:schemeClr val="bg1"/>
+                </a:solidFill>
+              </a:rPr>
+              <a:t>NetCDF</a:t>
+            </a:r>
+            <a:r>
+              <a:rPr lang="en-US" dirty="0">
+                <a:solidFill>
+                  <a:schemeClr val="bg1"/>
+                </a:solidFill>
+              </a:rPr>
+              <a:t> Cases Sampling Plugin. </a:t>
+            </a:r>
+            <a:endParaRPr lang="en-US" i="1" dirty="0">
+              <a:solidFill>
+                <a:schemeClr val="bg1"/>
+              </a:solidFill>
+            </a:endParaRPr>
+          </a:p>
+        </p:txBody>
+      </p:sp>
+    </p:spTree>
+  </p:cSld>
+  <p:clrMapOvr>
+    <a:masterClrMapping/>
+  </p:clrMapOvr>
+</p:sld>
+</file>
+
+<file path=ppt/slides/slide15.xml><?xml version="1.0" encoding="utf-8"?>
+<p:sld xmlns:a="http://schemas.openxmlformats.org/drawingml/2006/main" xmlns:r="http://schemas.openxmlformats.org/officeDocument/2006/relationships" xmlns:p="http://schemas.openxmlformats.org/presentationml/2006/main">
+  <p:cSld name="page4">
+    <p:spTree>
+      <p:nvGrpSpPr>
+        <p:cNvPr id="1" name=""/>
+        <p:cNvGrpSpPr/>
+        <p:nvPr/>
+      </p:nvGrpSpPr>
+      <p:grpSpPr>
+        <a:xfrm>
+          <a:off x="0" y="0"/>
+          <a:ext cx="0" cy="0"/>
+          <a:chOff x="0" y="0"/>
+          <a:chExt cx="0" cy="0"/>
+        </a:xfrm>
+      </p:grpSpPr>
+      <p:sp>
+        <p:nvSpPr>
+          <p:cNvPr id="2" name="Title 1">
+            <a:extLst>
+              <a:ext uri="{FF2B5EF4-FFF2-40B4-BE49-F238E27FC236}">
+                <a16:creationId xmlns:a16="http://schemas.microsoft.com/office/drawing/2014/main" id="{C4490A42-8874-BE43-3396-EC82FA0BDFFE}"/>
+              </a:ext>
+            </a:extLst>
+          </p:cNvPr>
+          <p:cNvSpPr txBox="1">
+            <a:spLocks noGrp="1"/>
+          </p:cNvSpPr>
+          <p:nvPr>
+            <p:ph type="title" idx="4294967295"/>
+          </p:nvPr>
+        </p:nvSpPr>
+        <p:spPr>
+          <a:xfrm>
+            <a:off x="503999" y="422301"/>
+            <a:ext cx="9071640" cy="553998"/>
+          </a:xfrm>
+        </p:spPr>
+        <p:txBody>
+          <a:bodyPr>
+            <a:spAutoFit/>
+          </a:bodyPr>
+          <a:lstStyle/>
+          <a:p>
+            <a:pPr lvl="0"/>
+            <a:r>
+              <a:rPr lang="en-US" dirty="0">
+                <a:solidFill>
+                  <a:schemeClr val="bg1"/>
+                </a:solidFill>
+              </a:rPr>
+              <a:t>Test Oracle</a:t>
+            </a:r>
+          </a:p>
+        </p:txBody>
+      </p:sp>
+      <p:sp>
+        <p:nvSpPr>
+          <p:cNvPr id="3" name="Text Placeholder 2">
+            <a:extLst>
+              <a:ext uri="{FF2B5EF4-FFF2-40B4-BE49-F238E27FC236}">
+                <a16:creationId xmlns:a16="http://schemas.microsoft.com/office/drawing/2014/main" id="{86FF665C-42E1-DF86-A85F-54C67BE68385}"/>
+              </a:ext>
+            </a:extLst>
+          </p:cNvPr>
+          <p:cNvSpPr txBox="1">
+            <a:spLocks noGrp="1"/>
+          </p:cNvSpPr>
+          <p:nvPr>
+            <p:ph type="body" idx="4294967295"/>
+          </p:nvPr>
+        </p:nvSpPr>
+        <p:spPr/>
+        <p:txBody>
+          <a:bodyPr>
+            <a:normAutofit/>
+          </a:bodyPr>
+          <a:lstStyle/>
+          <a:p>
+            <a:pPr marL="342900" indent="-342900"/>
+            <a:r>
+              <a:rPr lang="en-US" dirty="0">
+                <a:solidFill>
+                  <a:schemeClr val="bg1"/>
+                </a:solidFill>
+              </a:rPr>
+              <a:t>Scientific software verification is challenging due to often lacking a test oracle. </a:t>
+            </a:r>
+          </a:p>
+          <a:p>
+            <a:pPr marL="342900" indent="-342900"/>
+            <a:r>
+              <a:rPr lang="en-US" dirty="0">
+                <a:solidFill>
+                  <a:schemeClr val="bg1"/>
+                </a:solidFill>
+              </a:rPr>
+              <a:t>We implemented checks that validate model outputs, supported by the Fault Finding Analysis Plugin. </a:t>
+            </a:r>
+          </a:p>
+          <a:p>
+            <a:pPr marL="342900" indent="-342900"/>
+            <a:r>
+              <a:rPr lang="en-US" dirty="0">
+                <a:solidFill>
+                  <a:schemeClr val="bg1"/>
+                </a:solidFill>
+              </a:rPr>
+              <a:t>Checks include ranges of outputs, signs, enumerated values, finiteness, relationships to other inputs/outputs, and certain physical laws and constraints.</a:t>
+            </a:r>
+          </a:p>
+        </p:txBody>
+      </p:sp>
+    </p:spTree>
+  </p:cSld>
+  <p:clrMapOvr>
+    <a:masterClrMapping/>
+  </p:clrMapOvr>
+</p:sld>
+</file>
+
+<file path=ppt/slides/slide16.xml><?xml version="1.0" encoding="utf-8"?>
+<p:sld xmlns:a="http://schemas.openxmlformats.org/drawingml/2006/main" xmlns:r="http://schemas.openxmlformats.org/officeDocument/2006/relationships" xmlns:p="http://schemas.openxmlformats.org/presentationml/2006/main">
+  <p:cSld name="page7">
+    <p:spTree>
+      <p:nvGrpSpPr>
+        <p:cNvPr id="1" name=""/>
+        <p:cNvGrpSpPr/>
+        <p:nvPr/>
+      </p:nvGrpSpPr>
+      <p:grpSpPr>
+        <a:xfrm>
+          <a:off x="0" y="0"/>
+          <a:ext cx="0" cy="0"/>
+          <a:chOff x="0" y="0"/>
+          <a:chExt cx="0" cy="0"/>
+        </a:xfrm>
+      </p:grpSpPr>
+      <p:sp>
+        <p:nvSpPr>
+          <p:cNvPr id="2" name="Title 1">
+            <a:extLst>
+              <a:ext uri="{FF2B5EF4-FFF2-40B4-BE49-F238E27FC236}">
+                <a16:creationId xmlns:a16="http://schemas.microsoft.com/office/drawing/2014/main" id="{44B3FCDA-4EC5-B19D-5009-23CEC9F74198}"/>
+              </a:ext>
+            </a:extLst>
+          </p:cNvPr>
+          <p:cNvSpPr txBox="1">
+            <a:spLocks noGrp="1"/>
+          </p:cNvSpPr>
+          <p:nvPr>
+            <p:ph type="title" idx="4294967295"/>
+          </p:nvPr>
+        </p:nvSpPr>
+        <p:spPr>
+          <a:xfrm>
+            <a:off x="503999" y="422301"/>
+            <a:ext cx="3346641" cy="553998"/>
+          </a:xfrm>
+        </p:spPr>
+        <p:txBody>
+          <a:bodyPr wrap="square">
+            <a:spAutoFit/>
+          </a:bodyPr>
+          <a:lstStyle/>
+          <a:p>
+            <a:pPr lvl="0"/>
+            <a:r>
+              <a:rPr lang="en-US" dirty="0">
+                <a:solidFill>
+                  <a:schemeClr val="bg1"/>
+                </a:solidFill>
+              </a:rPr>
+              <a:t>DOI 2 Results</a:t>
+            </a:r>
+          </a:p>
+        </p:txBody>
+      </p:sp>
+      <p:sp>
+        <p:nvSpPr>
+          <p:cNvPr id="3" name="Text Placeholder 2">
+            <a:extLst>
+              <a:ext uri="{FF2B5EF4-FFF2-40B4-BE49-F238E27FC236}">
+                <a16:creationId xmlns:a16="http://schemas.microsoft.com/office/drawing/2014/main" id="{3F589F92-B484-4E15-0CDC-FFD075A2A74E}"/>
+              </a:ext>
+            </a:extLst>
+          </p:cNvPr>
+          <p:cNvSpPr txBox="1">
+            <a:spLocks noGrp="1"/>
+          </p:cNvSpPr>
+          <p:nvPr>
+            <p:ph type="body" idx="4294967295"/>
+          </p:nvPr>
+        </p:nvSpPr>
+        <p:spPr>
+          <a:xfrm>
+            <a:off x="503999" y="1326600"/>
+            <a:ext cx="3346641" cy="3288239"/>
+          </a:xfrm>
+        </p:spPr>
+        <p:txBody>
+          <a:bodyPr>
+            <a:normAutofit/>
+          </a:bodyPr>
+          <a:lstStyle/>
+          <a:p>
+            <a:pPr marL="342900" indent="-342900"/>
+            <a:r>
+              <a:rPr lang="en-US" dirty="0">
+                <a:solidFill>
+                  <a:schemeClr val="bg1"/>
+                </a:solidFill>
+                <a:latin typeface="AppleSystemUIFont" pitchFamily="2"/>
+              </a:rPr>
+              <a:t>Degree of Interaction (DOI) 2 results in 133 test cases when only changing the values of constants known to affect the outputs of </a:t>
+            </a:r>
+            <a:r>
+              <a:rPr lang="en-US" dirty="0" err="1">
+                <a:solidFill>
+                  <a:schemeClr val="bg1"/>
+                </a:solidFill>
+                <a:latin typeface="Courier New" panose="02070309020205020404" pitchFamily="49" charset="0"/>
+                <a:cs typeface="Courier New" panose="02070309020205020404" pitchFamily="49" charset="0"/>
+              </a:rPr>
+              <a:t>LakeTemperature</a:t>
+            </a:r>
+            <a:r>
+              <a:rPr lang="en-US" dirty="0">
+                <a:solidFill>
+                  <a:schemeClr val="bg1"/>
+                </a:solidFill>
+                <a:latin typeface="AppleSystemUIFont" pitchFamily="2"/>
+              </a:rPr>
+              <a:t>. </a:t>
+            </a:r>
+          </a:p>
+        </p:txBody>
+      </p:sp>
+      <p:pic>
+        <p:nvPicPr>
+          <p:cNvPr id="5" name="Picture 4">
+            <a:extLst>
+              <a:ext uri="{FF2B5EF4-FFF2-40B4-BE49-F238E27FC236}">
+                <a16:creationId xmlns:a16="http://schemas.microsoft.com/office/drawing/2014/main" id="{15C94A79-243F-8D40-B5DA-BED8A49E8184}"/>
+              </a:ext>
+            </a:extLst>
+          </p:cNvPr>
+          <p:cNvPicPr>
+            <a:picLocks noChangeAspect="1"/>
+          </p:cNvPicPr>
+          <p:nvPr/>
+        </p:nvPicPr>
+        <p:blipFill>
+          <a:blip r:embed="rId4"/>
+          <a:stretch>
+            <a:fillRect/>
+          </a:stretch>
+        </p:blipFill>
+        <p:spPr>
+          <a:xfrm>
+            <a:off x="4114644" y="0"/>
+            <a:ext cx="6037257" cy="5670550"/>
+          </a:xfrm>
+          <a:prstGeom prst="rect">
+            <a:avLst/>
+          </a:prstGeom>
+        </p:spPr>
+      </p:pic>
+    </p:spTree>
+  </p:cSld>
+  <p:clrMapOvr>
+    <a:masterClrMapping/>
+  </p:clrMapOvr>
   <p:extLst>
     <p:ext uri="{6950BFC3-D8DA-4A85-94F7-54DA5524770B}">
-      <p188:commentRel xmlns:p188="http://schemas.microsoft.com/office/powerpoint/2018/8/main" r:id="rId2"/>
+      <p188:commentRel xmlns:p188="http://schemas.microsoft.com/office/powerpoint/2018/8/main" r:id="rId3"/>
     </p:ext>
   </p:extLst>
 </p:sld>
 </file>
 
-<file path=ppt/slides/slide12.xml><?xml version="1.0" encoding="utf-8"?>
+<file path=ppt/slides/slide17.xml><?xml version="1.0" encoding="utf-8"?>
 <p:sld xmlns:a="http://schemas.openxmlformats.org/drawingml/2006/main" xmlns:r="http://schemas.openxmlformats.org/officeDocument/2006/relationships" xmlns:p="http://schemas.openxmlformats.org/presentationml/2006/main">
   <p:cSld>
     <p:spTree>
@@ -6278,7 +7427,7 @@
           <p:cNvPr id="2" name="Title 1">
             <a:extLst>
               <a:ext uri="{FF2B5EF4-FFF2-40B4-BE49-F238E27FC236}">
-                <a16:creationId xmlns:a16="http://schemas.microsoft.com/office/drawing/2014/main" id="{3B229438-C75A-6BD0-0DC0-AB63F95B648C}"/>
+                <a16:creationId xmlns:a16="http://schemas.microsoft.com/office/drawing/2014/main" id="{9DF1FC1F-B83D-D043-0A53-60E474E50EFB}"/>
               </a:ext>
             </a:extLst>
           </p:cNvPr>
@@ -6330,7 +7479,7 @@
                   <a:schemeClr val="bg1"/>
                 </a:solidFill>
               </a:rPr>
-              <a:t>DOI 4 Results</a:t>
+              <a:t>DOI 3 Results</a:t>
             </a:r>
           </a:p>
         </p:txBody>
@@ -6340,7 +7489,7 @@
           <p:cNvPr id="3" name="Text Placeholder 2">
             <a:extLst>
               <a:ext uri="{FF2B5EF4-FFF2-40B4-BE49-F238E27FC236}">
-                <a16:creationId xmlns:a16="http://schemas.microsoft.com/office/drawing/2014/main" id="{56064C14-1601-F022-7F3D-615176F6A82B}"/>
+                <a16:creationId xmlns:a16="http://schemas.microsoft.com/office/drawing/2014/main" id="{5CF707B8-09A9-A28B-36FE-7651ACC03308}"/>
               </a:ext>
             </a:extLst>
           </p:cNvPr>
@@ -6588,7 +7737,7 @@
                 </a:solidFill>
                 <a:latin typeface="AppleSystemUIFont" pitchFamily="2"/>
               </a:rPr>
-              <a:t>DOI 4 results in 50,031 test cases when only changing the values of constants known to affect the outputs of </a:t>
+              <a:t>DOI 3 results in 3,516 test cases when only changing the values of constants known to affect the outputs of </a:t>
             </a:r>
             <a:r>
               <a:rPr lang="en-US" dirty="0" err="1">
@@ -6627,7 +7776,7 @@
     </p:spTree>
     <p:extLst>
       <p:ext uri="{BB962C8B-B14F-4D97-AF65-F5344CB8AC3E}">
-        <p14:creationId xmlns:p14="http://schemas.microsoft.com/office/powerpoint/2010/main" val="3165592934"/>
+        <p14:creationId xmlns:p14="http://schemas.microsoft.com/office/powerpoint/2010/main" val="2353400714"/>
       </p:ext>
     </p:extLst>
   </p:cSld>
@@ -6642,7 +7791,7 @@
 </p:sld>
 </file>
 
-<file path=ppt/slides/slide13.xml><?xml version="1.0" encoding="utf-8"?>
+<file path=ppt/slides/slide18.xml><?xml version="1.0" encoding="utf-8"?>
 <p:sld xmlns:a="http://schemas.openxmlformats.org/drawingml/2006/main" xmlns:r="http://schemas.openxmlformats.org/officeDocument/2006/relationships" xmlns:p="http://schemas.openxmlformats.org/presentationml/2006/main">
   <p:cSld>
     <p:spTree>
@@ -6664,7 +7813,7 @@
           <p:cNvPr id="2" name="Title 1">
             <a:extLst>
               <a:ext uri="{FF2B5EF4-FFF2-40B4-BE49-F238E27FC236}">
-                <a16:creationId xmlns:a16="http://schemas.microsoft.com/office/drawing/2014/main" id="{3BF6498E-98A7-DD6B-79FB-40EF89C7FFC8}"/>
+                <a16:creationId xmlns:a16="http://schemas.microsoft.com/office/drawing/2014/main" id="{3B229438-C75A-6BD0-0DC0-AB63F95B648C}"/>
               </a:ext>
             </a:extLst>
           </p:cNvPr>
@@ -6716,7 +7865,7 @@
                   <a:schemeClr val="bg1"/>
                 </a:solidFill>
               </a:rPr>
-              <a:t>DOI 5 Data</a:t>
+              <a:t>DOI 4 Results</a:t>
             </a:r>
           </a:p>
         </p:txBody>
@@ -6726,7 +7875,7 @@
           <p:cNvPr id="3" name="Text Placeholder 2">
             <a:extLst>
               <a:ext uri="{FF2B5EF4-FFF2-40B4-BE49-F238E27FC236}">
-                <a16:creationId xmlns:a16="http://schemas.microsoft.com/office/drawing/2014/main" id="{31720598-1CB0-E7F3-3417-23A2488D52ED}"/>
+                <a16:creationId xmlns:a16="http://schemas.microsoft.com/office/drawing/2014/main" id="{56064C14-1601-F022-7F3D-615176F6A82B}"/>
               </a:ext>
             </a:extLst>
           </p:cNvPr>
@@ -6974,7 +8123,7 @@
                 </a:solidFill>
                 <a:latin typeface="AppleSystemUIFont" pitchFamily="2"/>
               </a:rPr>
-              <a:t>DOI 5 results in 689,735 test cases when only changing the values of constants known to affect the outputs of </a:t>
+              <a:t>DOI 4 results in 50,031 test cases when only changing the values of constants known to affect the outputs of </a:t>
             </a:r>
             <a:r>
               <a:rPr lang="en-US" dirty="0" err="1">
@@ -7013,7 +8162,7 @@
     </p:spTree>
     <p:extLst>
       <p:ext uri="{BB962C8B-B14F-4D97-AF65-F5344CB8AC3E}">
-        <p14:creationId xmlns:p14="http://schemas.microsoft.com/office/powerpoint/2010/main" val="3954683613"/>
+        <p14:creationId xmlns:p14="http://schemas.microsoft.com/office/powerpoint/2010/main" val="3165592934"/>
       </p:ext>
     </p:extLst>
   </p:cSld>
@@ -7028,9 +8177,9 @@
 </p:sld>
 </file>
 
-<file path=ppt/slides/slide14.xml><?xml version="1.0" encoding="utf-8"?>
+<file path=ppt/slides/slide19.xml><?xml version="1.0" encoding="utf-8"?>
 <p:sld xmlns:a="http://schemas.openxmlformats.org/drawingml/2006/main" xmlns:r="http://schemas.openxmlformats.org/officeDocument/2006/relationships" xmlns:p="http://schemas.openxmlformats.org/presentationml/2006/main">
-  <p:cSld name="page10">
+  <p:cSld>
     <p:spTree>
       <p:nvGrpSpPr>
         <p:cNvPr id="1" name=""/>
@@ -7050,405 +8199,7 @@
           <p:cNvPr id="2" name="Title 1">
             <a:extLst>
               <a:ext uri="{FF2B5EF4-FFF2-40B4-BE49-F238E27FC236}">
-                <a16:creationId xmlns:a16="http://schemas.microsoft.com/office/drawing/2014/main" id="{96CB14EF-3B5C-5292-14CB-3720F1B94FC4}"/>
-              </a:ext>
-            </a:extLst>
-          </p:cNvPr>
-          <p:cNvSpPr txBox="1">
-            <a:spLocks noGrp="1"/>
-          </p:cNvSpPr>
-          <p:nvPr>
-            <p:ph type="title" idx="4294967295"/>
-          </p:nvPr>
-        </p:nvSpPr>
-        <p:spPr>
-          <a:xfrm>
-            <a:off x="503999" y="422301"/>
-            <a:ext cx="9071640" cy="553998"/>
-          </a:xfrm>
-        </p:spPr>
-        <p:txBody>
-          <a:bodyPr>
-            <a:spAutoFit/>
-          </a:bodyPr>
-          <a:lstStyle/>
-          <a:p>
-            <a:pPr lvl="0"/>
-            <a:r>
-              <a:rPr lang="en-US" dirty="0">
-                <a:solidFill>
-                  <a:schemeClr val="bg1"/>
-                </a:solidFill>
-              </a:rPr>
-              <a:t>Findings from Testing</a:t>
-            </a:r>
-          </a:p>
-        </p:txBody>
-      </p:sp>
-      <p:sp>
-        <p:nvSpPr>
-          <p:cNvPr id="3" name="Text Placeholder 2">
-            <a:extLst>
-              <a:ext uri="{FF2B5EF4-FFF2-40B4-BE49-F238E27FC236}">
-                <a16:creationId xmlns:a16="http://schemas.microsoft.com/office/drawing/2014/main" id="{C9367797-CD5B-309B-985B-DF6091246510}"/>
-              </a:ext>
-            </a:extLst>
-          </p:cNvPr>
-          <p:cNvSpPr txBox="1">
-            <a:spLocks noGrp="1"/>
-          </p:cNvSpPr>
-          <p:nvPr>
-            <p:ph type="body" idx="4294967295"/>
-          </p:nvPr>
-        </p:nvSpPr>
-        <p:spPr>
-          <a:xfrm>
-            <a:off x="503998" y="1326600"/>
-            <a:ext cx="9071639" cy="3921649"/>
-          </a:xfrm>
-        </p:spPr>
-        <p:txBody>
-          <a:bodyPr>
-            <a:normAutofit fontScale="92500" lnSpcReduction="10000"/>
-          </a:bodyPr>
-          <a:lstStyle/>
-          <a:p>
-            <a:pPr marL="342900" indent="-342900"/>
-            <a:r>
-              <a:rPr lang="en-US" dirty="0">
-                <a:solidFill>
-                  <a:schemeClr val="bg1"/>
-                </a:solidFill>
-              </a:rPr>
-              <a:t>Our test cases originally had invalid values for constants, causing crashes. </a:t>
-            </a:r>
-          </a:p>
-          <a:p>
-            <a:pPr marL="342900" indent="-342900"/>
-            <a:r>
-              <a:rPr lang="en-US" dirty="0">
-                <a:solidFill>
-                  <a:schemeClr val="bg1"/>
-                </a:solidFill>
-              </a:rPr>
-              <a:t>Some checks were interpreted incorrectly by us and had to be fixed. </a:t>
-            </a:r>
-          </a:p>
-          <a:p>
-            <a:pPr marL="342900" indent="-342900"/>
-            <a:r>
-              <a:rPr lang="en-US" dirty="0">
-                <a:solidFill>
-                  <a:schemeClr val="bg1"/>
-                </a:solidFill>
-              </a:rPr>
-              <a:t>Tests checking for things other than non-finite values had to ignore non-finite values, otherwise they’d fail and output an inaccurate error message.</a:t>
-            </a:r>
-          </a:p>
-          <a:p>
-            <a:pPr marL="342900" indent="-342900"/>
-            <a:r>
-              <a:rPr lang="en-US" dirty="0">
-                <a:solidFill>
-                  <a:schemeClr val="bg1"/>
-                </a:solidFill>
-              </a:rPr>
-              <a:t>SPEL</a:t>
-            </a:r>
-            <a:r>
-              <a:rPr lang="en-US" i="1" dirty="0">
-                <a:solidFill>
-                  <a:schemeClr val="bg1"/>
-                </a:solidFill>
-              </a:rPr>
-              <a:t> </a:t>
-            </a:r>
-            <a:r>
-              <a:rPr lang="en-US" dirty="0">
-                <a:solidFill>
-                  <a:schemeClr val="bg1"/>
-                </a:solidFill>
-              </a:rPr>
-              <a:t>might be initializing data with </a:t>
-            </a:r>
-            <a:r>
-              <a:rPr lang="en-US" dirty="0" err="1">
-                <a:solidFill>
-                  <a:schemeClr val="bg1"/>
-                </a:solidFill>
-              </a:rPr>
-              <a:t>NaN</a:t>
-            </a:r>
-            <a:r>
-              <a:rPr lang="en-US" dirty="0">
-                <a:solidFill>
-                  <a:schemeClr val="bg1"/>
-                </a:solidFill>
-              </a:rPr>
-              <a:t> values that </a:t>
-            </a:r>
-            <a:r>
-              <a:rPr lang="en-US" dirty="0" err="1">
-                <a:solidFill>
-                  <a:schemeClr val="bg1"/>
-                </a:solidFill>
-                <a:latin typeface="Courier New" panose="02070309020205020404" pitchFamily="49" charset="0"/>
-                <a:cs typeface="Courier New" panose="02070309020205020404" pitchFamily="49" charset="0"/>
-              </a:rPr>
-              <a:t>LakeTemperature</a:t>
-            </a:r>
-            <a:r>
-              <a:rPr lang="en-US" dirty="0">
-                <a:solidFill>
-                  <a:schemeClr val="bg1"/>
-                </a:solidFill>
-              </a:rPr>
-              <a:t> then never overwrites or </a:t>
-            </a:r>
-            <a:r>
-              <a:rPr lang="en-US" dirty="0" err="1">
-                <a:solidFill>
-                  <a:schemeClr val="bg1"/>
-                </a:solidFill>
-                <a:latin typeface="Courier New" panose="02070309020205020404" pitchFamily="49" charset="0"/>
-                <a:cs typeface="Courier New" panose="02070309020205020404" pitchFamily="49" charset="0"/>
-              </a:rPr>
-              <a:t>LakeTemperature</a:t>
-            </a:r>
-            <a:r>
-              <a:rPr lang="en-US" dirty="0">
-                <a:solidFill>
-                  <a:schemeClr val="bg1"/>
-                </a:solidFill>
-              </a:rPr>
-              <a:t> might be outputting data with </a:t>
-            </a:r>
-            <a:r>
-              <a:rPr lang="en-US" dirty="0" err="1">
-                <a:solidFill>
-                  <a:schemeClr val="bg1"/>
-                </a:solidFill>
-              </a:rPr>
-              <a:t>NaN</a:t>
-            </a:r>
-            <a:r>
-              <a:rPr lang="en-US" dirty="0">
-                <a:solidFill>
-                  <a:schemeClr val="bg1"/>
-                </a:solidFill>
-              </a:rPr>
-              <a:t> values. </a:t>
-            </a:r>
-            <a:endParaRPr lang="en-US" i="1" dirty="0">
-              <a:solidFill>
-                <a:schemeClr val="bg1"/>
-              </a:solidFill>
-            </a:endParaRPr>
-          </a:p>
-          <a:p>
-            <a:pPr marL="342900" indent="-342900"/>
-            <a:r>
-              <a:rPr lang="en-US" dirty="0">
-                <a:solidFill>
-                  <a:schemeClr val="bg1"/>
-                </a:solidFill>
-              </a:rPr>
-              <a:t>Largely, </a:t>
-            </a:r>
-            <a:r>
-              <a:rPr lang="en-US" dirty="0" err="1">
-                <a:solidFill>
-                  <a:schemeClr val="bg1"/>
-                </a:solidFill>
-                <a:latin typeface="Courier New" panose="02070309020205020404" pitchFamily="49" charset="0"/>
-                <a:cs typeface="Courier New" panose="02070309020205020404" pitchFamily="49" charset="0"/>
-              </a:rPr>
-              <a:t>LakeTemperature</a:t>
-            </a:r>
-            <a:r>
-              <a:rPr lang="en-US" dirty="0">
-                <a:solidFill>
-                  <a:schemeClr val="bg1"/>
-                </a:solidFill>
-              </a:rPr>
-              <a:t> output data was valid and within physical bounds. However, edge cases resulted in some physically impossible outputs, likely due to combinations between a few model constants. </a:t>
-            </a:r>
-          </a:p>
-        </p:txBody>
-      </p:sp>
-    </p:spTree>
-  </p:cSld>
-  <p:clrMapOvr>
-    <a:masterClrMapping/>
-  </p:clrMapOvr>
-  <p:extLst>
-    <p:ext uri="{6950BFC3-D8DA-4A85-94F7-54DA5524770B}">
-      <p188:commentRel xmlns:p188="http://schemas.microsoft.com/office/powerpoint/2018/8/main" r:id="rId3"/>
-    </p:ext>
-  </p:extLst>
-</p:sld>
-</file>
-
-<file path=ppt/slides/slide15.xml><?xml version="1.0" encoding="utf-8"?>
-<p:sld xmlns:a="http://schemas.openxmlformats.org/drawingml/2006/main" xmlns:r="http://schemas.openxmlformats.org/officeDocument/2006/relationships" xmlns:p="http://schemas.openxmlformats.org/presentationml/2006/main">
-  <p:cSld>
-    <p:spTree>
-      <p:nvGrpSpPr>
-        <p:cNvPr id="1" name="">
-          <a:extLst>
-            <a:ext uri="{FF2B5EF4-FFF2-40B4-BE49-F238E27FC236}">
-              <a16:creationId xmlns:a16="http://schemas.microsoft.com/office/drawing/2014/main" id="{4E5DEF85-FAA0-A884-49E4-D90F71A30E97}"/>
-            </a:ext>
-          </a:extLst>
-        </p:cNvPr>
-        <p:cNvGrpSpPr/>
-        <p:nvPr/>
-      </p:nvGrpSpPr>
-      <p:grpSpPr>
-        <a:xfrm>
-          <a:off x="0" y="0"/>
-          <a:ext cx="0" cy="0"/>
-          <a:chOff x="0" y="0"/>
-          <a:chExt cx="0" cy="0"/>
-        </a:xfrm>
-      </p:grpSpPr>
-      <p:sp>
-        <p:nvSpPr>
-          <p:cNvPr id="2" name="Title 1">
-            <a:extLst>
-              <a:ext uri="{FF2B5EF4-FFF2-40B4-BE49-F238E27FC236}">
-                <a16:creationId xmlns:a16="http://schemas.microsoft.com/office/drawing/2014/main" id="{2D635B58-763E-B189-503F-B8A6AECE0C14}"/>
-              </a:ext>
-            </a:extLst>
-          </p:cNvPr>
-          <p:cNvSpPr txBox="1">
-            <a:spLocks noGrp="1"/>
-          </p:cNvSpPr>
-          <p:nvPr>
-            <p:ph type="title" idx="4294967295"/>
-          </p:nvPr>
-        </p:nvSpPr>
-        <p:spPr>
-          <a:xfrm>
-            <a:off x="503999" y="422301"/>
-            <a:ext cx="9071640" cy="553998"/>
-          </a:xfrm>
-        </p:spPr>
-        <p:txBody>
-          <a:bodyPr>
-            <a:spAutoFit/>
-          </a:bodyPr>
-          <a:lstStyle/>
-          <a:p>
-            <a:pPr lvl="0"/>
-            <a:r>
-              <a:rPr lang="en-US" dirty="0">
-                <a:solidFill>
-                  <a:schemeClr val="bg1"/>
-                </a:solidFill>
-              </a:rPr>
-              <a:t>Change Detection Analysis</a:t>
-            </a:r>
-          </a:p>
-        </p:txBody>
-      </p:sp>
-      <p:sp>
-        <p:nvSpPr>
-          <p:cNvPr id="3" name="Text Placeholder 2">
-            <a:extLst>
-              <a:ext uri="{FF2B5EF4-FFF2-40B4-BE49-F238E27FC236}">
-                <a16:creationId xmlns:a16="http://schemas.microsoft.com/office/drawing/2014/main" id="{25E00617-F975-DE3A-0675-236E19993C53}"/>
-              </a:ext>
-            </a:extLst>
-          </p:cNvPr>
-          <p:cNvSpPr txBox="1">
-            <a:spLocks noGrp="1"/>
-          </p:cNvSpPr>
-          <p:nvPr>
-            <p:ph type="body" idx="4294967295"/>
-          </p:nvPr>
-        </p:nvSpPr>
-        <p:spPr/>
-        <p:txBody>
-          <a:bodyPr/>
-          <a:lstStyle/>
-          <a:p>
-            <a:pPr marL="342900" indent="-342900"/>
-            <a:r>
-              <a:rPr lang="en-US" dirty="0">
-                <a:solidFill>
-                  <a:schemeClr val="bg1"/>
-                </a:solidFill>
-              </a:rPr>
-              <a:t>Change Detection Analysis seeks to find how changes to individual model constants affect model outputs. </a:t>
-            </a:r>
-          </a:p>
-          <a:p>
-            <a:pPr marL="342900" indent="-342900"/>
-            <a:r>
-              <a:rPr lang="en-US" dirty="0">
-                <a:solidFill>
-                  <a:schemeClr val="bg1"/>
-                </a:solidFill>
-              </a:rPr>
-              <a:t>It does this by changing a single model constant across its range of values while holding all other model constants at their default values.</a:t>
-            </a:r>
-          </a:p>
-          <a:p>
-            <a:pPr marL="342900" indent="-342900"/>
-            <a:r>
-              <a:rPr lang="en-US" dirty="0">
-                <a:solidFill>
-                  <a:schemeClr val="bg1"/>
-                </a:solidFill>
-              </a:rPr>
-              <a:t>Provides a simple form of qualitative analysis (one-constant-at-a-time) but misses interactions among constants and their joint effect on output changes</a:t>
-            </a:r>
-          </a:p>
-        </p:txBody>
-      </p:sp>
-    </p:spTree>
-    <p:extLst>
-      <p:ext uri="{BB962C8B-B14F-4D97-AF65-F5344CB8AC3E}">
-        <p14:creationId xmlns:p14="http://schemas.microsoft.com/office/powerpoint/2010/main" val="4249625218"/>
-      </p:ext>
-    </p:extLst>
-  </p:cSld>
-  <p:clrMapOvr>
-    <a:masterClrMapping/>
-  </p:clrMapOvr>
-</p:sld>
-</file>
-
-<file path=ppt/slides/slide16.xml><?xml version="1.0" encoding="utf-8"?>
-<p:sld xmlns:a="http://schemas.openxmlformats.org/drawingml/2006/main" xmlns:r="http://schemas.openxmlformats.org/officeDocument/2006/relationships" xmlns:p="http://schemas.openxmlformats.org/presentationml/2006/main">
-  <p:cSld>
-    <p:spTree>
-      <p:nvGrpSpPr>
-        <p:cNvPr id="1" name="">
-          <a:extLst>
-            <a:ext uri="{FF2B5EF4-FFF2-40B4-BE49-F238E27FC236}">
-              <a16:creationId xmlns:a16="http://schemas.microsoft.com/office/drawing/2014/main" id="{ED31208B-2A05-1B86-73F0-EB143D2555E8}"/>
-            </a:ext>
-          </a:extLst>
-        </p:cNvPr>
-        <p:cNvGrpSpPr/>
-        <p:nvPr/>
-      </p:nvGrpSpPr>
-      <p:grpSpPr>
-        <a:xfrm>
-          <a:off x="0" y="0"/>
-          <a:ext cx="0" cy="0"/>
-          <a:chOff x="0" y="0"/>
-          <a:chExt cx="0" cy="0"/>
-        </a:xfrm>
-      </p:grpSpPr>
-      <p:sp>
-        <p:nvSpPr>
-          <p:cNvPr id="2" name="Title 1">
-            <a:extLst>
-              <a:ext uri="{FF2B5EF4-FFF2-40B4-BE49-F238E27FC236}">
-                <a16:creationId xmlns:a16="http://schemas.microsoft.com/office/drawing/2014/main" id="{8E7FE489-9349-DA38-F1AB-F4D40E20FA18}"/>
+                <a16:creationId xmlns:a16="http://schemas.microsoft.com/office/drawing/2014/main" id="{3BF6498E-98A7-DD6B-79FB-40EF89C7FFC8}"/>
               </a:ext>
             </a:extLst>
           </p:cNvPr>
@@ -7500,7 +8251,7 @@
                   <a:schemeClr val="bg1"/>
                 </a:solidFill>
               </a:rPr>
-              <a:t>Assumptions</a:t>
+              <a:t>DOI 5 Data</a:t>
             </a:r>
           </a:p>
         </p:txBody>
@@ -7510,7 +8261,7 @@
           <p:cNvPr id="3" name="Text Placeholder 2">
             <a:extLst>
               <a:ext uri="{FF2B5EF4-FFF2-40B4-BE49-F238E27FC236}">
-                <a16:creationId xmlns:a16="http://schemas.microsoft.com/office/drawing/2014/main" id="{1758AE0D-3928-68B2-851F-3466DEF4D1CE}"/>
+                <a16:creationId xmlns:a16="http://schemas.microsoft.com/office/drawing/2014/main" id="{31720598-1CB0-E7F3-3417-23A2488D52ED}"/>
               </a:ext>
             </a:extLst>
           </p:cNvPr>
@@ -7522,7 +8273,7 @@
         <p:spPr>
           <a:xfrm>
             <a:off x="503999" y="1326600"/>
-            <a:ext cx="9071640" cy="4022640"/>
+            <a:ext cx="9071640" cy="3288239"/>
           </a:xfrm>
           <a:prstGeom prst="rect">
             <a:avLst/>
@@ -7756,52 +8507,40 @@
                 <a:solidFill>
                   <a:schemeClr val="bg1"/>
                 </a:solidFill>
-              </a:rPr>
-              <a:t>Initial analysis was built on a few key assumptions. </a:t>
+                <a:latin typeface="AppleSystemUIFont" pitchFamily="2"/>
+              </a:rPr>
+              <a:t>DOI 5 results in 689,735 test cases when only changing the values of constants known to affect the outputs of </a:t>
+            </a:r>
+            <a:r>
+              <a:rPr lang="en-US" dirty="0" err="1">
+                <a:solidFill>
+                  <a:schemeClr val="bg1"/>
+                </a:solidFill>
+                <a:latin typeface="Courier New" panose="02070309020205020404" pitchFamily="49" charset="0"/>
+                <a:cs typeface="Courier New" panose="02070309020205020404" pitchFamily="49" charset="0"/>
+              </a:rPr>
+              <a:t>LakeTemperature</a:t>
+            </a:r>
+            <a:r>
+              <a:rPr lang="en-US" dirty="0">
+                <a:solidFill>
+                  <a:schemeClr val="bg1"/>
+                </a:solidFill>
+                <a:latin typeface="AppleSystemUIFont" pitchFamily="2"/>
+              </a:rPr>
+              <a:t>.</a:t>
             </a:r>
           </a:p>
           <a:p>
             <a:pPr marL="342900" indent="-342900"/>
             <a:r>
-              <a:rPr lang="en-US" dirty="0">
-                <a:solidFill>
-                  <a:schemeClr val="bg1"/>
-                </a:solidFill>
-              </a:rPr>
-              <a:t>First, not all the constants had an effect on the model outputs. </a:t>
-            </a:r>
-          </a:p>
-          <a:p>
-            <a:pPr marL="342900" indent="-342900"/>
-            <a:r>
-              <a:rPr lang="en-US" dirty="0">
-                <a:solidFill>
-                  <a:schemeClr val="bg1"/>
-                </a:solidFill>
-              </a:rPr>
-              <a:t>Second, model constants did not influence what values other model constants could take.</a:t>
-            </a:r>
-          </a:p>
-          <a:p>
-            <a:pPr marL="342900" indent="-342900"/>
-            <a:r>
-              <a:rPr lang="en-US" dirty="0">
-                <a:solidFill>
-                  <a:schemeClr val="bg1"/>
-                </a:solidFill>
-              </a:rPr>
-              <a:t>Third, model constants’ effects on model outputs aren’t determined by preconditions being met. </a:t>
-            </a:r>
-          </a:p>
-          <a:p>
-            <a:pPr marL="342900" indent="-342900"/>
-            <a:r>
-              <a:rPr lang="en-US" dirty="0">
-                <a:solidFill>
-                  <a:schemeClr val="bg1"/>
-                </a:solidFill>
-              </a:rPr>
-              <a:t>These assumptions underlie the initial results from the change detection analysis plugin. </a:t>
+              <a:rPr lang="en-US" i="1" dirty="0">
+                <a:solidFill>
+                  <a:schemeClr val="bg1"/>
+                </a:solidFill>
+                <a:latin typeface="AppleSystemUIFont" pitchFamily="2"/>
+              </a:rPr>
+              <a:t>How many combinatorial test cases generated, executed, passed, skipped, failed, crashed</a:t>
             </a:r>
           </a:p>
         </p:txBody>
@@ -7809,17 +8548,22 @@
     </p:spTree>
     <p:extLst>
       <p:ext uri="{BB962C8B-B14F-4D97-AF65-F5344CB8AC3E}">
-        <p14:creationId xmlns:p14="http://schemas.microsoft.com/office/powerpoint/2010/main" val="2898562490"/>
+        <p14:creationId xmlns:p14="http://schemas.microsoft.com/office/powerpoint/2010/main" val="3954683613"/>
       </p:ext>
     </p:extLst>
   </p:cSld>
   <p:clrMapOvr>
     <a:masterClrMapping/>
   </p:clrMapOvr>
+  <p:extLst>
+    <p:ext uri="{6950BFC3-D8DA-4A85-94F7-54DA5524770B}">
+      <p188:commentRel xmlns:p188="http://schemas.microsoft.com/office/powerpoint/2018/8/main" r:id="rId2"/>
+    </p:ext>
+  </p:extLst>
 </p:sld>
 </file>
 
-<file path=ppt/slides/slide17.xml><?xml version="1.0" encoding="utf-8"?>
+<file path=ppt/slides/slide2.xml><?xml version="1.0" encoding="utf-8"?>
 <p:sld xmlns:a="http://schemas.openxmlformats.org/drawingml/2006/main" xmlns:r="http://schemas.openxmlformats.org/officeDocument/2006/relationships" xmlns:p="http://schemas.openxmlformats.org/presentationml/2006/main">
   <p:cSld>
     <p:spTree>
@@ -7827,7 +8571,7 @@
         <p:cNvPr id="1" name="">
           <a:extLst>
             <a:ext uri="{FF2B5EF4-FFF2-40B4-BE49-F238E27FC236}">
-              <a16:creationId xmlns:a16="http://schemas.microsoft.com/office/drawing/2014/main" id="{6DE4F59C-6FFF-C3C6-285D-89E37A94AAE8}"/>
+              <a16:creationId xmlns:a16="http://schemas.microsoft.com/office/drawing/2014/main" id="{4E5DEF85-FAA0-A884-49E4-D90F71A30E97}"/>
             </a:ext>
           </a:extLst>
         </p:cNvPr>
@@ -7847,7 +8591,399 @@
           <p:cNvPr id="2" name="Title 1">
             <a:extLst>
               <a:ext uri="{FF2B5EF4-FFF2-40B4-BE49-F238E27FC236}">
-                <a16:creationId xmlns:a16="http://schemas.microsoft.com/office/drawing/2014/main" id="{95792ACF-8B91-65F3-C165-44BD25127222}"/>
+                <a16:creationId xmlns:a16="http://schemas.microsoft.com/office/drawing/2014/main" id="{2D635B58-763E-B189-503F-B8A6AECE0C14}"/>
+              </a:ext>
+            </a:extLst>
+          </p:cNvPr>
+          <p:cNvSpPr txBox="1">
+            <a:spLocks noGrp="1"/>
+          </p:cNvSpPr>
+          <p:nvPr>
+            <p:ph type="title" idx="4294967295"/>
+          </p:nvPr>
+        </p:nvSpPr>
+        <p:spPr>
+          <a:xfrm>
+            <a:off x="503999" y="422301"/>
+            <a:ext cx="9071640" cy="553998"/>
+          </a:xfrm>
+        </p:spPr>
+        <p:txBody>
+          <a:bodyPr>
+            <a:spAutoFit/>
+          </a:bodyPr>
+          <a:lstStyle/>
+          <a:p>
+            <a:pPr lvl="0"/>
+            <a:r>
+              <a:rPr lang="en-US" dirty="0">
+                <a:solidFill>
+                  <a:schemeClr val="bg1"/>
+                </a:solidFill>
+              </a:rPr>
+              <a:t>Change Detection Analysis</a:t>
+            </a:r>
+          </a:p>
+        </p:txBody>
+      </p:sp>
+      <p:sp>
+        <p:nvSpPr>
+          <p:cNvPr id="3" name="Text Placeholder 2">
+            <a:extLst>
+              <a:ext uri="{FF2B5EF4-FFF2-40B4-BE49-F238E27FC236}">
+                <a16:creationId xmlns:a16="http://schemas.microsoft.com/office/drawing/2014/main" id="{25E00617-F975-DE3A-0675-236E19993C53}"/>
+              </a:ext>
+            </a:extLst>
+          </p:cNvPr>
+          <p:cNvSpPr txBox="1">
+            <a:spLocks noGrp="1"/>
+          </p:cNvSpPr>
+          <p:nvPr>
+            <p:ph type="body" idx="4294967295"/>
+          </p:nvPr>
+        </p:nvSpPr>
+        <p:spPr/>
+        <p:txBody>
+          <a:bodyPr/>
+          <a:lstStyle/>
+          <a:p>
+            <a:pPr marL="342900" indent="-342900"/>
+            <a:r>
+              <a:rPr lang="en-US" dirty="0">
+                <a:solidFill>
+                  <a:schemeClr val="bg1"/>
+                </a:solidFill>
+              </a:rPr>
+              <a:t>Change Detection Analysis seeks to find how changes to individual model constants affect model outputs. </a:t>
+            </a:r>
+          </a:p>
+          <a:p>
+            <a:pPr marL="342900" indent="-342900"/>
+            <a:r>
+              <a:rPr lang="en-US" dirty="0">
+                <a:solidFill>
+                  <a:schemeClr val="bg1"/>
+                </a:solidFill>
+              </a:rPr>
+              <a:t>It does this by changing a single model constant across its range of values while holding all other model constants at their default values.</a:t>
+            </a:r>
+          </a:p>
+          <a:p>
+            <a:pPr marL="342900" indent="-342900"/>
+            <a:r>
+              <a:rPr lang="en-US" dirty="0">
+                <a:solidFill>
+                  <a:schemeClr val="bg1"/>
+                </a:solidFill>
+              </a:rPr>
+              <a:t>Provides a simple form of qualitative analysis (one-constant-at-a-time) but misses interactions among constants and their joint effect on output changes</a:t>
+            </a:r>
+          </a:p>
+        </p:txBody>
+      </p:sp>
+    </p:spTree>
+    <p:extLst>
+      <p:ext uri="{BB962C8B-B14F-4D97-AF65-F5344CB8AC3E}">
+        <p14:creationId xmlns:p14="http://schemas.microsoft.com/office/powerpoint/2010/main" val="4249625218"/>
+      </p:ext>
+    </p:extLst>
+  </p:cSld>
+  <p:clrMapOvr>
+    <a:masterClrMapping/>
+  </p:clrMapOvr>
+</p:sld>
+</file>
+
+<file path=ppt/slides/slide20.xml><?xml version="1.0" encoding="utf-8"?>
+<p:sld xmlns:a="http://schemas.openxmlformats.org/drawingml/2006/main" xmlns:r="http://schemas.openxmlformats.org/officeDocument/2006/relationships" xmlns:p="http://schemas.openxmlformats.org/presentationml/2006/main">
+  <p:cSld name="page10">
+    <p:spTree>
+      <p:nvGrpSpPr>
+        <p:cNvPr id="1" name=""/>
+        <p:cNvGrpSpPr/>
+        <p:nvPr/>
+      </p:nvGrpSpPr>
+      <p:grpSpPr>
+        <a:xfrm>
+          <a:off x="0" y="0"/>
+          <a:ext cx="0" cy="0"/>
+          <a:chOff x="0" y="0"/>
+          <a:chExt cx="0" cy="0"/>
+        </a:xfrm>
+      </p:grpSpPr>
+      <p:sp>
+        <p:nvSpPr>
+          <p:cNvPr id="2" name="Title 1">
+            <a:extLst>
+              <a:ext uri="{FF2B5EF4-FFF2-40B4-BE49-F238E27FC236}">
+                <a16:creationId xmlns:a16="http://schemas.microsoft.com/office/drawing/2014/main" id="{96CB14EF-3B5C-5292-14CB-3720F1B94FC4}"/>
+              </a:ext>
+            </a:extLst>
+          </p:cNvPr>
+          <p:cNvSpPr txBox="1">
+            <a:spLocks noGrp="1"/>
+          </p:cNvSpPr>
+          <p:nvPr>
+            <p:ph type="title" idx="4294967295"/>
+          </p:nvPr>
+        </p:nvSpPr>
+        <p:spPr>
+          <a:xfrm>
+            <a:off x="503999" y="422301"/>
+            <a:ext cx="9071640" cy="553998"/>
+          </a:xfrm>
+        </p:spPr>
+        <p:txBody>
+          <a:bodyPr>
+            <a:spAutoFit/>
+          </a:bodyPr>
+          <a:lstStyle/>
+          <a:p>
+            <a:pPr lvl="0"/>
+            <a:r>
+              <a:rPr lang="en-US" dirty="0">
+                <a:solidFill>
+                  <a:schemeClr val="bg1"/>
+                </a:solidFill>
+              </a:rPr>
+              <a:t>Findings from Testing</a:t>
+            </a:r>
+          </a:p>
+        </p:txBody>
+      </p:sp>
+      <p:sp>
+        <p:nvSpPr>
+          <p:cNvPr id="3" name="Text Placeholder 2">
+            <a:extLst>
+              <a:ext uri="{FF2B5EF4-FFF2-40B4-BE49-F238E27FC236}">
+                <a16:creationId xmlns:a16="http://schemas.microsoft.com/office/drawing/2014/main" id="{C9367797-CD5B-309B-985B-DF6091246510}"/>
+              </a:ext>
+            </a:extLst>
+          </p:cNvPr>
+          <p:cNvSpPr txBox="1">
+            <a:spLocks noGrp="1"/>
+          </p:cNvSpPr>
+          <p:nvPr>
+            <p:ph type="body" idx="4294967295"/>
+          </p:nvPr>
+        </p:nvSpPr>
+        <p:spPr>
+          <a:xfrm>
+            <a:off x="503998" y="1326600"/>
+            <a:ext cx="9071639" cy="3921649"/>
+          </a:xfrm>
+        </p:spPr>
+        <p:txBody>
+          <a:bodyPr>
+            <a:normAutofit fontScale="92500" lnSpcReduction="10000"/>
+          </a:bodyPr>
+          <a:lstStyle/>
+          <a:p>
+            <a:pPr marL="342900" indent="-342900"/>
+            <a:r>
+              <a:rPr lang="en-US" dirty="0">
+                <a:solidFill>
+                  <a:schemeClr val="bg1"/>
+                </a:solidFill>
+              </a:rPr>
+              <a:t>Our test cases originally had invalid values for constants, causing crashes. </a:t>
+            </a:r>
+          </a:p>
+          <a:p>
+            <a:pPr marL="342900" indent="-342900"/>
+            <a:r>
+              <a:rPr lang="en-US" dirty="0">
+                <a:solidFill>
+                  <a:schemeClr val="bg1"/>
+                </a:solidFill>
+              </a:rPr>
+              <a:t>Some checks were interpreted incorrectly by us and had to be fixed. </a:t>
+            </a:r>
+          </a:p>
+          <a:p>
+            <a:pPr marL="342900" indent="-342900"/>
+            <a:r>
+              <a:rPr lang="en-US" dirty="0">
+                <a:solidFill>
+                  <a:schemeClr val="bg1"/>
+                </a:solidFill>
+              </a:rPr>
+              <a:t>Tests checking for things other than non-finite values had to ignore non-finite values, otherwise they’d fail and output an inaccurate error message.</a:t>
+            </a:r>
+          </a:p>
+          <a:p>
+            <a:pPr marL="342900" indent="-342900"/>
+            <a:r>
+              <a:rPr lang="en-US" dirty="0">
+                <a:solidFill>
+                  <a:schemeClr val="bg1"/>
+                </a:solidFill>
+              </a:rPr>
+              <a:t>SPEL</a:t>
+            </a:r>
+            <a:r>
+              <a:rPr lang="en-US" i="1" dirty="0">
+                <a:solidFill>
+                  <a:schemeClr val="bg1"/>
+                </a:solidFill>
+              </a:rPr>
+              <a:t> </a:t>
+            </a:r>
+            <a:r>
+              <a:rPr lang="en-US" dirty="0">
+                <a:solidFill>
+                  <a:schemeClr val="bg1"/>
+                </a:solidFill>
+              </a:rPr>
+              <a:t>might be initializing data with </a:t>
+            </a:r>
+            <a:r>
+              <a:rPr lang="en-US" dirty="0" err="1">
+                <a:solidFill>
+                  <a:schemeClr val="bg1"/>
+                </a:solidFill>
+              </a:rPr>
+              <a:t>NaN</a:t>
+            </a:r>
+            <a:r>
+              <a:rPr lang="en-US" dirty="0">
+                <a:solidFill>
+                  <a:schemeClr val="bg1"/>
+                </a:solidFill>
+              </a:rPr>
+              <a:t> values that </a:t>
+            </a:r>
+            <a:r>
+              <a:rPr lang="en-US" dirty="0" err="1">
+                <a:solidFill>
+                  <a:schemeClr val="bg1"/>
+                </a:solidFill>
+                <a:latin typeface="Courier New" panose="02070309020205020404" pitchFamily="49" charset="0"/>
+                <a:cs typeface="Courier New" panose="02070309020205020404" pitchFamily="49" charset="0"/>
+              </a:rPr>
+              <a:t>LakeTemperature</a:t>
+            </a:r>
+            <a:r>
+              <a:rPr lang="en-US" dirty="0">
+                <a:solidFill>
+                  <a:schemeClr val="bg1"/>
+                </a:solidFill>
+              </a:rPr>
+              <a:t> then never overwrites or </a:t>
+            </a:r>
+            <a:r>
+              <a:rPr lang="en-US" dirty="0" err="1">
+                <a:solidFill>
+                  <a:schemeClr val="bg1"/>
+                </a:solidFill>
+                <a:latin typeface="Courier New" panose="02070309020205020404" pitchFamily="49" charset="0"/>
+                <a:cs typeface="Courier New" panose="02070309020205020404" pitchFamily="49" charset="0"/>
+              </a:rPr>
+              <a:t>LakeTemperature</a:t>
+            </a:r>
+            <a:r>
+              <a:rPr lang="en-US" dirty="0">
+                <a:solidFill>
+                  <a:schemeClr val="bg1"/>
+                </a:solidFill>
+              </a:rPr>
+              <a:t> might be outputting data with </a:t>
+            </a:r>
+            <a:r>
+              <a:rPr lang="en-US" dirty="0" err="1">
+                <a:solidFill>
+                  <a:schemeClr val="bg1"/>
+                </a:solidFill>
+              </a:rPr>
+              <a:t>NaN</a:t>
+            </a:r>
+            <a:r>
+              <a:rPr lang="en-US" dirty="0">
+                <a:solidFill>
+                  <a:schemeClr val="bg1"/>
+                </a:solidFill>
+              </a:rPr>
+              <a:t> values. </a:t>
+            </a:r>
+            <a:endParaRPr lang="en-US" i="1" dirty="0">
+              <a:solidFill>
+                <a:schemeClr val="bg1"/>
+              </a:solidFill>
+            </a:endParaRPr>
+          </a:p>
+          <a:p>
+            <a:pPr marL="342900" indent="-342900"/>
+            <a:r>
+              <a:rPr lang="en-US" dirty="0">
+                <a:solidFill>
+                  <a:schemeClr val="bg1"/>
+                </a:solidFill>
+              </a:rPr>
+              <a:t>Largely, </a:t>
+            </a:r>
+            <a:r>
+              <a:rPr lang="en-US" dirty="0" err="1">
+                <a:solidFill>
+                  <a:schemeClr val="bg1"/>
+                </a:solidFill>
+                <a:latin typeface="Courier New" panose="02070309020205020404" pitchFamily="49" charset="0"/>
+                <a:cs typeface="Courier New" panose="02070309020205020404" pitchFamily="49" charset="0"/>
+              </a:rPr>
+              <a:t>LakeTemperature</a:t>
+            </a:r>
+            <a:r>
+              <a:rPr lang="en-US" dirty="0">
+                <a:solidFill>
+                  <a:schemeClr val="bg1"/>
+                </a:solidFill>
+              </a:rPr>
+              <a:t> output data was valid and within physical bounds. However, edge cases resulted in some physically impossible outputs, likely due to combinations between a few model constants. </a:t>
+            </a:r>
+          </a:p>
+        </p:txBody>
+      </p:sp>
+    </p:spTree>
+  </p:cSld>
+  <p:clrMapOvr>
+    <a:masterClrMapping/>
+  </p:clrMapOvr>
+  <p:extLst>
+    <p:ext uri="{6950BFC3-D8DA-4A85-94F7-54DA5524770B}">
+      <p188:commentRel xmlns:p188="http://schemas.microsoft.com/office/powerpoint/2018/8/main" r:id="rId3"/>
+    </p:ext>
+  </p:extLst>
+</p:sld>
+</file>
+
+<file path=ppt/slides/slide3.xml><?xml version="1.0" encoding="utf-8"?>
+<p:sld xmlns:a="http://schemas.openxmlformats.org/drawingml/2006/main" xmlns:r="http://schemas.openxmlformats.org/officeDocument/2006/relationships" xmlns:p="http://schemas.openxmlformats.org/presentationml/2006/main">
+  <p:cSld>
+    <p:spTree>
+      <p:nvGrpSpPr>
+        <p:cNvPr id="1" name="">
+          <a:extLst>
+            <a:ext uri="{FF2B5EF4-FFF2-40B4-BE49-F238E27FC236}">
+              <a16:creationId xmlns:a16="http://schemas.microsoft.com/office/drawing/2014/main" id="{ED31208B-2A05-1B86-73F0-EB143D2555E8}"/>
+            </a:ext>
+          </a:extLst>
+        </p:cNvPr>
+        <p:cNvGrpSpPr/>
+        <p:nvPr/>
+      </p:nvGrpSpPr>
+      <p:grpSpPr>
+        <a:xfrm>
+          <a:off x="0" y="0"/>
+          <a:ext cx="0" cy="0"/>
+          <a:chOff x="0" y="0"/>
+          <a:chExt cx="0" cy="0"/>
+        </a:xfrm>
+      </p:grpSpPr>
+      <p:sp>
+        <p:nvSpPr>
+          <p:cNvPr id="2" name="Title 1">
+            <a:extLst>
+              <a:ext uri="{FF2B5EF4-FFF2-40B4-BE49-F238E27FC236}">
+                <a16:creationId xmlns:a16="http://schemas.microsoft.com/office/drawing/2014/main" id="{8E7FE489-9349-DA38-F1AB-F4D40E20FA18}"/>
               </a:ext>
             </a:extLst>
           </p:cNvPr>
@@ -7899,7 +9035,7 @@
                   <a:schemeClr val="bg1"/>
                 </a:solidFill>
               </a:rPr>
-              <a:t>Rationale</a:t>
+              <a:t>Assumptions</a:t>
             </a:r>
           </a:p>
         </p:txBody>
@@ -7909,7 +9045,7 @@
           <p:cNvPr id="3" name="Text Placeholder 2">
             <a:extLst>
               <a:ext uri="{FF2B5EF4-FFF2-40B4-BE49-F238E27FC236}">
-                <a16:creationId xmlns:a16="http://schemas.microsoft.com/office/drawing/2014/main" id="{4C9AF8C3-95D2-3D5A-AB6D-61F870774A13}"/>
+                <a16:creationId xmlns:a16="http://schemas.microsoft.com/office/drawing/2014/main" id="{1758AE0D-3928-68B2-851F-3466DEF4D1CE}"/>
               </a:ext>
             </a:extLst>
           </p:cNvPr>
@@ -8156,6 +9292,405 @@
                   <a:schemeClr val="bg1"/>
                 </a:solidFill>
               </a:rPr>
+              <a:t>Initial analysis was built on a few key assumptions. </a:t>
+            </a:r>
+          </a:p>
+          <a:p>
+            <a:pPr marL="342900" indent="-342900"/>
+            <a:r>
+              <a:rPr lang="en-US" dirty="0">
+                <a:solidFill>
+                  <a:schemeClr val="bg1"/>
+                </a:solidFill>
+              </a:rPr>
+              <a:t>First, not all the constants had an effect on the model outputs. </a:t>
+            </a:r>
+          </a:p>
+          <a:p>
+            <a:pPr marL="342900" indent="-342900"/>
+            <a:r>
+              <a:rPr lang="en-US" dirty="0">
+                <a:solidFill>
+                  <a:schemeClr val="bg1"/>
+                </a:solidFill>
+              </a:rPr>
+              <a:t>Second, model constants did not influence what values other model constants could take.</a:t>
+            </a:r>
+          </a:p>
+          <a:p>
+            <a:pPr marL="342900" indent="-342900"/>
+            <a:r>
+              <a:rPr lang="en-US" dirty="0">
+                <a:solidFill>
+                  <a:schemeClr val="bg1"/>
+                </a:solidFill>
+              </a:rPr>
+              <a:t>Third, model constants’ effects on model outputs aren’t determined by preconditions being met. </a:t>
+            </a:r>
+          </a:p>
+          <a:p>
+            <a:pPr marL="342900" indent="-342900"/>
+            <a:r>
+              <a:rPr lang="en-US" dirty="0">
+                <a:solidFill>
+                  <a:schemeClr val="bg1"/>
+                </a:solidFill>
+              </a:rPr>
+              <a:t>These assumptions underlie the initial results from the change detection analysis plugin. </a:t>
+            </a:r>
+          </a:p>
+        </p:txBody>
+      </p:sp>
+    </p:spTree>
+    <p:extLst>
+      <p:ext uri="{BB962C8B-B14F-4D97-AF65-F5344CB8AC3E}">
+        <p14:creationId xmlns:p14="http://schemas.microsoft.com/office/powerpoint/2010/main" val="2898562490"/>
+      </p:ext>
+    </p:extLst>
+  </p:cSld>
+  <p:clrMapOvr>
+    <a:masterClrMapping/>
+  </p:clrMapOvr>
+</p:sld>
+</file>
+
+<file path=ppt/slides/slide4.xml><?xml version="1.0" encoding="utf-8"?>
+<p:sld xmlns:a="http://schemas.openxmlformats.org/drawingml/2006/main" xmlns:r="http://schemas.openxmlformats.org/officeDocument/2006/relationships" xmlns:p="http://schemas.openxmlformats.org/presentationml/2006/main">
+  <p:cSld>
+    <p:spTree>
+      <p:nvGrpSpPr>
+        <p:cNvPr id="1" name="">
+          <a:extLst>
+            <a:ext uri="{FF2B5EF4-FFF2-40B4-BE49-F238E27FC236}">
+              <a16:creationId xmlns:a16="http://schemas.microsoft.com/office/drawing/2014/main" id="{6DE4F59C-6FFF-C3C6-285D-89E37A94AAE8}"/>
+            </a:ext>
+          </a:extLst>
+        </p:cNvPr>
+        <p:cNvGrpSpPr/>
+        <p:nvPr/>
+      </p:nvGrpSpPr>
+      <p:grpSpPr>
+        <a:xfrm>
+          <a:off x="0" y="0"/>
+          <a:ext cx="0" cy="0"/>
+          <a:chOff x="0" y="0"/>
+          <a:chExt cx="0" cy="0"/>
+        </a:xfrm>
+      </p:grpSpPr>
+      <p:sp>
+        <p:nvSpPr>
+          <p:cNvPr id="2" name="Title 1">
+            <a:extLst>
+              <a:ext uri="{FF2B5EF4-FFF2-40B4-BE49-F238E27FC236}">
+                <a16:creationId xmlns:a16="http://schemas.microsoft.com/office/drawing/2014/main" id="{95792ACF-8B91-65F3-C165-44BD25127222}"/>
+              </a:ext>
+            </a:extLst>
+          </p:cNvPr>
+          <p:cNvSpPr txBox="1">
+            <a:spLocks/>
+          </p:cNvSpPr>
+          <p:nvPr/>
+        </p:nvSpPr>
+        <p:spPr>
+          <a:xfrm>
+            <a:off x="503999" y="422301"/>
+            <a:ext cx="9071640" cy="553998"/>
+          </a:xfrm>
+          <a:prstGeom prst="rect">
+            <a:avLst/>
+          </a:prstGeom>
+          <a:noFill/>
+          <a:ln>
+            <a:noFill/>
+          </a:ln>
+        </p:spPr>
+        <p:txBody>
+          <a:bodyPr vert="horz" lIns="0" tIns="0" rIns="0" bIns="0" anchor="ctr">
+            <a:spAutoFit/>
+          </a:bodyPr>
+          <a:lstStyle>
+            <a:lvl1pPr lvl="0" algn="ctr" rtl="0" hangingPunct="0">
+              <a:buNone/>
+              <a:tabLst/>
+              <a:defRPr lang="en-US" sz="3600" b="0" i="0" u="none" strike="noStrike" kern="1200" cap="none">
+                <a:ln>
+                  <a:noFill/>
+                </a:ln>
+                <a:highlight>
+                  <a:scrgbClr r="0" g="0" b="0">
+                    <a:alpha val="0"/>
+                  </a:scrgbClr>
+                </a:highlight>
+                <a:latin typeface="URW Bookman" pitchFamily="2"/>
+                <a:ea typeface="Nimbus Sans" pitchFamily="2"/>
+                <a:cs typeface="FreeSans" pitchFamily="2"/>
+              </a:defRPr>
+            </a:lvl1pPr>
+          </a:lstStyle>
+          <a:p>
+            <a:r>
+              <a:rPr lang="en-US" dirty="0">
+                <a:solidFill>
+                  <a:schemeClr val="bg1"/>
+                </a:solidFill>
+              </a:rPr>
+              <a:t>Rationale</a:t>
+            </a:r>
+          </a:p>
+        </p:txBody>
+      </p:sp>
+      <p:sp>
+        <p:nvSpPr>
+          <p:cNvPr id="3" name="Text Placeholder 2">
+            <a:extLst>
+              <a:ext uri="{FF2B5EF4-FFF2-40B4-BE49-F238E27FC236}">
+                <a16:creationId xmlns:a16="http://schemas.microsoft.com/office/drawing/2014/main" id="{4C9AF8C3-95D2-3D5A-AB6D-61F870774A13}"/>
+              </a:ext>
+            </a:extLst>
+          </p:cNvPr>
+          <p:cNvSpPr txBox="1">
+            <a:spLocks/>
+          </p:cNvSpPr>
+          <p:nvPr/>
+        </p:nvSpPr>
+        <p:spPr>
+          <a:xfrm>
+            <a:off x="503999" y="1326600"/>
+            <a:ext cx="9071640" cy="4022640"/>
+          </a:xfrm>
+          <a:prstGeom prst="rect">
+            <a:avLst/>
+          </a:prstGeom>
+          <a:noFill/>
+          <a:ln>
+            <a:noFill/>
+          </a:ln>
+        </p:spPr>
+        <p:txBody>
+          <a:bodyPr vert="horz" lIns="0" tIns="0" rIns="0" bIns="0">
+            <a:normAutofit/>
+          </a:bodyPr>
+          <a:lstStyle>
+            <a:lvl1pPr lvl="0" rtl="0" hangingPunct="0">
+              <a:spcBef>
+                <a:spcPts val="1417"/>
+              </a:spcBef>
+              <a:spcAft>
+                <a:spcPts val="0"/>
+              </a:spcAft>
+              <a:buSzPct val="45000"/>
+              <a:buFont typeface="OpenSymbol"/>
+              <a:buChar char="●"/>
+              <a:tabLst/>
+              <a:defRPr lang="en-US" sz="2400" b="0" i="0" u="none" strike="noStrike" kern="1200" cap="none">
+                <a:ln>
+                  <a:noFill/>
+                </a:ln>
+                <a:highlight>
+                  <a:scrgbClr r="0" g="0" b="0">
+                    <a:alpha val="0"/>
+                  </a:scrgbClr>
+                </a:highlight>
+                <a:latin typeface="URW Bookman" pitchFamily="2"/>
+                <a:ea typeface="Nimbus Sans" pitchFamily="2"/>
+                <a:cs typeface="FreeSans" pitchFamily="2"/>
+              </a:defRPr>
+            </a:lvl1pPr>
+            <a:lvl2pPr lvl="1" rtl="0" hangingPunct="0">
+              <a:spcBef>
+                <a:spcPts val="1417"/>
+              </a:spcBef>
+              <a:spcAft>
+                <a:spcPts val="0"/>
+              </a:spcAft>
+              <a:buSzPct val="75000"/>
+              <a:buFont typeface="OpenSymbol"/>
+              <a:buChar char="–"/>
+              <a:tabLst/>
+              <a:defRPr lang="en-US" sz="2400" b="0" i="0" u="none" strike="noStrike" kern="1200" cap="none">
+                <a:ln>
+                  <a:noFill/>
+                </a:ln>
+                <a:highlight>
+                  <a:scrgbClr r="0" g="0" b="0">
+                    <a:alpha val="0"/>
+                  </a:scrgbClr>
+                </a:highlight>
+                <a:latin typeface="URW Bookman" pitchFamily="2"/>
+                <a:ea typeface="Nimbus Sans" pitchFamily="2"/>
+                <a:cs typeface="FreeSans" pitchFamily="2"/>
+              </a:defRPr>
+            </a:lvl2pPr>
+            <a:lvl3pPr lvl="2" rtl="0" hangingPunct="0">
+              <a:spcBef>
+                <a:spcPts val="1417"/>
+              </a:spcBef>
+              <a:spcAft>
+                <a:spcPts val="0"/>
+              </a:spcAft>
+              <a:buSzPct val="45000"/>
+              <a:buFont typeface="OpenSymbol"/>
+              <a:buChar char="●"/>
+              <a:tabLst/>
+              <a:defRPr lang="en-US" sz="2400" b="0" i="0" u="none" strike="noStrike" kern="1200" cap="none">
+                <a:ln>
+                  <a:noFill/>
+                </a:ln>
+                <a:highlight>
+                  <a:scrgbClr r="0" g="0" b="0">
+                    <a:alpha val="0"/>
+                  </a:scrgbClr>
+                </a:highlight>
+                <a:latin typeface="URW Bookman" pitchFamily="2"/>
+                <a:ea typeface="Nimbus Sans" pitchFamily="2"/>
+                <a:cs typeface="FreeSans" pitchFamily="2"/>
+              </a:defRPr>
+            </a:lvl3pPr>
+            <a:lvl4pPr lvl="3" rtl="0" hangingPunct="0">
+              <a:spcBef>
+                <a:spcPts val="1417"/>
+              </a:spcBef>
+              <a:spcAft>
+                <a:spcPts val="0"/>
+              </a:spcAft>
+              <a:buSzPct val="75000"/>
+              <a:buFont typeface="OpenSymbol"/>
+              <a:buChar char="–"/>
+              <a:tabLst/>
+              <a:defRPr lang="en-US" sz="2400" b="0" i="0" u="none" strike="noStrike" kern="1200" cap="none">
+                <a:ln>
+                  <a:noFill/>
+                </a:ln>
+                <a:highlight>
+                  <a:scrgbClr r="0" g="0" b="0">
+                    <a:alpha val="0"/>
+                  </a:scrgbClr>
+                </a:highlight>
+                <a:latin typeface="URW Bookman" pitchFamily="2"/>
+                <a:ea typeface="Nimbus Sans" pitchFamily="2"/>
+                <a:cs typeface="FreeSans" pitchFamily="2"/>
+              </a:defRPr>
+            </a:lvl4pPr>
+            <a:lvl5pPr lvl="4" rtl="0" hangingPunct="0">
+              <a:spcBef>
+                <a:spcPts val="1417"/>
+              </a:spcBef>
+              <a:spcAft>
+                <a:spcPts val="0"/>
+              </a:spcAft>
+              <a:buSzPct val="45000"/>
+              <a:buFont typeface="OpenSymbol"/>
+              <a:buChar char="●"/>
+              <a:tabLst/>
+              <a:defRPr lang="en-US" sz="2400" b="0" i="0" u="none" strike="noStrike" kern="1200" cap="none">
+                <a:ln>
+                  <a:noFill/>
+                </a:ln>
+                <a:highlight>
+                  <a:scrgbClr r="0" g="0" b="0">
+                    <a:alpha val="0"/>
+                  </a:scrgbClr>
+                </a:highlight>
+                <a:latin typeface="URW Bookman" pitchFamily="2"/>
+                <a:ea typeface="Nimbus Sans" pitchFamily="2"/>
+                <a:cs typeface="FreeSans" pitchFamily="2"/>
+              </a:defRPr>
+            </a:lvl5pPr>
+            <a:lvl6pPr lvl="5" rtl="0" hangingPunct="0">
+              <a:spcBef>
+                <a:spcPts val="1417"/>
+              </a:spcBef>
+              <a:spcAft>
+                <a:spcPts val="0"/>
+              </a:spcAft>
+              <a:buSzPct val="45000"/>
+              <a:buFont typeface="OpenSymbol"/>
+              <a:buChar char="●"/>
+              <a:tabLst/>
+              <a:defRPr lang="en-US" sz="2400" b="0" i="0" u="none" strike="noStrike" kern="1200" cap="none">
+                <a:ln>
+                  <a:noFill/>
+                </a:ln>
+                <a:highlight>
+                  <a:scrgbClr r="0" g="0" b="0">
+                    <a:alpha val="0"/>
+                  </a:scrgbClr>
+                </a:highlight>
+                <a:latin typeface="URW Bookman" pitchFamily="2"/>
+                <a:ea typeface="Nimbus Sans" pitchFamily="2"/>
+                <a:cs typeface="FreeSans" pitchFamily="2"/>
+              </a:defRPr>
+            </a:lvl6pPr>
+            <a:lvl7pPr lvl="6" rtl="0" hangingPunct="0">
+              <a:spcBef>
+                <a:spcPts val="1417"/>
+              </a:spcBef>
+              <a:spcAft>
+                <a:spcPts val="0"/>
+              </a:spcAft>
+              <a:buSzPct val="45000"/>
+              <a:buFont typeface="OpenSymbol"/>
+              <a:buChar char="●"/>
+              <a:tabLst/>
+              <a:defRPr lang="en-US" sz="2400" b="0" i="0" u="none" strike="noStrike" kern="1200" cap="none">
+                <a:ln>
+                  <a:noFill/>
+                </a:ln>
+                <a:highlight>
+                  <a:scrgbClr r="0" g="0" b="0">
+                    <a:alpha val="0"/>
+                  </a:scrgbClr>
+                </a:highlight>
+                <a:latin typeface="URW Bookman" pitchFamily="2"/>
+                <a:ea typeface="Nimbus Sans" pitchFamily="2"/>
+                <a:cs typeface="FreeSans" pitchFamily="2"/>
+              </a:defRPr>
+            </a:lvl7pPr>
+            <a:lvl8pPr marL="3429000" indent="-228600" algn="l" defTabSz="914400" rtl="0" eaLnBrk="1" latinLnBrk="0" hangingPunct="1">
+              <a:lnSpc>
+                <a:spcPct val="90000"/>
+              </a:lnSpc>
+              <a:spcBef>
+                <a:spcPts val="500"/>
+              </a:spcBef>
+              <a:buFont typeface="Arial" panose="020B0604020202020204" pitchFamily="34" charset="0"/>
+              <a:buChar char="•"/>
+              <a:defRPr sz="1800" kern="1200">
+                <a:solidFill>
+                  <a:schemeClr val="tx1"/>
+                </a:solidFill>
+                <a:latin typeface="+mn-lt"/>
+                <a:ea typeface="+mn-ea"/>
+                <a:cs typeface="+mn-cs"/>
+              </a:defRPr>
+            </a:lvl8pPr>
+            <a:lvl9pPr marL="3886200" indent="-228600" algn="l" defTabSz="914400" rtl="0" eaLnBrk="1" latinLnBrk="0" hangingPunct="1">
+              <a:lnSpc>
+                <a:spcPct val="90000"/>
+              </a:lnSpc>
+              <a:spcBef>
+                <a:spcPts val="500"/>
+              </a:spcBef>
+              <a:buFont typeface="Arial" panose="020B0604020202020204" pitchFamily="34" charset="0"/>
+              <a:buChar char="•"/>
+              <a:defRPr sz="1800" kern="1200">
+                <a:solidFill>
+                  <a:schemeClr val="tx1"/>
+                </a:solidFill>
+                <a:latin typeface="+mn-lt"/>
+                <a:ea typeface="+mn-ea"/>
+                <a:cs typeface="+mn-cs"/>
+              </a:defRPr>
+            </a:lvl9pPr>
+          </a:lstStyle>
+          <a:p>
+            <a:pPr marL="342900" indent="-342900"/>
+            <a:r>
+              <a:rPr lang="en-US" dirty="0">
+                <a:solidFill>
+                  <a:schemeClr val="bg1"/>
+                </a:solidFill>
+              </a:rPr>
               <a:t>To determine which model constants affect which model outputs, 11 cases were created for every model constant, where all model constants were held at their default values except the one which was being tested, which was linearly interpolated to get 11 values evenly spread across its valid range. </a:t>
             </a:r>
           </a:p>
@@ -8185,7 +9720,7 @@
 </p:sld>
 </file>
 
-<file path=ppt/slides/slide18.xml><?xml version="1.0" encoding="utf-8"?>
+<file path=ppt/slides/slide5.xml><?xml version="1.0" encoding="utf-8"?>
 <p:sld xmlns:a="http://schemas.openxmlformats.org/drawingml/2006/main" xmlns:r="http://schemas.openxmlformats.org/officeDocument/2006/relationships" xmlns:p="http://schemas.openxmlformats.org/presentationml/2006/main">
   <p:cSld>
     <p:spTree>
@@ -8582,7 +10117,7 @@
 </p:sld>
 </file>
 
-<file path=ppt/slides/slide19.xml><?xml version="1.0" encoding="utf-8"?>
+<file path=ppt/slides/slide6.xml><?xml version="1.0" encoding="utf-8"?>
 <p:sld xmlns:a="http://schemas.openxmlformats.org/drawingml/2006/main" xmlns:r="http://schemas.openxmlformats.org/officeDocument/2006/relationships" xmlns:p="http://schemas.openxmlformats.org/presentationml/2006/main">
   <p:cSld>
     <p:spTree>
@@ -8988,12 +10523,18 @@
 </p:sld>
 </file>
 
-<file path=ppt/slides/slide2.xml><?xml version="1.0" encoding="utf-8"?>
+<file path=ppt/slides/slide7.xml><?xml version="1.0" encoding="utf-8"?>
 <p:sld xmlns:a="http://schemas.openxmlformats.org/drawingml/2006/main" xmlns:r="http://schemas.openxmlformats.org/officeDocument/2006/relationships" xmlns:p="http://schemas.openxmlformats.org/presentationml/2006/main">
   <p:cSld>
     <p:spTree>
       <p:nvGrpSpPr>
-        <p:cNvPr id="1" name=""/>
+        <p:cNvPr id="1" name="">
+          <a:extLst>
+            <a:ext uri="{FF2B5EF4-FFF2-40B4-BE49-F238E27FC236}">
+              <a16:creationId xmlns:a16="http://schemas.microsoft.com/office/drawing/2014/main" id="{28210578-CC0F-D325-9650-3E80E2459D87}"/>
+            </a:ext>
+          </a:extLst>
+        </p:cNvPr>
         <p:cNvGrpSpPr/>
         <p:nvPr/>
       </p:nvGrpSpPr>
@@ -9010,7 +10551,7 @@
           <p:cNvPr id="2" name="Title 1">
             <a:extLst>
               <a:ext uri="{FF2B5EF4-FFF2-40B4-BE49-F238E27FC236}">
-                <a16:creationId xmlns:a16="http://schemas.microsoft.com/office/drawing/2014/main" id="{79070A95-7E8C-0828-88E3-001BBB4E331D}"/>
+                <a16:creationId xmlns:a16="http://schemas.microsoft.com/office/drawing/2014/main" id="{EACC0D67-4B12-A98C-A6C5-08921402F63A}"/>
               </a:ext>
             </a:extLst>
           </p:cNvPr>
@@ -9062,7 +10603,7 @@
                   <a:schemeClr val="bg1"/>
                 </a:solidFill>
               </a:rPr>
-              <a:t>Change-Impact Analysis</a:t>
+              <a:t>Problems/Solutions</a:t>
             </a:r>
           </a:p>
         </p:txBody>
@@ -9072,7 +10613,7 @@
           <p:cNvPr id="3" name="Text Placeholder 2">
             <a:extLst>
               <a:ext uri="{FF2B5EF4-FFF2-40B4-BE49-F238E27FC236}">
-                <a16:creationId xmlns:a16="http://schemas.microsoft.com/office/drawing/2014/main" id="{87EC0F28-AC2C-142C-EF6A-7F163D42DEC9}"/>
+                <a16:creationId xmlns:a16="http://schemas.microsoft.com/office/drawing/2014/main" id="{01C9A9F4-F886-2FC8-7FF5-AFA930FA673E}"/>
               </a:ext>
             </a:extLst>
           </p:cNvPr>
@@ -9083,8 +10624,8 @@
         </p:nvSpPr>
         <p:spPr>
           <a:xfrm>
-            <a:off x="507959" y="1172520"/>
-            <a:ext cx="9071640" cy="3828239"/>
+            <a:off x="503999" y="1326600"/>
+            <a:ext cx="9071640" cy="4022640"/>
           </a:xfrm>
           <a:prstGeom prst="rect">
             <a:avLst/>
@@ -9319,39 +10860,74 @@
                   <a:schemeClr val="bg1"/>
                 </a:solidFill>
               </a:rPr>
-              <a:t>The goal is to visualize the impact of model constants on model outputs.</a:t>
+              <a:t>So far, the combinatorial test cases were only using the constants assumed to have an impact on model outputs. Now, they include all of the constants. </a:t>
             </a:r>
           </a:p>
           <a:p>
             <a:pPr marL="342900" indent="-342900"/>
-            <a:endParaRPr lang="en-US" dirty="0">
-              <a:solidFill>
-                <a:schemeClr val="bg1"/>
-              </a:solidFill>
-            </a:endParaRPr>
-          </a:p>
-          <a:p>
-            <a:pPr marL="342900" indent="-342900"/>
-            <a:endParaRPr lang="en-US" dirty="0">
-              <a:solidFill>
-                <a:schemeClr val="bg1"/>
-              </a:solidFill>
-            </a:endParaRPr>
-          </a:p>
-          <a:p>
-            <a:pPr marL="342900" indent="-342900"/>
-            <a:endParaRPr lang="en-US" dirty="0">
-              <a:solidFill>
-                <a:schemeClr val="bg1"/>
-              </a:solidFill>
-            </a:endParaRPr>
+            <a:r>
+              <a:rPr lang="en-US" dirty="0">
+                <a:solidFill>
+                  <a:schemeClr val="bg1"/>
+                </a:solidFill>
+              </a:rPr>
+              <a:t>The Change Detection analysis might be redone in the future by examining preconditions through </a:t>
+            </a:r>
+            <a:r>
+              <a:rPr lang="en-US" dirty="0" err="1">
+                <a:solidFill>
+                  <a:schemeClr val="bg1"/>
+                </a:solidFill>
+              </a:rPr>
+              <a:t>LakeTemperature</a:t>
+            </a:r>
+            <a:r>
+              <a:rPr lang="en-US" dirty="0">
+                <a:solidFill>
+                  <a:schemeClr val="bg1"/>
+                </a:solidFill>
+              </a:rPr>
+              <a:t> source code but </a:t>
+            </a:r>
+            <a:r>
+              <a:rPr lang="en-US">
+                <a:solidFill>
+                  <a:schemeClr val="bg1"/>
+                </a:solidFill>
+              </a:rPr>
+              <a:t>future combinatorial </a:t>
+            </a:r>
+            <a:r>
+              <a:rPr lang="en-US" dirty="0">
+                <a:solidFill>
+                  <a:schemeClr val="bg1"/>
+                </a:solidFill>
+              </a:rPr>
+              <a:t>testing and </a:t>
+            </a:r>
+            <a:r>
+              <a:rPr lang="en-US">
+                <a:solidFill>
+                  <a:schemeClr val="bg1"/>
+                </a:solidFill>
+              </a:rPr>
+              <a:t>change-impact analysis </a:t>
+            </a:r>
+            <a:r>
+              <a:rPr lang="en-US" dirty="0">
+                <a:solidFill>
+                  <a:schemeClr val="bg1"/>
+                </a:solidFill>
+              </a:rPr>
+              <a:t>will not depend on these results. </a:t>
+            </a:r>
           </a:p>
         </p:txBody>
       </p:sp>
     </p:spTree>
     <p:extLst>
       <p:ext uri="{BB962C8B-B14F-4D97-AF65-F5344CB8AC3E}">
-        <p14:creationId xmlns:p14="http://schemas.microsoft.com/office/powerpoint/2010/main" val="2569724074"/>
+        <p14:creationId xmlns:p14="http://schemas.microsoft.com/office/powerpoint/2010/main" val="428248981"/>
       </p:ext>
     </p:extLst>
   </p:cSld>
@@ -9361,18 +10937,12 @@
 </p:sld>
 </file>
 
-<file path=ppt/slides/slide20.xml><?xml version="1.0" encoding="utf-8"?>
+<file path=ppt/slides/slide8.xml><?xml version="1.0" encoding="utf-8"?>
 <p:sld xmlns:a="http://schemas.openxmlformats.org/drawingml/2006/main" xmlns:r="http://schemas.openxmlformats.org/officeDocument/2006/relationships" xmlns:p="http://schemas.openxmlformats.org/presentationml/2006/main">
   <p:cSld>
     <p:spTree>
       <p:nvGrpSpPr>
-        <p:cNvPr id="1" name="">
-          <a:extLst>
-            <a:ext uri="{FF2B5EF4-FFF2-40B4-BE49-F238E27FC236}">
-              <a16:creationId xmlns:a16="http://schemas.microsoft.com/office/drawing/2014/main" id="{28210578-CC0F-D325-9650-3E80E2459D87}"/>
-            </a:ext>
-          </a:extLst>
-        </p:cNvPr>
+        <p:cNvPr id="1" name=""/>
         <p:cNvGrpSpPr/>
         <p:nvPr/>
       </p:nvGrpSpPr>
@@ -9389,7 +10959,7 @@
           <p:cNvPr id="2" name="Title 1">
             <a:extLst>
               <a:ext uri="{FF2B5EF4-FFF2-40B4-BE49-F238E27FC236}">
-                <a16:creationId xmlns:a16="http://schemas.microsoft.com/office/drawing/2014/main" id="{EACC0D67-4B12-A98C-A6C5-08921402F63A}"/>
+                <a16:creationId xmlns:a16="http://schemas.microsoft.com/office/drawing/2014/main" id="{79070A95-7E8C-0828-88E3-001BBB4E331D}"/>
               </a:ext>
             </a:extLst>
           </p:cNvPr>
@@ -9441,7 +11011,7 @@
                   <a:schemeClr val="bg1"/>
                 </a:solidFill>
               </a:rPr>
-              <a:t>Problems/Solutions</a:t>
+              <a:t>Change-Impact Analysis</a:t>
             </a:r>
           </a:p>
         </p:txBody>
@@ -9451,7 +11021,7 @@
           <p:cNvPr id="3" name="Text Placeholder 2">
             <a:extLst>
               <a:ext uri="{FF2B5EF4-FFF2-40B4-BE49-F238E27FC236}">
-                <a16:creationId xmlns:a16="http://schemas.microsoft.com/office/drawing/2014/main" id="{01C9A9F4-F886-2FC8-7FF5-AFA930FA673E}"/>
+                <a16:creationId xmlns:a16="http://schemas.microsoft.com/office/drawing/2014/main" id="{87EC0F28-AC2C-142C-EF6A-7F163D42DEC9}"/>
               </a:ext>
             </a:extLst>
           </p:cNvPr>
@@ -9462,8 +11032,8 @@
         </p:nvSpPr>
         <p:spPr>
           <a:xfrm>
-            <a:off x="503999" y="1326600"/>
-            <a:ext cx="9071640" cy="4022640"/>
+            <a:off x="507959" y="1172520"/>
+            <a:ext cx="9071640" cy="3828239"/>
           </a:xfrm>
           <a:prstGeom prst="rect">
             <a:avLst/>
@@ -9698,74 +11268,39 @@
                   <a:schemeClr val="bg1"/>
                 </a:solidFill>
               </a:rPr>
-              <a:t>So far, the combinatorial test cases were only using the constants assumed to have an impact on model outputs. Now, they include all of the constants. </a:t>
+              <a:t>The goal is to visualize the impact of model constants on model outputs.</a:t>
             </a:r>
           </a:p>
           <a:p>
             <a:pPr marL="342900" indent="-342900"/>
-            <a:r>
-              <a:rPr lang="en-US" dirty="0">
-                <a:solidFill>
-                  <a:schemeClr val="bg1"/>
-                </a:solidFill>
-              </a:rPr>
-              <a:t>The Change Detection analysis might be redone in the future by examining preconditions through </a:t>
-            </a:r>
-            <a:r>
-              <a:rPr lang="en-US" dirty="0" err="1">
-                <a:solidFill>
-                  <a:schemeClr val="bg1"/>
-                </a:solidFill>
-              </a:rPr>
-              <a:t>LakeTemperature</a:t>
-            </a:r>
-            <a:r>
-              <a:rPr lang="en-US" dirty="0">
-                <a:solidFill>
-                  <a:schemeClr val="bg1"/>
-                </a:solidFill>
-              </a:rPr>
-              <a:t> source code but </a:t>
-            </a:r>
-            <a:r>
-              <a:rPr lang="en-US">
-                <a:solidFill>
-                  <a:schemeClr val="bg1"/>
-                </a:solidFill>
-              </a:rPr>
-              <a:t>future combinatorial </a:t>
-            </a:r>
-            <a:r>
-              <a:rPr lang="en-US" dirty="0">
-                <a:solidFill>
-                  <a:schemeClr val="bg1"/>
-                </a:solidFill>
-              </a:rPr>
-              <a:t>testing and </a:t>
-            </a:r>
-            <a:r>
-              <a:rPr lang="en-US">
-                <a:solidFill>
-                  <a:schemeClr val="bg1"/>
-                </a:solidFill>
-              </a:rPr>
-              <a:t>change-impact analysis </a:t>
-            </a:r>
-            <a:r>
-              <a:rPr lang="en-US" dirty="0">
-                <a:solidFill>
-                  <a:schemeClr val="bg1"/>
-                </a:solidFill>
-              </a:rPr>
-              <a:t>will not depend on these results. </a:t>
-            </a:r>
+            <a:endParaRPr lang="en-US" dirty="0">
+              <a:solidFill>
+                <a:schemeClr val="bg1"/>
+              </a:solidFill>
+            </a:endParaRPr>
+          </a:p>
+          <a:p>
+            <a:pPr marL="342900" indent="-342900"/>
+            <a:endParaRPr lang="en-US" dirty="0">
+              <a:solidFill>
+                <a:schemeClr val="bg1"/>
+              </a:solidFill>
+            </a:endParaRPr>
+          </a:p>
+          <a:p>
+            <a:pPr marL="342900" indent="-342900"/>
+            <a:endParaRPr lang="en-US" dirty="0">
+              <a:solidFill>
+                <a:schemeClr val="bg1"/>
+              </a:solidFill>
+            </a:endParaRPr>
           </a:p>
         </p:txBody>
       </p:sp>
     </p:spTree>
     <p:extLst>
       <p:ext uri="{BB962C8B-B14F-4D97-AF65-F5344CB8AC3E}">
-        <p14:creationId xmlns:p14="http://schemas.microsoft.com/office/powerpoint/2010/main" val="428248981"/>
+        <p14:creationId xmlns:p14="http://schemas.microsoft.com/office/powerpoint/2010/main" val="2569724074"/>
       </p:ext>
     </p:extLst>
   </p:cSld>
@@ -9775,7 +11310,7 @@
 </p:sld>
 </file>
 
-<file path=ppt/slides/slide3.xml><?xml version="1.0" encoding="utf-8"?>
+<file path=ppt/slides/slide9.xml><?xml version="1.0" encoding="utf-8"?>
 <p:sld xmlns:a="http://schemas.openxmlformats.org/drawingml/2006/main" xmlns:r="http://schemas.openxmlformats.org/officeDocument/2006/relationships" xmlns:p="http://schemas.openxmlformats.org/presentationml/2006/main">
   <p:cSld name="page14">
     <p:spTree>
@@ -9888,1517 +11423,6 @@
                 </a:solidFill>
               </a:rPr>
               <a:t>To obtain a 3D graph, we chose a single column from one output’s data, used time as the x-axis, the one model constant we changed as the y-axis, and the single column (of the single model output) as the z-axis.  </a:t>
-            </a:r>
-          </a:p>
-        </p:txBody>
-      </p:sp>
-    </p:spTree>
-  </p:cSld>
-  <p:clrMapOvr>
-    <a:masterClrMapping/>
-  </p:clrMapOvr>
-</p:sld>
-</file>
-
-<file path=ppt/slides/slide4.xml><?xml version="1.0" encoding="utf-8"?>
-<p:sld xmlns:a="http://schemas.openxmlformats.org/drawingml/2006/main" xmlns:r="http://schemas.openxmlformats.org/officeDocument/2006/relationships" xmlns:p="http://schemas.openxmlformats.org/presentationml/2006/main">
-  <p:cSld>
-    <p:spTree>
-      <p:nvGrpSpPr>
-        <p:cNvPr id="1" name="">
-          <a:extLst>
-            <a:ext uri="{FF2B5EF4-FFF2-40B4-BE49-F238E27FC236}">
-              <a16:creationId xmlns:a16="http://schemas.microsoft.com/office/drawing/2014/main" id="{2B569827-9521-53AA-9742-36EB856A3BAB}"/>
-            </a:ext>
-          </a:extLst>
-        </p:cNvPr>
-        <p:cNvGrpSpPr/>
-        <p:nvPr/>
-      </p:nvGrpSpPr>
-      <p:grpSpPr>
-        <a:xfrm>
-          <a:off x="0" y="0"/>
-          <a:ext cx="0" cy="0"/>
-          <a:chOff x="0" y="0"/>
-          <a:chExt cx="0" cy="0"/>
-        </a:xfrm>
-      </p:grpSpPr>
-      <p:sp>
-        <p:nvSpPr>
-          <p:cNvPr id="2" name="Title 1">
-            <a:extLst>
-              <a:ext uri="{FF2B5EF4-FFF2-40B4-BE49-F238E27FC236}">
-                <a16:creationId xmlns:a16="http://schemas.microsoft.com/office/drawing/2014/main" id="{C65C185C-7590-576F-35F7-50C042B441F9}"/>
-              </a:ext>
-            </a:extLst>
-          </p:cNvPr>
-          <p:cNvSpPr txBox="1">
-            <a:spLocks noGrp="1"/>
-          </p:cNvSpPr>
-          <p:nvPr>
-            <p:ph type="title" idx="4294967295"/>
-          </p:nvPr>
-        </p:nvSpPr>
-        <p:spPr>
-          <a:xfrm>
-            <a:off x="503999" y="422301"/>
-            <a:ext cx="9071640" cy="553998"/>
-          </a:xfrm>
-        </p:spPr>
-        <p:txBody>
-          <a:bodyPr>
-            <a:spAutoFit/>
-          </a:bodyPr>
-          <a:lstStyle/>
-          <a:p>
-            <a:pPr lvl="0"/>
-            <a:r>
-              <a:rPr lang="en-US" dirty="0">
-                <a:solidFill>
-                  <a:schemeClr val="bg1"/>
-                </a:solidFill>
-              </a:rPr>
-              <a:t>Graphing Process</a:t>
-            </a:r>
-          </a:p>
-        </p:txBody>
-      </p:sp>
-      <p:sp>
-        <p:nvSpPr>
-          <p:cNvPr id="3" name="Text Placeholder 2">
-            <a:extLst>
-              <a:ext uri="{FF2B5EF4-FFF2-40B4-BE49-F238E27FC236}">
-                <a16:creationId xmlns:a16="http://schemas.microsoft.com/office/drawing/2014/main" id="{16380487-782B-D373-4A68-3CAF18B86D6A}"/>
-              </a:ext>
-            </a:extLst>
-          </p:cNvPr>
-          <p:cNvSpPr txBox="1">
-            <a:spLocks noGrp="1"/>
-          </p:cNvSpPr>
-          <p:nvPr>
-            <p:ph type="body" idx="4294967295"/>
-          </p:nvPr>
-        </p:nvSpPr>
-        <p:spPr>
-          <a:xfrm>
-            <a:off x="503999" y="1326600"/>
-            <a:ext cx="9001800" cy="3664440"/>
-          </a:xfrm>
-        </p:spPr>
-        <p:txBody>
-          <a:bodyPr/>
-          <a:lstStyle/>
-          <a:p>
-            <a:pPr marL="342900" indent="-342900"/>
-            <a:r>
-              <a:rPr lang="en-US" dirty="0">
-                <a:solidFill>
-                  <a:schemeClr val="bg1"/>
-                </a:solidFill>
-              </a:rPr>
-              <a:t>Output data in the form of a </a:t>
-            </a:r>
-            <a:r>
-              <a:rPr lang="en-US" dirty="0" err="1">
-                <a:solidFill>
-                  <a:schemeClr val="bg1"/>
-                </a:solidFill>
-              </a:rPr>
-              <a:t>NetCDF</a:t>
-            </a:r>
-            <a:r>
-              <a:rPr lang="en-US" dirty="0">
-                <a:solidFill>
-                  <a:schemeClr val="bg1"/>
-                </a:solidFill>
-              </a:rPr>
-              <a:t> file is used. </a:t>
-            </a:r>
-          </a:p>
-          <a:p>
-            <a:pPr marL="342900" indent="-342900"/>
-            <a:r>
-              <a:rPr lang="en-US" dirty="0">
-                <a:solidFill>
-                  <a:schemeClr val="bg1"/>
-                </a:solidFill>
-              </a:rPr>
-              <a:t>From the output data we pulled the values for the model constant </a:t>
-            </a:r>
-            <a:r>
-              <a:rPr lang="en-US" i="1" dirty="0" err="1">
-                <a:solidFill>
-                  <a:schemeClr val="bg1"/>
-                </a:solidFill>
-              </a:rPr>
-              <a:t>vkc</a:t>
-            </a:r>
-            <a:r>
-              <a:rPr lang="en-US" i="1" dirty="0">
-                <a:solidFill>
-                  <a:schemeClr val="bg1"/>
-                </a:solidFill>
-              </a:rPr>
-              <a:t>.</a:t>
-            </a:r>
-            <a:endParaRPr lang="en-US" dirty="0">
-              <a:solidFill>
-                <a:schemeClr val="bg1"/>
-              </a:solidFill>
-            </a:endParaRPr>
-          </a:p>
-          <a:p>
-            <a:pPr marL="342900" indent="-342900"/>
-            <a:r>
-              <a:rPr lang="en-US" dirty="0">
-                <a:solidFill>
-                  <a:schemeClr val="bg1"/>
-                </a:solidFill>
-              </a:rPr>
-              <a:t>Time is interpolated from 0 to 35. </a:t>
-            </a:r>
-          </a:p>
-          <a:p>
-            <a:pPr marL="342900" indent="-342900"/>
-            <a:r>
-              <a:rPr lang="en-US" dirty="0">
-                <a:solidFill>
-                  <a:schemeClr val="bg1"/>
-                </a:solidFill>
-              </a:rPr>
-              <a:t>From the output data we pulled the values for the model output </a:t>
-            </a:r>
-            <a:r>
-              <a:rPr lang="en-US" i="1" dirty="0">
-                <a:solidFill>
-                  <a:schemeClr val="bg1"/>
-                </a:solidFill>
-              </a:rPr>
-              <a:t>lakestate_vars__savedtke1_col</a:t>
-            </a:r>
-            <a:r>
-              <a:rPr lang="en-US" dirty="0">
-                <a:solidFill>
-                  <a:schemeClr val="bg1"/>
-                </a:solidFill>
-              </a:rPr>
-              <a:t> at the column numbered 336. </a:t>
-            </a:r>
-          </a:p>
-          <a:p>
-            <a:pPr marL="342900" indent="-342900"/>
-            <a:r>
-              <a:rPr lang="en-US" dirty="0">
-                <a:solidFill>
-                  <a:schemeClr val="bg1"/>
-                </a:solidFill>
-              </a:rPr>
-              <a:t>Using matplotlib, all three dimensions were graphed. </a:t>
-            </a:r>
-          </a:p>
-        </p:txBody>
-      </p:sp>
-    </p:spTree>
-    <p:extLst>
-      <p:ext uri="{BB962C8B-B14F-4D97-AF65-F5344CB8AC3E}">
-        <p14:creationId xmlns:p14="http://schemas.microsoft.com/office/powerpoint/2010/main" val="2352501276"/>
-      </p:ext>
-    </p:extLst>
-  </p:cSld>
-  <p:clrMapOvr>
-    <a:masterClrMapping/>
-  </p:clrMapOvr>
-</p:sld>
-</file>
-
-<file path=ppt/slides/slide5.xml><?xml version="1.0" encoding="utf-8"?>
-<p:sld xmlns:a="http://schemas.openxmlformats.org/drawingml/2006/main" xmlns:r="http://schemas.openxmlformats.org/officeDocument/2006/relationships" xmlns:p="http://schemas.openxmlformats.org/presentationml/2006/main">
-  <p:cSld name="page16">
-    <p:spTree>
-      <p:nvGrpSpPr>
-        <p:cNvPr id="1" name=""/>
-        <p:cNvGrpSpPr/>
-        <p:nvPr/>
-      </p:nvGrpSpPr>
-      <p:grpSpPr>
-        <a:xfrm>
-          <a:off x="0" y="0"/>
-          <a:ext cx="0" cy="0"/>
-          <a:chOff x="0" y="0"/>
-          <a:chExt cx="0" cy="0"/>
-        </a:xfrm>
-      </p:grpSpPr>
-      <p:sp>
-        <p:nvSpPr>
-          <p:cNvPr id="2" name="Title 1">
-            <a:extLst>
-              <a:ext uri="{FF2B5EF4-FFF2-40B4-BE49-F238E27FC236}">
-                <a16:creationId xmlns:a16="http://schemas.microsoft.com/office/drawing/2014/main" id="{652DE034-012A-BDCC-27D6-45696F0169C2}"/>
-              </a:ext>
-            </a:extLst>
-          </p:cNvPr>
-          <p:cNvSpPr txBox="1">
-            <a:spLocks noGrp="1"/>
-          </p:cNvSpPr>
-          <p:nvPr>
-            <p:ph type="title" idx="4294967295"/>
-          </p:nvPr>
-        </p:nvSpPr>
-        <p:spPr>
-          <a:xfrm>
-            <a:off x="340123" y="422301"/>
-            <a:ext cx="3461504" cy="553998"/>
-          </a:xfrm>
-        </p:spPr>
-        <p:txBody>
-          <a:bodyPr wrap="square">
-            <a:spAutoFit/>
-          </a:bodyPr>
-          <a:lstStyle/>
-          <a:p>
-            <a:pPr lvl="0"/>
-            <a:r>
-              <a:rPr lang="en-US" dirty="0">
-                <a:solidFill>
-                  <a:schemeClr val="bg1"/>
-                </a:solidFill>
-              </a:rPr>
-              <a:t>An Example Graph</a:t>
-            </a:r>
-          </a:p>
-        </p:txBody>
-      </p:sp>
-      <p:sp>
-        <p:nvSpPr>
-          <p:cNvPr id="3" name="Text Placeholder 2">
-            <a:extLst>
-              <a:ext uri="{FF2B5EF4-FFF2-40B4-BE49-F238E27FC236}">
-                <a16:creationId xmlns:a16="http://schemas.microsoft.com/office/drawing/2014/main" id="{E0FB6333-45B1-C200-1206-F5409AA482B6}"/>
-              </a:ext>
-            </a:extLst>
-          </p:cNvPr>
-          <p:cNvSpPr txBox="1">
-            <a:spLocks noGrp="1"/>
-          </p:cNvSpPr>
-          <p:nvPr>
-            <p:ph type="body" idx="4294967295"/>
-          </p:nvPr>
-        </p:nvSpPr>
-        <p:spPr>
-          <a:xfrm>
-            <a:off x="340123" y="1081994"/>
-            <a:ext cx="3461504" cy="3719520"/>
-          </a:xfrm>
-        </p:spPr>
-        <p:txBody>
-          <a:bodyPr>
-            <a:normAutofit/>
-          </a:bodyPr>
-          <a:lstStyle/>
-          <a:p>
-            <a:pPr marL="342900" indent="-342900"/>
-            <a:r>
-              <a:rPr lang="en-US" dirty="0">
-                <a:solidFill>
-                  <a:schemeClr val="bg1"/>
-                </a:solidFill>
-              </a:rPr>
-              <a:t>This graph shows how the model constant </a:t>
-            </a:r>
-            <a:r>
-              <a:rPr lang="en-US" i="1" dirty="0" err="1">
-                <a:solidFill>
-                  <a:schemeClr val="bg1"/>
-                </a:solidFill>
-              </a:rPr>
-              <a:t>vkc</a:t>
-            </a:r>
-            <a:r>
-              <a:rPr lang="en-US" dirty="0">
-                <a:solidFill>
-                  <a:schemeClr val="bg1"/>
-                </a:solidFill>
-              </a:rPr>
-              <a:t> affects the model output </a:t>
-            </a:r>
-            <a:r>
-              <a:rPr lang="en-US" i="1" dirty="0">
-                <a:solidFill>
-                  <a:schemeClr val="bg1"/>
-                </a:solidFill>
-              </a:rPr>
-              <a:t>lakestate_vars__savedtke1_col </a:t>
-            </a:r>
-            <a:r>
-              <a:rPr lang="en-US" dirty="0">
-                <a:solidFill>
-                  <a:schemeClr val="bg1"/>
-                </a:solidFill>
-              </a:rPr>
-              <a:t>over a period of 35 time steps for the lake column numbered 336.</a:t>
-            </a:r>
-          </a:p>
-        </p:txBody>
-      </p:sp>
-      <p:grpSp>
-        <p:nvGrpSpPr>
-          <p:cNvPr id="7" name="Group 6">
-            <a:extLst>
-              <a:ext uri="{FF2B5EF4-FFF2-40B4-BE49-F238E27FC236}">
-                <a16:creationId xmlns:a16="http://schemas.microsoft.com/office/drawing/2014/main" id="{AF25E7DB-69CA-4FAC-8C45-99C8D86EF4E1}"/>
-              </a:ext>
-            </a:extLst>
-          </p:cNvPr>
-          <p:cNvGrpSpPr>
-            <a:grpSpLocks noChangeAspect="1"/>
-          </p:cNvGrpSpPr>
-          <p:nvPr/>
-        </p:nvGrpSpPr>
-        <p:grpSpPr>
-          <a:xfrm>
-            <a:off x="4047254" y="-392"/>
-            <a:ext cx="6033371" cy="5670942"/>
-            <a:chOff x="3779383" y="0"/>
-            <a:chExt cx="5955938" cy="5598160"/>
-          </a:xfrm>
-        </p:grpSpPr>
-        <p:sp>
-          <p:nvSpPr>
-            <p:cNvPr id="6" name="Rectangle 5">
-              <a:extLst>
-                <a:ext uri="{FF2B5EF4-FFF2-40B4-BE49-F238E27FC236}">
-                  <a16:creationId xmlns:a16="http://schemas.microsoft.com/office/drawing/2014/main" id="{9253F05C-EA1D-8060-2D15-4444A5C4C9ED}"/>
-                </a:ext>
-              </a:extLst>
-            </p:cNvPr>
-            <p:cNvSpPr/>
-            <p:nvPr/>
-          </p:nvSpPr>
-          <p:spPr>
-            <a:xfrm>
-              <a:off x="3779383" y="0"/>
-              <a:ext cx="5955938" cy="5598160"/>
-            </a:xfrm>
-            <a:prstGeom prst="rect">
-              <a:avLst/>
-            </a:prstGeom>
-            <a:solidFill>
-              <a:schemeClr val="bg1"/>
-            </a:solidFill>
-          </p:spPr>
-          <p:style>
-            <a:lnRef idx="2">
-              <a:schemeClr val="accent1">
-                <a:shade val="15000"/>
-              </a:schemeClr>
-            </a:lnRef>
-            <a:fillRef idx="1">
-              <a:schemeClr val="accent1"/>
-            </a:fillRef>
-            <a:effectRef idx="0">
-              <a:schemeClr val="accent1"/>
-            </a:effectRef>
-            <a:fontRef idx="minor">
-              <a:schemeClr val="lt1"/>
-            </a:fontRef>
-          </p:style>
-          <p:txBody>
-            <a:bodyPr rtlCol="0" anchor="ctr"/>
-            <a:lstStyle/>
-            <a:p>
-              <a:pPr algn="ctr"/>
-              <a:endParaRPr lang="en-US"/>
-            </a:p>
-          </p:txBody>
-        </p:sp>
-        <p:pic>
-          <p:nvPicPr>
-            <p:cNvPr id="5" name="Picture 4">
-              <a:extLst>
-                <a:ext uri="{FF2B5EF4-FFF2-40B4-BE49-F238E27FC236}">
-                  <a16:creationId xmlns:a16="http://schemas.microsoft.com/office/drawing/2014/main" id="{8172BEEA-49A1-F1D6-759E-47E640BAE2B9}"/>
-                </a:ext>
-              </a:extLst>
-            </p:cNvPr>
-            <p:cNvPicPr>
-              <a:picLocks noChangeAspect="1"/>
-            </p:cNvPicPr>
-            <p:nvPr/>
-          </p:nvPicPr>
-          <p:blipFill>
-            <a:blip r:embed="rId3"/>
-            <a:stretch>
-              <a:fillRect/>
-            </a:stretch>
-          </p:blipFill>
-          <p:spPr>
-            <a:xfrm>
-              <a:off x="3860084" y="40640"/>
-              <a:ext cx="5794535" cy="5516880"/>
-            </a:xfrm>
-            <a:prstGeom prst="rect">
-              <a:avLst/>
-            </a:prstGeom>
-          </p:spPr>
-        </p:pic>
-      </p:grpSp>
-    </p:spTree>
-  </p:cSld>
-  <p:clrMapOvr>
-    <a:masterClrMapping/>
-  </p:clrMapOvr>
-</p:sld>
-</file>
-
-<file path=ppt/slides/slide6.xml><?xml version="1.0" encoding="utf-8"?>
-<p:sld xmlns:a="http://schemas.openxmlformats.org/drawingml/2006/main" xmlns:r="http://schemas.openxmlformats.org/officeDocument/2006/relationships" xmlns:p="http://schemas.openxmlformats.org/presentationml/2006/main">
-  <p:cSld>
-    <p:spTree>
-      <p:nvGrpSpPr>
-        <p:cNvPr id="1" name=""/>
-        <p:cNvGrpSpPr/>
-        <p:nvPr/>
-      </p:nvGrpSpPr>
-      <p:grpSpPr>
-        <a:xfrm>
-          <a:off x="0" y="0"/>
-          <a:ext cx="0" cy="0"/>
-          <a:chOff x="0" y="0"/>
-          <a:chExt cx="0" cy="0"/>
-        </a:xfrm>
-      </p:grpSpPr>
-      <p:sp>
-        <p:nvSpPr>
-          <p:cNvPr id="2" name="Title 1">
-            <a:extLst>
-              <a:ext uri="{FF2B5EF4-FFF2-40B4-BE49-F238E27FC236}">
-                <a16:creationId xmlns:a16="http://schemas.microsoft.com/office/drawing/2014/main" id="{B8086899-15DA-5703-76E2-51D23E842D09}"/>
-              </a:ext>
-            </a:extLst>
-          </p:cNvPr>
-          <p:cNvSpPr txBox="1">
-            <a:spLocks/>
-          </p:cNvSpPr>
-          <p:nvPr/>
-        </p:nvSpPr>
-        <p:spPr>
-          <a:xfrm>
-            <a:off x="503999" y="422301"/>
-            <a:ext cx="9071640" cy="553998"/>
-          </a:xfrm>
-          <a:prstGeom prst="rect">
-            <a:avLst/>
-          </a:prstGeom>
-          <a:noFill/>
-          <a:ln>
-            <a:noFill/>
-          </a:ln>
-        </p:spPr>
-        <p:txBody>
-          <a:bodyPr vert="horz" lIns="0" tIns="0" rIns="0" bIns="0" anchor="ctr">
-            <a:spAutoFit/>
-          </a:bodyPr>
-          <a:lstStyle>
-            <a:lvl1pPr lvl="0" algn="ctr" rtl="0" hangingPunct="0">
-              <a:buNone/>
-              <a:tabLst/>
-              <a:defRPr lang="en-US" sz="3600" b="0" i="0" u="none" strike="noStrike" kern="1200" cap="none">
-                <a:ln>
-                  <a:noFill/>
-                </a:ln>
-                <a:highlight>
-                  <a:scrgbClr r="0" g="0" b="0">
-                    <a:alpha val="0"/>
-                  </a:scrgbClr>
-                </a:highlight>
-                <a:latin typeface="URW Bookman" pitchFamily="2"/>
-                <a:ea typeface="Nimbus Sans" pitchFamily="2"/>
-                <a:cs typeface="FreeSans" pitchFamily="2"/>
-              </a:defRPr>
-            </a:lvl1pPr>
-          </a:lstStyle>
-          <a:p>
-            <a:r>
-              <a:rPr lang="en-US" dirty="0">
-                <a:solidFill>
-                  <a:schemeClr val="bg1"/>
-                </a:solidFill>
-              </a:rPr>
-              <a:t>Why Combinatorial Testing (CT)?</a:t>
-            </a:r>
-          </a:p>
-        </p:txBody>
-      </p:sp>
-      <p:sp>
-        <p:nvSpPr>
-          <p:cNvPr id="3" name="Text Placeholder 2">
-            <a:extLst>
-              <a:ext uri="{FF2B5EF4-FFF2-40B4-BE49-F238E27FC236}">
-                <a16:creationId xmlns:a16="http://schemas.microsoft.com/office/drawing/2014/main" id="{0CD48D6A-4BDE-1B52-9184-3845B1664AB8}"/>
-              </a:ext>
-            </a:extLst>
-          </p:cNvPr>
-          <p:cNvSpPr txBox="1">
-            <a:spLocks/>
-          </p:cNvSpPr>
-          <p:nvPr/>
-        </p:nvSpPr>
-        <p:spPr>
-          <a:xfrm>
-            <a:off x="503999" y="1326600"/>
-            <a:ext cx="9071640" cy="4022640"/>
-          </a:xfrm>
-          <a:prstGeom prst="rect">
-            <a:avLst/>
-          </a:prstGeom>
-          <a:noFill/>
-          <a:ln>
-            <a:noFill/>
-          </a:ln>
-        </p:spPr>
-        <p:txBody>
-          <a:bodyPr vert="horz" lIns="0" tIns="0" rIns="0" bIns="0">
-            <a:normAutofit/>
-          </a:bodyPr>
-          <a:lstStyle>
-            <a:lvl1pPr lvl="0" rtl="0" hangingPunct="0">
-              <a:spcBef>
-                <a:spcPts val="1417"/>
-              </a:spcBef>
-              <a:spcAft>
-                <a:spcPts val="0"/>
-              </a:spcAft>
-              <a:buSzPct val="45000"/>
-              <a:buFont typeface="OpenSymbol"/>
-              <a:buChar char="●"/>
-              <a:tabLst/>
-              <a:defRPr lang="en-US" sz="2400" b="0" i="0" u="none" strike="noStrike" kern="1200" cap="none">
-                <a:ln>
-                  <a:noFill/>
-                </a:ln>
-                <a:highlight>
-                  <a:scrgbClr r="0" g="0" b="0">
-                    <a:alpha val="0"/>
-                  </a:scrgbClr>
-                </a:highlight>
-                <a:latin typeface="URW Bookman" pitchFamily="2"/>
-                <a:ea typeface="Nimbus Sans" pitchFamily="2"/>
-                <a:cs typeface="FreeSans" pitchFamily="2"/>
-              </a:defRPr>
-            </a:lvl1pPr>
-            <a:lvl2pPr lvl="1" rtl="0" hangingPunct="0">
-              <a:spcBef>
-                <a:spcPts val="1417"/>
-              </a:spcBef>
-              <a:spcAft>
-                <a:spcPts val="0"/>
-              </a:spcAft>
-              <a:buSzPct val="75000"/>
-              <a:buFont typeface="OpenSymbol"/>
-              <a:buChar char="–"/>
-              <a:tabLst/>
-              <a:defRPr lang="en-US" sz="2400" b="0" i="0" u="none" strike="noStrike" kern="1200" cap="none">
-                <a:ln>
-                  <a:noFill/>
-                </a:ln>
-                <a:highlight>
-                  <a:scrgbClr r="0" g="0" b="0">
-                    <a:alpha val="0"/>
-                  </a:scrgbClr>
-                </a:highlight>
-                <a:latin typeface="URW Bookman" pitchFamily="2"/>
-                <a:ea typeface="Nimbus Sans" pitchFamily="2"/>
-                <a:cs typeface="FreeSans" pitchFamily="2"/>
-              </a:defRPr>
-            </a:lvl2pPr>
-            <a:lvl3pPr lvl="2" rtl="0" hangingPunct="0">
-              <a:spcBef>
-                <a:spcPts val="1417"/>
-              </a:spcBef>
-              <a:spcAft>
-                <a:spcPts val="0"/>
-              </a:spcAft>
-              <a:buSzPct val="45000"/>
-              <a:buFont typeface="OpenSymbol"/>
-              <a:buChar char="●"/>
-              <a:tabLst/>
-              <a:defRPr lang="en-US" sz="2400" b="0" i="0" u="none" strike="noStrike" kern="1200" cap="none">
-                <a:ln>
-                  <a:noFill/>
-                </a:ln>
-                <a:highlight>
-                  <a:scrgbClr r="0" g="0" b="0">
-                    <a:alpha val="0"/>
-                  </a:scrgbClr>
-                </a:highlight>
-                <a:latin typeface="URW Bookman" pitchFamily="2"/>
-                <a:ea typeface="Nimbus Sans" pitchFamily="2"/>
-                <a:cs typeface="FreeSans" pitchFamily="2"/>
-              </a:defRPr>
-            </a:lvl3pPr>
-            <a:lvl4pPr lvl="3" rtl="0" hangingPunct="0">
-              <a:spcBef>
-                <a:spcPts val="1417"/>
-              </a:spcBef>
-              <a:spcAft>
-                <a:spcPts val="0"/>
-              </a:spcAft>
-              <a:buSzPct val="75000"/>
-              <a:buFont typeface="OpenSymbol"/>
-              <a:buChar char="–"/>
-              <a:tabLst/>
-              <a:defRPr lang="en-US" sz="2400" b="0" i="0" u="none" strike="noStrike" kern="1200" cap="none">
-                <a:ln>
-                  <a:noFill/>
-                </a:ln>
-                <a:highlight>
-                  <a:scrgbClr r="0" g="0" b="0">
-                    <a:alpha val="0"/>
-                  </a:scrgbClr>
-                </a:highlight>
-                <a:latin typeface="URW Bookman" pitchFamily="2"/>
-                <a:ea typeface="Nimbus Sans" pitchFamily="2"/>
-                <a:cs typeface="FreeSans" pitchFamily="2"/>
-              </a:defRPr>
-            </a:lvl4pPr>
-            <a:lvl5pPr lvl="4" rtl="0" hangingPunct="0">
-              <a:spcBef>
-                <a:spcPts val="1417"/>
-              </a:spcBef>
-              <a:spcAft>
-                <a:spcPts val="0"/>
-              </a:spcAft>
-              <a:buSzPct val="45000"/>
-              <a:buFont typeface="OpenSymbol"/>
-              <a:buChar char="●"/>
-              <a:tabLst/>
-              <a:defRPr lang="en-US" sz="2400" b="0" i="0" u="none" strike="noStrike" kern="1200" cap="none">
-                <a:ln>
-                  <a:noFill/>
-                </a:ln>
-                <a:highlight>
-                  <a:scrgbClr r="0" g="0" b="0">
-                    <a:alpha val="0"/>
-                  </a:scrgbClr>
-                </a:highlight>
-                <a:latin typeface="URW Bookman" pitchFamily="2"/>
-                <a:ea typeface="Nimbus Sans" pitchFamily="2"/>
-                <a:cs typeface="FreeSans" pitchFamily="2"/>
-              </a:defRPr>
-            </a:lvl5pPr>
-            <a:lvl6pPr lvl="5" rtl="0" hangingPunct="0">
-              <a:spcBef>
-                <a:spcPts val="1417"/>
-              </a:spcBef>
-              <a:spcAft>
-                <a:spcPts val="0"/>
-              </a:spcAft>
-              <a:buSzPct val="45000"/>
-              <a:buFont typeface="OpenSymbol"/>
-              <a:buChar char="●"/>
-              <a:tabLst/>
-              <a:defRPr lang="en-US" sz="2400" b="0" i="0" u="none" strike="noStrike" kern="1200" cap="none">
-                <a:ln>
-                  <a:noFill/>
-                </a:ln>
-                <a:highlight>
-                  <a:scrgbClr r="0" g="0" b="0">
-                    <a:alpha val="0"/>
-                  </a:scrgbClr>
-                </a:highlight>
-                <a:latin typeface="URW Bookman" pitchFamily="2"/>
-                <a:ea typeface="Nimbus Sans" pitchFamily="2"/>
-                <a:cs typeface="FreeSans" pitchFamily="2"/>
-              </a:defRPr>
-            </a:lvl6pPr>
-            <a:lvl7pPr lvl="6" rtl="0" hangingPunct="0">
-              <a:spcBef>
-                <a:spcPts val="1417"/>
-              </a:spcBef>
-              <a:spcAft>
-                <a:spcPts val="0"/>
-              </a:spcAft>
-              <a:buSzPct val="45000"/>
-              <a:buFont typeface="OpenSymbol"/>
-              <a:buChar char="●"/>
-              <a:tabLst/>
-              <a:defRPr lang="en-US" sz="2400" b="0" i="0" u="none" strike="noStrike" kern="1200" cap="none">
-                <a:ln>
-                  <a:noFill/>
-                </a:ln>
-                <a:highlight>
-                  <a:scrgbClr r="0" g="0" b="0">
-                    <a:alpha val="0"/>
-                  </a:scrgbClr>
-                </a:highlight>
-                <a:latin typeface="URW Bookman" pitchFamily="2"/>
-                <a:ea typeface="Nimbus Sans" pitchFamily="2"/>
-                <a:cs typeface="FreeSans" pitchFamily="2"/>
-              </a:defRPr>
-            </a:lvl7pPr>
-            <a:lvl8pPr marL="3429000" indent="-228600" algn="l" defTabSz="914400" rtl="0" eaLnBrk="1" latinLnBrk="0" hangingPunct="1">
-              <a:lnSpc>
-                <a:spcPct val="90000"/>
-              </a:lnSpc>
-              <a:spcBef>
-                <a:spcPts val="500"/>
-              </a:spcBef>
-              <a:buFont typeface="Arial" panose="020B0604020202020204" pitchFamily="34" charset="0"/>
-              <a:buChar char="•"/>
-              <a:defRPr sz="1800" kern="1200">
-                <a:solidFill>
-                  <a:schemeClr val="tx1"/>
-                </a:solidFill>
-                <a:latin typeface="+mn-lt"/>
-                <a:ea typeface="+mn-ea"/>
-                <a:cs typeface="+mn-cs"/>
-              </a:defRPr>
-            </a:lvl8pPr>
-            <a:lvl9pPr marL="3886200" indent="-228600" algn="l" defTabSz="914400" rtl="0" eaLnBrk="1" latinLnBrk="0" hangingPunct="1">
-              <a:lnSpc>
-                <a:spcPct val="90000"/>
-              </a:lnSpc>
-              <a:spcBef>
-                <a:spcPts val="500"/>
-              </a:spcBef>
-              <a:buFont typeface="Arial" panose="020B0604020202020204" pitchFamily="34" charset="0"/>
-              <a:buChar char="•"/>
-              <a:defRPr sz="1800" kern="1200">
-                <a:solidFill>
-                  <a:schemeClr val="tx1"/>
-                </a:solidFill>
-                <a:latin typeface="+mn-lt"/>
-                <a:ea typeface="+mn-ea"/>
-                <a:cs typeface="+mn-cs"/>
-              </a:defRPr>
-            </a:lvl9pPr>
-          </a:lstStyle>
-          <a:p>
-            <a:pPr marL="342900" indent="-342900"/>
-            <a:r>
-              <a:rPr lang="en-US" dirty="0">
-                <a:solidFill>
-                  <a:schemeClr val="bg1"/>
-                </a:solidFill>
-              </a:rPr>
-              <a:t>Ideally, </a:t>
-            </a:r>
-            <a:r>
-              <a:rPr lang="en-US" dirty="0" err="1">
-                <a:solidFill>
-                  <a:schemeClr val="bg1"/>
-                </a:solidFill>
-                <a:latin typeface="Courier New" panose="02070309020205020404" pitchFamily="49" charset="0"/>
-                <a:cs typeface="Courier New" panose="02070309020205020404" pitchFamily="49" charset="0"/>
-              </a:rPr>
-              <a:t>LakeTemperature</a:t>
-            </a:r>
-            <a:r>
-              <a:rPr lang="en-US" dirty="0">
-                <a:solidFill>
-                  <a:schemeClr val="bg1"/>
-                </a:solidFill>
-              </a:rPr>
-              <a:t> should be validated against all possible combinations of model constant values to ensure that no combination results in erroneous output.</a:t>
-            </a:r>
-          </a:p>
-          <a:p>
-            <a:pPr marL="342900" indent="-342900"/>
-            <a:r>
-              <a:rPr lang="en-US" dirty="0">
-                <a:solidFill>
-                  <a:schemeClr val="bg1"/>
-                </a:solidFill>
-              </a:rPr>
-              <a:t>Exhaustive testing is neither practical nor feasible due to the vast number of all possible combinations. </a:t>
-            </a:r>
-          </a:p>
-          <a:p>
-            <a:pPr marL="342900" indent="-342900"/>
-            <a:r>
-              <a:rPr lang="en-US" dirty="0">
-                <a:solidFill>
-                  <a:schemeClr val="bg1"/>
-                </a:solidFill>
-              </a:rPr>
-              <a:t>Combinatorial testing substantially reduces the number of required test cases while achieving near-exhaustive coverage.</a:t>
-            </a:r>
-          </a:p>
-          <a:p>
-            <a:pPr marL="342900" indent="-342900"/>
-            <a:r>
-              <a:rPr lang="en-US" dirty="0">
-                <a:solidFill>
-                  <a:schemeClr val="bg1"/>
-                </a:solidFill>
-              </a:rPr>
-              <a:t>Assuming most of the bugs are triggered by the interactions of model constants</a:t>
-            </a:r>
-          </a:p>
-        </p:txBody>
-      </p:sp>
-    </p:spTree>
-    <p:extLst>
-      <p:ext uri="{BB962C8B-B14F-4D97-AF65-F5344CB8AC3E}">
-        <p14:creationId xmlns:p14="http://schemas.microsoft.com/office/powerpoint/2010/main" val="3043626"/>
-      </p:ext>
-    </p:extLst>
-  </p:cSld>
-  <p:clrMapOvr>
-    <a:masterClrMapping/>
-  </p:clrMapOvr>
-</p:sld>
-</file>
-
-<file path=ppt/slides/slide7.xml><?xml version="1.0" encoding="utf-8"?>
-<p:sld xmlns:a="http://schemas.openxmlformats.org/drawingml/2006/main" xmlns:r="http://schemas.openxmlformats.org/officeDocument/2006/relationships" xmlns:p="http://schemas.openxmlformats.org/presentationml/2006/main">
-  <p:cSld name="page2">
-    <p:spTree>
-      <p:nvGrpSpPr>
-        <p:cNvPr id="1" name=""/>
-        <p:cNvGrpSpPr/>
-        <p:nvPr/>
-      </p:nvGrpSpPr>
-      <p:grpSpPr>
-        <a:xfrm>
-          <a:off x="0" y="0"/>
-          <a:ext cx="0" cy="0"/>
-          <a:chOff x="0" y="0"/>
-          <a:chExt cx="0" cy="0"/>
-        </a:xfrm>
-      </p:grpSpPr>
-      <p:sp>
-        <p:nvSpPr>
-          <p:cNvPr id="2" name="Title 1">
-            <a:extLst>
-              <a:ext uri="{FF2B5EF4-FFF2-40B4-BE49-F238E27FC236}">
-                <a16:creationId xmlns:a16="http://schemas.microsoft.com/office/drawing/2014/main" id="{3329BCE0-57D7-B440-3433-0B98B154F9AD}"/>
-              </a:ext>
-            </a:extLst>
-          </p:cNvPr>
-          <p:cNvSpPr txBox="1">
-            <a:spLocks noGrp="1"/>
-          </p:cNvSpPr>
-          <p:nvPr>
-            <p:ph type="title" idx="4294967295"/>
-          </p:nvPr>
-        </p:nvSpPr>
-        <p:spPr>
-          <a:xfrm>
-            <a:off x="503999" y="422301"/>
-            <a:ext cx="9071640" cy="553998"/>
-          </a:xfrm>
-        </p:spPr>
-        <p:txBody>
-          <a:bodyPr>
-            <a:spAutoFit/>
-          </a:bodyPr>
-          <a:lstStyle/>
-          <a:p>
-            <a:pPr lvl="0"/>
-            <a:r>
-              <a:rPr lang="en-US" dirty="0">
-                <a:solidFill>
-                  <a:schemeClr val="bg1"/>
-                </a:solidFill>
-              </a:rPr>
-              <a:t>Background of Combinatorial Testing</a:t>
-            </a:r>
-          </a:p>
-        </p:txBody>
-      </p:sp>
-      <p:sp>
-        <p:nvSpPr>
-          <p:cNvPr id="3" name="Text Placeholder 2">
-            <a:extLst>
-              <a:ext uri="{FF2B5EF4-FFF2-40B4-BE49-F238E27FC236}">
-                <a16:creationId xmlns:a16="http://schemas.microsoft.com/office/drawing/2014/main" id="{C12EA507-D828-F915-2FD8-9BBE5948C904}"/>
-              </a:ext>
-            </a:extLst>
-          </p:cNvPr>
-          <p:cNvSpPr txBox="1">
-            <a:spLocks noGrp="1"/>
-          </p:cNvSpPr>
-          <p:nvPr>
-            <p:ph type="body" idx="4294967295"/>
-          </p:nvPr>
-        </p:nvSpPr>
-        <p:spPr/>
-        <p:txBody>
-          <a:bodyPr>
-            <a:normAutofit/>
-          </a:bodyPr>
-          <a:lstStyle/>
-          <a:p>
-            <a:pPr marL="342900" indent="-342900"/>
-            <a:r>
-              <a:rPr lang="en-US" dirty="0">
-                <a:solidFill>
-                  <a:schemeClr val="bg1"/>
-                </a:solidFill>
-              </a:rPr>
-              <a:t>NIST research found most software bugs are caused by interactions of only a small number of parameters</a:t>
-            </a:r>
-            <a:r>
-              <a:rPr lang="en-US" i="1" baseline="30000" dirty="0">
-                <a:solidFill>
-                  <a:schemeClr val="bg1"/>
-                </a:solidFill>
-              </a:rPr>
-              <a:t>1</a:t>
-            </a:r>
-            <a:r>
-              <a:rPr lang="en-US" dirty="0">
-                <a:solidFill>
-                  <a:schemeClr val="bg1"/>
-                </a:solidFill>
-              </a:rPr>
-              <a:t>. </a:t>
-            </a:r>
-          </a:p>
-          <a:p>
-            <a:pPr marL="342900" indent="-342900"/>
-            <a:r>
-              <a:rPr lang="en-US" dirty="0">
-                <a:solidFill>
-                  <a:schemeClr val="bg1"/>
-                </a:solidFill>
-              </a:rPr>
-              <a:t>By testing all combinations of a certain number of parameters, most software bugs can be found with much fewer test cases. </a:t>
-            </a:r>
-          </a:p>
-          <a:p>
-            <a:pPr marL="342900" indent="-342900"/>
-            <a:r>
-              <a:rPr lang="en-US" dirty="0">
-                <a:solidFill>
-                  <a:schemeClr val="bg1"/>
-                </a:solidFill>
-              </a:rPr>
-              <a:t>NIST’s</a:t>
-            </a:r>
-            <a:r>
-              <a:rPr lang="en-US" i="1" dirty="0">
-                <a:solidFill>
-                  <a:schemeClr val="bg1"/>
-                </a:solidFill>
-              </a:rPr>
-              <a:t> </a:t>
-            </a:r>
-            <a:r>
-              <a:rPr lang="en-US" dirty="0">
-                <a:solidFill>
-                  <a:schemeClr val="bg1"/>
-                </a:solidFill>
-              </a:rPr>
-              <a:t>ACTS tool can generate covering arrays from 1-way to 6-way</a:t>
-            </a:r>
-            <a:r>
-              <a:rPr lang="en-US" baseline="30000" dirty="0">
-                <a:solidFill>
-                  <a:schemeClr val="bg1"/>
-                </a:solidFill>
-              </a:rPr>
-              <a:t> </a:t>
-            </a:r>
-            <a:r>
-              <a:rPr lang="en-US" dirty="0">
-                <a:solidFill>
-                  <a:schemeClr val="bg1"/>
-                </a:solidFill>
-              </a:rPr>
-              <a:t>or with mixed coverage</a:t>
-            </a:r>
-            <a:r>
-              <a:rPr lang="en-US" baseline="30000" dirty="0">
-                <a:solidFill>
-                  <a:schemeClr val="bg1"/>
-                </a:solidFill>
-              </a:rPr>
-              <a:t>2</a:t>
-            </a:r>
-            <a:r>
-              <a:rPr lang="en-US" dirty="0">
-                <a:solidFill>
-                  <a:schemeClr val="bg1"/>
-                </a:solidFill>
-              </a:rPr>
-              <a:t>. </a:t>
-            </a:r>
-          </a:p>
-        </p:txBody>
-      </p:sp>
-      <p:sp>
-        <p:nvSpPr>
-          <p:cNvPr id="5" name="TextBox 4">
-            <a:extLst>
-              <a:ext uri="{FF2B5EF4-FFF2-40B4-BE49-F238E27FC236}">
-                <a16:creationId xmlns:a16="http://schemas.microsoft.com/office/drawing/2014/main" id="{9747BCA8-A847-7114-04B9-16833F38B983}"/>
-              </a:ext>
-            </a:extLst>
-          </p:cNvPr>
-          <p:cNvSpPr txBox="1"/>
-          <p:nvPr/>
-        </p:nvSpPr>
-        <p:spPr>
-          <a:xfrm>
-            <a:off x="1129149" y="4549641"/>
-            <a:ext cx="7821340" cy="830997"/>
-          </a:xfrm>
-          <a:prstGeom prst="rect">
-            <a:avLst/>
-          </a:prstGeom>
-          <a:noFill/>
-        </p:spPr>
-        <p:txBody>
-          <a:bodyPr wrap="square" rtlCol="0">
-            <a:spAutoFit/>
-          </a:bodyPr>
-          <a:lstStyle/>
-          <a:p>
-            <a:r>
-              <a:rPr lang="en-US" sz="1200" dirty="0">
-                <a:solidFill>
-                  <a:schemeClr val="bg1"/>
-                </a:solidFill>
-              </a:rPr>
-              <a:t>1. </a:t>
-            </a:r>
-            <a:r>
-              <a:rPr lang="en-US" sz="1200" i="1" dirty="0">
-                <a:solidFill>
-                  <a:schemeClr val="bg1"/>
-                </a:solidFill>
-              </a:rPr>
-              <a:t>Automated Combinatorial Testing for Software (ACTS)</a:t>
-            </a:r>
-            <a:r>
-              <a:rPr lang="en-US" sz="1200" dirty="0">
-                <a:solidFill>
-                  <a:schemeClr val="bg1"/>
-                </a:solidFill>
-              </a:rPr>
-              <a:t>. NIST Computer Security Division. (2016, July 20). https://</a:t>
-            </a:r>
-            <a:r>
-              <a:rPr lang="en-US" sz="1200" dirty="0" err="1">
-                <a:solidFill>
-                  <a:schemeClr val="bg1"/>
-                </a:solidFill>
-              </a:rPr>
-              <a:t>csrc.nist.rip</a:t>
-            </a:r>
-            <a:r>
-              <a:rPr lang="en-US" sz="1200" dirty="0">
-                <a:solidFill>
-                  <a:schemeClr val="bg1"/>
-                </a:solidFill>
-              </a:rPr>
-              <a:t>/groups/SNS/acts/ </a:t>
-            </a:r>
-          </a:p>
-          <a:p>
-            <a:r>
-              <a:rPr lang="en-US" sz="1200" dirty="0">
-                <a:solidFill>
-                  <a:schemeClr val="bg1"/>
-                </a:solidFill>
-              </a:rPr>
-              <a:t>2. </a:t>
-            </a:r>
-            <a:r>
-              <a:rPr lang="en-US" sz="1200" i="1" dirty="0">
-                <a:solidFill>
-                  <a:schemeClr val="bg1"/>
-                </a:solidFill>
-              </a:rPr>
-              <a:t>User Guide for ACTS</a:t>
-            </a:r>
-            <a:r>
-              <a:rPr lang="en-US" sz="1200" dirty="0">
-                <a:solidFill>
-                  <a:schemeClr val="bg1"/>
-                </a:solidFill>
-              </a:rPr>
-              <a:t>. NIST. (n.d.). </a:t>
-            </a:r>
-            <a:r>
-              <a:rPr lang="en-US" sz="1200" u="sng" dirty="0">
-                <a:solidFill>
-                  <a:schemeClr val="bg1"/>
-                </a:solidFill>
-                <a:hlinkClick r:id="rId3"/>
-              </a:rPr>
-              <a:t>https://csrc.nist.gov/csrc/media/Projects/automated-combinatorial-testing-for-software/documents/acts_user_guide_for_basic1.0_and_advanced3.3_versions_nov23.pdf</a:t>
-            </a:r>
-            <a:r>
-              <a:rPr lang="en-US" sz="1200" u="sng" dirty="0">
-                <a:solidFill>
-                  <a:schemeClr val="bg1"/>
-                </a:solidFill>
-              </a:rPr>
-              <a:t> </a:t>
-            </a:r>
-          </a:p>
-        </p:txBody>
-      </p:sp>
-    </p:spTree>
-  </p:cSld>
-  <p:clrMapOvr>
-    <a:masterClrMapping/>
-  </p:clrMapOvr>
-</p:sld>
-</file>
-
-<file path=ppt/slides/slide8.xml><?xml version="1.0" encoding="utf-8"?>
-<p:sld xmlns:a="http://schemas.openxmlformats.org/drawingml/2006/main" xmlns:r="http://schemas.openxmlformats.org/officeDocument/2006/relationships" xmlns:p="http://schemas.openxmlformats.org/presentationml/2006/main">
-  <p:cSld name="page3">
-    <p:spTree>
-      <p:nvGrpSpPr>
-        <p:cNvPr id="1" name=""/>
-        <p:cNvGrpSpPr/>
-        <p:nvPr/>
-      </p:nvGrpSpPr>
-      <p:grpSpPr>
-        <a:xfrm>
-          <a:off x="0" y="0"/>
-          <a:ext cx="0" cy="0"/>
-          <a:chOff x="0" y="0"/>
-          <a:chExt cx="0" cy="0"/>
-        </a:xfrm>
-      </p:grpSpPr>
-      <p:sp>
-        <p:nvSpPr>
-          <p:cNvPr id="2" name="Title 1">
-            <a:extLst>
-              <a:ext uri="{FF2B5EF4-FFF2-40B4-BE49-F238E27FC236}">
-                <a16:creationId xmlns:a16="http://schemas.microsoft.com/office/drawing/2014/main" id="{1F22CA55-51A0-611A-7B91-13ABAA9983C9}"/>
-              </a:ext>
-            </a:extLst>
-          </p:cNvPr>
-          <p:cNvSpPr txBox="1">
-            <a:spLocks noGrp="1"/>
-          </p:cNvSpPr>
-          <p:nvPr>
-            <p:ph type="title" idx="4294967295"/>
-          </p:nvPr>
-        </p:nvSpPr>
-        <p:spPr>
-          <a:xfrm>
-            <a:off x="503999" y="422301"/>
-            <a:ext cx="9071640" cy="553998"/>
-          </a:xfrm>
-        </p:spPr>
-        <p:txBody>
-          <a:bodyPr>
-            <a:spAutoFit/>
-          </a:bodyPr>
-          <a:lstStyle/>
-          <a:p>
-            <a:pPr lvl="0"/>
-            <a:r>
-              <a:rPr lang="en-US" dirty="0">
-                <a:solidFill>
-                  <a:schemeClr val="bg1"/>
-                </a:solidFill>
-              </a:rPr>
-              <a:t>Application of CT to </a:t>
-            </a:r>
-            <a:r>
-              <a:rPr lang="en-US" dirty="0" err="1">
-                <a:solidFill>
-                  <a:schemeClr val="bg1"/>
-                </a:solidFill>
-                <a:latin typeface="Courier New" panose="02070309020205020404" pitchFamily="49" charset="0"/>
-                <a:cs typeface="Courier New" panose="02070309020205020404" pitchFamily="49" charset="0"/>
-              </a:rPr>
-              <a:t>LakeTemperature</a:t>
-            </a:r>
-            <a:endParaRPr lang="en-US" dirty="0">
-              <a:solidFill>
-                <a:schemeClr val="bg1"/>
-              </a:solidFill>
-              <a:latin typeface="Courier New" panose="02070309020205020404" pitchFamily="49" charset="0"/>
-              <a:cs typeface="Courier New" panose="02070309020205020404" pitchFamily="49" charset="0"/>
-            </a:endParaRPr>
-          </a:p>
-        </p:txBody>
-      </p:sp>
-      <p:sp>
-        <p:nvSpPr>
-          <p:cNvPr id="3" name="Text Placeholder 2">
-            <a:extLst>
-              <a:ext uri="{FF2B5EF4-FFF2-40B4-BE49-F238E27FC236}">
-                <a16:creationId xmlns:a16="http://schemas.microsoft.com/office/drawing/2014/main" id="{4FC0F3B3-D388-0133-98BD-A5D2EC76DF23}"/>
-              </a:ext>
-            </a:extLst>
-          </p:cNvPr>
-          <p:cNvSpPr txBox="1">
-            <a:spLocks noGrp="1"/>
-          </p:cNvSpPr>
-          <p:nvPr>
-            <p:ph type="body" idx="4294967295"/>
-          </p:nvPr>
-        </p:nvSpPr>
-        <p:spPr>
-          <a:xfrm>
-            <a:off x="503999" y="1326600"/>
-            <a:ext cx="9071640" cy="3613679"/>
-          </a:xfrm>
-        </p:spPr>
-        <p:txBody>
-          <a:bodyPr>
-            <a:normAutofit fontScale="92500" lnSpcReduction="20000"/>
-          </a:bodyPr>
-          <a:lstStyle/>
-          <a:p>
-            <a:pPr marL="342900" indent="-342900"/>
-            <a:r>
-              <a:rPr lang="en-US" dirty="0">
-                <a:solidFill>
-                  <a:schemeClr val="bg1"/>
-                </a:solidFill>
-              </a:rPr>
-              <a:t>The model constants, which we can control when running </a:t>
-            </a:r>
-            <a:r>
-              <a:rPr lang="en-US" dirty="0" err="1">
-                <a:solidFill>
-                  <a:schemeClr val="bg1"/>
-                </a:solidFill>
-                <a:latin typeface="Courier New" panose="02070309020205020404" pitchFamily="49" charset="0"/>
-                <a:cs typeface="Courier New" panose="02070309020205020404" pitchFamily="49" charset="0"/>
-              </a:rPr>
-              <a:t>LakeTemperature</a:t>
-            </a:r>
-            <a:r>
-              <a:rPr lang="en-US" dirty="0">
-                <a:solidFill>
-                  <a:schemeClr val="bg1"/>
-                </a:solidFill>
-              </a:rPr>
-              <a:t>, are used as the parameters for the combinatorial test cases. </a:t>
-            </a:r>
-          </a:p>
-          <a:p>
-            <a:pPr marL="342900" indent="-342900"/>
-            <a:r>
-              <a:rPr lang="en-US" dirty="0">
-                <a:solidFill>
-                  <a:schemeClr val="bg1"/>
-                </a:solidFill>
-              </a:rPr>
-              <a:t>Booleans can be either 0 or 1.</a:t>
-            </a:r>
-          </a:p>
-          <a:p>
-            <a:pPr marL="342900" indent="-342900"/>
-            <a:r>
-              <a:rPr lang="en-US" dirty="0">
-                <a:solidFill>
-                  <a:schemeClr val="bg1"/>
-                </a:solidFill>
-              </a:rPr>
-              <a:t>For integers, we linearly interpolate over their ranges to get up to 11 values. </a:t>
-            </a:r>
-          </a:p>
-          <a:p>
-            <a:pPr marL="342900" indent="-342900"/>
-            <a:r>
-              <a:rPr lang="en-US" dirty="0">
-                <a:solidFill>
-                  <a:schemeClr val="bg1"/>
-                </a:solidFill>
-              </a:rPr>
-              <a:t>For floats, we linearly interpolate over their ranges to get exactly 11 values. </a:t>
-            </a:r>
-          </a:p>
-          <a:p>
-            <a:pPr marL="342900" indent="-342900"/>
-            <a:r>
-              <a:rPr lang="en-US" dirty="0">
-                <a:solidFill>
-                  <a:schemeClr val="bg1"/>
-                </a:solidFill>
-              </a:rPr>
-              <a:t>ACTS generates covering arrays from 2-way to 5-way and outputs a CSV file for each, from which </a:t>
-            </a:r>
-            <a:r>
-              <a:rPr lang="en-US" dirty="0" err="1">
-                <a:solidFill>
-                  <a:schemeClr val="bg1"/>
-                </a:solidFill>
-              </a:rPr>
-              <a:t>NetCDF</a:t>
-            </a:r>
-            <a:r>
-              <a:rPr lang="en-US" dirty="0">
-                <a:solidFill>
-                  <a:schemeClr val="bg1"/>
-                </a:solidFill>
-              </a:rPr>
-              <a:t> files are created using a Python script (</a:t>
-            </a:r>
-            <a:r>
-              <a:rPr lang="en-US" dirty="0">
-                <a:solidFill>
-                  <a:schemeClr val="bg1"/>
-                </a:solidFill>
-                <a:latin typeface="Courier New" panose="02070309020205020404" pitchFamily="49" charset="0"/>
-                <a:cs typeface="Courier New" panose="02070309020205020404" pitchFamily="49" charset="0"/>
-              </a:rPr>
-              <a:t>csv2nc</a:t>
-            </a:r>
-            <a:r>
-              <a:rPr lang="en-US" dirty="0">
-                <a:solidFill>
-                  <a:schemeClr val="bg1"/>
-                </a:solidFill>
-              </a:rPr>
-              <a:t>). These are run on the model using the </a:t>
-            </a:r>
-            <a:r>
-              <a:rPr lang="en-US" dirty="0" err="1">
-                <a:solidFill>
-                  <a:schemeClr val="bg1"/>
-                </a:solidFill>
-              </a:rPr>
-              <a:t>NetCDF</a:t>
-            </a:r>
-            <a:r>
-              <a:rPr lang="en-US" dirty="0">
-                <a:solidFill>
-                  <a:schemeClr val="bg1"/>
-                </a:solidFill>
-              </a:rPr>
-              <a:t> Cases Sampling Plugin. </a:t>
-            </a:r>
-            <a:endParaRPr lang="en-US" i="1" dirty="0">
-              <a:solidFill>
-                <a:schemeClr val="bg1"/>
-              </a:solidFill>
-            </a:endParaRPr>
-          </a:p>
-        </p:txBody>
-      </p:sp>
-    </p:spTree>
-  </p:cSld>
-  <p:clrMapOvr>
-    <a:masterClrMapping/>
-  </p:clrMapOvr>
-</p:sld>
-</file>
-
-<file path=ppt/slides/slide9.xml><?xml version="1.0" encoding="utf-8"?>
-<p:sld xmlns:a="http://schemas.openxmlformats.org/drawingml/2006/main" xmlns:r="http://schemas.openxmlformats.org/officeDocument/2006/relationships" xmlns:p="http://schemas.openxmlformats.org/presentationml/2006/main">
-  <p:cSld name="page4">
-    <p:spTree>
-      <p:nvGrpSpPr>
-        <p:cNvPr id="1" name=""/>
-        <p:cNvGrpSpPr/>
-        <p:nvPr/>
-      </p:nvGrpSpPr>
-      <p:grpSpPr>
-        <a:xfrm>
-          <a:off x="0" y="0"/>
-          <a:ext cx="0" cy="0"/>
-          <a:chOff x="0" y="0"/>
-          <a:chExt cx="0" cy="0"/>
-        </a:xfrm>
-      </p:grpSpPr>
-      <p:sp>
-        <p:nvSpPr>
-          <p:cNvPr id="2" name="Title 1">
-            <a:extLst>
-              <a:ext uri="{FF2B5EF4-FFF2-40B4-BE49-F238E27FC236}">
-                <a16:creationId xmlns:a16="http://schemas.microsoft.com/office/drawing/2014/main" id="{C4490A42-8874-BE43-3396-EC82FA0BDFFE}"/>
-              </a:ext>
-            </a:extLst>
-          </p:cNvPr>
-          <p:cNvSpPr txBox="1">
-            <a:spLocks noGrp="1"/>
-          </p:cNvSpPr>
-          <p:nvPr>
-            <p:ph type="title" idx="4294967295"/>
-          </p:nvPr>
-        </p:nvSpPr>
-        <p:spPr>
-          <a:xfrm>
-            <a:off x="503999" y="422301"/>
-            <a:ext cx="9071640" cy="553998"/>
-          </a:xfrm>
-        </p:spPr>
-        <p:txBody>
-          <a:bodyPr>
-            <a:spAutoFit/>
-          </a:bodyPr>
-          <a:lstStyle/>
-          <a:p>
-            <a:pPr lvl="0"/>
-            <a:r>
-              <a:rPr lang="en-US" dirty="0">
-                <a:solidFill>
-                  <a:schemeClr val="bg1"/>
-                </a:solidFill>
-              </a:rPr>
-              <a:t>Test Oracle</a:t>
-            </a:r>
-          </a:p>
-        </p:txBody>
-      </p:sp>
-      <p:sp>
-        <p:nvSpPr>
-          <p:cNvPr id="3" name="Text Placeholder 2">
-            <a:extLst>
-              <a:ext uri="{FF2B5EF4-FFF2-40B4-BE49-F238E27FC236}">
-                <a16:creationId xmlns:a16="http://schemas.microsoft.com/office/drawing/2014/main" id="{86FF665C-42E1-DF86-A85F-54C67BE68385}"/>
-              </a:ext>
-            </a:extLst>
-          </p:cNvPr>
-          <p:cNvSpPr txBox="1">
-            <a:spLocks noGrp="1"/>
-          </p:cNvSpPr>
-          <p:nvPr>
-            <p:ph type="body" idx="4294967295"/>
-          </p:nvPr>
-        </p:nvSpPr>
-        <p:spPr/>
-        <p:txBody>
-          <a:bodyPr>
-            <a:normAutofit/>
-          </a:bodyPr>
-          <a:lstStyle/>
-          <a:p>
-            <a:pPr marL="342900" indent="-342900"/>
-            <a:r>
-              <a:rPr lang="en-US" dirty="0">
-                <a:solidFill>
-                  <a:schemeClr val="bg1"/>
-                </a:solidFill>
-              </a:rPr>
-              <a:t>Scientific software verification is challenging due to often lacking a test oracle. </a:t>
-            </a:r>
-          </a:p>
-          <a:p>
-            <a:pPr marL="342900" indent="-342900"/>
-            <a:r>
-              <a:rPr lang="en-US" dirty="0">
-                <a:solidFill>
-                  <a:schemeClr val="bg1"/>
-                </a:solidFill>
-              </a:rPr>
-              <a:t>We implemented checks that validate model outputs, supported by the Fault Finding Analysis Plugin. </a:t>
-            </a:r>
-          </a:p>
-          <a:p>
-            <a:pPr marL="342900" indent="-342900"/>
-            <a:r>
-              <a:rPr lang="en-US" dirty="0">
-                <a:solidFill>
-                  <a:schemeClr val="bg1"/>
-                </a:solidFill>
-              </a:rPr>
-              <a:t>Checks include ranges of outputs, signs, enumerated values, finiteness, relationships to other inputs/outputs, and certain physical laws and constraints.</a:t>
             </a:r>
           </a:p>
         </p:txBody>

--- a/documentation/for_collaborators/AnalysisOverview.pptx
+++ b/documentation/for_collaborators/AnalysisOverview.pptx
@@ -7709,32 +7709,70 @@
       </p:sp>
       <p:grpSp>
         <p:nvGrpSpPr>
-          <p:cNvPr id="13" name="Group 12">
+          <p:cNvPr id="15" name="Group 14">
             <a:extLst>
               <a:ext uri="{FF2B5EF4-FFF2-40B4-BE49-F238E27FC236}">
-                <a16:creationId xmlns:a16="http://schemas.microsoft.com/office/drawing/2014/main" id="{8741B825-BC4E-C721-6C7A-1CCEA5A930F7}"/>
+                <a16:creationId xmlns:a16="http://schemas.microsoft.com/office/drawing/2014/main" id="{2E75006F-BDC5-B94D-8B39-3E088897142C}"/>
               </a:ext>
             </a:extLst>
           </p:cNvPr>
-          <p:cNvGrpSpPr>
-            <a:grpSpLocks noChangeAspect="1"/>
-          </p:cNvGrpSpPr>
+          <p:cNvGrpSpPr/>
           <p:nvPr/>
         </p:nvGrpSpPr>
         <p:grpSpPr>
           <a:xfrm>
-            <a:off x="1033052" y="2377441"/>
-            <a:ext cx="8014519" cy="3157859"/>
-            <a:chOff x="121909" y="2568286"/>
-            <a:chExt cx="7616115" cy="3000881"/>
+            <a:off x="349858" y="2377441"/>
+            <a:ext cx="9379922" cy="3157858"/>
+            <a:chOff x="-408894" y="2377442"/>
+            <a:chExt cx="9379922" cy="3157858"/>
           </a:xfrm>
         </p:grpSpPr>
+        <p:sp>
+          <p:nvSpPr>
+            <p:cNvPr id="10" name="TextBox 9">
+              <a:extLst>
+                <a:ext uri="{FF2B5EF4-FFF2-40B4-BE49-F238E27FC236}">
+                  <a16:creationId xmlns:a16="http://schemas.microsoft.com/office/drawing/2014/main" id="{951E1D4C-C443-76A6-47F2-F4E497381A31}"/>
+                </a:ext>
+              </a:extLst>
+            </p:cNvPr>
+            <p:cNvSpPr txBox="1"/>
+            <p:nvPr/>
+          </p:nvSpPr>
+          <p:spPr>
+            <a:xfrm>
+              <a:off x="-408894" y="3738022"/>
+              <a:ext cx="1825786" cy="388652"/>
+            </a:xfrm>
+            <a:prstGeom prst="rect">
+              <a:avLst/>
+            </a:prstGeom>
+            <a:noFill/>
+          </p:spPr>
+          <p:txBody>
+            <a:bodyPr wrap="none" rtlCol="0">
+              <a:spAutoFit/>
+            </a:bodyPr>
+            <a:lstStyle/>
+            <a:p>
+              <a:pPr algn="ctr"/>
+              <a:r>
+                <a:rPr lang="en-US" dirty="0">
+                  <a:solidFill>
+                    <a:schemeClr val="bg1"/>
+                  </a:solidFill>
+                </a:rPr>
+                <a:t>Example Check</a:t>
+              </a:r>
+            </a:p>
+          </p:txBody>
+        </p:sp>
         <p:grpSp>
           <p:nvGrpSpPr>
-            <p:cNvPr id="9" name="Group 8">
+            <p:cNvPr id="14" name="Group 13">
               <a:extLst>
                 <a:ext uri="{FF2B5EF4-FFF2-40B4-BE49-F238E27FC236}">
-                  <a16:creationId xmlns:a16="http://schemas.microsoft.com/office/drawing/2014/main" id="{2A1C59D2-29A0-E23B-6D04-B452ACCF75E5}"/>
+                  <a16:creationId xmlns:a16="http://schemas.microsoft.com/office/drawing/2014/main" id="{C287D273-2D1F-5818-E2FE-F9100DD3C98E}"/>
                 </a:ext>
               </a:extLst>
             </p:cNvPr>
@@ -7745,10 +7783,10 @@
           </p:nvGrpSpPr>
           <p:grpSpPr>
             <a:xfrm>
-              <a:off x="2039816" y="2568286"/>
-              <a:ext cx="5698208" cy="3000881"/>
-              <a:chOff x="1687019" y="2094031"/>
-              <a:chExt cx="6705600" cy="3531408"/>
+              <a:off x="1583085" y="2377442"/>
+              <a:ext cx="7387943" cy="3157858"/>
+              <a:chOff x="3014728" y="2989374"/>
+              <a:chExt cx="5956300" cy="2545925"/>
             </a:xfrm>
           </p:grpSpPr>
           <p:pic>
@@ -7773,8 +7811,8 @@
             </p:blipFill>
             <p:spPr>
               <a:xfrm>
-                <a:off x="1715721" y="4355439"/>
-                <a:ext cx="6591300" cy="1270000"/>
+                <a:off x="3076952" y="4399638"/>
+                <a:ext cx="5894076" cy="1135661"/>
               </a:xfrm>
               <a:prstGeom prst="rect">
                 <a:avLst/>
@@ -7783,10 +7821,10 @@
           </p:pic>
           <p:pic>
             <p:nvPicPr>
-              <p:cNvPr id="6" name="Picture 5">
+              <p:cNvPr id="11" name="Picture 10">
                 <a:extLst>
                   <a:ext uri="{FF2B5EF4-FFF2-40B4-BE49-F238E27FC236}">
-                    <a16:creationId xmlns:a16="http://schemas.microsoft.com/office/drawing/2014/main" id="{9386B1BA-E0EC-23E8-B604-0DA417EC1B03}"/>
+                    <a16:creationId xmlns:a16="http://schemas.microsoft.com/office/drawing/2014/main" id="{ABBF342E-5AE0-D331-1F4A-53C4A4FBEB1D}"/>
                   </a:ext>
                 </a:extLst>
               </p:cNvPr>
@@ -7803,8 +7841,8 @@
             </p:blipFill>
             <p:spPr>
               <a:xfrm>
-                <a:off x="1687019" y="2094031"/>
-                <a:ext cx="6705600" cy="2171701"/>
+                <a:off x="3014728" y="2989374"/>
+                <a:ext cx="5956300" cy="1270000"/>
               </a:xfrm>
               <a:prstGeom prst="rect">
                 <a:avLst/>
@@ -7812,46 +7850,6 @@
             </p:spPr>
           </p:pic>
         </p:grpSp>
-        <p:sp>
-          <p:nvSpPr>
-            <p:cNvPr id="10" name="TextBox 9">
-              <a:extLst>
-                <a:ext uri="{FF2B5EF4-FFF2-40B4-BE49-F238E27FC236}">
-                  <a16:creationId xmlns:a16="http://schemas.microsoft.com/office/drawing/2014/main" id="{951E1D4C-C443-76A6-47F2-F4E497381A31}"/>
-                </a:ext>
-              </a:extLst>
-            </p:cNvPr>
-            <p:cNvSpPr txBox="1"/>
-            <p:nvPr/>
-          </p:nvSpPr>
-          <p:spPr>
-            <a:xfrm>
-              <a:off x="121909" y="3814566"/>
-              <a:ext cx="1735026" cy="369332"/>
-            </a:xfrm>
-            <a:prstGeom prst="rect">
-              <a:avLst/>
-            </a:prstGeom>
-            <a:noFill/>
-          </p:spPr>
-          <p:txBody>
-            <a:bodyPr wrap="none" rtlCol="0">
-              <a:spAutoFit/>
-            </a:bodyPr>
-            <a:lstStyle/>
-            <a:p>
-              <a:pPr algn="ctr"/>
-              <a:r>
-                <a:rPr lang="en-US" dirty="0">
-                  <a:solidFill>
-                    <a:schemeClr val="bg1"/>
-                  </a:solidFill>
-                </a:rPr>
-                <a:t>Example Check</a:t>
-              </a:r>
-            </a:p>
-          </p:txBody>
-        </p:sp>
       </p:grpSp>
     </p:spTree>
     <p:extLst>
@@ -9107,10 +9105,10 @@
       </p:sp>
       <p:grpSp>
         <p:nvGrpSpPr>
-          <p:cNvPr id="14" name="Group 13">
+          <p:cNvPr id="16" name="Group 15">
             <a:extLst>
               <a:ext uri="{FF2B5EF4-FFF2-40B4-BE49-F238E27FC236}">
-                <a16:creationId xmlns:a16="http://schemas.microsoft.com/office/drawing/2014/main" id="{EDFD874D-1538-B509-3D69-0981A4627FC2}"/>
+                <a16:creationId xmlns:a16="http://schemas.microsoft.com/office/drawing/2014/main" id="{1BA4F825-489C-82EA-9D87-7F0AF37FCFC1}"/>
               </a:ext>
             </a:extLst>
           </p:cNvPr>
@@ -9119,18 +9117,48 @@
         </p:nvGrpSpPr>
         <p:grpSpPr>
           <a:xfrm>
-            <a:off x="954766" y="2377441"/>
-            <a:ext cx="8170105" cy="3189673"/>
-            <a:chOff x="1033052" y="2312502"/>
-            <a:chExt cx="8170105" cy="3189673"/>
+            <a:off x="128541" y="2377441"/>
+            <a:ext cx="9822555" cy="3090242"/>
+            <a:chOff x="240726" y="2372836"/>
+            <a:chExt cx="9822555" cy="3090242"/>
           </a:xfrm>
         </p:grpSpPr>
+        <p:pic>
+          <p:nvPicPr>
+            <p:cNvPr id="6" name="Picture 5">
+              <a:extLst>
+                <a:ext uri="{FF2B5EF4-FFF2-40B4-BE49-F238E27FC236}">
+                  <a16:creationId xmlns:a16="http://schemas.microsoft.com/office/drawing/2014/main" id="{339475B0-128A-1D6A-B762-E7B564115DF5}"/>
+                </a:ext>
+              </a:extLst>
+            </p:cNvPr>
+            <p:cNvPicPr>
+              <a:picLocks noChangeAspect="1"/>
+            </p:cNvPicPr>
+            <p:nvPr/>
+          </p:nvPicPr>
+          <p:blipFill>
+            <a:blip r:embed="rId2"/>
+            <a:stretch>
+              <a:fillRect/>
+            </a:stretch>
+          </p:blipFill>
+          <p:spPr>
+            <a:xfrm>
+              <a:off x="2066512" y="2372836"/>
+              <a:ext cx="7996769" cy="1237139"/>
+            </a:xfrm>
+            <a:prstGeom prst="rect">
+              <a:avLst/>
+            </a:prstGeom>
+          </p:spPr>
+        </p:pic>
         <p:sp>
           <p:nvSpPr>
-            <p:cNvPr id="10" name="TextBox 9">
+            <p:cNvPr id="8" name="TextBox 7">
               <a:extLst>
                 <a:ext uri="{FF2B5EF4-FFF2-40B4-BE49-F238E27FC236}">
-                  <a16:creationId xmlns:a16="http://schemas.microsoft.com/office/drawing/2014/main" id="{751AAF05-7E7E-1CB8-82AB-DBDB1F3E2993}"/>
+                  <a16:creationId xmlns:a16="http://schemas.microsoft.com/office/drawing/2014/main" id="{491CACAA-8F5D-DCE9-ECCC-B31D41E1D4C0}"/>
                 </a:ext>
               </a:extLst>
             </p:cNvPr>
@@ -9139,7 +9167,7 @@
           </p:nvSpPr>
           <p:spPr>
             <a:xfrm>
-              <a:off x="1033052" y="3688914"/>
+              <a:off x="240726" y="3843377"/>
               <a:ext cx="1825786" cy="388652"/>
             </a:xfrm>
             <a:prstGeom prst="rect">
@@ -9165,89 +9193,36 @@
             </a:p>
           </p:txBody>
         </p:sp>
-        <p:grpSp>
-          <p:nvGrpSpPr>
-            <p:cNvPr id="12" name="Group 11">
+        <p:pic>
+          <p:nvPicPr>
+            <p:cNvPr id="15" name="Picture 14">
               <a:extLst>
                 <a:ext uri="{FF2B5EF4-FFF2-40B4-BE49-F238E27FC236}">
-                  <a16:creationId xmlns:a16="http://schemas.microsoft.com/office/drawing/2014/main" id="{C7A53FBF-594A-5D9D-AC5D-272BF13DDEC0}"/>
+                  <a16:creationId xmlns:a16="http://schemas.microsoft.com/office/drawing/2014/main" id="{787B8874-105D-22A1-93C3-CF03B2BC5B26}"/>
                 </a:ext>
               </a:extLst>
             </p:cNvPr>
-            <p:cNvGrpSpPr>
-              <a:grpSpLocks noChangeAspect="1"/>
-            </p:cNvGrpSpPr>
+            <p:cNvPicPr>
+              <a:picLocks noChangeAspect="1"/>
+            </p:cNvPicPr>
             <p:nvPr/>
-          </p:nvGrpSpPr>
-          <p:grpSpPr>
+          </p:nvPicPr>
+          <p:blipFill>
+            <a:blip r:embed="rId3"/>
+            <a:stretch>
+              <a:fillRect/>
+            </a:stretch>
+          </p:blipFill>
+          <p:spPr>
             <a:xfrm>
-              <a:off x="2858837" y="2312502"/>
-              <a:ext cx="6344320" cy="3189673"/>
-              <a:chOff x="1153619" y="1647182"/>
-              <a:chExt cx="7772400" cy="3907656"/>
+              <a:off x="2066512" y="3773978"/>
+              <a:ext cx="6616700" cy="1689100"/>
             </a:xfrm>
-          </p:grpSpPr>
-          <p:pic>
-            <p:nvPicPr>
-              <p:cNvPr id="11" name="Picture 10">
-                <a:extLst>
-                  <a:ext uri="{FF2B5EF4-FFF2-40B4-BE49-F238E27FC236}">
-                    <a16:creationId xmlns:a16="http://schemas.microsoft.com/office/drawing/2014/main" id="{CB75FE47-B2C3-01E5-48DF-1AF858C41578}"/>
-                  </a:ext>
-                </a:extLst>
-              </p:cNvPr>
-              <p:cNvPicPr>
-                <a:picLocks noChangeAspect="1"/>
-              </p:cNvPicPr>
-              <p:nvPr/>
-            </p:nvPicPr>
-            <p:blipFill>
-              <a:blip r:embed="rId2"/>
-              <a:stretch>
-                <a:fillRect/>
-              </a:stretch>
-            </p:blipFill>
-            <p:spPr>
-              <a:xfrm>
-                <a:off x="1198031" y="3840338"/>
-                <a:ext cx="6616700" cy="1714500"/>
-              </a:xfrm>
-              <a:prstGeom prst="rect">
-                <a:avLst/>
-              </a:prstGeom>
-            </p:spPr>
-          </p:pic>
-          <p:pic>
-            <p:nvPicPr>
-              <p:cNvPr id="5" name="Picture 4">
-                <a:extLst>
-                  <a:ext uri="{FF2B5EF4-FFF2-40B4-BE49-F238E27FC236}">
-                    <a16:creationId xmlns:a16="http://schemas.microsoft.com/office/drawing/2014/main" id="{D15165CA-CBAD-0626-30C7-4B07B9487877}"/>
-                  </a:ext>
-                </a:extLst>
-              </p:cNvPr>
-              <p:cNvPicPr>
-                <a:picLocks noChangeAspect="1"/>
-              </p:cNvPicPr>
-              <p:nvPr/>
-            </p:nvPicPr>
-            <p:blipFill>
-              <a:blip r:embed="rId3"/>
-              <a:stretch>
-                <a:fillRect/>
-              </a:stretch>
-            </p:blipFill>
-            <p:spPr>
-              <a:xfrm>
-                <a:off x="1153619" y="1647182"/>
-                <a:ext cx="7772400" cy="2150852"/>
-              </a:xfrm>
-              <a:prstGeom prst="rect">
-                <a:avLst/>
-              </a:prstGeom>
-            </p:spPr>
-          </p:pic>
-        </p:grpSp>
+            <a:prstGeom prst="rect">
+              <a:avLst/>
+            </a:prstGeom>
+          </p:spPr>
+        </p:pic>
       </p:grpSp>
     </p:spTree>
     <p:extLst>

--- a/documentation/for_collaborators/AnalysisOverview.pptx
+++ b/documentation/for_collaborators/AnalysisOverview.pptx
@@ -47,10 +47,10 @@
     <p:sldId id="304" r:id="rId35"/>
     <p:sldId id="305" r:id="rId36"/>
     <p:sldId id="262" r:id="rId37"/>
-    <p:sldId id="276" r:id="rId38"/>
-    <p:sldId id="277" r:id="rId39"/>
-    <p:sldId id="278" r:id="rId40"/>
-    <p:sldId id="265" r:id="rId41"/>
+    <p:sldId id="306" r:id="rId38"/>
+    <p:sldId id="276" r:id="rId39"/>
+    <p:sldId id="265" r:id="rId40"/>
+    <p:sldId id="307" r:id="rId41"/>
   </p:sldIdLst>
   <p:sldSz cx="10080625" cy="5670550"/>
   <p:notesSz cx="7559675" cy="10691813"/>
@@ -171,7 +171,7 @@
       <pc:sldMk xmlns:pc="http://schemas.microsoft.com/office/powerpoint/2013/main/command" cId="0" sldId="262"/>
       <ac:spMk id="3" creationId="{3F589F92-B484-4E15-0CDC-FFD075A2A74E}"/>
       <ac:txMk cp="41" len="3">
-        <ac:context len="148" hash="802315166"/>
+        <ac:context len="255" hash="937111326"/>
       </ac:txMk>
     </ac:txMkLst>
     <p188:pos x="2899601" y="1264200"/>
@@ -213,8 +213,8 @@
       <pc:docMk xmlns:pc="http://schemas.microsoft.com/office/powerpoint/2013/main/command"/>
       <pc:sldMk xmlns:pc="http://schemas.microsoft.com/office/powerpoint/2013/main/command" cId="0" sldId="265"/>
       <ac:spMk id="3" creationId="{C9367797-CD5B-309B-985B-DF6091246510}"/>
-      <ac:txMk cp="695" len="4">
-        <ac:context len="1250" hash="3565562689"/>
+      <ac:txMk cp="695">
+        <ac:context len="696" hash="2596077629"/>
       </ac:txMk>
     </ac:txMkLst>
     <p188:pos x="2747202" y="2605320"/>
@@ -239,63 +239,11 @@
       <pc:docMk xmlns:pc="http://schemas.microsoft.com/office/powerpoint/2013/main/command"/>
       <pc:sldMk xmlns:pc="http://schemas.microsoft.com/office/powerpoint/2013/main/command" cId="2353400714" sldId="276"/>
       <ac:spMk id="3" creationId="{5CF707B8-09A9-A28B-36FE-7651ACC03308}"/>
-      <ac:txMk cp="17" len="5">
-        <ac:context len="213" hash="1652090085"/>
+      <ac:txMk cp="107" len="5">
+        <ac:context len="362" hash="2449489152"/>
       </ac:txMk>
     </ac:txMkLst>
     <p188:pos x="3041841" y="370120"/>
-    <p188:txBody>
-      <a:bodyPr/>
-      <a:lstStyle/>
-      <a:p>
-        <a:r>
-          <a:rPr lang="en-US"/>
-          <a:t>Might change</a:t>
-        </a:r>
-      </a:p>
-    </p188:txBody>
-  </p188:cm>
-</p188:cmLst>
-</file>
-
-<file path=ppt/comments/modernComment_115_BCAF1D66.xml><?xml version="1.0" encoding="utf-8"?>
-<p188:cmLst xmlns:a="http://schemas.openxmlformats.org/drawingml/2006/main" xmlns:r="http://schemas.openxmlformats.org/officeDocument/2006/relationships" xmlns:p188="http://schemas.microsoft.com/office/powerpoint/2018/8/main">
-  <p188:cm id="{B8C38A4E-EF70-AC41-B516-C6C65B00F265}" authorId="{5E7478A2-2A14-AA1F-803D-D7D14AC37D3F}" created="2026-06-02T16:56:33.267">
-    <ac:txMkLst xmlns:ac="http://schemas.microsoft.com/office/drawing/2013/main/command">
-      <pc:docMk xmlns:pc="http://schemas.microsoft.com/office/powerpoint/2013/main/command"/>
-      <pc:sldMk xmlns:pc="http://schemas.microsoft.com/office/powerpoint/2013/main/command" cId="3165592934" sldId="277"/>
-      <ac:spMk id="3" creationId="{56064C14-1601-F022-7F3D-615176F6A82B}"/>
-      <ac:txMk cp="17" len="6">
-        <ac:context len="214" hash="978498448"/>
-      </ac:txMk>
-    </ac:txMkLst>
-    <p188:pos x="3194241" y="370120"/>
-    <p188:txBody>
-      <a:bodyPr/>
-      <a:lstStyle/>
-      <a:p>
-        <a:r>
-          <a:rPr lang="en-US"/>
-          <a:t>Might change</a:t>
-        </a:r>
-      </a:p>
-    </p188:txBody>
-  </p188:cm>
-</p188:cmLst>
-</file>
-
-<file path=ppt/comments/modernComment_116_EBB7AEDD.xml><?xml version="1.0" encoding="utf-8"?>
-<p188:cmLst xmlns:a="http://schemas.openxmlformats.org/drawingml/2006/main" xmlns:r="http://schemas.openxmlformats.org/officeDocument/2006/relationships" xmlns:p188="http://schemas.microsoft.com/office/powerpoint/2018/8/main">
-  <p188:cm id="{304D26FF-432C-F14E-AE79-D77CE7DD64CA}" authorId="{5E7478A2-2A14-AA1F-803D-D7D14AC37D3F}" created="2026-06-02T16:56:36.670">
-    <ac:txMkLst xmlns:ac="http://schemas.microsoft.com/office/drawing/2013/main/command">
-      <pc:docMk xmlns:pc="http://schemas.microsoft.com/office/powerpoint/2013/main/command"/>
-      <pc:sldMk xmlns:pc="http://schemas.microsoft.com/office/powerpoint/2013/main/command" cId="3954683613" sldId="278"/>
-      <ac:spMk id="3" creationId="{31720598-1CB0-E7F3-3417-23A2488D52ED}"/>
-      <ac:txMk cp="17" len="7">
-        <ac:context len="215" hash="3706336318"/>
-      </ac:txMk>
-    </ac:txMkLst>
-    <p188:pos x="3346641" y="370120"/>
     <p188:txBody>
       <a:bodyPr/>
       <a:lstStyle/>
@@ -1149,7 +1097,7 @@
           <a:p>
             <a:pPr lvl="0"/>
             <a:fld id="{18702C2E-8935-084B-8A6A-C1C4FB937928}" type="slidenum">
-              <a:t>40</a:t>
+              <a:t>39</a:t>
             </a:fld>
             <a:endParaRPr lang="en-US"/>
           </a:p>
@@ -18054,7 +18002,7 @@
         </p:nvSpPr>
         <p:spPr>
           <a:xfrm>
-            <a:off x="503999" y="422301"/>
+            <a:off x="503999" y="229261"/>
             <a:ext cx="3346641" cy="553998"/>
           </a:xfrm>
         </p:spPr>
@@ -18094,13 +18042,13 @@
         </p:nvSpPr>
         <p:spPr>
           <a:xfrm>
-            <a:off x="503999" y="1326600"/>
-            <a:ext cx="3346641" cy="3288239"/>
+            <a:off x="503999" y="976300"/>
+            <a:ext cx="3346641" cy="4271950"/>
           </a:xfrm>
         </p:spPr>
         <p:txBody>
           <a:bodyPr>
-            <a:normAutofit/>
+            <a:normAutofit lnSpcReduction="10000"/>
           </a:bodyPr>
           <a:lstStyle/>
           <a:p>
@@ -18131,7 +18079,19 @@
                 </a:solidFill>
                 <a:latin typeface="AppleSystemUIFont" pitchFamily="2"/>
               </a:rPr>
-              <a:t>. </a:t>
+              <a:t>.</a:t>
+            </a:r>
+          </a:p>
+          <a:p>
+            <a:pPr marL="342900" indent="-342900"/>
+            <a:r>
+              <a:rPr lang="en-US" dirty="0">
+                <a:solidFill>
+                  <a:schemeClr val="bg1"/>
+                </a:solidFill>
+                <a:latin typeface="AppleSystemUIFont" pitchFamily="2"/>
+              </a:rPr>
+              <a:t>33 runs exited with an error because they used values outside of the valid ranges for some model constants.</a:t>
             </a:r>
           </a:p>
         </p:txBody>
@@ -18201,6 +18161,459 @@
           <p:cNvPr id="2" name="Title 1">
             <a:extLst>
               <a:ext uri="{FF2B5EF4-FFF2-40B4-BE49-F238E27FC236}">
+                <a16:creationId xmlns:a16="http://schemas.microsoft.com/office/drawing/2014/main" id="{1F3B2298-6163-B3B2-6488-4F4EF26BA91D}"/>
+              </a:ext>
+            </a:extLst>
+          </p:cNvPr>
+          <p:cNvSpPr txBox="1">
+            <a:spLocks/>
+          </p:cNvSpPr>
+          <p:nvPr/>
+        </p:nvSpPr>
+        <p:spPr>
+          <a:xfrm>
+            <a:off x="503999" y="422301"/>
+            <a:ext cx="9071640" cy="553998"/>
+          </a:xfrm>
+          <a:prstGeom prst="rect">
+            <a:avLst/>
+          </a:prstGeom>
+          <a:noFill/>
+          <a:ln>
+            <a:noFill/>
+          </a:ln>
+        </p:spPr>
+        <p:txBody>
+          <a:bodyPr vert="horz" lIns="0" tIns="0" rIns="0" bIns="0" anchor="ctr">
+            <a:spAutoFit/>
+          </a:bodyPr>
+          <a:lstStyle>
+            <a:lvl1pPr lvl="0" algn="ctr" rtl="0" hangingPunct="0">
+              <a:buNone/>
+              <a:tabLst/>
+              <a:defRPr lang="en-US" sz="3600" b="0" i="0" u="none" strike="noStrike" kern="1200" cap="none">
+                <a:ln>
+                  <a:noFill/>
+                </a:ln>
+                <a:highlight>
+                  <a:scrgbClr r="0" g="0" b="0">
+                    <a:alpha val="0"/>
+                  </a:scrgbClr>
+                </a:highlight>
+                <a:latin typeface="URW Bookman" pitchFamily="2"/>
+                <a:ea typeface="Nimbus Sans" pitchFamily="2"/>
+                <a:cs typeface="FreeSans" pitchFamily="2"/>
+              </a:defRPr>
+            </a:lvl1pPr>
+          </a:lstStyle>
+          <a:p>
+            <a:r>
+              <a:rPr lang="en-US" dirty="0">
+                <a:solidFill>
+                  <a:schemeClr val="bg1"/>
+                </a:solidFill>
+              </a:rPr>
+              <a:t>DOI 2 Results Explanation</a:t>
+            </a:r>
+          </a:p>
+        </p:txBody>
+      </p:sp>
+      <p:sp>
+        <p:nvSpPr>
+          <p:cNvPr id="4" name="Text Placeholder 2">
+            <a:extLst>
+              <a:ext uri="{FF2B5EF4-FFF2-40B4-BE49-F238E27FC236}">
+                <a16:creationId xmlns:a16="http://schemas.microsoft.com/office/drawing/2014/main" id="{EEFC29AC-029B-C422-30DC-566DF6CF3DB2}"/>
+              </a:ext>
+            </a:extLst>
+          </p:cNvPr>
+          <p:cNvSpPr txBox="1">
+            <a:spLocks/>
+          </p:cNvSpPr>
+          <p:nvPr/>
+        </p:nvSpPr>
+        <p:spPr>
+          <a:xfrm>
+            <a:off x="503999" y="976300"/>
+            <a:ext cx="9071640" cy="4442866"/>
+          </a:xfrm>
+          <a:prstGeom prst="rect">
+            <a:avLst/>
+          </a:prstGeom>
+          <a:noFill/>
+          <a:ln>
+            <a:noFill/>
+          </a:ln>
+        </p:spPr>
+        <p:txBody>
+          <a:bodyPr vert="horz" lIns="0" tIns="0" rIns="0" bIns="0">
+            <a:normAutofit fontScale="85000" lnSpcReduction="10000"/>
+          </a:bodyPr>
+          <a:lstStyle>
+            <a:lvl1pPr lvl="0" rtl="0" hangingPunct="0">
+              <a:spcBef>
+                <a:spcPts val="1417"/>
+              </a:spcBef>
+              <a:spcAft>
+                <a:spcPts val="0"/>
+              </a:spcAft>
+              <a:buSzPct val="45000"/>
+              <a:buFont typeface="OpenSymbol"/>
+              <a:buChar char="●"/>
+              <a:tabLst/>
+              <a:defRPr lang="en-US" sz="2400" b="0" i="0" u="none" strike="noStrike" kern="1200" cap="none">
+                <a:ln>
+                  <a:noFill/>
+                </a:ln>
+                <a:highlight>
+                  <a:scrgbClr r="0" g="0" b="0">
+                    <a:alpha val="0"/>
+                  </a:scrgbClr>
+                </a:highlight>
+                <a:latin typeface="URW Bookman" pitchFamily="2"/>
+                <a:ea typeface="Nimbus Sans" pitchFamily="2"/>
+                <a:cs typeface="FreeSans" pitchFamily="2"/>
+              </a:defRPr>
+            </a:lvl1pPr>
+            <a:lvl2pPr lvl="1" rtl="0" hangingPunct="0">
+              <a:spcBef>
+                <a:spcPts val="1417"/>
+              </a:spcBef>
+              <a:spcAft>
+                <a:spcPts val="0"/>
+              </a:spcAft>
+              <a:buSzPct val="75000"/>
+              <a:buFont typeface="OpenSymbol"/>
+              <a:buChar char="–"/>
+              <a:tabLst/>
+              <a:defRPr lang="en-US" sz="2400" b="0" i="0" u="none" strike="noStrike" kern="1200" cap="none">
+                <a:ln>
+                  <a:noFill/>
+                </a:ln>
+                <a:highlight>
+                  <a:scrgbClr r="0" g="0" b="0">
+                    <a:alpha val="0"/>
+                  </a:scrgbClr>
+                </a:highlight>
+                <a:latin typeface="URW Bookman" pitchFamily="2"/>
+                <a:ea typeface="Nimbus Sans" pitchFamily="2"/>
+                <a:cs typeface="FreeSans" pitchFamily="2"/>
+              </a:defRPr>
+            </a:lvl2pPr>
+            <a:lvl3pPr lvl="2" rtl="0" hangingPunct="0">
+              <a:spcBef>
+                <a:spcPts val="1417"/>
+              </a:spcBef>
+              <a:spcAft>
+                <a:spcPts val="0"/>
+              </a:spcAft>
+              <a:buSzPct val="45000"/>
+              <a:buFont typeface="OpenSymbol"/>
+              <a:buChar char="●"/>
+              <a:tabLst/>
+              <a:defRPr lang="en-US" sz="2400" b="0" i="0" u="none" strike="noStrike" kern="1200" cap="none">
+                <a:ln>
+                  <a:noFill/>
+                </a:ln>
+                <a:highlight>
+                  <a:scrgbClr r="0" g="0" b="0">
+                    <a:alpha val="0"/>
+                  </a:scrgbClr>
+                </a:highlight>
+                <a:latin typeface="URW Bookman" pitchFamily="2"/>
+                <a:ea typeface="Nimbus Sans" pitchFamily="2"/>
+                <a:cs typeface="FreeSans" pitchFamily="2"/>
+              </a:defRPr>
+            </a:lvl3pPr>
+            <a:lvl4pPr lvl="3" rtl="0" hangingPunct="0">
+              <a:spcBef>
+                <a:spcPts val="1417"/>
+              </a:spcBef>
+              <a:spcAft>
+                <a:spcPts val="0"/>
+              </a:spcAft>
+              <a:buSzPct val="75000"/>
+              <a:buFont typeface="OpenSymbol"/>
+              <a:buChar char="–"/>
+              <a:tabLst/>
+              <a:defRPr lang="en-US" sz="2400" b="0" i="0" u="none" strike="noStrike" kern="1200" cap="none">
+                <a:ln>
+                  <a:noFill/>
+                </a:ln>
+                <a:highlight>
+                  <a:scrgbClr r="0" g="0" b="0">
+                    <a:alpha val="0"/>
+                  </a:scrgbClr>
+                </a:highlight>
+                <a:latin typeface="URW Bookman" pitchFamily="2"/>
+                <a:ea typeface="Nimbus Sans" pitchFamily="2"/>
+                <a:cs typeface="FreeSans" pitchFamily="2"/>
+              </a:defRPr>
+            </a:lvl4pPr>
+            <a:lvl5pPr lvl="4" rtl="0" hangingPunct="0">
+              <a:spcBef>
+                <a:spcPts val="1417"/>
+              </a:spcBef>
+              <a:spcAft>
+                <a:spcPts val="0"/>
+              </a:spcAft>
+              <a:buSzPct val="45000"/>
+              <a:buFont typeface="OpenSymbol"/>
+              <a:buChar char="●"/>
+              <a:tabLst/>
+              <a:defRPr lang="en-US" sz="2400" b="0" i="0" u="none" strike="noStrike" kern="1200" cap="none">
+                <a:ln>
+                  <a:noFill/>
+                </a:ln>
+                <a:highlight>
+                  <a:scrgbClr r="0" g="0" b="0">
+                    <a:alpha val="0"/>
+                  </a:scrgbClr>
+                </a:highlight>
+                <a:latin typeface="URW Bookman" pitchFamily="2"/>
+                <a:ea typeface="Nimbus Sans" pitchFamily="2"/>
+                <a:cs typeface="FreeSans" pitchFamily="2"/>
+              </a:defRPr>
+            </a:lvl5pPr>
+            <a:lvl6pPr lvl="5" rtl="0" hangingPunct="0">
+              <a:spcBef>
+                <a:spcPts val="1417"/>
+              </a:spcBef>
+              <a:spcAft>
+                <a:spcPts val="0"/>
+              </a:spcAft>
+              <a:buSzPct val="45000"/>
+              <a:buFont typeface="OpenSymbol"/>
+              <a:buChar char="●"/>
+              <a:tabLst/>
+              <a:defRPr lang="en-US" sz="2400" b="0" i="0" u="none" strike="noStrike" kern="1200" cap="none">
+                <a:ln>
+                  <a:noFill/>
+                </a:ln>
+                <a:highlight>
+                  <a:scrgbClr r="0" g="0" b="0">
+                    <a:alpha val="0"/>
+                  </a:scrgbClr>
+                </a:highlight>
+                <a:latin typeface="URW Bookman" pitchFamily="2"/>
+                <a:ea typeface="Nimbus Sans" pitchFamily="2"/>
+                <a:cs typeface="FreeSans" pitchFamily="2"/>
+              </a:defRPr>
+            </a:lvl6pPr>
+            <a:lvl7pPr lvl="6" rtl="0" hangingPunct="0">
+              <a:spcBef>
+                <a:spcPts val="1417"/>
+              </a:spcBef>
+              <a:spcAft>
+                <a:spcPts val="0"/>
+              </a:spcAft>
+              <a:buSzPct val="45000"/>
+              <a:buFont typeface="OpenSymbol"/>
+              <a:buChar char="●"/>
+              <a:tabLst/>
+              <a:defRPr lang="en-US" sz="2400" b="0" i="0" u="none" strike="noStrike" kern="1200" cap="none">
+                <a:ln>
+                  <a:noFill/>
+                </a:ln>
+                <a:highlight>
+                  <a:scrgbClr r="0" g="0" b="0">
+                    <a:alpha val="0"/>
+                  </a:scrgbClr>
+                </a:highlight>
+                <a:latin typeface="URW Bookman" pitchFamily="2"/>
+                <a:ea typeface="Nimbus Sans" pitchFamily="2"/>
+                <a:cs typeface="FreeSans" pitchFamily="2"/>
+              </a:defRPr>
+            </a:lvl7pPr>
+            <a:lvl8pPr marL="3429000" indent="-228600" algn="l" defTabSz="914400" rtl="0" eaLnBrk="1" latinLnBrk="0" hangingPunct="1">
+              <a:lnSpc>
+                <a:spcPct val="90000"/>
+              </a:lnSpc>
+              <a:spcBef>
+                <a:spcPts val="500"/>
+              </a:spcBef>
+              <a:buFont typeface="Arial" panose="020B0604020202020204" pitchFamily="34" charset="0"/>
+              <a:buChar char="•"/>
+              <a:defRPr sz="1800" kern="1200">
+                <a:solidFill>
+                  <a:schemeClr val="tx1"/>
+                </a:solidFill>
+                <a:latin typeface="+mn-lt"/>
+                <a:ea typeface="+mn-ea"/>
+                <a:cs typeface="+mn-cs"/>
+              </a:defRPr>
+            </a:lvl8pPr>
+            <a:lvl9pPr marL="3886200" indent="-228600" algn="l" defTabSz="914400" rtl="0" eaLnBrk="1" latinLnBrk="0" hangingPunct="1">
+              <a:lnSpc>
+                <a:spcPct val="90000"/>
+              </a:lnSpc>
+              <a:spcBef>
+                <a:spcPts val="500"/>
+              </a:spcBef>
+              <a:buFont typeface="Arial" panose="020B0604020202020204" pitchFamily="34" charset="0"/>
+              <a:buChar char="•"/>
+              <a:defRPr sz="1800" kern="1200">
+                <a:solidFill>
+                  <a:schemeClr val="tx1"/>
+                </a:solidFill>
+                <a:latin typeface="+mn-lt"/>
+                <a:ea typeface="+mn-ea"/>
+                <a:cs typeface="+mn-cs"/>
+              </a:defRPr>
+            </a:lvl9pPr>
+          </a:lstStyle>
+          <a:p>
+            <a:pPr marL="342900" indent="-342900"/>
+            <a:r>
+              <a:rPr lang="en-US" dirty="0">
+                <a:solidFill>
+                  <a:schemeClr val="bg1"/>
+                </a:solidFill>
+                <a:latin typeface="AppleSystemUIFont" pitchFamily="2"/>
+              </a:rPr>
+              <a:t>These checks were run using a 35 time step limit. Once we finalize our checks, we will run them using the 1000 time step limit. As </a:t>
+            </a:r>
+            <a:r>
+              <a:rPr lang="en-US" dirty="0" err="1">
+                <a:solidFill>
+                  <a:schemeClr val="bg1"/>
+                </a:solidFill>
+                <a:latin typeface="Courier New" panose="02070309020205020404" pitchFamily="49" charset="0"/>
+                <a:cs typeface="Courier New" panose="02070309020205020404" pitchFamily="49" charset="0"/>
+              </a:rPr>
+              <a:t>LakeTemperature</a:t>
+            </a:r>
+            <a:r>
+              <a:rPr lang="en-US" dirty="0">
+                <a:solidFill>
+                  <a:schemeClr val="bg1"/>
+                </a:solidFill>
+                <a:latin typeface="AppleSystemUIFont" pitchFamily="2"/>
+              </a:rPr>
+              <a:t> runs longer, we are more likely to run into issues with its design. </a:t>
+            </a:r>
+          </a:p>
+          <a:p>
+            <a:pPr marL="342900" indent="-342900"/>
+            <a:r>
+              <a:rPr lang="en-US" dirty="0">
+                <a:solidFill>
+                  <a:schemeClr val="bg1"/>
+                </a:solidFill>
+                <a:latin typeface="AppleSystemUIFont" pitchFamily="2"/>
+              </a:rPr>
+              <a:t>Some checks were skipped because they are only valid under certain preconditions. For example, </a:t>
+            </a:r>
+            <a:r>
+              <a:rPr lang="en-US" dirty="0" err="1">
+                <a:solidFill>
+                  <a:schemeClr val="bg1"/>
+                </a:solidFill>
+                <a:latin typeface="AppleSystemUIFont" pitchFamily="2"/>
+              </a:rPr>
+              <a:t>check_methane_conductance_allowed_without_ice</a:t>
+            </a:r>
+            <a:r>
+              <a:rPr lang="en-US" dirty="0">
+                <a:solidFill>
+                  <a:schemeClr val="bg1"/>
+                </a:solidFill>
+                <a:latin typeface="AppleSystemUIFont" pitchFamily="2"/>
+              </a:rPr>
+              <a:t> cannot run when use_lch4 == 0, when methane is turned off. </a:t>
+            </a:r>
+          </a:p>
+          <a:p>
+            <a:pPr marL="342900" indent="-342900"/>
+            <a:r>
+              <a:rPr lang="en-US" dirty="0">
+                <a:solidFill>
+                  <a:schemeClr val="bg1"/>
+                </a:solidFill>
+                <a:latin typeface="AppleSystemUIFont" pitchFamily="2"/>
+              </a:rPr>
+              <a:t>We cannot ensure some of the preconditions are met because they rely on the starting values of some model inputs, which we cannot control. </a:t>
+            </a:r>
+          </a:p>
+          <a:p>
+            <a:pPr marL="342900" indent="-342900"/>
+            <a:r>
+              <a:rPr lang="en-US" dirty="0">
+                <a:solidFill>
+                  <a:schemeClr val="bg1"/>
+                </a:solidFill>
+                <a:latin typeface="AppleSystemUIFont" pitchFamily="2"/>
+              </a:rPr>
+              <a:t>Every check makes an assertion about model output data. When that assertion fails, the check fails. This can point to a problem in the design of the check, SPEL, or </a:t>
+            </a:r>
+            <a:r>
+              <a:rPr lang="en-US" dirty="0" err="1">
+                <a:solidFill>
+                  <a:schemeClr val="bg1"/>
+                </a:solidFill>
+                <a:latin typeface="AppleSystemUIFont" pitchFamily="2"/>
+              </a:rPr>
+              <a:t>LakeTemperature</a:t>
+            </a:r>
+            <a:r>
+              <a:rPr lang="en-US" dirty="0">
+                <a:solidFill>
+                  <a:schemeClr val="bg1"/>
+                </a:solidFill>
+                <a:latin typeface="AppleSystemUIFont" pitchFamily="2"/>
+              </a:rPr>
+              <a:t>. </a:t>
+            </a:r>
+          </a:p>
+          <a:p>
+            <a:pPr marL="342900" indent="-342900"/>
+            <a:r>
+              <a:rPr lang="en-US" dirty="0">
+                <a:solidFill>
+                  <a:schemeClr val="bg1"/>
+                </a:solidFill>
+                <a:latin typeface="AppleSystemUIFont" pitchFamily="2"/>
+              </a:rPr>
+              <a:t>A check outputs an error when it’s not able to run correctly. For example, if there was a syntax mistake. Errors point to a problem in our code. </a:t>
+            </a:r>
+          </a:p>
+        </p:txBody>
+      </p:sp>
+    </p:spTree>
+    <p:extLst>
+      <p:ext uri="{BB962C8B-B14F-4D97-AF65-F5344CB8AC3E}">
+        <p14:creationId xmlns:p14="http://schemas.microsoft.com/office/powerpoint/2010/main" val="3398033175"/>
+      </p:ext>
+    </p:extLst>
+  </p:cSld>
+  <p:clrMapOvr>
+    <a:masterClrMapping/>
+  </p:clrMapOvr>
+</p:sld>
+</file>
+
+<file path=ppt/slides/slide38.xml><?xml version="1.0" encoding="utf-8"?>
+<p:sld xmlns:a="http://schemas.openxmlformats.org/drawingml/2006/main" xmlns:r="http://schemas.openxmlformats.org/officeDocument/2006/relationships" xmlns:p="http://schemas.openxmlformats.org/presentationml/2006/main">
+  <p:cSld>
+    <p:spTree>
+      <p:nvGrpSpPr>
+        <p:cNvPr id="1" name=""/>
+        <p:cNvGrpSpPr/>
+        <p:nvPr/>
+      </p:nvGrpSpPr>
+      <p:grpSpPr>
+        <a:xfrm>
+          <a:off x="0" y="0"/>
+          <a:ext cx="0" cy="0"/>
+          <a:chOff x="0" y="0"/>
+          <a:chExt cx="0" cy="0"/>
+        </a:xfrm>
+      </p:grpSpPr>
+      <p:sp>
+        <p:nvSpPr>
+          <p:cNvPr id="2" name="Title 1">
+            <a:extLst>
+              <a:ext uri="{FF2B5EF4-FFF2-40B4-BE49-F238E27FC236}">
                 <a16:creationId xmlns:a16="http://schemas.microsoft.com/office/drawing/2014/main" id="{9DF1FC1F-B83D-D043-0A53-60E474E50EFB}"/>
               </a:ext>
             </a:extLst>
@@ -18253,7 +18666,7 @@
                   <a:schemeClr val="bg1"/>
                 </a:solidFill>
               </a:rPr>
-              <a:t>DOI 3 Results</a:t>
+              <a:t>DOI 3, 4, 5 Results</a:t>
             </a:r>
           </a:p>
         </p:txBody>
@@ -18275,7 +18688,7 @@
         <p:spPr>
           <a:xfrm>
             <a:off x="503999" y="1326600"/>
-            <a:ext cx="9071640" cy="3288239"/>
+            <a:ext cx="9071640" cy="3921649"/>
           </a:xfrm>
           <a:prstGeom prst="rect">
             <a:avLst/>
@@ -18511,7 +18924,7 @@
                 </a:solidFill>
                 <a:latin typeface="AppleSystemUIFont" pitchFamily="2"/>
               </a:rPr>
-              <a:t>DOI 3 results in 3,516 test cases when only changing the values of constants known to affect the outputs of </a:t>
+              <a:t>When only changing the values of constants known to affect the outputs of </a:t>
             </a:r>
             <a:r>
               <a:rPr lang="en-US" dirty="0" err="1">
@@ -18523,6 +18936,15 @@
               </a:rPr>
               <a:t>LakeTemperature</a:t>
             </a:r>
+            <a:endParaRPr lang="en-US" dirty="0">
+              <a:solidFill>
+                <a:schemeClr val="bg1"/>
+              </a:solidFill>
+              <a:latin typeface="AppleSystemUIFont" pitchFamily="2"/>
+            </a:endParaRPr>
+          </a:p>
+          <a:p>
+            <a:pPr marL="800100" lvl="1" indent="-342900"/>
             <a:r>
               <a:rPr lang="en-US" dirty="0">
                 <a:solidFill>
@@ -18530,20 +18952,62 @@
                 </a:solidFill>
                 <a:latin typeface="AppleSystemUIFont" pitchFamily="2"/>
               </a:rPr>
-              <a:t>.</a:t>
-            </a:r>
-          </a:p>
-          <a:p>
-            <a:pPr marL="342900" indent="-342900"/>
-            <a:r>
-              <a:rPr lang="en-US" i="1" dirty="0">
+              <a:t>DOI 3 results in 3,516 test cases.</a:t>
+            </a:r>
+          </a:p>
+          <a:p>
+            <a:pPr marL="800100" lvl="1" indent="-342900"/>
+            <a:r>
+              <a:rPr lang="en-US" dirty="0">
                 <a:solidFill>
                   <a:schemeClr val="bg1"/>
                 </a:solidFill>
                 <a:latin typeface="AppleSystemUIFont" pitchFamily="2"/>
               </a:rPr>
-              <a:t>How many combinatorial test cases generated, executed, passed, skipped, failed, crashed</a:t>
-            </a:r>
+              <a:t>DOI 4 results in 50,031 test cases.</a:t>
+            </a:r>
+          </a:p>
+          <a:p>
+            <a:pPr marL="800100" lvl="1" indent="-342900"/>
+            <a:r>
+              <a:rPr lang="en-US" dirty="0">
+                <a:solidFill>
+                  <a:schemeClr val="bg1"/>
+                </a:solidFill>
+                <a:latin typeface="AppleSystemUIFont" pitchFamily="2"/>
+              </a:rPr>
+              <a:t>DOI 5 results in 689,735 test cases.</a:t>
+            </a:r>
+          </a:p>
+          <a:p>
+            <a:pPr marL="342900" indent="-342900"/>
+            <a:r>
+              <a:rPr lang="en-US" dirty="0">
+                <a:solidFill>
+                  <a:schemeClr val="bg1"/>
+                </a:solidFill>
+                <a:latin typeface="AppleSystemUIFont" pitchFamily="2"/>
+              </a:rPr>
+              <a:t>We did not run these since running DOI 2 helped us find problems in our checks that we needed to fix before re-running the test cases and getting final results. </a:t>
+            </a:r>
+          </a:p>
+          <a:p>
+            <a:pPr marL="800100" lvl="1" indent="-342900"/>
+            <a:endParaRPr lang="en-US" dirty="0">
+              <a:solidFill>
+                <a:schemeClr val="bg1"/>
+              </a:solidFill>
+              <a:latin typeface="AppleSystemUIFont" pitchFamily="2"/>
+            </a:endParaRPr>
+          </a:p>
+          <a:p>
+            <a:pPr marL="342900" indent="-342900"/>
+            <a:endParaRPr lang="en-US" i="1" dirty="0">
+              <a:solidFill>
+                <a:schemeClr val="bg1"/>
+              </a:solidFill>
+              <a:latin typeface="AppleSystemUIFont" pitchFamily="2"/>
+            </a:endParaRPr>
           </a:p>
         </p:txBody>
       </p:sp>
@@ -18565,9 +19029,9 @@
 </p:sld>
 </file>
 
-<file path=ppt/slides/slide38.xml><?xml version="1.0" encoding="utf-8"?>
+<file path=ppt/slides/slide39.xml><?xml version="1.0" encoding="utf-8"?>
 <p:sld xmlns:a="http://schemas.openxmlformats.org/drawingml/2006/main" xmlns:r="http://schemas.openxmlformats.org/officeDocument/2006/relationships" xmlns:p="http://schemas.openxmlformats.org/presentationml/2006/main">
-  <p:cSld>
+  <p:cSld name="page10">
     <p:spTree>
       <p:nvGrpSpPr>
         <p:cNvPr id="1" name=""/>
@@ -18587,59 +19051,37 @@
           <p:cNvPr id="2" name="Title 1">
             <a:extLst>
               <a:ext uri="{FF2B5EF4-FFF2-40B4-BE49-F238E27FC236}">
-                <a16:creationId xmlns:a16="http://schemas.microsoft.com/office/drawing/2014/main" id="{3B229438-C75A-6BD0-0DC0-AB63F95B648C}"/>
+                <a16:creationId xmlns:a16="http://schemas.microsoft.com/office/drawing/2014/main" id="{96CB14EF-3B5C-5292-14CB-3720F1B94FC4}"/>
               </a:ext>
             </a:extLst>
           </p:cNvPr>
           <p:cNvSpPr txBox="1">
-            <a:spLocks/>
+            <a:spLocks noGrp="1"/>
           </p:cNvSpPr>
-          <p:nvPr/>
+          <p:nvPr>
+            <p:ph type="title" idx="4294967295"/>
+          </p:nvPr>
         </p:nvSpPr>
         <p:spPr>
           <a:xfrm>
             <a:off x="503999" y="422301"/>
             <a:ext cx="9071640" cy="553998"/>
           </a:xfrm>
-          <a:prstGeom prst="rect">
-            <a:avLst/>
-          </a:prstGeom>
-          <a:noFill/>
-          <a:ln>
-            <a:noFill/>
-          </a:ln>
         </p:spPr>
         <p:txBody>
-          <a:bodyPr vert="horz" lIns="0" tIns="0" rIns="0" bIns="0" anchor="ctr">
+          <a:bodyPr>
             <a:spAutoFit/>
           </a:bodyPr>
-          <a:lstStyle>
-            <a:lvl1pPr lvl="0" algn="ctr" rtl="0" hangingPunct="0">
-              <a:buNone/>
-              <a:tabLst/>
-              <a:defRPr lang="en-US" sz="3600" b="0" i="0" u="none" strike="noStrike" kern="1200" cap="none">
-                <a:ln>
-                  <a:noFill/>
-                </a:ln>
-                <a:highlight>
-                  <a:scrgbClr r="0" g="0" b="0">
-                    <a:alpha val="0"/>
-                  </a:scrgbClr>
-                </a:highlight>
-                <a:latin typeface="URW Bookman" pitchFamily="2"/>
-                <a:ea typeface="Nimbus Sans" pitchFamily="2"/>
-                <a:cs typeface="FreeSans" pitchFamily="2"/>
-              </a:defRPr>
-            </a:lvl1pPr>
-          </a:lstStyle>
-          <a:p>
+          <a:lstStyle/>
+          <a:p>
+            <a:pPr lvl="0"/>
             <a:r>
               <a:rPr lang="en-US" dirty="0">
                 <a:solidFill>
                   <a:schemeClr val="bg1"/>
                 </a:solidFill>
               </a:rPr>
-              <a:t>DOI 4 Results</a:t>
+              <a:t>Improvements to Testing Framework</a:t>
             </a:r>
           </a:p>
         </p:txBody>
@@ -18649,245 +19091,28 @@
           <p:cNvPr id="3" name="Text Placeholder 2">
             <a:extLst>
               <a:ext uri="{FF2B5EF4-FFF2-40B4-BE49-F238E27FC236}">
-                <a16:creationId xmlns:a16="http://schemas.microsoft.com/office/drawing/2014/main" id="{56064C14-1601-F022-7F3D-615176F6A82B}"/>
+                <a16:creationId xmlns:a16="http://schemas.microsoft.com/office/drawing/2014/main" id="{C9367797-CD5B-309B-985B-DF6091246510}"/>
               </a:ext>
             </a:extLst>
           </p:cNvPr>
           <p:cNvSpPr txBox="1">
-            <a:spLocks/>
+            <a:spLocks noGrp="1"/>
           </p:cNvSpPr>
-          <p:nvPr/>
+          <p:nvPr>
+            <p:ph type="body" idx="4294967295"/>
+          </p:nvPr>
         </p:nvSpPr>
         <p:spPr>
           <a:xfrm>
-            <a:off x="503999" y="1326600"/>
-            <a:ext cx="9071640" cy="3288239"/>
+            <a:off x="503998" y="1326600"/>
+            <a:ext cx="9071639" cy="3921649"/>
           </a:xfrm>
-          <a:prstGeom prst="rect">
-            <a:avLst/>
-          </a:prstGeom>
-          <a:noFill/>
-          <a:ln>
-            <a:noFill/>
-          </a:ln>
         </p:spPr>
         <p:txBody>
-          <a:bodyPr vert="horz" lIns="0" tIns="0" rIns="0" bIns="0">
-            <a:normAutofit/>
+          <a:bodyPr>
+            <a:normAutofit fontScale="92500" lnSpcReduction="10000"/>
           </a:bodyPr>
-          <a:lstStyle>
-            <a:lvl1pPr lvl="0" rtl="0" hangingPunct="0">
-              <a:spcBef>
-                <a:spcPts val="1417"/>
-              </a:spcBef>
-              <a:spcAft>
-                <a:spcPts val="0"/>
-              </a:spcAft>
-              <a:buSzPct val="45000"/>
-              <a:buFont typeface="OpenSymbol"/>
-              <a:buChar char="●"/>
-              <a:tabLst/>
-              <a:defRPr lang="en-US" sz="2400" b="0" i="0" u="none" strike="noStrike" kern="1200" cap="none">
-                <a:ln>
-                  <a:noFill/>
-                </a:ln>
-                <a:highlight>
-                  <a:scrgbClr r="0" g="0" b="0">
-                    <a:alpha val="0"/>
-                  </a:scrgbClr>
-                </a:highlight>
-                <a:latin typeface="URW Bookman" pitchFamily="2"/>
-                <a:ea typeface="Nimbus Sans" pitchFamily="2"/>
-                <a:cs typeface="FreeSans" pitchFamily="2"/>
-              </a:defRPr>
-            </a:lvl1pPr>
-            <a:lvl2pPr lvl="1" rtl="0" hangingPunct="0">
-              <a:spcBef>
-                <a:spcPts val="1417"/>
-              </a:spcBef>
-              <a:spcAft>
-                <a:spcPts val="0"/>
-              </a:spcAft>
-              <a:buSzPct val="75000"/>
-              <a:buFont typeface="OpenSymbol"/>
-              <a:buChar char="–"/>
-              <a:tabLst/>
-              <a:defRPr lang="en-US" sz="2400" b="0" i="0" u="none" strike="noStrike" kern="1200" cap="none">
-                <a:ln>
-                  <a:noFill/>
-                </a:ln>
-                <a:highlight>
-                  <a:scrgbClr r="0" g="0" b="0">
-                    <a:alpha val="0"/>
-                  </a:scrgbClr>
-                </a:highlight>
-                <a:latin typeface="URW Bookman" pitchFamily="2"/>
-                <a:ea typeface="Nimbus Sans" pitchFamily="2"/>
-                <a:cs typeface="FreeSans" pitchFamily="2"/>
-              </a:defRPr>
-            </a:lvl2pPr>
-            <a:lvl3pPr lvl="2" rtl="0" hangingPunct="0">
-              <a:spcBef>
-                <a:spcPts val="1417"/>
-              </a:spcBef>
-              <a:spcAft>
-                <a:spcPts val="0"/>
-              </a:spcAft>
-              <a:buSzPct val="45000"/>
-              <a:buFont typeface="OpenSymbol"/>
-              <a:buChar char="●"/>
-              <a:tabLst/>
-              <a:defRPr lang="en-US" sz="2400" b="0" i="0" u="none" strike="noStrike" kern="1200" cap="none">
-                <a:ln>
-                  <a:noFill/>
-                </a:ln>
-                <a:highlight>
-                  <a:scrgbClr r="0" g="0" b="0">
-                    <a:alpha val="0"/>
-                  </a:scrgbClr>
-                </a:highlight>
-                <a:latin typeface="URW Bookman" pitchFamily="2"/>
-                <a:ea typeface="Nimbus Sans" pitchFamily="2"/>
-                <a:cs typeface="FreeSans" pitchFamily="2"/>
-              </a:defRPr>
-            </a:lvl3pPr>
-            <a:lvl4pPr lvl="3" rtl="0" hangingPunct="0">
-              <a:spcBef>
-                <a:spcPts val="1417"/>
-              </a:spcBef>
-              <a:spcAft>
-                <a:spcPts val="0"/>
-              </a:spcAft>
-              <a:buSzPct val="75000"/>
-              <a:buFont typeface="OpenSymbol"/>
-              <a:buChar char="–"/>
-              <a:tabLst/>
-              <a:defRPr lang="en-US" sz="2400" b="0" i="0" u="none" strike="noStrike" kern="1200" cap="none">
-                <a:ln>
-                  <a:noFill/>
-                </a:ln>
-                <a:highlight>
-                  <a:scrgbClr r="0" g="0" b="0">
-                    <a:alpha val="0"/>
-                  </a:scrgbClr>
-                </a:highlight>
-                <a:latin typeface="URW Bookman" pitchFamily="2"/>
-                <a:ea typeface="Nimbus Sans" pitchFamily="2"/>
-                <a:cs typeface="FreeSans" pitchFamily="2"/>
-              </a:defRPr>
-            </a:lvl4pPr>
-            <a:lvl5pPr lvl="4" rtl="0" hangingPunct="0">
-              <a:spcBef>
-                <a:spcPts val="1417"/>
-              </a:spcBef>
-              <a:spcAft>
-                <a:spcPts val="0"/>
-              </a:spcAft>
-              <a:buSzPct val="45000"/>
-              <a:buFont typeface="OpenSymbol"/>
-              <a:buChar char="●"/>
-              <a:tabLst/>
-              <a:defRPr lang="en-US" sz="2400" b="0" i="0" u="none" strike="noStrike" kern="1200" cap="none">
-                <a:ln>
-                  <a:noFill/>
-                </a:ln>
-                <a:highlight>
-                  <a:scrgbClr r="0" g="0" b="0">
-                    <a:alpha val="0"/>
-                  </a:scrgbClr>
-                </a:highlight>
-                <a:latin typeface="URW Bookman" pitchFamily="2"/>
-                <a:ea typeface="Nimbus Sans" pitchFamily="2"/>
-                <a:cs typeface="FreeSans" pitchFamily="2"/>
-              </a:defRPr>
-            </a:lvl5pPr>
-            <a:lvl6pPr lvl="5" rtl="0" hangingPunct="0">
-              <a:spcBef>
-                <a:spcPts val="1417"/>
-              </a:spcBef>
-              <a:spcAft>
-                <a:spcPts val="0"/>
-              </a:spcAft>
-              <a:buSzPct val="45000"/>
-              <a:buFont typeface="OpenSymbol"/>
-              <a:buChar char="●"/>
-              <a:tabLst/>
-              <a:defRPr lang="en-US" sz="2400" b="0" i="0" u="none" strike="noStrike" kern="1200" cap="none">
-                <a:ln>
-                  <a:noFill/>
-                </a:ln>
-                <a:highlight>
-                  <a:scrgbClr r="0" g="0" b="0">
-                    <a:alpha val="0"/>
-                  </a:scrgbClr>
-                </a:highlight>
-                <a:latin typeface="URW Bookman" pitchFamily="2"/>
-                <a:ea typeface="Nimbus Sans" pitchFamily="2"/>
-                <a:cs typeface="FreeSans" pitchFamily="2"/>
-              </a:defRPr>
-            </a:lvl6pPr>
-            <a:lvl7pPr lvl="6" rtl="0" hangingPunct="0">
-              <a:spcBef>
-                <a:spcPts val="1417"/>
-              </a:spcBef>
-              <a:spcAft>
-                <a:spcPts val="0"/>
-              </a:spcAft>
-              <a:buSzPct val="45000"/>
-              <a:buFont typeface="OpenSymbol"/>
-              <a:buChar char="●"/>
-              <a:tabLst/>
-              <a:defRPr lang="en-US" sz="2400" b="0" i="0" u="none" strike="noStrike" kern="1200" cap="none">
-                <a:ln>
-                  <a:noFill/>
-                </a:ln>
-                <a:highlight>
-                  <a:scrgbClr r="0" g="0" b="0">
-                    <a:alpha val="0"/>
-                  </a:scrgbClr>
-                </a:highlight>
-                <a:latin typeface="URW Bookman" pitchFamily="2"/>
-                <a:ea typeface="Nimbus Sans" pitchFamily="2"/>
-                <a:cs typeface="FreeSans" pitchFamily="2"/>
-              </a:defRPr>
-            </a:lvl7pPr>
-            <a:lvl8pPr marL="3429000" indent="-228600" algn="l" defTabSz="914400" rtl="0" eaLnBrk="1" latinLnBrk="0" hangingPunct="1">
-              <a:lnSpc>
-                <a:spcPct val="90000"/>
-              </a:lnSpc>
-              <a:spcBef>
-                <a:spcPts val="500"/>
-              </a:spcBef>
-              <a:buFont typeface="Arial" panose="020B0604020202020204" pitchFamily="34" charset="0"/>
-              <a:buChar char="•"/>
-              <a:defRPr sz="1800" kern="1200">
-                <a:solidFill>
-                  <a:schemeClr val="tx1"/>
-                </a:solidFill>
-                <a:latin typeface="+mn-lt"/>
-                <a:ea typeface="+mn-ea"/>
-                <a:cs typeface="+mn-cs"/>
-              </a:defRPr>
-            </a:lvl8pPr>
-            <a:lvl9pPr marL="3886200" indent="-228600" algn="l" defTabSz="914400" rtl="0" eaLnBrk="1" latinLnBrk="0" hangingPunct="1">
-              <a:lnSpc>
-                <a:spcPct val="90000"/>
-              </a:lnSpc>
-              <a:spcBef>
-                <a:spcPts val="500"/>
-              </a:spcBef>
-              <a:buFont typeface="Arial" panose="020B0604020202020204" pitchFamily="34" charset="0"/>
-              <a:buChar char="•"/>
-              <a:defRPr sz="1800" kern="1200">
-                <a:solidFill>
-                  <a:schemeClr val="tx1"/>
-                </a:solidFill>
-                <a:latin typeface="+mn-lt"/>
-                <a:ea typeface="+mn-ea"/>
-                <a:cs typeface="+mn-cs"/>
-              </a:defRPr>
-            </a:lvl9pPr>
-          </a:lstStyle>
+          <a:lstStyle/>
           <a:p>
             <a:pPr marL="342900" indent="-342900"/>
             <a:r>
@@ -18895,443 +19120,93 @@
                 <a:solidFill>
                   <a:schemeClr val="bg1"/>
                 </a:solidFill>
-                <a:latin typeface="AppleSystemUIFont" pitchFamily="2"/>
               </a:rPr>
-              <a:t>DOI 4 results in 50,031 test cases when only changing the values of constants known to affect the outputs of </a:t>
+              <a:t>Our test cases originally had invalid values for constants that could only be used when certain preconditions were met, which caused crashes. </a:t>
+            </a:r>
+          </a:p>
+          <a:p>
+            <a:pPr marL="342900" indent="-342900"/>
+            <a:r>
+              <a:rPr lang="en-US" dirty="0">
+                <a:solidFill>
+                  <a:schemeClr val="bg1"/>
+                </a:solidFill>
+              </a:rPr>
+              <a:t>Some checks were implemented incorrectly and had to be fixed. </a:t>
+            </a:r>
+          </a:p>
+          <a:p>
+            <a:pPr marL="342900" indent="-342900"/>
+            <a:r>
+              <a:rPr lang="en-US" dirty="0">
+                <a:solidFill>
+                  <a:schemeClr val="bg1"/>
+                </a:solidFill>
+              </a:rPr>
+              <a:t>For example, </a:t>
             </a:r>
             <a:r>
               <a:rPr lang="en-US" dirty="0" err="1">
                 <a:solidFill>
                   <a:schemeClr val="bg1"/>
                 </a:solidFill>
-                <a:latin typeface="Courier New" panose="02070309020205020404" pitchFamily="49" charset="0"/>
-                <a:cs typeface="Courier New" panose="02070309020205020404" pitchFamily="49" charset="0"/>
               </a:rPr>
-              <a:t>LakeTemperature</a:t>
+              <a:t>physics_check</a:t>
             </a:r>
             <a:r>
               <a:rPr lang="en-US" dirty="0">
                 <a:solidFill>
                   <a:schemeClr val="bg1"/>
                 </a:solidFill>
-                <a:latin typeface="AppleSystemUIFont" pitchFamily="2"/>
               </a:rPr>
-              <a:t>.</a:t>
+              <a:t>. </a:t>
+            </a:r>
+            <a:r>
+              <a:rPr lang="en-US" dirty="0" err="1">
+                <a:solidFill>
+                  <a:schemeClr val="bg1"/>
+                </a:solidFill>
+              </a:rPr>
+              <a:t>check_temp_around_freezing_where_lake_is_almost_frozen</a:t>
+            </a:r>
+            <a:r>
+              <a:rPr lang="en-US" dirty="0">
+                <a:solidFill>
+                  <a:schemeClr val="bg1"/>
+                </a:solidFill>
+              </a:rPr>
+              <a:t> originally checked to make sure the difference between the freezing temperature and a model output was close to zero but it was supposed to check that the absolute value of the difference was close to zero so that it did not ignore large negative values. </a:t>
             </a:r>
           </a:p>
           <a:p>
             <a:pPr marL="342900" indent="-342900"/>
             <a:r>
-              <a:rPr lang="en-US" i="1" dirty="0">
+              <a:rPr lang="en-US" dirty="0">
                 <a:solidFill>
                   <a:schemeClr val="bg1"/>
                 </a:solidFill>
-                <a:latin typeface="AppleSystemUIFont" pitchFamily="2"/>
               </a:rPr>
-              <a:t>How many combinatorial test cases generated, executed, passed, skipped, failed, crashed</a:t>
-            </a:r>
+              <a:t>Tests checking for things other than non-finite values had to ignore non-finite values, otherwise they’d fail and output an inaccurate error message.</a:t>
+            </a:r>
+          </a:p>
+          <a:p>
+            <a:pPr marL="342900" indent="-342900"/>
+            <a:endParaRPr lang="en-US" dirty="0">
+              <a:solidFill>
+                <a:schemeClr val="bg1"/>
+              </a:solidFill>
+            </a:endParaRPr>
           </a:p>
         </p:txBody>
       </p:sp>
     </p:spTree>
-    <p:extLst>
-      <p:ext uri="{BB962C8B-B14F-4D97-AF65-F5344CB8AC3E}">
-        <p14:creationId xmlns:p14="http://schemas.microsoft.com/office/powerpoint/2010/main" val="3165592934"/>
-      </p:ext>
-    </p:extLst>
   </p:cSld>
   <p:clrMapOvr>
     <a:masterClrMapping/>
   </p:clrMapOvr>
   <p:extLst>
     <p:ext uri="{6950BFC3-D8DA-4A85-94F7-54DA5524770B}">
-      <p188:commentRel xmlns:p188="http://schemas.microsoft.com/office/powerpoint/2018/8/main" r:id="rId2"/>
-    </p:ext>
-  </p:extLst>
-</p:sld>
-</file>
-
-<file path=ppt/slides/slide39.xml><?xml version="1.0" encoding="utf-8"?>
-<p:sld xmlns:a="http://schemas.openxmlformats.org/drawingml/2006/main" xmlns:r="http://schemas.openxmlformats.org/officeDocument/2006/relationships" xmlns:p="http://schemas.openxmlformats.org/presentationml/2006/main">
-  <p:cSld>
-    <p:spTree>
-      <p:nvGrpSpPr>
-        <p:cNvPr id="1" name=""/>
-        <p:cNvGrpSpPr/>
-        <p:nvPr/>
-      </p:nvGrpSpPr>
-      <p:grpSpPr>
-        <a:xfrm>
-          <a:off x="0" y="0"/>
-          <a:ext cx="0" cy="0"/>
-          <a:chOff x="0" y="0"/>
-          <a:chExt cx="0" cy="0"/>
-        </a:xfrm>
-      </p:grpSpPr>
-      <p:sp>
-        <p:nvSpPr>
-          <p:cNvPr id="2" name="Title 1">
-            <a:extLst>
-              <a:ext uri="{FF2B5EF4-FFF2-40B4-BE49-F238E27FC236}">
-                <a16:creationId xmlns:a16="http://schemas.microsoft.com/office/drawing/2014/main" id="{3BF6498E-98A7-DD6B-79FB-40EF89C7FFC8}"/>
-              </a:ext>
-            </a:extLst>
-          </p:cNvPr>
-          <p:cNvSpPr txBox="1">
-            <a:spLocks/>
-          </p:cNvSpPr>
-          <p:nvPr/>
-        </p:nvSpPr>
-        <p:spPr>
-          <a:xfrm>
-            <a:off x="503999" y="422301"/>
-            <a:ext cx="9071640" cy="553998"/>
-          </a:xfrm>
-          <a:prstGeom prst="rect">
-            <a:avLst/>
-          </a:prstGeom>
-          <a:noFill/>
-          <a:ln>
-            <a:noFill/>
-          </a:ln>
-        </p:spPr>
-        <p:txBody>
-          <a:bodyPr vert="horz" lIns="0" tIns="0" rIns="0" bIns="0" anchor="ctr">
-            <a:spAutoFit/>
-          </a:bodyPr>
-          <a:lstStyle>
-            <a:lvl1pPr lvl="0" algn="ctr" rtl="0" hangingPunct="0">
-              <a:buNone/>
-              <a:tabLst/>
-              <a:defRPr lang="en-US" sz="3600" b="0" i="0" u="none" strike="noStrike" kern="1200" cap="none">
-                <a:ln>
-                  <a:noFill/>
-                </a:ln>
-                <a:highlight>
-                  <a:scrgbClr r="0" g="0" b="0">
-                    <a:alpha val="0"/>
-                  </a:scrgbClr>
-                </a:highlight>
-                <a:latin typeface="URW Bookman" pitchFamily="2"/>
-                <a:ea typeface="Nimbus Sans" pitchFamily="2"/>
-                <a:cs typeface="FreeSans" pitchFamily="2"/>
-              </a:defRPr>
-            </a:lvl1pPr>
-          </a:lstStyle>
-          <a:p>
-            <a:r>
-              <a:rPr lang="en-US" dirty="0">
-                <a:solidFill>
-                  <a:schemeClr val="bg1"/>
-                </a:solidFill>
-              </a:rPr>
-              <a:t>DOI 5 Data</a:t>
-            </a:r>
-          </a:p>
-        </p:txBody>
-      </p:sp>
-      <p:sp>
-        <p:nvSpPr>
-          <p:cNvPr id="3" name="Text Placeholder 2">
-            <a:extLst>
-              <a:ext uri="{FF2B5EF4-FFF2-40B4-BE49-F238E27FC236}">
-                <a16:creationId xmlns:a16="http://schemas.microsoft.com/office/drawing/2014/main" id="{31720598-1CB0-E7F3-3417-23A2488D52ED}"/>
-              </a:ext>
-            </a:extLst>
-          </p:cNvPr>
-          <p:cNvSpPr txBox="1">
-            <a:spLocks/>
-          </p:cNvSpPr>
-          <p:nvPr/>
-        </p:nvSpPr>
-        <p:spPr>
-          <a:xfrm>
-            <a:off x="503999" y="1326600"/>
-            <a:ext cx="9071640" cy="3288239"/>
-          </a:xfrm>
-          <a:prstGeom prst="rect">
-            <a:avLst/>
-          </a:prstGeom>
-          <a:noFill/>
-          <a:ln>
-            <a:noFill/>
-          </a:ln>
-        </p:spPr>
-        <p:txBody>
-          <a:bodyPr vert="horz" lIns="0" tIns="0" rIns="0" bIns="0">
-            <a:normAutofit/>
-          </a:bodyPr>
-          <a:lstStyle>
-            <a:lvl1pPr lvl="0" rtl="0" hangingPunct="0">
-              <a:spcBef>
-                <a:spcPts val="1417"/>
-              </a:spcBef>
-              <a:spcAft>
-                <a:spcPts val="0"/>
-              </a:spcAft>
-              <a:buSzPct val="45000"/>
-              <a:buFont typeface="OpenSymbol"/>
-              <a:buChar char="●"/>
-              <a:tabLst/>
-              <a:defRPr lang="en-US" sz="2400" b="0" i="0" u="none" strike="noStrike" kern="1200" cap="none">
-                <a:ln>
-                  <a:noFill/>
-                </a:ln>
-                <a:highlight>
-                  <a:scrgbClr r="0" g="0" b="0">
-                    <a:alpha val="0"/>
-                  </a:scrgbClr>
-                </a:highlight>
-                <a:latin typeface="URW Bookman" pitchFamily="2"/>
-                <a:ea typeface="Nimbus Sans" pitchFamily="2"/>
-                <a:cs typeface="FreeSans" pitchFamily="2"/>
-              </a:defRPr>
-            </a:lvl1pPr>
-            <a:lvl2pPr lvl="1" rtl="0" hangingPunct="0">
-              <a:spcBef>
-                <a:spcPts val="1417"/>
-              </a:spcBef>
-              <a:spcAft>
-                <a:spcPts val="0"/>
-              </a:spcAft>
-              <a:buSzPct val="75000"/>
-              <a:buFont typeface="OpenSymbol"/>
-              <a:buChar char="–"/>
-              <a:tabLst/>
-              <a:defRPr lang="en-US" sz="2400" b="0" i="0" u="none" strike="noStrike" kern="1200" cap="none">
-                <a:ln>
-                  <a:noFill/>
-                </a:ln>
-                <a:highlight>
-                  <a:scrgbClr r="0" g="0" b="0">
-                    <a:alpha val="0"/>
-                  </a:scrgbClr>
-                </a:highlight>
-                <a:latin typeface="URW Bookman" pitchFamily="2"/>
-                <a:ea typeface="Nimbus Sans" pitchFamily="2"/>
-                <a:cs typeface="FreeSans" pitchFamily="2"/>
-              </a:defRPr>
-            </a:lvl2pPr>
-            <a:lvl3pPr lvl="2" rtl="0" hangingPunct="0">
-              <a:spcBef>
-                <a:spcPts val="1417"/>
-              </a:spcBef>
-              <a:spcAft>
-                <a:spcPts val="0"/>
-              </a:spcAft>
-              <a:buSzPct val="45000"/>
-              <a:buFont typeface="OpenSymbol"/>
-              <a:buChar char="●"/>
-              <a:tabLst/>
-              <a:defRPr lang="en-US" sz="2400" b="0" i="0" u="none" strike="noStrike" kern="1200" cap="none">
-                <a:ln>
-                  <a:noFill/>
-                </a:ln>
-                <a:highlight>
-                  <a:scrgbClr r="0" g="0" b="0">
-                    <a:alpha val="0"/>
-                  </a:scrgbClr>
-                </a:highlight>
-                <a:latin typeface="URW Bookman" pitchFamily="2"/>
-                <a:ea typeface="Nimbus Sans" pitchFamily="2"/>
-                <a:cs typeface="FreeSans" pitchFamily="2"/>
-              </a:defRPr>
-            </a:lvl3pPr>
-            <a:lvl4pPr lvl="3" rtl="0" hangingPunct="0">
-              <a:spcBef>
-                <a:spcPts val="1417"/>
-              </a:spcBef>
-              <a:spcAft>
-                <a:spcPts val="0"/>
-              </a:spcAft>
-              <a:buSzPct val="75000"/>
-              <a:buFont typeface="OpenSymbol"/>
-              <a:buChar char="–"/>
-              <a:tabLst/>
-              <a:defRPr lang="en-US" sz="2400" b="0" i="0" u="none" strike="noStrike" kern="1200" cap="none">
-                <a:ln>
-                  <a:noFill/>
-                </a:ln>
-                <a:highlight>
-                  <a:scrgbClr r="0" g="0" b="0">
-                    <a:alpha val="0"/>
-                  </a:scrgbClr>
-                </a:highlight>
-                <a:latin typeface="URW Bookman" pitchFamily="2"/>
-                <a:ea typeface="Nimbus Sans" pitchFamily="2"/>
-                <a:cs typeface="FreeSans" pitchFamily="2"/>
-              </a:defRPr>
-            </a:lvl4pPr>
-            <a:lvl5pPr lvl="4" rtl="0" hangingPunct="0">
-              <a:spcBef>
-                <a:spcPts val="1417"/>
-              </a:spcBef>
-              <a:spcAft>
-                <a:spcPts val="0"/>
-              </a:spcAft>
-              <a:buSzPct val="45000"/>
-              <a:buFont typeface="OpenSymbol"/>
-              <a:buChar char="●"/>
-              <a:tabLst/>
-              <a:defRPr lang="en-US" sz="2400" b="0" i="0" u="none" strike="noStrike" kern="1200" cap="none">
-                <a:ln>
-                  <a:noFill/>
-                </a:ln>
-                <a:highlight>
-                  <a:scrgbClr r="0" g="0" b="0">
-                    <a:alpha val="0"/>
-                  </a:scrgbClr>
-                </a:highlight>
-                <a:latin typeface="URW Bookman" pitchFamily="2"/>
-                <a:ea typeface="Nimbus Sans" pitchFamily="2"/>
-                <a:cs typeface="FreeSans" pitchFamily="2"/>
-              </a:defRPr>
-            </a:lvl5pPr>
-            <a:lvl6pPr lvl="5" rtl="0" hangingPunct="0">
-              <a:spcBef>
-                <a:spcPts val="1417"/>
-              </a:spcBef>
-              <a:spcAft>
-                <a:spcPts val="0"/>
-              </a:spcAft>
-              <a:buSzPct val="45000"/>
-              <a:buFont typeface="OpenSymbol"/>
-              <a:buChar char="●"/>
-              <a:tabLst/>
-              <a:defRPr lang="en-US" sz="2400" b="0" i="0" u="none" strike="noStrike" kern="1200" cap="none">
-                <a:ln>
-                  <a:noFill/>
-                </a:ln>
-                <a:highlight>
-                  <a:scrgbClr r="0" g="0" b="0">
-                    <a:alpha val="0"/>
-                  </a:scrgbClr>
-                </a:highlight>
-                <a:latin typeface="URW Bookman" pitchFamily="2"/>
-                <a:ea typeface="Nimbus Sans" pitchFamily="2"/>
-                <a:cs typeface="FreeSans" pitchFamily="2"/>
-              </a:defRPr>
-            </a:lvl6pPr>
-            <a:lvl7pPr lvl="6" rtl="0" hangingPunct="0">
-              <a:spcBef>
-                <a:spcPts val="1417"/>
-              </a:spcBef>
-              <a:spcAft>
-                <a:spcPts val="0"/>
-              </a:spcAft>
-              <a:buSzPct val="45000"/>
-              <a:buFont typeface="OpenSymbol"/>
-              <a:buChar char="●"/>
-              <a:tabLst/>
-              <a:defRPr lang="en-US" sz="2400" b="0" i="0" u="none" strike="noStrike" kern="1200" cap="none">
-                <a:ln>
-                  <a:noFill/>
-                </a:ln>
-                <a:highlight>
-                  <a:scrgbClr r="0" g="0" b="0">
-                    <a:alpha val="0"/>
-                  </a:scrgbClr>
-                </a:highlight>
-                <a:latin typeface="URW Bookman" pitchFamily="2"/>
-                <a:ea typeface="Nimbus Sans" pitchFamily="2"/>
-                <a:cs typeface="FreeSans" pitchFamily="2"/>
-              </a:defRPr>
-            </a:lvl7pPr>
-            <a:lvl8pPr marL="3429000" indent="-228600" algn="l" defTabSz="914400" rtl="0" eaLnBrk="1" latinLnBrk="0" hangingPunct="1">
-              <a:lnSpc>
-                <a:spcPct val="90000"/>
-              </a:lnSpc>
-              <a:spcBef>
-                <a:spcPts val="500"/>
-              </a:spcBef>
-              <a:buFont typeface="Arial" panose="020B0604020202020204" pitchFamily="34" charset="0"/>
-              <a:buChar char="•"/>
-              <a:defRPr sz="1800" kern="1200">
-                <a:solidFill>
-                  <a:schemeClr val="tx1"/>
-                </a:solidFill>
-                <a:latin typeface="+mn-lt"/>
-                <a:ea typeface="+mn-ea"/>
-                <a:cs typeface="+mn-cs"/>
-              </a:defRPr>
-            </a:lvl8pPr>
-            <a:lvl9pPr marL="3886200" indent="-228600" algn="l" defTabSz="914400" rtl="0" eaLnBrk="1" latinLnBrk="0" hangingPunct="1">
-              <a:lnSpc>
-                <a:spcPct val="90000"/>
-              </a:lnSpc>
-              <a:spcBef>
-                <a:spcPts val="500"/>
-              </a:spcBef>
-              <a:buFont typeface="Arial" panose="020B0604020202020204" pitchFamily="34" charset="0"/>
-              <a:buChar char="•"/>
-              <a:defRPr sz="1800" kern="1200">
-                <a:solidFill>
-                  <a:schemeClr val="tx1"/>
-                </a:solidFill>
-                <a:latin typeface="+mn-lt"/>
-                <a:ea typeface="+mn-ea"/>
-                <a:cs typeface="+mn-cs"/>
-              </a:defRPr>
-            </a:lvl9pPr>
-          </a:lstStyle>
-          <a:p>
-            <a:pPr marL="342900" indent="-342900"/>
-            <a:r>
-              <a:rPr lang="en-US" dirty="0">
-                <a:solidFill>
-                  <a:schemeClr val="bg1"/>
-                </a:solidFill>
-                <a:latin typeface="AppleSystemUIFont" pitchFamily="2"/>
-              </a:rPr>
-              <a:t>DOI 5 results in 689,735 test cases when only changing the values of constants known to affect the outputs of </a:t>
-            </a:r>
-            <a:r>
-              <a:rPr lang="en-US" dirty="0" err="1">
-                <a:solidFill>
-                  <a:schemeClr val="bg1"/>
-                </a:solidFill>
-                <a:latin typeface="Courier New" panose="02070309020205020404" pitchFamily="49" charset="0"/>
-                <a:cs typeface="Courier New" panose="02070309020205020404" pitchFamily="49" charset="0"/>
-              </a:rPr>
-              <a:t>LakeTemperature</a:t>
-            </a:r>
-            <a:r>
-              <a:rPr lang="en-US" dirty="0">
-                <a:solidFill>
-                  <a:schemeClr val="bg1"/>
-                </a:solidFill>
-                <a:latin typeface="AppleSystemUIFont" pitchFamily="2"/>
-              </a:rPr>
-              <a:t>.</a:t>
-            </a:r>
-          </a:p>
-          <a:p>
-            <a:pPr marL="342900" indent="-342900"/>
-            <a:r>
-              <a:rPr lang="en-US" i="1" dirty="0">
-                <a:solidFill>
-                  <a:schemeClr val="bg1"/>
-                </a:solidFill>
-                <a:latin typeface="AppleSystemUIFont" pitchFamily="2"/>
-              </a:rPr>
-              <a:t>How many combinatorial test cases generated, executed, passed, skipped, failed, crashed</a:t>
-            </a:r>
-          </a:p>
-        </p:txBody>
-      </p:sp>
-    </p:spTree>
-    <p:extLst>
-      <p:ext uri="{BB962C8B-B14F-4D97-AF65-F5344CB8AC3E}">
-        <p14:creationId xmlns:p14="http://schemas.microsoft.com/office/powerpoint/2010/main" val="3954683613"/>
-      </p:ext>
-    </p:extLst>
-  </p:cSld>
-  <p:clrMapOvr>
-    <a:masterClrMapping/>
-  </p:clrMapOvr>
-  <p:extLst>
-    <p:ext uri="{6950BFC3-D8DA-4A85-94F7-54DA5524770B}">
-      <p188:commentRel xmlns:p188="http://schemas.microsoft.com/office/powerpoint/2018/8/main" r:id="rId2"/>
+      <p188:commentRel xmlns:p188="http://schemas.microsoft.com/office/powerpoint/2018/8/main" r:id="rId3"/>
     </p:ext>
   </p:extLst>
 </p:sld>
@@ -19761,7 +19636,7 @@
 
 <file path=ppt/slides/slide40.xml><?xml version="1.0" encoding="utf-8"?>
 <p:sld xmlns:a="http://schemas.openxmlformats.org/drawingml/2006/main" xmlns:r="http://schemas.openxmlformats.org/officeDocument/2006/relationships" xmlns:p="http://schemas.openxmlformats.org/presentationml/2006/main">
-  <p:cSld name="page10">
+  <p:cSld>
     <p:spTree>
       <p:nvGrpSpPr>
         <p:cNvPr id="1" name=""/>
@@ -19778,320 +19653,273 @@
       </p:grpSpPr>
       <p:sp>
         <p:nvSpPr>
-          <p:cNvPr id="2" name="Title 1">
+          <p:cNvPr id="3" name="TextBox 2">
             <a:extLst>
               <a:ext uri="{FF2B5EF4-FFF2-40B4-BE49-F238E27FC236}">
-                <a16:creationId xmlns:a16="http://schemas.microsoft.com/office/drawing/2014/main" id="{96CB14EF-3B5C-5292-14CB-3720F1B94FC4}"/>
+                <a16:creationId xmlns:a16="http://schemas.microsoft.com/office/drawing/2014/main" id="{1591456F-C241-4A18-AF77-96529210B7FC}"/>
+              </a:ext>
+            </a:extLst>
+          </p:cNvPr>
+          <p:cNvSpPr txBox="1"/>
+          <p:nvPr/>
+        </p:nvSpPr>
+        <p:spPr>
+          <a:xfrm>
+            <a:off x="503999" y="1628071"/>
+            <a:ext cx="9071640" cy="3139321"/>
+          </a:xfrm>
+          <a:prstGeom prst="rect">
+            <a:avLst/>
+          </a:prstGeom>
+          <a:noFill/>
+        </p:spPr>
+        <p:txBody>
+          <a:bodyPr wrap="square">
+            <a:spAutoFit/>
+          </a:bodyPr>
+          <a:lstStyle/>
+          <a:p>
+            <a:pPr marL="342900" indent="-342900">
+              <a:buFont typeface="Arial" panose="020B0604020202020204" pitchFamily="34" charset="0"/>
+              <a:buChar char="•"/>
+            </a:pPr>
+            <a:r>
+              <a:rPr lang="en-US" sz="2200" dirty="0">
+                <a:solidFill>
+                  <a:schemeClr val="bg1"/>
+                </a:solidFill>
+              </a:rPr>
+              <a:t>SPEL</a:t>
+            </a:r>
+            <a:r>
+              <a:rPr lang="en-US" sz="2200" i="1" dirty="0">
+                <a:solidFill>
+                  <a:schemeClr val="bg1"/>
+                </a:solidFill>
+              </a:rPr>
+              <a:t> </a:t>
+            </a:r>
+            <a:r>
+              <a:rPr lang="en-US" sz="2200" dirty="0">
+                <a:solidFill>
+                  <a:schemeClr val="bg1"/>
+                </a:solidFill>
+              </a:rPr>
+              <a:t>might be initializing data with </a:t>
+            </a:r>
+            <a:r>
+              <a:rPr lang="en-US" sz="2200" dirty="0" err="1">
+                <a:solidFill>
+                  <a:schemeClr val="bg1"/>
+                </a:solidFill>
+              </a:rPr>
+              <a:t>NaN</a:t>
+            </a:r>
+            <a:r>
+              <a:rPr lang="en-US" sz="2200" dirty="0">
+                <a:solidFill>
+                  <a:schemeClr val="bg1"/>
+                </a:solidFill>
+              </a:rPr>
+              <a:t> values that </a:t>
+            </a:r>
+            <a:r>
+              <a:rPr lang="en-US" sz="2200" dirty="0" err="1">
+                <a:solidFill>
+                  <a:schemeClr val="bg1"/>
+                </a:solidFill>
+                <a:latin typeface="Courier New" panose="02070309020205020404" pitchFamily="49" charset="0"/>
+                <a:cs typeface="Courier New" panose="02070309020205020404" pitchFamily="49" charset="0"/>
+              </a:rPr>
+              <a:t>LakeTemperature</a:t>
+            </a:r>
+            <a:r>
+              <a:rPr lang="en-US" sz="2200" dirty="0">
+                <a:solidFill>
+                  <a:schemeClr val="bg1"/>
+                </a:solidFill>
+              </a:rPr>
+              <a:t> then never overwrites or </a:t>
+            </a:r>
+            <a:r>
+              <a:rPr lang="en-US" sz="2200" dirty="0" err="1">
+                <a:solidFill>
+                  <a:schemeClr val="bg1"/>
+                </a:solidFill>
+                <a:latin typeface="Courier New" panose="02070309020205020404" pitchFamily="49" charset="0"/>
+                <a:cs typeface="Courier New" panose="02070309020205020404" pitchFamily="49" charset="0"/>
+              </a:rPr>
+              <a:t>LakeTemperature</a:t>
+            </a:r>
+            <a:r>
+              <a:rPr lang="en-US" sz="2200" dirty="0">
+                <a:solidFill>
+                  <a:schemeClr val="bg1"/>
+                </a:solidFill>
+              </a:rPr>
+              <a:t> might be outputting data with </a:t>
+            </a:r>
+            <a:r>
+              <a:rPr lang="en-US" sz="2200" dirty="0" err="1">
+                <a:solidFill>
+                  <a:schemeClr val="bg1"/>
+                </a:solidFill>
+              </a:rPr>
+              <a:t>NaN</a:t>
+            </a:r>
+            <a:r>
+              <a:rPr lang="en-US" sz="2200" dirty="0">
+                <a:solidFill>
+                  <a:schemeClr val="bg1"/>
+                </a:solidFill>
+              </a:rPr>
+              <a:t> values. Currently …/231 combinatorial cases with all constants have at least one model output with </a:t>
+            </a:r>
+            <a:r>
+              <a:rPr lang="en-US" sz="2200" dirty="0" err="1">
+                <a:solidFill>
+                  <a:schemeClr val="bg1"/>
+                </a:solidFill>
+              </a:rPr>
+              <a:t>NaN</a:t>
+            </a:r>
+            <a:r>
+              <a:rPr lang="en-US" sz="2200" dirty="0">
+                <a:solidFill>
+                  <a:schemeClr val="bg1"/>
+                </a:solidFill>
+              </a:rPr>
+              <a:t> values and …/231 combinatorial cases with some constants have at least one model output with </a:t>
+            </a:r>
+            <a:r>
+              <a:rPr lang="en-US" sz="2200" dirty="0" err="1">
+                <a:solidFill>
+                  <a:schemeClr val="bg1"/>
+                </a:solidFill>
+              </a:rPr>
+              <a:t>NaN</a:t>
+            </a:r>
+            <a:r>
+              <a:rPr lang="en-US" sz="2200" dirty="0">
+                <a:solidFill>
+                  <a:schemeClr val="bg1"/>
+                </a:solidFill>
+              </a:rPr>
+              <a:t> values. </a:t>
+            </a:r>
+            <a:endParaRPr lang="en-US" sz="2200" i="1" dirty="0">
+              <a:solidFill>
+                <a:schemeClr val="bg1"/>
+              </a:solidFill>
+            </a:endParaRPr>
+          </a:p>
+          <a:p>
+            <a:pPr marL="342900" indent="-342900">
+              <a:buFont typeface="Arial" panose="020B0604020202020204" pitchFamily="34" charset="0"/>
+              <a:buChar char="•"/>
+            </a:pPr>
+            <a:r>
+              <a:rPr lang="en-US" sz="2200" dirty="0">
+                <a:solidFill>
+                  <a:schemeClr val="bg1"/>
+                </a:solidFill>
+              </a:rPr>
+              <a:t>Largely, </a:t>
+            </a:r>
+            <a:r>
+              <a:rPr lang="en-US" sz="2200" dirty="0" err="1">
+                <a:solidFill>
+                  <a:schemeClr val="bg1"/>
+                </a:solidFill>
+                <a:latin typeface="Courier New" panose="02070309020205020404" pitchFamily="49" charset="0"/>
+                <a:cs typeface="Courier New" panose="02070309020205020404" pitchFamily="49" charset="0"/>
+              </a:rPr>
+              <a:t>LakeTemperature</a:t>
+            </a:r>
+            <a:r>
+              <a:rPr lang="en-US" sz="2200" dirty="0">
+                <a:solidFill>
+                  <a:schemeClr val="bg1"/>
+                </a:solidFill>
+              </a:rPr>
+              <a:t> output data was valid and within physical bounds. However, some cases resulted in some physically impossible outputs, likely due to combinations between a few model constants. </a:t>
+            </a:r>
+            <a:endParaRPr lang="en-US" sz="2200" dirty="0"/>
+          </a:p>
+        </p:txBody>
+      </p:sp>
+      <p:sp>
+        <p:nvSpPr>
+          <p:cNvPr id="4" name="Title 1">
+            <a:extLst>
+              <a:ext uri="{FF2B5EF4-FFF2-40B4-BE49-F238E27FC236}">
+                <a16:creationId xmlns:a16="http://schemas.microsoft.com/office/drawing/2014/main" id="{294AD037-E0F3-F70A-78F8-5E2E7D139116}"/>
               </a:ext>
             </a:extLst>
           </p:cNvPr>
           <p:cNvSpPr txBox="1">
-            <a:spLocks noGrp="1"/>
+            <a:spLocks/>
           </p:cNvSpPr>
-          <p:nvPr>
-            <p:ph type="title" idx="4294967295"/>
-          </p:nvPr>
+          <p:nvPr/>
         </p:nvSpPr>
         <p:spPr>
           <a:xfrm>
             <a:off x="503999" y="422301"/>
             <a:ext cx="9071640" cy="553998"/>
           </a:xfrm>
+          <a:prstGeom prst="rect">
+            <a:avLst/>
+          </a:prstGeom>
+          <a:noFill/>
+          <a:ln>
+            <a:noFill/>
+          </a:ln>
         </p:spPr>
         <p:txBody>
-          <a:bodyPr>
+          <a:bodyPr vert="horz" lIns="0" tIns="0" rIns="0" bIns="0" anchor="ctr">
             <a:spAutoFit/>
           </a:bodyPr>
-          <a:lstStyle/>
-          <a:p>
-            <a:pPr lvl="0"/>
+          <a:lstStyle>
+            <a:lvl1pPr lvl="0" algn="ctr" rtl="0" hangingPunct="0">
+              <a:buNone/>
+              <a:tabLst/>
+              <a:defRPr lang="en-US" sz="3600" b="0" i="0" u="none" strike="noStrike" kern="1200" cap="none">
+                <a:ln>
+                  <a:noFill/>
+                </a:ln>
+                <a:highlight>
+                  <a:scrgbClr r="0" g="0" b="0">
+                    <a:alpha val="0"/>
+                  </a:scrgbClr>
+                </a:highlight>
+                <a:latin typeface="URW Bookman" pitchFamily="2"/>
+                <a:ea typeface="Nimbus Sans" pitchFamily="2"/>
+                <a:cs typeface="FreeSans" pitchFamily="2"/>
+              </a:defRPr>
+            </a:lvl1pPr>
+          </a:lstStyle>
+          <a:p>
             <a:r>
               <a:rPr lang="en-US" dirty="0">
                 <a:solidFill>
                   <a:schemeClr val="bg1"/>
                 </a:solidFill>
               </a:rPr>
-              <a:t>Findings from Testing</a:t>
-            </a:r>
-          </a:p>
-        </p:txBody>
-      </p:sp>
-      <p:sp>
-        <p:nvSpPr>
-          <p:cNvPr id="3" name="Text Placeholder 2">
-            <a:extLst>
-              <a:ext uri="{FF2B5EF4-FFF2-40B4-BE49-F238E27FC236}">
-                <a16:creationId xmlns:a16="http://schemas.microsoft.com/office/drawing/2014/main" id="{C9367797-CD5B-309B-985B-DF6091246510}"/>
-              </a:ext>
-            </a:extLst>
-          </p:cNvPr>
-          <p:cNvSpPr txBox="1">
-            <a:spLocks noGrp="1"/>
-          </p:cNvSpPr>
-          <p:nvPr>
-            <p:ph type="body" idx="4294967295"/>
-          </p:nvPr>
-        </p:nvSpPr>
-        <p:spPr>
-          <a:xfrm>
-            <a:off x="503998" y="1326600"/>
-            <a:ext cx="9071639" cy="3921649"/>
-          </a:xfrm>
-        </p:spPr>
-        <p:txBody>
-          <a:bodyPr>
-            <a:normAutofit fontScale="62500" lnSpcReduction="20000"/>
-          </a:bodyPr>
-          <a:lstStyle/>
-          <a:p>
-            <a:pPr marL="342900" indent="-342900"/>
-            <a:r>
-              <a:rPr lang="en-US" dirty="0">
-                <a:solidFill>
-                  <a:schemeClr val="bg1"/>
-                </a:solidFill>
-              </a:rPr>
-              <a:t>Our test cases originally had invalid values for constants that could only be used when certain preconditions were met, which caused crashes. </a:t>
-            </a:r>
-          </a:p>
-          <a:p>
-            <a:pPr marL="342900" indent="-342900"/>
-            <a:r>
-              <a:rPr lang="en-US" dirty="0">
-                <a:solidFill>
-                  <a:schemeClr val="bg1"/>
-                </a:solidFill>
-              </a:rPr>
-              <a:t>Some checks were implemented incorrectly and had to be fixed. </a:t>
-            </a:r>
-          </a:p>
-          <a:p>
-            <a:pPr marL="342900" indent="-342900"/>
-            <a:r>
-              <a:rPr lang="en-US" dirty="0">
-                <a:solidFill>
-                  <a:schemeClr val="bg1"/>
-                </a:solidFill>
-              </a:rPr>
-              <a:t>For example, </a:t>
-            </a:r>
-            <a:r>
-              <a:rPr lang="en-US" dirty="0" err="1">
-                <a:solidFill>
-                  <a:schemeClr val="bg1"/>
-                </a:solidFill>
-              </a:rPr>
-              <a:t>physics_check</a:t>
-            </a:r>
-            <a:r>
-              <a:rPr lang="en-US" dirty="0">
-                <a:solidFill>
-                  <a:schemeClr val="bg1"/>
-                </a:solidFill>
-              </a:rPr>
-              <a:t>. </a:t>
-            </a:r>
-            <a:r>
-              <a:rPr lang="en-US" dirty="0" err="1">
-                <a:solidFill>
-                  <a:schemeClr val="bg1"/>
-                </a:solidFill>
-              </a:rPr>
-              <a:t>check_temp_around_freezing_where_lake_is_almost_frozen</a:t>
-            </a:r>
-            <a:r>
-              <a:rPr lang="en-US" dirty="0">
-                <a:solidFill>
-                  <a:schemeClr val="bg1"/>
-                </a:solidFill>
-              </a:rPr>
-              <a:t> originally checked to make sure the difference between the freezing temperature and a model output was close to zero but it was supposed to check that the absolute value of the difference was close to zero so that it did not ignore large negative values. </a:t>
-            </a:r>
-          </a:p>
-          <a:p>
-            <a:pPr marL="342900" indent="-342900"/>
-            <a:r>
-              <a:rPr lang="en-US" dirty="0">
-                <a:solidFill>
-                  <a:schemeClr val="bg1"/>
-                </a:solidFill>
-              </a:rPr>
-              <a:t>Tests checking for things other than non-finite values had to ignore non-finite values, otherwise they’d fail and output an inaccurate error message.</a:t>
-            </a:r>
-          </a:p>
-          <a:p>
-            <a:pPr marL="342900" indent="-342900"/>
-            <a:r>
-              <a:rPr lang="en-US" dirty="0">
-                <a:solidFill>
-                  <a:schemeClr val="bg1"/>
-                </a:solidFill>
-              </a:rPr>
-              <a:t>SPEL</a:t>
-            </a:r>
-            <a:r>
-              <a:rPr lang="en-US" i="1" dirty="0">
-                <a:solidFill>
-                  <a:schemeClr val="bg1"/>
-                </a:solidFill>
-              </a:rPr>
-              <a:t> </a:t>
-            </a:r>
-            <a:r>
-              <a:rPr lang="en-US" dirty="0">
-                <a:solidFill>
-                  <a:schemeClr val="bg1"/>
-                </a:solidFill>
-              </a:rPr>
-              <a:t>might be initializing data with </a:t>
-            </a:r>
-            <a:r>
-              <a:rPr lang="en-US" dirty="0" err="1">
-                <a:solidFill>
-                  <a:schemeClr val="bg1"/>
-                </a:solidFill>
-              </a:rPr>
-              <a:t>NaN</a:t>
-            </a:r>
-            <a:r>
-              <a:rPr lang="en-US" dirty="0">
-                <a:solidFill>
-                  <a:schemeClr val="bg1"/>
-                </a:solidFill>
-              </a:rPr>
-              <a:t> values that </a:t>
-            </a:r>
-            <a:r>
-              <a:rPr lang="en-US" dirty="0" err="1">
-                <a:solidFill>
-                  <a:schemeClr val="bg1"/>
-                </a:solidFill>
-                <a:latin typeface="Courier New" panose="02070309020205020404" pitchFamily="49" charset="0"/>
-                <a:cs typeface="Courier New" panose="02070309020205020404" pitchFamily="49" charset="0"/>
-              </a:rPr>
-              <a:t>LakeTemperature</a:t>
-            </a:r>
-            <a:r>
-              <a:rPr lang="en-US" dirty="0">
-                <a:solidFill>
-                  <a:schemeClr val="bg1"/>
-                </a:solidFill>
-              </a:rPr>
-              <a:t> then never overwrites or </a:t>
-            </a:r>
-            <a:r>
-              <a:rPr lang="en-US" dirty="0" err="1">
-                <a:solidFill>
-                  <a:schemeClr val="bg1"/>
-                </a:solidFill>
-                <a:latin typeface="Courier New" panose="02070309020205020404" pitchFamily="49" charset="0"/>
-                <a:cs typeface="Courier New" panose="02070309020205020404" pitchFamily="49" charset="0"/>
-              </a:rPr>
-              <a:t>LakeTemperature</a:t>
-            </a:r>
-            <a:r>
-              <a:rPr lang="en-US" dirty="0">
-                <a:solidFill>
-                  <a:schemeClr val="bg1"/>
-                </a:solidFill>
-              </a:rPr>
-              <a:t> might be outputting data with </a:t>
-            </a:r>
-            <a:r>
-              <a:rPr lang="en-US" dirty="0" err="1">
-                <a:solidFill>
-                  <a:schemeClr val="bg1"/>
-                </a:solidFill>
-              </a:rPr>
-              <a:t>NaN</a:t>
-            </a:r>
-            <a:r>
-              <a:rPr lang="en-US" dirty="0">
-                <a:solidFill>
-                  <a:schemeClr val="bg1"/>
-                </a:solidFill>
-              </a:rPr>
-              <a:t> values. Currently …/231 combinatorial cases with all constants have at least one model output with </a:t>
-            </a:r>
-            <a:r>
-              <a:rPr lang="en-US" dirty="0" err="1">
-                <a:solidFill>
-                  <a:schemeClr val="bg1"/>
-                </a:solidFill>
-              </a:rPr>
-              <a:t>NaN</a:t>
-            </a:r>
-            <a:r>
-              <a:rPr lang="en-US" dirty="0">
-                <a:solidFill>
-                  <a:schemeClr val="bg1"/>
-                </a:solidFill>
-              </a:rPr>
-              <a:t> values and …/231 combinatorial cases with some constants have at least one model output with </a:t>
-            </a:r>
-            <a:r>
-              <a:rPr lang="en-US" dirty="0" err="1">
-                <a:solidFill>
-                  <a:schemeClr val="bg1"/>
-                </a:solidFill>
-              </a:rPr>
-              <a:t>NaN</a:t>
-            </a:r>
-            <a:r>
-              <a:rPr lang="en-US" dirty="0">
-                <a:solidFill>
-                  <a:schemeClr val="bg1"/>
-                </a:solidFill>
-              </a:rPr>
-              <a:t> values. </a:t>
-            </a:r>
-            <a:endParaRPr lang="en-US" i="1" dirty="0">
-              <a:solidFill>
-                <a:schemeClr val="bg1"/>
-              </a:solidFill>
-            </a:endParaRPr>
-          </a:p>
-          <a:p>
-            <a:pPr marL="342900" indent="-342900"/>
-            <a:r>
-              <a:rPr lang="en-US" dirty="0">
-                <a:solidFill>
-                  <a:schemeClr val="bg1"/>
-                </a:solidFill>
-              </a:rPr>
-              <a:t>Largely, </a:t>
-            </a:r>
-            <a:r>
-              <a:rPr lang="en-US" dirty="0" err="1">
-                <a:solidFill>
-                  <a:schemeClr val="bg1"/>
-                </a:solidFill>
-                <a:latin typeface="Courier New" panose="02070309020205020404" pitchFamily="49" charset="0"/>
-                <a:cs typeface="Courier New" panose="02070309020205020404" pitchFamily="49" charset="0"/>
-              </a:rPr>
-              <a:t>LakeTemperature</a:t>
-            </a:r>
-            <a:r>
-              <a:rPr lang="en-US" dirty="0">
-                <a:solidFill>
-                  <a:schemeClr val="bg1"/>
-                </a:solidFill>
-              </a:rPr>
-              <a:t> output data was valid and within physical bounds. However, some cases resulted in some physically impossible outputs, likely due to combinations between a few model constants. </a:t>
+              <a:t>Findings from Initial Testing</a:t>
             </a:r>
           </a:p>
         </p:txBody>
       </p:sp>
     </p:spTree>
+    <p:extLst>
+      <p:ext uri="{BB962C8B-B14F-4D97-AF65-F5344CB8AC3E}">
+        <p14:creationId xmlns:p14="http://schemas.microsoft.com/office/powerpoint/2010/main" val="1486384677"/>
+      </p:ext>
+    </p:extLst>
   </p:cSld>
   <p:clrMapOvr>
     <a:masterClrMapping/>
   </p:clrMapOvr>
-  <p:extLst>
-    <p:ext uri="{6950BFC3-D8DA-4A85-94F7-54DA5524770B}">
-      <p188:commentRel xmlns:p188="http://schemas.microsoft.com/office/powerpoint/2018/8/main" r:id="rId3"/>
-    </p:ext>
-  </p:extLst>
 </p:sld>
 </file>
 

--- a/documentation/for_collaborators/AnalysisOverview.pptx
+++ b/documentation/for_collaborators/AnalysisOverview.pptx
@@ -5,52 +5,55 @@
     <p:sldMasterId id="2147483648" r:id="rId1"/>
   </p:sldMasterIdLst>
   <p:notesMasterIdLst>
-    <p:notesMasterId r:id="rId42"/>
+    <p:notesMasterId r:id="rId45"/>
   </p:notesMasterIdLst>
   <p:handoutMasterIdLst>
-    <p:handoutMasterId r:id="rId43"/>
+    <p:handoutMasterId r:id="rId46"/>
   </p:handoutMasterIdLst>
   <p:sldIdLst>
     <p:sldId id="256" r:id="rId2"/>
-    <p:sldId id="266" r:id="rId3"/>
-    <p:sldId id="280" r:id="rId4"/>
-    <p:sldId id="282" r:id="rId5"/>
-    <p:sldId id="281" r:id="rId6"/>
-    <p:sldId id="268" r:id="rId7"/>
-    <p:sldId id="283" r:id="rId8"/>
-    <p:sldId id="284" r:id="rId9"/>
-    <p:sldId id="274" r:id="rId10"/>
-    <p:sldId id="271" r:id="rId11"/>
-    <p:sldId id="275" r:id="rId12"/>
-    <p:sldId id="257" r:id="rId13"/>
-    <p:sldId id="285" r:id="rId14"/>
-    <p:sldId id="258" r:id="rId15"/>
-    <p:sldId id="259" r:id="rId16"/>
-    <p:sldId id="287" r:id="rId17"/>
-    <p:sldId id="296" r:id="rId18"/>
-    <p:sldId id="291" r:id="rId19"/>
-    <p:sldId id="297" r:id="rId20"/>
-    <p:sldId id="292" r:id="rId21"/>
-    <p:sldId id="298" r:id="rId22"/>
-    <p:sldId id="299" r:id="rId23"/>
-    <p:sldId id="288" r:id="rId24"/>
-    <p:sldId id="293" r:id="rId25"/>
-    <p:sldId id="290" r:id="rId26"/>
-    <p:sldId id="294" r:id="rId27"/>
-    <p:sldId id="289" r:id="rId28"/>
-    <p:sldId id="295" r:id="rId29"/>
-    <p:sldId id="286" r:id="rId30"/>
-    <p:sldId id="300" r:id="rId31"/>
-    <p:sldId id="301" r:id="rId32"/>
-    <p:sldId id="302" r:id="rId33"/>
-    <p:sldId id="303" r:id="rId34"/>
-    <p:sldId id="304" r:id="rId35"/>
-    <p:sldId id="305" r:id="rId36"/>
-    <p:sldId id="262" r:id="rId37"/>
-    <p:sldId id="306" r:id="rId38"/>
-    <p:sldId id="276" r:id="rId39"/>
-    <p:sldId id="265" r:id="rId40"/>
-    <p:sldId id="307" r:id="rId41"/>
+    <p:sldId id="285" r:id="rId3"/>
+    <p:sldId id="308" r:id="rId4"/>
+    <p:sldId id="266" r:id="rId5"/>
+    <p:sldId id="280" r:id="rId6"/>
+    <p:sldId id="282" r:id="rId7"/>
+    <p:sldId id="281" r:id="rId8"/>
+    <p:sldId id="268" r:id="rId9"/>
+    <p:sldId id="283" r:id="rId10"/>
+    <p:sldId id="309" r:id="rId11"/>
+    <p:sldId id="284" r:id="rId12"/>
+    <p:sldId id="274" r:id="rId13"/>
+    <p:sldId id="271" r:id="rId14"/>
+    <p:sldId id="310" r:id="rId15"/>
+    <p:sldId id="275" r:id="rId16"/>
+    <p:sldId id="257" r:id="rId17"/>
+    <p:sldId id="258" r:id="rId18"/>
+    <p:sldId id="259" r:id="rId19"/>
+    <p:sldId id="287" r:id="rId20"/>
+    <p:sldId id="296" r:id="rId21"/>
+    <p:sldId id="291" r:id="rId22"/>
+    <p:sldId id="297" r:id="rId23"/>
+    <p:sldId id="292" r:id="rId24"/>
+    <p:sldId id="298" r:id="rId25"/>
+    <p:sldId id="299" r:id="rId26"/>
+    <p:sldId id="288" r:id="rId27"/>
+    <p:sldId id="293" r:id="rId28"/>
+    <p:sldId id="290" r:id="rId29"/>
+    <p:sldId id="294" r:id="rId30"/>
+    <p:sldId id="289" r:id="rId31"/>
+    <p:sldId id="295" r:id="rId32"/>
+    <p:sldId id="286" r:id="rId33"/>
+    <p:sldId id="300" r:id="rId34"/>
+    <p:sldId id="301" r:id="rId35"/>
+    <p:sldId id="302" r:id="rId36"/>
+    <p:sldId id="303" r:id="rId37"/>
+    <p:sldId id="304" r:id="rId38"/>
+    <p:sldId id="305" r:id="rId39"/>
+    <p:sldId id="262" r:id="rId40"/>
+    <p:sldId id="306" r:id="rId41"/>
+    <p:sldId id="276" r:id="rId42"/>
+    <p:sldId id="265" r:id="rId43"/>
+    <p:sldId id="307" r:id="rId44"/>
   </p:sldIdLst>
   <p:sldSz cx="10080625" cy="5670550"/>
   <p:notesSz cx="7559675" cy="10691813"/>
@@ -170,8 +173,8 @@
       <pc:docMk xmlns:pc="http://schemas.microsoft.com/office/powerpoint/2013/main/command"/>
       <pc:sldMk xmlns:pc="http://schemas.microsoft.com/office/powerpoint/2013/main/command" cId="0" sldId="262"/>
       <ac:spMk id="3" creationId="{3F589F92-B484-4E15-0CDC-FFD075A2A74E}"/>
-      <ac:txMk cp="41" len="3">
-        <ac:context len="255" hash="937111326"/>
+      <ac:txMk cp="41">
+        <ac:context len="255" hash="3111617789"/>
       </ac:txMk>
     </ac:txMkLst>
     <p188:pos x="2899601" y="1264200"/>
@@ -214,7 +217,7 @@
       <pc:sldMk xmlns:pc="http://schemas.microsoft.com/office/powerpoint/2013/main/command" cId="0" sldId="265"/>
       <ac:spMk id="3" creationId="{C9367797-CD5B-309B-985B-DF6091246510}"/>
       <ac:txMk cp="695">
-        <ac:context len="696" hash="2596077629"/>
+        <ac:context len="701" hash="2727786448"/>
       </ac:txMk>
     </ac:txMkLst>
     <p188:pos x="2747202" y="2605320"/>
@@ -240,7 +243,7 @@
       <pc:sldMk xmlns:pc="http://schemas.microsoft.com/office/powerpoint/2013/main/command" cId="2353400714" sldId="276"/>
       <ac:spMk id="3" creationId="{5CF707B8-09A9-A28B-36FE-7651ACC03308}"/>
       <ac:txMk cp="107" len="5">
-        <ac:context len="362" hash="2449489152"/>
+        <ac:context len="367" hash="2406850140"/>
       </ac:txMk>
     </ac:txMkLst>
     <p188:pos x="3041841" y="370120"/>
@@ -1075,6 +1078,360 @@
           <p:cNvPr id="7" name="Slide Number Placeholder 6">
             <a:extLst>
               <a:ext uri="{FF2B5EF4-FFF2-40B4-BE49-F238E27FC236}">
+                <a16:creationId xmlns:a16="http://schemas.microsoft.com/office/drawing/2014/main" id="{8F566B37-0908-2EE3-EEBB-987402C98D9C}"/>
+              </a:ext>
+            </a:extLst>
+          </p:cNvPr>
+          <p:cNvSpPr txBox="1">
+            <a:spLocks noGrp="1"/>
+          </p:cNvSpPr>
+          <p:nvPr>
+            <p:ph type="sldNum" sz="quarter" idx="5"/>
+          </p:nvPr>
+        </p:nvSpPr>
+        <p:spPr>
+          <a:ln/>
+        </p:spPr>
+        <p:txBody>
+          <a:bodyPr vert="horz" lIns="0" tIns="0" rIns="0" bIns="0" anchor="b" anchorCtr="0">
+            <a:noAutofit/>
+          </a:bodyPr>
+          <a:lstStyle/>
+          <a:p>
+            <a:pPr lvl="0"/>
+            <a:fld id="{46DC6A57-27CA-2945-BA58-25741BFA1969}" type="slidenum">
+              <a:t>17</a:t>
+            </a:fld>
+            <a:endParaRPr lang="en-US"/>
+          </a:p>
+        </p:txBody>
+      </p:sp>
+      <p:sp>
+        <p:nvSpPr>
+          <p:cNvPr id="2" name="Slide Image Placeholder 1">
+            <a:extLst>
+              <a:ext uri="{FF2B5EF4-FFF2-40B4-BE49-F238E27FC236}">
+                <a16:creationId xmlns:a16="http://schemas.microsoft.com/office/drawing/2014/main" id="{7622ED5D-A6F3-B88C-C442-646AB8485103}"/>
+              </a:ext>
+            </a:extLst>
+          </p:cNvPr>
+          <p:cNvSpPr>
+            <a:spLocks noGrp="1" noRot="1" noChangeAspect="1" noResize="1"/>
+          </p:cNvSpPr>
+          <p:nvPr>
+            <p:ph type="sldImg"/>
+          </p:nvPr>
+        </p:nvSpPr>
+        <p:spPr>
+          <a:xfrm>
+            <a:off x="217488" y="812800"/>
+            <a:ext cx="7124700" cy="4008438"/>
+          </a:xfrm>
+          <a:solidFill>
+            <a:srgbClr val="729FCF"/>
+          </a:solidFill>
+          <a:ln w="25400">
+            <a:solidFill>
+              <a:srgbClr val="3465A4"/>
+            </a:solidFill>
+            <a:prstDash val="solid"/>
+          </a:ln>
+        </p:spPr>
+      </p:sp>
+      <p:sp>
+        <p:nvSpPr>
+          <p:cNvPr id="3" name="Notes Placeholder 2">
+            <a:extLst>
+              <a:ext uri="{FF2B5EF4-FFF2-40B4-BE49-F238E27FC236}">
+                <a16:creationId xmlns:a16="http://schemas.microsoft.com/office/drawing/2014/main" id="{D3E5210D-1007-26F9-72F8-BB536ADCDCE6}"/>
+              </a:ext>
+            </a:extLst>
+          </p:cNvPr>
+          <p:cNvSpPr txBox="1">
+            <a:spLocks noGrp="1"/>
+          </p:cNvSpPr>
+          <p:nvPr>
+            <p:ph type="body" sz="quarter" idx="1"/>
+          </p:nvPr>
+        </p:nvSpPr>
+        <p:spPr/>
+        <p:txBody>
+          <a:bodyPr vert="horz">
+            <a:noAutofit/>
+          </a:bodyPr>
+          <a:lstStyle/>
+          <a:p>
+            <a:pPr rtl="0"/>
+            <a:endParaRPr lang="en-US"/>
+          </a:p>
+        </p:txBody>
+      </p:sp>
+    </p:spTree>
+  </p:cSld>
+  <p:clrMapOvr>
+    <a:masterClrMapping/>
+  </p:clrMapOvr>
+</p:notes>
+</file>
+
+<file path=ppt/notesSlides/notesSlide11.xml><?xml version="1.0" encoding="utf-8"?>
+<p:notes xmlns:a="http://schemas.openxmlformats.org/drawingml/2006/main" xmlns:r="http://schemas.openxmlformats.org/officeDocument/2006/relationships" xmlns:p="http://schemas.openxmlformats.org/presentationml/2006/main">
+  <p:cSld>
+    <p:spTree>
+      <p:nvGrpSpPr>
+        <p:cNvPr id="1" name=""/>
+        <p:cNvGrpSpPr/>
+        <p:nvPr/>
+      </p:nvGrpSpPr>
+      <p:grpSpPr>
+        <a:xfrm>
+          <a:off x="0" y="0"/>
+          <a:ext cx="0" cy="0"/>
+          <a:chOff x="0" y="0"/>
+          <a:chExt cx="0" cy="0"/>
+        </a:xfrm>
+      </p:grpSpPr>
+      <p:sp>
+        <p:nvSpPr>
+          <p:cNvPr id="7" name="Slide Number Placeholder 6">
+            <a:extLst>
+              <a:ext uri="{FF2B5EF4-FFF2-40B4-BE49-F238E27FC236}">
+                <a16:creationId xmlns:a16="http://schemas.microsoft.com/office/drawing/2014/main" id="{540BB736-270A-5617-ED56-90CFB5654E66}"/>
+              </a:ext>
+            </a:extLst>
+          </p:cNvPr>
+          <p:cNvSpPr txBox="1">
+            <a:spLocks noGrp="1"/>
+          </p:cNvSpPr>
+          <p:nvPr>
+            <p:ph type="sldNum" sz="quarter" idx="5"/>
+          </p:nvPr>
+        </p:nvSpPr>
+        <p:spPr>
+          <a:ln/>
+        </p:spPr>
+        <p:txBody>
+          <a:bodyPr vert="horz" lIns="0" tIns="0" rIns="0" bIns="0" anchor="b" anchorCtr="0">
+            <a:noAutofit/>
+          </a:bodyPr>
+          <a:lstStyle/>
+          <a:p>
+            <a:pPr lvl="0"/>
+            <a:fld id="{FE90A4ED-5FD0-B044-8E31-F6C0BAFF2FAB}" type="slidenum">
+              <a:t>18</a:t>
+            </a:fld>
+            <a:endParaRPr lang="en-US"/>
+          </a:p>
+        </p:txBody>
+      </p:sp>
+      <p:sp>
+        <p:nvSpPr>
+          <p:cNvPr id="2" name="Slide Image Placeholder 1">
+            <a:extLst>
+              <a:ext uri="{FF2B5EF4-FFF2-40B4-BE49-F238E27FC236}">
+                <a16:creationId xmlns:a16="http://schemas.microsoft.com/office/drawing/2014/main" id="{68D84902-6734-20C1-0323-4213F13F12B1}"/>
+              </a:ext>
+            </a:extLst>
+          </p:cNvPr>
+          <p:cNvSpPr>
+            <a:spLocks noGrp="1" noRot="1" noChangeAspect="1" noResize="1"/>
+          </p:cNvSpPr>
+          <p:nvPr>
+            <p:ph type="sldImg"/>
+          </p:nvPr>
+        </p:nvSpPr>
+        <p:spPr>
+          <a:xfrm>
+            <a:off x="217488" y="812800"/>
+            <a:ext cx="7124700" cy="4008438"/>
+          </a:xfrm>
+          <a:solidFill>
+            <a:srgbClr val="729FCF"/>
+          </a:solidFill>
+          <a:ln w="25400">
+            <a:solidFill>
+              <a:srgbClr val="3465A4"/>
+            </a:solidFill>
+            <a:prstDash val="solid"/>
+          </a:ln>
+        </p:spPr>
+      </p:sp>
+      <p:sp>
+        <p:nvSpPr>
+          <p:cNvPr id="3" name="Notes Placeholder 2">
+            <a:extLst>
+              <a:ext uri="{FF2B5EF4-FFF2-40B4-BE49-F238E27FC236}">
+                <a16:creationId xmlns:a16="http://schemas.microsoft.com/office/drawing/2014/main" id="{02720450-8312-156D-E8CB-F3019597C58F}"/>
+              </a:ext>
+            </a:extLst>
+          </p:cNvPr>
+          <p:cNvSpPr txBox="1">
+            <a:spLocks noGrp="1"/>
+          </p:cNvSpPr>
+          <p:nvPr>
+            <p:ph type="body" sz="quarter" idx="1"/>
+          </p:nvPr>
+        </p:nvSpPr>
+        <p:spPr/>
+        <p:txBody>
+          <a:bodyPr vert="horz">
+            <a:noAutofit/>
+          </a:bodyPr>
+          <a:lstStyle/>
+          <a:p>
+            <a:pPr rtl="0"/>
+            <a:endParaRPr lang="en-US"/>
+          </a:p>
+        </p:txBody>
+      </p:sp>
+    </p:spTree>
+  </p:cSld>
+  <p:clrMapOvr>
+    <a:masterClrMapping/>
+  </p:clrMapOvr>
+</p:notes>
+</file>
+
+<file path=ppt/notesSlides/notesSlide12.xml><?xml version="1.0" encoding="utf-8"?>
+<p:notes xmlns:a="http://schemas.openxmlformats.org/drawingml/2006/main" xmlns:r="http://schemas.openxmlformats.org/officeDocument/2006/relationships" xmlns:p="http://schemas.openxmlformats.org/presentationml/2006/main">
+  <p:cSld>
+    <p:spTree>
+      <p:nvGrpSpPr>
+        <p:cNvPr id="1" name=""/>
+        <p:cNvGrpSpPr/>
+        <p:nvPr/>
+      </p:nvGrpSpPr>
+      <p:grpSpPr>
+        <a:xfrm>
+          <a:off x="0" y="0"/>
+          <a:ext cx="0" cy="0"/>
+          <a:chOff x="0" y="0"/>
+          <a:chExt cx="0" cy="0"/>
+        </a:xfrm>
+      </p:grpSpPr>
+      <p:sp>
+        <p:nvSpPr>
+          <p:cNvPr id="7" name="Slide Number Placeholder 6">
+            <a:extLst>
+              <a:ext uri="{FF2B5EF4-FFF2-40B4-BE49-F238E27FC236}">
+                <a16:creationId xmlns:a16="http://schemas.microsoft.com/office/drawing/2014/main" id="{C61522D3-D471-6654-5647-49B4C7B57F13}"/>
+              </a:ext>
+            </a:extLst>
+          </p:cNvPr>
+          <p:cNvSpPr txBox="1">
+            <a:spLocks noGrp="1"/>
+          </p:cNvSpPr>
+          <p:nvPr>
+            <p:ph type="sldNum" sz="quarter" idx="5"/>
+          </p:nvPr>
+        </p:nvSpPr>
+        <p:spPr>
+          <a:ln/>
+        </p:spPr>
+        <p:txBody>
+          <a:bodyPr vert="horz" lIns="0" tIns="0" rIns="0" bIns="0" anchor="b" anchorCtr="0">
+            <a:noAutofit/>
+          </a:bodyPr>
+          <a:lstStyle/>
+          <a:p>
+            <a:pPr lvl="0"/>
+            <a:fld id="{30A5194F-B1BB-9D4C-AE76-7B3B08E77197}" type="slidenum">
+              <a:t>39</a:t>
+            </a:fld>
+            <a:endParaRPr lang="en-US"/>
+          </a:p>
+        </p:txBody>
+      </p:sp>
+      <p:sp>
+        <p:nvSpPr>
+          <p:cNvPr id="2" name="Slide Image Placeholder 1">
+            <a:extLst>
+              <a:ext uri="{FF2B5EF4-FFF2-40B4-BE49-F238E27FC236}">
+                <a16:creationId xmlns:a16="http://schemas.microsoft.com/office/drawing/2014/main" id="{CD5122A9-AAF5-017F-2713-8D6736D1658F}"/>
+              </a:ext>
+            </a:extLst>
+          </p:cNvPr>
+          <p:cNvSpPr>
+            <a:spLocks noGrp="1" noRot="1" noChangeAspect="1" noResize="1"/>
+          </p:cNvSpPr>
+          <p:nvPr>
+            <p:ph type="sldImg"/>
+          </p:nvPr>
+        </p:nvSpPr>
+        <p:spPr>
+          <a:xfrm>
+            <a:off x="217488" y="812800"/>
+            <a:ext cx="7124700" cy="4008438"/>
+          </a:xfrm>
+          <a:solidFill>
+            <a:srgbClr val="729FCF"/>
+          </a:solidFill>
+          <a:ln w="25400">
+            <a:solidFill>
+              <a:srgbClr val="3465A4"/>
+            </a:solidFill>
+            <a:prstDash val="solid"/>
+          </a:ln>
+        </p:spPr>
+      </p:sp>
+      <p:sp>
+        <p:nvSpPr>
+          <p:cNvPr id="3" name="Notes Placeholder 2">
+            <a:extLst>
+              <a:ext uri="{FF2B5EF4-FFF2-40B4-BE49-F238E27FC236}">
+                <a16:creationId xmlns:a16="http://schemas.microsoft.com/office/drawing/2014/main" id="{BB2F8224-C160-9DAC-0CE9-C8590AB34774}"/>
+              </a:ext>
+            </a:extLst>
+          </p:cNvPr>
+          <p:cNvSpPr txBox="1">
+            <a:spLocks noGrp="1"/>
+          </p:cNvSpPr>
+          <p:nvPr>
+            <p:ph type="body" sz="quarter" idx="1"/>
+          </p:nvPr>
+        </p:nvSpPr>
+        <p:spPr/>
+        <p:txBody>
+          <a:bodyPr vert="horz">
+            <a:noAutofit/>
+          </a:bodyPr>
+          <a:lstStyle/>
+          <a:p>
+            <a:pPr rtl="0"/>
+            <a:endParaRPr lang="en-US"/>
+          </a:p>
+        </p:txBody>
+      </p:sp>
+    </p:spTree>
+  </p:cSld>
+  <p:clrMapOvr>
+    <a:masterClrMapping/>
+  </p:clrMapOvr>
+</p:notes>
+</file>
+
+<file path=ppt/notesSlides/notesSlide13.xml><?xml version="1.0" encoding="utf-8"?>
+<p:notes xmlns:a="http://schemas.openxmlformats.org/drawingml/2006/main" xmlns:r="http://schemas.openxmlformats.org/officeDocument/2006/relationships" xmlns:p="http://schemas.openxmlformats.org/presentationml/2006/main">
+  <p:cSld>
+    <p:spTree>
+      <p:nvGrpSpPr>
+        <p:cNvPr id="1" name=""/>
+        <p:cNvGrpSpPr/>
+        <p:nvPr/>
+      </p:nvGrpSpPr>
+      <p:grpSpPr>
+        <a:xfrm>
+          <a:off x="0" y="0"/>
+          <a:ext cx="0" cy="0"/>
+          <a:chOff x="0" y="0"/>
+          <a:chExt cx="0" cy="0"/>
+        </a:xfrm>
+      </p:grpSpPr>
+      <p:sp>
+        <p:nvSpPr>
+          <p:cNvPr id="7" name="Slide Number Placeholder 6">
+            <a:extLst>
+              <a:ext uri="{FF2B5EF4-FFF2-40B4-BE49-F238E27FC236}">
                 <a16:creationId xmlns:a16="http://schemas.microsoft.com/office/drawing/2014/main" id="{809DFAEF-D49A-EDEF-37EA-BF8CA8BAEB34}"/>
               </a:ext>
             </a:extLst>
@@ -1097,7 +1454,7 @@
           <a:p>
             <a:pPr lvl="0"/>
             <a:fld id="{18702C2E-8935-084B-8A6A-C1C4FB937928}" type="slidenum">
-              <a:t>39</a:t>
+              <a:t>42</a:t>
             </a:fld>
             <a:endParaRPr lang="en-US"/>
           </a:p>
@@ -1179,6 +1536,135 @@
         <p:cNvPr id="1" name="">
           <a:extLst>
             <a:ext uri="{FF2B5EF4-FFF2-40B4-BE49-F238E27FC236}">
+              <a16:creationId xmlns:a16="http://schemas.microsoft.com/office/drawing/2014/main" id="{0774208E-D349-D482-B126-FB69BF5AADA9}"/>
+            </a:ext>
+          </a:extLst>
+        </p:cNvPr>
+        <p:cNvGrpSpPr/>
+        <p:nvPr/>
+      </p:nvGrpSpPr>
+      <p:grpSpPr>
+        <a:xfrm>
+          <a:off x="0" y="0"/>
+          <a:ext cx="0" cy="0"/>
+          <a:chOff x="0" y="0"/>
+          <a:chExt cx="0" cy="0"/>
+        </a:xfrm>
+      </p:grpSpPr>
+      <p:sp>
+        <p:nvSpPr>
+          <p:cNvPr id="7" name="Slide Number Placeholder 6">
+            <a:extLst>
+              <a:ext uri="{FF2B5EF4-FFF2-40B4-BE49-F238E27FC236}">
+                <a16:creationId xmlns:a16="http://schemas.microsoft.com/office/drawing/2014/main" id="{E188CE42-C176-F1C0-9F88-F20282DF4E08}"/>
+              </a:ext>
+            </a:extLst>
+          </p:cNvPr>
+          <p:cNvSpPr txBox="1">
+            <a:spLocks noGrp="1"/>
+          </p:cNvSpPr>
+          <p:nvPr>
+            <p:ph type="sldNum" sz="quarter" idx="5"/>
+          </p:nvPr>
+        </p:nvSpPr>
+        <p:spPr>
+          <a:ln/>
+        </p:spPr>
+        <p:txBody>
+          <a:bodyPr vert="horz" lIns="0" tIns="0" rIns="0" bIns="0" anchor="b" anchorCtr="0">
+            <a:noAutofit/>
+          </a:bodyPr>
+          <a:lstStyle/>
+          <a:p>
+            <a:pPr lvl="0"/>
+            <a:fld id="{078DD1D6-275C-7740-A623-EDAB14EE6CE3}" type="slidenum">
+              <a:t>3</a:t>
+            </a:fld>
+            <a:endParaRPr lang="en-US"/>
+          </a:p>
+        </p:txBody>
+      </p:sp>
+      <p:sp>
+        <p:nvSpPr>
+          <p:cNvPr id="2" name="Slide Image Placeholder 1">
+            <a:extLst>
+              <a:ext uri="{FF2B5EF4-FFF2-40B4-BE49-F238E27FC236}">
+                <a16:creationId xmlns:a16="http://schemas.microsoft.com/office/drawing/2014/main" id="{694D2668-A621-700E-DC63-7629AB912B85}"/>
+              </a:ext>
+            </a:extLst>
+          </p:cNvPr>
+          <p:cNvSpPr>
+            <a:spLocks noGrp="1" noRot="1" noChangeAspect="1" noResize="1"/>
+          </p:cNvSpPr>
+          <p:nvPr>
+            <p:ph type="sldImg"/>
+          </p:nvPr>
+        </p:nvSpPr>
+        <p:spPr>
+          <a:xfrm>
+            <a:off x="217488" y="812800"/>
+            <a:ext cx="7124700" cy="4008438"/>
+          </a:xfrm>
+          <a:solidFill>
+            <a:srgbClr val="729FCF"/>
+          </a:solidFill>
+          <a:ln w="25400">
+            <a:solidFill>
+              <a:srgbClr val="3465A4"/>
+            </a:solidFill>
+            <a:prstDash val="solid"/>
+          </a:ln>
+        </p:spPr>
+      </p:sp>
+      <p:sp>
+        <p:nvSpPr>
+          <p:cNvPr id="3" name="Notes Placeholder 2">
+            <a:extLst>
+              <a:ext uri="{FF2B5EF4-FFF2-40B4-BE49-F238E27FC236}">
+                <a16:creationId xmlns:a16="http://schemas.microsoft.com/office/drawing/2014/main" id="{3DAB1473-E0D9-60F4-AA06-C9164AFA3ACC}"/>
+              </a:ext>
+            </a:extLst>
+          </p:cNvPr>
+          <p:cNvSpPr txBox="1">
+            <a:spLocks noGrp="1"/>
+          </p:cNvSpPr>
+          <p:nvPr>
+            <p:ph type="body" sz="quarter" idx="1"/>
+          </p:nvPr>
+        </p:nvSpPr>
+        <p:spPr/>
+        <p:txBody>
+          <a:bodyPr vert="horz">
+            <a:noAutofit/>
+          </a:bodyPr>
+          <a:lstStyle/>
+          <a:p>
+            <a:pPr rtl="0"/>
+            <a:endParaRPr lang="en-US"/>
+          </a:p>
+        </p:txBody>
+      </p:sp>
+    </p:spTree>
+    <p:extLst>
+      <p:ext uri="{BB962C8B-B14F-4D97-AF65-F5344CB8AC3E}">
+        <p14:creationId xmlns:p14="http://schemas.microsoft.com/office/powerpoint/2010/main" val="3464096397"/>
+      </p:ext>
+    </p:extLst>
+  </p:cSld>
+  <p:clrMapOvr>
+    <a:masterClrMapping/>
+  </p:clrMapOvr>
+</p:notes>
+</file>
+
+<file path=ppt/notesSlides/notesSlide3.xml><?xml version="1.0" encoding="utf-8"?>
+<p:notes xmlns:a="http://schemas.openxmlformats.org/drawingml/2006/main" xmlns:r="http://schemas.openxmlformats.org/officeDocument/2006/relationships" xmlns:p="http://schemas.openxmlformats.org/presentationml/2006/main">
+  <p:cSld>
+    <p:spTree>
+      <p:nvGrpSpPr>
+        <p:cNvPr id="1" name="">
+          <a:extLst>
+            <a:ext uri="{FF2B5EF4-FFF2-40B4-BE49-F238E27FC236}">
               <a16:creationId xmlns:a16="http://schemas.microsoft.com/office/drawing/2014/main" id="{9FAFC9F6-EA65-0C54-A58C-56CEBCBB6250}"/>
             </a:ext>
           </a:extLst>
@@ -1221,7 +1707,7 @@
           <a:p>
             <a:pPr lvl="0"/>
             <a:fld id="{59065317-6997-AF48-9E2D-F3DC91694882}" type="slidenum">
-              <a:t>2</a:t>
+              <a:t>4</a:t>
             </a:fld>
             <a:endParaRPr lang="en-US"/>
           </a:p>
@@ -1300,7 +1786,7 @@
 </p:notes>
 </file>
 
-<file path=ppt/notesSlides/notesSlide3.xml><?xml version="1.0" encoding="utf-8"?>
+<file path=ppt/notesSlides/notesSlide4.xml><?xml version="1.0" encoding="utf-8"?>
 <p:notes xmlns:a="http://schemas.openxmlformats.org/drawingml/2006/main" xmlns:r="http://schemas.openxmlformats.org/officeDocument/2006/relationships" xmlns:p="http://schemas.openxmlformats.org/presentationml/2006/main">
   <p:cSld>
     <p:spTree>
@@ -1350,7 +1836,7 @@
           <a:p>
             <a:pPr lvl="0"/>
             <a:fld id="{805BC73B-1373-A04C-9AEE-DE1873EAA8E9}" type="slidenum">
-              <a:t>6</a:t>
+              <a:t>8</a:t>
             </a:fld>
             <a:endParaRPr lang="en-US"/>
           </a:p>
@@ -1429,7 +1915,136 @@
 </p:notes>
 </file>
 
-<file path=ppt/notesSlides/notesSlide4.xml><?xml version="1.0" encoding="utf-8"?>
+<file path=ppt/notesSlides/notesSlide5.xml><?xml version="1.0" encoding="utf-8"?>
+<p:notes xmlns:a="http://schemas.openxmlformats.org/drawingml/2006/main" xmlns:r="http://schemas.openxmlformats.org/officeDocument/2006/relationships" xmlns:p="http://schemas.openxmlformats.org/presentationml/2006/main">
+  <p:cSld>
+    <p:spTree>
+      <p:nvGrpSpPr>
+        <p:cNvPr id="1" name="">
+          <a:extLst>
+            <a:ext uri="{FF2B5EF4-FFF2-40B4-BE49-F238E27FC236}">
+              <a16:creationId xmlns:a16="http://schemas.microsoft.com/office/drawing/2014/main" id="{624E4114-98F9-0201-A8E7-27601FA75040}"/>
+            </a:ext>
+          </a:extLst>
+        </p:cNvPr>
+        <p:cNvGrpSpPr/>
+        <p:nvPr/>
+      </p:nvGrpSpPr>
+      <p:grpSpPr>
+        <a:xfrm>
+          <a:off x="0" y="0"/>
+          <a:ext cx="0" cy="0"/>
+          <a:chOff x="0" y="0"/>
+          <a:chExt cx="0" cy="0"/>
+        </a:xfrm>
+      </p:grpSpPr>
+      <p:sp>
+        <p:nvSpPr>
+          <p:cNvPr id="7" name="Slide Number Placeholder 6">
+            <a:extLst>
+              <a:ext uri="{FF2B5EF4-FFF2-40B4-BE49-F238E27FC236}">
+                <a16:creationId xmlns:a16="http://schemas.microsoft.com/office/drawing/2014/main" id="{7F3B5640-AD6C-C988-4C08-7B1FB22BC9D8}"/>
+              </a:ext>
+            </a:extLst>
+          </p:cNvPr>
+          <p:cNvSpPr txBox="1">
+            <a:spLocks noGrp="1"/>
+          </p:cNvSpPr>
+          <p:nvPr>
+            <p:ph type="sldNum" sz="quarter" idx="5"/>
+          </p:nvPr>
+        </p:nvSpPr>
+        <p:spPr>
+          <a:ln/>
+        </p:spPr>
+        <p:txBody>
+          <a:bodyPr vert="horz" lIns="0" tIns="0" rIns="0" bIns="0" anchor="b" anchorCtr="0">
+            <a:noAutofit/>
+          </a:bodyPr>
+          <a:lstStyle/>
+          <a:p>
+            <a:pPr lvl="0"/>
+            <a:fld id="{078DD1D6-275C-7740-A623-EDAB14EE6CE3}" type="slidenum">
+              <a:t>10</a:t>
+            </a:fld>
+            <a:endParaRPr lang="en-US"/>
+          </a:p>
+        </p:txBody>
+      </p:sp>
+      <p:sp>
+        <p:nvSpPr>
+          <p:cNvPr id="2" name="Slide Image Placeholder 1">
+            <a:extLst>
+              <a:ext uri="{FF2B5EF4-FFF2-40B4-BE49-F238E27FC236}">
+                <a16:creationId xmlns:a16="http://schemas.microsoft.com/office/drawing/2014/main" id="{7B5A2139-6F36-5D0C-1760-19A7787D2DF5}"/>
+              </a:ext>
+            </a:extLst>
+          </p:cNvPr>
+          <p:cNvSpPr>
+            <a:spLocks noGrp="1" noRot="1" noChangeAspect="1" noResize="1"/>
+          </p:cNvSpPr>
+          <p:nvPr>
+            <p:ph type="sldImg"/>
+          </p:nvPr>
+        </p:nvSpPr>
+        <p:spPr>
+          <a:xfrm>
+            <a:off x="217488" y="812800"/>
+            <a:ext cx="7124700" cy="4008438"/>
+          </a:xfrm>
+          <a:solidFill>
+            <a:srgbClr val="729FCF"/>
+          </a:solidFill>
+          <a:ln w="25400">
+            <a:solidFill>
+              <a:srgbClr val="3465A4"/>
+            </a:solidFill>
+            <a:prstDash val="solid"/>
+          </a:ln>
+        </p:spPr>
+      </p:sp>
+      <p:sp>
+        <p:nvSpPr>
+          <p:cNvPr id="3" name="Notes Placeholder 2">
+            <a:extLst>
+              <a:ext uri="{FF2B5EF4-FFF2-40B4-BE49-F238E27FC236}">
+                <a16:creationId xmlns:a16="http://schemas.microsoft.com/office/drawing/2014/main" id="{1276A747-CB70-B4D3-41CA-F99CE76677C1}"/>
+              </a:ext>
+            </a:extLst>
+          </p:cNvPr>
+          <p:cNvSpPr txBox="1">
+            <a:spLocks noGrp="1"/>
+          </p:cNvSpPr>
+          <p:nvPr>
+            <p:ph type="body" sz="quarter" idx="1"/>
+          </p:nvPr>
+        </p:nvSpPr>
+        <p:spPr/>
+        <p:txBody>
+          <a:bodyPr vert="horz">
+            <a:noAutofit/>
+          </a:bodyPr>
+          <a:lstStyle/>
+          <a:p>
+            <a:pPr rtl="0"/>
+            <a:endParaRPr lang="en-US"/>
+          </a:p>
+        </p:txBody>
+      </p:sp>
+    </p:spTree>
+    <p:extLst>
+      <p:ext uri="{BB962C8B-B14F-4D97-AF65-F5344CB8AC3E}">
+        <p14:creationId xmlns:p14="http://schemas.microsoft.com/office/powerpoint/2010/main" val="1875178584"/>
+      </p:ext>
+    </p:extLst>
+  </p:cSld>
+  <p:clrMapOvr>
+    <a:masterClrMapping/>
+  </p:clrMapOvr>
+</p:notes>
+</file>
+
+<file path=ppt/notesSlides/notesSlide6.xml><?xml version="1.0" encoding="utf-8"?>
 <p:notes xmlns:a="http://schemas.openxmlformats.org/drawingml/2006/main" xmlns:r="http://schemas.openxmlformats.org/officeDocument/2006/relationships" xmlns:p="http://schemas.openxmlformats.org/presentationml/2006/main">
   <p:cSld>
     <p:spTree>
@@ -1479,7 +2094,7 @@
           <a:p>
             <a:pPr lvl="0"/>
             <a:fld id="{2B0E6C16-0556-494D-BECC-21D8D6E18886}" type="slidenum">
-              <a:t>9</a:t>
+              <a:t>12</a:t>
             </a:fld>
             <a:endParaRPr lang="en-US"/>
           </a:p>
@@ -1558,7 +2173,7 @@
 </p:notes>
 </file>
 
-<file path=ppt/notesSlides/notesSlide5.xml><?xml version="1.0" encoding="utf-8"?>
+<file path=ppt/notesSlides/notesSlide7.xml><?xml version="1.0" encoding="utf-8"?>
 <p:notes xmlns:a="http://schemas.openxmlformats.org/drawingml/2006/main" xmlns:r="http://schemas.openxmlformats.org/officeDocument/2006/relationships" xmlns:p="http://schemas.openxmlformats.org/presentationml/2006/main">
   <p:cSld>
     <p:spTree>
@@ -1602,7 +2217,7 @@
           <a:p>
             <a:pPr lvl="0"/>
             <a:fld id="{2F2A8F5F-D570-7943-BC26-CE189838C058}" type="slidenum">
-              <a:t>10</a:t>
+              <a:t>13</a:t>
             </a:fld>
             <a:endParaRPr lang="en-US"/>
           </a:p>
@@ -1676,7 +2291,136 @@
 </p:notes>
 </file>
 
-<file path=ppt/notesSlides/notesSlide6.xml><?xml version="1.0" encoding="utf-8"?>
+<file path=ppt/notesSlides/notesSlide8.xml><?xml version="1.0" encoding="utf-8"?>
+<p:notes xmlns:a="http://schemas.openxmlformats.org/drawingml/2006/main" xmlns:r="http://schemas.openxmlformats.org/officeDocument/2006/relationships" xmlns:p="http://schemas.openxmlformats.org/presentationml/2006/main">
+  <p:cSld>
+    <p:spTree>
+      <p:nvGrpSpPr>
+        <p:cNvPr id="1" name="">
+          <a:extLst>
+            <a:ext uri="{FF2B5EF4-FFF2-40B4-BE49-F238E27FC236}">
+              <a16:creationId xmlns:a16="http://schemas.microsoft.com/office/drawing/2014/main" id="{3B3CE249-AC14-311C-4FC8-66E9C1587F90}"/>
+            </a:ext>
+          </a:extLst>
+        </p:cNvPr>
+        <p:cNvGrpSpPr/>
+        <p:nvPr/>
+      </p:nvGrpSpPr>
+      <p:grpSpPr>
+        <a:xfrm>
+          <a:off x="0" y="0"/>
+          <a:ext cx="0" cy="0"/>
+          <a:chOff x="0" y="0"/>
+          <a:chExt cx="0" cy="0"/>
+        </a:xfrm>
+      </p:grpSpPr>
+      <p:sp>
+        <p:nvSpPr>
+          <p:cNvPr id="7" name="Slide Number Placeholder 6">
+            <a:extLst>
+              <a:ext uri="{FF2B5EF4-FFF2-40B4-BE49-F238E27FC236}">
+                <a16:creationId xmlns:a16="http://schemas.microsoft.com/office/drawing/2014/main" id="{134622B2-FD12-E019-B740-C949CD3234C3}"/>
+              </a:ext>
+            </a:extLst>
+          </p:cNvPr>
+          <p:cNvSpPr txBox="1">
+            <a:spLocks noGrp="1"/>
+          </p:cNvSpPr>
+          <p:nvPr>
+            <p:ph type="sldNum" sz="quarter" idx="5"/>
+          </p:nvPr>
+        </p:nvSpPr>
+        <p:spPr>
+          <a:ln/>
+        </p:spPr>
+        <p:txBody>
+          <a:bodyPr vert="horz" lIns="0" tIns="0" rIns="0" bIns="0" anchor="b" anchorCtr="0">
+            <a:noAutofit/>
+          </a:bodyPr>
+          <a:lstStyle/>
+          <a:p>
+            <a:pPr lvl="0"/>
+            <a:fld id="{078DD1D6-275C-7740-A623-EDAB14EE6CE3}" type="slidenum">
+              <a:t>14</a:t>
+            </a:fld>
+            <a:endParaRPr lang="en-US"/>
+          </a:p>
+        </p:txBody>
+      </p:sp>
+      <p:sp>
+        <p:nvSpPr>
+          <p:cNvPr id="2" name="Slide Image Placeholder 1">
+            <a:extLst>
+              <a:ext uri="{FF2B5EF4-FFF2-40B4-BE49-F238E27FC236}">
+                <a16:creationId xmlns:a16="http://schemas.microsoft.com/office/drawing/2014/main" id="{9FB04CA8-10F2-652A-AB58-B8D0FB074D2D}"/>
+              </a:ext>
+            </a:extLst>
+          </p:cNvPr>
+          <p:cNvSpPr>
+            <a:spLocks noGrp="1" noRot="1" noChangeAspect="1" noResize="1"/>
+          </p:cNvSpPr>
+          <p:nvPr>
+            <p:ph type="sldImg"/>
+          </p:nvPr>
+        </p:nvSpPr>
+        <p:spPr>
+          <a:xfrm>
+            <a:off x="217488" y="812800"/>
+            <a:ext cx="7124700" cy="4008438"/>
+          </a:xfrm>
+          <a:solidFill>
+            <a:srgbClr val="729FCF"/>
+          </a:solidFill>
+          <a:ln w="25400">
+            <a:solidFill>
+              <a:srgbClr val="3465A4"/>
+            </a:solidFill>
+            <a:prstDash val="solid"/>
+          </a:ln>
+        </p:spPr>
+      </p:sp>
+      <p:sp>
+        <p:nvSpPr>
+          <p:cNvPr id="3" name="Notes Placeholder 2">
+            <a:extLst>
+              <a:ext uri="{FF2B5EF4-FFF2-40B4-BE49-F238E27FC236}">
+                <a16:creationId xmlns:a16="http://schemas.microsoft.com/office/drawing/2014/main" id="{505DBE3C-6078-5736-859A-9D5B7FD07F61}"/>
+              </a:ext>
+            </a:extLst>
+          </p:cNvPr>
+          <p:cNvSpPr txBox="1">
+            <a:spLocks noGrp="1"/>
+          </p:cNvSpPr>
+          <p:nvPr>
+            <p:ph type="body" sz="quarter" idx="1"/>
+          </p:nvPr>
+        </p:nvSpPr>
+        <p:spPr/>
+        <p:txBody>
+          <a:bodyPr vert="horz">
+            <a:noAutofit/>
+          </a:bodyPr>
+          <a:lstStyle/>
+          <a:p>
+            <a:pPr rtl="0"/>
+            <a:endParaRPr lang="en-US"/>
+          </a:p>
+        </p:txBody>
+      </p:sp>
+    </p:spTree>
+    <p:extLst>
+      <p:ext uri="{BB962C8B-B14F-4D97-AF65-F5344CB8AC3E}">
+        <p14:creationId xmlns:p14="http://schemas.microsoft.com/office/powerpoint/2010/main" val="1762076492"/>
+      </p:ext>
+    </p:extLst>
+  </p:cSld>
+  <p:clrMapOvr>
+    <a:masterClrMapping/>
+  </p:clrMapOvr>
+</p:notes>
+</file>
+
+<file path=ppt/notesSlides/notesSlide9.xml><?xml version="1.0" encoding="utf-8"?>
 <p:notes xmlns:a="http://schemas.openxmlformats.org/drawingml/2006/main" xmlns:r="http://schemas.openxmlformats.org/officeDocument/2006/relationships" xmlns:p="http://schemas.openxmlformats.org/presentationml/2006/main">
   <p:cSld>
     <p:spTree>
@@ -1720,7 +2464,7 @@
           <a:p>
             <a:pPr lvl="0"/>
             <a:fld id="{74B2BE70-CC58-924D-BB02-AD4AA9B63134}" type="slidenum">
-              <a:t>12</a:t>
+              <a:t>16</a:t>
             </a:fld>
             <a:endParaRPr lang="en-US"/>
           </a:p>
@@ -1764,360 +2508,6 @@
             <a:extLst>
               <a:ext uri="{FF2B5EF4-FFF2-40B4-BE49-F238E27FC236}">
                 <a16:creationId xmlns:a16="http://schemas.microsoft.com/office/drawing/2014/main" id="{18DC66CC-FF2B-6A27-39EA-AE194A008AB9}"/>
-              </a:ext>
-            </a:extLst>
-          </p:cNvPr>
-          <p:cNvSpPr txBox="1">
-            <a:spLocks noGrp="1"/>
-          </p:cNvSpPr>
-          <p:nvPr>
-            <p:ph type="body" sz="quarter" idx="1"/>
-          </p:nvPr>
-        </p:nvSpPr>
-        <p:spPr/>
-        <p:txBody>
-          <a:bodyPr vert="horz">
-            <a:noAutofit/>
-          </a:bodyPr>
-          <a:lstStyle/>
-          <a:p>
-            <a:pPr rtl="0"/>
-            <a:endParaRPr lang="en-US"/>
-          </a:p>
-        </p:txBody>
-      </p:sp>
-    </p:spTree>
-  </p:cSld>
-  <p:clrMapOvr>
-    <a:masterClrMapping/>
-  </p:clrMapOvr>
-</p:notes>
-</file>
-
-<file path=ppt/notesSlides/notesSlide7.xml><?xml version="1.0" encoding="utf-8"?>
-<p:notes xmlns:a="http://schemas.openxmlformats.org/drawingml/2006/main" xmlns:r="http://schemas.openxmlformats.org/officeDocument/2006/relationships" xmlns:p="http://schemas.openxmlformats.org/presentationml/2006/main">
-  <p:cSld>
-    <p:spTree>
-      <p:nvGrpSpPr>
-        <p:cNvPr id="1" name=""/>
-        <p:cNvGrpSpPr/>
-        <p:nvPr/>
-      </p:nvGrpSpPr>
-      <p:grpSpPr>
-        <a:xfrm>
-          <a:off x="0" y="0"/>
-          <a:ext cx="0" cy="0"/>
-          <a:chOff x="0" y="0"/>
-          <a:chExt cx="0" cy="0"/>
-        </a:xfrm>
-      </p:grpSpPr>
-      <p:sp>
-        <p:nvSpPr>
-          <p:cNvPr id="7" name="Slide Number Placeholder 6">
-            <a:extLst>
-              <a:ext uri="{FF2B5EF4-FFF2-40B4-BE49-F238E27FC236}">
-                <a16:creationId xmlns:a16="http://schemas.microsoft.com/office/drawing/2014/main" id="{8F566B37-0908-2EE3-EEBB-987402C98D9C}"/>
-              </a:ext>
-            </a:extLst>
-          </p:cNvPr>
-          <p:cNvSpPr txBox="1">
-            <a:spLocks noGrp="1"/>
-          </p:cNvSpPr>
-          <p:nvPr>
-            <p:ph type="sldNum" sz="quarter" idx="5"/>
-          </p:nvPr>
-        </p:nvSpPr>
-        <p:spPr>
-          <a:ln/>
-        </p:spPr>
-        <p:txBody>
-          <a:bodyPr vert="horz" lIns="0" tIns="0" rIns="0" bIns="0" anchor="b" anchorCtr="0">
-            <a:noAutofit/>
-          </a:bodyPr>
-          <a:lstStyle/>
-          <a:p>
-            <a:pPr lvl="0"/>
-            <a:fld id="{46DC6A57-27CA-2945-BA58-25741BFA1969}" type="slidenum">
-              <a:t>14</a:t>
-            </a:fld>
-            <a:endParaRPr lang="en-US"/>
-          </a:p>
-        </p:txBody>
-      </p:sp>
-      <p:sp>
-        <p:nvSpPr>
-          <p:cNvPr id="2" name="Slide Image Placeholder 1">
-            <a:extLst>
-              <a:ext uri="{FF2B5EF4-FFF2-40B4-BE49-F238E27FC236}">
-                <a16:creationId xmlns:a16="http://schemas.microsoft.com/office/drawing/2014/main" id="{7622ED5D-A6F3-B88C-C442-646AB8485103}"/>
-              </a:ext>
-            </a:extLst>
-          </p:cNvPr>
-          <p:cNvSpPr>
-            <a:spLocks noGrp="1" noRot="1" noChangeAspect="1" noResize="1"/>
-          </p:cNvSpPr>
-          <p:nvPr>
-            <p:ph type="sldImg"/>
-          </p:nvPr>
-        </p:nvSpPr>
-        <p:spPr>
-          <a:xfrm>
-            <a:off x="217488" y="812800"/>
-            <a:ext cx="7124700" cy="4008438"/>
-          </a:xfrm>
-          <a:solidFill>
-            <a:srgbClr val="729FCF"/>
-          </a:solidFill>
-          <a:ln w="25400">
-            <a:solidFill>
-              <a:srgbClr val="3465A4"/>
-            </a:solidFill>
-            <a:prstDash val="solid"/>
-          </a:ln>
-        </p:spPr>
-      </p:sp>
-      <p:sp>
-        <p:nvSpPr>
-          <p:cNvPr id="3" name="Notes Placeholder 2">
-            <a:extLst>
-              <a:ext uri="{FF2B5EF4-FFF2-40B4-BE49-F238E27FC236}">
-                <a16:creationId xmlns:a16="http://schemas.microsoft.com/office/drawing/2014/main" id="{D3E5210D-1007-26F9-72F8-BB536ADCDCE6}"/>
-              </a:ext>
-            </a:extLst>
-          </p:cNvPr>
-          <p:cNvSpPr txBox="1">
-            <a:spLocks noGrp="1"/>
-          </p:cNvSpPr>
-          <p:nvPr>
-            <p:ph type="body" sz="quarter" idx="1"/>
-          </p:nvPr>
-        </p:nvSpPr>
-        <p:spPr/>
-        <p:txBody>
-          <a:bodyPr vert="horz">
-            <a:noAutofit/>
-          </a:bodyPr>
-          <a:lstStyle/>
-          <a:p>
-            <a:pPr rtl="0"/>
-            <a:endParaRPr lang="en-US"/>
-          </a:p>
-        </p:txBody>
-      </p:sp>
-    </p:spTree>
-  </p:cSld>
-  <p:clrMapOvr>
-    <a:masterClrMapping/>
-  </p:clrMapOvr>
-</p:notes>
-</file>
-
-<file path=ppt/notesSlides/notesSlide8.xml><?xml version="1.0" encoding="utf-8"?>
-<p:notes xmlns:a="http://schemas.openxmlformats.org/drawingml/2006/main" xmlns:r="http://schemas.openxmlformats.org/officeDocument/2006/relationships" xmlns:p="http://schemas.openxmlformats.org/presentationml/2006/main">
-  <p:cSld>
-    <p:spTree>
-      <p:nvGrpSpPr>
-        <p:cNvPr id="1" name=""/>
-        <p:cNvGrpSpPr/>
-        <p:nvPr/>
-      </p:nvGrpSpPr>
-      <p:grpSpPr>
-        <a:xfrm>
-          <a:off x="0" y="0"/>
-          <a:ext cx="0" cy="0"/>
-          <a:chOff x="0" y="0"/>
-          <a:chExt cx="0" cy="0"/>
-        </a:xfrm>
-      </p:grpSpPr>
-      <p:sp>
-        <p:nvSpPr>
-          <p:cNvPr id="7" name="Slide Number Placeholder 6">
-            <a:extLst>
-              <a:ext uri="{FF2B5EF4-FFF2-40B4-BE49-F238E27FC236}">
-                <a16:creationId xmlns:a16="http://schemas.microsoft.com/office/drawing/2014/main" id="{540BB736-270A-5617-ED56-90CFB5654E66}"/>
-              </a:ext>
-            </a:extLst>
-          </p:cNvPr>
-          <p:cNvSpPr txBox="1">
-            <a:spLocks noGrp="1"/>
-          </p:cNvSpPr>
-          <p:nvPr>
-            <p:ph type="sldNum" sz="quarter" idx="5"/>
-          </p:nvPr>
-        </p:nvSpPr>
-        <p:spPr>
-          <a:ln/>
-        </p:spPr>
-        <p:txBody>
-          <a:bodyPr vert="horz" lIns="0" tIns="0" rIns="0" bIns="0" anchor="b" anchorCtr="0">
-            <a:noAutofit/>
-          </a:bodyPr>
-          <a:lstStyle/>
-          <a:p>
-            <a:pPr lvl="0"/>
-            <a:fld id="{FE90A4ED-5FD0-B044-8E31-F6C0BAFF2FAB}" type="slidenum">
-              <a:t>15</a:t>
-            </a:fld>
-            <a:endParaRPr lang="en-US"/>
-          </a:p>
-        </p:txBody>
-      </p:sp>
-      <p:sp>
-        <p:nvSpPr>
-          <p:cNvPr id="2" name="Slide Image Placeholder 1">
-            <a:extLst>
-              <a:ext uri="{FF2B5EF4-FFF2-40B4-BE49-F238E27FC236}">
-                <a16:creationId xmlns:a16="http://schemas.microsoft.com/office/drawing/2014/main" id="{68D84902-6734-20C1-0323-4213F13F12B1}"/>
-              </a:ext>
-            </a:extLst>
-          </p:cNvPr>
-          <p:cNvSpPr>
-            <a:spLocks noGrp="1" noRot="1" noChangeAspect="1" noResize="1"/>
-          </p:cNvSpPr>
-          <p:nvPr>
-            <p:ph type="sldImg"/>
-          </p:nvPr>
-        </p:nvSpPr>
-        <p:spPr>
-          <a:xfrm>
-            <a:off x="217488" y="812800"/>
-            <a:ext cx="7124700" cy="4008438"/>
-          </a:xfrm>
-          <a:solidFill>
-            <a:srgbClr val="729FCF"/>
-          </a:solidFill>
-          <a:ln w="25400">
-            <a:solidFill>
-              <a:srgbClr val="3465A4"/>
-            </a:solidFill>
-            <a:prstDash val="solid"/>
-          </a:ln>
-        </p:spPr>
-      </p:sp>
-      <p:sp>
-        <p:nvSpPr>
-          <p:cNvPr id="3" name="Notes Placeholder 2">
-            <a:extLst>
-              <a:ext uri="{FF2B5EF4-FFF2-40B4-BE49-F238E27FC236}">
-                <a16:creationId xmlns:a16="http://schemas.microsoft.com/office/drawing/2014/main" id="{02720450-8312-156D-E8CB-F3019597C58F}"/>
-              </a:ext>
-            </a:extLst>
-          </p:cNvPr>
-          <p:cNvSpPr txBox="1">
-            <a:spLocks noGrp="1"/>
-          </p:cNvSpPr>
-          <p:nvPr>
-            <p:ph type="body" sz="quarter" idx="1"/>
-          </p:nvPr>
-        </p:nvSpPr>
-        <p:spPr/>
-        <p:txBody>
-          <a:bodyPr vert="horz">
-            <a:noAutofit/>
-          </a:bodyPr>
-          <a:lstStyle/>
-          <a:p>
-            <a:pPr rtl="0"/>
-            <a:endParaRPr lang="en-US"/>
-          </a:p>
-        </p:txBody>
-      </p:sp>
-    </p:spTree>
-  </p:cSld>
-  <p:clrMapOvr>
-    <a:masterClrMapping/>
-  </p:clrMapOvr>
-</p:notes>
-</file>
-
-<file path=ppt/notesSlides/notesSlide9.xml><?xml version="1.0" encoding="utf-8"?>
-<p:notes xmlns:a="http://schemas.openxmlformats.org/drawingml/2006/main" xmlns:r="http://schemas.openxmlformats.org/officeDocument/2006/relationships" xmlns:p="http://schemas.openxmlformats.org/presentationml/2006/main">
-  <p:cSld>
-    <p:spTree>
-      <p:nvGrpSpPr>
-        <p:cNvPr id="1" name=""/>
-        <p:cNvGrpSpPr/>
-        <p:nvPr/>
-      </p:nvGrpSpPr>
-      <p:grpSpPr>
-        <a:xfrm>
-          <a:off x="0" y="0"/>
-          <a:ext cx="0" cy="0"/>
-          <a:chOff x="0" y="0"/>
-          <a:chExt cx="0" cy="0"/>
-        </a:xfrm>
-      </p:grpSpPr>
-      <p:sp>
-        <p:nvSpPr>
-          <p:cNvPr id="7" name="Slide Number Placeholder 6">
-            <a:extLst>
-              <a:ext uri="{FF2B5EF4-FFF2-40B4-BE49-F238E27FC236}">
-                <a16:creationId xmlns:a16="http://schemas.microsoft.com/office/drawing/2014/main" id="{C61522D3-D471-6654-5647-49B4C7B57F13}"/>
-              </a:ext>
-            </a:extLst>
-          </p:cNvPr>
-          <p:cNvSpPr txBox="1">
-            <a:spLocks noGrp="1"/>
-          </p:cNvSpPr>
-          <p:nvPr>
-            <p:ph type="sldNum" sz="quarter" idx="5"/>
-          </p:nvPr>
-        </p:nvSpPr>
-        <p:spPr>
-          <a:ln/>
-        </p:spPr>
-        <p:txBody>
-          <a:bodyPr vert="horz" lIns="0" tIns="0" rIns="0" bIns="0" anchor="b" anchorCtr="0">
-            <a:noAutofit/>
-          </a:bodyPr>
-          <a:lstStyle/>
-          <a:p>
-            <a:pPr lvl="0"/>
-            <a:fld id="{30A5194F-B1BB-9D4C-AE76-7B3B08E77197}" type="slidenum">
-              <a:t>36</a:t>
-            </a:fld>
-            <a:endParaRPr lang="en-US"/>
-          </a:p>
-        </p:txBody>
-      </p:sp>
-      <p:sp>
-        <p:nvSpPr>
-          <p:cNvPr id="2" name="Slide Image Placeholder 1">
-            <a:extLst>
-              <a:ext uri="{FF2B5EF4-FFF2-40B4-BE49-F238E27FC236}">
-                <a16:creationId xmlns:a16="http://schemas.microsoft.com/office/drawing/2014/main" id="{CD5122A9-AAF5-017F-2713-8D6736D1658F}"/>
-              </a:ext>
-            </a:extLst>
-          </p:cNvPr>
-          <p:cNvSpPr>
-            <a:spLocks noGrp="1" noRot="1" noChangeAspect="1" noResize="1"/>
-          </p:cNvSpPr>
-          <p:nvPr>
-            <p:ph type="sldImg"/>
-          </p:nvPr>
-        </p:nvSpPr>
-        <p:spPr>
-          <a:xfrm>
-            <a:off x="217488" y="812800"/>
-            <a:ext cx="7124700" cy="4008438"/>
-          </a:xfrm>
-          <a:solidFill>
-            <a:srgbClr val="729FCF"/>
-          </a:solidFill>
-          <a:ln w="25400">
-            <a:solidFill>
-              <a:srgbClr val="3465A4"/>
-            </a:solidFill>
-            <a:prstDash val="solid"/>
-          </a:ln>
-        </p:spPr>
-      </p:sp>
-      <p:sp>
-        <p:nvSpPr>
-          <p:cNvPr id="3" name="Notes Placeholder 2">
-            <a:extLst>
-              <a:ext uri="{FF2B5EF4-FFF2-40B4-BE49-F238E27FC236}">
-                <a16:creationId xmlns:a16="http://schemas.microsoft.com/office/drawing/2014/main" id="{BB2F8224-C160-9DAC-0CE9-C8590AB34774}"/>
               </a:ext>
             </a:extLst>
           </p:cNvPr>
@@ -5461,7 +5851,7 @@
                 </a:solidFill>
                 <a:latin typeface="Liberation Mono" pitchFamily="49"/>
               </a:rPr>
-              <a:t>Change-Impact Analysis &amp; Combinatorial Testing</a:t>
+              <a:t>Change Impact Analysis &amp; Combinatorial Testing</a:t>
             </a:r>
             <a:endParaRPr lang="en-US" dirty="0">
               <a:solidFill>
@@ -5521,6 +5911,735 @@
 </file>
 
 <file path=ppt/slides/slide10.xml><?xml version="1.0" encoding="utf-8"?>
+<p:sld xmlns:a="http://schemas.openxmlformats.org/drawingml/2006/main" xmlns:r="http://schemas.openxmlformats.org/officeDocument/2006/relationships" xmlns:p="http://schemas.openxmlformats.org/presentationml/2006/main">
+  <p:cSld>
+    <p:spTree>
+      <p:nvGrpSpPr>
+        <p:cNvPr id="1" name="">
+          <a:extLst>
+            <a:ext uri="{FF2B5EF4-FFF2-40B4-BE49-F238E27FC236}">
+              <a16:creationId xmlns:a16="http://schemas.microsoft.com/office/drawing/2014/main" id="{093274B9-C688-8060-D9EE-96B6EC16D73F}"/>
+            </a:ext>
+          </a:extLst>
+        </p:cNvPr>
+        <p:cNvGrpSpPr/>
+        <p:nvPr/>
+      </p:nvGrpSpPr>
+      <p:grpSpPr>
+        <a:xfrm>
+          <a:off x="0" y="0"/>
+          <a:ext cx="0" cy="0"/>
+          <a:chOff x="0" y="0"/>
+          <a:chExt cx="0" cy="0"/>
+        </a:xfrm>
+      </p:grpSpPr>
+      <p:sp>
+        <p:nvSpPr>
+          <p:cNvPr id="2" name="Title 1">
+            <a:extLst>
+              <a:ext uri="{FF2B5EF4-FFF2-40B4-BE49-F238E27FC236}">
+                <a16:creationId xmlns:a16="http://schemas.microsoft.com/office/drawing/2014/main" id="{CC940B72-61B5-25C8-12BB-2BFE38E84A95}"/>
+              </a:ext>
+            </a:extLst>
+          </p:cNvPr>
+          <p:cNvSpPr txBox="1">
+            <a:spLocks noGrp="1"/>
+          </p:cNvSpPr>
+          <p:nvPr>
+            <p:ph type="title" idx="4294967295"/>
+          </p:nvPr>
+        </p:nvSpPr>
+        <p:spPr>
+          <a:xfrm>
+            <a:off x="504359" y="2041560"/>
+            <a:ext cx="9071640" cy="946440"/>
+          </a:xfrm>
+        </p:spPr>
+        <p:txBody>
+          <a:bodyPr/>
+          <a:lstStyle/>
+          <a:p>
+            <a:pPr lvl="0"/>
+            <a:r>
+              <a:rPr lang="en-US" sz="3200" dirty="0">
+                <a:solidFill>
+                  <a:schemeClr val="bg1"/>
+                </a:solidFill>
+                <a:latin typeface="Liberation Mono" pitchFamily="49"/>
+              </a:rPr>
+              <a:t>Part 2: Change Impact Analysis</a:t>
+            </a:r>
+            <a:endParaRPr lang="en-US" sz="3200" dirty="0">
+              <a:solidFill>
+                <a:schemeClr val="bg1"/>
+              </a:solidFill>
+            </a:endParaRPr>
+          </a:p>
+        </p:txBody>
+      </p:sp>
+    </p:spTree>
+    <p:extLst>
+      <p:ext uri="{BB962C8B-B14F-4D97-AF65-F5344CB8AC3E}">
+        <p14:creationId xmlns:p14="http://schemas.microsoft.com/office/powerpoint/2010/main" val="2031973572"/>
+      </p:ext>
+    </p:extLst>
+  </p:cSld>
+  <p:clrMapOvr>
+    <a:masterClrMapping/>
+  </p:clrMapOvr>
+</p:sld>
+</file>
+
+<file path=ppt/slides/slide11.xml><?xml version="1.0" encoding="utf-8"?>
+<p:sld xmlns:a="http://schemas.openxmlformats.org/drawingml/2006/main" xmlns:r="http://schemas.openxmlformats.org/officeDocument/2006/relationships" xmlns:p="http://schemas.openxmlformats.org/presentationml/2006/main">
+  <p:cSld>
+    <p:spTree>
+      <p:nvGrpSpPr>
+        <p:cNvPr id="1" name=""/>
+        <p:cNvGrpSpPr/>
+        <p:nvPr/>
+      </p:nvGrpSpPr>
+      <p:grpSpPr>
+        <a:xfrm>
+          <a:off x="0" y="0"/>
+          <a:ext cx="0" cy="0"/>
+          <a:chOff x="0" y="0"/>
+          <a:chExt cx="0" cy="0"/>
+        </a:xfrm>
+      </p:grpSpPr>
+      <p:sp>
+        <p:nvSpPr>
+          <p:cNvPr id="2" name="Title 1">
+            <a:extLst>
+              <a:ext uri="{FF2B5EF4-FFF2-40B4-BE49-F238E27FC236}">
+                <a16:creationId xmlns:a16="http://schemas.microsoft.com/office/drawing/2014/main" id="{79070A95-7E8C-0828-88E3-001BBB4E331D}"/>
+              </a:ext>
+            </a:extLst>
+          </p:cNvPr>
+          <p:cNvSpPr txBox="1">
+            <a:spLocks/>
+          </p:cNvSpPr>
+          <p:nvPr/>
+        </p:nvSpPr>
+        <p:spPr>
+          <a:xfrm>
+            <a:off x="503999" y="422301"/>
+            <a:ext cx="9071640" cy="553998"/>
+          </a:xfrm>
+          <a:prstGeom prst="rect">
+            <a:avLst/>
+          </a:prstGeom>
+          <a:noFill/>
+          <a:ln>
+            <a:noFill/>
+          </a:ln>
+        </p:spPr>
+        <p:txBody>
+          <a:bodyPr vert="horz" lIns="0" tIns="0" rIns="0" bIns="0" anchor="ctr">
+            <a:spAutoFit/>
+          </a:bodyPr>
+          <a:lstStyle>
+            <a:lvl1pPr lvl="0" algn="ctr" rtl="0" hangingPunct="0">
+              <a:buNone/>
+              <a:tabLst/>
+              <a:defRPr lang="en-US" sz="3600" b="0" i="0" u="none" strike="noStrike" kern="1200" cap="none">
+                <a:ln>
+                  <a:noFill/>
+                </a:ln>
+                <a:highlight>
+                  <a:scrgbClr r="0" g="0" b="0">
+                    <a:alpha val="0"/>
+                  </a:scrgbClr>
+                </a:highlight>
+                <a:latin typeface="URW Bookman" pitchFamily="2"/>
+                <a:ea typeface="Nimbus Sans" pitchFamily="2"/>
+                <a:cs typeface="FreeSans" pitchFamily="2"/>
+              </a:defRPr>
+            </a:lvl1pPr>
+          </a:lstStyle>
+          <a:p>
+            <a:r>
+              <a:rPr lang="en-US" dirty="0">
+                <a:solidFill>
+                  <a:schemeClr val="bg1"/>
+                </a:solidFill>
+              </a:rPr>
+              <a:t>Change Impact Analysis</a:t>
+            </a:r>
+          </a:p>
+        </p:txBody>
+      </p:sp>
+      <p:sp>
+        <p:nvSpPr>
+          <p:cNvPr id="3" name="Text Placeholder 2">
+            <a:extLst>
+              <a:ext uri="{FF2B5EF4-FFF2-40B4-BE49-F238E27FC236}">
+                <a16:creationId xmlns:a16="http://schemas.microsoft.com/office/drawing/2014/main" id="{87EC0F28-AC2C-142C-EF6A-7F163D42DEC9}"/>
+              </a:ext>
+            </a:extLst>
+          </p:cNvPr>
+          <p:cNvSpPr txBox="1">
+            <a:spLocks/>
+          </p:cNvSpPr>
+          <p:nvPr/>
+        </p:nvSpPr>
+        <p:spPr>
+          <a:xfrm>
+            <a:off x="507959" y="1172520"/>
+            <a:ext cx="9071640" cy="4374840"/>
+          </a:xfrm>
+          <a:prstGeom prst="rect">
+            <a:avLst/>
+          </a:prstGeom>
+          <a:noFill/>
+          <a:ln>
+            <a:noFill/>
+          </a:ln>
+        </p:spPr>
+        <p:txBody>
+          <a:bodyPr vert="horz" lIns="0" tIns="0" rIns="0" bIns="0">
+            <a:normAutofit fontScale="92500" lnSpcReduction="10000"/>
+          </a:bodyPr>
+          <a:lstStyle>
+            <a:lvl1pPr lvl="0" rtl="0" hangingPunct="0">
+              <a:spcBef>
+                <a:spcPts val="1417"/>
+              </a:spcBef>
+              <a:spcAft>
+                <a:spcPts val="0"/>
+              </a:spcAft>
+              <a:buSzPct val="45000"/>
+              <a:buFont typeface="OpenSymbol"/>
+              <a:buChar char="●"/>
+              <a:tabLst/>
+              <a:defRPr lang="en-US" sz="2400" b="0" i="0" u="none" strike="noStrike" kern="1200" cap="none">
+                <a:ln>
+                  <a:noFill/>
+                </a:ln>
+                <a:highlight>
+                  <a:scrgbClr r="0" g="0" b="0">
+                    <a:alpha val="0"/>
+                  </a:scrgbClr>
+                </a:highlight>
+                <a:latin typeface="URW Bookman" pitchFamily="2"/>
+                <a:ea typeface="Nimbus Sans" pitchFamily="2"/>
+                <a:cs typeface="FreeSans" pitchFamily="2"/>
+              </a:defRPr>
+            </a:lvl1pPr>
+            <a:lvl2pPr lvl="1" rtl="0" hangingPunct="0">
+              <a:spcBef>
+                <a:spcPts val="1417"/>
+              </a:spcBef>
+              <a:spcAft>
+                <a:spcPts val="0"/>
+              </a:spcAft>
+              <a:buSzPct val="75000"/>
+              <a:buFont typeface="OpenSymbol"/>
+              <a:buChar char="–"/>
+              <a:tabLst/>
+              <a:defRPr lang="en-US" sz="2400" b="0" i="0" u="none" strike="noStrike" kern="1200" cap="none">
+                <a:ln>
+                  <a:noFill/>
+                </a:ln>
+                <a:highlight>
+                  <a:scrgbClr r="0" g="0" b="0">
+                    <a:alpha val="0"/>
+                  </a:scrgbClr>
+                </a:highlight>
+                <a:latin typeface="URW Bookman" pitchFamily="2"/>
+                <a:ea typeface="Nimbus Sans" pitchFamily="2"/>
+                <a:cs typeface="FreeSans" pitchFamily="2"/>
+              </a:defRPr>
+            </a:lvl2pPr>
+            <a:lvl3pPr lvl="2" rtl="0" hangingPunct="0">
+              <a:spcBef>
+                <a:spcPts val="1417"/>
+              </a:spcBef>
+              <a:spcAft>
+                <a:spcPts val="0"/>
+              </a:spcAft>
+              <a:buSzPct val="45000"/>
+              <a:buFont typeface="OpenSymbol"/>
+              <a:buChar char="●"/>
+              <a:tabLst/>
+              <a:defRPr lang="en-US" sz="2400" b="0" i="0" u="none" strike="noStrike" kern="1200" cap="none">
+                <a:ln>
+                  <a:noFill/>
+                </a:ln>
+                <a:highlight>
+                  <a:scrgbClr r="0" g="0" b="0">
+                    <a:alpha val="0"/>
+                  </a:scrgbClr>
+                </a:highlight>
+                <a:latin typeface="URW Bookman" pitchFamily="2"/>
+                <a:ea typeface="Nimbus Sans" pitchFamily="2"/>
+                <a:cs typeface="FreeSans" pitchFamily="2"/>
+              </a:defRPr>
+            </a:lvl3pPr>
+            <a:lvl4pPr lvl="3" rtl="0" hangingPunct="0">
+              <a:spcBef>
+                <a:spcPts val="1417"/>
+              </a:spcBef>
+              <a:spcAft>
+                <a:spcPts val="0"/>
+              </a:spcAft>
+              <a:buSzPct val="75000"/>
+              <a:buFont typeface="OpenSymbol"/>
+              <a:buChar char="–"/>
+              <a:tabLst/>
+              <a:defRPr lang="en-US" sz="2400" b="0" i="0" u="none" strike="noStrike" kern="1200" cap="none">
+                <a:ln>
+                  <a:noFill/>
+                </a:ln>
+                <a:highlight>
+                  <a:scrgbClr r="0" g="0" b="0">
+                    <a:alpha val="0"/>
+                  </a:scrgbClr>
+                </a:highlight>
+                <a:latin typeface="URW Bookman" pitchFamily="2"/>
+                <a:ea typeface="Nimbus Sans" pitchFamily="2"/>
+                <a:cs typeface="FreeSans" pitchFamily="2"/>
+              </a:defRPr>
+            </a:lvl4pPr>
+            <a:lvl5pPr lvl="4" rtl="0" hangingPunct="0">
+              <a:spcBef>
+                <a:spcPts val="1417"/>
+              </a:spcBef>
+              <a:spcAft>
+                <a:spcPts val="0"/>
+              </a:spcAft>
+              <a:buSzPct val="45000"/>
+              <a:buFont typeface="OpenSymbol"/>
+              <a:buChar char="●"/>
+              <a:tabLst/>
+              <a:defRPr lang="en-US" sz="2400" b="0" i="0" u="none" strike="noStrike" kern="1200" cap="none">
+                <a:ln>
+                  <a:noFill/>
+                </a:ln>
+                <a:highlight>
+                  <a:scrgbClr r="0" g="0" b="0">
+                    <a:alpha val="0"/>
+                  </a:scrgbClr>
+                </a:highlight>
+                <a:latin typeface="URW Bookman" pitchFamily="2"/>
+                <a:ea typeface="Nimbus Sans" pitchFamily="2"/>
+                <a:cs typeface="FreeSans" pitchFamily="2"/>
+              </a:defRPr>
+            </a:lvl5pPr>
+            <a:lvl6pPr lvl="5" rtl="0" hangingPunct="0">
+              <a:spcBef>
+                <a:spcPts val="1417"/>
+              </a:spcBef>
+              <a:spcAft>
+                <a:spcPts val="0"/>
+              </a:spcAft>
+              <a:buSzPct val="45000"/>
+              <a:buFont typeface="OpenSymbol"/>
+              <a:buChar char="●"/>
+              <a:tabLst/>
+              <a:defRPr lang="en-US" sz="2400" b="0" i="0" u="none" strike="noStrike" kern="1200" cap="none">
+                <a:ln>
+                  <a:noFill/>
+                </a:ln>
+                <a:highlight>
+                  <a:scrgbClr r="0" g="0" b="0">
+                    <a:alpha val="0"/>
+                  </a:scrgbClr>
+                </a:highlight>
+                <a:latin typeface="URW Bookman" pitchFamily="2"/>
+                <a:ea typeface="Nimbus Sans" pitchFamily="2"/>
+                <a:cs typeface="FreeSans" pitchFamily="2"/>
+              </a:defRPr>
+            </a:lvl6pPr>
+            <a:lvl7pPr lvl="6" rtl="0" hangingPunct="0">
+              <a:spcBef>
+                <a:spcPts val="1417"/>
+              </a:spcBef>
+              <a:spcAft>
+                <a:spcPts val="0"/>
+              </a:spcAft>
+              <a:buSzPct val="45000"/>
+              <a:buFont typeface="OpenSymbol"/>
+              <a:buChar char="●"/>
+              <a:tabLst/>
+              <a:defRPr lang="en-US" sz="2400" b="0" i="0" u="none" strike="noStrike" kern="1200" cap="none">
+                <a:ln>
+                  <a:noFill/>
+                </a:ln>
+                <a:highlight>
+                  <a:scrgbClr r="0" g="0" b="0">
+                    <a:alpha val="0"/>
+                  </a:scrgbClr>
+                </a:highlight>
+                <a:latin typeface="URW Bookman" pitchFamily="2"/>
+                <a:ea typeface="Nimbus Sans" pitchFamily="2"/>
+                <a:cs typeface="FreeSans" pitchFamily="2"/>
+              </a:defRPr>
+            </a:lvl7pPr>
+            <a:lvl8pPr marL="3429000" indent="-228600" algn="l" defTabSz="914400" rtl="0" eaLnBrk="1" latinLnBrk="0" hangingPunct="1">
+              <a:lnSpc>
+                <a:spcPct val="90000"/>
+              </a:lnSpc>
+              <a:spcBef>
+                <a:spcPts val="500"/>
+              </a:spcBef>
+              <a:buFont typeface="Arial" panose="020B0604020202020204" pitchFamily="34" charset="0"/>
+              <a:buChar char="•"/>
+              <a:defRPr sz="1800" kern="1200">
+                <a:solidFill>
+                  <a:schemeClr val="tx1"/>
+                </a:solidFill>
+                <a:latin typeface="+mn-lt"/>
+                <a:ea typeface="+mn-ea"/>
+                <a:cs typeface="+mn-cs"/>
+              </a:defRPr>
+            </a:lvl8pPr>
+            <a:lvl9pPr marL="3886200" indent="-228600" algn="l" defTabSz="914400" rtl="0" eaLnBrk="1" latinLnBrk="0" hangingPunct="1">
+              <a:lnSpc>
+                <a:spcPct val="90000"/>
+              </a:lnSpc>
+              <a:spcBef>
+                <a:spcPts val="500"/>
+              </a:spcBef>
+              <a:buFont typeface="Arial" panose="020B0604020202020204" pitchFamily="34" charset="0"/>
+              <a:buChar char="•"/>
+              <a:defRPr sz="1800" kern="1200">
+                <a:solidFill>
+                  <a:schemeClr val="tx1"/>
+                </a:solidFill>
+                <a:latin typeface="+mn-lt"/>
+                <a:ea typeface="+mn-ea"/>
+                <a:cs typeface="+mn-cs"/>
+              </a:defRPr>
+            </a:lvl9pPr>
+          </a:lstStyle>
+          <a:p>
+            <a:pPr marL="342900" indent="-342900"/>
+            <a:r>
+              <a:rPr lang="en-US" dirty="0">
+                <a:solidFill>
+                  <a:schemeClr val="bg1"/>
+                </a:solidFill>
+              </a:rPr>
+              <a:t>The goal is to visualize the impact of model constants on model outputs.</a:t>
+            </a:r>
+          </a:p>
+          <a:p>
+            <a:pPr marL="342900" indent="-342900"/>
+            <a:r>
+              <a:rPr lang="en-US" dirty="0">
+                <a:solidFill>
+                  <a:schemeClr val="bg1"/>
+                </a:solidFill>
+              </a:rPr>
+              <a:t>Some challenges are:</a:t>
+            </a:r>
+          </a:p>
+          <a:p>
+            <a:pPr marL="800100" lvl="1" indent="-342900"/>
+            <a:r>
+              <a:rPr lang="en-US" dirty="0">
+                <a:solidFill>
+                  <a:schemeClr val="bg1"/>
+                </a:solidFill>
+              </a:rPr>
+              <a:t>Most of the 25 model constants we change affect multiple model outputs.</a:t>
+            </a:r>
+          </a:p>
+          <a:p>
+            <a:pPr marL="800100" lvl="1" indent="-342900"/>
+            <a:r>
+              <a:rPr lang="en-US" dirty="0">
+                <a:solidFill>
+                  <a:schemeClr val="bg1"/>
+                </a:solidFill>
+              </a:rPr>
+              <a:t>The 75 model outputs are multidimensional. The column dimension goes from 0 to 344.</a:t>
+            </a:r>
+          </a:p>
+          <a:p>
+            <a:pPr marL="800100" lvl="1" indent="-342900"/>
+            <a:r>
+              <a:rPr lang="en-US" dirty="0">
+                <a:solidFill>
+                  <a:schemeClr val="bg1"/>
+                </a:solidFill>
+              </a:rPr>
+              <a:t>Contrary to an initial assumption, some model constants only affect model outputs when certain preconditions are met.</a:t>
+            </a:r>
+          </a:p>
+          <a:p>
+            <a:pPr marL="342900" indent="-342900"/>
+            <a:r>
+              <a:rPr lang="en-US" dirty="0">
+                <a:solidFill>
+                  <a:schemeClr val="bg1"/>
+                </a:solidFill>
+              </a:rPr>
+              <a:t>We created a 3D graph using time as the x-axis, the one model constant we changed as the y-axis, and a single column of a single model output as the z-axis.  </a:t>
+            </a:r>
+          </a:p>
+          <a:p>
+            <a:pPr marL="342900" indent="-342900"/>
+            <a:endParaRPr lang="en-US" dirty="0">
+              <a:solidFill>
+                <a:schemeClr val="bg1"/>
+              </a:solidFill>
+            </a:endParaRPr>
+          </a:p>
+        </p:txBody>
+      </p:sp>
+    </p:spTree>
+    <p:extLst>
+      <p:ext uri="{BB962C8B-B14F-4D97-AF65-F5344CB8AC3E}">
+        <p14:creationId xmlns:p14="http://schemas.microsoft.com/office/powerpoint/2010/main" val="2569724074"/>
+      </p:ext>
+    </p:extLst>
+  </p:cSld>
+  <p:clrMapOvr>
+    <a:masterClrMapping/>
+  </p:clrMapOvr>
+</p:sld>
+</file>
+
+<file path=ppt/slides/slide12.xml><?xml version="1.0" encoding="utf-8"?>
+<p:sld xmlns:a="http://schemas.openxmlformats.org/drawingml/2006/main" xmlns:r="http://schemas.openxmlformats.org/officeDocument/2006/relationships" xmlns:p="http://schemas.openxmlformats.org/presentationml/2006/main">
+  <p:cSld>
+    <p:spTree>
+      <p:nvGrpSpPr>
+        <p:cNvPr id="1" name="">
+          <a:extLst>
+            <a:ext uri="{FF2B5EF4-FFF2-40B4-BE49-F238E27FC236}">
+              <a16:creationId xmlns:a16="http://schemas.microsoft.com/office/drawing/2014/main" id="{2B569827-9521-53AA-9742-36EB856A3BAB}"/>
+            </a:ext>
+          </a:extLst>
+        </p:cNvPr>
+        <p:cNvGrpSpPr/>
+        <p:nvPr/>
+      </p:nvGrpSpPr>
+      <p:grpSpPr>
+        <a:xfrm>
+          <a:off x="0" y="0"/>
+          <a:ext cx="0" cy="0"/>
+          <a:chOff x="0" y="0"/>
+          <a:chExt cx="0" cy="0"/>
+        </a:xfrm>
+      </p:grpSpPr>
+      <p:sp>
+        <p:nvSpPr>
+          <p:cNvPr id="2" name="Title 1">
+            <a:extLst>
+              <a:ext uri="{FF2B5EF4-FFF2-40B4-BE49-F238E27FC236}">
+                <a16:creationId xmlns:a16="http://schemas.microsoft.com/office/drawing/2014/main" id="{C65C185C-7590-576F-35F7-50C042B441F9}"/>
+              </a:ext>
+            </a:extLst>
+          </p:cNvPr>
+          <p:cNvSpPr txBox="1">
+            <a:spLocks noGrp="1"/>
+          </p:cNvSpPr>
+          <p:nvPr>
+            <p:ph type="title" idx="4294967295"/>
+          </p:nvPr>
+        </p:nvSpPr>
+        <p:spPr>
+          <a:xfrm>
+            <a:off x="503999" y="422301"/>
+            <a:ext cx="9071640" cy="553998"/>
+          </a:xfrm>
+        </p:spPr>
+        <p:txBody>
+          <a:bodyPr>
+            <a:spAutoFit/>
+          </a:bodyPr>
+          <a:lstStyle/>
+          <a:p>
+            <a:pPr lvl="0"/>
+            <a:r>
+              <a:rPr lang="en-US" dirty="0">
+                <a:solidFill>
+                  <a:schemeClr val="bg1"/>
+                </a:solidFill>
+              </a:rPr>
+              <a:t>Graphing Process</a:t>
+            </a:r>
+          </a:p>
+        </p:txBody>
+      </p:sp>
+      <p:sp>
+        <p:nvSpPr>
+          <p:cNvPr id="3" name="Text Placeholder 2">
+            <a:extLst>
+              <a:ext uri="{FF2B5EF4-FFF2-40B4-BE49-F238E27FC236}">
+                <a16:creationId xmlns:a16="http://schemas.microsoft.com/office/drawing/2014/main" id="{16380487-782B-D373-4A68-3CAF18B86D6A}"/>
+              </a:ext>
+            </a:extLst>
+          </p:cNvPr>
+          <p:cNvSpPr txBox="1">
+            <a:spLocks noGrp="1"/>
+          </p:cNvSpPr>
+          <p:nvPr>
+            <p:ph type="body" idx="4294967295"/>
+          </p:nvPr>
+        </p:nvSpPr>
+        <p:spPr>
+          <a:xfrm>
+            <a:off x="503999" y="1326600"/>
+            <a:ext cx="9001800" cy="3664440"/>
+          </a:xfrm>
+        </p:spPr>
+        <p:txBody>
+          <a:bodyPr>
+            <a:normAutofit/>
+          </a:bodyPr>
+          <a:lstStyle/>
+          <a:p>
+            <a:pPr marL="342900" indent="-342900"/>
+            <a:r>
+              <a:rPr lang="en-US" dirty="0">
+                <a:solidFill>
+                  <a:schemeClr val="bg1"/>
+                </a:solidFill>
+              </a:rPr>
+              <a:t>Output data in the form of a </a:t>
+            </a:r>
+            <a:r>
+              <a:rPr lang="en-US" dirty="0" err="1">
+                <a:solidFill>
+                  <a:schemeClr val="bg1"/>
+                </a:solidFill>
+              </a:rPr>
+              <a:t>NetCDF</a:t>
+            </a:r>
+            <a:r>
+              <a:rPr lang="en-US" dirty="0">
+                <a:solidFill>
+                  <a:schemeClr val="bg1"/>
+                </a:solidFill>
+              </a:rPr>
+              <a:t> file was used. </a:t>
+            </a:r>
+          </a:p>
+          <a:p>
+            <a:pPr marL="342900" indent="-342900"/>
+            <a:r>
+              <a:rPr lang="en-US" dirty="0">
+                <a:solidFill>
+                  <a:schemeClr val="bg1"/>
+                </a:solidFill>
+              </a:rPr>
+              <a:t>From the output data we pulled the values for the model constant </a:t>
+            </a:r>
+            <a:r>
+              <a:rPr lang="en-US" i="1" dirty="0" err="1">
+                <a:solidFill>
+                  <a:schemeClr val="bg1"/>
+                </a:solidFill>
+              </a:rPr>
+              <a:t>vkc</a:t>
+            </a:r>
+            <a:r>
+              <a:rPr lang="en-US" dirty="0">
+                <a:solidFill>
+                  <a:schemeClr val="bg1"/>
+                </a:solidFill>
+              </a:rPr>
+              <a:t>, which represents the </a:t>
+            </a:r>
+            <a:r>
+              <a:rPr lang="en-US" i="1" dirty="0">
+                <a:solidFill>
+                  <a:schemeClr val="bg1"/>
+                </a:solidFill>
+              </a:rPr>
+              <a:t>Von Kármán Constant.</a:t>
+            </a:r>
+            <a:endParaRPr lang="en-US" dirty="0">
+              <a:solidFill>
+                <a:schemeClr val="bg1"/>
+              </a:solidFill>
+            </a:endParaRPr>
+          </a:p>
+          <a:p>
+            <a:pPr marL="342900" indent="-342900"/>
+            <a:r>
+              <a:rPr lang="en-US" dirty="0">
+                <a:solidFill>
+                  <a:schemeClr val="bg1"/>
+                </a:solidFill>
+              </a:rPr>
+              <a:t>Time was interpolated from 0 to 35. </a:t>
+            </a:r>
+          </a:p>
+          <a:p>
+            <a:pPr marL="342900" indent="-342900"/>
+            <a:r>
+              <a:rPr lang="en-US" dirty="0">
+                <a:solidFill>
+                  <a:schemeClr val="bg1"/>
+                </a:solidFill>
+              </a:rPr>
+              <a:t>From the output data we pulled the values for the model output </a:t>
+            </a:r>
+            <a:r>
+              <a:rPr lang="en-US" i="1" dirty="0">
+                <a:solidFill>
+                  <a:schemeClr val="bg1"/>
+                </a:solidFill>
+              </a:rPr>
+              <a:t>lakestate_vars__savedtke1_col–</a:t>
+            </a:r>
+            <a:r>
+              <a:rPr lang="en-US" dirty="0">
+                <a:solidFill>
+                  <a:schemeClr val="bg1"/>
+                </a:solidFill>
+              </a:rPr>
+              <a:t>the </a:t>
+            </a:r>
+            <a:r>
+              <a:rPr lang="en-US" i="1" dirty="0">
+                <a:solidFill>
+                  <a:schemeClr val="bg1"/>
+                </a:solidFill>
+              </a:rPr>
+              <a:t>eddy conductivity</a:t>
+            </a:r>
+            <a:r>
+              <a:rPr lang="en-US" dirty="0">
+                <a:solidFill>
+                  <a:schemeClr val="bg1"/>
+                </a:solidFill>
+              </a:rPr>
+              <a:t> at the top lake level saved for the next step–at the column numbered 336. </a:t>
+            </a:r>
+          </a:p>
+          <a:p>
+            <a:pPr marL="342900" indent="-342900"/>
+            <a:r>
+              <a:rPr lang="en-US" dirty="0">
+                <a:solidFill>
+                  <a:schemeClr val="bg1"/>
+                </a:solidFill>
+              </a:rPr>
+              <a:t>Using matplotlib, all three dimensions were graphed. </a:t>
+            </a:r>
+          </a:p>
+        </p:txBody>
+      </p:sp>
+    </p:spTree>
+    <p:extLst>
+      <p:ext uri="{BB962C8B-B14F-4D97-AF65-F5344CB8AC3E}">
+        <p14:creationId xmlns:p14="http://schemas.microsoft.com/office/powerpoint/2010/main" val="2352501276"/>
+      </p:ext>
+    </p:extLst>
+  </p:cSld>
+  <p:clrMapOvr>
+    <a:masterClrMapping/>
+  </p:clrMapOvr>
+</p:sld>
+</file>
+
+<file path=ppt/slides/slide13.xml><?xml version="1.0" encoding="utf-8"?>
 <p:sld xmlns:a="http://schemas.openxmlformats.org/drawingml/2006/main" xmlns:r="http://schemas.openxmlformats.org/officeDocument/2006/relationships" xmlns:p="http://schemas.openxmlformats.org/presentationml/2006/main">
   <p:cSld name="page16">
     <p:spTree>
@@ -5759,7 +6878,87 @@
 </p:sld>
 </file>
 
-<file path=ppt/slides/slide11.xml><?xml version="1.0" encoding="utf-8"?>
+<file path=ppt/slides/slide14.xml><?xml version="1.0" encoding="utf-8"?>
+<p:sld xmlns:a="http://schemas.openxmlformats.org/drawingml/2006/main" xmlns:r="http://schemas.openxmlformats.org/officeDocument/2006/relationships" xmlns:p="http://schemas.openxmlformats.org/presentationml/2006/main">
+  <p:cSld>
+    <p:spTree>
+      <p:nvGrpSpPr>
+        <p:cNvPr id="1" name="">
+          <a:extLst>
+            <a:ext uri="{FF2B5EF4-FFF2-40B4-BE49-F238E27FC236}">
+              <a16:creationId xmlns:a16="http://schemas.microsoft.com/office/drawing/2014/main" id="{593ABC4C-B488-645E-EF8B-7DC412D52563}"/>
+            </a:ext>
+          </a:extLst>
+        </p:cNvPr>
+        <p:cNvGrpSpPr/>
+        <p:nvPr/>
+      </p:nvGrpSpPr>
+      <p:grpSpPr>
+        <a:xfrm>
+          <a:off x="0" y="0"/>
+          <a:ext cx="0" cy="0"/>
+          <a:chOff x="0" y="0"/>
+          <a:chExt cx="0" cy="0"/>
+        </a:xfrm>
+      </p:grpSpPr>
+      <p:sp>
+        <p:nvSpPr>
+          <p:cNvPr id="2" name="Title 1">
+            <a:extLst>
+              <a:ext uri="{FF2B5EF4-FFF2-40B4-BE49-F238E27FC236}">
+                <a16:creationId xmlns:a16="http://schemas.microsoft.com/office/drawing/2014/main" id="{A385901E-AD92-F612-FFD5-937A33963D6F}"/>
+              </a:ext>
+            </a:extLst>
+          </p:cNvPr>
+          <p:cNvSpPr txBox="1">
+            <a:spLocks noGrp="1"/>
+          </p:cNvSpPr>
+          <p:nvPr>
+            <p:ph type="title" idx="4294967295"/>
+          </p:nvPr>
+        </p:nvSpPr>
+        <p:spPr>
+          <a:xfrm>
+            <a:off x="504359" y="2041560"/>
+            <a:ext cx="9071640" cy="946440"/>
+          </a:xfrm>
+        </p:spPr>
+        <p:txBody>
+          <a:bodyPr/>
+          <a:lstStyle/>
+          <a:p>
+            <a:pPr lvl="0"/>
+            <a:r>
+              <a:rPr lang="en-US" sz="3200" dirty="0">
+                <a:solidFill>
+                  <a:schemeClr val="bg1"/>
+                </a:solidFill>
+                <a:latin typeface="Liberation Mono" pitchFamily="49"/>
+              </a:rPr>
+              <a:t>Part 3: Combinatorial Testing</a:t>
+            </a:r>
+            <a:endParaRPr lang="en-US" sz="3200" dirty="0">
+              <a:solidFill>
+                <a:schemeClr val="bg1"/>
+              </a:solidFill>
+            </a:endParaRPr>
+          </a:p>
+        </p:txBody>
+      </p:sp>
+    </p:spTree>
+    <p:extLst>
+      <p:ext uri="{BB962C8B-B14F-4D97-AF65-F5344CB8AC3E}">
+        <p14:creationId xmlns:p14="http://schemas.microsoft.com/office/powerpoint/2010/main" val="12648065"/>
+      </p:ext>
+    </p:extLst>
+  </p:cSld>
+  <p:clrMapOvr>
+    <a:masterClrMapping/>
+  </p:clrMapOvr>
+</p:sld>
+</file>
+
+<file path=ppt/slides/slide15.xml><?xml version="1.0" encoding="utf-8"?>
 <p:sld xmlns:a="http://schemas.openxmlformats.org/drawingml/2006/main" xmlns:r="http://schemas.openxmlformats.org/officeDocument/2006/relationships" xmlns:p="http://schemas.openxmlformats.org/presentationml/2006/main">
   <p:cSld>
     <p:spTree>
@@ -6159,7 +7358,7 @@
 </p:sld>
 </file>
 
-<file path=ppt/slides/slide12.xml><?xml version="1.0" encoding="utf-8"?>
+<file path=ppt/slides/slide16.xml><?xml version="1.0" encoding="utf-8"?>
 <p:sld xmlns:a="http://schemas.openxmlformats.org/drawingml/2006/main" xmlns:r="http://schemas.openxmlformats.org/officeDocument/2006/relationships" xmlns:p="http://schemas.openxmlformats.org/presentationml/2006/main">
   <p:cSld name="page2">
     <p:spTree>
@@ -6246,7 +7445,7 @@
                   <a:schemeClr val="bg1"/>
                 </a:solidFill>
               </a:rPr>
-              <a:t>NIST research found most software bugs are caused by interactions of only a small number of parameters</a:t>
+              <a:t>NIST research found most software bugs are caused by the interactions of only a small number of parameters</a:t>
             </a:r>
             <a:r>
               <a:rPr lang="en-US" i="1" baseline="30000" dirty="0">
@@ -6459,137 +7658,7 @@
 </p:sld>
 </file>
 
-<file path=ppt/slides/slide13.xml><?xml version="1.0" encoding="utf-8"?>
-<p:sld xmlns:a="http://schemas.openxmlformats.org/drawingml/2006/main" xmlns:r="http://schemas.openxmlformats.org/officeDocument/2006/relationships" xmlns:p="http://schemas.openxmlformats.org/presentationml/2006/main">
-  <p:cSld>
-    <p:spTree>
-      <p:nvGrpSpPr>
-        <p:cNvPr id="1" name=""/>
-        <p:cNvGrpSpPr/>
-        <p:nvPr/>
-      </p:nvGrpSpPr>
-      <p:grpSpPr>
-        <a:xfrm>
-          <a:off x="0" y="0"/>
-          <a:ext cx="0" cy="0"/>
-          <a:chOff x="0" y="0"/>
-          <a:chExt cx="0" cy="0"/>
-        </a:xfrm>
-      </p:grpSpPr>
-      <p:pic>
-        <p:nvPicPr>
-          <p:cNvPr id="3" name="Picture 2">
-            <a:extLst>
-              <a:ext uri="{FF2B5EF4-FFF2-40B4-BE49-F238E27FC236}">
-                <a16:creationId xmlns:a16="http://schemas.microsoft.com/office/drawing/2014/main" id="{2CB46AE7-9E96-4E9E-6A11-425DFE991336}"/>
-              </a:ext>
-            </a:extLst>
-          </p:cNvPr>
-          <p:cNvPicPr>
-            <a:picLocks noChangeAspect="1"/>
-          </p:cNvPicPr>
-          <p:nvPr/>
-        </p:nvPicPr>
-        <p:blipFill>
-          <a:blip r:embed="rId2"/>
-          <a:srcRect t="20076" b="18852"/>
-          <a:stretch>
-            <a:fillRect/>
-          </a:stretch>
-        </p:blipFill>
-        <p:spPr>
-          <a:xfrm>
-            <a:off x="-1" y="2207559"/>
-            <a:ext cx="10080625" cy="3462991"/>
-          </a:xfrm>
-          <a:prstGeom prst="rect">
-            <a:avLst/>
-          </a:prstGeom>
-        </p:spPr>
-      </p:pic>
-      <p:sp>
-        <p:nvSpPr>
-          <p:cNvPr id="5" name="Title 1">
-            <a:extLst>
-              <a:ext uri="{FF2B5EF4-FFF2-40B4-BE49-F238E27FC236}">
-                <a16:creationId xmlns:a16="http://schemas.microsoft.com/office/drawing/2014/main" id="{76D3F6A5-926F-726A-F836-A8254D78C12F}"/>
-              </a:ext>
-            </a:extLst>
-          </p:cNvPr>
-          <p:cNvSpPr txBox="1">
-            <a:spLocks/>
-          </p:cNvSpPr>
-          <p:nvPr/>
-        </p:nvSpPr>
-        <p:spPr>
-          <a:xfrm>
-            <a:off x="2146774" y="200166"/>
-            <a:ext cx="5787073" cy="1107996"/>
-          </a:xfrm>
-          <a:prstGeom prst="rect">
-            <a:avLst/>
-          </a:prstGeom>
-          <a:noFill/>
-          <a:ln>
-            <a:noFill/>
-          </a:ln>
-        </p:spPr>
-        <p:txBody>
-          <a:bodyPr vert="horz" wrap="square" lIns="0" tIns="0" rIns="0" bIns="0" anchor="ctr">
-            <a:spAutoFit/>
-          </a:bodyPr>
-          <a:lstStyle>
-            <a:lvl1pPr lvl="0" algn="ctr" rtl="0" hangingPunct="0">
-              <a:buNone/>
-              <a:tabLst/>
-              <a:defRPr lang="en-US" sz="3600" b="0" i="0" u="none" strike="noStrike" kern="1200" cap="none">
-                <a:ln>
-                  <a:noFill/>
-                </a:ln>
-                <a:highlight>
-                  <a:scrgbClr r="0" g="0" b="0">
-                    <a:alpha val="0"/>
-                  </a:scrgbClr>
-                </a:highlight>
-                <a:latin typeface="URW Bookman" pitchFamily="2"/>
-                <a:ea typeface="Nimbus Sans" pitchFamily="2"/>
-                <a:cs typeface="FreeSans" pitchFamily="2"/>
-              </a:defRPr>
-            </a:lvl1pPr>
-          </a:lstStyle>
-          <a:p>
-            <a:r>
-              <a:rPr lang="en-US" dirty="0">
-                <a:solidFill>
-                  <a:schemeClr val="bg1"/>
-                </a:solidFill>
-              </a:rPr>
-              <a:t>Visualization of Model Constants, Inputs, and Output</a:t>
-            </a:r>
-            <a:endParaRPr lang="en-US" dirty="0">
-              <a:solidFill>
-                <a:schemeClr val="bg1"/>
-              </a:solidFill>
-              <a:latin typeface="Courier New" panose="02070309020205020404" pitchFamily="49" charset="0"/>
-              <a:cs typeface="Courier New" panose="02070309020205020404" pitchFamily="49" charset="0"/>
-            </a:endParaRPr>
-          </a:p>
-        </p:txBody>
-      </p:sp>
-    </p:spTree>
-    <p:extLst>
-      <p:ext uri="{BB962C8B-B14F-4D97-AF65-F5344CB8AC3E}">
-        <p14:creationId xmlns:p14="http://schemas.microsoft.com/office/powerpoint/2010/main" val="1220889769"/>
-      </p:ext>
-    </p:extLst>
-  </p:cSld>
-  <p:clrMapOvr>
-    <a:masterClrMapping/>
-  </p:clrMapOvr>
-</p:sld>
-</file>
-
-<file path=ppt/slides/slide14.xml><?xml version="1.0" encoding="utf-8"?>
+<file path=ppt/slides/slide17.xml><?xml version="1.0" encoding="utf-8"?>
 <p:sld xmlns:a="http://schemas.openxmlformats.org/drawingml/2006/main" xmlns:r="http://schemas.openxmlformats.org/officeDocument/2006/relationships" xmlns:p="http://schemas.openxmlformats.org/presentationml/2006/main">
   <p:cSld name="page3">
     <p:spTree>
@@ -6749,7 +7818,7 @@
                   <a:schemeClr val="bg1"/>
                 </a:solidFill>
               </a:rPr>
-              <a:t>For integers, we linearly interpolate over their ranges to get up to 11 values. </a:t>
+              <a:t>For integers, we linearly interpolated over their ranges to get up to 11 values. </a:t>
             </a:r>
           </a:p>
           <a:p>
@@ -6760,7 +7829,7 @@
                   <a:schemeClr val="bg1"/>
                 </a:solidFill>
               </a:rPr>
-              <a:t>For floats, we linearly interpolate over their ranges to get exactly 11 values.</a:t>
+              <a:t>For floats, we linearly interpolated over their ranges to get exactly 11 values.</a:t>
             </a:r>
           </a:p>
         </p:txBody>
@@ -7145,8 +8214,8 @@
         </p:nvSpPr>
         <p:spPr>
           <a:xfrm>
-            <a:off x="6605609" y="1231588"/>
-            <a:ext cx="3215047" cy="369332"/>
+            <a:off x="6544646" y="1222879"/>
+            <a:ext cx="3326360" cy="369332"/>
           </a:xfrm>
           <a:prstGeom prst="rect">
             <a:avLst/>
@@ -7173,7 +8242,7 @@
                   <a:schemeClr val="bg1"/>
                 </a:solidFill>
               </a:rPr>
-              <a:t> Excerpt for Illustration</a:t>
+              <a:t> Excerpts for Illustration</a:t>
             </a:r>
           </a:p>
         </p:txBody>
@@ -7186,7 +8255,7 @@
 </p:sld>
 </file>
 
-<file path=ppt/slides/slide15.xml><?xml version="1.0" encoding="utf-8"?>
+<file path=ppt/slides/slide18.xml><?xml version="1.0" encoding="utf-8"?>
 <p:sld xmlns:a="http://schemas.openxmlformats.org/drawingml/2006/main" xmlns:r="http://schemas.openxmlformats.org/officeDocument/2006/relationships" xmlns:p="http://schemas.openxmlformats.org/presentationml/2006/main">
   <p:cSld name="page4">
     <p:spTree>
@@ -7308,7 +8377,7 @@
 </p:sld>
 </file>
 
-<file path=ppt/slides/slide16.xml><?xml version="1.0" encoding="utf-8"?>
+<file path=ppt/slides/slide19.xml><?xml version="1.0" encoding="utf-8"?>
 <p:sld xmlns:a="http://schemas.openxmlformats.org/drawingml/2006/main" xmlns:r="http://schemas.openxmlformats.org/officeDocument/2006/relationships" xmlns:p="http://schemas.openxmlformats.org/presentationml/2006/main">
   <p:cSld>
     <p:spTree>
@@ -7650,7 +8719,7 @@
                   <a:schemeClr val="bg1"/>
                 </a:solidFill>
               </a:rPr>
-              <a:t>10 out of 46 checks are of this type</a:t>
+              <a:t>10 out of 46 checks are of this type.</a:t>
             </a:r>
           </a:p>
         </p:txBody>
@@ -7812,7 +8881,137 @@
 </p:sld>
 </file>
 
-<file path=ppt/slides/slide17.xml><?xml version="1.0" encoding="utf-8"?>
+<file path=ppt/slides/slide2.xml><?xml version="1.0" encoding="utf-8"?>
+<p:sld xmlns:a="http://schemas.openxmlformats.org/drawingml/2006/main" xmlns:r="http://schemas.openxmlformats.org/officeDocument/2006/relationships" xmlns:p="http://schemas.openxmlformats.org/presentationml/2006/main">
+  <p:cSld>
+    <p:spTree>
+      <p:nvGrpSpPr>
+        <p:cNvPr id="1" name=""/>
+        <p:cNvGrpSpPr/>
+        <p:nvPr/>
+      </p:nvGrpSpPr>
+      <p:grpSpPr>
+        <a:xfrm>
+          <a:off x="0" y="0"/>
+          <a:ext cx="0" cy="0"/>
+          <a:chOff x="0" y="0"/>
+          <a:chExt cx="0" cy="0"/>
+        </a:xfrm>
+      </p:grpSpPr>
+      <p:pic>
+        <p:nvPicPr>
+          <p:cNvPr id="3" name="Picture 2">
+            <a:extLst>
+              <a:ext uri="{FF2B5EF4-FFF2-40B4-BE49-F238E27FC236}">
+                <a16:creationId xmlns:a16="http://schemas.microsoft.com/office/drawing/2014/main" id="{2CB46AE7-9E96-4E9E-6A11-425DFE991336}"/>
+              </a:ext>
+            </a:extLst>
+          </p:cNvPr>
+          <p:cNvPicPr>
+            <a:picLocks noChangeAspect="1"/>
+          </p:cNvPicPr>
+          <p:nvPr/>
+        </p:nvPicPr>
+        <p:blipFill>
+          <a:blip r:embed="rId2"/>
+          <a:srcRect t="20076" b="18852"/>
+          <a:stretch>
+            <a:fillRect/>
+          </a:stretch>
+        </p:blipFill>
+        <p:spPr>
+          <a:xfrm>
+            <a:off x="-1" y="1719879"/>
+            <a:ext cx="10080625" cy="3462991"/>
+          </a:xfrm>
+          <a:prstGeom prst="rect">
+            <a:avLst/>
+          </a:prstGeom>
+        </p:spPr>
+      </p:pic>
+      <p:sp>
+        <p:nvSpPr>
+          <p:cNvPr id="5" name="Title 1">
+            <a:extLst>
+              <a:ext uri="{FF2B5EF4-FFF2-40B4-BE49-F238E27FC236}">
+                <a16:creationId xmlns:a16="http://schemas.microsoft.com/office/drawing/2014/main" id="{76D3F6A5-926F-726A-F836-A8254D78C12F}"/>
+              </a:ext>
+            </a:extLst>
+          </p:cNvPr>
+          <p:cNvSpPr txBox="1">
+            <a:spLocks/>
+          </p:cNvSpPr>
+          <p:nvPr/>
+        </p:nvSpPr>
+        <p:spPr>
+          <a:xfrm>
+            <a:off x="2146774" y="477165"/>
+            <a:ext cx="5787073" cy="553998"/>
+          </a:xfrm>
+          <a:prstGeom prst="rect">
+            <a:avLst/>
+          </a:prstGeom>
+          <a:noFill/>
+          <a:ln>
+            <a:noFill/>
+          </a:ln>
+        </p:spPr>
+        <p:txBody>
+          <a:bodyPr vert="horz" wrap="square" lIns="0" tIns="0" rIns="0" bIns="0" anchor="ctr">
+            <a:spAutoFit/>
+          </a:bodyPr>
+          <a:lstStyle>
+            <a:lvl1pPr lvl="0" algn="ctr" rtl="0" hangingPunct="0">
+              <a:buNone/>
+              <a:tabLst/>
+              <a:defRPr lang="en-US" sz="3600" b="0" i="0" u="none" strike="noStrike" kern="1200" cap="none">
+                <a:ln>
+                  <a:noFill/>
+                </a:ln>
+                <a:highlight>
+                  <a:scrgbClr r="0" g="0" b="0">
+                    <a:alpha val="0"/>
+                  </a:scrgbClr>
+                </a:highlight>
+                <a:latin typeface="URW Bookman" pitchFamily="2"/>
+                <a:ea typeface="Nimbus Sans" pitchFamily="2"/>
+                <a:cs typeface="FreeSans" pitchFamily="2"/>
+              </a:defRPr>
+            </a:lvl1pPr>
+          </a:lstStyle>
+          <a:p>
+            <a:r>
+              <a:rPr lang="en-US" dirty="0">
+                <a:solidFill>
+                  <a:schemeClr val="bg1"/>
+                </a:solidFill>
+              </a:rPr>
+              <a:t>The Testing Boundary</a:t>
+            </a:r>
+            <a:endParaRPr lang="en-US" dirty="0">
+              <a:solidFill>
+                <a:schemeClr val="bg1"/>
+              </a:solidFill>
+              <a:latin typeface="Courier New" panose="02070309020205020404" pitchFamily="49" charset="0"/>
+              <a:cs typeface="Courier New" panose="02070309020205020404" pitchFamily="49" charset="0"/>
+            </a:endParaRPr>
+          </a:p>
+        </p:txBody>
+      </p:sp>
+    </p:spTree>
+    <p:extLst>
+      <p:ext uri="{BB962C8B-B14F-4D97-AF65-F5344CB8AC3E}">
+        <p14:creationId xmlns:p14="http://schemas.microsoft.com/office/powerpoint/2010/main" val="111135494"/>
+      </p:ext>
+    </p:extLst>
+  </p:cSld>
+  <p:clrMapOvr>
+    <a:masterClrMapping/>
+  </p:clrMapOvr>
+</p:sld>
+</file>
+
+<file path=ppt/slides/slide20.xml><?xml version="1.0" encoding="utf-8"?>
 <p:sld xmlns:a="http://schemas.openxmlformats.org/drawingml/2006/main" xmlns:r="http://schemas.openxmlformats.org/officeDocument/2006/relationships" xmlns:p="http://schemas.openxmlformats.org/presentationml/2006/main">
   <p:cSld>
     <p:spTree>
@@ -8698,7 +9897,7 @@
 </p:sld>
 </file>
 
-<file path=ppt/slides/slide18.xml><?xml version="1.0" encoding="utf-8"?>
+<file path=ppt/slides/slide21.xml><?xml version="1.0" encoding="utf-8"?>
 <p:sld xmlns:a="http://schemas.openxmlformats.org/drawingml/2006/main" xmlns:r="http://schemas.openxmlformats.org/officeDocument/2006/relationships" xmlns:p="http://schemas.openxmlformats.org/presentationml/2006/main">
   <p:cSld>
     <p:spTree>
@@ -9035,7 +10234,7 @@
                   <a:schemeClr val="bg1"/>
                 </a:solidFill>
               </a:rPr>
-              <a:t>Check that a certain model output is a fraction </a:t>
+              <a:t>Check that a certain model output is in [0, 1] </a:t>
             </a:r>
           </a:p>
           <a:p>
@@ -9046,7 +10245,7 @@
                   <a:schemeClr val="bg1"/>
                 </a:solidFill>
               </a:rPr>
-              <a:t>2 out of 46 checks are of this type</a:t>
+              <a:t>2 out of 46 checks are of this type.</a:t>
             </a:r>
           </a:p>
         </p:txBody>
@@ -9185,7 +10384,7 @@
 </p:sld>
 </file>
 
-<file path=ppt/slides/slide19.xml><?xml version="1.0" encoding="utf-8"?>
+<file path=ppt/slides/slide22.xml><?xml version="1.0" encoding="utf-8"?>
 <p:sld xmlns:a="http://schemas.openxmlformats.org/drawingml/2006/main" xmlns:r="http://schemas.openxmlformats.org/officeDocument/2006/relationships" xmlns:p="http://schemas.openxmlformats.org/presentationml/2006/main">
   <p:cSld>
     <p:spTree>
@@ -9436,138 +10635,7 @@
 </p:sld>
 </file>
 
-<file path=ppt/slides/slide2.xml><?xml version="1.0" encoding="utf-8"?>
-<p:sld xmlns:a="http://schemas.openxmlformats.org/drawingml/2006/main" xmlns:r="http://schemas.openxmlformats.org/officeDocument/2006/relationships" xmlns:p="http://schemas.openxmlformats.org/presentationml/2006/main">
-  <p:cSld>
-    <p:spTree>
-      <p:nvGrpSpPr>
-        <p:cNvPr id="1" name="">
-          <a:extLst>
-            <a:ext uri="{FF2B5EF4-FFF2-40B4-BE49-F238E27FC236}">
-              <a16:creationId xmlns:a16="http://schemas.microsoft.com/office/drawing/2014/main" id="{4E5DEF85-FAA0-A884-49E4-D90F71A30E97}"/>
-            </a:ext>
-          </a:extLst>
-        </p:cNvPr>
-        <p:cNvGrpSpPr/>
-        <p:nvPr/>
-      </p:nvGrpSpPr>
-      <p:grpSpPr>
-        <a:xfrm>
-          <a:off x="0" y="0"/>
-          <a:ext cx="0" cy="0"/>
-          <a:chOff x="0" y="0"/>
-          <a:chExt cx="0" cy="0"/>
-        </a:xfrm>
-      </p:grpSpPr>
-      <p:sp>
-        <p:nvSpPr>
-          <p:cNvPr id="2" name="Title 1">
-            <a:extLst>
-              <a:ext uri="{FF2B5EF4-FFF2-40B4-BE49-F238E27FC236}">
-                <a16:creationId xmlns:a16="http://schemas.microsoft.com/office/drawing/2014/main" id="{2D635B58-763E-B189-503F-B8A6AECE0C14}"/>
-              </a:ext>
-            </a:extLst>
-          </p:cNvPr>
-          <p:cNvSpPr txBox="1">
-            <a:spLocks noGrp="1"/>
-          </p:cNvSpPr>
-          <p:nvPr>
-            <p:ph type="title" idx="4294967295"/>
-          </p:nvPr>
-        </p:nvSpPr>
-        <p:spPr>
-          <a:xfrm>
-            <a:off x="503999" y="422301"/>
-            <a:ext cx="9071640" cy="553998"/>
-          </a:xfrm>
-        </p:spPr>
-        <p:txBody>
-          <a:bodyPr>
-            <a:spAutoFit/>
-          </a:bodyPr>
-          <a:lstStyle/>
-          <a:p>
-            <a:pPr lvl="0"/>
-            <a:r>
-              <a:rPr lang="en-US" dirty="0">
-                <a:solidFill>
-                  <a:schemeClr val="bg1"/>
-                </a:solidFill>
-              </a:rPr>
-              <a:t>Change Detection Analysis</a:t>
-            </a:r>
-          </a:p>
-        </p:txBody>
-      </p:sp>
-      <p:sp>
-        <p:nvSpPr>
-          <p:cNvPr id="3" name="Text Placeholder 2">
-            <a:extLst>
-              <a:ext uri="{FF2B5EF4-FFF2-40B4-BE49-F238E27FC236}">
-                <a16:creationId xmlns:a16="http://schemas.microsoft.com/office/drawing/2014/main" id="{25E00617-F975-DE3A-0675-236E19993C53}"/>
-              </a:ext>
-            </a:extLst>
-          </p:cNvPr>
-          <p:cNvSpPr txBox="1">
-            <a:spLocks noGrp="1"/>
-          </p:cNvSpPr>
-          <p:nvPr>
-            <p:ph type="body" idx="4294967295"/>
-          </p:nvPr>
-        </p:nvSpPr>
-        <p:spPr/>
-        <p:txBody>
-          <a:bodyPr/>
-          <a:lstStyle/>
-          <a:p>
-            <a:pPr marL="342900" indent="-342900"/>
-            <a:r>
-              <a:rPr lang="en-US" dirty="0">
-                <a:solidFill>
-                  <a:schemeClr val="bg1"/>
-                </a:solidFill>
-              </a:rPr>
-              <a:t>Change Detection Analysis seeks to find how changes to individual model constants affect model outputs. </a:t>
-            </a:r>
-          </a:p>
-          <a:p>
-            <a:pPr marL="342900" indent="-342900"/>
-            <a:r>
-              <a:rPr lang="en-US" dirty="0">
-                <a:solidFill>
-                  <a:schemeClr val="bg1"/>
-                </a:solidFill>
-              </a:rPr>
-              <a:t>It does this by changing a single model constant across its range of values while holding all other model constants at their default values.</a:t>
-            </a:r>
-          </a:p>
-          <a:p>
-            <a:pPr marL="342900" indent="-342900"/>
-            <a:r>
-              <a:rPr lang="en-US" dirty="0">
-                <a:solidFill>
-                  <a:schemeClr val="bg1"/>
-                </a:solidFill>
-              </a:rPr>
-              <a:t>Provides a simple form of qualitative analysis (one-constant-at-a-time) but misses interactions among constants and their joint effect on output changes</a:t>
-            </a:r>
-          </a:p>
-        </p:txBody>
-      </p:sp>
-    </p:spTree>
-    <p:extLst>
-      <p:ext uri="{BB962C8B-B14F-4D97-AF65-F5344CB8AC3E}">
-        <p14:creationId xmlns:p14="http://schemas.microsoft.com/office/powerpoint/2010/main" val="4249625218"/>
-      </p:ext>
-    </p:extLst>
-  </p:cSld>
-  <p:clrMapOvr>
-    <a:masterClrMapping/>
-  </p:clrMapOvr>
-</p:sld>
-</file>
-
-<file path=ppt/slides/slide20.xml><?xml version="1.0" encoding="utf-8"?>
+<file path=ppt/slides/slide23.xml><?xml version="1.0" encoding="utf-8"?>
 <p:sld xmlns:a="http://schemas.openxmlformats.org/drawingml/2006/main" xmlns:r="http://schemas.openxmlformats.org/officeDocument/2006/relationships" xmlns:p="http://schemas.openxmlformats.org/presentationml/2006/main">
   <p:cSld>
     <p:spTree>
@@ -9915,7 +10983,7 @@
                   <a:schemeClr val="bg1"/>
                 </a:solidFill>
               </a:rPr>
-              <a:t>22 out of 46 checks are of this type</a:t>
+              <a:t>22 out of 46 checks are of this type.</a:t>
             </a:r>
           </a:p>
         </p:txBody>
@@ -10077,7 +11145,7 @@
 </p:sld>
 </file>
 
-<file path=ppt/slides/slide21.xml><?xml version="1.0" encoding="utf-8"?>
+<file path=ppt/slides/slide24.xml><?xml version="1.0" encoding="utf-8"?>
 <p:sld xmlns:a="http://schemas.openxmlformats.org/drawingml/2006/main" xmlns:r="http://schemas.openxmlformats.org/officeDocument/2006/relationships" xmlns:p="http://schemas.openxmlformats.org/presentationml/2006/main">
   <p:cSld>
     <p:spTree>
@@ -10157,7 +11225,7 @@
                   <a:schemeClr val="bg1"/>
                 </a:solidFill>
               </a:rPr>
-              <a:t>All Finiteness Checks (Part 1)</a:t>
+              <a:t>All Finiteness Checks</a:t>
             </a:r>
           </a:p>
         </p:txBody>
@@ -10864,7 +11932,7 @@
 </p:sld>
 </file>
 
-<file path=ppt/slides/slide22.xml><?xml version="1.0" encoding="utf-8"?>
+<file path=ppt/slides/slide25.xml><?xml version="1.0" encoding="utf-8"?>
 <p:sld xmlns:a="http://schemas.openxmlformats.org/drawingml/2006/main" xmlns:r="http://schemas.openxmlformats.org/officeDocument/2006/relationships" xmlns:p="http://schemas.openxmlformats.org/presentationml/2006/main">
   <p:cSld>
     <p:spTree>
@@ -10944,7 +12012,7 @@
                   <a:schemeClr val="bg1"/>
                 </a:solidFill>
               </a:rPr>
-              <a:t>All Finiteness Checks (Part 2)</a:t>
+              <a:t>All Finiteness Checks (Continued)</a:t>
             </a:r>
           </a:p>
         </p:txBody>
@@ -11634,7 +12702,7 @@
 </p:sld>
 </file>
 
-<file path=ppt/slides/slide23.xml><?xml version="1.0" encoding="utf-8"?>
+<file path=ppt/slides/slide26.xml><?xml version="1.0" encoding="utf-8"?>
 <p:sld xmlns:a="http://schemas.openxmlformats.org/drawingml/2006/main" xmlns:r="http://schemas.openxmlformats.org/officeDocument/2006/relationships" xmlns:p="http://schemas.openxmlformats.org/presentationml/2006/main">
   <p:cSld>
     <p:spTree>
@@ -11982,7 +13050,7 @@
                   <a:schemeClr val="bg1"/>
                 </a:solidFill>
               </a:rPr>
-              <a:t>1 out of 46 checks are of this type</a:t>
+              <a:t>1 out of 46 checks are of this type.</a:t>
             </a:r>
           </a:p>
         </p:txBody>
@@ -12091,7 +13159,7 @@
 </p:sld>
 </file>
 
-<file path=ppt/slides/slide24.xml><?xml version="1.0" encoding="utf-8"?>
+<file path=ppt/slides/slide27.xml><?xml version="1.0" encoding="utf-8"?>
 <p:sld xmlns:a="http://schemas.openxmlformats.org/drawingml/2006/main" xmlns:r="http://schemas.openxmlformats.org/officeDocument/2006/relationships" xmlns:p="http://schemas.openxmlformats.org/presentationml/2006/main">
   <p:cSld>
     <p:spTree>
@@ -12301,7 +13369,7 @@
 </p:sld>
 </file>
 
-<file path=ppt/slides/slide25.xml><?xml version="1.0" encoding="utf-8"?>
+<file path=ppt/slides/slide28.xml><?xml version="1.0" encoding="utf-8"?>
 <p:sld xmlns:a="http://schemas.openxmlformats.org/drawingml/2006/main" xmlns:r="http://schemas.openxmlformats.org/officeDocument/2006/relationships" xmlns:p="http://schemas.openxmlformats.org/presentationml/2006/main">
   <p:cSld>
     <p:spTree>
@@ -12649,7 +13717,7 @@
                   <a:schemeClr val="bg1"/>
                 </a:solidFill>
               </a:rPr>
-              <a:t>3 out of 46 checks are of this type</a:t>
+              <a:t>3 out of 46 checks are of this type.</a:t>
             </a:r>
           </a:p>
         </p:txBody>
@@ -12758,7 +13826,7 @@
 </p:sld>
 </file>
 
-<file path=ppt/slides/slide26.xml><?xml version="1.0" encoding="utf-8"?>
+<file path=ppt/slides/slide29.xml><?xml version="1.0" encoding="utf-8"?>
 <p:sld xmlns:a="http://schemas.openxmlformats.org/drawingml/2006/main" xmlns:r="http://schemas.openxmlformats.org/officeDocument/2006/relationships" xmlns:p="http://schemas.openxmlformats.org/presentationml/2006/main">
   <p:cSld>
     <p:spTree>
@@ -13044,7 +14112,87 @@
 </p:sld>
 </file>
 
-<file path=ppt/slides/slide27.xml><?xml version="1.0" encoding="utf-8"?>
+<file path=ppt/slides/slide3.xml><?xml version="1.0" encoding="utf-8"?>
+<p:sld xmlns:a="http://schemas.openxmlformats.org/drawingml/2006/main" xmlns:r="http://schemas.openxmlformats.org/officeDocument/2006/relationships" xmlns:p="http://schemas.openxmlformats.org/presentationml/2006/main">
+  <p:cSld>
+    <p:spTree>
+      <p:nvGrpSpPr>
+        <p:cNvPr id="1" name="">
+          <a:extLst>
+            <a:ext uri="{FF2B5EF4-FFF2-40B4-BE49-F238E27FC236}">
+              <a16:creationId xmlns:a16="http://schemas.microsoft.com/office/drawing/2014/main" id="{58F8972D-F78A-1960-3B8A-16886F8C946F}"/>
+            </a:ext>
+          </a:extLst>
+        </p:cNvPr>
+        <p:cNvGrpSpPr/>
+        <p:nvPr/>
+      </p:nvGrpSpPr>
+      <p:grpSpPr>
+        <a:xfrm>
+          <a:off x="0" y="0"/>
+          <a:ext cx="0" cy="0"/>
+          <a:chOff x="0" y="0"/>
+          <a:chExt cx="0" cy="0"/>
+        </a:xfrm>
+      </p:grpSpPr>
+      <p:sp>
+        <p:nvSpPr>
+          <p:cNvPr id="2" name="Title 1">
+            <a:extLst>
+              <a:ext uri="{FF2B5EF4-FFF2-40B4-BE49-F238E27FC236}">
+                <a16:creationId xmlns:a16="http://schemas.microsoft.com/office/drawing/2014/main" id="{7ABD8C29-8C71-A5D1-12D4-85015D3B3505}"/>
+              </a:ext>
+            </a:extLst>
+          </p:cNvPr>
+          <p:cNvSpPr txBox="1">
+            <a:spLocks noGrp="1"/>
+          </p:cNvSpPr>
+          <p:nvPr>
+            <p:ph type="title" idx="4294967295"/>
+          </p:nvPr>
+        </p:nvSpPr>
+        <p:spPr>
+          <a:xfrm>
+            <a:off x="504359" y="2041560"/>
+            <a:ext cx="9071640" cy="946440"/>
+          </a:xfrm>
+        </p:spPr>
+        <p:txBody>
+          <a:bodyPr/>
+          <a:lstStyle/>
+          <a:p>
+            <a:pPr lvl="0"/>
+            <a:r>
+              <a:rPr lang="en-US" sz="3200" dirty="0">
+                <a:solidFill>
+                  <a:schemeClr val="bg1"/>
+                </a:solidFill>
+                <a:latin typeface="Liberation Mono" pitchFamily="49"/>
+              </a:rPr>
+              <a:t>Part 1: Prelude: Change Detection Analysis</a:t>
+            </a:r>
+            <a:endParaRPr lang="en-US" sz="3200" dirty="0">
+              <a:solidFill>
+                <a:schemeClr val="bg1"/>
+              </a:solidFill>
+            </a:endParaRPr>
+          </a:p>
+        </p:txBody>
+      </p:sp>
+    </p:spTree>
+    <p:extLst>
+      <p:ext uri="{BB962C8B-B14F-4D97-AF65-F5344CB8AC3E}">
+        <p14:creationId xmlns:p14="http://schemas.microsoft.com/office/powerpoint/2010/main" val="1071112536"/>
+      </p:ext>
+    </p:extLst>
+  </p:cSld>
+  <p:clrMapOvr>
+    <a:masterClrMapping/>
+  </p:clrMapOvr>
+</p:sld>
+</file>
+
+<file path=ppt/slides/slide30.xml><?xml version="1.0" encoding="utf-8"?>
 <p:sld xmlns:a="http://schemas.openxmlformats.org/drawingml/2006/main" xmlns:r="http://schemas.openxmlformats.org/officeDocument/2006/relationships" xmlns:p="http://schemas.openxmlformats.org/presentationml/2006/main">
   <p:cSld>
     <p:spTree>
@@ -13124,7 +14272,7 @@
                   <a:schemeClr val="bg1"/>
                 </a:solidFill>
               </a:rPr>
-              <a:t>Physical Laws and Restraints Checks Overview</a:t>
+              <a:t>Physical Laws and Constraints Checks Overview</a:t>
             </a:r>
           </a:p>
         </p:txBody>
@@ -13381,7 +14529,7 @@
                   <a:schemeClr val="bg1"/>
                 </a:solidFill>
               </a:rPr>
-              <a:t>Check that a certain model output obeys physical laws and restraints</a:t>
+              <a:t>Check that a certain model output obeys physical laws and constraints</a:t>
             </a:r>
           </a:p>
           <a:p>
@@ -13392,7 +14540,7 @@
                   <a:schemeClr val="bg1"/>
                 </a:solidFill>
               </a:rPr>
-              <a:t>8 out of 46 checks are of this type</a:t>
+              <a:t>8 out of 46 checks are of this type.</a:t>
             </a:r>
           </a:p>
         </p:txBody>
@@ -13501,7 +14649,7 @@
 </p:sld>
 </file>
 
-<file path=ppt/slides/slide28.xml><?xml version="1.0" encoding="utf-8"?>
+<file path=ppt/slides/slide31.xml><?xml version="1.0" encoding="utf-8"?>
 <p:sld xmlns:a="http://schemas.openxmlformats.org/drawingml/2006/main" xmlns:r="http://schemas.openxmlformats.org/officeDocument/2006/relationships" xmlns:p="http://schemas.openxmlformats.org/presentationml/2006/main">
   <p:cSld>
     <p:spTree>
@@ -13581,7 +14729,7 @@
                   <a:schemeClr val="bg1"/>
                 </a:solidFill>
               </a:rPr>
-              <a:t>All Physical Laws and Restraints Checks</a:t>
+              <a:t>All Physical Laws and Constraints Checks</a:t>
             </a:r>
           </a:p>
         </p:txBody>
@@ -13978,7 +15126,7 @@
 </p:sld>
 </file>
 
-<file path=ppt/slides/slide29.xml><?xml version="1.0" encoding="utf-8"?>
+<file path=ppt/slides/slide32.xml><?xml version="1.0" encoding="utf-8"?>
 <p:sld xmlns:a="http://schemas.openxmlformats.org/drawingml/2006/main" xmlns:r="http://schemas.openxmlformats.org/officeDocument/2006/relationships" xmlns:p="http://schemas.openxmlformats.org/presentationml/2006/main">
   <p:cSld>
     <p:spTree>
@@ -14199,7 +15347,7 @@
         </p:blipFill>
         <p:spPr>
           <a:xfrm>
-            <a:off x="0" y="3243404"/>
+            <a:off x="0" y="3025681"/>
             <a:ext cx="10080625" cy="2004845"/>
           </a:xfrm>
           <a:prstGeom prst="rect">
@@ -14220,406 +15368,7 @@
 </p:sld>
 </file>
 
-<file path=ppt/slides/slide3.xml><?xml version="1.0" encoding="utf-8"?>
-<p:sld xmlns:a="http://schemas.openxmlformats.org/drawingml/2006/main" xmlns:r="http://schemas.openxmlformats.org/officeDocument/2006/relationships" xmlns:p="http://schemas.openxmlformats.org/presentationml/2006/main">
-  <p:cSld>
-    <p:spTree>
-      <p:nvGrpSpPr>
-        <p:cNvPr id="1" name="">
-          <a:extLst>
-            <a:ext uri="{FF2B5EF4-FFF2-40B4-BE49-F238E27FC236}">
-              <a16:creationId xmlns:a16="http://schemas.microsoft.com/office/drawing/2014/main" id="{ED31208B-2A05-1B86-73F0-EB143D2555E8}"/>
-            </a:ext>
-          </a:extLst>
-        </p:cNvPr>
-        <p:cNvGrpSpPr/>
-        <p:nvPr/>
-      </p:nvGrpSpPr>
-      <p:grpSpPr>
-        <a:xfrm>
-          <a:off x="0" y="0"/>
-          <a:ext cx="0" cy="0"/>
-          <a:chOff x="0" y="0"/>
-          <a:chExt cx="0" cy="0"/>
-        </a:xfrm>
-      </p:grpSpPr>
-      <p:sp>
-        <p:nvSpPr>
-          <p:cNvPr id="2" name="Title 1">
-            <a:extLst>
-              <a:ext uri="{FF2B5EF4-FFF2-40B4-BE49-F238E27FC236}">
-                <a16:creationId xmlns:a16="http://schemas.microsoft.com/office/drawing/2014/main" id="{8E7FE489-9349-DA38-F1AB-F4D40E20FA18}"/>
-              </a:ext>
-            </a:extLst>
-          </p:cNvPr>
-          <p:cNvSpPr txBox="1">
-            <a:spLocks/>
-          </p:cNvSpPr>
-          <p:nvPr/>
-        </p:nvSpPr>
-        <p:spPr>
-          <a:xfrm>
-            <a:off x="503999" y="422301"/>
-            <a:ext cx="9071640" cy="553998"/>
-          </a:xfrm>
-          <a:prstGeom prst="rect">
-            <a:avLst/>
-          </a:prstGeom>
-          <a:noFill/>
-          <a:ln>
-            <a:noFill/>
-          </a:ln>
-        </p:spPr>
-        <p:txBody>
-          <a:bodyPr vert="horz" lIns="0" tIns="0" rIns="0" bIns="0" anchor="ctr">
-            <a:spAutoFit/>
-          </a:bodyPr>
-          <a:lstStyle>
-            <a:lvl1pPr lvl="0" algn="ctr" rtl="0" hangingPunct="0">
-              <a:buNone/>
-              <a:tabLst/>
-              <a:defRPr lang="en-US" sz="3600" b="0" i="0" u="none" strike="noStrike" kern="1200" cap="none">
-                <a:ln>
-                  <a:noFill/>
-                </a:ln>
-                <a:highlight>
-                  <a:scrgbClr r="0" g="0" b="0">
-                    <a:alpha val="0"/>
-                  </a:scrgbClr>
-                </a:highlight>
-                <a:latin typeface="URW Bookman" pitchFamily="2"/>
-                <a:ea typeface="Nimbus Sans" pitchFamily="2"/>
-                <a:cs typeface="FreeSans" pitchFamily="2"/>
-              </a:defRPr>
-            </a:lvl1pPr>
-          </a:lstStyle>
-          <a:p>
-            <a:r>
-              <a:rPr lang="en-US" dirty="0">
-                <a:solidFill>
-                  <a:schemeClr val="bg1"/>
-                </a:solidFill>
-              </a:rPr>
-              <a:t>Assumptions</a:t>
-            </a:r>
-          </a:p>
-        </p:txBody>
-      </p:sp>
-      <p:sp>
-        <p:nvSpPr>
-          <p:cNvPr id="3" name="Text Placeholder 2">
-            <a:extLst>
-              <a:ext uri="{FF2B5EF4-FFF2-40B4-BE49-F238E27FC236}">
-                <a16:creationId xmlns:a16="http://schemas.microsoft.com/office/drawing/2014/main" id="{1758AE0D-3928-68B2-851F-3466DEF4D1CE}"/>
-              </a:ext>
-            </a:extLst>
-          </p:cNvPr>
-          <p:cNvSpPr txBox="1">
-            <a:spLocks/>
-          </p:cNvSpPr>
-          <p:nvPr/>
-        </p:nvSpPr>
-        <p:spPr>
-          <a:xfrm>
-            <a:off x="503999" y="1326600"/>
-            <a:ext cx="9071640" cy="4022640"/>
-          </a:xfrm>
-          <a:prstGeom prst="rect">
-            <a:avLst/>
-          </a:prstGeom>
-          <a:noFill/>
-          <a:ln>
-            <a:noFill/>
-          </a:ln>
-        </p:spPr>
-        <p:txBody>
-          <a:bodyPr vert="horz" lIns="0" tIns="0" rIns="0" bIns="0">
-            <a:normAutofit/>
-          </a:bodyPr>
-          <a:lstStyle>
-            <a:lvl1pPr lvl="0" rtl="0" hangingPunct="0">
-              <a:spcBef>
-                <a:spcPts val="1417"/>
-              </a:spcBef>
-              <a:spcAft>
-                <a:spcPts val="0"/>
-              </a:spcAft>
-              <a:buSzPct val="45000"/>
-              <a:buFont typeface="OpenSymbol"/>
-              <a:buChar char="●"/>
-              <a:tabLst/>
-              <a:defRPr lang="en-US" sz="2400" b="0" i="0" u="none" strike="noStrike" kern="1200" cap="none">
-                <a:ln>
-                  <a:noFill/>
-                </a:ln>
-                <a:highlight>
-                  <a:scrgbClr r="0" g="0" b="0">
-                    <a:alpha val="0"/>
-                  </a:scrgbClr>
-                </a:highlight>
-                <a:latin typeface="URW Bookman" pitchFamily="2"/>
-                <a:ea typeface="Nimbus Sans" pitchFamily="2"/>
-                <a:cs typeface="FreeSans" pitchFamily="2"/>
-              </a:defRPr>
-            </a:lvl1pPr>
-            <a:lvl2pPr lvl="1" rtl="0" hangingPunct="0">
-              <a:spcBef>
-                <a:spcPts val="1417"/>
-              </a:spcBef>
-              <a:spcAft>
-                <a:spcPts val="0"/>
-              </a:spcAft>
-              <a:buSzPct val="75000"/>
-              <a:buFont typeface="OpenSymbol"/>
-              <a:buChar char="–"/>
-              <a:tabLst/>
-              <a:defRPr lang="en-US" sz="2400" b="0" i="0" u="none" strike="noStrike" kern="1200" cap="none">
-                <a:ln>
-                  <a:noFill/>
-                </a:ln>
-                <a:highlight>
-                  <a:scrgbClr r="0" g="0" b="0">
-                    <a:alpha val="0"/>
-                  </a:scrgbClr>
-                </a:highlight>
-                <a:latin typeface="URW Bookman" pitchFamily="2"/>
-                <a:ea typeface="Nimbus Sans" pitchFamily="2"/>
-                <a:cs typeface="FreeSans" pitchFamily="2"/>
-              </a:defRPr>
-            </a:lvl2pPr>
-            <a:lvl3pPr lvl="2" rtl="0" hangingPunct="0">
-              <a:spcBef>
-                <a:spcPts val="1417"/>
-              </a:spcBef>
-              <a:spcAft>
-                <a:spcPts val="0"/>
-              </a:spcAft>
-              <a:buSzPct val="45000"/>
-              <a:buFont typeface="OpenSymbol"/>
-              <a:buChar char="●"/>
-              <a:tabLst/>
-              <a:defRPr lang="en-US" sz="2400" b="0" i="0" u="none" strike="noStrike" kern="1200" cap="none">
-                <a:ln>
-                  <a:noFill/>
-                </a:ln>
-                <a:highlight>
-                  <a:scrgbClr r="0" g="0" b="0">
-                    <a:alpha val="0"/>
-                  </a:scrgbClr>
-                </a:highlight>
-                <a:latin typeface="URW Bookman" pitchFamily="2"/>
-                <a:ea typeface="Nimbus Sans" pitchFamily="2"/>
-                <a:cs typeface="FreeSans" pitchFamily="2"/>
-              </a:defRPr>
-            </a:lvl3pPr>
-            <a:lvl4pPr lvl="3" rtl="0" hangingPunct="0">
-              <a:spcBef>
-                <a:spcPts val="1417"/>
-              </a:spcBef>
-              <a:spcAft>
-                <a:spcPts val="0"/>
-              </a:spcAft>
-              <a:buSzPct val="75000"/>
-              <a:buFont typeface="OpenSymbol"/>
-              <a:buChar char="–"/>
-              <a:tabLst/>
-              <a:defRPr lang="en-US" sz="2400" b="0" i="0" u="none" strike="noStrike" kern="1200" cap="none">
-                <a:ln>
-                  <a:noFill/>
-                </a:ln>
-                <a:highlight>
-                  <a:scrgbClr r="0" g="0" b="0">
-                    <a:alpha val="0"/>
-                  </a:scrgbClr>
-                </a:highlight>
-                <a:latin typeface="URW Bookman" pitchFamily="2"/>
-                <a:ea typeface="Nimbus Sans" pitchFamily="2"/>
-                <a:cs typeface="FreeSans" pitchFamily="2"/>
-              </a:defRPr>
-            </a:lvl4pPr>
-            <a:lvl5pPr lvl="4" rtl="0" hangingPunct="0">
-              <a:spcBef>
-                <a:spcPts val="1417"/>
-              </a:spcBef>
-              <a:spcAft>
-                <a:spcPts val="0"/>
-              </a:spcAft>
-              <a:buSzPct val="45000"/>
-              <a:buFont typeface="OpenSymbol"/>
-              <a:buChar char="●"/>
-              <a:tabLst/>
-              <a:defRPr lang="en-US" sz="2400" b="0" i="0" u="none" strike="noStrike" kern="1200" cap="none">
-                <a:ln>
-                  <a:noFill/>
-                </a:ln>
-                <a:highlight>
-                  <a:scrgbClr r="0" g="0" b="0">
-                    <a:alpha val="0"/>
-                  </a:scrgbClr>
-                </a:highlight>
-                <a:latin typeface="URW Bookman" pitchFamily="2"/>
-                <a:ea typeface="Nimbus Sans" pitchFamily="2"/>
-                <a:cs typeface="FreeSans" pitchFamily="2"/>
-              </a:defRPr>
-            </a:lvl5pPr>
-            <a:lvl6pPr lvl="5" rtl="0" hangingPunct="0">
-              <a:spcBef>
-                <a:spcPts val="1417"/>
-              </a:spcBef>
-              <a:spcAft>
-                <a:spcPts val="0"/>
-              </a:spcAft>
-              <a:buSzPct val="45000"/>
-              <a:buFont typeface="OpenSymbol"/>
-              <a:buChar char="●"/>
-              <a:tabLst/>
-              <a:defRPr lang="en-US" sz="2400" b="0" i="0" u="none" strike="noStrike" kern="1200" cap="none">
-                <a:ln>
-                  <a:noFill/>
-                </a:ln>
-                <a:highlight>
-                  <a:scrgbClr r="0" g="0" b="0">
-                    <a:alpha val="0"/>
-                  </a:scrgbClr>
-                </a:highlight>
-                <a:latin typeface="URW Bookman" pitchFamily="2"/>
-                <a:ea typeface="Nimbus Sans" pitchFamily="2"/>
-                <a:cs typeface="FreeSans" pitchFamily="2"/>
-              </a:defRPr>
-            </a:lvl6pPr>
-            <a:lvl7pPr lvl="6" rtl="0" hangingPunct="0">
-              <a:spcBef>
-                <a:spcPts val="1417"/>
-              </a:spcBef>
-              <a:spcAft>
-                <a:spcPts val="0"/>
-              </a:spcAft>
-              <a:buSzPct val="45000"/>
-              <a:buFont typeface="OpenSymbol"/>
-              <a:buChar char="●"/>
-              <a:tabLst/>
-              <a:defRPr lang="en-US" sz="2400" b="0" i="0" u="none" strike="noStrike" kern="1200" cap="none">
-                <a:ln>
-                  <a:noFill/>
-                </a:ln>
-                <a:highlight>
-                  <a:scrgbClr r="0" g="0" b="0">
-                    <a:alpha val="0"/>
-                  </a:scrgbClr>
-                </a:highlight>
-                <a:latin typeface="URW Bookman" pitchFamily="2"/>
-                <a:ea typeface="Nimbus Sans" pitchFamily="2"/>
-                <a:cs typeface="FreeSans" pitchFamily="2"/>
-              </a:defRPr>
-            </a:lvl7pPr>
-            <a:lvl8pPr marL="3429000" indent="-228600" algn="l" defTabSz="914400" rtl="0" eaLnBrk="1" latinLnBrk="0" hangingPunct="1">
-              <a:lnSpc>
-                <a:spcPct val="90000"/>
-              </a:lnSpc>
-              <a:spcBef>
-                <a:spcPts val="500"/>
-              </a:spcBef>
-              <a:buFont typeface="Arial" panose="020B0604020202020204" pitchFamily="34" charset="0"/>
-              <a:buChar char="•"/>
-              <a:defRPr sz="1800" kern="1200">
-                <a:solidFill>
-                  <a:schemeClr val="tx1"/>
-                </a:solidFill>
-                <a:latin typeface="+mn-lt"/>
-                <a:ea typeface="+mn-ea"/>
-                <a:cs typeface="+mn-cs"/>
-              </a:defRPr>
-            </a:lvl8pPr>
-            <a:lvl9pPr marL="3886200" indent="-228600" algn="l" defTabSz="914400" rtl="0" eaLnBrk="1" latinLnBrk="0" hangingPunct="1">
-              <a:lnSpc>
-                <a:spcPct val="90000"/>
-              </a:lnSpc>
-              <a:spcBef>
-                <a:spcPts val="500"/>
-              </a:spcBef>
-              <a:buFont typeface="Arial" panose="020B0604020202020204" pitchFamily="34" charset="0"/>
-              <a:buChar char="•"/>
-              <a:defRPr sz="1800" kern="1200">
-                <a:solidFill>
-                  <a:schemeClr val="tx1"/>
-                </a:solidFill>
-                <a:latin typeface="+mn-lt"/>
-                <a:ea typeface="+mn-ea"/>
-                <a:cs typeface="+mn-cs"/>
-              </a:defRPr>
-            </a:lvl9pPr>
-          </a:lstStyle>
-          <a:p>
-            <a:pPr marL="342900" indent="-342900"/>
-            <a:r>
-              <a:rPr lang="en-US" dirty="0">
-                <a:solidFill>
-                  <a:schemeClr val="bg1"/>
-                </a:solidFill>
-              </a:rPr>
-              <a:t>Initial analysis was built on a few key assumptions. </a:t>
-            </a:r>
-          </a:p>
-          <a:p>
-            <a:pPr marL="342900" indent="-342900"/>
-            <a:r>
-              <a:rPr lang="en-US" dirty="0">
-                <a:solidFill>
-                  <a:schemeClr val="bg1"/>
-                </a:solidFill>
-              </a:rPr>
-              <a:t>First, that not all the constants had an effect on the model outputs. </a:t>
-            </a:r>
-          </a:p>
-          <a:p>
-            <a:pPr marL="342900" indent="-342900"/>
-            <a:r>
-              <a:rPr lang="en-US" dirty="0">
-                <a:solidFill>
-                  <a:schemeClr val="bg1"/>
-                </a:solidFill>
-              </a:rPr>
-              <a:t>Second, model constants did not influence what values other model constants could take.</a:t>
-            </a:r>
-          </a:p>
-          <a:p>
-            <a:pPr marL="342900" indent="-342900"/>
-            <a:r>
-              <a:rPr lang="en-US" dirty="0">
-                <a:solidFill>
-                  <a:schemeClr val="bg1"/>
-                </a:solidFill>
-              </a:rPr>
-              <a:t>Third, model constants’ effects on model outputs aren’t determined by preconditions being met. </a:t>
-            </a:r>
-          </a:p>
-          <a:p>
-            <a:pPr marL="342900" indent="-342900"/>
-            <a:r>
-              <a:rPr lang="en-US" dirty="0">
-                <a:solidFill>
-                  <a:schemeClr val="bg1"/>
-                </a:solidFill>
-              </a:rPr>
-              <a:t>These assumptions underlie the initial results from the change detection analysis plugin. </a:t>
-            </a:r>
-          </a:p>
-        </p:txBody>
-      </p:sp>
-    </p:spTree>
-    <p:extLst>
-      <p:ext uri="{BB962C8B-B14F-4D97-AF65-F5344CB8AC3E}">
-        <p14:creationId xmlns:p14="http://schemas.microsoft.com/office/powerpoint/2010/main" val="2898562490"/>
-      </p:ext>
-    </p:extLst>
-  </p:cSld>
-  <p:clrMapOvr>
-    <a:masterClrMapping/>
-  </p:clrMapOvr>
-</p:sld>
-</file>
-
-<file path=ppt/slides/slide30.xml><?xml version="1.0" encoding="utf-8"?>
+<file path=ppt/slides/slide33.xml><?xml version="1.0" encoding="utf-8"?>
 <p:sld xmlns:a="http://schemas.openxmlformats.org/drawingml/2006/main" xmlns:r="http://schemas.openxmlformats.org/officeDocument/2006/relationships" xmlns:p="http://schemas.openxmlformats.org/presentationml/2006/main">
   <p:cSld>
     <p:spTree>
@@ -14723,7 +15472,7 @@
           <p:nvPr>
             <p:extLst>
               <p:ext uri="{D42A27DB-BD31-4B8C-83A1-F6EECF244321}">
-                <p14:modId xmlns:p14="http://schemas.microsoft.com/office/powerpoint/2010/main" val="283549345"/>
+                <p14:modId xmlns:p14="http://schemas.microsoft.com/office/powerpoint/2010/main" val="230448637"/>
               </p:ext>
             </p:extLst>
           </p:nvPr>
@@ -15117,7 +15866,7 @@
                       </a:pPr>
                       <a:r>
                         <a:rPr lang="en-US" dirty="0"/>
-                        <a:t>- days, --:--:--</a:t>
+                        <a:t>- days, --:--:--*</a:t>
                       </a:r>
                     </a:p>
                   </a:txBody>
@@ -15185,7 +15934,7 @@
                   <a:schemeClr val="bg1"/>
                 </a:solidFill>
               </a:rPr>
-              <a:t> is 0.622 seconds, with a standard deviation of 0.030. This time is used to estimate how long testing each interaction level would take, assuming tests run sequentially.</a:t>
+              <a:t> (for 35 time steps) is 0.622 seconds, with a standard deviation of 0.030. This time is used to estimate how long testing each interaction level would take, assuming tests run sequentially.</a:t>
             </a:r>
           </a:p>
           <a:p>
@@ -15202,7 +15951,7 @@
                   <a:schemeClr val="bg1"/>
                 </a:solidFill>
               </a:rPr>
-              <a:t>*Large test cases haven’t been executed yet</a:t>
+              <a:t>*Large test cases haven’t been executed yet.</a:t>
             </a:r>
           </a:p>
         </p:txBody>
@@ -15220,7 +15969,7 @@
 </p:sld>
 </file>
 
-<file path=ppt/slides/slide31.xml><?xml version="1.0" encoding="utf-8"?>
+<file path=ppt/slides/slide34.xml><?xml version="1.0" encoding="utf-8"?>
 <p:sld xmlns:a="http://schemas.openxmlformats.org/drawingml/2006/main" xmlns:r="http://schemas.openxmlformats.org/officeDocument/2006/relationships" xmlns:p="http://schemas.openxmlformats.org/presentationml/2006/main">
   <p:cSld>
     <p:spTree>
@@ -15324,7 +16073,7 @@
           <p:nvPr>
             <p:extLst>
               <p:ext uri="{D42A27DB-BD31-4B8C-83A1-F6EECF244321}">
-                <p14:modId xmlns:p14="http://schemas.microsoft.com/office/powerpoint/2010/main" val="969421491"/>
+                <p14:modId xmlns:p14="http://schemas.microsoft.com/office/powerpoint/2010/main" val="3139854734"/>
               </p:ext>
             </p:extLst>
           </p:nvPr>
@@ -15747,7 +16496,7 @@
 </p:sld>
 </file>
 
-<file path=ppt/slides/slide32.xml><?xml version="1.0" encoding="utf-8"?>
+<file path=ppt/slides/slide35.xml><?xml version="1.0" encoding="utf-8"?>
 <p:sld xmlns:a="http://schemas.openxmlformats.org/drawingml/2006/main" xmlns:r="http://schemas.openxmlformats.org/officeDocument/2006/relationships" xmlns:p="http://schemas.openxmlformats.org/presentationml/2006/main">
   <p:cSld>
     <p:spTree>
@@ -16284,7 +17033,7 @@
 </p:sld>
 </file>
 
-<file path=ppt/slides/slide33.xml><?xml version="1.0" encoding="utf-8"?>
+<file path=ppt/slides/slide36.xml><?xml version="1.0" encoding="utf-8"?>
 <p:sld xmlns:a="http://schemas.openxmlformats.org/drawingml/2006/main" xmlns:r="http://schemas.openxmlformats.org/officeDocument/2006/relationships" xmlns:p="http://schemas.openxmlformats.org/presentationml/2006/main">
   <p:cSld>
     <p:spTree>
@@ -16322,7 +17071,7 @@
         <p:spPr>
           <a:xfrm>
             <a:off x="503999" y="1357947"/>
-            <a:ext cx="9071640" cy="1477328"/>
+            <a:ext cx="9071640" cy="2308324"/>
           </a:xfrm>
           <a:prstGeom prst="rect">
             <a:avLst/>
@@ -16341,7 +17090,7 @@
                   <a:schemeClr val="bg1"/>
                 </a:solidFill>
               </a:rPr>
-              <a:t>The estimated execution time for cases with some constants uses the same mean </a:t>
+              <a:t>The estimated execution times for cases with some constants use the same mean </a:t>
             </a:r>
             <a:r>
               <a:rPr lang="en-US" dirty="0" err="1">
@@ -16359,7 +17108,7 @@
                   <a:schemeClr val="bg1"/>
                 </a:solidFill>
               </a:rPr>
-              <a:t> time as the estimated execution time for cases with all constants.</a:t>
+              <a:t> time as the estimated execution times for cases with all constants.</a:t>
             </a:r>
           </a:p>
           <a:p>
@@ -16376,8 +17125,32 @@
                   <a:schemeClr val="bg1"/>
                 </a:solidFill>
               </a:rPr>
-              <a:t>*Combinatorial cases with some constants excludes the constants originally believed to have no effect on model output.</a:t>
-            </a:r>
+              <a:t>*Combinatorial cases with some constants exclude the constants originally believed to have no effect on model outputs (following the change detection analysis).</a:t>
+            </a:r>
+          </a:p>
+          <a:p>
+            <a:endParaRPr lang="en-US" dirty="0">
+              <a:solidFill>
+                <a:schemeClr val="bg1"/>
+              </a:solidFill>
+            </a:endParaRPr>
+          </a:p>
+          <a:p>
+            <a:r>
+              <a:rPr lang="en-US" dirty="0">
+                <a:solidFill>
+                  <a:schemeClr val="bg1"/>
+                </a:solidFill>
+              </a:rPr>
+              <a:t>**Large test cases haven’t been executed yet.</a:t>
+            </a:r>
+          </a:p>
+          <a:p>
+            <a:endParaRPr lang="en-US" dirty="0">
+              <a:solidFill>
+                <a:schemeClr val="bg1"/>
+              </a:solidFill>
+            </a:endParaRPr>
           </a:p>
         </p:txBody>
       </p:sp>
@@ -16396,13 +17169,13 @@
           <p:nvPr>
             <p:extLst>
               <p:ext uri="{D42A27DB-BD31-4B8C-83A1-F6EECF244321}">
-                <p14:modId xmlns:p14="http://schemas.microsoft.com/office/powerpoint/2010/main" val="1158308052"/>
+                <p14:modId xmlns:p14="http://schemas.microsoft.com/office/powerpoint/2010/main" val="4218115327"/>
               </p:ext>
             </p:extLst>
           </p:nvPr>
         </p:nvGraphicFramePr>
         <p:xfrm>
-          <a:off x="1286632" y="3061844"/>
+          <a:off x="1286632" y="3523400"/>
           <a:ext cx="7506373" cy="1849120"/>
         </p:xfrm>
         <a:graphic>
@@ -16714,7 +17487,7 @@
                     <a:p>
                       <a:r>
                         <a:rPr lang="en-US" dirty="0"/>
-                        <a:t>- days, --:--:--</a:t>
+                        <a:t>- days, --:--:--**</a:t>
                       </a:r>
                     </a:p>
                   </a:txBody>
@@ -16790,7 +17563,7 @@
                       </a:pPr>
                       <a:r>
                         <a:rPr lang="en-US" dirty="0"/>
-                        <a:t>- days, --:--:--</a:t>
+                        <a:t>- days, --:--:--**</a:t>
                       </a:r>
                     </a:p>
                   </a:txBody>
@@ -16891,7 +17664,7 @@
 </p:sld>
 </file>
 
-<file path=ppt/slides/slide34.xml><?xml version="1.0" encoding="utf-8"?>
+<file path=ppt/slides/slide37.xml><?xml version="1.0" encoding="utf-8"?>
 <p:sld xmlns:a="http://schemas.openxmlformats.org/drawingml/2006/main" xmlns:r="http://schemas.openxmlformats.org/officeDocument/2006/relationships" xmlns:p="http://schemas.openxmlformats.org/presentationml/2006/main">
   <p:cSld>
     <p:spTree>
@@ -17424,7 +18197,7 @@
 </p:sld>
 </file>
 
-<file path=ppt/slides/slide35.xml><?xml version="1.0" encoding="utf-8"?>
+<file path=ppt/slides/slide38.xml><?xml version="1.0" encoding="utf-8"?>
 <p:sld xmlns:a="http://schemas.openxmlformats.org/drawingml/2006/main" xmlns:r="http://schemas.openxmlformats.org/officeDocument/2006/relationships" xmlns:p="http://schemas.openxmlformats.org/presentationml/2006/main">
   <p:cSld>
     <p:spTree>
@@ -17967,7 +18740,7 @@
 </p:sld>
 </file>
 
-<file path=ppt/slides/slide36.xml><?xml version="1.0" encoding="utf-8"?>
+<file path=ppt/slides/slide39.xml><?xml version="1.0" encoding="utf-8"?>
 <p:sld xmlns:a="http://schemas.openxmlformats.org/drawingml/2006/main" xmlns:r="http://schemas.openxmlformats.org/officeDocument/2006/relationships" xmlns:p="http://schemas.openxmlformats.org/presentationml/2006/main">
   <p:cSld name="page7">
     <p:spTree>
@@ -18060,7 +18833,7 @@
                 </a:solidFill>
                 <a:latin typeface="AppleSystemUIFont" pitchFamily="2"/>
               </a:rPr>
-              <a:t>Degree of Interaction (DOI) 2 results in 133 test cases when only changing the values of constants known to affect the outputs of </a:t>
+              <a:t>Degree of Interaction (DOI) 2 results in 231 test cases when only changing the values of constants known to affect the outputs of </a:t>
             </a:r>
             <a:r>
               <a:rPr lang="en-US" dirty="0" err="1">
@@ -18139,7 +18912,138 @@
 </p:sld>
 </file>
 
-<file path=ppt/slides/slide37.xml><?xml version="1.0" encoding="utf-8"?>
+<file path=ppt/slides/slide4.xml><?xml version="1.0" encoding="utf-8"?>
+<p:sld xmlns:a="http://schemas.openxmlformats.org/drawingml/2006/main" xmlns:r="http://schemas.openxmlformats.org/officeDocument/2006/relationships" xmlns:p="http://schemas.openxmlformats.org/presentationml/2006/main">
+  <p:cSld>
+    <p:spTree>
+      <p:nvGrpSpPr>
+        <p:cNvPr id="1" name="">
+          <a:extLst>
+            <a:ext uri="{FF2B5EF4-FFF2-40B4-BE49-F238E27FC236}">
+              <a16:creationId xmlns:a16="http://schemas.microsoft.com/office/drawing/2014/main" id="{4E5DEF85-FAA0-A884-49E4-D90F71A30E97}"/>
+            </a:ext>
+          </a:extLst>
+        </p:cNvPr>
+        <p:cNvGrpSpPr/>
+        <p:nvPr/>
+      </p:nvGrpSpPr>
+      <p:grpSpPr>
+        <a:xfrm>
+          <a:off x="0" y="0"/>
+          <a:ext cx="0" cy="0"/>
+          <a:chOff x="0" y="0"/>
+          <a:chExt cx="0" cy="0"/>
+        </a:xfrm>
+      </p:grpSpPr>
+      <p:sp>
+        <p:nvSpPr>
+          <p:cNvPr id="2" name="Title 1">
+            <a:extLst>
+              <a:ext uri="{FF2B5EF4-FFF2-40B4-BE49-F238E27FC236}">
+                <a16:creationId xmlns:a16="http://schemas.microsoft.com/office/drawing/2014/main" id="{2D635B58-763E-B189-503F-B8A6AECE0C14}"/>
+              </a:ext>
+            </a:extLst>
+          </p:cNvPr>
+          <p:cNvSpPr txBox="1">
+            <a:spLocks noGrp="1"/>
+          </p:cNvSpPr>
+          <p:nvPr>
+            <p:ph type="title" idx="4294967295"/>
+          </p:nvPr>
+        </p:nvSpPr>
+        <p:spPr>
+          <a:xfrm>
+            <a:off x="503999" y="422301"/>
+            <a:ext cx="9071640" cy="553998"/>
+          </a:xfrm>
+        </p:spPr>
+        <p:txBody>
+          <a:bodyPr>
+            <a:spAutoFit/>
+          </a:bodyPr>
+          <a:lstStyle/>
+          <a:p>
+            <a:pPr lvl="0"/>
+            <a:r>
+              <a:rPr lang="en-US" dirty="0">
+                <a:solidFill>
+                  <a:schemeClr val="bg1"/>
+                </a:solidFill>
+              </a:rPr>
+              <a:t>Change Detection Analysis</a:t>
+            </a:r>
+          </a:p>
+        </p:txBody>
+      </p:sp>
+      <p:sp>
+        <p:nvSpPr>
+          <p:cNvPr id="3" name="Text Placeholder 2">
+            <a:extLst>
+              <a:ext uri="{FF2B5EF4-FFF2-40B4-BE49-F238E27FC236}">
+                <a16:creationId xmlns:a16="http://schemas.microsoft.com/office/drawing/2014/main" id="{25E00617-F975-DE3A-0675-236E19993C53}"/>
+              </a:ext>
+            </a:extLst>
+          </p:cNvPr>
+          <p:cNvSpPr txBox="1">
+            <a:spLocks noGrp="1"/>
+          </p:cNvSpPr>
+          <p:nvPr>
+            <p:ph type="body" idx="4294967295"/>
+          </p:nvPr>
+        </p:nvSpPr>
+        <p:spPr/>
+        <p:txBody>
+          <a:bodyPr/>
+          <a:lstStyle/>
+          <a:p>
+            <a:pPr marL="342900" indent="-342900"/>
+            <a:r>
+              <a:rPr lang="en-US" dirty="0">
+                <a:solidFill>
+                  <a:schemeClr val="bg1"/>
+                </a:solidFill>
+              </a:rPr>
+              <a:t>Change detection analysis seeks to find how changes to individual model constants affect model outputs. </a:t>
+            </a:r>
+          </a:p>
+          <a:p>
+            <a:pPr marL="342900" indent="-342900"/>
+            <a:r>
+              <a:rPr lang="en-US" dirty="0">
+                <a:solidFill>
+                  <a:schemeClr val="bg1"/>
+                </a:solidFill>
+              </a:rPr>
+              <a:t>It does this by changing a single model constant across its range of values while holding all other model constants at their default values.</a:t>
+            </a:r>
+          </a:p>
+          <a:p>
+            <a:pPr marL="342900" indent="-342900"/>
+            <a:r>
+              <a:rPr lang="en-US" dirty="0">
+                <a:solidFill>
+                  <a:schemeClr val="bg1"/>
+                </a:solidFill>
+              </a:rPr>
+              <a:t>Provides a simple form of qualitative analysis (one-constant-at-a-time) but misses interactions among constants and their joint effect on output changes</a:t>
+            </a:r>
+          </a:p>
+        </p:txBody>
+      </p:sp>
+    </p:spTree>
+    <p:extLst>
+      <p:ext uri="{BB962C8B-B14F-4D97-AF65-F5344CB8AC3E}">
+        <p14:creationId xmlns:p14="http://schemas.microsoft.com/office/powerpoint/2010/main" val="4249625218"/>
+      </p:ext>
+    </p:extLst>
+  </p:cSld>
+  <p:clrMapOvr>
+    <a:masterClrMapping/>
+  </p:clrMapOvr>
+</p:sld>
+</file>
+
+<file path=ppt/slides/slide40.xml><?xml version="1.0" encoding="utf-8"?>
 <p:sld xmlns:a="http://schemas.openxmlformats.org/drawingml/2006/main" xmlns:r="http://schemas.openxmlformats.org/officeDocument/2006/relationships" xmlns:p="http://schemas.openxmlformats.org/presentationml/2006/main">
   <p:cSld>
     <p:spTree>
@@ -18490,7 +19394,7 @@
                 </a:solidFill>
                 <a:latin typeface="AppleSystemUIFont" pitchFamily="2"/>
               </a:rPr>
-              <a:t> runs longer, we are more likely to run into issues with its design. </a:t>
+              <a:t> runs longer, we are more likely to expose issues with its design and/or implementation. </a:t>
             </a:r>
           </a:p>
           <a:p>
@@ -18551,7 +19455,8 @@
                 <a:solidFill>
                   <a:schemeClr val="bg1"/>
                 </a:solidFill>
-                <a:latin typeface="AppleSystemUIFont" pitchFamily="2"/>
+                <a:latin typeface="Courier New" panose="02070309020205020404" pitchFamily="49" charset="0"/>
+                <a:cs typeface="Courier New" panose="02070309020205020404" pitchFamily="49" charset="0"/>
               </a:rPr>
               <a:t>LakeTemperature</a:t>
             </a:r>
@@ -18574,7 +19479,7 @@
                 </a:solidFill>
                 <a:latin typeface="AppleSystemUIFont" pitchFamily="2"/>
               </a:rPr>
-              <a:t>A check outputs an error when it’s not able to run correctly. For example, if there was a syntax mistake. Errors point to a problem in our code. </a:t>
+              <a:t>A check outputs an error when it is unable to run correctly, e.g., if there was a syntax mistake. Errors point to bugs in our code that will be fixed prior to final testing. </a:t>
             </a:r>
           </a:p>
         </p:txBody>
@@ -18592,7 +19497,7 @@
 </p:sld>
 </file>
 
-<file path=ppt/slides/slide38.xml><?xml version="1.0" encoding="utf-8"?>
+<file path=ppt/slides/slide41.xml><?xml version="1.0" encoding="utf-8"?>
 <p:sld xmlns:a="http://schemas.openxmlformats.org/drawingml/2006/main" xmlns:r="http://schemas.openxmlformats.org/officeDocument/2006/relationships" xmlns:p="http://schemas.openxmlformats.org/presentationml/2006/main">
   <p:cSld>
     <p:spTree>
@@ -18988,7 +19893,7 @@
                 </a:solidFill>
                 <a:latin typeface="AppleSystemUIFont" pitchFamily="2"/>
               </a:rPr>
-              <a:t>We did not run these since running DOI 2 helped us find problems in our checks that we needed to fix before re-running the test cases and getting final results. </a:t>
+              <a:t>We did not run these since running DOI 2 helped us find problems in our checks that we needed to fix before re-running the test cases and getting meaningful results. </a:t>
             </a:r>
           </a:p>
           <a:p>
@@ -19029,7 +19934,7 @@
 </p:sld>
 </file>
 
-<file path=ppt/slides/slide39.xml><?xml version="1.0" encoding="utf-8"?>
+<file path=ppt/slides/slide42.xml><?xml version="1.0" encoding="utf-8"?>
 <p:sld xmlns:a="http://schemas.openxmlformats.org/drawingml/2006/main" xmlns:r="http://schemas.openxmlformats.org/officeDocument/2006/relationships" xmlns:p="http://schemas.openxmlformats.org/presentationml/2006/main">
   <p:cSld name="page10">
     <p:spTree>
@@ -19081,7 +19986,7 @@
                   <a:schemeClr val="bg1"/>
                 </a:solidFill>
               </a:rPr>
-              <a:t>Improvements to Testing Framework</a:t>
+              <a:t>Improvements to the Testing Framework</a:t>
             </a:r>
           </a:p>
         </p:txBody>
@@ -19110,7 +20015,7 @@
         </p:spPr>
         <p:txBody>
           <a:bodyPr>
-            <a:normAutofit fontScale="92500" lnSpcReduction="10000"/>
+            <a:normAutofit/>
           </a:bodyPr>
           <a:lstStyle/>
           <a:p>
@@ -19132,7 +20037,7 @@
                   <a:schemeClr val="bg1"/>
                 </a:solidFill>
               </a:rPr>
-              <a:t>Some checks were implemented incorrectly and had to be fixed. </a:t>
+              <a:t>Some checks were implemented incorrectly, which were fixed. </a:t>
             </a:r>
           </a:p>
           <a:p>
@@ -19143,50 +20048,7 @@
                   <a:schemeClr val="bg1"/>
                 </a:solidFill>
               </a:rPr>
-              <a:t>For example, </a:t>
-            </a:r>
-            <a:r>
-              <a:rPr lang="en-US" dirty="0" err="1">
-                <a:solidFill>
-                  <a:schemeClr val="bg1"/>
-                </a:solidFill>
-              </a:rPr>
-              <a:t>physics_check</a:t>
-            </a:r>
-            <a:r>
-              <a:rPr lang="en-US" dirty="0">
-                <a:solidFill>
-                  <a:schemeClr val="bg1"/>
-                </a:solidFill>
-              </a:rPr>
-              <a:t>. </a:t>
-            </a:r>
-            <a:r>
-              <a:rPr lang="en-US" dirty="0" err="1">
-                <a:solidFill>
-                  <a:schemeClr val="bg1"/>
-                </a:solidFill>
-              </a:rPr>
-              <a:t>check_temp_around_freezing_where_lake_is_almost_frozen</a:t>
-            </a:r>
-            <a:r>
-              <a:rPr lang="en-US" dirty="0">
-                <a:solidFill>
-                  <a:schemeClr val="bg1"/>
-                </a:solidFill>
-              </a:rPr>
-              <a:t> originally checked to make sure the difference between the freezing temperature and a model output was close to zero but it was supposed to check that the absolute value of the difference was close to zero so that it did not ignore large negative values. </a:t>
-            </a:r>
-          </a:p>
-          <a:p>
-            <a:pPr marL="342900" indent="-342900"/>
-            <a:r>
-              <a:rPr lang="en-US" dirty="0">
-                <a:solidFill>
-                  <a:schemeClr val="bg1"/>
-                </a:solidFill>
-              </a:rPr>
-              <a:t>Tests checking for things other than non-finite values had to ignore non-finite values, otherwise they’d fail and output an inaccurate error message.</a:t>
+              <a:t>For example, tests checking for things other than non-finite values had to ignore non-finite values, otherwise they would fail and output an inaccurate error message.</a:t>
             </a:r>
           </a:p>
           <a:p>
@@ -19212,7 +20074,711 @@
 </p:sld>
 </file>
 
-<file path=ppt/slides/slide4.xml><?xml version="1.0" encoding="utf-8"?>
+<file path=ppt/slides/slide43.xml><?xml version="1.0" encoding="utf-8"?>
+<p:sld xmlns:a="http://schemas.openxmlformats.org/drawingml/2006/main" xmlns:r="http://schemas.openxmlformats.org/officeDocument/2006/relationships" xmlns:p="http://schemas.openxmlformats.org/presentationml/2006/main">
+  <p:cSld>
+    <p:spTree>
+      <p:nvGrpSpPr>
+        <p:cNvPr id="1" name=""/>
+        <p:cNvGrpSpPr/>
+        <p:nvPr/>
+      </p:nvGrpSpPr>
+      <p:grpSpPr>
+        <a:xfrm>
+          <a:off x="0" y="0"/>
+          <a:ext cx="0" cy="0"/>
+          <a:chOff x="0" y="0"/>
+          <a:chExt cx="0" cy="0"/>
+        </a:xfrm>
+      </p:grpSpPr>
+      <p:sp>
+        <p:nvSpPr>
+          <p:cNvPr id="3" name="TextBox 2">
+            <a:extLst>
+              <a:ext uri="{FF2B5EF4-FFF2-40B4-BE49-F238E27FC236}">
+                <a16:creationId xmlns:a16="http://schemas.microsoft.com/office/drawing/2014/main" id="{1591456F-C241-4A18-AF77-96529210B7FC}"/>
+              </a:ext>
+            </a:extLst>
+          </p:cNvPr>
+          <p:cNvSpPr txBox="1"/>
+          <p:nvPr/>
+        </p:nvSpPr>
+        <p:spPr>
+          <a:xfrm>
+            <a:off x="503999" y="1628071"/>
+            <a:ext cx="9071640" cy="3477875"/>
+          </a:xfrm>
+          <a:prstGeom prst="rect">
+            <a:avLst/>
+          </a:prstGeom>
+          <a:noFill/>
+        </p:spPr>
+        <p:txBody>
+          <a:bodyPr wrap="square">
+            <a:spAutoFit/>
+          </a:bodyPr>
+          <a:lstStyle/>
+          <a:p>
+            <a:pPr marL="342900" indent="-342900">
+              <a:buFont typeface="Arial" panose="020B0604020202020204" pitchFamily="34" charset="0"/>
+              <a:buChar char="•"/>
+            </a:pPr>
+            <a:r>
+              <a:rPr lang="en-US" sz="2200" dirty="0">
+                <a:solidFill>
+                  <a:schemeClr val="bg1"/>
+                </a:solidFill>
+              </a:rPr>
+              <a:t>SPEL</a:t>
+            </a:r>
+            <a:r>
+              <a:rPr lang="en-US" sz="2200" i="1" dirty="0">
+                <a:solidFill>
+                  <a:schemeClr val="bg1"/>
+                </a:solidFill>
+              </a:rPr>
+              <a:t> </a:t>
+            </a:r>
+            <a:r>
+              <a:rPr lang="en-US" sz="2200" dirty="0">
+                <a:solidFill>
+                  <a:schemeClr val="bg1"/>
+                </a:solidFill>
+              </a:rPr>
+              <a:t>might be initializing data with </a:t>
+            </a:r>
+            <a:r>
+              <a:rPr lang="en-US" sz="2200" dirty="0" err="1">
+                <a:solidFill>
+                  <a:schemeClr val="bg1"/>
+                </a:solidFill>
+              </a:rPr>
+              <a:t>NaN</a:t>
+            </a:r>
+            <a:r>
+              <a:rPr lang="en-US" sz="2200" dirty="0">
+                <a:solidFill>
+                  <a:schemeClr val="bg1"/>
+                </a:solidFill>
+              </a:rPr>
+              <a:t> values that </a:t>
+            </a:r>
+            <a:r>
+              <a:rPr lang="en-US" sz="2200" dirty="0" err="1">
+                <a:solidFill>
+                  <a:schemeClr val="bg1"/>
+                </a:solidFill>
+                <a:latin typeface="Courier New" panose="02070309020205020404" pitchFamily="49" charset="0"/>
+                <a:cs typeface="Courier New" panose="02070309020205020404" pitchFamily="49" charset="0"/>
+              </a:rPr>
+              <a:t>LakeTemperature</a:t>
+            </a:r>
+            <a:r>
+              <a:rPr lang="en-US" sz="2200" dirty="0">
+                <a:solidFill>
+                  <a:schemeClr val="bg1"/>
+                </a:solidFill>
+              </a:rPr>
+              <a:t> then never overwrites or </a:t>
+            </a:r>
+            <a:r>
+              <a:rPr lang="en-US" sz="2200" dirty="0" err="1">
+                <a:solidFill>
+                  <a:schemeClr val="bg1"/>
+                </a:solidFill>
+                <a:latin typeface="Courier New" panose="02070309020205020404" pitchFamily="49" charset="0"/>
+                <a:cs typeface="Courier New" panose="02070309020205020404" pitchFamily="49" charset="0"/>
+              </a:rPr>
+              <a:t>LakeTemperature</a:t>
+            </a:r>
+            <a:r>
+              <a:rPr lang="en-US" sz="2200" dirty="0">
+                <a:solidFill>
+                  <a:schemeClr val="bg1"/>
+                </a:solidFill>
+              </a:rPr>
+              <a:t> might be outputting data with </a:t>
+            </a:r>
+            <a:r>
+              <a:rPr lang="en-US" sz="2200" dirty="0" err="1">
+                <a:solidFill>
+                  <a:schemeClr val="bg1"/>
+                </a:solidFill>
+              </a:rPr>
+              <a:t>NaN</a:t>
+            </a:r>
+            <a:r>
+              <a:rPr lang="en-US" sz="2200" dirty="0">
+                <a:solidFill>
+                  <a:schemeClr val="bg1"/>
+                </a:solidFill>
+              </a:rPr>
+              <a:t> values. Currently …/231 combinatorial cases with all constants have at least one model output with </a:t>
+            </a:r>
+            <a:r>
+              <a:rPr lang="en-US" sz="2200" dirty="0" err="1">
+                <a:solidFill>
+                  <a:schemeClr val="bg1"/>
+                </a:solidFill>
+              </a:rPr>
+              <a:t>NaN</a:t>
+            </a:r>
+            <a:r>
+              <a:rPr lang="en-US" sz="2200" dirty="0">
+                <a:solidFill>
+                  <a:schemeClr val="bg1"/>
+                </a:solidFill>
+              </a:rPr>
+              <a:t> values and …/231 combinatorial cases with some constants have at least one model output with </a:t>
+            </a:r>
+            <a:r>
+              <a:rPr lang="en-US" sz="2200" dirty="0" err="1">
+                <a:solidFill>
+                  <a:schemeClr val="bg1"/>
+                </a:solidFill>
+              </a:rPr>
+              <a:t>NaN</a:t>
+            </a:r>
+            <a:r>
+              <a:rPr lang="en-US" sz="2200" dirty="0">
+                <a:solidFill>
+                  <a:schemeClr val="bg1"/>
+                </a:solidFill>
+              </a:rPr>
+              <a:t> values. </a:t>
+            </a:r>
+            <a:endParaRPr lang="en-US" sz="2200" i="1" dirty="0">
+              <a:solidFill>
+                <a:schemeClr val="bg1"/>
+              </a:solidFill>
+            </a:endParaRPr>
+          </a:p>
+          <a:p>
+            <a:pPr marL="342900" indent="-342900">
+              <a:buFont typeface="Arial" panose="020B0604020202020204" pitchFamily="34" charset="0"/>
+              <a:buChar char="•"/>
+            </a:pPr>
+            <a:r>
+              <a:rPr lang="en-US" sz="2200" dirty="0">
+                <a:solidFill>
+                  <a:schemeClr val="bg1"/>
+                </a:solidFill>
+              </a:rPr>
+              <a:t>Largely, </a:t>
+            </a:r>
+            <a:r>
+              <a:rPr lang="en-US" sz="2200" dirty="0" err="1">
+                <a:solidFill>
+                  <a:schemeClr val="bg1"/>
+                </a:solidFill>
+                <a:latin typeface="Courier New" panose="02070309020205020404" pitchFamily="49" charset="0"/>
+                <a:cs typeface="Courier New" panose="02070309020205020404" pitchFamily="49" charset="0"/>
+              </a:rPr>
+              <a:t>LakeTemperature</a:t>
+            </a:r>
+            <a:r>
+              <a:rPr lang="en-US" sz="2200" dirty="0">
+                <a:solidFill>
+                  <a:schemeClr val="bg1"/>
+                </a:solidFill>
+              </a:rPr>
+              <a:t> output data appeared valid and within physical bounds. However, some cases resulted in physically impossible outputs, likely due </a:t>
+            </a:r>
+            <a:r>
+              <a:rPr lang="en-US" sz="2200">
+                <a:solidFill>
+                  <a:schemeClr val="bg1"/>
+                </a:solidFill>
+              </a:rPr>
+              <a:t>to the interactions </a:t>
+            </a:r>
+            <a:r>
+              <a:rPr lang="en-US" sz="2200" dirty="0">
+                <a:solidFill>
+                  <a:schemeClr val="bg1"/>
+                </a:solidFill>
+              </a:rPr>
+              <a:t>between model constants. </a:t>
+            </a:r>
+            <a:endParaRPr lang="en-US" sz="2200" dirty="0"/>
+          </a:p>
+        </p:txBody>
+      </p:sp>
+      <p:sp>
+        <p:nvSpPr>
+          <p:cNvPr id="4" name="Title 1">
+            <a:extLst>
+              <a:ext uri="{FF2B5EF4-FFF2-40B4-BE49-F238E27FC236}">
+                <a16:creationId xmlns:a16="http://schemas.microsoft.com/office/drawing/2014/main" id="{294AD037-E0F3-F70A-78F8-5E2E7D139116}"/>
+              </a:ext>
+            </a:extLst>
+          </p:cNvPr>
+          <p:cNvSpPr txBox="1">
+            <a:spLocks/>
+          </p:cNvSpPr>
+          <p:nvPr/>
+        </p:nvSpPr>
+        <p:spPr>
+          <a:xfrm>
+            <a:off x="503999" y="422301"/>
+            <a:ext cx="9071640" cy="553998"/>
+          </a:xfrm>
+          <a:prstGeom prst="rect">
+            <a:avLst/>
+          </a:prstGeom>
+          <a:noFill/>
+          <a:ln>
+            <a:noFill/>
+          </a:ln>
+        </p:spPr>
+        <p:txBody>
+          <a:bodyPr vert="horz" lIns="0" tIns="0" rIns="0" bIns="0" anchor="ctr">
+            <a:spAutoFit/>
+          </a:bodyPr>
+          <a:lstStyle>
+            <a:lvl1pPr lvl="0" algn="ctr" rtl="0" hangingPunct="0">
+              <a:buNone/>
+              <a:tabLst/>
+              <a:defRPr lang="en-US" sz="3600" b="0" i="0" u="none" strike="noStrike" kern="1200" cap="none">
+                <a:ln>
+                  <a:noFill/>
+                </a:ln>
+                <a:highlight>
+                  <a:scrgbClr r="0" g="0" b="0">
+                    <a:alpha val="0"/>
+                  </a:scrgbClr>
+                </a:highlight>
+                <a:latin typeface="URW Bookman" pitchFamily="2"/>
+                <a:ea typeface="Nimbus Sans" pitchFamily="2"/>
+                <a:cs typeface="FreeSans" pitchFamily="2"/>
+              </a:defRPr>
+            </a:lvl1pPr>
+          </a:lstStyle>
+          <a:p>
+            <a:r>
+              <a:rPr lang="en-US" dirty="0">
+                <a:solidFill>
+                  <a:schemeClr val="bg1"/>
+                </a:solidFill>
+              </a:rPr>
+              <a:t>Findings from Preliminary Testing</a:t>
+            </a:r>
+          </a:p>
+        </p:txBody>
+      </p:sp>
+    </p:spTree>
+    <p:extLst>
+      <p:ext uri="{BB962C8B-B14F-4D97-AF65-F5344CB8AC3E}">
+        <p14:creationId xmlns:p14="http://schemas.microsoft.com/office/powerpoint/2010/main" val="1486384677"/>
+      </p:ext>
+    </p:extLst>
+  </p:cSld>
+  <p:clrMapOvr>
+    <a:masterClrMapping/>
+  </p:clrMapOvr>
+</p:sld>
+</file>
+
+<file path=ppt/slides/slide5.xml><?xml version="1.0" encoding="utf-8"?>
+<p:sld xmlns:a="http://schemas.openxmlformats.org/drawingml/2006/main" xmlns:r="http://schemas.openxmlformats.org/officeDocument/2006/relationships" xmlns:p="http://schemas.openxmlformats.org/presentationml/2006/main">
+  <p:cSld>
+    <p:spTree>
+      <p:nvGrpSpPr>
+        <p:cNvPr id="1" name="">
+          <a:extLst>
+            <a:ext uri="{FF2B5EF4-FFF2-40B4-BE49-F238E27FC236}">
+              <a16:creationId xmlns:a16="http://schemas.microsoft.com/office/drawing/2014/main" id="{ED31208B-2A05-1B86-73F0-EB143D2555E8}"/>
+            </a:ext>
+          </a:extLst>
+        </p:cNvPr>
+        <p:cNvGrpSpPr/>
+        <p:nvPr/>
+      </p:nvGrpSpPr>
+      <p:grpSpPr>
+        <a:xfrm>
+          <a:off x="0" y="0"/>
+          <a:ext cx="0" cy="0"/>
+          <a:chOff x="0" y="0"/>
+          <a:chExt cx="0" cy="0"/>
+        </a:xfrm>
+      </p:grpSpPr>
+      <p:sp>
+        <p:nvSpPr>
+          <p:cNvPr id="2" name="Title 1">
+            <a:extLst>
+              <a:ext uri="{FF2B5EF4-FFF2-40B4-BE49-F238E27FC236}">
+                <a16:creationId xmlns:a16="http://schemas.microsoft.com/office/drawing/2014/main" id="{8E7FE489-9349-DA38-F1AB-F4D40E20FA18}"/>
+              </a:ext>
+            </a:extLst>
+          </p:cNvPr>
+          <p:cNvSpPr txBox="1">
+            <a:spLocks/>
+          </p:cNvSpPr>
+          <p:nvPr/>
+        </p:nvSpPr>
+        <p:spPr>
+          <a:xfrm>
+            <a:off x="503999" y="422301"/>
+            <a:ext cx="9071640" cy="553998"/>
+          </a:xfrm>
+          <a:prstGeom prst="rect">
+            <a:avLst/>
+          </a:prstGeom>
+          <a:noFill/>
+          <a:ln>
+            <a:noFill/>
+          </a:ln>
+        </p:spPr>
+        <p:txBody>
+          <a:bodyPr vert="horz" lIns="0" tIns="0" rIns="0" bIns="0" anchor="ctr">
+            <a:spAutoFit/>
+          </a:bodyPr>
+          <a:lstStyle>
+            <a:lvl1pPr lvl="0" algn="ctr" rtl="0" hangingPunct="0">
+              <a:buNone/>
+              <a:tabLst/>
+              <a:defRPr lang="en-US" sz="3600" b="0" i="0" u="none" strike="noStrike" kern="1200" cap="none">
+                <a:ln>
+                  <a:noFill/>
+                </a:ln>
+                <a:highlight>
+                  <a:scrgbClr r="0" g="0" b="0">
+                    <a:alpha val="0"/>
+                  </a:scrgbClr>
+                </a:highlight>
+                <a:latin typeface="URW Bookman" pitchFamily="2"/>
+                <a:ea typeface="Nimbus Sans" pitchFamily="2"/>
+                <a:cs typeface="FreeSans" pitchFamily="2"/>
+              </a:defRPr>
+            </a:lvl1pPr>
+          </a:lstStyle>
+          <a:p>
+            <a:r>
+              <a:rPr lang="en-US" dirty="0">
+                <a:solidFill>
+                  <a:schemeClr val="bg1"/>
+                </a:solidFill>
+              </a:rPr>
+              <a:t>Assumptions</a:t>
+            </a:r>
+          </a:p>
+        </p:txBody>
+      </p:sp>
+      <p:sp>
+        <p:nvSpPr>
+          <p:cNvPr id="3" name="Text Placeholder 2">
+            <a:extLst>
+              <a:ext uri="{FF2B5EF4-FFF2-40B4-BE49-F238E27FC236}">
+                <a16:creationId xmlns:a16="http://schemas.microsoft.com/office/drawing/2014/main" id="{1758AE0D-3928-68B2-851F-3466DEF4D1CE}"/>
+              </a:ext>
+            </a:extLst>
+          </p:cNvPr>
+          <p:cNvSpPr txBox="1">
+            <a:spLocks/>
+          </p:cNvSpPr>
+          <p:nvPr/>
+        </p:nvSpPr>
+        <p:spPr>
+          <a:xfrm>
+            <a:off x="503999" y="1326600"/>
+            <a:ext cx="9071640" cy="4022640"/>
+          </a:xfrm>
+          <a:prstGeom prst="rect">
+            <a:avLst/>
+          </a:prstGeom>
+          <a:noFill/>
+          <a:ln>
+            <a:noFill/>
+          </a:ln>
+        </p:spPr>
+        <p:txBody>
+          <a:bodyPr vert="horz" lIns="0" tIns="0" rIns="0" bIns="0">
+            <a:normAutofit/>
+          </a:bodyPr>
+          <a:lstStyle>
+            <a:lvl1pPr lvl="0" rtl="0" hangingPunct="0">
+              <a:spcBef>
+                <a:spcPts val="1417"/>
+              </a:spcBef>
+              <a:spcAft>
+                <a:spcPts val="0"/>
+              </a:spcAft>
+              <a:buSzPct val="45000"/>
+              <a:buFont typeface="OpenSymbol"/>
+              <a:buChar char="●"/>
+              <a:tabLst/>
+              <a:defRPr lang="en-US" sz="2400" b="0" i="0" u="none" strike="noStrike" kern="1200" cap="none">
+                <a:ln>
+                  <a:noFill/>
+                </a:ln>
+                <a:highlight>
+                  <a:scrgbClr r="0" g="0" b="0">
+                    <a:alpha val="0"/>
+                  </a:scrgbClr>
+                </a:highlight>
+                <a:latin typeface="URW Bookman" pitchFamily="2"/>
+                <a:ea typeface="Nimbus Sans" pitchFamily="2"/>
+                <a:cs typeface="FreeSans" pitchFamily="2"/>
+              </a:defRPr>
+            </a:lvl1pPr>
+            <a:lvl2pPr lvl="1" rtl="0" hangingPunct="0">
+              <a:spcBef>
+                <a:spcPts val="1417"/>
+              </a:spcBef>
+              <a:spcAft>
+                <a:spcPts val="0"/>
+              </a:spcAft>
+              <a:buSzPct val="75000"/>
+              <a:buFont typeface="OpenSymbol"/>
+              <a:buChar char="–"/>
+              <a:tabLst/>
+              <a:defRPr lang="en-US" sz="2400" b="0" i="0" u="none" strike="noStrike" kern="1200" cap="none">
+                <a:ln>
+                  <a:noFill/>
+                </a:ln>
+                <a:highlight>
+                  <a:scrgbClr r="0" g="0" b="0">
+                    <a:alpha val="0"/>
+                  </a:scrgbClr>
+                </a:highlight>
+                <a:latin typeface="URW Bookman" pitchFamily="2"/>
+                <a:ea typeface="Nimbus Sans" pitchFamily="2"/>
+                <a:cs typeface="FreeSans" pitchFamily="2"/>
+              </a:defRPr>
+            </a:lvl2pPr>
+            <a:lvl3pPr lvl="2" rtl="0" hangingPunct="0">
+              <a:spcBef>
+                <a:spcPts val="1417"/>
+              </a:spcBef>
+              <a:spcAft>
+                <a:spcPts val="0"/>
+              </a:spcAft>
+              <a:buSzPct val="45000"/>
+              <a:buFont typeface="OpenSymbol"/>
+              <a:buChar char="●"/>
+              <a:tabLst/>
+              <a:defRPr lang="en-US" sz="2400" b="0" i="0" u="none" strike="noStrike" kern="1200" cap="none">
+                <a:ln>
+                  <a:noFill/>
+                </a:ln>
+                <a:highlight>
+                  <a:scrgbClr r="0" g="0" b="0">
+                    <a:alpha val="0"/>
+                  </a:scrgbClr>
+                </a:highlight>
+                <a:latin typeface="URW Bookman" pitchFamily="2"/>
+                <a:ea typeface="Nimbus Sans" pitchFamily="2"/>
+                <a:cs typeface="FreeSans" pitchFamily="2"/>
+              </a:defRPr>
+            </a:lvl3pPr>
+            <a:lvl4pPr lvl="3" rtl="0" hangingPunct="0">
+              <a:spcBef>
+                <a:spcPts val="1417"/>
+              </a:spcBef>
+              <a:spcAft>
+                <a:spcPts val="0"/>
+              </a:spcAft>
+              <a:buSzPct val="75000"/>
+              <a:buFont typeface="OpenSymbol"/>
+              <a:buChar char="–"/>
+              <a:tabLst/>
+              <a:defRPr lang="en-US" sz="2400" b="0" i="0" u="none" strike="noStrike" kern="1200" cap="none">
+                <a:ln>
+                  <a:noFill/>
+                </a:ln>
+                <a:highlight>
+                  <a:scrgbClr r="0" g="0" b="0">
+                    <a:alpha val="0"/>
+                  </a:scrgbClr>
+                </a:highlight>
+                <a:latin typeface="URW Bookman" pitchFamily="2"/>
+                <a:ea typeface="Nimbus Sans" pitchFamily="2"/>
+                <a:cs typeface="FreeSans" pitchFamily="2"/>
+              </a:defRPr>
+            </a:lvl4pPr>
+            <a:lvl5pPr lvl="4" rtl="0" hangingPunct="0">
+              <a:spcBef>
+                <a:spcPts val="1417"/>
+              </a:spcBef>
+              <a:spcAft>
+                <a:spcPts val="0"/>
+              </a:spcAft>
+              <a:buSzPct val="45000"/>
+              <a:buFont typeface="OpenSymbol"/>
+              <a:buChar char="●"/>
+              <a:tabLst/>
+              <a:defRPr lang="en-US" sz="2400" b="0" i="0" u="none" strike="noStrike" kern="1200" cap="none">
+                <a:ln>
+                  <a:noFill/>
+                </a:ln>
+                <a:highlight>
+                  <a:scrgbClr r="0" g="0" b="0">
+                    <a:alpha val="0"/>
+                  </a:scrgbClr>
+                </a:highlight>
+                <a:latin typeface="URW Bookman" pitchFamily="2"/>
+                <a:ea typeface="Nimbus Sans" pitchFamily="2"/>
+                <a:cs typeface="FreeSans" pitchFamily="2"/>
+              </a:defRPr>
+            </a:lvl5pPr>
+            <a:lvl6pPr lvl="5" rtl="0" hangingPunct="0">
+              <a:spcBef>
+                <a:spcPts val="1417"/>
+              </a:spcBef>
+              <a:spcAft>
+                <a:spcPts val="0"/>
+              </a:spcAft>
+              <a:buSzPct val="45000"/>
+              <a:buFont typeface="OpenSymbol"/>
+              <a:buChar char="●"/>
+              <a:tabLst/>
+              <a:defRPr lang="en-US" sz="2400" b="0" i="0" u="none" strike="noStrike" kern="1200" cap="none">
+                <a:ln>
+                  <a:noFill/>
+                </a:ln>
+                <a:highlight>
+                  <a:scrgbClr r="0" g="0" b="0">
+                    <a:alpha val="0"/>
+                  </a:scrgbClr>
+                </a:highlight>
+                <a:latin typeface="URW Bookman" pitchFamily="2"/>
+                <a:ea typeface="Nimbus Sans" pitchFamily="2"/>
+                <a:cs typeface="FreeSans" pitchFamily="2"/>
+              </a:defRPr>
+            </a:lvl6pPr>
+            <a:lvl7pPr lvl="6" rtl="0" hangingPunct="0">
+              <a:spcBef>
+                <a:spcPts val="1417"/>
+              </a:spcBef>
+              <a:spcAft>
+                <a:spcPts val="0"/>
+              </a:spcAft>
+              <a:buSzPct val="45000"/>
+              <a:buFont typeface="OpenSymbol"/>
+              <a:buChar char="●"/>
+              <a:tabLst/>
+              <a:defRPr lang="en-US" sz="2400" b="0" i="0" u="none" strike="noStrike" kern="1200" cap="none">
+                <a:ln>
+                  <a:noFill/>
+                </a:ln>
+                <a:highlight>
+                  <a:scrgbClr r="0" g="0" b="0">
+                    <a:alpha val="0"/>
+                  </a:scrgbClr>
+                </a:highlight>
+                <a:latin typeface="URW Bookman" pitchFamily="2"/>
+                <a:ea typeface="Nimbus Sans" pitchFamily="2"/>
+                <a:cs typeface="FreeSans" pitchFamily="2"/>
+              </a:defRPr>
+            </a:lvl7pPr>
+            <a:lvl8pPr marL="3429000" indent="-228600" algn="l" defTabSz="914400" rtl="0" eaLnBrk="1" latinLnBrk="0" hangingPunct="1">
+              <a:lnSpc>
+                <a:spcPct val="90000"/>
+              </a:lnSpc>
+              <a:spcBef>
+                <a:spcPts val="500"/>
+              </a:spcBef>
+              <a:buFont typeface="Arial" panose="020B0604020202020204" pitchFamily="34" charset="0"/>
+              <a:buChar char="•"/>
+              <a:defRPr sz="1800" kern="1200">
+                <a:solidFill>
+                  <a:schemeClr val="tx1"/>
+                </a:solidFill>
+                <a:latin typeface="+mn-lt"/>
+                <a:ea typeface="+mn-ea"/>
+                <a:cs typeface="+mn-cs"/>
+              </a:defRPr>
+            </a:lvl8pPr>
+            <a:lvl9pPr marL="3886200" indent="-228600" algn="l" defTabSz="914400" rtl="0" eaLnBrk="1" latinLnBrk="0" hangingPunct="1">
+              <a:lnSpc>
+                <a:spcPct val="90000"/>
+              </a:lnSpc>
+              <a:spcBef>
+                <a:spcPts val="500"/>
+              </a:spcBef>
+              <a:buFont typeface="Arial" panose="020B0604020202020204" pitchFamily="34" charset="0"/>
+              <a:buChar char="•"/>
+              <a:defRPr sz="1800" kern="1200">
+                <a:solidFill>
+                  <a:schemeClr val="tx1"/>
+                </a:solidFill>
+                <a:latin typeface="+mn-lt"/>
+                <a:ea typeface="+mn-ea"/>
+                <a:cs typeface="+mn-cs"/>
+              </a:defRPr>
+            </a:lvl9pPr>
+          </a:lstStyle>
+          <a:p>
+            <a:pPr marL="342900" indent="-342900"/>
+            <a:r>
+              <a:rPr lang="en-US" dirty="0">
+                <a:solidFill>
+                  <a:schemeClr val="bg1"/>
+                </a:solidFill>
+              </a:rPr>
+              <a:t>Initial analysis is built on a few key assumptions. </a:t>
+            </a:r>
+          </a:p>
+          <a:p>
+            <a:pPr marL="342900" indent="-342900"/>
+            <a:r>
+              <a:rPr lang="en-US" dirty="0">
+                <a:solidFill>
+                  <a:schemeClr val="bg1"/>
+                </a:solidFill>
+              </a:rPr>
+              <a:t>First, not all the constants have an effect on the model outputs. </a:t>
+            </a:r>
+          </a:p>
+          <a:p>
+            <a:pPr marL="342900" indent="-342900"/>
+            <a:r>
+              <a:rPr lang="en-US" dirty="0">
+                <a:solidFill>
+                  <a:schemeClr val="bg1"/>
+                </a:solidFill>
+              </a:rPr>
+              <a:t>Second, model constants do not influence what values other model constants could take.</a:t>
+            </a:r>
+          </a:p>
+          <a:p>
+            <a:pPr marL="342900" indent="-342900"/>
+            <a:r>
+              <a:rPr lang="en-US" dirty="0">
+                <a:solidFill>
+                  <a:schemeClr val="bg1"/>
+                </a:solidFill>
+              </a:rPr>
+              <a:t>Third, model constants’ effects on model outputs aren’t determined by preconditions being met. </a:t>
+            </a:r>
+          </a:p>
+          <a:p>
+            <a:pPr marL="342900" indent="-342900"/>
+            <a:r>
+              <a:rPr lang="en-US" dirty="0">
+                <a:solidFill>
+                  <a:schemeClr val="bg1"/>
+                </a:solidFill>
+              </a:rPr>
+              <a:t>These assumptions underlie the preliminary results from the change detection analysis plugin. </a:t>
+            </a:r>
+          </a:p>
+        </p:txBody>
+      </p:sp>
+    </p:spTree>
+    <p:extLst>
+      <p:ext uri="{BB962C8B-B14F-4D97-AF65-F5344CB8AC3E}">
+        <p14:creationId xmlns:p14="http://schemas.microsoft.com/office/powerpoint/2010/main" val="2898562490"/>
+      </p:ext>
+    </p:extLst>
+  </p:cSld>
+  <p:clrMapOvr>
+    <a:masterClrMapping/>
+  </p:clrMapOvr>
+</p:sld>
+</file>
+
+<file path=ppt/slides/slide6.xml><?xml version="1.0" encoding="utf-8"?>
 <p:sld xmlns:a="http://schemas.openxmlformats.org/drawingml/2006/main" xmlns:r="http://schemas.openxmlformats.org/officeDocument/2006/relationships" xmlns:p="http://schemas.openxmlformats.org/presentationml/2006/main">
   <p:cSld>
     <p:spTree>
@@ -19292,7 +20858,7 @@
                   <a:schemeClr val="bg1"/>
                 </a:solidFill>
               </a:rPr>
-              <a:t>Usefulness</a:t>
+              <a:t>Usefulness (Despite the Limitations)</a:t>
             </a:r>
           </a:p>
         </p:txBody>
@@ -19567,7 +21133,7 @@
                   <a:schemeClr val="bg1"/>
                 </a:solidFill>
               </a:rPr>
-              <a:t> source code, these assumptions turned out to be wrong, meaning the results don’t include all of model outputs that the model constants affect. </a:t>
+              <a:t> source code, we found these assumptions do not always hold, meaning our initial results do not capture all of model outputs that the model constants affect. </a:t>
             </a:r>
           </a:p>
           <a:p>
@@ -19578,7 +21144,7 @@
                   <a:schemeClr val="bg1"/>
                 </a:solidFill>
               </a:rPr>
-              <a:t>However, this doesn’t discount the results of Change Detection Analysis. </a:t>
+              <a:t>However, this doesn’t discount the results of our change detection analysis. </a:t>
             </a:r>
           </a:p>
           <a:p>
@@ -19589,34 +21155,18 @@
                   <a:schemeClr val="bg1"/>
                 </a:solidFill>
               </a:rPr>
-              <a:t>It led to the discovery that certain constants only effect </a:t>
-            </a:r>
-            <a:r>
-              <a:rPr lang="en-US">
+              <a:t>It led to the discovery that certain constants only affect model outputs under certain conditions.</a:t>
+            </a:r>
+          </a:p>
+          <a:p>
+            <a:pPr marL="342900" indent="-342900"/>
+            <a:r>
+              <a:rPr lang="en-US" dirty="0">
                 <a:solidFill>
                   <a:schemeClr val="bg1"/>
                 </a:solidFill>
               </a:rPr>
-              <a:t>model output under </a:t>
-            </a:r>
-            <a:r>
-              <a:rPr lang="en-US" dirty="0">
-                <a:solidFill>
-                  <a:schemeClr val="bg1"/>
-                </a:solidFill>
-              </a:rPr>
-              <a:t>certain conditions.</a:t>
-            </a:r>
-          </a:p>
-          <a:p>
-            <a:pPr marL="342900" indent="-342900"/>
-            <a:r>
-              <a:rPr lang="en-US" dirty="0">
-                <a:solidFill>
-                  <a:schemeClr val="bg1"/>
-                </a:solidFill>
-              </a:rPr>
-              <a:t>Its results are also still valid and useful when specifically referring to the default values used in the test cases. </a:t>
+              <a:t>The results are still valid and useful given the default values provided by domain scientists. </a:t>
             </a:r>
           </a:p>
         </p:txBody>
@@ -19634,296 +21184,7 @@
 </p:sld>
 </file>
 
-<file path=ppt/slides/slide40.xml><?xml version="1.0" encoding="utf-8"?>
-<p:sld xmlns:a="http://schemas.openxmlformats.org/drawingml/2006/main" xmlns:r="http://schemas.openxmlformats.org/officeDocument/2006/relationships" xmlns:p="http://schemas.openxmlformats.org/presentationml/2006/main">
-  <p:cSld>
-    <p:spTree>
-      <p:nvGrpSpPr>
-        <p:cNvPr id="1" name=""/>
-        <p:cNvGrpSpPr/>
-        <p:nvPr/>
-      </p:nvGrpSpPr>
-      <p:grpSpPr>
-        <a:xfrm>
-          <a:off x="0" y="0"/>
-          <a:ext cx="0" cy="0"/>
-          <a:chOff x="0" y="0"/>
-          <a:chExt cx="0" cy="0"/>
-        </a:xfrm>
-      </p:grpSpPr>
-      <p:sp>
-        <p:nvSpPr>
-          <p:cNvPr id="3" name="TextBox 2">
-            <a:extLst>
-              <a:ext uri="{FF2B5EF4-FFF2-40B4-BE49-F238E27FC236}">
-                <a16:creationId xmlns:a16="http://schemas.microsoft.com/office/drawing/2014/main" id="{1591456F-C241-4A18-AF77-96529210B7FC}"/>
-              </a:ext>
-            </a:extLst>
-          </p:cNvPr>
-          <p:cNvSpPr txBox="1"/>
-          <p:nvPr/>
-        </p:nvSpPr>
-        <p:spPr>
-          <a:xfrm>
-            <a:off x="503999" y="1628071"/>
-            <a:ext cx="9071640" cy="3139321"/>
-          </a:xfrm>
-          <a:prstGeom prst="rect">
-            <a:avLst/>
-          </a:prstGeom>
-          <a:noFill/>
-        </p:spPr>
-        <p:txBody>
-          <a:bodyPr wrap="square">
-            <a:spAutoFit/>
-          </a:bodyPr>
-          <a:lstStyle/>
-          <a:p>
-            <a:pPr marL="342900" indent="-342900">
-              <a:buFont typeface="Arial" panose="020B0604020202020204" pitchFamily="34" charset="0"/>
-              <a:buChar char="•"/>
-            </a:pPr>
-            <a:r>
-              <a:rPr lang="en-US" sz="2200" dirty="0">
-                <a:solidFill>
-                  <a:schemeClr val="bg1"/>
-                </a:solidFill>
-              </a:rPr>
-              <a:t>SPEL</a:t>
-            </a:r>
-            <a:r>
-              <a:rPr lang="en-US" sz="2200" i="1" dirty="0">
-                <a:solidFill>
-                  <a:schemeClr val="bg1"/>
-                </a:solidFill>
-              </a:rPr>
-              <a:t> </a:t>
-            </a:r>
-            <a:r>
-              <a:rPr lang="en-US" sz="2200" dirty="0">
-                <a:solidFill>
-                  <a:schemeClr val="bg1"/>
-                </a:solidFill>
-              </a:rPr>
-              <a:t>might be initializing data with </a:t>
-            </a:r>
-            <a:r>
-              <a:rPr lang="en-US" sz="2200" dirty="0" err="1">
-                <a:solidFill>
-                  <a:schemeClr val="bg1"/>
-                </a:solidFill>
-              </a:rPr>
-              <a:t>NaN</a:t>
-            </a:r>
-            <a:r>
-              <a:rPr lang="en-US" sz="2200" dirty="0">
-                <a:solidFill>
-                  <a:schemeClr val="bg1"/>
-                </a:solidFill>
-              </a:rPr>
-              <a:t> values that </a:t>
-            </a:r>
-            <a:r>
-              <a:rPr lang="en-US" sz="2200" dirty="0" err="1">
-                <a:solidFill>
-                  <a:schemeClr val="bg1"/>
-                </a:solidFill>
-                <a:latin typeface="Courier New" panose="02070309020205020404" pitchFamily="49" charset="0"/>
-                <a:cs typeface="Courier New" panose="02070309020205020404" pitchFamily="49" charset="0"/>
-              </a:rPr>
-              <a:t>LakeTemperature</a:t>
-            </a:r>
-            <a:r>
-              <a:rPr lang="en-US" sz="2200" dirty="0">
-                <a:solidFill>
-                  <a:schemeClr val="bg1"/>
-                </a:solidFill>
-              </a:rPr>
-              <a:t> then never overwrites or </a:t>
-            </a:r>
-            <a:r>
-              <a:rPr lang="en-US" sz="2200" dirty="0" err="1">
-                <a:solidFill>
-                  <a:schemeClr val="bg1"/>
-                </a:solidFill>
-                <a:latin typeface="Courier New" panose="02070309020205020404" pitchFamily="49" charset="0"/>
-                <a:cs typeface="Courier New" panose="02070309020205020404" pitchFamily="49" charset="0"/>
-              </a:rPr>
-              <a:t>LakeTemperature</a:t>
-            </a:r>
-            <a:r>
-              <a:rPr lang="en-US" sz="2200" dirty="0">
-                <a:solidFill>
-                  <a:schemeClr val="bg1"/>
-                </a:solidFill>
-              </a:rPr>
-              <a:t> might be outputting data with </a:t>
-            </a:r>
-            <a:r>
-              <a:rPr lang="en-US" sz="2200" dirty="0" err="1">
-                <a:solidFill>
-                  <a:schemeClr val="bg1"/>
-                </a:solidFill>
-              </a:rPr>
-              <a:t>NaN</a:t>
-            </a:r>
-            <a:r>
-              <a:rPr lang="en-US" sz="2200" dirty="0">
-                <a:solidFill>
-                  <a:schemeClr val="bg1"/>
-                </a:solidFill>
-              </a:rPr>
-              <a:t> values. Currently …/231 combinatorial cases with all constants have at least one model output with </a:t>
-            </a:r>
-            <a:r>
-              <a:rPr lang="en-US" sz="2200" dirty="0" err="1">
-                <a:solidFill>
-                  <a:schemeClr val="bg1"/>
-                </a:solidFill>
-              </a:rPr>
-              <a:t>NaN</a:t>
-            </a:r>
-            <a:r>
-              <a:rPr lang="en-US" sz="2200" dirty="0">
-                <a:solidFill>
-                  <a:schemeClr val="bg1"/>
-                </a:solidFill>
-              </a:rPr>
-              <a:t> values and …/231 combinatorial cases with some constants have at least one model output with </a:t>
-            </a:r>
-            <a:r>
-              <a:rPr lang="en-US" sz="2200" dirty="0" err="1">
-                <a:solidFill>
-                  <a:schemeClr val="bg1"/>
-                </a:solidFill>
-              </a:rPr>
-              <a:t>NaN</a:t>
-            </a:r>
-            <a:r>
-              <a:rPr lang="en-US" sz="2200" dirty="0">
-                <a:solidFill>
-                  <a:schemeClr val="bg1"/>
-                </a:solidFill>
-              </a:rPr>
-              <a:t> values. </a:t>
-            </a:r>
-            <a:endParaRPr lang="en-US" sz="2200" i="1" dirty="0">
-              <a:solidFill>
-                <a:schemeClr val="bg1"/>
-              </a:solidFill>
-            </a:endParaRPr>
-          </a:p>
-          <a:p>
-            <a:pPr marL="342900" indent="-342900">
-              <a:buFont typeface="Arial" panose="020B0604020202020204" pitchFamily="34" charset="0"/>
-              <a:buChar char="•"/>
-            </a:pPr>
-            <a:r>
-              <a:rPr lang="en-US" sz="2200" dirty="0">
-                <a:solidFill>
-                  <a:schemeClr val="bg1"/>
-                </a:solidFill>
-              </a:rPr>
-              <a:t>Largely, </a:t>
-            </a:r>
-            <a:r>
-              <a:rPr lang="en-US" sz="2200" dirty="0" err="1">
-                <a:solidFill>
-                  <a:schemeClr val="bg1"/>
-                </a:solidFill>
-                <a:latin typeface="Courier New" panose="02070309020205020404" pitchFamily="49" charset="0"/>
-                <a:cs typeface="Courier New" panose="02070309020205020404" pitchFamily="49" charset="0"/>
-              </a:rPr>
-              <a:t>LakeTemperature</a:t>
-            </a:r>
-            <a:r>
-              <a:rPr lang="en-US" sz="2200" dirty="0">
-                <a:solidFill>
-                  <a:schemeClr val="bg1"/>
-                </a:solidFill>
-              </a:rPr>
-              <a:t> output data was valid and within physical bounds. However, some cases resulted in some physically impossible outputs, likely due to combinations between a few model constants. </a:t>
-            </a:r>
-            <a:endParaRPr lang="en-US" sz="2200" dirty="0"/>
-          </a:p>
-        </p:txBody>
-      </p:sp>
-      <p:sp>
-        <p:nvSpPr>
-          <p:cNvPr id="4" name="Title 1">
-            <a:extLst>
-              <a:ext uri="{FF2B5EF4-FFF2-40B4-BE49-F238E27FC236}">
-                <a16:creationId xmlns:a16="http://schemas.microsoft.com/office/drawing/2014/main" id="{294AD037-E0F3-F70A-78F8-5E2E7D139116}"/>
-              </a:ext>
-            </a:extLst>
-          </p:cNvPr>
-          <p:cNvSpPr txBox="1">
-            <a:spLocks/>
-          </p:cNvSpPr>
-          <p:nvPr/>
-        </p:nvSpPr>
-        <p:spPr>
-          <a:xfrm>
-            <a:off x="503999" y="422301"/>
-            <a:ext cx="9071640" cy="553998"/>
-          </a:xfrm>
-          <a:prstGeom prst="rect">
-            <a:avLst/>
-          </a:prstGeom>
-          <a:noFill/>
-          <a:ln>
-            <a:noFill/>
-          </a:ln>
-        </p:spPr>
-        <p:txBody>
-          <a:bodyPr vert="horz" lIns="0" tIns="0" rIns="0" bIns="0" anchor="ctr">
-            <a:spAutoFit/>
-          </a:bodyPr>
-          <a:lstStyle>
-            <a:lvl1pPr lvl="0" algn="ctr" rtl="0" hangingPunct="0">
-              <a:buNone/>
-              <a:tabLst/>
-              <a:defRPr lang="en-US" sz="3600" b="0" i="0" u="none" strike="noStrike" kern="1200" cap="none">
-                <a:ln>
-                  <a:noFill/>
-                </a:ln>
-                <a:highlight>
-                  <a:scrgbClr r="0" g="0" b="0">
-                    <a:alpha val="0"/>
-                  </a:scrgbClr>
-                </a:highlight>
-                <a:latin typeface="URW Bookman" pitchFamily="2"/>
-                <a:ea typeface="Nimbus Sans" pitchFamily="2"/>
-                <a:cs typeface="FreeSans" pitchFamily="2"/>
-              </a:defRPr>
-            </a:lvl1pPr>
-          </a:lstStyle>
-          <a:p>
-            <a:r>
-              <a:rPr lang="en-US" dirty="0">
-                <a:solidFill>
-                  <a:schemeClr val="bg1"/>
-                </a:solidFill>
-              </a:rPr>
-              <a:t>Findings from Initial Testing</a:t>
-            </a:r>
-          </a:p>
-        </p:txBody>
-      </p:sp>
-    </p:spTree>
-    <p:extLst>
-      <p:ext uri="{BB962C8B-B14F-4D97-AF65-F5344CB8AC3E}">
-        <p14:creationId xmlns:p14="http://schemas.microsoft.com/office/powerpoint/2010/main" val="1486384677"/>
-      </p:ext>
-    </p:extLst>
-  </p:cSld>
-  <p:clrMapOvr>
-    <a:masterClrMapping/>
-  </p:clrMapOvr>
-</p:sld>
-</file>
-
-<file path=ppt/slides/slide5.xml><?xml version="1.0" encoding="utf-8"?>
+<file path=ppt/slides/slide7.xml><?xml version="1.0" encoding="utf-8"?>
 <p:sld xmlns:a="http://schemas.openxmlformats.org/drawingml/2006/main" xmlns:r="http://schemas.openxmlformats.org/officeDocument/2006/relationships" xmlns:p="http://schemas.openxmlformats.org/presentationml/2006/main">
   <p:cSld>
     <p:spTree>
@@ -20271,7 +21532,7 @@
                   <a:schemeClr val="bg1"/>
                 </a:solidFill>
               </a:rPr>
-              <a:t>This assumed that each model constant’s values are independent of each other and that no preconditions have to be met for a constant to have an effect on model outputs. </a:t>
+              <a:t>This assumed that model constants are independent of each other, and that no preconditions need to be met for a constant to have an effect on a model output. </a:t>
             </a:r>
           </a:p>
         </p:txBody>
@@ -20289,7 +21550,7 @@
 </p:sld>
 </file>
 
-<file path=ppt/slides/slide6.xml><?xml version="1.0" encoding="utf-8"?>
+<file path=ppt/slides/slide8.xml><?xml version="1.0" encoding="utf-8"?>
 <p:sld xmlns:a="http://schemas.openxmlformats.org/drawingml/2006/main" xmlns:r="http://schemas.openxmlformats.org/officeDocument/2006/relationships" xmlns:p="http://schemas.openxmlformats.org/presentationml/2006/main">
   <p:cSld>
     <p:spTree>
@@ -20541,7 +21802,7 @@
                     <a:schemeClr val="bg1"/>
                   </a:solidFill>
                 </a:rPr>
-                <a:t>Model outputs that didn’t change in response to any model constants</a:t>
+                <a:t>Model outputs that didn’t change in response to any model constant</a:t>
               </a:r>
             </a:p>
           </p:txBody>
@@ -20686,7 +21947,7 @@
 </p:sld>
 </file>
 
-<file path=ppt/slides/slide7.xml><?xml version="1.0" encoding="utf-8"?>
+<file path=ppt/slides/slide9.xml><?xml version="1.0" encoding="utf-8"?>
 <p:sld xmlns:a="http://schemas.openxmlformats.org/drawingml/2006/main" xmlns:r="http://schemas.openxmlformats.org/officeDocument/2006/relationships" xmlns:p="http://schemas.openxmlformats.org/presentationml/2006/main">
   <p:cSld>
     <p:spTree>
@@ -20766,7 +22027,7 @@
                   <a:schemeClr val="bg1"/>
                 </a:solidFill>
               </a:rPr>
-              <a:t>Problems/Solutions</a:t>
+              <a:t>Limitations and Next Steps</a:t>
             </a:r>
           </a:p>
         </p:txBody>
@@ -21023,7 +22284,7 @@
                   <a:schemeClr val="bg1"/>
                 </a:solidFill>
               </a:rPr>
-              <a:t>So far, the combinatorial test cases were only using the constants assumed to have an impact on model outputs. Now, they include all of the constants. </a:t>
+              <a:t>So far, the combinatorial test cases were only using the constants assumed to have an impact on model outputs. Next, they will include all model constants. </a:t>
             </a:r>
           </a:p>
           <a:p>
@@ -21034,13 +22295,15 @@
                   <a:schemeClr val="bg1"/>
                 </a:solidFill>
               </a:rPr>
-              <a:t>The Change Detection analysis might be redone in the future by examining preconditions through </a:t>
+              <a:t>The change detection analysis might be redone in the future by examining preconditions through </a:t>
             </a:r>
             <a:r>
               <a:rPr lang="en-US" dirty="0" err="1">
                 <a:solidFill>
                   <a:schemeClr val="bg1"/>
                 </a:solidFill>
+                <a:latin typeface="Courier New" panose="02070309020205020404" pitchFamily="49" charset="0"/>
+                <a:cs typeface="Courier New" panose="02070309020205020404" pitchFamily="49" charset="0"/>
               </a:rPr>
               <a:t>LakeTemperature</a:t>
             </a:r>
@@ -21050,39 +22313,7 @@
                   <a:schemeClr val="bg1"/>
                 </a:solidFill>
               </a:rPr>
-              <a:t> source code but </a:t>
-            </a:r>
-            <a:r>
-              <a:rPr lang="en-US">
-                <a:solidFill>
-                  <a:schemeClr val="bg1"/>
-                </a:solidFill>
-              </a:rPr>
-              <a:t>future combinatorial </a:t>
-            </a:r>
-            <a:r>
-              <a:rPr lang="en-US" dirty="0">
-                <a:solidFill>
-                  <a:schemeClr val="bg1"/>
-                </a:solidFill>
-              </a:rPr>
-              <a:t>testing and </a:t>
-            </a:r>
-            <a:r>
-              <a:rPr lang="en-US">
-                <a:solidFill>
-                  <a:schemeClr val="bg1"/>
-                </a:solidFill>
-              </a:rPr>
-              <a:t>change-impact analysis </a:t>
-            </a:r>
-            <a:r>
-              <a:rPr lang="en-US" dirty="0">
-                <a:solidFill>
-                  <a:schemeClr val="bg1"/>
-                </a:solidFill>
-              </a:rPr>
-              <a:t>will not depend on these results. </a:t>
+              <a:t> source code, however, further combinatorial testing and change impact analysis will not depend on these results, as all model constants will be included. </a:t>
             </a:r>
           </a:p>
         </p:txBody>
@@ -21091,639 +22322,6 @@
     <p:extLst>
       <p:ext uri="{BB962C8B-B14F-4D97-AF65-F5344CB8AC3E}">
         <p14:creationId xmlns:p14="http://schemas.microsoft.com/office/powerpoint/2010/main" val="428248981"/>
-      </p:ext>
-    </p:extLst>
-  </p:cSld>
-  <p:clrMapOvr>
-    <a:masterClrMapping/>
-  </p:clrMapOvr>
-</p:sld>
-</file>
-
-<file path=ppt/slides/slide8.xml><?xml version="1.0" encoding="utf-8"?>
-<p:sld xmlns:a="http://schemas.openxmlformats.org/drawingml/2006/main" xmlns:r="http://schemas.openxmlformats.org/officeDocument/2006/relationships" xmlns:p="http://schemas.openxmlformats.org/presentationml/2006/main">
-  <p:cSld>
-    <p:spTree>
-      <p:nvGrpSpPr>
-        <p:cNvPr id="1" name=""/>
-        <p:cNvGrpSpPr/>
-        <p:nvPr/>
-      </p:nvGrpSpPr>
-      <p:grpSpPr>
-        <a:xfrm>
-          <a:off x="0" y="0"/>
-          <a:ext cx="0" cy="0"/>
-          <a:chOff x="0" y="0"/>
-          <a:chExt cx="0" cy="0"/>
-        </a:xfrm>
-      </p:grpSpPr>
-      <p:sp>
-        <p:nvSpPr>
-          <p:cNvPr id="2" name="Title 1">
-            <a:extLst>
-              <a:ext uri="{FF2B5EF4-FFF2-40B4-BE49-F238E27FC236}">
-                <a16:creationId xmlns:a16="http://schemas.microsoft.com/office/drawing/2014/main" id="{79070A95-7E8C-0828-88E3-001BBB4E331D}"/>
-              </a:ext>
-            </a:extLst>
-          </p:cNvPr>
-          <p:cNvSpPr txBox="1">
-            <a:spLocks/>
-          </p:cNvSpPr>
-          <p:nvPr/>
-        </p:nvSpPr>
-        <p:spPr>
-          <a:xfrm>
-            <a:off x="503999" y="422301"/>
-            <a:ext cx="9071640" cy="553998"/>
-          </a:xfrm>
-          <a:prstGeom prst="rect">
-            <a:avLst/>
-          </a:prstGeom>
-          <a:noFill/>
-          <a:ln>
-            <a:noFill/>
-          </a:ln>
-        </p:spPr>
-        <p:txBody>
-          <a:bodyPr vert="horz" lIns="0" tIns="0" rIns="0" bIns="0" anchor="ctr">
-            <a:spAutoFit/>
-          </a:bodyPr>
-          <a:lstStyle>
-            <a:lvl1pPr lvl="0" algn="ctr" rtl="0" hangingPunct="0">
-              <a:buNone/>
-              <a:tabLst/>
-              <a:defRPr lang="en-US" sz="3600" b="0" i="0" u="none" strike="noStrike" kern="1200" cap="none">
-                <a:ln>
-                  <a:noFill/>
-                </a:ln>
-                <a:highlight>
-                  <a:scrgbClr r="0" g="0" b="0">
-                    <a:alpha val="0"/>
-                  </a:scrgbClr>
-                </a:highlight>
-                <a:latin typeface="URW Bookman" pitchFamily="2"/>
-                <a:ea typeface="Nimbus Sans" pitchFamily="2"/>
-                <a:cs typeface="FreeSans" pitchFamily="2"/>
-              </a:defRPr>
-            </a:lvl1pPr>
-          </a:lstStyle>
-          <a:p>
-            <a:r>
-              <a:rPr lang="en-US" dirty="0">
-                <a:solidFill>
-                  <a:schemeClr val="bg1"/>
-                </a:solidFill>
-              </a:rPr>
-              <a:t>Change-Impact Analysis Overview</a:t>
-            </a:r>
-          </a:p>
-        </p:txBody>
-      </p:sp>
-      <p:sp>
-        <p:nvSpPr>
-          <p:cNvPr id="3" name="Text Placeholder 2">
-            <a:extLst>
-              <a:ext uri="{FF2B5EF4-FFF2-40B4-BE49-F238E27FC236}">
-                <a16:creationId xmlns:a16="http://schemas.microsoft.com/office/drawing/2014/main" id="{87EC0F28-AC2C-142C-EF6A-7F163D42DEC9}"/>
-              </a:ext>
-            </a:extLst>
-          </p:cNvPr>
-          <p:cNvSpPr txBox="1">
-            <a:spLocks/>
-          </p:cNvSpPr>
-          <p:nvPr/>
-        </p:nvSpPr>
-        <p:spPr>
-          <a:xfrm>
-            <a:off x="507959" y="1172520"/>
-            <a:ext cx="9071640" cy="4374840"/>
-          </a:xfrm>
-          <a:prstGeom prst="rect">
-            <a:avLst/>
-          </a:prstGeom>
-          <a:noFill/>
-          <a:ln>
-            <a:noFill/>
-          </a:ln>
-        </p:spPr>
-        <p:txBody>
-          <a:bodyPr vert="horz" lIns="0" tIns="0" rIns="0" bIns="0">
-            <a:normAutofit fontScale="92500" lnSpcReduction="10000"/>
-          </a:bodyPr>
-          <a:lstStyle>
-            <a:lvl1pPr lvl="0" rtl="0" hangingPunct="0">
-              <a:spcBef>
-                <a:spcPts val="1417"/>
-              </a:spcBef>
-              <a:spcAft>
-                <a:spcPts val="0"/>
-              </a:spcAft>
-              <a:buSzPct val="45000"/>
-              <a:buFont typeface="OpenSymbol"/>
-              <a:buChar char="●"/>
-              <a:tabLst/>
-              <a:defRPr lang="en-US" sz="2400" b="0" i="0" u="none" strike="noStrike" kern="1200" cap="none">
-                <a:ln>
-                  <a:noFill/>
-                </a:ln>
-                <a:highlight>
-                  <a:scrgbClr r="0" g="0" b="0">
-                    <a:alpha val="0"/>
-                  </a:scrgbClr>
-                </a:highlight>
-                <a:latin typeface="URW Bookman" pitchFamily="2"/>
-                <a:ea typeface="Nimbus Sans" pitchFamily="2"/>
-                <a:cs typeface="FreeSans" pitchFamily="2"/>
-              </a:defRPr>
-            </a:lvl1pPr>
-            <a:lvl2pPr lvl="1" rtl="0" hangingPunct="0">
-              <a:spcBef>
-                <a:spcPts val="1417"/>
-              </a:spcBef>
-              <a:spcAft>
-                <a:spcPts val="0"/>
-              </a:spcAft>
-              <a:buSzPct val="75000"/>
-              <a:buFont typeface="OpenSymbol"/>
-              <a:buChar char="–"/>
-              <a:tabLst/>
-              <a:defRPr lang="en-US" sz="2400" b="0" i="0" u="none" strike="noStrike" kern="1200" cap="none">
-                <a:ln>
-                  <a:noFill/>
-                </a:ln>
-                <a:highlight>
-                  <a:scrgbClr r="0" g="0" b="0">
-                    <a:alpha val="0"/>
-                  </a:scrgbClr>
-                </a:highlight>
-                <a:latin typeface="URW Bookman" pitchFamily="2"/>
-                <a:ea typeface="Nimbus Sans" pitchFamily="2"/>
-                <a:cs typeface="FreeSans" pitchFamily="2"/>
-              </a:defRPr>
-            </a:lvl2pPr>
-            <a:lvl3pPr lvl="2" rtl="0" hangingPunct="0">
-              <a:spcBef>
-                <a:spcPts val="1417"/>
-              </a:spcBef>
-              <a:spcAft>
-                <a:spcPts val="0"/>
-              </a:spcAft>
-              <a:buSzPct val="45000"/>
-              <a:buFont typeface="OpenSymbol"/>
-              <a:buChar char="●"/>
-              <a:tabLst/>
-              <a:defRPr lang="en-US" sz="2400" b="0" i="0" u="none" strike="noStrike" kern="1200" cap="none">
-                <a:ln>
-                  <a:noFill/>
-                </a:ln>
-                <a:highlight>
-                  <a:scrgbClr r="0" g="0" b="0">
-                    <a:alpha val="0"/>
-                  </a:scrgbClr>
-                </a:highlight>
-                <a:latin typeface="URW Bookman" pitchFamily="2"/>
-                <a:ea typeface="Nimbus Sans" pitchFamily="2"/>
-                <a:cs typeface="FreeSans" pitchFamily="2"/>
-              </a:defRPr>
-            </a:lvl3pPr>
-            <a:lvl4pPr lvl="3" rtl="0" hangingPunct="0">
-              <a:spcBef>
-                <a:spcPts val="1417"/>
-              </a:spcBef>
-              <a:spcAft>
-                <a:spcPts val="0"/>
-              </a:spcAft>
-              <a:buSzPct val="75000"/>
-              <a:buFont typeface="OpenSymbol"/>
-              <a:buChar char="–"/>
-              <a:tabLst/>
-              <a:defRPr lang="en-US" sz="2400" b="0" i="0" u="none" strike="noStrike" kern="1200" cap="none">
-                <a:ln>
-                  <a:noFill/>
-                </a:ln>
-                <a:highlight>
-                  <a:scrgbClr r="0" g="0" b="0">
-                    <a:alpha val="0"/>
-                  </a:scrgbClr>
-                </a:highlight>
-                <a:latin typeface="URW Bookman" pitchFamily="2"/>
-                <a:ea typeface="Nimbus Sans" pitchFamily="2"/>
-                <a:cs typeface="FreeSans" pitchFamily="2"/>
-              </a:defRPr>
-            </a:lvl4pPr>
-            <a:lvl5pPr lvl="4" rtl="0" hangingPunct="0">
-              <a:spcBef>
-                <a:spcPts val="1417"/>
-              </a:spcBef>
-              <a:spcAft>
-                <a:spcPts val="0"/>
-              </a:spcAft>
-              <a:buSzPct val="45000"/>
-              <a:buFont typeface="OpenSymbol"/>
-              <a:buChar char="●"/>
-              <a:tabLst/>
-              <a:defRPr lang="en-US" sz="2400" b="0" i="0" u="none" strike="noStrike" kern="1200" cap="none">
-                <a:ln>
-                  <a:noFill/>
-                </a:ln>
-                <a:highlight>
-                  <a:scrgbClr r="0" g="0" b="0">
-                    <a:alpha val="0"/>
-                  </a:scrgbClr>
-                </a:highlight>
-                <a:latin typeface="URW Bookman" pitchFamily="2"/>
-                <a:ea typeface="Nimbus Sans" pitchFamily="2"/>
-                <a:cs typeface="FreeSans" pitchFamily="2"/>
-              </a:defRPr>
-            </a:lvl5pPr>
-            <a:lvl6pPr lvl="5" rtl="0" hangingPunct="0">
-              <a:spcBef>
-                <a:spcPts val="1417"/>
-              </a:spcBef>
-              <a:spcAft>
-                <a:spcPts val="0"/>
-              </a:spcAft>
-              <a:buSzPct val="45000"/>
-              <a:buFont typeface="OpenSymbol"/>
-              <a:buChar char="●"/>
-              <a:tabLst/>
-              <a:defRPr lang="en-US" sz="2400" b="0" i="0" u="none" strike="noStrike" kern="1200" cap="none">
-                <a:ln>
-                  <a:noFill/>
-                </a:ln>
-                <a:highlight>
-                  <a:scrgbClr r="0" g="0" b="0">
-                    <a:alpha val="0"/>
-                  </a:scrgbClr>
-                </a:highlight>
-                <a:latin typeface="URW Bookman" pitchFamily="2"/>
-                <a:ea typeface="Nimbus Sans" pitchFamily="2"/>
-                <a:cs typeface="FreeSans" pitchFamily="2"/>
-              </a:defRPr>
-            </a:lvl6pPr>
-            <a:lvl7pPr lvl="6" rtl="0" hangingPunct="0">
-              <a:spcBef>
-                <a:spcPts val="1417"/>
-              </a:spcBef>
-              <a:spcAft>
-                <a:spcPts val="0"/>
-              </a:spcAft>
-              <a:buSzPct val="45000"/>
-              <a:buFont typeface="OpenSymbol"/>
-              <a:buChar char="●"/>
-              <a:tabLst/>
-              <a:defRPr lang="en-US" sz="2400" b="0" i="0" u="none" strike="noStrike" kern="1200" cap="none">
-                <a:ln>
-                  <a:noFill/>
-                </a:ln>
-                <a:highlight>
-                  <a:scrgbClr r="0" g="0" b="0">
-                    <a:alpha val="0"/>
-                  </a:scrgbClr>
-                </a:highlight>
-                <a:latin typeface="URW Bookman" pitchFamily="2"/>
-                <a:ea typeface="Nimbus Sans" pitchFamily="2"/>
-                <a:cs typeface="FreeSans" pitchFamily="2"/>
-              </a:defRPr>
-            </a:lvl7pPr>
-            <a:lvl8pPr marL="3429000" indent="-228600" algn="l" defTabSz="914400" rtl="0" eaLnBrk="1" latinLnBrk="0" hangingPunct="1">
-              <a:lnSpc>
-                <a:spcPct val="90000"/>
-              </a:lnSpc>
-              <a:spcBef>
-                <a:spcPts val="500"/>
-              </a:spcBef>
-              <a:buFont typeface="Arial" panose="020B0604020202020204" pitchFamily="34" charset="0"/>
-              <a:buChar char="•"/>
-              <a:defRPr sz="1800" kern="1200">
-                <a:solidFill>
-                  <a:schemeClr val="tx1"/>
-                </a:solidFill>
-                <a:latin typeface="+mn-lt"/>
-                <a:ea typeface="+mn-ea"/>
-                <a:cs typeface="+mn-cs"/>
-              </a:defRPr>
-            </a:lvl8pPr>
-            <a:lvl9pPr marL="3886200" indent="-228600" algn="l" defTabSz="914400" rtl="0" eaLnBrk="1" latinLnBrk="0" hangingPunct="1">
-              <a:lnSpc>
-                <a:spcPct val="90000"/>
-              </a:lnSpc>
-              <a:spcBef>
-                <a:spcPts val="500"/>
-              </a:spcBef>
-              <a:buFont typeface="Arial" panose="020B0604020202020204" pitchFamily="34" charset="0"/>
-              <a:buChar char="•"/>
-              <a:defRPr sz="1800" kern="1200">
-                <a:solidFill>
-                  <a:schemeClr val="tx1"/>
-                </a:solidFill>
-                <a:latin typeface="+mn-lt"/>
-                <a:ea typeface="+mn-ea"/>
-                <a:cs typeface="+mn-cs"/>
-              </a:defRPr>
-            </a:lvl9pPr>
-          </a:lstStyle>
-          <a:p>
-            <a:pPr marL="342900" indent="-342900"/>
-            <a:r>
-              <a:rPr lang="en-US" dirty="0">
-                <a:solidFill>
-                  <a:schemeClr val="bg1"/>
-                </a:solidFill>
-              </a:rPr>
-              <a:t>The goal is to visualize the impact of model constants on model outputs.</a:t>
-            </a:r>
-          </a:p>
-          <a:p>
-            <a:pPr marL="342900" indent="-342900"/>
-            <a:r>
-              <a:rPr lang="en-US" dirty="0">
-                <a:solidFill>
-                  <a:schemeClr val="bg1"/>
-                </a:solidFill>
-              </a:rPr>
-              <a:t>Some challenges are:</a:t>
-            </a:r>
-          </a:p>
-          <a:p>
-            <a:pPr marL="800100" lvl="1" indent="-342900"/>
-            <a:r>
-              <a:rPr lang="en-US" dirty="0">
-                <a:solidFill>
-                  <a:schemeClr val="bg1"/>
-                </a:solidFill>
-              </a:rPr>
-              <a:t>Most of the 25 model constants we change affect multiple model outputs.</a:t>
-            </a:r>
-          </a:p>
-          <a:p>
-            <a:pPr marL="800100" lvl="1" indent="-342900"/>
-            <a:r>
-              <a:rPr lang="en-US" dirty="0">
-                <a:solidFill>
-                  <a:schemeClr val="bg1"/>
-                </a:solidFill>
-              </a:rPr>
-              <a:t>The 75 model outputs are multidimensional. The column dimension goes from 0 to 344.</a:t>
-            </a:r>
-          </a:p>
-          <a:p>
-            <a:pPr marL="800100" lvl="1" indent="-342900"/>
-            <a:r>
-              <a:rPr lang="en-US" dirty="0">
-                <a:solidFill>
-                  <a:schemeClr val="bg1"/>
-                </a:solidFill>
-              </a:rPr>
-              <a:t>Contrary to an initial assumption, some model constants only affect model output when certain preconditions are met.</a:t>
-            </a:r>
-          </a:p>
-          <a:p>
-            <a:pPr marL="342900" indent="-342900"/>
-            <a:r>
-              <a:rPr lang="en-US" dirty="0">
-                <a:solidFill>
-                  <a:schemeClr val="bg1"/>
-                </a:solidFill>
-              </a:rPr>
-              <a:t>To solve this, we create a 3D graph using time as the x-axis, the one model constant we changed as the y-axis, and a single column of a single model output as the z-axis.  </a:t>
-            </a:r>
-          </a:p>
-          <a:p>
-            <a:pPr marL="342900" indent="-342900"/>
-            <a:endParaRPr lang="en-US" dirty="0">
-              <a:solidFill>
-                <a:schemeClr val="bg1"/>
-              </a:solidFill>
-            </a:endParaRPr>
-          </a:p>
-        </p:txBody>
-      </p:sp>
-    </p:spTree>
-    <p:extLst>
-      <p:ext uri="{BB962C8B-B14F-4D97-AF65-F5344CB8AC3E}">
-        <p14:creationId xmlns:p14="http://schemas.microsoft.com/office/powerpoint/2010/main" val="2569724074"/>
-      </p:ext>
-    </p:extLst>
-  </p:cSld>
-  <p:clrMapOvr>
-    <a:masterClrMapping/>
-  </p:clrMapOvr>
-</p:sld>
-</file>
-
-<file path=ppt/slides/slide9.xml><?xml version="1.0" encoding="utf-8"?>
-<p:sld xmlns:a="http://schemas.openxmlformats.org/drawingml/2006/main" xmlns:r="http://schemas.openxmlformats.org/officeDocument/2006/relationships" xmlns:p="http://schemas.openxmlformats.org/presentationml/2006/main">
-  <p:cSld>
-    <p:spTree>
-      <p:nvGrpSpPr>
-        <p:cNvPr id="1" name="">
-          <a:extLst>
-            <a:ext uri="{FF2B5EF4-FFF2-40B4-BE49-F238E27FC236}">
-              <a16:creationId xmlns:a16="http://schemas.microsoft.com/office/drawing/2014/main" id="{2B569827-9521-53AA-9742-36EB856A3BAB}"/>
-            </a:ext>
-          </a:extLst>
-        </p:cNvPr>
-        <p:cNvGrpSpPr/>
-        <p:nvPr/>
-      </p:nvGrpSpPr>
-      <p:grpSpPr>
-        <a:xfrm>
-          <a:off x="0" y="0"/>
-          <a:ext cx="0" cy="0"/>
-          <a:chOff x="0" y="0"/>
-          <a:chExt cx="0" cy="0"/>
-        </a:xfrm>
-      </p:grpSpPr>
-      <p:sp>
-        <p:nvSpPr>
-          <p:cNvPr id="2" name="Title 1">
-            <a:extLst>
-              <a:ext uri="{FF2B5EF4-FFF2-40B4-BE49-F238E27FC236}">
-                <a16:creationId xmlns:a16="http://schemas.microsoft.com/office/drawing/2014/main" id="{C65C185C-7590-576F-35F7-50C042B441F9}"/>
-              </a:ext>
-            </a:extLst>
-          </p:cNvPr>
-          <p:cNvSpPr txBox="1">
-            <a:spLocks noGrp="1"/>
-          </p:cNvSpPr>
-          <p:nvPr>
-            <p:ph type="title" idx="4294967295"/>
-          </p:nvPr>
-        </p:nvSpPr>
-        <p:spPr>
-          <a:xfrm>
-            <a:off x="503999" y="422301"/>
-            <a:ext cx="9071640" cy="553998"/>
-          </a:xfrm>
-        </p:spPr>
-        <p:txBody>
-          <a:bodyPr>
-            <a:spAutoFit/>
-          </a:bodyPr>
-          <a:lstStyle/>
-          <a:p>
-            <a:pPr lvl="0"/>
-            <a:r>
-              <a:rPr lang="en-US" dirty="0">
-                <a:solidFill>
-                  <a:schemeClr val="bg1"/>
-                </a:solidFill>
-              </a:rPr>
-              <a:t>Graphing Process</a:t>
-            </a:r>
-          </a:p>
-        </p:txBody>
-      </p:sp>
-      <p:sp>
-        <p:nvSpPr>
-          <p:cNvPr id="3" name="Text Placeholder 2">
-            <a:extLst>
-              <a:ext uri="{FF2B5EF4-FFF2-40B4-BE49-F238E27FC236}">
-                <a16:creationId xmlns:a16="http://schemas.microsoft.com/office/drawing/2014/main" id="{16380487-782B-D373-4A68-3CAF18B86D6A}"/>
-              </a:ext>
-            </a:extLst>
-          </p:cNvPr>
-          <p:cNvSpPr txBox="1">
-            <a:spLocks noGrp="1"/>
-          </p:cNvSpPr>
-          <p:nvPr>
-            <p:ph type="body" idx="4294967295"/>
-          </p:nvPr>
-        </p:nvSpPr>
-        <p:spPr>
-          <a:xfrm>
-            <a:off x="503999" y="1326600"/>
-            <a:ext cx="9001800" cy="3664440"/>
-          </a:xfrm>
-        </p:spPr>
-        <p:txBody>
-          <a:bodyPr>
-            <a:normAutofit/>
-          </a:bodyPr>
-          <a:lstStyle/>
-          <a:p>
-            <a:pPr marL="342900" indent="-342900"/>
-            <a:r>
-              <a:rPr lang="en-US" dirty="0">
-                <a:solidFill>
-                  <a:schemeClr val="bg1"/>
-                </a:solidFill>
-              </a:rPr>
-              <a:t>Output data in the form of a </a:t>
-            </a:r>
-            <a:r>
-              <a:rPr lang="en-US" dirty="0" err="1">
-                <a:solidFill>
-                  <a:schemeClr val="bg1"/>
-                </a:solidFill>
-              </a:rPr>
-              <a:t>NetCDF</a:t>
-            </a:r>
-            <a:r>
-              <a:rPr lang="en-US" dirty="0">
-                <a:solidFill>
-                  <a:schemeClr val="bg1"/>
-                </a:solidFill>
-              </a:rPr>
-              <a:t> file is used. </a:t>
-            </a:r>
-          </a:p>
-          <a:p>
-            <a:pPr marL="342900" indent="-342900"/>
-            <a:r>
-              <a:rPr lang="en-US" dirty="0">
-                <a:solidFill>
-                  <a:schemeClr val="bg1"/>
-                </a:solidFill>
-              </a:rPr>
-              <a:t>From the output data we pulled the values for the model constant </a:t>
-            </a:r>
-            <a:r>
-              <a:rPr lang="en-US" i="1" dirty="0" err="1">
-                <a:solidFill>
-                  <a:schemeClr val="bg1"/>
-                </a:solidFill>
-              </a:rPr>
-              <a:t>vkc</a:t>
-            </a:r>
-            <a:r>
-              <a:rPr lang="en-US" dirty="0">
-                <a:solidFill>
-                  <a:schemeClr val="bg1"/>
-                </a:solidFill>
-              </a:rPr>
-              <a:t>, which represents the Von Kármán Constant</a:t>
-            </a:r>
-            <a:r>
-              <a:rPr lang="en-US" i="1" dirty="0">
-                <a:solidFill>
-                  <a:schemeClr val="bg1"/>
-                </a:solidFill>
-              </a:rPr>
-              <a:t>.</a:t>
-            </a:r>
-            <a:endParaRPr lang="en-US" dirty="0">
-              <a:solidFill>
-                <a:schemeClr val="bg1"/>
-              </a:solidFill>
-            </a:endParaRPr>
-          </a:p>
-          <a:p>
-            <a:pPr marL="342900" indent="-342900"/>
-            <a:r>
-              <a:rPr lang="en-US" dirty="0">
-                <a:solidFill>
-                  <a:schemeClr val="bg1"/>
-                </a:solidFill>
-              </a:rPr>
-              <a:t>Time is interpolated from 0 to 35. </a:t>
-            </a:r>
-          </a:p>
-          <a:p>
-            <a:pPr marL="342900" indent="-342900"/>
-            <a:r>
-              <a:rPr lang="en-US" dirty="0">
-                <a:solidFill>
-                  <a:schemeClr val="bg1"/>
-                </a:solidFill>
-              </a:rPr>
-              <a:t>From the output data we pulled the values for the model output </a:t>
-            </a:r>
-            <a:r>
-              <a:rPr lang="en-US" i="1" dirty="0">
-                <a:solidFill>
-                  <a:schemeClr val="bg1"/>
-                </a:solidFill>
-              </a:rPr>
-              <a:t>lakestate_vars__savedtke1_col–</a:t>
-            </a:r>
-            <a:r>
-              <a:rPr lang="en-US" dirty="0">
-                <a:solidFill>
-                  <a:schemeClr val="bg1"/>
-                </a:solidFill>
-              </a:rPr>
-              <a:t>the eddy conductivity at the top lake level saved for the next step–at the column numbered 336. </a:t>
-            </a:r>
-          </a:p>
-          <a:p>
-            <a:pPr marL="342900" indent="-342900"/>
-            <a:r>
-              <a:rPr lang="en-US" dirty="0">
-                <a:solidFill>
-                  <a:schemeClr val="bg1"/>
-                </a:solidFill>
-              </a:rPr>
-              <a:t>Using matplotlib, all three dimensions were graphed. </a:t>
-            </a:r>
-          </a:p>
-        </p:txBody>
-      </p:sp>
-    </p:spTree>
-    <p:extLst>
-      <p:ext uri="{BB962C8B-B14F-4D97-AF65-F5344CB8AC3E}">
-        <p14:creationId xmlns:p14="http://schemas.microsoft.com/office/powerpoint/2010/main" val="2352501276"/>
       </p:ext>
     </p:extLst>
   </p:cSld>

--- a/documentation/for_collaborators/AnalysisOverview.pptx
+++ b/documentation/for_collaborators/AnalysisOverview.pptx
@@ -5,10 +5,10 @@
     <p:sldMasterId id="2147483648" r:id="rId1"/>
   </p:sldMasterIdLst>
   <p:notesMasterIdLst>
-    <p:notesMasterId r:id="rId45"/>
+    <p:notesMasterId r:id="rId46"/>
   </p:notesMasterIdLst>
   <p:handoutMasterIdLst>
-    <p:handoutMasterId r:id="rId46"/>
+    <p:handoutMasterId r:id="rId47"/>
   </p:handoutMasterIdLst>
   <p:sldIdLst>
     <p:sldId id="256" r:id="rId2"/>
@@ -31,29 +31,30 @@
     <p:sldId id="259" r:id="rId19"/>
     <p:sldId id="287" r:id="rId20"/>
     <p:sldId id="296" r:id="rId21"/>
-    <p:sldId id="291" r:id="rId22"/>
-    <p:sldId id="297" r:id="rId23"/>
-    <p:sldId id="292" r:id="rId24"/>
-    <p:sldId id="298" r:id="rId25"/>
-    <p:sldId id="299" r:id="rId26"/>
-    <p:sldId id="288" r:id="rId27"/>
-    <p:sldId id="293" r:id="rId28"/>
-    <p:sldId id="290" r:id="rId29"/>
-    <p:sldId id="294" r:id="rId30"/>
-    <p:sldId id="289" r:id="rId31"/>
-    <p:sldId id="295" r:id="rId32"/>
-    <p:sldId id="286" r:id="rId33"/>
-    <p:sldId id="300" r:id="rId34"/>
-    <p:sldId id="301" r:id="rId35"/>
-    <p:sldId id="302" r:id="rId36"/>
-    <p:sldId id="303" r:id="rId37"/>
-    <p:sldId id="304" r:id="rId38"/>
-    <p:sldId id="305" r:id="rId39"/>
-    <p:sldId id="262" r:id="rId40"/>
-    <p:sldId id="306" r:id="rId41"/>
-    <p:sldId id="276" r:id="rId42"/>
-    <p:sldId id="265" r:id="rId43"/>
-    <p:sldId id="307" r:id="rId44"/>
+    <p:sldId id="311" r:id="rId22"/>
+    <p:sldId id="291" r:id="rId23"/>
+    <p:sldId id="297" r:id="rId24"/>
+    <p:sldId id="292" r:id="rId25"/>
+    <p:sldId id="298" r:id="rId26"/>
+    <p:sldId id="299" r:id="rId27"/>
+    <p:sldId id="288" r:id="rId28"/>
+    <p:sldId id="293" r:id="rId29"/>
+    <p:sldId id="290" r:id="rId30"/>
+    <p:sldId id="294" r:id="rId31"/>
+    <p:sldId id="289" r:id="rId32"/>
+    <p:sldId id="295" r:id="rId33"/>
+    <p:sldId id="286" r:id="rId34"/>
+    <p:sldId id="300" r:id="rId35"/>
+    <p:sldId id="301" r:id="rId36"/>
+    <p:sldId id="302" r:id="rId37"/>
+    <p:sldId id="303" r:id="rId38"/>
+    <p:sldId id="304" r:id="rId39"/>
+    <p:sldId id="305" r:id="rId40"/>
+    <p:sldId id="262" r:id="rId41"/>
+    <p:sldId id="306" r:id="rId42"/>
+    <p:sldId id="276" r:id="rId43"/>
+    <p:sldId id="265" r:id="rId44"/>
+    <p:sldId id="307" r:id="rId45"/>
   </p:sldIdLst>
   <p:sldSz cx="10080625" cy="5670550"/>
   <p:notesSz cx="7559675" cy="10691813"/>
@@ -1336,7 +1337,7 @@
           <a:p>
             <a:pPr lvl="0"/>
             <a:fld id="{30A5194F-B1BB-9D4C-AE76-7B3B08E77197}" type="slidenum">
-              <a:t>39</a:t>
+              <a:t>40</a:t>
             </a:fld>
             <a:endParaRPr lang="en-US"/>
           </a:p>
@@ -1454,7 +1455,7 @@
           <a:p>
             <a:pPr lvl="0"/>
             <a:fld id="{18702C2E-8935-084B-8A6A-C1C4FB937928}" type="slidenum">
-              <a:t>42</a:t>
+              <a:t>43</a:t>
             </a:fld>
             <a:endParaRPr lang="en-US"/>
           </a:p>
@@ -8898,37 +8899,6 @@
           <a:chExt cx="0" cy="0"/>
         </a:xfrm>
       </p:grpSpPr>
-      <p:pic>
-        <p:nvPicPr>
-          <p:cNvPr id="3" name="Picture 2">
-            <a:extLst>
-              <a:ext uri="{FF2B5EF4-FFF2-40B4-BE49-F238E27FC236}">
-                <a16:creationId xmlns:a16="http://schemas.microsoft.com/office/drawing/2014/main" id="{2CB46AE7-9E96-4E9E-6A11-425DFE991336}"/>
-              </a:ext>
-            </a:extLst>
-          </p:cNvPr>
-          <p:cNvPicPr>
-            <a:picLocks noChangeAspect="1"/>
-          </p:cNvPicPr>
-          <p:nvPr/>
-        </p:nvPicPr>
-        <p:blipFill>
-          <a:blip r:embed="rId2"/>
-          <a:srcRect t="20076" b="18852"/>
-          <a:stretch>
-            <a:fillRect/>
-          </a:stretch>
-        </p:blipFill>
-        <p:spPr>
-          <a:xfrm>
-            <a:off x="-1" y="1719879"/>
-            <a:ext cx="10080625" cy="3462991"/>
-          </a:xfrm>
-          <a:prstGeom prst="rect">
-            <a:avLst/>
-          </a:prstGeom>
-        </p:spPr>
-      </p:pic>
       <p:sp>
         <p:nvSpPr>
           <p:cNvPr id="5" name="Title 1">
@@ -8998,6 +8968,37 @@
           </a:p>
         </p:txBody>
       </p:sp>
+      <p:pic>
+        <p:nvPicPr>
+          <p:cNvPr id="4" name="Picture 3">
+            <a:extLst>
+              <a:ext uri="{FF2B5EF4-FFF2-40B4-BE49-F238E27FC236}">
+                <a16:creationId xmlns:a16="http://schemas.microsoft.com/office/drawing/2014/main" id="{E4EE1C5A-3E0D-09D9-D2D4-5CFD1930118A}"/>
+              </a:ext>
+            </a:extLst>
+          </p:cNvPr>
+          <p:cNvPicPr>
+            <a:picLocks noChangeAspect="1"/>
+          </p:cNvPicPr>
+          <p:nvPr/>
+        </p:nvPicPr>
+        <p:blipFill>
+          <a:blip r:embed="rId2"/>
+          <a:srcRect l="5459" t="24488" r="5335" b="16599"/>
+          <a:stretch>
+            <a:fillRect/>
+          </a:stretch>
+        </p:blipFill>
+        <p:spPr>
+          <a:xfrm>
+            <a:off x="-1" y="1448571"/>
+            <a:ext cx="10080625" cy="3744814"/>
+          </a:xfrm>
+          <a:prstGeom prst="rect">
+            <a:avLst/>
+          </a:prstGeom>
+        </p:spPr>
+      </p:pic>
     </p:spTree>
     <p:extLst>
       <p:ext uri="{BB962C8B-B14F-4D97-AF65-F5344CB8AC3E}">
@@ -9902,6 +9903,713 @@
   <p:cSld>
     <p:spTree>
       <p:nvGrpSpPr>
+        <p:cNvPr id="1" name=""/>
+        <p:cNvGrpSpPr/>
+        <p:nvPr/>
+      </p:nvGrpSpPr>
+      <p:grpSpPr>
+        <a:xfrm>
+          <a:off x="0" y="0"/>
+          <a:ext cx="0" cy="0"/>
+          <a:chOff x="0" y="0"/>
+          <a:chExt cx="0" cy="0"/>
+        </a:xfrm>
+      </p:grpSpPr>
+      <p:sp>
+        <p:nvSpPr>
+          <p:cNvPr id="2" name="Title 1">
+            <a:extLst>
+              <a:ext uri="{FF2B5EF4-FFF2-40B4-BE49-F238E27FC236}">
+                <a16:creationId xmlns:a16="http://schemas.microsoft.com/office/drawing/2014/main" id="{8D0956D0-748E-7BF7-9FF2-807A0A9CF913}"/>
+              </a:ext>
+            </a:extLst>
+          </p:cNvPr>
+          <p:cNvSpPr txBox="1">
+            <a:spLocks/>
+          </p:cNvSpPr>
+          <p:nvPr/>
+        </p:nvSpPr>
+        <p:spPr>
+          <a:xfrm>
+            <a:off x="503999" y="422301"/>
+            <a:ext cx="9071640" cy="553998"/>
+          </a:xfrm>
+          <a:prstGeom prst="rect">
+            <a:avLst/>
+          </a:prstGeom>
+          <a:noFill/>
+          <a:ln>
+            <a:noFill/>
+          </a:ln>
+        </p:spPr>
+        <p:txBody>
+          <a:bodyPr vert="horz" lIns="0" tIns="0" rIns="0" bIns="0" anchor="ctr">
+            <a:spAutoFit/>
+          </a:bodyPr>
+          <a:lstStyle>
+            <a:lvl1pPr lvl="0" algn="ctr" rtl="0" hangingPunct="0">
+              <a:buNone/>
+              <a:tabLst/>
+              <a:defRPr lang="en-US" sz="3600" b="0" i="0" u="none" strike="noStrike" kern="1200" cap="none">
+                <a:ln>
+                  <a:noFill/>
+                </a:ln>
+                <a:highlight>
+                  <a:scrgbClr r="0" g="0" b="0">
+                    <a:alpha val="0"/>
+                  </a:scrgbClr>
+                </a:highlight>
+                <a:latin typeface="URW Bookman" pitchFamily="2"/>
+                <a:ea typeface="Nimbus Sans" pitchFamily="2"/>
+                <a:cs typeface="FreeSans" pitchFamily="2"/>
+              </a:defRPr>
+            </a:lvl1pPr>
+          </a:lstStyle>
+          <a:p>
+            <a:r>
+              <a:rPr lang="en-US" dirty="0">
+                <a:solidFill>
+                  <a:schemeClr val="bg1"/>
+                </a:solidFill>
+              </a:rPr>
+              <a:t>All Sign Checks</a:t>
+            </a:r>
+          </a:p>
+        </p:txBody>
+      </p:sp>
+      <p:sp>
+        <p:nvSpPr>
+          <p:cNvPr id="4" name="Text Placeholder 2">
+            <a:extLst>
+              <a:ext uri="{FF2B5EF4-FFF2-40B4-BE49-F238E27FC236}">
+                <a16:creationId xmlns:a16="http://schemas.microsoft.com/office/drawing/2014/main" id="{FD1E05E7-7333-606F-81EA-BC25434BC465}"/>
+              </a:ext>
+            </a:extLst>
+          </p:cNvPr>
+          <p:cNvSpPr txBox="1">
+            <a:spLocks/>
+          </p:cNvSpPr>
+          <p:nvPr/>
+        </p:nvSpPr>
+        <p:spPr>
+          <a:xfrm>
+            <a:off x="503999" y="1326600"/>
+            <a:ext cx="9071640" cy="4177053"/>
+          </a:xfrm>
+          <a:prstGeom prst="rect">
+            <a:avLst/>
+          </a:prstGeom>
+          <a:noFill/>
+          <a:ln>
+            <a:noFill/>
+          </a:ln>
+        </p:spPr>
+        <p:txBody>
+          <a:bodyPr vert="horz" lIns="0" tIns="0" rIns="0" bIns="0">
+            <a:normAutofit fontScale="62500" lnSpcReduction="20000"/>
+          </a:bodyPr>
+          <a:lstStyle>
+            <a:lvl1pPr lvl="0" rtl="0" hangingPunct="0">
+              <a:spcBef>
+                <a:spcPts val="1417"/>
+              </a:spcBef>
+              <a:spcAft>
+                <a:spcPts val="0"/>
+              </a:spcAft>
+              <a:buSzPct val="45000"/>
+              <a:buFont typeface="OpenSymbol"/>
+              <a:buChar char="●"/>
+              <a:tabLst/>
+              <a:defRPr lang="en-US" sz="2400" b="0" i="0" u="none" strike="noStrike" kern="1200" cap="none">
+                <a:ln>
+                  <a:noFill/>
+                </a:ln>
+                <a:highlight>
+                  <a:scrgbClr r="0" g="0" b="0">
+                    <a:alpha val="0"/>
+                  </a:scrgbClr>
+                </a:highlight>
+                <a:latin typeface="URW Bookman" pitchFamily="2"/>
+                <a:ea typeface="Nimbus Sans" pitchFamily="2"/>
+                <a:cs typeface="FreeSans" pitchFamily="2"/>
+              </a:defRPr>
+            </a:lvl1pPr>
+            <a:lvl2pPr lvl="1" rtl="0" hangingPunct="0">
+              <a:spcBef>
+                <a:spcPts val="1417"/>
+              </a:spcBef>
+              <a:spcAft>
+                <a:spcPts val="0"/>
+              </a:spcAft>
+              <a:buSzPct val="75000"/>
+              <a:buFont typeface="OpenSymbol"/>
+              <a:buChar char="–"/>
+              <a:tabLst/>
+              <a:defRPr lang="en-US" sz="2400" b="0" i="0" u="none" strike="noStrike" kern="1200" cap="none">
+                <a:ln>
+                  <a:noFill/>
+                </a:ln>
+                <a:highlight>
+                  <a:scrgbClr r="0" g="0" b="0">
+                    <a:alpha val="0"/>
+                  </a:scrgbClr>
+                </a:highlight>
+                <a:latin typeface="URW Bookman" pitchFamily="2"/>
+                <a:ea typeface="Nimbus Sans" pitchFamily="2"/>
+                <a:cs typeface="FreeSans" pitchFamily="2"/>
+              </a:defRPr>
+            </a:lvl2pPr>
+            <a:lvl3pPr lvl="2" rtl="0" hangingPunct="0">
+              <a:spcBef>
+                <a:spcPts val="1417"/>
+              </a:spcBef>
+              <a:spcAft>
+                <a:spcPts val="0"/>
+              </a:spcAft>
+              <a:buSzPct val="45000"/>
+              <a:buFont typeface="OpenSymbol"/>
+              <a:buChar char="●"/>
+              <a:tabLst/>
+              <a:defRPr lang="en-US" sz="2400" b="0" i="0" u="none" strike="noStrike" kern="1200" cap="none">
+                <a:ln>
+                  <a:noFill/>
+                </a:ln>
+                <a:highlight>
+                  <a:scrgbClr r="0" g="0" b="0">
+                    <a:alpha val="0"/>
+                  </a:scrgbClr>
+                </a:highlight>
+                <a:latin typeface="URW Bookman" pitchFamily="2"/>
+                <a:ea typeface="Nimbus Sans" pitchFamily="2"/>
+                <a:cs typeface="FreeSans" pitchFamily="2"/>
+              </a:defRPr>
+            </a:lvl3pPr>
+            <a:lvl4pPr lvl="3" rtl="0" hangingPunct="0">
+              <a:spcBef>
+                <a:spcPts val="1417"/>
+              </a:spcBef>
+              <a:spcAft>
+                <a:spcPts val="0"/>
+              </a:spcAft>
+              <a:buSzPct val="75000"/>
+              <a:buFont typeface="OpenSymbol"/>
+              <a:buChar char="–"/>
+              <a:tabLst/>
+              <a:defRPr lang="en-US" sz="2400" b="0" i="0" u="none" strike="noStrike" kern="1200" cap="none">
+                <a:ln>
+                  <a:noFill/>
+                </a:ln>
+                <a:highlight>
+                  <a:scrgbClr r="0" g="0" b="0">
+                    <a:alpha val="0"/>
+                  </a:scrgbClr>
+                </a:highlight>
+                <a:latin typeface="URW Bookman" pitchFamily="2"/>
+                <a:ea typeface="Nimbus Sans" pitchFamily="2"/>
+                <a:cs typeface="FreeSans" pitchFamily="2"/>
+              </a:defRPr>
+            </a:lvl4pPr>
+            <a:lvl5pPr lvl="4" rtl="0" hangingPunct="0">
+              <a:spcBef>
+                <a:spcPts val="1417"/>
+              </a:spcBef>
+              <a:spcAft>
+                <a:spcPts val="0"/>
+              </a:spcAft>
+              <a:buSzPct val="45000"/>
+              <a:buFont typeface="OpenSymbol"/>
+              <a:buChar char="●"/>
+              <a:tabLst/>
+              <a:defRPr lang="en-US" sz="2400" b="0" i="0" u="none" strike="noStrike" kern="1200" cap="none">
+                <a:ln>
+                  <a:noFill/>
+                </a:ln>
+                <a:highlight>
+                  <a:scrgbClr r="0" g="0" b="0">
+                    <a:alpha val="0"/>
+                  </a:scrgbClr>
+                </a:highlight>
+                <a:latin typeface="URW Bookman" pitchFamily="2"/>
+                <a:ea typeface="Nimbus Sans" pitchFamily="2"/>
+                <a:cs typeface="FreeSans" pitchFamily="2"/>
+              </a:defRPr>
+            </a:lvl5pPr>
+            <a:lvl6pPr lvl="5" rtl="0" hangingPunct="0">
+              <a:spcBef>
+                <a:spcPts val="1417"/>
+              </a:spcBef>
+              <a:spcAft>
+                <a:spcPts val="0"/>
+              </a:spcAft>
+              <a:buSzPct val="45000"/>
+              <a:buFont typeface="OpenSymbol"/>
+              <a:buChar char="●"/>
+              <a:tabLst/>
+              <a:defRPr lang="en-US" sz="2400" b="0" i="0" u="none" strike="noStrike" kern="1200" cap="none">
+                <a:ln>
+                  <a:noFill/>
+                </a:ln>
+                <a:highlight>
+                  <a:scrgbClr r="0" g="0" b="0">
+                    <a:alpha val="0"/>
+                  </a:scrgbClr>
+                </a:highlight>
+                <a:latin typeface="URW Bookman" pitchFamily="2"/>
+                <a:ea typeface="Nimbus Sans" pitchFamily="2"/>
+                <a:cs typeface="FreeSans" pitchFamily="2"/>
+              </a:defRPr>
+            </a:lvl6pPr>
+            <a:lvl7pPr lvl="6" rtl="0" hangingPunct="0">
+              <a:spcBef>
+                <a:spcPts val="1417"/>
+              </a:spcBef>
+              <a:spcAft>
+                <a:spcPts val="0"/>
+              </a:spcAft>
+              <a:buSzPct val="45000"/>
+              <a:buFont typeface="OpenSymbol"/>
+              <a:buChar char="●"/>
+              <a:tabLst/>
+              <a:defRPr lang="en-US" sz="2400" b="0" i="0" u="none" strike="noStrike" kern="1200" cap="none">
+                <a:ln>
+                  <a:noFill/>
+                </a:ln>
+                <a:highlight>
+                  <a:scrgbClr r="0" g="0" b="0">
+                    <a:alpha val="0"/>
+                  </a:scrgbClr>
+                </a:highlight>
+                <a:latin typeface="URW Bookman" pitchFamily="2"/>
+                <a:ea typeface="Nimbus Sans" pitchFamily="2"/>
+                <a:cs typeface="FreeSans" pitchFamily="2"/>
+              </a:defRPr>
+            </a:lvl7pPr>
+            <a:lvl8pPr marL="3429000" indent="-228600" algn="l" defTabSz="914400" rtl="0" eaLnBrk="1" latinLnBrk="0" hangingPunct="1">
+              <a:lnSpc>
+                <a:spcPct val="90000"/>
+              </a:lnSpc>
+              <a:spcBef>
+                <a:spcPts val="500"/>
+              </a:spcBef>
+              <a:buFont typeface="Arial" panose="020B0604020202020204" pitchFamily="34" charset="0"/>
+              <a:buChar char="•"/>
+              <a:defRPr sz="1800" kern="1200">
+                <a:solidFill>
+                  <a:schemeClr val="tx1"/>
+                </a:solidFill>
+                <a:latin typeface="+mn-lt"/>
+                <a:ea typeface="+mn-ea"/>
+                <a:cs typeface="+mn-cs"/>
+              </a:defRPr>
+            </a:lvl8pPr>
+            <a:lvl9pPr marL="3886200" indent="-228600" algn="l" defTabSz="914400" rtl="0" eaLnBrk="1" latinLnBrk="0" hangingPunct="1">
+              <a:lnSpc>
+                <a:spcPct val="90000"/>
+              </a:lnSpc>
+              <a:spcBef>
+                <a:spcPts val="500"/>
+              </a:spcBef>
+              <a:buFont typeface="Arial" panose="020B0604020202020204" pitchFamily="34" charset="0"/>
+              <a:buChar char="•"/>
+              <a:defRPr sz="1800" kern="1200">
+                <a:solidFill>
+                  <a:schemeClr val="tx1"/>
+                </a:solidFill>
+                <a:latin typeface="+mn-lt"/>
+                <a:ea typeface="+mn-ea"/>
+                <a:cs typeface="+mn-cs"/>
+              </a:defRPr>
+            </a:lvl9pPr>
+          </a:lstStyle>
+          <a:p>
+            <a:pPr marL="342900" indent="-342900">
+              <a:lnSpc>
+                <a:spcPct val="120000"/>
+              </a:lnSpc>
+              <a:spcBef>
+                <a:spcPts val="0"/>
+              </a:spcBef>
+            </a:pPr>
+            <a:r>
+              <a:rPr lang="en-US" dirty="0">
+                <a:solidFill>
+                  <a:schemeClr val="bg1"/>
+                </a:solidFill>
+              </a:rPr>
+              <a:t>Assertion</a:t>
+            </a:r>
+          </a:p>
+          <a:p>
+            <a:pPr marL="800100" lvl="1" indent="-342900">
+              <a:lnSpc>
+                <a:spcPct val="120000"/>
+              </a:lnSpc>
+              <a:spcBef>
+                <a:spcPts val="0"/>
+              </a:spcBef>
+            </a:pPr>
+            <a:r>
+              <a:rPr lang="en-US" dirty="0" err="1">
+                <a:solidFill>
+                  <a:schemeClr val="bg1"/>
+                </a:solidFill>
+              </a:rPr>
+              <a:t>File.check</a:t>
+            </a:r>
+            <a:endParaRPr lang="en-US" dirty="0">
+              <a:solidFill>
+                <a:schemeClr val="bg1"/>
+              </a:solidFill>
+            </a:endParaRPr>
+          </a:p>
+          <a:p>
+            <a:pPr marL="800100" lvl="1" indent="-342900">
+              <a:lnSpc>
+                <a:spcPct val="120000"/>
+              </a:lnSpc>
+              <a:spcBef>
+                <a:spcPts val="0"/>
+              </a:spcBef>
+            </a:pPr>
+            <a:r>
+              <a:rPr lang="en-US" dirty="0">
+                <a:solidFill>
+                  <a:schemeClr val="bg1"/>
+                </a:solidFill>
+              </a:rPr>
+              <a:t>Preconditions</a:t>
+            </a:r>
+          </a:p>
+          <a:p>
+            <a:pPr marL="342900" indent="-342900">
+              <a:lnSpc>
+                <a:spcPct val="120000"/>
+              </a:lnSpc>
+              <a:spcBef>
+                <a:spcPts val="0"/>
+              </a:spcBef>
+            </a:pPr>
+            <a:r>
+              <a:rPr lang="en-US" dirty="0">
+                <a:solidFill>
+                  <a:schemeClr val="bg1"/>
+                </a:solidFill>
+              </a:rPr>
+              <a:t>Assertion</a:t>
+            </a:r>
+          </a:p>
+          <a:p>
+            <a:pPr marL="800100" lvl="1" indent="-342900">
+              <a:lnSpc>
+                <a:spcPct val="120000"/>
+              </a:lnSpc>
+              <a:spcBef>
+                <a:spcPts val="0"/>
+              </a:spcBef>
+            </a:pPr>
+            <a:r>
+              <a:rPr lang="en-US" dirty="0" err="1">
+                <a:solidFill>
+                  <a:schemeClr val="bg1"/>
+                </a:solidFill>
+              </a:rPr>
+              <a:t>File.check</a:t>
+            </a:r>
+            <a:endParaRPr lang="en-US" dirty="0">
+              <a:solidFill>
+                <a:schemeClr val="bg1"/>
+              </a:solidFill>
+            </a:endParaRPr>
+          </a:p>
+          <a:p>
+            <a:pPr marL="800100" lvl="1" indent="-342900">
+              <a:lnSpc>
+                <a:spcPct val="120000"/>
+              </a:lnSpc>
+              <a:spcBef>
+                <a:spcPts val="0"/>
+              </a:spcBef>
+            </a:pPr>
+            <a:r>
+              <a:rPr lang="en-US" dirty="0">
+                <a:solidFill>
+                  <a:schemeClr val="bg1"/>
+                </a:solidFill>
+              </a:rPr>
+              <a:t>Preconditions</a:t>
+            </a:r>
+          </a:p>
+          <a:p>
+            <a:pPr marL="342900" indent="-342900">
+              <a:lnSpc>
+                <a:spcPct val="120000"/>
+              </a:lnSpc>
+              <a:spcBef>
+                <a:spcPts val="0"/>
+              </a:spcBef>
+            </a:pPr>
+            <a:r>
+              <a:rPr lang="en-US" dirty="0">
+                <a:solidFill>
+                  <a:schemeClr val="bg1"/>
+                </a:solidFill>
+              </a:rPr>
+              <a:t>Assertion</a:t>
+            </a:r>
+          </a:p>
+          <a:p>
+            <a:pPr marL="800100" lvl="1" indent="-342900">
+              <a:lnSpc>
+                <a:spcPct val="120000"/>
+              </a:lnSpc>
+              <a:spcBef>
+                <a:spcPts val="0"/>
+              </a:spcBef>
+            </a:pPr>
+            <a:r>
+              <a:rPr lang="en-US" dirty="0" err="1">
+                <a:solidFill>
+                  <a:schemeClr val="bg1"/>
+                </a:solidFill>
+              </a:rPr>
+              <a:t>File.check</a:t>
+            </a:r>
+            <a:endParaRPr lang="en-US" dirty="0">
+              <a:solidFill>
+                <a:schemeClr val="bg1"/>
+              </a:solidFill>
+            </a:endParaRPr>
+          </a:p>
+          <a:p>
+            <a:pPr marL="800100" lvl="1" indent="-342900">
+              <a:lnSpc>
+                <a:spcPct val="120000"/>
+              </a:lnSpc>
+              <a:spcBef>
+                <a:spcPts val="0"/>
+              </a:spcBef>
+            </a:pPr>
+            <a:r>
+              <a:rPr lang="en-US" dirty="0">
+                <a:solidFill>
+                  <a:schemeClr val="bg1"/>
+                </a:solidFill>
+              </a:rPr>
+              <a:t>Preconditions</a:t>
+            </a:r>
+          </a:p>
+          <a:p>
+            <a:pPr marL="342900" indent="-342900">
+              <a:lnSpc>
+                <a:spcPct val="120000"/>
+              </a:lnSpc>
+              <a:spcBef>
+                <a:spcPts val="0"/>
+              </a:spcBef>
+            </a:pPr>
+            <a:r>
+              <a:rPr lang="en-US" dirty="0">
+                <a:solidFill>
+                  <a:schemeClr val="bg1"/>
+                </a:solidFill>
+              </a:rPr>
+              <a:t>Assertion</a:t>
+            </a:r>
+          </a:p>
+          <a:p>
+            <a:pPr marL="800100" lvl="1" indent="-342900">
+              <a:lnSpc>
+                <a:spcPct val="120000"/>
+              </a:lnSpc>
+              <a:spcBef>
+                <a:spcPts val="0"/>
+              </a:spcBef>
+            </a:pPr>
+            <a:r>
+              <a:rPr lang="en-US" dirty="0" err="1">
+                <a:solidFill>
+                  <a:schemeClr val="bg1"/>
+                </a:solidFill>
+              </a:rPr>
+              <a:t>File.check</a:t>
+            </a:r>
+            <a:endParaRPr lang="en-US" dirty="0">
+              <a:solidFill>
+                <a:schemeClr val="bg1"/>
+              </a:solidFill>
+            </a:endParaRPr>
+          </a:p>
+          <a:p>
+            <a:pPr marL="800100" lvl="1" indent="-342900">
+              <a:lnSpc>
+                <a:spcPct val="120000"/>
+              </a:lnSpc>
+              <a:spcBef>
+                <a:spcPts val="0"/>
+              </a:spcBef>
+            </a:pPr>
+            <a:r>
+              <a:rPr lang="en-US" dirty="0">
+                <a:solidFill>
+                  <a:schemeClr val="bg1"/>
+                </a:solidFill>
+              </a:rPr>
+              <a:t>Preconditions</a:t>
+            </a:r>
+          </a:p>
+          <a:p>
+            <a:pPr marL="342900" indent="-342900">
+              <a:lnSpc>
+                <a:spcPct val="120000"/>
+              </a:lnSpc>
+              <a:spcBef>
+                <a:spcPts val="0"/>
+              </a:spcBef>
+            </a:pPr>
+            <a:r>
+              <a:rPr lang="en-US" dirty="0">
+                <a:solidFill>
+                  <a:schemeClr val="bg1"/>
+                </a:solidFill>
+              </a:rPr>
+              <a:t>Assertion</a:t>
+            </a:r>
+          </a:p>
+          <a:p>
+            <a:pPr marL="800100" lvl="1" indent="-342900">
+              <a:lnSpc>
+                <a:spcPct val="120000"/>
+              </a:lnSpc>
+              <a:spcBef>
+                <a:spcPts val="0"/>
+              </a:spcBef>
+            </a:pPr>
+            <a:r>
+              <a:rPr lang="en-US" dirty="0" err="1">
+                <a:solidFill>
+                  <a:schemeClr val="bg1"/>
+                </a:solidFill>
+              </a:rPr>
+              <a:t>File.check</a:t>
+            </a:r>
+            <a:endParaRPr lang="en-US" dirty="0">
+              <a:solidFill>
+                <a:schemeClr val="bg1"/>
+              </a:solidFill>
+            </a:endParaRPr>
+          </a:p>
+          <a:p>
+            <a:pPr marL="800100" lvl="1" indent="-342900">
+              <a:lnSpc>
+                <a:spcPct val="120000"/>
+              </a:lnSpc>
+              <a:spcBef>
+                <a:spcPts val="0"/>
+              </a:spcBef>
+            </a:pPr>
+            <a:r>
+              <a:rPr lang="en-US" dirty="0">
+                <a:solidFill>
+                  <a:schemeClr val="bg1"/>
+                </a:solidFill>
+              </a:rPr>
+              <a:t>Preconditions</a:t>
+            </a:r>
+          </a:p>
+          <a:p>
+            <a:pPr marL="342900" indent="-342900">
+              <a:lnSpc>
+                <a:spcPct val="120000"/>
+              </a:lnSpc>
+              <a:spcBef>
+                <a:spcPts val="0"/>
+              </a:spcBef>
+            </a:pPr>
+            <a:r>
+              <a:rPr lang="en-US" dirty="0">
+                <a:solidFill>
+                  <a:schemeClr val="bg1"/>
+                </a:solidFill>
+              </a:rPr>
+              <a:t>Assertion</a:t>
+            </a:r>
+          </a:p>
+          <a:p>
+            <a:pPr marL="800100" lvl="1" indent="-342900">
+              <a:lnSpc>
+                <a:spcPct val="120000"/>
+              </a:lnSpc>
+              <a:spcBef>
+                <a:spcPts val="0"/>
+              </a:spcBef>
+            </a:pPr>
+            <a:r>
+              <a:rPr lang="en-US" dirty="0" err="1">
+                <a:solidFill>
+                  <a:schemeClr val="bg1"/>
+                </a:solidFill>
+              </a:rPr>
+              <a:t>File.check</a:t>
+            </a:r>
+            <a:endParaRPr lang="en-US" dirty="0">
+              <a:solidFill>
+                <a:schemeClr val="bg1"/>
+              </a:solidFill>
+            </a:endParaRPr>
+          </a:p>
+          <a:p>
+            <a:pPr marL="800100" lvl="1" indent="-342900">
+              <a:lnSpc>
+                <a:spcPct val="120000"/>
+              </a:lnSpc>
+              <a:spcBef>
+                <a:spcPts val="0"/>
+              </a:spcBef>
+            </a:pPr>
+            <a:r>
+              <a:rPr lang="en-US" dirty="0">
+                <a:solidFill>
+                  <a:schemeClr val="bg1"/>
+                </a:solidFill>
+              </a:rPr>
+              <a:t>Preconditions</a:t>
+            </a:r>
+          </a:p>
+          <a:p>
+            <a:pPr marL="342900" indent="-342900">
+              <a:lnSpc>
+                <a:spcPct val="120000"/>
+              </a:lnSpc>
+              <a:spcBef>
+                <a:spcPts val="0"/>
+              </a:spcBef>
+            </a:pPr>
+            <a:endParaRPr lang="en-US" dirty="0">
+              <a:solidFill>
+                <a:schemeClr val="bg1"/>
+              </a:solidFill>
+            </a:endParaRPr>
+          </a:p>
+        </p:txBody>
+      </p:sp>
+    </p:spTree>
+    <p:extLst>
+      <p:ext uri="{BB962C8B-B14F-4D97-AF65-F5344CB8AC3E}">
+        <p14:creationId xmlns:p14="http://schemas.microsoft.com/office/powerpoint/2010/main" val="2393453098"/>
+      </p:ext>
+    </p:extLst>
+  </p:cSld>
+  <p:clrMapOvr>
+    <a:masterClrMapping/>
+  </p:clrMapOvr>
+</p:sld>
+</file>
+
+<file path=ppt/slides/slide22.xml><?xml version="1.0" encoding="utf-8"?>
+<p:sld xmlns:a="http://schemas.openxmlformats.org/drawingml/2006/main" xmlns:r="http://schemas.openxmlformats.org/officeDocument/2006/relationships" xmlns:p="http://schemas.openxmlformats.org/presentationml/2006/main">
+  <p:cSld>
+    <p:spTree>
+      <p:nvGrpSpPr>
         <p:cNvPr id="1" name="">
           <a:extLst>
             <a:ext uri="{FF2B5EF4-FFF2-40B4-BE49-F238E27FC236}">
@@ -10384,7 +11092,7 @@
 </p:sld>
 </file>
 
-<file path=ppt/slides/slide22.xml><?xml version="1.0" encoding="utf-8"?>
+<file path=ppt/slides/slide23.xml><?xml version="1.0" encoding="utf-8"?>
 <p:sld xmlns:a="http://schemas.openxmlformats.org/drawingml/2006/main" xmlns:r="http://schemas.openxmlformats.org/officeDocument/2006/relationships" xmlns:p="http://schemas.openxmlformats.org/presentationml/2006/main">
   <p:cSld>
     <p:spTree>
@@ -10635,7 +11343,7 @@
 </p:sld>
 </file>
 
-<file path=ppt/slides/slide23.xml><?xml version="1.0" encoding="utf-8"?>
+<file path=ppt/slides/slide24.xml><?xml version="1.0" encoding="utf-8"?>
 <p:sld xmlns:a="http://schemas.openxmlformats.org/drawingml/2006/main" xmlns:r="http://schemas.openxmlformats.org/officeDocument/2006/relationships" xmlns:p="http://schemas.openxmlformats.org/presentationml/2006/main">
   <p:cSld>
     <p:spTree>
@@ -11145,7 +11853,7 @@
 </p:sld>
 </file>
 
-<file path=ppt/slides/slide24.xml><?xml version="1.0" encoding="utf-8"?>
+<file path=ppt/slides/slide25.xml><?xml version="1.0" encoding="utf-8"?>
 <p:sld xmlns:a="http://schemas.openxmlformats.org/drawingml/2006/main" xmlns:r="http://schemas.openxmlformats.org/officeDocument/2006/relationships" xmlns:p="http://schemas.openxmlformats.org/presentationml/2006/main">
   <p:cSld>
     <p:spTree>
@@ -11932,7 +12640,7 @@
 </p:sld>
 </file>
 
-<file path=ppt/slides/slide25.xml><?xml version="1.0" encoding="utf-8"?>
+<file path=ppt/slides/slide26.xml><?xml version="1.0" encoding="utf-8"?>
 <p:sld xmlns:a="http://schemas.openxmlformats.org/drawingml/2006/main" xmlns:r="http://schemas.openxmlformats.org/officeDocument/2006/relationships" xmlns:p="http://schemas.openxmlformats.org/presentationml/2006/main">
   <p:cSld>
     <p:spTree>
@@ -12702,7 +13410,7 @@
 </p:sld>
 </file>
 
-<file path=ppt/slides/slide26.xml><?xml version="1.0" encoding="utf-8"?>
+<file path=ppt/slides/slide27.xml><?xml version="1.0" encoding="utf-8"?>
 <p:sld xmlns:a="http://schemas.openxmlformats.org/drawingml/2006/main" xmlns:r="http://schemas.openxmlformats.org/officeDocument/2006/relationships" xmlns:p="http://schemas.openxmlformats.org/presentationml/2006/main">
   <p:cSld>
     <p:spTree>
@@ -13159,7 +13867,7 @@
 </p:sld>
 </file>
 
-<file path=ppt/slides/slide27.xml><?xml version="1.0" encoding="utf-8"?>
+<file path=ppt/slides/slide28.xml><?xml version="1.0" encoding="utf-8"?>
 <p:sld xmlns:a="http://schemas.openxmlformats.org/drawingml/2006/main" xmlns:r="http://schemas.openxmlformats.org/officeDocument/2006/relationships" xmlns:p="http://schemas.openxmlformats.org/presentationml/2006/main">
   <p:cSld>
     <p:spTree>
@@ -13369,7 +14077,7 @@
 </p:sld>
 </file>
 
-<file path=ppt/slides/slide28.xml><?xml version="1.0" encoding="utf-8"?>
+<file path=ppt/slides/slide29.xml><?xml version="1.0" encoding="utf-8"?>
 <p:sld xmlns:a="http://schemas.openxmlformats.org/drawingml/2006/main" xmlns:r="http://schemas.openxmlformats.org/officeDocument/2006/relationships" xmlns:p="http://schemas.openxmlformats.org/presentationml/2006/main">
   <p:cSld>
     <p:spTree>
@@ -13826,7 +14534,87 @@
 </p:sld>
 </file>
 
-<file path=ppt/slides/slide29.xml><?xml version="1.0" encoding="utf-8"?>
+<file path=ppt/slides/slide3.xml><?xml version="1.0" encoding="utf-8"?>
+<p:sld xmlns:a="http://schemas.openxmlformats.org/drawingml/2006/main" xmlns:r="http://schemas.openxmlformats.org/officeDocument/2006/relationships" xmlns:p="http://schemas.openxmlformats.org/presentationml/2006/main">
+  <p:cSld>
+    <p:spTree>
+      <p:nvGrpSpPr>
+        <p:cNvPr id="1" name="">
+          <a:extLst>
+            <a:ext uri="{FF2B5EF4-FFF2-40B4-BE49-F238E27FC236}">
+              <a16:creationId xmlns:a16="http://schemas.microsoft.com/office/drawing/2014/main" id="{58F8972D-F78A-1960-3B8A-16886F8C946F}"/>
+            </a:ext>
+          </a:extLst>
+        </p:cNvPr>
+        <p:cNvGrpSpPr/>
+        <p:nvPr/>
+      </p:nvGrpSpPr>
+      <p:grpSpPr>
+        <a:xfrm>
+          <a:off x="0" y="0"/>
+          <a:ext cx="0" cy="0"/>
+          <a:chOff x="0" y="0"/>
+          <a:chExt cx="0" cy="0"/>
+        </a:xfrm>
+      </p:grpSpPr>
+      <p:sp>
+        <p:nvSpPr>
+          <p:cNvPr id="2" name="Title 1">
+            <a:extLst>
+              <a:ext uri="{FF2B5EF4-FFF2-40B4-BE49-F238E27FC236}">
+                <a16:creationId xmlns:a16="http://schemas.microsoft.com/office/drawing/2014/main" id="{7ABD8C29-8C71-A5D1-12D4-85015D3B3505}"/>
+              </a:ext>
+            </a:extLst>
+          </p:cNvPr>
+          <p:cNvSpPr txBox="1">
+            <a:spLocks noGrp="1"/>
+          </p:cNvSpPr>
+          <p:nvPr>
+            <p:ph type="title" idx="4294967295"/>
+          </p:nvPr>
+        </p:nvSpPr>
+        <p:spPr>
+          <a:xfrm>
+            <a:off x="504359" y="2041560"/>
+            <a:ext cx="9071640" cy="946440"/>
+          </a:xfrm>
+        </p:spPr>
+        <p:txBody>
+          <a:bodyPr/>
+          <a:lstStyle/>
+          <a:p>
+            <a:pPr lvl="0"/>
+            <a:r>
+              <a:rPr lang="en-US" sz="3200" dirty="0">
+                <a:solidFill>
+                  <a:schemeClr val="bg1"/>
+                </a:solidFill>
+                <a:latin typeface="Liberation Mono" pitchFamily="49"/>
+              </a:rPr>
+              <a:t>Part 1: Prelude: Change Detection Analysis</a:t>
+            </a:r>
+            <a:endParaRPr lang="en-US" sz="3200" dirty="0">
+              <a:solidFill>
+                <a:schemeClr val="bg1"/>
+              </a:solidFill>
+            </a:endParaRPr>
+          </a:p>
+        </p:txBody>
+      </p:sp>
+    </p:spTree>
+    <p:extLst>
+      <p:ext uri="{BB962C8B-B14F-4D97-AF65-F5344CB8AC3E}">
+        <p14:creationId xmlns:p14="http://schemas.microsoft.com/office/powerpoint/2010/main" val="1071112536"/>
+      </p:ext>
+    </p:extLst>
+  </p:cSld>
+  <p:clrMapOvr>
+    <a:masterClrMapping/>
+  </p:clrMapOvr>
+</p:sld>
+</file>
+
+<file path=ppt/slides/slide30.xml><?xml version="1.0" encoding="utf-8"?>
 <p:sld xmlns:a="http://schemas.openxmlformats.org/drawingml/2006/main" xmlns:r="http://schemas.openxmlformats.org/officeDocument/2006/relationships" xmlns:p="http://schemas.openxmlformats.org/presentationml/2006/main">
   <p:cSld>
     <p:spTree>
@@ -14112,87 +14900,7 @@
 </p:sld>
 </file>
 
-<file path=ppt/slides/slide3.xml><?xml version="1.0" encoding="utf-8"?>
-<p:sld xmlns:a="http://schemas.openxmlformats.org/drawingml/2006/main" xmlns:r="http://schemas.openxmlformats.org/officeDocument/2006/relationships" xmlns:p="http://schemas.openxmlformats.org/presentationml/2006/main">
-  <p:cSld>
-    <p:spTree>
-      <p:nvGrpSpPr>
-        <p:cNvPr id="1" name="">
-          <a:extLst>
-            <a:ext uri="{FF2B5EF4-FFF2-40B4-BE49-F238E27FC236}">
-              <a16:creationId xmlns:a16="http://schemas.microsoft.com/office/drawing/2014/main" id="{58F8972D-F78A-1960-3B8A-16886F8C946F}"/>
-            </a:ext>
-          </a:extLst>
-        </p:cNvPr>
-        <p:cNvGrpSpPr/>
-        <p:nvPr/>
-      </p:nvGrpSpPr>
-      <p:grpSpPr>
-        <a:xfrm>
-          <a:off x="0" y="0"/>
-          <a:ext cx="0" cy="0"/>
-          <a:chOff x="0" y="0"/>
-          <a:chExt cx="0" cy="0"/>
-        </a:xfrm>
-      </p:grpSpPr>
-      <p:sp>
-        <p:nvSpPr>
-          <p:cNvPr id="2" name="Title 1">
-            <a:extLst>
-              <a:ext uri="{FF2B5EF4-FFF2-40B4-BE49-F238E27FC236}">
-                <a16:creationId xmlns:a16="http://schemas.microsoft.com/office/drawing/2014/main" id="{7ABD8C29-8C71-A5D1-12D4-85015D3B3505}"/>
-              </a:ext>
-            </a:extLst>
-          </p:cNvPr>
-          <p:cNvSpPr txBox="1">
-            <a:spLocks noGrp="1"/>
-          </p:cNvSpPr>
-          <p:nvPr>
-            <p:ph type="title" idx="4294967295"/>
-          </p:nvPr>
-        </p:nvSpPr>
-        <p:spPr>
-          <a:xfrm>
-            <a:off x="504359" y="2041560"/>
-            <a:ext cx="9071640" cy="946440"/>
-          </a:xfrm>
-        </p:spPr>
-        <p:txBody>
-          <a:bodyPr/>
-          <a:lstStyle/>
-          <a:p>
-            <a:pPr lvl="0"/>
-            <a:r>
-              <a:rPr lang="en-US" sz="3200" dirty="0">
-                <a:solidFill>
-                  <a:schemeClr val="bg1"/>
-                </a:solidFill>
-                <a:latin typeface="Liberation Mono" pitchFamily="49"/>
-              </a:rPr>
-              <a:t>Part 1: Prelude: Change Detection Analysis</a:t>
-            </a:r>
-            <a:endParaRPr lang="en-US" sz="3200" dirty="0">
-              <a:solidFill>
-                <a:schemeClr val="bg1"/>
-              </a:solidFill>
-            </a:endParaRPr>
-          </a:p>
-        </p:txBody>
-      </p:sp>
-    </p:spTree>
-    <p:extLst>
-      <p:ext uri="{BB962C8B-B14F-4D97-AF65-F5344CB8AC3E}">
-        <p14:creationId xmlns:p14="http://schemas.microsoft.com/office/powerpoint/2010/main" val="1071112536"/>
-      </p:ext>
-    </p:extLst>
-  </p:cSld>
-  <p:clrMapOvr>
-    <a:masterClrMapping/>
-  </p:clrMapOvr>
-</p:sld>
-</file>
-
-<file path=ppt/slides/slide30.xml><?xml version="1.0" encoding="utf-8"?>
+<file path=ppt/slides/slide31.xml><?xml version="1.0" encoding="utf-8"?>
 <p:sld xmlns:a="http://schemas.openxmlformats.org/drawingml/2006/main" xmlns:r="http://schemas.openxmlformats.org/officeDocument/2006/relationships" xmlns:p="http://schemas.openxmlformats.org/presentationml/2006/main">
   <p:cSld>
     <p:spTree>
@@ -14649,7 +15357,7 @@
 </p:sld>
 </file>
 
-<file path=ppt/slides/slide31.xml><?xml version="1.0" encoding="utf-8"?>
+<file path=ppt/slides/slide32.xml><?xml version="1.0" encoding="utf-8"?>
 <p:sld xmlns:a="http://schemas.openxmlformats.org/drawingml/2006/main" xmlns:r="http://schemas.openxmlformats.org/officeDocument/2006/relationships" xmlns:p="http://schemas.openxmlformats.org/presentationml/2006/main">
   <p:cSld>
     <p:spTree>
@@ -15126,7 +15834,7 @@
 </p:sld>
 </file>
 
-<file path=ppt/slides/slide32.xml><?xml version="1.0" encoding="utf-8"?>
+<file path=ppt/slides/slide33.xml><?xml version="1.0" encoding="utf-8"?>
 <p:sld xmlns:a="http://schemas.openxmlformats.org/drawingml/2006/main" xmlns:r="http://schemas.openxmlformats.org/officeDocument/2006/relationships" xmlns:p="http://schemas.openxmlformats.org/presentationml/2006/main">
   <p:cSld>
     <p:spTree>
@@ -15143,118 +15851,6 @@
           <a:chExt cx="0" cy="0"/>
         </a:xfrm>
       </p:grpSpPr>
-      <p:sp>
-        <p:nvSpPr>
-          <p:cNvPr id="3" name="TextBox 2">
-            <a:extLst>
-              <a:ext uri="{FF2B5EF4-FFF2-40B4-BE49-F238E27FC236}">
-                <a16:creationId xmlns:a16="http://schemas.microsoft.com/office/drawing/2014/main" id="{F333FDFE-8268-3C20-5CD5-9BCE1AFF1D65}"/>
-              </a:ext>
-            </a:extLst>
-          </p:cNvPr>
-          <p:cNvSpPr txBox="1"/>
-          <p:nvPr/>
-        </p:nvSpPr>
-        <p:spPr>
-          <a:xfrm>
-            <a:off x="906731" y="1648186"/>
-            <a:ext cx="8266176" cy="923330"/>
-          </a:xfrm>
-          <a:prstGeom prst="rect">
-            <a:avLst/>
-          </a:prstGeom>
-          <a:noFill/>
-        </p:spPr>
-        <p:txBody>
-          <a:bodyPr wrap="square">
-            <a:spAutoFit/>
-          </a:bodyPr>
-          <a:lstStyle/>
-          <a:p>
-            <a:pPr marL="342900" indent="-342900">
-              <a:buFont typeface="Arial" panose="020B0604020202020204" pitchFamily="34" charset="0"/>
-              <a:buChar char="•"/>
-            </a:pPr>
-            <a:r>
-              <a:rPr lang="en-US" dirty="0">
-                <a:solidFill>
-                  <a:schemeClr val="bg1"/>
-                </a:solidFill>
-              </a:rPr>
-              <a:t>ACTS generates covering arrays from 2-way to 5-way and outputs a CSV file for each, from which </a:t>
-            </a:r>
-            <a:r>
-              <a:rPr lang="en-US" dirty="0" err="1">
-                <a:solidFill>
-                  <a:schemeClr val="bg1"/>
-                </a:solidFill>
-              </a:rPr>
-              <a:t>NetCDF</a:t>
-            </a:r>
-            <a:r>
-              <a:rPr lang="en-US" dirty="0">
-                <a:solidFill>
-                  <a:schemeClr val="bg1"/>
-                </a:solidFill>
-              </a:rPr>
-              <a:t> files are created using a Python script (</a:t>
-            </a:r>
-            <a:r>
-              <a:rPr lang="en-US" dirty="0">
-                <a:solidFill>
-                  <a:schemeClr val="bg1"/>
-                </a:solidFill>
-                <a:latin typeface="Courier New" panose="02070309020205020404" pitchFamily="49" charset="0"/>
-                <a:cs typeface="Courier New" panose="02070309020205020404" pitchFamily="49" charset="0"/>
-              </a:rPr>
-              <a:t>csv2nc</a:t>
-            </a:r>
-            <a:r>
-              <a:rPr lang="en-US" dirty="0">
-                <a:solidFill>
-                  <a:schemeClr val="bg1"/>
-                </a:solidFill>
-              </a:rPr>
-              <a:t>).</a:t>
-            </a:r>
-          </a:p>
-          <a:p>
-            <a:pPr marL="342900" indent="-342900">
-              <a:buFont typeface="Arial" panose="020B0604020202020204" pitchFamily="34" charset="0"/>
-              <a:buChar char="•"/>
-            </a:pPr>
-            <a:r>
-              <a:rPr lang="en-US" dirty="0">
-                <a:solidFill>
-                  <a:schemeClr val="bg1"/>
-                </a:solidFill>
-              </a:rPr>
-              <a:t>These are run on the model using the </a:t>
-            </a:r>
-            <a:r>
-              <a:rPr lang="en-US" dirty="0" err="1">
-                <a:solidFill>
-                  <a:schemeClr val="bg1"/>
-                </a:solidFill>
-              </a:rPr>
-              <a:t>NetCDF</a:t>
-            </a:r>
-            <a:r>
-              <a:rPr lang="en-US" dirty="0">
-                <a:solidFill>
-                  <a:schemeClr val="bg1"/>
-                </a:solidFill>
-              </a:rPr>
-              <a:t> Cases Sampling Plugin. </a:t>
-            </a:r>
-            <a:endParaRPr lang="en-US" i="1" dirty="0">
-              <a:solidFill>
-                <a:schemeClr val="bg1"/>
-              </a:solidFill>
-            </a:endParaRPr>
-          </a:p>
-        </p:txBody>
-      </p:sp>
       <p:sp>
         <p:nvSpPr>
           <p:cNvPr id="4" name="Title 1">
@@ -15347,7 +15943,7 @@
         </p:blipFill>
         <p:spPr>
           <a:xfrm>
-            <a:off x="0" y="3025681"/>
+            <a:off x="-494" y="3566315"/>
             <a:ext cx="10080625" cy="2004845"/>
           </a:xfrm>
           <a:prstGeom prst="rect">
@@ -15355,6 +15951,141 @@
           </a:prstGeom>
         </p:spPr>
       </p:pic>
+      <p:sp>
+        <p:nvSpPr>
+          <p:cNvPr id="5" name="TextBox 4">
+            <a:extLst>
+              <a:ext uri="{FF2B5EF4-FFF2-40B4-BE49-F238E27FC236}">
+                <a16:creationId xmlns:a16="http://schemas.microsoft.com/office/drawing/2014/main" id="{69727AC1-76D2-AB63-CD6D-E623FD4EF359}"/>
+              </a:ext>
+            </a:extLst>
+          </p:cNvPr>
+          <p:cNvSpPr txBox="1"/>
+          <p:nvPr/>
+        </p:nvSpPr>
+        <p:spPr>
+          <a:xfrm>
+            <a:off x="503998" y="1117145"/>
+            <a:ext cx="9071639" cy="2031325"/>
+          </a:xfrm>
+          <a:prstGeom prst="rect">
+            <a:avLst/>
+          </a:prstGeom>
+          <a:noFill/>
+        </p:spPr>
+        <p:txBody>
+          <a:bodyPr wrap="square">
+            <a:spAutoFit/>
+          </a:bodyPr>
+          <a:lstStyle/>
+          <a:p>
+            <a:pPr marL="342900" indent="-342900">
+              <a:buFont typeface="Arial" panose="020B0604020202020204" pitchFamily="34" charset="0"/>
+              <a:buChar char="•"/>
+            </a:pPr>
+            <a:r>
+              <a:rPr lang="en-US" dirty="0">
+                <a:solidFill>
+                  <a:schemeClr val="bg1"/>
+                </a:solidFill>
+              </a:rPr>
+              <a:t>The configuration file provides the indices for the number of values each model constant can take. </a:t>
+            </a:r>
+          </a:p>
+          <a:p>
+            <a:pPr marL="342900" indent="-342900">
+              <a:buFont typeface="Arial" panose="020B0604020202020204" pitchFamily="34" charset="0"/>
+              <a:buChar char="•"/>
+            </a:pPr>
+            <a:r>
+              <a:rPr lang="en-US" dirty="0">
+                <a:solidFill>
+                  <a:schemeClr val="bg1"/>
+                </a:solidFill>
+              </a:rPr>
+              <a:t>ACTS uses these indices to generate covering arrays from 2-way to 5-way and outputs a CSV file for each. </a:t>
+            </a:r>
+          </a:p>
+          <a:p>
+            <a:pPr marL="342900" indent="-342900">
+              <a:buFont typeface="Arial" panose="020B0604020202020204" pitchFamily="34" charset="0"/>
+              <a:buChar char="•"/>
+            </a:pPr>
+            <a:r>
+              <a:rPr lang="en-US" dirty="0">
+                <a:solidFill>
+                  <a:schemeClr val="bg1"/>
+                </a:solidFill>
+              </a:rPr>
+              <a:t>The partition file provides the values that csv2nc will map to the indices in the csv files. </a:t>
+            </a:r>
+          </a:p>
+          <a:p>
+            <a:pPr marL="342900" indent="-342900">
+              <a:buFont typeface="Arial" panose="020B0604020202020204" pitchFamily="34" charset="0"/>
+              <a:buChar char="•"/>
+            </a:pPr>
+            <a:r>
+              <a:rPr lang="en-US" dirty="0">
+                <a:solidFill>
+                  <a:schemeClr val="bg1"/>
+                </a:solidFill>
+              </a:rPr>
+              <a:t>The Python script (</a:t>
+            </a:r>
+            <a:r>
+              <a:rPr lang="en-US" dirty="0">
+                <a:solidFill>
+                  <a:schemeClr val="bg1"/>
+                </a:solidFill>
+                <a:latin typeface="Courier New" panose="02070309020205020404" pitchFamily="49" charset="0"/>
+                <a:cs typeface="Courier New" panose="02070309020205020404" pitchFamily="49" charset="0"/>
+              </a:rPr>
+              <a:t>csv2nc</a:t>
+            </a:r>
+            <a:r>
+              <a:rPr lang="en-US" dirty="0">
+                <a:solidFill>
+                  <a:schemeClr val="bg1"/>
+                </a:solidFill>
+              </a:rPr>
+              <a:t>) uses the actual values to create </a:t>
+            </a:r>
+            <a:r>
+              <a:rPr lang="en-US" dirty="0" err="1">
+                <a:solidFill>
+                  <a:schemeClr val="bg1"/>
+                </a:solidFill>
+              </a:rPr>
+              <a:t>NetCDF</a:t>
+            </a:r>
+            <a:r>
+              <a:rPr lang="en-US" dirty="0">
+                <a:solidFill>
+                  <a:schemeClr val="bg1"/>
+                </a:solidFill>
+              </a:rPr>
+              <a:t> files which are run on the model using the </a:t>
+            </a:r>
+            <a:r>
+              <a:rPr lang="en-US" dirty="0" err="1">
+                <a:solidFill>
+                  <a:schemeClr val="bg1"/>
+                </a:solidFill>
+              </a:rPr>
+              <a:t>NetCDF</a:t>
+            </a:r>
+            <a:r>
+              <a:rPr lang="en-US" dirty="0">
+                <a:solidFill>
+                  <a:schemeClr val="bg1"/>
+                </a:solidFill>
+              </a:rPr>
+              <a:t> Cases Sampling Plugin. </a:t>
+            </a:r>
+          </a:p>
+        </p:txBody>
+      </p:sp>
     </p:spTree>
     <p:extLst>
       <p:ext uri="{BB962C8B-B14F-4D97-AF65-F5344CB8AC3E}">
@@ -15368,7 +16099,7 @@
 </p:sld>
 </file>
 
-<file path=ppt/slides/slide33.xml><?xml version="1.0" encoding="utf-8"?>
+<file path=ppt/slides/slide34.xml><?xml version="1.0" encoding="utf-8"?>
 <p:sld xmlns:a="http://schemas.openxmlformats.org/drawingml/2006/main" xmlns:r="http://schemas.openxmlformats.org/officeDocument/2006/relationships" xmlns:p="http://schemas.openxmlformats.org/presentationml/2006/main">
   <p:cSld>
     <p:spTree>
@@ -15897,7 +16628,7 @@
         <p:spPr>
           <a:xfrm>
             <a:off x="503999" y="1407970"/>
-            <a:ext cx="9071640" cy="1477328"/>
+            <a:ext cx="9071640" cy="1754326"/>
           </a:xfrm>
           <a:prstGeom prst="rect">
             <a:avLst/>
@@ -15934,7 +16665,25 @@
                   <a:schemeClr val="bg1"/>
                 </a:solidFill>
               </a:rPr>
-              <a:t> (for 35 time steps) is 0.622 seconds, with a standard deviation of 0.030. This time is used to estimate how long testing each interaction level would take, assuming tests run sequentially.</a:t>
+              <a:t> (for 35 time steps) is 0.622 seconds, with a standard deviation of 0.030. This time is used to estimate how long testing each interaction level would take, assuming tests run sequentially. It was calculated by timing 10 runs of </a:t>
+            </a:r>
+            <a:r>
+              <a:rPr lang="en-US" dirty="0" err="1">
+                <a:solidFill>
+                  <a:schemeClr val="bg1"/>
+                </a:solidFill>
+                <a:latin typeface="Courier New" panose="02070309020205020404" pitchFamily="49" charset="0"/>
+                <a:cs typeface="Courier New" panose="02070309020205020404" pitchFamily="49" charset="0"/>
+              </a:rPr>
+              <a:t>elmtest</a:t>
+            </a:r>
+            <a:r>
+              <a:rPr lang="en-US" dirty="0">
+                <a:solidFill>
+                  <a:schemeClr val="bg1"/>
+                </a:solidFill>
+              </a:rPr>
+              <a:t>.</a:t>
             </a:r>
           </a:p>
           <a:p>
@@ -15969,7 +16718,7 @@
 </p:sld>
 </file>
 
-<file path=ppt/slides/slide34.xml><?xml version="1.0" encoding="utf-8"?>
+<file path=ppt/slides/slide35.xml><?xml version="1.0" encoding="utf-8"?>
 <p:sld xmlns:a="http://schemas.openxmlformats.org/drawingml/2006/main" xmlns:r="http://schemas.openxmlformats.org/officeDocument/2006/relationships" xmlns:p="http://schemas.openxmlformats.org/presentationml/2006/main">
   <p:cSld>
     <p:spTree>
@@ -16483,6 +17232,63 @@
           </a:graphicData>
         </a:graphic>
       </p:graphicFrame>
+      <p:sp>
+        <p:nvSpPr>
+          <p:cNvPr id="4" name="TextBox 3">
+            <a:extLst>
+              <a:ext uri="{FF2B5EF4-FFF2-40B4-BE49-F238E27FC236}">
+                <a16:creationId xmlns:a16="http://schemas.microsoft.com/office/drawing/2014/main" id="{7B93F8A6-700D-2667-6362-F2840080F6E7}"/>
+              </a:ext>
+            </a:extLst>
+          </p:cNvPr>
+          <p:cNvSpPr txBox="1"/>
+          <p:nvPr/>
+        </p:nvSpPr>
+        <p:spPr>
+          <a:xfrm>
+            <a:off x="906730" y="4108527"/>
+            <a:ext cx="8266176" cy="1200329"/>
+          </a:xfrm>
+          <a:prstGeom prst="rect">
+            <a:avLst/>
+          </a:prstGeom>
+          <a:noFill/>
+        </p:spPr>
+        <p:txBody>
+          <a:bodyPr wrap="square">
+            <a:spAutoFit/>
+          </a:bodyPr>
+          <a:lstStyle/>
+          <a:p>
+            <a:pPr marL="342900" indent="-342900">
+              <a:buFont typeface="Arial" panose="020B0604020202020204" pitchFamily="34" charset="0"/>
+              <a:buChar char="•"/>
+            </a:pPr>
+            <a:r>
+              <a:rPr lang="en-US" dirty="0">
+                <a:solidFill>
+                  <a:schemeClr val="bg1"/>
+                </a:solidFill>
+              </a:rPr>
+              <a:t>This represents the amount of time it took to generate the test cases that include all constants using ACTS.</a:t>
+            </a:r>
+          </a:p>
+          <a:p>
+            <a:pPr marL="342900" indent="-342900">
+              <a:buFont typeface="Arial" panose="020B0604020202020204" pitchFamily="34" charset="0"/>
+              <a:buChar char="•"/>
+            </a:pPr>
+            <a:r>
+              <a:rPr lang="en-US" dirty="0">
+                <a:solidFill>
+                  <a:schemeClr val="bg1"/>
+                </a:solidFill>
+              </a:rPr>
+              <a:t>The Mean and Standard Deviation were calculated using 7 runs of ACTS for each DOI level. </a:t>
+            </a:r>
+          </a:p>
+        </p:txBody>
+      </p:sp>
     </p:spTree>
     <p:extLst>
       <p:ext uri="{BB962C8B-B14F-4D97-AF65-F5344CB8AC3E}">
@@ -16496,7 +17302,7 @@
 </p:sld>
 </file>
 
-<file path=ppt/slides/slide35.xml><?xml version="1.0" encoding="utf-8"?>
+<file path=ppt/slides/slide36.xml><?xml version="1.0" encoding="utf-8"?>
 <p:sld xmlns:a="http://schemas.openxmlformats.org/drawingml/2006/main" xmlns:r="http://schemas.openxmlformats.org/officeDocument/2006/relationships" xmlns:p="http://schemas.openxmlformats.org/presentationml/2006/main">
   <p:cSld>
     <p:spTree>
@@ -17020,6 +17826,99 @@
           </a:graphicData>
         </a:graphic>
       </p:graphicFrame>
+      <p:sp>
+        <p:nvSpPr>
+          <p:cNvPr id="6" name="TextBox 5">
+            <a:extLst>
+              <a:ext uri="{FF2B5EF4-FFF2-40B4-BE49-F238E27FC236}">
+                <a16:creationId xmlns:a16="http://schemas.microsoft.com/office/drawing/2014/main" id="{7532A514-C919-504E-25DB-495B844597C5}"/>
+              </a:ext>
+            </a:extLst>
+          </p:cNvPr>
+          <p:cNvSpPr txBox="1"/>
+          <p:nvPr/>
+        </p:nvSpPr>
+        <p:spPr>
+          <a:xfrm>
+            <a:off x="906730" y="4108526"/>
+            <a:ext cx="8266176" cy="1200329"/>
+          </a:xfrm>
+          <a:prstGeom prst="rect">
+            <a:avLst/>
+          </a:prstGeom>
+          <a:noFill/>
+        </p:spPr>
+        <p:txBody>
+          <a:bodyPr wrap="square">
+            <a:spAutoFit/>
+          </a:bodyPr>
+          <a:lstStyle/>
+          <a:p>
+            <a:pPr marL="342900" indent="-342900">
+              <a:buFont typeface="Arial" panose="020B0604020202020204" pitchFamily="34" charset="0"/>
+              <a:buChar char="•"/>
+            </a:pPr>
+            <a:r>
+              <a:rPr lang="en-US" dirty="0">
+                <a:solidFill>
+                  <a:schemeClr val="bg1"/>
+                </a:solidFill>
+              </a:rPr>
+              <a:t>This represents the amount of time it took to generate the test cases that include all constants using </a:t>
+            </a:r>
+            <a:r>
+              <a:rPr lang="en-US" dirty="0">
+                <a:solidFill>
+                  <a:schemeClr val="bg1"/>
+                </a:solidFill>
+                <a:latin typeface="Courier New" panose="02070309020205020404" pitchFamily="49" charset="0"/>
+                <a:cs typeface="Courier New" panose="02070309020205020404" pitchFamily="49" charset="0"/>
+              </a:rPr>
+              <a:t>csv2nc</a:t>
+            </a:r>
+            <a:r>
+              <a:rPr lang="en-US" dirty="0">
+                <a:solidFill>
+                  <a:schemeClr val="bg1"/>
+                </a:solidFill>
+              </a:rPr>
+              <a:t>.</a:t>
+            </a:r>
+          </a:p>
+          <a:p>
+            <a:pPr marL="342900" indent="-342900">
+              <a:buFont typeface="Arial" panose="020B0604020202020204" pitchFamily="34" charset="0"/>
+              <a:buChar char="•"/>
+            </a:pPr>
+            <a:r>
+              <a:rPr lang="en-US" dirty="0">
+                <a:solidFill>
+                  <a:schemeClr val="bg1"/>
+                </a:solidFill>
+              </a:rPr>
+              <a:t>The Mean and Standard Deviation were calculated using 7 runs of </a:t>
+            </a:r>
+            <a:r>
+              <a:rPr lang="en-US" dirty="0">
+                <a:solidFill>
+                  <a:schemeClr val="bg1"/>
+                </a:solidFill>
+                <a:latin typeface="Courier New" panose="02070309020205020404" pitchFamily="49" charset="0"/>
+                <a:cs typeface="Courier New" panose="02070309020205020404" pitchFamily="49" charset="0"/>
+              </a:rPr>
+              <a:t>csv2nc</a:t>
+            </a:r>
+            <a:r>
+              <a:rPr lang="en-US" dirty="0">
+                <a:solidFill>
+                  <a:schemeClr val="bg1"/>
+                </a:solidFill>
+              </a:rPr>
+              <a:t> for each DOI level. </a:t>
+            </a:r>
+          </a:p>
+        </p:txBody>
+      </p:sp>
     </p:spTree>
     <p:extLst>
       <p:ext uri="{BB962C8B-B14F-4D97-AF65-F5344CB8AC3E}">
@@ -17033,7 +17932,7 @@
 </p:sld>
 </file>
 
-<file path=ppt/slides/slide36.xml><?xml version="1.0" encoding="utf-8"?>
+<file path=ppt/slides/slide37.xml><?xml version="1.0" encoding="utf-8"?>
 <p:sld xmlns:a="http://schemas.openxmlformats.org/drawingml/2006/main" xmlns:r="http://schemas.openxmlformats.org/officeDocument/2006/relationships" xmlns:p="http://schemas.openxmlformats.org/presentationml/2006/main">
   <p:cSld>
     <p:spTree>
@@ -17664,7 +18563,7 @@
 </p:sld>
 </file>
 
-<file path=ppt/slides/slide37.xml><?xml version="1.0" encoding="utf-8"?>
+<file path=ppt/slides/slide38.xml><?xml version="1.0" encoding="utf-8"?>
 <p:sld xmlns:a="http://schemas.openxmlformats.org/drawingml/2006/main" xmlns:r="http://schemas.openxmlformats.org/officeDocument/2006/relationships" xmlns:p="http://schemas.openxmlformats.org/presentationml/2006/main">
   <p:cSld>
     <p:spTree>
@@ -18184,6 +19083,63 @@
           </a:graphicData>
         </a:graphic>
       </p:graphicFrame>
+      <p:sp>
+        <p:nvSpPr>
+          <p:cNvPr id="4" name="TextBox 3">
+            <a:extLst>
+              <a:ext uri="{FF2B5EF4-FFF2-40B4-BE49-F238E27FC236}">
+                <a16:creationId xmlns:a16="http://schemas.microsoft.com/office/drawing/2014/main" id="{F46CDE56-F19B-4D8B-06E6-5EF3CBBA1F4A}"/>
+              </a:ext>
+            </a:extLst>
+          </p:cNvPr>
+          <p:cNvSpPr txBox="1"/>
+          <p:nvPr/>
+        </p:nvSpPr>
+        <p:spPr>
+          <a:xfrm>
+            <a:off x="906730" y="4128405"/>
+            <a:ext cx="8266176" cy="1200329"/>
+          </a:xfrm>
+          <a:prstGeom prst="rect">
+            <a:avLst/>
+          </a:prstGeom>
+          <a:noFill/>
+        </p:spPr>
+        <p:txBody>
+          <a:bodyPr wrap="square">
+            <a:spAutoFit/>
+          </a:bodyPr>
+          <a:lstStyle/>
+          <a:p>
+            <a:pPr marL="342900" indent="-342900">
+              <a:buFont typeface="Arial" panose="020B0604020202020204" pitchFamily="34" charset="0"/>
+              <a:buChar char="•"/>
+            </a:pPr>
+            <a:r>
+              <a:rPr lang="en-US" dirty="0">
+                <a:solidFill>
+                  <a:schemeClr val="bg1"/>
+                </a:solidFill>
+              </a:rPr>
+              <a:t>This represents the amount of time it took to generate the test cases that include all constants using ACTS.</a:t>
+            </a:r>
+          </a:p>
+          <a:p>
+            <a:pPr marL="342900" indent="-342900">
+              <a:buFont typeface="Arial" panose="020B0604020202020204" pitchFamily="34" charset="0"/>
+              <a:buChar char="•"/>
+            </a:pPr>
+            <a:r>
+              <a:rPr lang="en-US" dirty="0">
+                <a:solidFill>
+                  <a:schemeClr val="bg1"/>
+                </a:solidFill>
+              </a:rPr>
+              <a:t>The Mean and Standard Deviation were calculated using 7 runs of ACTS for each DOI level. </a:t>
+            </a:r>
+          </a:p>
+        </p:txBody>
+      </p:sp>
     </p:spTree>
     <p:extLst>
       <p:ext uri="{BB962C8B-B14F-4D97-AF65-F5344CB8AC3E}">
@@ -18197,7 +19153,7 @@
 </p:sld>
 </file>
 
-<file path=ppt/slides/slide38.xml><?xml version="1.0" encoding="utf-8"?>
+<file path=ppt/slides/slide39.xml><?xml version="1.0" encoding="utf-8"?>
 <p:sld xmlns:a="http://schemas.openxmlformats.org/drawingml/2006/main" xmlns:r="http://schemas.openxmlformats.org/officeDocument/2006/relationships" xmlns:p="http://schemas.openxmlformats.org/presentationml/2006/main">
   <p:cSld>
     <p:spTree>
@@ -18727,6 +19683,99 @@
           </a:graphicData>
         </a:graphic>
       </p:graphicFrame>
+      <p:sp>
+        <p:nvSpPr>
+          <p:cNvPr id="4" name="TextBox 3">
+            <a:extLst>
+              <a:ext uri="{FF2B5EF4-FFF2-40B4-BE49-F238E27FC236}">
+                <a16:creationId xmlns:a16="http://schemas.microsoft.com/office/drawing/2014/main" id="{E0E99895-514D-3A27-3B7D-D37137C23263}"/>
+              </a:ext>
+            </a:extLst>
+          </p:cNvPr>
+          <p:cNvSpPr txBox="1"/>
+          <p:nvPr/>
+        </p:nvSpPr>
+        <p:spPr>
+          <a:xfrm>
+            <a:off x="906730" y="4088648"/>
+            <a:ext cx="8266176" cy="1200329"/>
+          </a:xfrm>
+          <a:prstGeom prst="rect">
+            <a:avLst/>
+          </a:prstGeom>
+          <a:noFill/>
+        </p:spPr>
+        <p:txBody>
+          <a:bodyPr wrap="square">
+            <a:spAutoFit/>
+          </a:bodyPr>
+          <a:lstStyle/>
+          <a:p>
+            <a:pPr marL="342900" indent="-342900">
+              <a:buFont typeface="Arial" panose="020B0604020202020204" pitchFamily="34" charset="0"/>
+              <a:buChar char="•"/>
+            </a:pPr>
+            <a:r>
+              <a:rPr lang="en-US" dirty="0">
+                <a:solidFill>
+                  <a:schemeClr val="bg1"/>
+                </a:solidFill>
+              </a:rPr>
+              <a:t>This represents the amount of time it took to generate the test cases that include all constants using </a:t>
+            </a:r>
+            <a:r>
+              <a:rPr lang="en-US" dirty="0">
+                <a:solidFill>
+                  <a:schemeClr val="bg1"/>
+                </a:solidFill>
+                <a:latin typeface="Courier New" panose="02070309020205020404" pitchFamily="49" charset="0"/>
+                <a:cs typeface="Courier New" panose="02070309020205020404" pitchFamily="49" charset="0"/>
+              </a:rPr>
+              <a:t>csv2nc</a:t>
+            </a:r>
+            <a:r>
+              <a:rPr lang="en-US" dirty="0">
+                <a:solidFill>
+                  <a:schemeClr val="bg1"/>
+                </a:solidFill>
+              </a:rPr>
+              <a:t>.</a:t>
+            </a:r>
+          </a:p>
+          <a:p>
+            <a:pPr marL="342900" indent="-342900">
+              <a:buFont typeface="Arial" panose="020B0604020202020204" pitchFamily="34" charset="0"/>
+              <a:buChar char="•"/>
+            </a:pPr>
+            <a:r>
+              <a:rPr lang="en-US" dirty="0">
+                <a:solidFill>
+                  <a:schemeClr val="bg1"/>
+                </a:solidFill>
+              </a:rPr>
+              <a:t>The Mean and Standard Deviation were calculated using 7 runs of </a:t>
+            </a:r>
+            <a:r>
+              <a:rPr lang="en-US" dirty="0">
+                <a:solidFill>
+                  <a:schemeClr val="bg1"/>
+                </a:solidFill>
+                <a:latin typeface="Courier New" panose="02070309020205020404" pitchFamily="49" charset="0"/>
+                <a:cs typeface="Courier New" panose="02070309020205020404" pitchFamily="49" charset="0"/>
+              </a:rPr>
+              <a:t>csv2nc</a:t>
+            </a:r>
+            <a:r>
+              <a:rPr lang="en-US" dirty="0">
+                <a:solidFill>
+                  <a:schemeClr val="bg1"/>
+                </a:solidFill>
+              </a:rPr>
+              <a:t> for each DOI level. </a:t>
+            </a:r>
+          </a:p>
+        </p:txBody>
+      </p:sp>
     </p:spTree>
     <p:extLst>
       <p:ext uri="{BB962C8B-B14F-4D97-AF65-F5344CB8AC3E}">
@@ -18737,178 +19786,6 @@
   <p:clrMapOvr>
     <a:masterClrMapping/>
   </p:clrMapOvr>
-</p:sld>
-</file>
-
-<file path=ppt/slides/slide39.xml><?xml version="1.0" encoding="utf-8"?>
-<p:sld xmlns:a="http://schemas.openxmlformats.org/drawingml/2006/main" xmlns:r="http://schemas.openxmlformats.org/officeDocument/2006/relationships" xmlns:p="http://schemas.openxmlformats.org/presentationml/2006/main">
-  <p:cSld name="page7">
-    <p:spTree>
-      <p:nvGrpSpPr>
-        <p:cNvPr id="1" name=""/>
-        <p:cNvGrpSpPr/>
-        <p:nvPr/>
-      </p:nvGrpSpPr>
-      <p:grpSpPr>
-        <a:xfrm>
-          <a:off x="0" y="0"/>
-          <a:ext cx="0" cy="0"/>
-          <a:chOff x="0" y="0"/>
-          <a:chExt cx="0" cy="0"/>
-        </a:xfrm>
-      </p:grpSpPr>
-      <p:sp>
-        <p:nvSpPr>
-          <p:cNvPr id="2" name="Title 1">
-            <a:extLst>
-              <a:ext uri="{FF2B5EF4-FFF2-40B4-BE49-F238E27FC236}">
-                <a16:creationId xmlns:a16="http://schemas.microsoft.com/office/drawing/2014/main" id="{44B3FCDA-4EC5-B19D-5009-23CEC9F74198}"/>
-              </a:ext>
-            </a:extLst>
-          </p:cNvPr>
-          <p:cNvSpPr txBox="1">
-            <a:spLocks noGrp="1"/>
-          </p:cNvSpPr>
-          <p:nvPr>
-            <p:ph type="title" idx="4294967295"/>
-          </p:nvPr>
-        </p:nvSpPr>
-        <p:spPr>
-          <a:xfrm>
-            <a:off x="503999" y="229261"/>
-            <a:ext cx="3346641" cy="553998"/>
-          </a:xfrm>
-        </p:spPr>
-        <p:txBody>
-          <a:bodyPr wrap="square">
-            <a:spAutoFit/>
-          </a:bodyPr>
-          <a:lstStyle/>
-          <a:p>
-            <a:pPr lvl="0"/>
-            <a:r>
-              <a:rPr lang="en-US" dirty="0">
-                <a:solidFill>
-                  <a:schemeClr val="bg1"/>
-                </a:solidFill>
-              </a:rPr>
-              <a:t>DOI 2 Results</a:t>
-            </a:r>
-          </a:p>
-        </p:txBody>
-      </p:sp>
-      <p:sp>
-        <p:nvSpPr>
-          <p:cNvPr id="3" name="Text Placeholder 2">
-            <a:extLst>
-              <a:ext uri="{FF2B5EF4-FFF2-40B4-BE49-F238E27FC236}">
-                <a16:creationId xmlns:a16="http://schemas.microsoft.com/office/drawing/2014/main" id="{3F589F92-B484-4E15-0CDC-FFD075A2A74E}"/>
-              </a:ext>
-            </a:extLst>
-          </p:cNvPr>
-          <p:cNvSpPr txBox="1">
-            <a:spLocks noGrp="1"/>
-          </p:cNvSpPr>
-          <p:nvPr>
-            <p:ph type="body" idx="4294967295"/>
-          </p:nvPr>
-        </p:nvSpPr>
-        <p:spPr>
-          <a:xfrm>
-            <a:off x="503999" y="976300"/>
-            <a:ext cx="3346641" cy="4271950"/>
-          </a:xfrm>
-        </p:spPr>
-        <p:txBody>
-          <a:bodyPr>
-            <a:normAutofit lnSpcReduction="10000"/>
-          </a:bodyPr>
-          <a:lstStyle/>
-          <a:p>
-            <a:pPr marL="342900" indent="-342900"/>
-            <a:r>
-              <a:rPr lang="en-US" dirty="0">
-                <a:solidFill>
-                  <a:schemeClr val="bg1"/>
-                </a:solidFill>
-                <a:latin typeface="AppleSystemUIFont" pitchFamily="2"/>
-              </a:rPr>
-              <a:t>Degree of Interaction (DOI) 2 results in 231 test cases when only changing the values of constants known to affect the outputs of </a:t>
-            </a:r>
-            <a:r>
-              <a:rPr lang="en-US" dirty="0" err="1">
-                <a:solidFill>
-                  <a:schemeClr val="bg1"/>
-                </a:solidFill>
-                <a:latin typeface="Courier New" panose="02070309020205020404" pitchFamily="49" charset="0"/>
-                <a:cs typeface="Courier New" panose="02070309020205020404" pitchFamily="49" charset="0"/>
-              </a:rPr>
-              <a:t>LakeTemperature</a:t>
-            </a:r>
-            <a:r>
-              <a:rPr lang="en-US" dirty="0">
-                <a:solidFill>
-                  <a:schemeClr val="bg1"/>
-                </a:solidFill>
-                <a:latin typeface="AppleSystemUIFont" pitchFamily="2"/>
-              </a:rPr>
-              <a:t>.</a:t>
-            </a:r>
-          </a:p>
-          <a:p>
-            <a:pPr marL="342900" indent="-342900"/>
-            <a:r>
-              <a:rPr lang="en-US" dirty="0">
-                <a:solidFill>
-                  <a:schemeClr val="bg1"/>
-                </a:solidFill>
-                <a:latin typeface="AppleSystemUIFont" pitchFamily="2"/>
-              </a:rPr>
-              <a:t>33 runs exited with an error because they used values outside of the valid ranges for some model constants.</a:t>
-            </a:r>
-          </a:p>
-        </p:txBody>
-      </p:sp>
-      <p:pic>
-        <p:nvPicPr>
-          <p:cNvPr id="5" name="Picture 4">
-            <a:extLst>
-              <a:ext uri="{FF2B5EF4-FFF2-40B4-BE49-F238E27FC236}">
-                <a16:creationId xmlns:a16="http://schemas.microsoft.com/office/drawing/2014/main" id="{15C94A79-243F-8D40-B5DA-BED8A49E8184}"/>
-              </a:ext>
-            </a:extLst>
-          </p:cNvPr>
-          <p:cNvPicPr>
-            <a:picLocks noChangeAspect="1"/>
-          </p:cNvPicPr>
-          <p:nvPr/>
-        </p:nvPicPr>
-        <p:blipFill>
-          <a:blip r:embed="rId4"/>
-          <a:stretch>
-            <a:fillRect/>
-          </a:stretch>
-        </p:blipFill>
-        <p:spPr>
-          <a:xfrm>
-            <a:off x="4114644" y="0"/>
-            <a:ext cx="6037257" cy="5670550"/>
-          </a:xfrm>
-          <a:prstGeom prst="rect">
-            <a:avLst/>
-          </a:prstGeom>
-        </p:spPr>
-      </p:pic>
-    </p:spTree>
-  </p:cSld>
-  <p:clrMapOvr>
-    <a:masterClrMapping/>
-  </p:clrMapOvr>
-  <p:extLst>
-    <p:ext uri="{6950BFC3-D8DA-4A85-94F7-54DA5524770B}">
-      <p188:commentRel xmlns:p188="http://schemas.microsoft.com/office/powerpoint/2018/8/main" r:id="rId3"/>
-    </p:ext>
-  </p:extLst>
 </p:sld>
 </file>
 
@@ -19044,6 +19921,178 @@
 </file>
 
 <file path=ppt/slides/slide40.xml><?xml version="1.0" encoding="utf-8"?>
+<p:sld xmlns:a="http://schemas.openxmlformats.org/drawingml/2006/main" xmlns:r="http://schemas.openxmlformats.org/officeDocument/2006/relationships" xmlns:p="http://schemas.openxmlformats.org/presentationml/2006/main">
+  <p:cSld name="page7">
+    <p:spTree>
+      <p:nvGrpSpPr>
+        <p:cNvPr id="1" name=""/>
+        <p:cNvGrpSpPr/>
+        <p:nvPr/>
+      </p:nvGrpSpPr>
+      <p:grpSpPr>
+        <a:xfrm>
+          <a:off x="0" y="0"/>
+          <a:ext cx="0" cy="0"/>
+          <a:chOff x="0" y="0"/>
+          <a:chExt cx="0" cy="0"/>
+        </a:xfrm>
+      </p:grpSpPr>
+      <p:sp>
+        <p:nvSpPr>
+          <p:cNvPr id="2" name="Title 1">
+            <a:extLst>
+              <a:ext uri="{FF2B5EF4-FFF2-40B4-BE49-F238E27FC236}">
+                <a16:creationId xmlns:a16="http://schemas.microsoft.com/office/drawing/2014/main" id="{44B3FCDA-4EC5-B19D-5009-23CEC9F74198}"/>
+              </a:ext>
+            </a:extLst>
+          </p:cNvPr>
+          <p:cNvSpPr txBox="1">
+            <a:spLocks noGrp="1"/>
+          </p:cNvSpPr>
+          <p:nvPr>
+            <p:ph type="title" idx="4294967295"/>
+          </p:nvPr>
+        </p:nvSpPr>
+        <p:spPr>
+          <a:xfrm>
+            <a:off x="503999" y="229261"/>
+            <a:ext cx="3346641" cy="553998"/>
+          </a:xfrm>
+        </p:spPr>
+        <p:txBody>
+          <a:bodyPr wrap="square">
+            <a:spAutoFit/>
+          </a:bodyPr>
+          <a:lstStyle/>
+          <a:p>
+            <a:pPr lvl="0"/>
+            <a:r>
+              <a:rPr lang="en-US" dirty="0">
+                <a:solidFill>
+                  <a:schemeClr val="bg1"/>
+                </a:solidFill>
+              </a:rPr>
+              <a:t>DOI 2 Results</a:t>
+            </a:r>
+          </a:p>
+        </p:txBody>
+      </p:sp>
+      <p:sp>
+        <p:nvSpPr>
+          <p:cNvPr id="3" name="Text Placeholder 2">
+            <a:extLst>
+              <a:ext uri="{FF2B5EF4-FFF2-40B4-BE49-F238E27FC236}">
+                <a16:creationId xmlns:a16="http://schemas.microsoft.com/office/drawing/2014/main" id="{3F589F92-B484-4E15-0CDC-FFD075A2A74E}"/>
+              </a:ext>
+            </a:extLst>
+          </p:cNvPr>
+          <p:cNvSpPr txBox="1">
+            <a:spLocks noGrp="1"/>
+          </p:cNvSpPr>
+          <p:nvPr>
+            <p:ph type="body" idx="4294967295"/>
+          </p:nvPr>
+        </p:nvSpPr>
+        <p:spPr>
+          <a:xfrm>
+            <a:off x="503999" y="976300"/>
+            <a:ext cx="3346641" cy="4271950"/>
+          </a:xfrm>
+        </p:spPr>
+        <p:txBody>
+          <a:bodyPr>
+            <a:normAutofit lnSpcReduction="10000"/>
+          </a:bodyPr>
+          <a:lstStyle/>
+          <a:p>
+            <a:pPr marL="342900" indent="-342900"/>
+            <a:r>
+              <a:rPr lang="en-US" dirty="0">
+                <a:solidFill>
+                  <a:schemeClr val="bg1"/>
+                </a:solidFill>
+                <a:latin typeface="AppleSystemUIFont" pitchFamily="2"/>
+              </a:rPr>
+              <a:t>Degree of Interaction (DOI) 2 results in 231 test cases when only changing the values of constants known to affect the outputs of </a:t>
+            </a:r>
+            <a:r>
+              <a:rPr lang="en-US" dirty="0" err="1">
+                <a:solidFill>
+                  <a:schemeClr val="bg1"/>
+                </a:solidFill>
+                <a:latin typeface="Courier New" panose="02070309020205020404" pitchFamily="49" charset="0"/>
+                <a:cs typeface="Courier New" panose="02070309020205020404" pitchFamily="49" charset="0"/>
+              </a:rPr>
+              <a:t>LakeTemperature</a:t>
+            </a:r>
+            <a:r>
+              <a:rPr lang="en-US" dirty="0">
+                <a:solidFill>
+                  <a:schemeClr val="bg1"/>
+                </a:solidFill>
+                <a:latin typeface="AppleSystemUIFont" pitchFamily="2"/>
+              </a:rPr>
+              <a:t>.</a:t>
+            </a:r>
+          </a:p>
+          <a:p>
+            <a:pPr marL="342900" indent="-342900"/>
+            <a:r>
+              <a:rPr lang="en-US" dirty="0">
+                <a:solidFill>
+                  <a:schemeClr val="bg1"/>
+                </a:solidFill>
+                <a:latin typeface="AppleSystemUIFont" pitchFamily="2"/>
+              </a:rPr>
+              <a:t>33 runs exited with an error because they used values outside of the valid ranges for some model constants.</a:t>
+            </a:r>
+          </a:p>
+        </p:txBody>
+      </p:sp>
+      <p:pic>
+        <p:nvPicPr>
+          <p:cNvPr id="5" name="Picture 4">
+            <a:extLst>
+              <a:ext uri="{FF2B5EF4-FFF2-40B4-BE49-F238E27FC236}">
+                <a16:creationId xmlns:a16="http://schemas.microsoft.com/office/drawing/2014/main" id="{15C94A79-243F-8D40-B5DA-BED8A49E8184}"/>
+              </a:ext>
+            </a:extLst>
+          </p:cNvPr>
+          <p:cNvPicPr>
+            <a:picLocks noChangeAspect="1"/>
+          </p:cNvPicPr>
+          <p:nvPr/>
+        </p:nvPicPr>
+        <p:blipFill>
+          <a:blip r:embed="rId4"/>
+          <a:stretch>
+            <a:fillRect/>
+          </a:stretch>
+        </p:blipFill>
+        <p:spPr>
+          <a:xfrm>
+            <a:off x="4114644" y="0"/>
+            <a:ext cx="6037257" cy="5670550"/>
+          </a:xfrm>
+          <a:prstGeom prst="rect">
+            <a:avLst/>
+          </a:prstGeom>
+        </p:spPr>
+      </p:pic>
+    </p:spTree>
+  </p:cSld>
+  <p:clrMapOvr>
+    <a:masterClrMapping/>
+  </p:clrMapOvr>
+  <p:extLst>
+    <p:ext uri="{6950BFC3-D8DA-4A85-94F7-54DA5524770B}">
+      <p188:commentRel xmlns:p188="http://schemas.microsoft.com/office/powerpoint/2018/8/main" r:id="rId3"/>
+    </p:ext>
+  </p:extLst>
+</p:sld>
+</file>
+
+<file path=ppt/slides/slide41.xml><?xml version="1.0" encoding="utf-8"?>
 <p:sld xmlns:a="http://schemas.openxmlformats.org/drawingml/2006/main" xmlns:r="http://schemas.openxmlformats.org/officeDocument/2006/relationships" xmlns:p="http://schemas.openxmlformats.org/presentationml/2006/main">
   <p:cSld>
     <p:spTree>
@@ -19497,7 +20546,7 @@
 </p:sld>
 </file>
 
-<file path=ppt/slides/slide41.xml><?xml version="1.0" encoding="utf-8"?>
+<file path=ppt/slides/slide42.xml><?xml version="1.0" encoding="utf-8"?>
 <p:sld xmlns:a="http://schemas.openxmlformats.org/drawingml/2006/main" xmlns:r="http://schemas.openxmlformats.org/officeDocument/2006/relationships" xmlns:p="http://schemas.openxmlformats.org/presentationml/2006/main">
   <p:cSld>
     <p:spTree>
@@ -19934,7 +20983,7 @@
 </p:sld>
 </file>
 
-<file path=ppt/slides/slide42.xml><?xml version="1.0" encoding="utf-8"?>
+<file path=ppt/slides/slide43.xml><?xml version="1.0" encoding="utf-8"?>
 <p:sld xmlns:a="http://schemas.openxmlformats.org/drawingml/2006/main" xmlns:r="http://schemas.openxmlformats.org/officeDocument/2006/relationships" xmlns:p="http://schemas.openxmlformats.org/presentationml/2006/main">
   <p:cSld name="page10">
     <p:spTree>
@@ -20074,7 +21123,7 @@
 </p:sld>
 </file>
 
-<file path=ppt/slides/slide43.xml><?xml version="1.0" encoding="utf-8"?>
+<file path=ppt/slides/slide44.xml><?xml version="1.0" encoding="utf-8"?>
 <p:sld xmlns:a="http://schemas.openxmlformats.org/drawingml/2006/main" xmlns:r="http://schemas.openxmlformats.org/officeDocument/2006/relationships" xmlns:p="http://schemas.openxmlformats.org/presentationml/2006/main">
   <p:cSld>
     <p:spTree>
@@ -21166,7 +22215,7 @@
                   <a:schemeClr val="bg1"/>
                 </a:solidFill>
               </a:rPr>
-              <a:t>The results are still valid and useful given the default values provided by domain scientists. </a:t>
+              <a:t>The results are still valid and useful specifically when the constants are using the default values provided by the domain scientists. </a:t>
             </a:r>
           </a:p>
         </p:txBody>
